--- a/docs/KOI_Content_Pack_Test_Guide.pptx
+++ b/docs/KOI_Content_Pack_Test_Guide.pptx
@@ -7211,7 +7211,7 @@
                 <a:ea typeface="Calibri" pitchFamily="34" charset="-122"/>
                 <a:cs typeface="Calibri" pitchFamily="34" charset="-120"/>
               </a:rPr>
-              <a:t>Known cosmetic issue: a few item-investigation fields render with array brackets — ["high"] rather than high — because XSOAR resolves arrays differently inside a sub-playbook. The values are correct and the analyst-facing triage summary renders clean.</a:t>
+              <a:t>Known cosmetic issue: a few item-investigation fields render with array brackets — ["high"] rather than high — because the platform resolves arrays differently inside a sub-playbook. The values are correct and the analyst-facing triage summary renders clean.</a:t>
             </a:r>
             <a:endParaRPr lang="en-US" sz="1050" dirty="0"/>
           </a:p>
@@ -13925,7 +13925,7 @@
                 <a:ea typeface="Calibri" pitchFamily="34" charset="-122"/>
                 <a:cs typeface="Calibri" pitchFamily="34" charset="-120"/>
               </a:rPr>
-              <a:t>Cortex XSIAM or XSOAR with Cortex agents installed</a:t>
+              <a:t>A Cortex XSIAM tenant with Cortex agents installed</a:t>
             </a:r>
             <a:endParaRPr lang="en-US" sz="1150" dirty="0"/>
           </a:p>
@@ -15457,7 +15457,7 @@
                 <a:ea typeface="Calibri" pitchFamily="34" charset="-122"/>
                 <a:cs typeface="Calibri" pitchFamily="34" charset="-120"/>
               </a:rPr>
-              <a:t>The pre-built zip is an XSOAR-marketplace build: inside it the collector flag is isfetchevents: false, and it ships no parsing or modeling rules. Upload it to XSIAM and the commands work, but koi_koi_raw stays empty forever. Event collection needs the Marketplace or a demisto-sdk --xsiam upload.</a:t>
+              <a:t>The pre-built zip was built for a different marketplace target: inside it the collector flag is isfetchevents: false, and it ships no parsing or modeling rules. Upload it to XSIAM and the commands work, but koi_koi_raw stays empty forever. Event collection needs the Marketplace or a demisto-sdk --xsiam upload.</a:t>
             </a:r>
             <a:endParaRPr lang="en-US" sz="1050" dirty="0"/>
           </a:p>
@@ -19216,7 +19216,7 @@
                 <a:ea typeface="Calibri" pitchFamily="34" charset="-122"/>
                 <a:cs typeface="Calibri" pitchFamily="34" charset="-120"/>
               </a:rPr>
-              <a:t>The List name is fixed in the playbook task — XSOAR cannot parameterise ${lists.&lt;name&gt;}. To use another name you must edit the task.</a:t>
+              <a:t>The List name is fixed in the playbook task — the platform cannot parameterise ${lists.&lt;name&gt;}. To use another name you must edit the task.</a:t>
             </a:r>
             <a:endParaRPr lang="en-US" sz="1050" dirty="0"/>
           </a:p>

--- a/docs/KOI_Content_Pack_Test_Guide.pptx
+++ b/docs/KOI_Content_Pack_Test_Guide.pptx
@@ -14623,7 +14623,7 @@
                 <a:ea typeface="Calibri" pitchFamily="34" charset="-122"/>
                 <a:cs typeface="Calibri" pitchFamily="34" charset="-120"/>
               </a:rPr>
-              <a:t>Marketplace</a:t>
+              <a:t>demisto-sdk --xsiam</a:t>
             </a:r>
             <a:endParaRPr lang="en-US" sz="1150" dirty="0"/>
           </a:p>
@@ -14665,7 +14665,7 @@
                 <a:ea typeface="Calibri" pitchFamily="34" charset="-122"/>
                 <a:cs typeface="Calibri" pitchFamily="34" charset="-120"/>
               </a:rPr>
-              <a:t>Integration, rules, dashboard and playbooks</a:t>
+              <a:t>Everything, at the version you were sent</a:t>
             </a:r>
             <a:endParaRPr lang="en-US" sz="1050" dirty="0"/>
           </a:p>
@@ -14746,7 +14746,7 @@
                 <a:ea typeface="Calibri" pitchFamily="34" charset="-122"/>
                 <a:cs typeface="Calibri" pitchFamily="34" charset="-120"/>
               </a:rPr>
-              <a:t>Production tenants</a:t>
+              <a:t>The normal path</a:t>
             </a:r>
             <a:endParaRPr lang="en-US" sz="1050" dirty="0"/>
           </a:p>
@@ -14761,6 +14761,198 @@
         <p:spPr>
           <a:xfrm>
             <a:off x="548640" y="2514600"/>
+            <a:ext cx="11064240" cy="603504"/>
+          </a:xfrm>
+          <a:prstGeom prst="roundRect">
+            <a:avLst>
+              <a:gd name="adj" fmla="val 7576"/>
+            </a:avLst>
+          </a:prstGeom>
+          <a:solidFill>
+            <a:srgbClr val="1C2026"/>
+          </a:solidFill>
+          <a:ln w="12700">
+            <a:solidFill>
+              <a:srgbClr val="1C2026"/>
+            </a:solidFill>
+            <a:prstDash val="solid"/>
+          </a:ln>
+        </p:spPr>
+      </p:sp>
+      <p:sp>
+        <p:nvSpPr>
+          <p:cNvPr id="14" name="Text 12"/>
+          <p:cNvSpPr/>
+          <p:nvPr/>
+        </p:nvSpPr>
+        <p:spPr>
+          <a:xfrm>
+            <a:off x="822960" y="2688336"/>
+            <a:ext cx="2468880" cy="457200"/>
+          </a:xfrm>
+          <a:prstGeom prst="rect">
+            <a:avLst/>
+          </a:prstGeom>
+          <a:noFill/>
+          <a:ln/>
+        </p:spPr>
+        <p:txBody>
+          <a:bodyPr wrap="square" lIns="0" tIns="0" rIns="0" bIns="0" rtlCol="0" anchor="t"/>
+          <a:lstStyle/>
+          <a:p>
+            <a:pPr indent="0" marL="0">
+              <a:lnSpc>
+                <a:spcPts val="1300"/>
+              </a:lnSpc>
+              <a:buNone/>
+            </a:pPr>
+            <a:r>
+              <a:rPr lang="en-US" sz="1150" b="1" dirty="0">
+                <a:solidFill>
+                  <a:srgbClr val="F5A524"/>
+                </a:solidFill>
+                <a:latin typeface="Calibri" pitchFamily="34" charset="0"/>
+                <a:ea typeface="Calibri" pitchFamily="34" charset="-122"/>
+                <a:cs typeface="Calibri" pitchFamily="34" charset="-120"/>
+              </a:rPr>
+              <a:t>Pre-built dist/Koi.zip</a:t>
+            </a:r>
+            <a:endParaRPr lang="en-US" sz="1150" dirty="0"/>
+          </a:p>
+        </p:txBody>
+      </p:sp>
+      <p:sp>
+        <p:nvSpPr>
+          <p:cNvPr id="15" name="Text 13"/>
+          <p:cNvSpPr/>
+          <p:nvPr/>
+        </p:nvSpPr>
+        <p:spPr>
+          <a:xfrm>
+            <a:off x="3474720" y="2688336"/>
+            <a:ext cx="4023360" cy="457200"/>
+          </a:xfrm>
+          <a:prstGeom prst="rect">
+            <a:avLst/>
+          </a:prstGeom>
+          <a:noFill/>
+          <a:ln/>
+        </p:spPr>
+        <p:txBody>
+          <a:bodyPr wrap="square" lIns="0" tIns="0" rIns="0" bIns="0" rtlCol="0" anchor="t"/>
+          <a:lstStyle/>
+          <a:p>
+            <a:pPr indent="0" marL="0">
+              <a:lnSpc>
+                <a:spcPts val="1300"/>
+              </a:lnSpc>
+              <a:buNone/>
+            </a:pPr>
+            <a:r>
+              <a:rPr lang="en-US" sz="1050" dirty="0">
+                <a:solidFill>
+                  <a:srgbClr val="B4B7BD"/>
+                </a:solidFill>
+                <a:latin typeface="Calibri" pitchFamily="34" charset="0"/>
+                <a:ea typeface="Calibri" pitchFamily="34" charset="-122"/>
+                <a:cs typeface="Calibri" pitchFamily="34" charset="-120"/>
+              </a:rPr>
+              <a:t>Integration + 3 playbooks only. No rules, no dashboard</a:t>
+            </a:r>
+            <a:endParaRPr lang="en-US" sz="1050" dirty="0"/>
+          </a:p>
+        </p:txBody>
+      </p:sp>
+      <p:sp>
+        <p:nvSpPr>
+          <p:cNvPr id="16" name="Text 14"/>
+          <p:cNvSpPr/>
+          <p:nvPr/>
+        </p:nvSpPr>
+        <p:spPr>
+          <a:xfrm>
+            <a:off x="7772400" y="2688336"/>
+            <a:ext cx="1005840" cy="274320"/>
+          </a:xfrm>
+          <a:prstGeom prst="rect">
+            <a:avLst/>
+          </a:prstGeom>
+          <a:noFill/>
+          <a:ln/>
+        </p:spPr>
+        <p:txBody>
+          <a:bodyPr wrap="square" lIns="0" tIns="0" rIns="0" bIns="0" rtlCol="0" anchor="t"/>
+          <a:lstStyle/>
+          <a:p>
+            <a:pPr indent="0" marL="0">
+              <a:buNone/>
+            </a:pPr>
+            <a:r>
+              <a:rPr lang="en-US" sz="1150" b="1" dirty="0">
+                <a:solidFill>
+                  <a:srgbClr val="F04438"/>
+                </a:solidFill>
+                <a:latin typeface="Calibri" pitchFamily="34" charset="0"/>
+                <a:ea typeface="Calibri" pitchFamily="34" charset="-122"/>
+                <a:cs typeface="Calibri" pitchFamily="34" charset="-120"/>
+              </a:rPr>
+              <a:t>✗ no</a:t>
+            </a:r>
+            <a:endParaRPr lang="en-US" sz="1150" dirty="0"/>
+          </a:p>
+        </p:txBody>
+      </p:sp>
+      <p:sp>
+        <p:nvSpPr>
+          <p:cNvPr id="17" name="Text 15"/>
+          <p:cNvSpPr/>
+          <p:nvPr/>
+        </p:nvSpPr>
+        <p:spPr>
+          <a:xfrm>
+            <a:off x="8869680" y="2688336"/>
+            <a:ext cx="2468880" cy="457200"/>
+          </a:xfrm>
+          <a:prstGeom prst="rect">
+            <a:avLst/>
+          </a:prstGeom>
+          <a:noFill/>
+          <a:ln/>
+        </p:spPr>
+        <p:txBody>
+          <a:bodyPr wrap="square" lIns="0" tIns="0" rIns="0" bIns="0" rtlCol="0" anchor="t"/>
+          <a:lstStyle/>
+          <a:p>
+            <a:pPr indent="0" marL="0">
+              <a:lnSpc>
+                <a:spcPts val="1300"/>
+              </a:lnSpc>
+              <a:buNone/>
+            </a:pPr>
+            <a:r>
+              <a:rPr lang="en-US" sz="1050" dirty="0">
+                <a:solidFill>
+                  <a:srgbClr val="B4B7BD"/>
+                </a:solidFill>
+                <a:latin typeface="Calibri" pitchFamily="34" charset="0"/>
+                <a:ea typeface="Calibri" pitchFamily="34" charset="-122"/>
+                <a:cs typeface="Calibri" pitchFamily="34" charset="-120"/>
+              </a:rPr>
+              <a:t>Not for XSIAM</a:t>
+            </a:r>
+            <a:endParaRPr lang="en-US" sz="1050" dirty="0"/>
+          </a:p>
+        </p:txBody>
+      </p:sp>
+      <p:sp>
+        <p:nvSpPr>
+          <p:cNvPr id="18" name="Shape 16"/>
+          <p:cNvSpPr/>
+          <p:nvPr/>
+        </p:nvSpPr>
+        <p:spPr>
+          <a:xfrm>
+            <a:off x="548640" y="3255264"/>
             <a:ext cx="11064240" cy="603504"/>
           </a:xfrm>
           <a:prstGeom prst="roundRect">
@@ -14781,13 +14973,13 @@
       </p:sp>
       <p:sp>
         <p:nvSpPr>
-          <p:cNvPr id="14" name="Text 12"/>
-          <p:cNvSpPr/>
-          <p:nvPr/>
-        </p:nvSpPr>
-        <p:spPr>
-          <a:xfrm>
-            <a:off x="822960" y="2688336"/>
+          <p:cNvPr id="19" name="Text 17"/>
+          <p:cNvSpPr/>
+          <p:nvPr/>
+        </p:nvSpPr>
+        <p:spPr>
+          <a:xfrm>
+            <a:off x="822960" y="3429000"/>
             <a:ext cx="2468880" cy="457200"/>
           </a:xfrm>
           <a:prstGeom prst="rect">
@@ -14815,7 +15007,7 @@
                 <a:ea typeface="Calibri" pitchFamily="34" charset="-122"/>
                 <a:cs typeface="Calibri" pitchFamily="34" charset="-120"/>
               </a:rPr>
-              <a:t>demisto-sdk --xsiam</a:t>
+              <a:t>Manual per-item</a:t>
             </a:r>
             <a:endParaRPr lang="en-US" sz="1150" dirty="0"/>
           </a:p>
@@ -14823,13 +15015,13 @@
       </p:sp>
       <p:sp>
         <p:nvSpPr>
-          <p:cNvPr id="15" name="Text 13"/>
-          <p:cNvSpPr/>
-          <p:nvPr/>
-        </p:nvSpPr>
-        <p:spPr>
-          <a:xfrm>
-            <a:off x="3474720" y="2688336"/>
+          <p:cNvPr id="20" name="Text 18"/>
+          <p:cNvSpPr/>
+          <p:nvPr/>
+        </p:nvSpPr>
+        <p:spPr>
+          <a:xfrm>
+            <a:off x="3474720" y="3429000"/>
             <a:ext cx="4023360" cy="457200"/>
           </a:xfrm>
           <a:prstGeom prst="rect">
@@ -14857,7 +15049,7 @@
                 <a:ea typeface="Calibri" pitchFamily="34" charset="-122"/>
                 <a:cs typeface="Calibri" pitchFamily="34" charset="-120"/>
               </a:rPr>
-              <a:t>Everything, at the version in your repo</a:t>
+              <a:t>Only the items you import yourself</a:t>
             </a:r>
             <a:endParaRPr lang="en-US" sz="1050" dirty="0"/>
           </a:p>
@@ -14865,13 +15057,13 @@
       </p:sp>
       <p:sp>
         <p:nvSpPr>
-          <p:cNvPr id="16" name="Text 14"/>
-          <p:cNvSpPr/>
-          <p:nvPr/>
-        </p:nvSpPr>
-        <p:spPr>
-          <a:xfrm>
-            <a:off x="7772400" y="2688336"/>
+          <p:cNvPr id="21" name="Text 19"/>
+          <p:cNvSpPr/>
+          <p:nvPr/>
+        </p:nvSpPr>
+        <p:spPr>
+          <a:xfrm>
+            <a:off x="7772400" y="3429000"/>
             <a:ext cx="1005840" cy="274320"/>
           </a:xfrm>
           <a:prstGeom prst="rect">
@@ -14890,13 +15082,13 @@
             <a:r>
               <a:rPr lang="en-US" sz="1150" b="1" dirty="0">
                 <a:solidFill>
-                  <a:srgbClr val="3FB950"/>
-                </a:solidFill>
-                <a:latin typeface="Calibri" pitchFamily="34" charset="0"/>
-                <a:ea typeface="Calibri" pitchFamily="34" charset="-122"/>
-                <a:cs typeface="Calibri" pitchFamily="34" charset="-120"/>
-              </a:rPr>
-              <a:t>✓ yes</a:t>
+                  <a:srgbClr val="F04438"/>
+                </a:solidFill>
+                <a:latin typeface="Calibri" pitchFamily="34" charset="0"/>
+                <a:ea typeface="Calibri" pitchFamily="34" charset="-122"/>
+                <a:cs typeface="Calibri" pitchFamily="34" charset="-120"/>
+              </a:rPr>
+              <a:t>✗ no</a:t>
             </a:r>
             <a:endParaRPr lang="en-US" sz="1150" dirty="0"/>
           </a:p>
@@ -14904,13 +15096,13 @@
       </p:sp>
       <p:sp>
         <p:nvSpPr>
-          <p:cNvPr id="17" name="Text 15"/>
-          <p:cNvSpPr/>
-          <p:nvPr/>
-        </p:nvSpPr>
-        <p:spPr>
-          <a:xfrm>
-            <a:off x="8869680" y="2688336"/>
+          <p:cNvPr id="22" name="Text 20"/>
+          <p:cNvSpPr/>
+          <p:nvPr/>
+        </p:nvSpPr>
+        <p:spPr>
+          <a:xfrm>
+            <a:off x="8869680" y="3429000"/>
             <a:ext cx="2468880" cy="457200"/>
           </a:xfrm>
           <a:prstGeom prst="rect">
@@ -14938,7 +15130,7 @@
                 <a:ea typeface="Calibri" pitchFamily="34" charset="-122"/>
                 <a:cs typeface="Calibri" pitchFamily="34" charset="-120"/>
               </a:rPr>
-              <a:t>Dev/test and CI</a:t>
+              <a:t>Partial adoption</a:t>
             </a:r>
             <a:endParaRPr lang="en-US" sz="1050" dirty="0"/>
           </a:p>
@@ -14946,18 +15138,18 @@
       </p:sp>
       <p:sp>
         <p:nvSpPr>
-          <p:cNvPr id="18" name="Shape 16"/>
-          <p:cNvSpPr/>
-          <p:nvPr/>
-        </p:nvSpPr>
-        <p:spPr>
-          <a:xfrm>
-            <a:off x="548640" y="3255264"/>
-            <a:ext cx="11064240" cy="603504"/>
+          <p:cNvPr id="23" name="Shape 21"/>
+          <p:cNvSpPr/>
+          <p:nvPr/>
+        </p:nvSpPr>
+        <p:spPr>
+          <a:xfrm>
+            <a:off x="548640" y="4197096"/>
+            <a:ext cx="11064240" cy="896112"/>
           </a:xfrm>
           <a:prstGeom prst="roundRect">
             <a:avLst>
-              <a:gd name="adj" fmla="val 7576"/>
+              <a:gd name="adj" fmla="val 5102"/>
             </a:avLst>
           </a:prstGeom>
           <a:solidFill>
@@ -14973,397 +15165,13 @@
       </p:sp>
       <p:sp>
         <p:nvSpPr>
-          <p:cNvPr id="19" name="Text 17"/>
-          <p:cNvSpPr/>
-          <p:nvPr/>
-        </p:nvSpPr>
-        <p:spPr>
-          <a:xfrm>
-            <a:off x="822960" y="3429000"/>
-            <a:ext cx="2468880" cy="457200"/>
-          </a:xfrm>
-          <a:prstGeom prst="rect">
-            <a:avLst/>
-          </a:prstGeom>
-          <a:noFill/>
-          <a:ln/>
-        </p:spPr>
-        <p:txBody>
-          <a:bodyPr wrap="square" lIns="0" tIns="0" rIns="0" bIns="0" rtlCol="0" anchor="t"/>
-          <a:lstStyle/>
-          <a:p>
-            <a:pPr indent="0" marL="0">
-              <a:lnSpc>
-                <a:spcPts val="1300"/>
-              </a:lnSpc>
-              <a:buNone/>
-            </a:pPr>
-            <a:r>
-              <a:rPr lang="en-US" sz="1150" b="1" dirty="0">
-                <a:solidFill>
-                  <a:srgbClr val="F5A524"/>
-                </a:solidFill>
-                <a:latin typeface="Calibri" pitchFamily="34" charset="0"/>
-                <a:ea typeface="Calibri" pitchFamily="34" charset="-122"/>
-                <a:cs typeface="Calibri" pitchFamily="34" charset="-120"/>
-              </a:rPr>
-              <a:t>Pre-built dist/Koi.zip</a:t>
-            </a:r>
-            <a:endParaRPr lang="en-US" sz="1150" dirty="0"/>
-          </a:p>
-        </p:txBody>
-      </p:sp>
-      <p:sp>
-        <p:nvSpPr>
-          <p:cNvPr id="20" name="Text 18"/>
-          <p:cNvSpPr/>
-          <p:nvPr/>
-        </p:nvSpPr>
-        <p:spPr>
-          <a:xfrm>
-            <a:off x="3474720" y="3429000"/>
-            <a:ext cx="4023360" cy="457200"/>
-          </a:xfrm>
-          <a:prstGeom prst="rect">
-            <a:avLst/>
-          </a:prstGeom>
-          <a:noFill/>
-          <a:ln/>
-        </p:spPr>
-        <p:txBody>
-          <a:bodyPr wrap="square" lIns="0" tIns="0" rIns="0" bIns="0" rtlCol="0" anchor="t"/>
-          <a:lstStyle/>
-          <a:p>
-            <a:pPr indent="0" marL="0">
-              <a:lnSpc>
-                <a:spcPts val="1300"/>
-              </a:lnSpc>
-              <a:buNone/>
-            </a:pPr>
-            <a:r>
-              <a:rPr lang="en-US" sz="1050" dirty="0">
-                <a:solidFill>
-                  <a:srgbClr val="B4B7BD"/>
-                </a:solidFill>
-                <a:latin typeface="Calibri" pitchFamily="34" charset="0"/>
-                <a:ea typeface="Calibri" pitchFamily="34" charset="-122"/>
-                <a:cs typeface="Calibri" pitchFamily="34" charset="-120"/>
-              </a:rPr>
-              <a:t>Integration + 3 playbooks only. No rules, no dashboard</a:t>
-            </a:r>
-            <a:endParaRPr lang="en-US" sz="1050" dirty="0"/>
-          </a:p>
-        </p:txBody>
-      </p:sp>
-      <p:sp>
-        <p:nvSpPr>
-          <p:cNvPr id="21" name="Text 19"/>
-          <p:cNvSpPr/>
-          <p:nvPr/>
-        </p:nvSpPr>
-        <p:spPr>
-          <a:xfrm>
-            <a:off x="7772400" y="3429000"/>
-            <a:ext cx="1005840" cy="274320"/>
-          </a:xfrm>
-          <a:prstGeom prst="rect">
-            <a:avLst/>
-          </a:prstGeom>
-          <a:noFill/>
-          <a:ln/>
-        </p:spPr>
-        <p:txBody>
-          <a:bodyPr wrap="square" lIns="0" tIns="0" rIns="0" bIns="0" rtlCol="0" anchor="t"/>
-          <a:lstStyle/>
-          <a:p>
-            <a:pPr indent="0" marL="0">
-              <a:buNone/>
-            </a:pPr>
-            <a:r>
-              <a:rPr lang="en-US" sz="1150" b="1" dirty="0">
-                <a:solidFill>
-                  <a:srgbClr val="F04438"/>
-                </a:solidFill>
-                <a:latin typeface="Calibri" pitchFamily="34" charset="0"/>
-                <a:ea typeface="Calibri" pitchFamily="34" charset="-122"/>
-                <a:cs typeface="Calibri" pitchFamily="34" charset="-120"/>
-              </a:rPr>
-              <a:t>✗ no</a:t>
-            </a:r>
-            <a:endParaRPr lang="en-US" sz="1150" dirty="0"/>
-          </a:p>
-        </p:txBody>
-      </p:sp>
-      <p:sp>
-        <p:nvSpPr>
-          <p:cNvPr id="22" name="Text 20"/>
-          <p:cNvSpPr/>
-          <p:nvPr/>
-        </p:nvSpPr>
-        <p:spPr>
-          <a:xfrm>
-            <a:off x="8869680" y="3429000"/>
-            <a:ext cx="2468880" cy="457200"/>
-          </a:xfrm>
-          <a:prstGeom prst="rect">
-            <a:avLst/>
-          </a:prstGeom>
-          <a:noFill/>
-          <a:ln/>
-        </p:spPr>
-        <p:txBody>
-          <a:bodyPr wrap="square" lIns="0" tIns="0" rIns="0" bIns="0" rtlCol="0" anchor="t"/>
-          <a:lstStyle/>
-          <a:p>
-            <a:pPr indent="0" marL="0">
-              <a:lnSpc>
-                <a:spcPts val="1300"/>
-              </a:lnSpc>
-              <a:buNone/>
-            </a:pPr>
-            <a:r>
-              <a:rPr lang="en-US" sz="1050" dirty="0">
-                <a:solidFill>
-                  <a:srgbClr val="B4B7BD"/>
-                </a:solidFill>
-                <a:latin typeface="Calibri" pitchFamily="34" charset="0"/>
-                <a:ea typeface="Calibri" pitchFamily="34" charset="-122"/>
-                <a:cs typeface="Calibri" pitchFamily="34" charset="-120"/>
-              </a:rPr>
-              <a:t>Not for XSIAM</a:t>
-            </a:r>
-            <a:endParaRPr lang="en-US" sz="1050" dirty="0"/>
-          </a:p>
-        </p:txBody>
-      </p:sp>
-      <p:sp>
-        <p:nvSpPr>
-          <p:cNvPr id="23" name="Shape 21"/>
-          <p:cNvSpPr/>
-          <p:nvPr/>
-        </p:nvSpPr>
-        <p:spPr>
-          <a:xfrm>
-            <a:off x="548640" y="3995928"/>
-            <a:ext cx="11064240" cy="603504"/>
-          </a:xfrm>
-          <a:prstGeom prst="roundRect">
-            <a:avLst>
-              <a:gd name="adj" fmla="val 7576"/>
-            </a:avLst>
-          </a:prstGeom>
-          <a:solidFill>
-            <a:srgbClr val="15171B"/>
-          </a:solidFill>
-          <a:ln w="12700">
-            <a:solidFill>
-              <a:srgbClr val="15171B"/>
-            </a:solidFill>
-            <a:prstDash val="solid"/>
-          </a:ln>
-        </p:spPr>
-      </p:sp>
-      <p:sp>
-        <p:nvSpPr>
-          <p:cNvPr id="24" name="Text 22"/>
-          <p:cNvSpPr/>
-          <p:nvPr/>
-        </p:nvSpPr>
-        <p:spPr>
-          <a:xfrm>
-            <a:off x="822960" y="4169664"/>
-            <a:ext cx="2468880" cy="457200"/>
-          </a:xfrm>
-          <a:prstGeom prst="rect">
-            <a:avLst/>
-          </a:prstGeom>
-          <a:noFill/>
-          <a:ln/>
-        </p:spPr>
-        <p:txBody>
-          <a:bodyPr wrap="square" lIns="0" tIns="0" rIns="0" bIns="0" rtlCol="0" anchor="t"/>
-          <a:lstStyle/>
-          <a:p>
-            <a:pPr indent="0" marL="0">
-              <a:lnSpc>
-                <a:spcPts val="1300"/>
-              </a:lnSpc>
-              <a:buNone/>
-            </a:pPr>
-            <a:r>
-              <a:rPr lang="en-US" sz="1150" b="1" dirty="0">
-                <a:solidFill>
-                  <a:srgbClr val="FFFFFF"/>
-                </a:solidFill>
-                <a:latin typeface="Calibri" pitchFamily="34" charset="0"/>
-                <a:ea typeface="Calibri" pitchFamily="34" charset="-122"/>
-                <a:cs typeface="Calibri" pitchFamily="34" charset="-120"/>
-              </a:rPr>
-              <a:t>Manual per-item</a:t>
-            </a:r>
-            <a:endParaRPr lang="en-US" sz="1150" dirty="0"/>
-          </a:p>
-        </p:txBody>
-      </p:sp>
-      <p:sp>
-        <p:nvSpPr>
-          <p:cNvPr id="25" name="Text 23"/>
-          <p:cNvSpPr/>
-          <p:nvPr/>
-        </p:nvSpPr>
-        <p:spPr>
-          <a:xfrm>
-            <a:off x="3474720" y="4169664"/>
-            <a:ext cx="4023360" cy="457200"/>
-          </a:xfrm>
-          <a:prstGeom prst="rect">
-            <a:avLst/>
-          </a:prstGeom>
-          <a:noFill/>
-          <a:ln/>
-        </p:spPr>
-        <p:txBody>
-          <a:bodyPr wrap="square" lIns="0" tIns="0" rIns="0" bIns="0" rtlCol="0" anchor="t"/>
-          <a:lstStyle/>
-          <a:p>
-            <a:pPr indent="0" marL="0">
-              <a:lnSpc>
-                <a:spcPts val="1300"/>
-              </a:lnSpc>
-              <a:buNone/>
-            </a:pPr>
-            <a:r>
-              <a:rPr lang="en-US" sz="1050" dirty="0">
-                <a:solidFill>
-                  <a:srgbClr val="B4B7BD"/>
-                </a:solidFill>
-                <a:latin typeface="Calibri" pitchFamily="34" charset="0"/>
-                <a:ea typeface="Calibri" pitchFamily="34" charset="-122"/>
-                <a:cs typeface="Calibri" pitchFamily="34" charset="-120"/>
-              </a:rPr>
-              <a:t>Only the items you import yourself</a:t>
-            </a:r>
-            <a:endParaRPr lang="en-US" sz="1050" dirty="0"/>
-          </a:p>
-        </p:txBody>
-      </p:sp>
-      <p:sp>
-        <p:nvSpPr>
-          <p:cNvPr id="26" name="Text 24"/>
-          <p:cNvSpPr/>
-          <p:nvPr/>
-        </p:nvSpPr>
-        <p:spPr>
-          <a:xfrm>
-            <a:off x="7772400" y="4169664"/>
-            <a:ext cx="1005840" cy="274320"/>
-          </a:xfrm>
-          <a:prstGeom prst="rect">
-            <a:avLst/>
-          </a:prstGeom>
-          <a:noFill/>
-          <a:ln/>
-        </p:spPr>
-        <p:txBody>
-          <a:bodyPr wrap="square" lIns="0" tIns="0" rIns="0" bIns="0" rtlCol="0" anchor="t"/>
-          <a:lstStyle/>
-          <a:p>
-            <a:pPr indent="0" marL="0">
-              <a:buNone/>
-            </a:pPr>
-            <a:r>
-              <a:rPr lang="en-US" sz="1150" b="1" dirty="0">
-                <a:solidFill>
-                  <a:srgbClr val="F04438"/>
-                </a:solidFill>
-                <a:latin typeface="Calibri" pitchFamily="34" charset="0"/>
-                <a:ea typeface="Calibri" pitchFamily="34" charset="-122"/>
-                <a:cs typeface="Calibri" pitchFamily="34" charset="-120"/>
-              </a:rPr>
-              <a:t>✗ no</a:t>
-            </a:r>
-            <a:endParaRPr lang="en-US" sz="1150" dirty="0"/>
-          </a:p>
-        </p:txBody>
-      </p:sp>
-      <p:sp>
-        <p:nvSpPr>
-          <p:cNvPr id="27" name="Text 25"/>
-          <p:cNvSpPr/>
-          <p:nvPr/>
-        </p:nvSpPr>
-        <p:spPr>
-          <a:xfrm>
-            <a:off x="8869680" y="4169664"/>
-            <a:ext cx="2468880" cy="457200"/>
-          </a:xfrm>
-          <a:prstGeom prst="rect">
-            <a:avLst/>
-          </a:prstGeom>
-          <a:noFill/>
-          <a:ln/>
-        </p:spPr>
-        <p:txBody>
-          <a:bodyPr wrap="square" lIns="0" tIns="0" rIns="0" bIns="0" rtlCol="0" anchor="t"/>
-          <a:lstStyle/>
-          <a:p>
-            <a:pPr indent="0" marL="0">
-              <a:lnSpc>
-                <a:spcPts val="1300"/>
-              </a:lnSpc>
-              <a:buNone/>
-            </a:pPr>
-            <a:r>
-              <a:rPr lang="en-US" sz="1050" dirty="0">
-                <a:solidFill>
-                  <a:srgbClr val="B4B7BD"/>
-                </a:solidFill>
-                <a:latin typeface="Calibri" pitchFamily="34" charset="0"/>
-                <a:ea typeface="Calibri" pitchFamily="34" charset="-122"/>
-                <a:cs typeface="Calibri" pitchFamily="34" charset="-120"/>
-              </a:rPr>
-              <a:t>Partial adoption</a:t>
-            </a:r>
-            <a:endParaRPr lang="en-US" sz="1050" dirty="0"/>
-          </a:p>
-        </p:txBody>
-      </p:sp>
-      <p:sp>
-        <p:nvSpPr>
-          <p:cNvPr id="28" name="Shape 26"/>
-          <p:cNvSpPr/>
-          <p:nvPr/>
-        </p:nvSpPr>
-        <p:spPr>
-          <a:xfrm>
-            <a:off x="548640" y="4828032"/>
-            <a:ext cx="11064240" cy="896112"/>
-          </a:xfrm>
-          <a:prstGeom prst="roundRect">
-            <a:avLst>
-              <a:gd name="adj" fmla="val 5102"/>
-            </a:avLst>
-          </a:prstGeom>
-          <a:solidFill>
-            <a:srgbClr val="1C2026"/>
-          </a:solidFill>
-          <a:ln w="12700">
-            <a:solidFill>
-              <a:srgbClr val="1C2026"/>
-            </a:solidFill>
-            <a:prstDash val="solid"/>
-          </a:ln>
-        </p:spPr>
-      </p:sp>
-      <p:sp>
-        <p:nvSpPr>
-          <p:cNvPr id="29" name="Shape 27"/>
-          <p:cNvSpPr/>
-          <p:nvPr/>
-        </p:nvSpPr>
-        <p:spPr>
-          <a:xfrm>
-            <a:off x="804672" y="5102352"/>
+          <p:cNvPr id="24" name="Shape 22"/>
+          <p:cNvSpPr/>
+          <p:nvPr/>
+        </p:nvSpPr>
+        <p:spPr>
+          <a:xfrm>
+            <a:off x="804672" y="4471416"/>
             <a:ext cx="310896" cy="310896"/>
           </a:xfrm>
           <a:prstGeom prst="roundRect">
@@ -15384,13 +15192,13 @@
       </p:sp>
       <p:sp>
         <p:nvSpPr>
-          <p:cNvPr id="30" name="Text 28"/>
-          <p:cNvSpPr/>
-          <p:nvPr/>
-        </p:nvSpPr>
-        <p:spPr>
-          <a:xfrm>
-            <a:off x="804672" y="5102352"/>
+          <p:cNvPr id="25" name="Text 23"/>
+          <p:cNvSpPr/>
+          <p:nvPr/>
+        </p:nvSpPr>
+        <p:spPr>
+          <a:xfrm>
+            <a:off x="804672" y="4471416"/>
             <a:ext cx="310896" cy="310896"/>
           </a:xfrm>
           <a:prstGeom prst="rect">
@@ -15423,13 +15231,13 @@
       </p:sp>
       <p:sp>
         <p:nvSpPr>
-          <p:cNvPr id="31" name="Text 29"/>
-          <p:cNvSpPr/>
-          <p:nvPr/>
-        </p:nvSpPr>
-        <p:spPr>
-          <a:xfrm>
-            <a:off x="1298448" y="4992624"/>
+          <p:cNvPr id="26" name="Text 24"/>
+          <p:cNvSpPr/>
+          <p:nvPr/>
+        </p:nvSpPr>
+        <p:spPr>
+          <a:xfrm>
+            <a:off x="1298448" y="4361688"/>
             <a:ext cx="9966960" cy="603504"/>
           </a:xfrm>
           <a:prstGeom prst="rect">
@@ -15457,7 +15265,7 @@
                 <a:ea typeface="Calibri" pitchFamily="34" charset="-122"/>
                 <a:cs typeface="Calibri" pitchFamily="34" charset="-120"/>
               </a:rPr>
-              <a:t>The pre-built zip was built for a different marketplace target: inside it the collector flag is isfetchevents: false, and it ships no parsing or modeling rules. Upload it to XSIAM and the commands work, but koi_koi_raw stays empty forever. Event collection needs the Marketplace or a demisto-sdk --xsiam upload.</a:t>
+              <a:t>The pre-built zip was built for a different marketplace target: inside it the collector flag is isfetchevents: false, and it ships no parsing or modeling rules. Upload it to XSIAM and the commands work, but koi_koi_raw stays empty forever. Event collection needs a demisto-sdk --xsiam upload.</a:t>
             </a:r>
             <a:endParaRPr lang="en-US" sz="1050" dirty="0"/>
           </a:p>

--- a/docs/KOI_Content_Pack_Test_Guide.pptx
+++ b/docs/KOI_Content_Pack_Test_Guide.pptx
@@ -1313,7 +1313,7 @@
           <a:p>
             <a:r>
               <a:rPr lang="en-US" dirty="0"/>
-              <a:t>Three outcomes are by design: ok, skipped (valid entry, nothing to run on right now) and failed. Skipped is not a failure and deliberately sends no email.</a:t>
+              <a:t>Coverage is tracker-driven now. Refresh enumerates the group (paged past 100 via Core REST API) into the tracker; Scan takes up to 100 due, connected, right-OS endpoints, dispatches, and marks them. Groups over 100 are covered across successive Scan runs, then re-scanned every rescan_interval_hours.</a:t>
             </a:r>
             <a:endParaRPr lang="en-US" dirty="0"/>
           </a:p>
@@ -1401,7 +1401,7 @@
           <a:p>
             <a:r>
               <a:rPr lang="en-US" dirty="0"/>
-              <a:t>Almost every real-world failure is one of these six. The first is by far the most common.</a:t>
+              <a:t>Almost every real-world failure is one of these seven. The first is by far the most common; the tracker-empty row is the most common Script-Runner-specific one.</a:t>
             </a:r>
             <a:endParaRPr lang="en-US" dirty="0"/>
           </a:p>
@@ -1489,7 +1489,7 @@
           <a:p>
             <a:r>
               <a:rPr lang="en-US" dirty="0"/>
-              <a:t>Verified against the playbook YAML: the three Koi Unified playbooks invoke no KOI API command, so a script-only customer needs neither a KOI key nor an integration instance.</a:t>
+              <a:t>Verified against the playbook YAML: the five Koi Unified playbooks plus the KoiScanTracker automation invoke no KOI API command, so a script-only customer needs no KOI key or KOI instance — only the built-in Core REST API integration, which KoiScanTracker uses to page endpoint groups past 100.</a:t>
             </a:r>
             <a:endParaRPr lang="en-US" dirty="0"/>
           </a:p>
@@ -1841,7 +1841,7 @@
           <a:p>
             <a:r>
               <a:rPr lang="en-US" dirty="0"/>
-              <a:t>Import order matters because sub-playbook references bind by name — importing the parent first leaves it pointing at a playbook that does not exist yet.</a:t>
+              <a:t>Import order matters because references bind by name — import what gets called before what calls it (automation first). Two jobs now: Refresh builds the tracker, Scan runs the due endpoints. Refresh must run once before the first Scan or the tracker is empty and Scan has nothing to do.</a:t>
             </a:r>
             <a:endParaRPr lang="en-US" dirty="0"/>
           </a:p>
@@ -12019,11 +12019,11 @@
         <p:spPr>
           <a:xfrm>
             <a:off x="548640" y="1444752"/>
-            <a:ext cx="6400800" cy="2523744"/>
+            <a:ext cx="6400800" cy="3461004"/>
           </a:xfrm>
           <a:prstGeom prst="roundRect">
             <a:avLst>
-              <a:gd name="adj" fmla="val 1812"/>
+              <a:gd name="adj" fmla="val 1321"/>
             </a:avLst>
           </a:prstGeom>
           <a:solidFill>
@@ -12124,7 +12124,7 @@
         <p:spPr>
           <a:xfrm>
             <a:off x="1152144" y="2048256"/>
-            <a:ext cx="5486400" cy="246888"/>
+            <a:ext cx="5486400" cy="630936"/>
           </a:xfrm>
           <a:prstGeom prst="rect">
             <a:avLst/>
@@ -12151,7 +12151,7 @@
                 <a:ea typeface="Calibri" pitchFamily="34" charset="-122"/>
                 <a:cs typeface="Calibri" pitchFamily="34" charset="-120"/>
               </a:rPr>
-              <a:t>Confirm the prerequisites exist and match by name.</a:t>
+              <a:t>Confirm the prerequisites: Core REST API enabled, the parameterless script in Action Center, an endpoint group, and the JSON List Koi Script Runner with tracker_list set.</a:t>
             </a:r>
             <a:endParaRPr lang="en-US" sz="1150" dirty="0"/>
           </a:p>
@@ -12165,7 +12165,7 @@
         </p:nvSpPr>
         <p:spPr>
           <a:xfrm>
-            <a:off x="859536" y="2377440"/>
+            <a:off x="859536" y="2752344"/>
             <a:ext cx="219456" cy="256032"/>
           </a:xfrm>
           <a:prstGeom prst="rect">
@@ -12204,8 +12204,8 @@
         </p:nvSpPr>
         <p:spPr>
           <a:xfrm>
-            <a:off x="1152144" y="2377440"/>
-            <a:ext cx="5486400" cy="246888"/>
+            <a:off x="1152144" y="2752344"/>
+            <a:ext cx="5486400" cy="438912"/>
           </a:xfrm>
           <a:prstGeom prst="rect">
             <a:avLst/>
@@ -12232,7 +12232,7 @@
                 <a:ea typeface="Calibri" pitchFamily="34" charset="-122"/>
                 <a:cs typeface="Calibri" pitchFamily="34" charset="-120"/>
               </a:rPr>
-              <a:t>Create the JSON List named exactly:</a:t>
+              <a:t>Run the Refresh job first — Koi Unified - Refresh Tracker — Automation → Jobs → Run now.</a:t>
             </a:r>
             <a:endParaRPr lang="en-US" sz="1150" dirty="0"/>
           </a:p>
@@ -12246,7 +12246,7 @@
         </p:nvSpPr>
         <p:spPr>
           <a:xfrm>
-            <a:off x="859536" y="2706624"/>
+            <a:off x="859536" y="3268980"/>
             <a:ext cx="219456" cy="256032"/>
           </a:xfrm>
           <a:prstGeom prst="rect">
@@ -12285,7 +12285,7 @@
         </p:nvSpPr>
         <p:spPr>
           <a:xfrm>
-            <a:off x="1152144" y="2706624"/>
+            <a:off x="1152144" y="3268980"/>
             <a:ext cx="5486400" cy="246888"/>
           </a:xfrm>
           <a:prstGeom prst="rect">
@@ -12305,17 +12305,17 @@
               <a:buNone/>
             </a:pPr>
             <a:r>
-              <a:rPr lang="en-US" sz="1050" dirty="0">
-                <a:solidFill>
-                  <a:srgbClr val="22D3EE"/>
-                </a:solidFill>
-                <a:latin typeface="Courier New" pitchFamily="34" charset="0"/>
-                <a:ea typeface="Courier New" pitchFamily="34" charset="-122"/>
-                <a:cs typeface="Courier New" pitchFamily="34" charset="-120"/>
-              </a:rPr>
-              <a:t>Koi Script Runner</a:t>
-            </a:r>
-            <a:endParaRPr lang="en-US" sz="1050" dirty="0"/>
+              <a:rPr lang="en-US" sz="1150" dirty="0">
+                <a:solidFill>
+                  <a:srgbClr val="B4B7BD"/>
+                </a:solidFill>
+                <a:latin typeface="Calibri" pitchFamily="34" charset="0"/>
+                <a:ea typeface="Calibri" pitchFamily="34" charset="-122"/>
+                <a:cs typeface="Calibri" pitchFamily="34" charset="-120"/>
+              </a:rPr>
+              <a:t>Then run the Scan job — Koi Unified - Script Runner — Run now.</a:t>
+            </a:r>
+            <a:endParaRPr lang="en-US" sz="1150" dirty="0"/>
           </a:p>
         </p:txBody>
       </p:sp>
@@ -12327,7 +12327,7 @@
         </p:nvSpPr>
         <p:spPr>
           <a:xfrm>
-            <a:off x="859536" y="3035808"/>
+            <a:off x="859536" y="3598164"/>
             <a:ext cx="219456" cy="256032"/>
           </a:xfrm>
           <a:prstGeom prst="rect">
@@ -12366,7 +12366,7 @@
         </p:nvSpPr>
         <p:spPr>
           <a:xfrm>
-            <a:off x="1152144" y="3035808"/>
+            <a:off x="1152144" y="3598164"/>
             <a:ext cx="5486400" cy="246888"/>
           </a:xfrm>
           <a:prstGeom prst="rect">
@@ -12394,7 +12394,7 @@
                 <a:ea typeface="Calibri" pitchFamily="34" charset="-122"/>
                 <a:cs typeface="Calibri" pitchFamily="34" charset="-120"/>
               </a:rPr>
-              <a:t>Automation → Jobs → Run now.</a:t>
+              <a:t>Open the run, then open Action Center.</a:t>
             </a:r>
             <a:endParaRPr lang="en-US" sz="1150" dirty="0"/>
           </a:p>
@@ -12402,99 +12402,18 @@
       </p:sp>
       <p:sp>
         <p:nvSpPr>
-          <p:cNvPr id="14" name="Text 12"/>
-          <p:cNvSpPr/>
-          <p:nvPr/>
-        </p:nvSpPr>
-        <p:spPr>
-          <a:xfrm>
-            <a:off x="859536" y="3364992"/>
-            <a:ext cx="219456" cy="256032"/>
-          </a:xfrm>
-          <a:prstGeom prst="rect">
-            <a:avLst/>
-          </a:prstGeom>
-          <a:noFill/>
-          <a:ln/>
-        </p:spPr>
-        <p:txBody>
-          <a:bodyPr wrap="square" lIns="0" tIns="0" rIns="0" bIns="0" rtlCol="0" anchor="t"/>
-          <a:lstStyle/>
-          <a:p>
-            <a:pPr indent="0" marL="0">
-              <a:buNone/>
-            </a:pPr>
-            <a:r>
-              <a:rPr lang="en-US" sz="1150" b="1" dirty="0">
-                <a:solidFill>
-                  <a:srgbClr val="E8551F"/>
-                </a:solidFill>
-                <a:latin typeface="Calibri" pitchFamily="34" charset="0"/>
-                <a:ea typeface="Calibri" pitchFamily="34" charset="-122"/>
-                <a:cs typeface="Calibri" pitchFamily="34" charset="-120"/>
-              </a:rPr>
-              <a:t>5</a:t>
-            </a:r>
-            <a:endParaRPr lang="en-US" sz="1150" dirty="0"/>
-          </a:p>
-        </p:txBody>
-      </p:sp>
-      <p:sp>
-        <p:nvSpPr>
-          <p:cNvPr id="15" name="Text 13"/>
-          <p:cNvSpPr/>
-          <p:nvPr/>
-        </p:nvSpPr>
-        <p:spPr>
-          <a:xfrm>
-            <a:off x="1152144" y="3364992"/>
-            <a:ext cx="5486400" cy="246888"/>
-          </a:xfrm>
-          <a:prstGeom prst="rect">
-            <a:avLst/>
-          </a:prstGeom>
-          <a:noFill/>
-          <a:ln/>
-        </p:spPr>
-        <p:txBody>
-          <a:bodyPr wrap="square" lIns="0" tIns="0" rIns="0" bIns="0" rtlCol="0" anchor="t"/>
-          <a:lstStyle/>
-          <a:p>
-            <a:pPr indent="0" marL="0">
-              <a:lnSpc>
-                <a:spcPts val="1500"/>
-              </a:lnSpc>
-              <a:buNone/>
-            </a:pPr>
-            <a:r>
-              <a:rPr lang="en-US" sz="1150" dirty="0">
-                <a:solidFill>
-                  <a:srgbClr val="B4B7BD"/>
-                </a:solidFill>
-                <a:latin typeface="Calibri" pitchFamily="34" charset="0"/>
-                <a:ea typeface="Calibri" pitchFamily="34" charset="-122"/>
-                <a:cs typeface="Calibri" pitchFamily="34" charset="-120"/>
-              </a:rPr>
-              <a:t>Open the run, then open Action Center.</a:t>
-            </a:r>
-            <a:endParaRPr lang="en-US" sz="1150" dirty="0"/>
-          </a:p>
-        </p:txBody>
-      </p:sp>
-      <p:sp>
-        <p:nvSpPr>
-          <p:cNvPr id="16" name="Shape 14"/>
+          <p:cNvPr id="14" name="Shape 12"/>
           <p:cNvSpPr/>
           <p:nvPr/>
         </p:nvSpPr>
         <p:spPr>
           <a:xfrm>
             <a:off x="7315200" y="1444752"/>
-            <a:ext cx="4297680" cy="2523744"/>
+            <a:ext cx="4297680" cy="3461004"/>
           </a:xfrm>
           <a:prstGeom prst="roundRect">
             <a:avLst>
-              <a:gd name="adj" fmla="val 1812"/>
+              <a:gd name="adj" fmla="val 1321"/>
             </a:avLst>
           </a:prstGeom>
           <a:solidFill>
@@ -12510,7 +12429,7 @@
       </p:sp>
       <p:sp>
         <p:nvSpPr>
-          <p:cNvPr id="17" name="Text 15"/>
+          <p:cNvPr id="15" name="Text 13"/>
           <p:cNvSpPr/>
           <p:nvPr/>
         </p:nvSpPr>
@@ -12549,7 +12468,7 @@
       </p:sp>
       <p:sp>
         <p:nvSpPr>
-          <p:cNvPr id="18" name="Text 16"/>
+          <p:cNvPr id="16" name="Text 14"/>
           <p:cNvSpPr/>
           <p:nvPr/>
         </p:nvSpPr>
@@ -12588,14 +12507,14 @@
       </p:sp>
       <p:sp>
         <p:nvSpPr>
-          <p:cNvPr id="19" name="Text 17"/>
+          <p:cNvPr id="17" name="Text 15"/>
           <p:cNvSpPr/>
           <p:nvPr/>
         </p:nvSpPr>
         <p:spPr>
           <a:xfrm>
             <a:off x="7918704" y="2048256"/>
-            <a:ext cx="3383280" cy="246888"/>
+            <a:ext cx="3383280" cy="630936"/>
           </a:xfrm>
           <a:prstGeom prst="rect">
             <a:avLst/>
@@ -12622,7 +12541,7 @@
                 <a:ea typeface="Calibri" pitchFamily="34" charset="-122"/>
                 <a:cs typeface="Calibri" pitchFamily="34" charset="-120"/>
               </a:rPr>
-              <a:t>Work Plan is green.</a:t>
+              <a:t>Refresh fills the tracker List (e.g. Koi Scan Tracker - Windows) with endpoint_id,last_scan rows.</a:t>
             </a:r>
             <a:endParaRPr lang="en-US" sz="1150" dirty="0"/>
           </a:p>
@@ -12630,13 +12549,13 @@
       </p:sp>
       <p:sp>
         <p:nvSpPr>
-          <p:cNvPr id="20" name="Text 18"/>
-          <p:cNvSpPr/>
-          <p:nvPr/>
-        </p:nvSpPr>
-        <p:spPr>
-          <a:xfrm>
-            <a:off x="7626096" y="2377440"/>
+          <p:cNvPr id="18" name="Text 16"/>
+          <p:cNvSpPr/>
+          <p:nvPr/>
+        </p:nvSpPr>
+        <p:spPr>
+          <a:xfrm>
+            <a:off x="7626096" y="2752344"/>
             <a:ext cx="219456" cy="256032"/>
           </a:xfrm>
           <a:prstGeom prst="rect">
@@ -12669,14 +12588,14 @@
       </p:sp>
       <p:sp>
         <p:nvSpPr>
-          <p:cNvPr id="21" name="Text 19"/>
-          <p:cNvSpPr/>
-          <p:nvPr/>
-        </p:nvSpPr>
-        <p:spPr>
-          <a:xfrm>
-            <a:off x="7918704" y="2377440"/>
-            <a:ext cx="3383280" cy="246888"/>
+          <p:cNvPr id="19" name="Text 17"/>
+          <p:cNvSpPr/>
+          <p:nvPr/>
+        </p:nvSpPr>
+        <p:spPr>
+          <a:xfrm>
+            <a:off x="7918704" y="2752344"/>
+            <a:ext cx="3383280" cy="438912"/>
           </a:xfrm>
           <a:prstGeom prst="rect">
             <a:avLst/>
@@ -12703,7 +12622,7 @@
                 <a:ea typeface="Calibri" pitchFamily="34" charset="-122"/>
                 <a:cs typeface="Calibri" pitchFamily="34" charset="-120"/>
               </a:rPr>
-              <a:t>ScriptResult ok:true plus an action_id.</a:t>
+              <a:t>Scan: Work Plan green; ScriptResult ok:true plus an action_id.</a:t>
             </a:r>
             <a:endParaRPr lang="en-US" sz="1150" dirty="0"/>
           </a:p>
@@ -12711,13 +12630,13 @@
       </p:sp>
       <p:sp>
         <p:nvSpPr>
-          <p:cNvPr id="22" name="Text 20"/>
-          <p:cNvSpPr/>
-          <p:nvPr/>
-        </p:nvSpPr>
-        <p:spPr>
-          <a:xfrm>
-            <a:off x="7626096" y="2706624"/>
+          <p:cNvPr id="20" name="Text 18"/>
+          <p:cNvSpPr/>
+          <p:nvPr/>
+        </p:nvSpPr>
+        <p:spPr>
+          <a:xfrm>
+            <a:off x="7626096" y="3268980"/>
             <a:ext cx="219456" cy="256032"/>
           </a:xfrm>
           <a:prstGeom prst="rect">
@@ -12750,13 +12669,13 @@
       </p:sp>
       <p:sp>
         <p:nvSpPr>
-          <p:cNvPr id="23" name="Text 21"/>
-          <p:cNvSpPr/>
-          <p:nvPr/>
-        </p:nvSpPr>
-        <p:spPr>
-          <a:xfrm>
-            <a:off x="7918704" y="2706624"/>
+          <p:cNvPr id="21" name="Text 19"/>
+          <p:cNvSpPr/>
+          <p:nvPr/>
+        </p:nvSpPr>
+        <p:spPr>
+          <a:xfrm>
+            <a:off x="7918704" y="3268980"/>
             <a:ext cx="3383280" cy="438912"/>
           </a:xfrm>
           <a:prstGeom prst="rect">
@@ -12784,7 +12703,7 @@
                 <a:ea typeface="Calibri" pitchFamily="34" charset="-122"/>
                 <a:cs typeface="Calibri" pitchFamily="34" charset="-120"/>
               </a:rPr>
-              <a:t>SKIPPED info entries where no connected endpoint matches the OS scope — and no failure email.</a:t>
+              <a:t>Scanned endpoints get last_scan stamped; offline / wrong-OS / not-in-inventory rows stay due.</a:t>
             </a:r>
             <a:endParaRPr lang="en-US" sz="1150" dirty="0"/>
           </a:p>
@@ -12792,13 +12711,13 @@
       </p:sp>
       <p:sp>
         <p:nvSpPr>
-          <p:cNvPr id="24" name="Text 22"/>
-          <p:cNvSpPr/>
-          <p:nvPr/>
-        </p:nvSpPr>
-        <p:spPr>
-          <a:xfrm>
-            <a:off x="7626096" y="3223260"/>
+          <p:cNvPr id="22" name="Text 20"/>
+          <p:cNvSpPr/>
+          <p:nvPr/>
+        </p:nvSpPr>
+        <p:spPr>
+          <a:xfrm>
+            <a:off x="7626096" y="3785616"/>
             <a:ext cx="219456" cy="256032"/>
           </a:xfrm>
           <a:prstGeom prst="rect">
@@ -12831,14 +12750,14 @@
       </p:sp>
       <p:sp>
         <p:nvSpPr>
-          <p:cNvPr id="25" name="Text 23"/>
-          <p:cNvSpPr/>
-          <p:nvPr/>
-        </p:nvSpPr>
-        <p:spPr>
-          <a:xfrm>
-            <a:off x="7918704" y="3223260"/>
-            <a:ext cx="3383280" cy="246888"/>
+          <p:cNvPr id="23" name="Text 21"/>
+          <p:cNvSpPr/>
+          <p:nvPr/>
+        </p:nvSpPr>
+        <p:spPr>
+          <a:xfrm>
+            <a:off x="7918704" y="3785616"/>
+            <a:ext cx="3383280" cy="438912"/>
           </a:xfrm>
           <a:prstGeom prst="rect">
             <a:avLst/>
@@ -12865,7 +12784,7 @@
                 <a:ea typeface="Calibri" pitchFamily="34" charset="-122"/>
                 <a:cs typeface="Calibri" pitchFamily="34" charset="-120"/>
               </a:rPr>
-              <a:t>Action Center shows COMPLETED_SUCCESSFULLY.</a:t>
+              <a:t>SKIPPED info entries where no due, connected endpoint matches — and no failure email.</a:t>
             </a:r>
             <a:endParaRPr lang="en-US" sz="1150" dirty="0"/>
           </a:p>
@@ -12873,13 +12792,94 @@
       </p:sp>
       <p:sp>
         <p:nvSpPr>
+          <p:cNvPr id="24" name="Text 22"/>
+          <p:cNvSpPr/>
+          <p:nvPr/>
+        </p:nvSpPr>
+        <p:spPr>
+          <a:xfrm>
+            <a:off x="7626096" y="4302252"/>
+            <a:ext cx="219456" cy="256032"/>
+          </a:xfrm>
+          <a:prstGeom prst="rect">
+            <a:avLst/>
+          </a:prstGeom>
+          <a:noFill/>
+          <a:ln/>
+        </p:spPr>
+        <p:txBody>
+          <a:bodyPr wrap="square" lIns="0" tIns="0" rIns="0" bIns="0" rtlCol="0" anchor="t"/>
+          <a:lstStyle/>
+          <a:p>
+            <a:pPr indent="0" marL="0">
+              <a:buNone/>
+            </a:pPr>
+            <a:r>
+              <a:rPr lang="en-US" sz="1150" b="1" dirty="0">
+                <a:solidFill>
+                  <a:srgbClr val="3FB950"/>
+                </a:solidFill>
+                <a:latin typeface="Calibri" pitchFamily="34" charset="0"/>
+                <a:ea typeface="Calibri" pitchFamily="34" charset="-122"/>
+                <a:cs typeface="Calibri" pitchFamily="34" charset="-120"/>
+              </a:rPr>
+              <a:t>✓</a:t>
+            </a:r>
+            <a:endParaRPr lang="en-US" sz="1150" dirty="0"/>
+          </a:p>
+        </p:txBody>
+      </p:sp>
+      <p:sp>
+        <p:nvSpPr>
+          <p:cNvPr id="25" name="Text 23"/>
+          <p:cNvSpPr/>
+          <p:nvPr/>
+        </p:nvSpPr>
+        <p:spPr>
+          <a:xfrm>
+            <a:off x="7918704" y="4302252"/>
+            <a:ext cx="3383280" cy="246888"/>
+          </a:xfrm>
+          <a:prstGeom prst="rect">
+            <a:avLst/>
+          </a:prstGeom>
+          <a:noFill/>
+          <a:ln/>
+        </p:spPr>
+        <p:txBody>
+          <a:bodyPr wrap="square" lIns="0" tIns="0" rIns="0" bIns="0" rtlCol="0" anchor="t"/>
+          <a:lstStyle/>
+          <a:p>
+            <a:pPr indent="0" marL="0">
+              <a:lnSpc>
+                <a:spcPts val="1500"/>
+              </a:lnSpc>
+              <a:buNone/>
+            </a:pPr>
+            <a:r>
+              <a:rPr lang="en-US" sz="1150" dirty="0">
+                <a:solidFill>
+                  <a:srgbClr val="B4B7BD"/>
+                </a:solidFill>
+                <a:latin typeface="Calibri" pitchFamily="34" charset="0"/>
+                <a:ea typeface="Calibri" pitchFamily="34" charset="-122"/>
+                <a:cs typeface="Calibri" pitchFamily="34" charset="-120"/>
+              </a:rPr>
+              <a:t>Action Center shows the script dispatched.</a:t>
+            </a:r>
+            <a:endParaRPr lang="en-US" sz="1150" dirty="0"/>
+          </a:p>
+        </p:txBody>
+      </p:sp>
+      <p:sp>
+        <p:nvSpPr>
           <p:cNvPr id="26" name="Shape 24"/>
           <p:cNvSpPr/>
           <p:nvPr/>
         </p:nvSpPr>
         <p:spPr>
           <a:xfrm>
-            <a:off x="548640" y="4187952"/>
+            <a:off x="548640" y="5125212"/>
             <a:ext cx="11064240" cy="841248"/>
           </a:xfrm>
           <a:prstGeom prst="roundRect">
@@ -12906,7 +12906,7 @@
         </p:nvSpPr>
         <p:spPr>
           <a:xfrm>
-            <a:off x="804672" y="4434840"/>
+            <a:off x="804672" y="5372100"/>
             <a:ext cx="310896" cy="310896"/>
           </a:xfrm>
           <a:prstGeom prst="roundRect">
@@ -12933,7 +12933,7 @@
         </p:nvSpPr>
         <p:spPr>
           <a:xfrm>
-            <a:off x="804672" y="4434840"/>
+            <a:off x="804672" y="5372100"/>
             <a:ext cx="310896" cy="310896"/>
           </a:xfrm>
           <a:prstGeom prst="rect">
@@ -12972,7 +12972,7 @@
         </p:nvSpPr>
         <p:spPr>
           <a:xfrm>
-            <a:off x="1298448" y="4361688"/>
+            <a:off x="1298448" y="5298948"/>
             <a:ext cx="9966960" cy="548640"/>
           </a:xfrm>
           <a:prstGeom prst="rect">
@@ -13000,7 +13000,7 @@
                 <a:ea typeface="Calibri" pitchFamily="34" charset="-122"/>
                 <a:cs typeface="Calibri" pitchFamily="34" charset="-120"/>
               </a:rPr>
-              <a:t>Every binding on the 'Names that must match exactly' slide applies here. The war room records which reference broke, and a SKIPPED entry is not a failure — it means no connected, unisolated endpoint currently matches that OS scope.</a:t>
+              <a:t>Two jobs: Refresh builds the tracker, Scan runs the due endpoints — run Refresh once before the first Scan. Mark-on-dispatch means a poll timeout logs STILL RUNNING and never emails; a SKIPPED entry is not a failure.</a:t>
             </a:r>
             <a:endParaRPr lang="en-US" sz="1050" dirty="0"/>
           </a:p>
@@ -13124,12 +13124,12 @@
         </p:nvSpPr>
         <p:spPr>
           <a:xfrm>
-            <a:off x="548640" y="1517904"/>
-            <a:ext cx="11064240" cy="548640"/>
+            <a:off x="548640" y="1463040"/>
+            <a:ext cx="11064240" cy="493776"/>
           </a:xfrm>
           <a:prstGeom prst="roundRect">
             <a:avLst>
-              <a:gd name="adj" fmla="val 8333"/>
+              <a:gd name="adj" fmla="val 9259"/>
             </a:avLst>
           </a:prstGeom>
           <a:solidFill>
@@ -13151,7 +13151,7 @@
         </p:nvSpPr>
         <p:spPr>
           <a:xfrm>
-            <a:off x="822960" y="1673352"/>
+            <a:off x="822960" y="1618488"/>
             <a:ext cx="3200400" cy="274320"/>
           </a:xfrm>
           <a:prstGeom prst="rect">
@@ -13190,7 +13190,7 @@
         </p:nvSpPr>
         <p:spPr>
           <a:xfrm>
-            <a:off x="4206240" y="1682496"/>
+            <a:off x="4206240" y="1627632"/>
             <a:ext cx="3291840" cy="274320"/>
           </a:xfrm>
           <a:prstGeom prst="rect">
@@ -13229,7 +13229,7 @@
         </p:nvSpPr>
         <p:spPr>
           <a:xfrm>
-            <a:off x="7680960" y="1682496"/>
+            <a:off x="7680960" y="1627632"/>
             <a:ext cx="3657600" cy="274320"/>
           </a:xfrm>
           <a:prstGeom prst="rect">
@@ -13268,12 +13268,12 @@
         </p:nvSpPr>
         <p:spPr>
           <a:xfrm>
-            <a:off x="548640" y="2194560"/>
-            <a:ext cx="11064240" cy="548640"/>
+            <a:off x="548640" y="2084832"/>
+            <a:ext cx="11064240" cy="493776"/>
           </a:xfrm>
           <a:prstGeom prst="roundRect">
             <a:avLst>
-              <a:gd name="adj" fmla="val 8333"/>
+              <a:gd name="adj" fmla="val 9259"/>
             </a:avLst>
           </a:prstGeom>
           <a:solidFill>
@@ -13295,7 +13295,7 @@
         </p:nvSpPr>
         <p:spPr>
           <a:xfrm>
-            <a:off x="822960" y="2350008"/>
+            <a:off x="822960" y="2240280"/>
             <a:ext cx="3200400" cy="274320"/>
           </a:xfrm>
           <a:prstGeom prst="rect">
@@ -13334,7 +13334,7 @@
         </p:nvSpPr>
         <p:spPr>
           <a:xfrm>
-            <a:off x="4206240" y="2359152"/>
+            <a:off x="4206240" y="2249424"/>
             <a:ext cx="3291840" cy="274320"/>
           </a:xfrm>
           <a:prstGeom prst="rect">
@@ -13373,7 +13373,7 @@
         </p:nvSpPr>
         <p:spPr>
           <a:xfrm>
-            <a:off x="7680960" y="2359152"/>
+            <a:off x="7680960" y="2249424"/>
             <a:ext cx="3657600" cy="274320"/>
           </a:xfrm>
           <a:prstGeom prst="rect">
@@ -13412,12 +13412,12 @@
         </p:nvSpPr>
         <p:spPr>
           <a:xfrm>
-            <a:off x="548640" y="2871216"/>
-            <a:ext cx="11064240" cy="548640"/>
+            <a:off x="548640" y="2706624"/>
+            <a:ext cx="11064240" cy="493776"/>
           </a:xfrm>
           <a:prstGeom prst="roundRect">
             <a:avLst>
-              <a:gd name="adj" fmla="val 8333"/>
+              <a:gd name="adj" fmla="val 9259"/>
             </a:avLst>
           </a:prstGeom>
           <a:solidFill>
@@ -13439,7 +13439,7 @@
         </p:nvSpPr>
         <p:spPr>
           <a:xfrm>
-            <a:off x="822960" y="3026664"/>
+            <a:off x="822960" y="2862072"/>
             <a:ext cx="3200400" cy="274320"/>
           </a:xfrm>
           <a:prstGeom prst="rect">
@@ -13478,7 +13478,7 @@
         </p:nvSpPr>
         <p:spPr>
           <a:xfrm>
-            <a:off x="4206240" y="3035808"/>
+            <a:off x="4206240" y="2871216"/>
             <a:ext cx="3291840" cy="274320"/>
           </a:xfrm>
           <a:prstGeom prst="rect">
@@ -13517,7 +13517,7 @@
         </p:nvSpPr>
         <p:spPr>
           <a:xfrm>
-            <a:off x="7680960" y="3035808"/>
+            <a:off x="7680960" y="2871216"/>
             <a:ext cx="3657600" cy="274320"/>
           </a:xfrm>
           <a:prstGeom prst="rect">
@@ -13556,12 +13556,12 @@
         </p:nvSpPr>
         <p:spPr>
           <a:xfrm>
-            <a:off x="548640" y="3547872"/>
-            <a:ext cx="11064240" cy="548640"/>
+            <a:off x="548640" y="3328416"/>
+            <a:ext cx="11064240" cy="493776"/>
           </a:xfrm>
           <a:prstGeom prst="roundRect">
             <a:avLst>
-              <a:gd name="adj" fmla="val 8333"/>
+              <a:gd name="adj" fmla="val 9259"/>
             </a:avLst>
           </a:prstGeom>
           <a:solidFill>
@@ -13583,7 +13583,7 @@
         </p:nvSpPr>
         <p:spPr>
           <a:xfrm>
-            <a:off x="822960" y="3703320"/>
+            <a:off x="822960" y="3483864"/>
             <a:ext cx="3200400" cy="274320"/>
           </a:xfrm>
           <a:prstGeom prst="rect">
@@ -13622,7 +13622,7 @@
         </p:nvSpPr>
         <p:spPr>
           <a:xfrm>
-            <a:off x="4206240" y="3712464"/>
+            <a:off x="4206240" y="3493008"/>
             <a:ext cx="3291840" cy="274320"/>
           </a:xfrm>
           <a:prstGeom prst="rect">
@@ -13661,7 +13661,7 @@
         </p:nvSpPr>
         <p:spPr>
           <a:xfrm>
-            <a:off x="7680960" y="3712464"/>
+            <a:off x="7680960" y="3493008"/>
             <a:ext cx="3657600" cy="274320"/>
           </a:xfrm>
           <a:prstGeom prst="rect">
@@ -13700,12 +13700,12 @@
         </p:nvSpPr>
         <p:spPr>
           <a:xfrm>
-            <a:off x="548640" y="4224528"/>
-            <a:ext cx="11064240" cy="548640"/>
+            <a:off x="548640" y="3950208"/>
+            <a:ext cx="11064240" cy="493776"/>
           </a:xfrm>
           <a:prstGeom prst="roundRect">
             <a:avLst>
-              <a:gd name="adj" fmla="val 8333"/>
+              <a:gd name="adj" fmla="val 9259"/>
             </a:avLst>
           </a:prstGeom>
           <a:solidFill>
@@ -13727,7 +13727,7 @@
         </p:nvSpPr>
         <p:spPr>
           <a:xfrm>
-            <a:off x="822960" y="4379976"/>
+            <a:off x="822960" y="4105656"/>
             <a:ext cx="3200400" cy="274320"/>
           </a:xfrm>
           <a:prstGeom prst="rect">
@@ -13752,7 +13752,7 @@
                 <a:ea typeface="Calibri" pitchFamily="34" charset="-122"/>
                 <a:cs typeface="Calibri" pitchFamily="34" charset="-120"/>
               </a:rPr>
-              <a:t>Job entry reports SKIPPED</a:t>
+              <a:t>Scan runs but nothing is scanned</a:t>
             </a:r>
             <a:endParaRPr lang="en-US" sz="1150" dirty="0"/>
           </a:p>
@@ -13766,7 +13766,7 @@
         </p:nvSpPr>
         <p:spPr>
           <a:xfrm>
-            <a:off x="4206240" y="4389120"/>
+            <a:off x="4206240" y="4114800"/>
             <a:ext cx="3291840" cy="274320"/>
           </a:xfrm>
           <a:prstGeom prst="rect">
@@ -13791,7 +13791,7 @@
                 <a:ea typeface="Calibri" pitchFamily="34" charset="-122"/>
                 <a:cs typeface="Calibri" pitchFamily="34" charset="-120"/>
               </a:rPr>
-              <a:t>No connected, unisolated endpoint matches the OS scope</a:t>
+              <a:t>Tracker empty — Refresh not run yet, or Core REST API off</a:t>
             </a:r>
             <a:endParaRPr lang="en-US" sz="1050" dirty="0"/>
           </a:p>
@@ -13805,7 +13805,7 @@
         </p:nvSpPr>
         <p:spPr>
           <a:xfrm>
-            <a:off x="7680960" y="4389120"/>
+            <a:off x="7680960" y="4114800"/>
             <a:ext cx="3657600" cy="274320"/>
           </a:xfrm>
           <a:prstGeom prst="rect">
@@ -13830,7 +13830,7 @@
                 <a:ea typeface="Calibri" pitchFamily="34" charset="-122"/>
                 <a:cs typeface="Calibri" pitchFamily="34" charset="-120"/>
               </a:rPr>
-              <a:t>Check group membership and endpoint_os in the List</a:t>
+              <a:t>Run the Refresh job first; enable Core REST API</a:t>
             </a:r>
             <a:endParaRPr lang="en-US" sz="1050" dirty="0"/>
           </a:p>
@@ -13844,12 +13844,12 @@
         </p:nvSpPr>
         <p:spPr>
           <a:xfrm>
-            <a:off x="548640" y="4901184"/>
-            <a:ext cx="11064240" cy="548640"/>
+            <a:off x="548640" y="4572000"/>
+            <a:ext cx="11064240" cy="493776"/>
           </a:xfrm>
           <a:prstGeom prst="roundRect">
             <a:avLst>
-              <a:gd name="adj" fmla="val 8333"/>
+              <a:gd name="adj" fmla="val 9259"/>
             </a:avLst>
           </a:prstGeom>
           <a:solidFill>
@@ -13871,7 +13871,7 @@
         </p:nvSpPr>
         <p:spPr>
           <a:xfrm>
-            <a:off x="822960" y="5056632"/>
+            <a:off x="822960" y="4727448"/>
             <a:ext cx="3200400" cy="274320"/>
           </a:xfrm>
           <a:prstGeom prst="rect">
@@ -13896,6 +13896,150 @@
                 <a:ea typeface="Calibri" pitchFamily="34" charset="-122"/>
                 <a:cs typeface="Calibri" pitchFamily="34" charset="-120"/>
               </a:rPr>
+              <a:t>Job entry reports SKIPPED</a:t>
+            </a:r>
+            <a:endParaRPr lang="en-US" sz="1150" dirty="0"/>
+          </a:p>
+        </p:txBody>
+      </p:sp>
+      <p:sp>
+        <p:nvSpPr>
+          <p:cNvPr id="26" name="Text 24"/>
+          <p:cNvSpPr/>
+          <p:nvPr/>
+        </p:nvSpPr>
+        <p:spPr>
+          <a:xfrm>
+            <a:off x="4206240" y="4736592"/>
+            <a:ext cx="3291840" cy="274320"/>
+          </a:xfrm>
+          <a:prstGeom prst="rect">
+            <a:avLst/>
+          </a:prstGeom>
+          <a:noFill/>
+          <a:ln/>
+        </p:spPr>
+        <p:txBody>
+          <a:bodyPr wrap="square" lIns="0" tIns="0" rIns="0" bIns="0" rtlCol="0" anchor="t"/>
+          <a:lstStyle/>
+          <a:p>
+            <a:pPr indent="0" marL="0">
+              <a:buNone/>
+            </a:pPr>
+            <a:r>
+              <a:rPr lang="en-US" sz="1050" dirty="0">
+                <a:solidFill>
+                  <a:srgbClr val="F5A524"/>
+                </a:solidFill>
+                <a:latin typeface="Calibri" pitchFamily="34" charset="0"/>
+                <a:ea typeface="Calibri" pitchFamily="34" charset="-122"/>
+                <a:cs typeface="Calibri" pitchFamily="34" charset="-120"/>
+              </a:rPr>
+              <a:t>No due, connected endpoint matches the scope right now</a:t>
+            </a:r>
+            <a:endParaRPr lang="en-US" sz="1050" dirty="0"/>
+          </a:p>
+        </p:txBody>
+      </p:sp>
+      <p:sp>
+        <p:nvSpPr>
+          <p:cNvPr id="27" name="Text 25"/>
+          <p:cNvSpPr/>
+          <p:nvPr/>
+        </p:nvSpPr>
+        <p:spPr>
+          <a:xfrm>
+            <a:off x="7680960" y="4736592"/>
+            <a:ext cx="3657600" cy="274320"/>
+          </a:xfrm>
+          <a:prstGeom prst="rect">
+            <a:avLst/>
+          </a:prstGeom>
+          <a:noFill/>
+          <a:ln/>
+        </p:spPr>
+        <p:txBody>
+          <a:bodyPr wrap="square" lIns="0" tIns="0" rIns="0" bIns="0" rtlCol="0" anchor="t"/>
+          <a:lstStyle/>
+          <a:p>
+            <a:pPr indent="0" marL="0">
+              <a:buNone/>
+            </a:pPr>
+            <a:r>
+              <a:rPr lang="en-US" sz="1050" dirty="0">
+                <a:solidFill>
+                  <a:srgbClr val="B4B7BD"/>
+                </a:solidFill>
+                <a:latin typeface="Calibri" pitchFamily="34" charset="0"/>
+                <a:ea typeface="Calibri" pitchFamily="34" charset="-122"/>
+                <a:cs typeface="Calibri" pitchFamily="34" charset="-120"/>
+              </a:rPr>
+              <a:t>Check group membership and endpoint_os in the List</a:t>
+            </a:r>
+            <a:endParaRPr lang="en-US" sz="1050" dirty="0"/>
+          </a:p>
+        </p:txBody>
+      </p:sp>
+      <p:sp>
+        <p:nvSpPr>
+          <p:cNvPr id="28" name="Shape 26"/>
+          <p:cNvSpPr/>
+          <p:nvPr/>
+        </p:nvSpPr>
+        <p:spPr>
+          <a:xfrm>
+            <a:off x="548640" y="5193792"/>
+            <a:ext cx="11064240" cy="493776"/>
+          </a:xfrm>
+          <a:prstGeom prst="roundRect">
+            <a:avLst>
+              <a:gd name="adj" fmla="val 9259"/>
+            </a:avLst>
+          </a:prstGeom>
+          <a:solidFill>
+            <a:srgbClr val="15171B"/>
+          </a:solidFill>
+          <a:ln w="12700">
+            <a:solidFill>
+              <a:srgbClr val="15171B"/>
+            </a:solidFill>
+            <a:prstDash val="solid"/>
+          </a:ln>
+        </p:spPr>
+      </p:sp>
+      <p:sp>
+        <p:nvSpPr>
+          <p:cNvPr id="29" name="Text 27"/>
+          <p:cNvSpPr/>
+          <p:nvPr/>
+        </p:nvSpPr>
+        <p:spPr>
+          <a:xfrm>
+            <a:off x="822960" y="5349240"/>
+            <a:ext cx="3200400" cy="274320"/>
+          </a:xfrm>
+          <a:prstGeom prst="rect">
+            <a:avLst/>
+          </a:prstGeom>
+          <a:noFill/>
+          <a:ln/>
+        </p:spPr>
+        <p:txBody>
+          <a:bodyPr wrap="square" lIns="0" tIns="0" rIns="0" bIns="0" rtlCol="0" anchor="t"/>
+          <a:lstStyle/>
+          <a:p>
+            <a:pPr indent="0" marL="0">
+              <a:buNone/>
+            </a:pPr>
+            <a:r>
+              <a:rPr lang="en-US" sz="1150" b="1" dirty="0">
+                <a:solidFill>
+                  <a:srgbClr val="FFFFFF"/>
+                </a:solidFill>
+                <a:latin typeface="Calibri" pitchFamily="34" charset="0"/>
+                <a:ea typeface="Calibri" pitchFamily="34" charset="-122"/>
+                <a:cs typeface="Calibri" pitchFamily="34" charset="-120"/>
+              </a:rPr>
               <a:t>Script not found at dispatch</a:t>
             </a:r>
             <a:endParaRPr lang="en-US" sz="1150" dirty="0"/>
@@ -13904,13 +14048,13 @@
       </p:sp>
       <p:sp>
         <p:nvSpPr>
-          <p:cNvPr id="26" name="Text 24"/>
-          <p:cNvSpPr/>
-          <p:nvPr/>
-        </p:nvSpPr>
-        <p:spPr>
-          <a:xfrm>
-            <a:off x="4206240" y="5065776"/>
+          <p:cNvPr id="30" name="Text 28"/>
+          <p:cNvSpPr/>
+          <p:nvPr/>
+        </p:nvSpPr>
+        <p:spPr>
+          <a:xfrm>
+            <a:off x="4206240" y="5358384"/>
             <a:ext cx="3291840" cy="274320"/>
           </a:xfrm>
           <a:prstGeom prst="rect">
@@ -13943,13 +14087,13 @@
       </p:sp>
       <p:sp>
         <p:nvSpPr>
-          <p:cNvPr id="27" name="Text 25"/>
-          <p:cNvSpPr/>
-          <p:nvPr/>
-        </p:nvSpPr>
-        <p:spPr>
-          <a:xfrm>
-            <a:off x="7680960" y="5065776"/>
+          <p:cNvPr id="31" name="Text 29"/>
+          <p:cNvSpPr/>
+          <p:nvPr/>
+        </p:nvSpPr>
+        <p:spPr>
+          <a:xfrm>
+            <a:off x="7680960" y="5358384"/>
             <a:ext cx="3657600" cy="274320"/>
           </a:xfrm>
           <a:prstGeom prst="rect">
@@ -13982,13 +14126,13 @@
       </p:sp>
       <p:sp>
         <p:nvSpPr>
-          <p:cNvPr id="28" name="Text 26"/>
-          <p:cNvSpPr/>
-          <p:nvPr/>
-        </p:nvSpPr>
-        <p:spPr>
-          <a:xfrm>
-            <a:off x="548640" y="5742432"/>
+          <p:cNvPr id="32" name="Text 30"/>
+          <p:cNvSpPr/>
+          <p:nvPr/>
+        </p:nvSpPr>
+        <p:spPr>
+          <a:xfrm>
+            <a:off x="548640" y="5943600"/>
             <a:ext cx="11064240" cy="274320"/>
           </a:xfrm>
           <a:prstGeom prst="rect">
@@ -14939,7 +15083,7 @@
                 <a:ea typeface="Calibri" pitchFamily="34" charset="-122"/>
                 <a:cs typeface="Calibri" pitchFamily="34" charset="-120"/>
               </a:rPr>
-              <a:t>The KOI script package uploaded to Action Center → Scripts Library</a:t>
+              <a:t>The built-in Core REST API integration, enabled (no KOI key or KOI instance)</a:t>
             </a:r>
             <a:endParaRPr lang="en-US" sz="1150" dirty="0"/>
           </a:p>
@@ -14993,7 +15137,7 @@
         <p:spPr>
           <a:xfrm>
             <a:off x="6867144" y="3570732"/>
-            <a:ext cx="4434840" cy="246888"/>
+            <a:ext cx="4434840" cy="438912"/>
           </a:xfrm>
           <a:prstGeom prst="rect">
             <a:avLst/>
@@ -15020,7 +15164,7 @@
                 <a:ea typeface="Calibri" pitchFamily="34" charset="-122"/>
                 <a:cs typeface="Calibri" pitchFamily="34" charset="-120"/>
               </a:rPr>
-              <a:t>An endpoint group containing connected, unisolated agents</a:t>
+              <a:t>The KOI script package (parameterless) in Action Center → Scripts Library</a:t>
             </a:r>
             <a:endParaRPr lang="en-US" sz="1150" dirty="0"/>
           </a:p>
@@ -15034,7 +15178,7 @@
         </p:nvSpPr>
         <p:spPr>
           <a:xfrm>
-            <a:off x="6574536" y="3899916"/>
+            <a:off x="6574536" y="4087368"/>
             <a:ext cx="219456" cy="256032"/>
           </a:xfrm>
           <a:prstGeom prst="rect">
@@ -15073,7 +15217,7 @@
         </p:nvSpPr>
         <p:spPr>
           <a:xfrm>
-            <a:off x="6867144" y="3899916"/>
+            <a:off x="6867144" y="4087368"/>
             <a:ext cx="4434840" cy="246888"/>
           </a:xfrm>
           <a:prstGeom prst="rect">
@@ -15101,7 +15245,7 @@
                 <a:ea typeface="Calibri" pitchFamily="34" charset="-122"/>
                 <a:cs typeface="Calibri" pitchFamily="34" charset="-120"/>
               </a:rPr>
-              <a:t>Optionally a mail-sender instance for notifications</a:t>
+              <a:t>An endpoint group of connected, unisolated agents</a:t>
             </a:r>
             <a:endParaRPr lang="en-US" sz="1150" dirty="0"/>
           </a:p>
@@ -15115,7 +15259,7 @@
         </p:nvSpPr>
         <p:spPr>
           <a:xfrm>
-            <a:off x="6574536" y="4229100"/>
+            <a:off x="6574536" y="4416552"/>
             <a:ext cx="219456" cy="256032"/>
           </a:xfrm>
           <a:prstGeom prst="rect">
@@ -15154,7 +15298,7 @@
         </p:nvSpPr>
         <p:spPr>
           <a:xfrm>
-            <a:off x="6867144" y="4229100"/>
+            <a:off x="6867144" y="4416552"/>
             <a:ext cx="4434840" cy="246888"/>
           </a:xfrm>
           <a:prstGeom prst="rect">
@@ -15182,7 +15326,7 @@
                 <a:ea typeface="Calibri" pitchFamily="34" charset="-122"/>
                 <a:cs typeface="Calibri" pitchFamily="34" charset="-120"/>
               </a:rPr>
-              <a:t>No KOI API key and no KOI integration instance</a:t>
+              <a:t>Optionally a mail-sender instance for notifications</a:t>
             </a:r>
             <a:endParaRPr lang="en-US" sz="1150" dirty="0"/>
           </a:p>
@@ -15221,7 +15365,7 @@
                 <a:ea typeface="Calibri" pitchFamily="34" charset="-122"/>
                 <a:cs typeface="Calibri" pitchFamily="34" charset="-120"/>
               </a:rPr>
-              <a:t>The Script Runner playbooks call no koi-* command at all — only core-get-scripts, core-get-endpoints and core-script-run.</a:t>
+              <a:t>The Script Runner playbooks call no koi-* command — only core-get-scripts, core-get-endpoints, core-script-run and core-api-post (that last one via the built-in Core REST API).</a:t>
             </a:r>
             <a:endParaRPr lang="en-US" sz="1050" dirty="0"/>
           </a:p>
@@ -19128,24 +19272,24 @@
         </p:nvSpPr>
         <p:spPr>
           <a:xfrm>
-            <a:off x="548640" y="1298448"/>
-            <a:ext cx="9509760" cy="310896"/>
-          </a:xfrm>
-          <a:prstGeom prst="rect">
-            <a:avLst/>
-          </a:prstGeom>
-          <a:noFill/>
-          <a:ln/>
-        </p:spPr>
-        <p:txBody>
-          <a:bodyPr wrap="square" lIns="0" tIns="0" rIns="0" bIns="0" rtlCol="0" anchor="t"/>
-          <a:lstStyle/>
-          <a:p>
-            <a:pPr indent="0" marL="0">
-              <a:buNone/>
-            </a:pPr>
-            <a:r>
-              <a:rPr lang="en-US" sz="1250" dirty="0">
+            <a:off x="548640" y="1243584"/>
+            <a:ext cx="10424160" cy="310896"/>
+          </a:xfrm>
+          <a:prstGeom prst="rect">
+            <a:avLst/>
+          </a:prstGeom>
+          <a:noFill/>
+          <a:ln/>
+        </p:spPr>
+        <p:txBody>
+          <a:bodyPr wrap="square" lIns="0" tIns="0" rIns="0" bIns="0" rtlCol="0" anchor="t"/>
+          <a:lstStyle/>
+          <a:p>
+            <a:pPr indent="0" marL="0">
+              <a:buNone/>
+            </a:pPr>
+            <a:r>
+              <a:rPr lang="en-US" sz="1200" dirty="0">
                 <a:solidFill>
                   <a:srgbClr val="B4B7BD"/>
                 </a:solidFill>
@@ -19153,9 +19297,9 @@
                 <a:ea typeface="Calibri" pitchFamily="34" charset="-122"/>
                 <a:cs typeface="Calibri" pitchFamily="34" charset="-120"/>
               </a:rPr>
-              <a:t>To run KOI scripts from an XSIAM Job and nothing else, import these four items by hand. Nothing else in the pack is required.</a:t>
-            </a:r>
-            <a:endParaRPr lang="en-US" sz="1250" dirty="0"/>
+              <a:t>To run KOI scripts from XSIAM Jobs and nothing else, import these six content items by hand, then create the List and two Jobs. Nothing else in the pack is required.</a:t>
+            </a:r>
+            <a:endParaRPr lang="en-US" sz="1200" dirty="0"/>
           </a:p>
         </p:txBody>
       </p:sp>
@@ -19167,12 +19311,12 @@
         </p:nvSpPr>
         <p:spPr>
           <a:xfrm>
-            <a:off x="548640" y="1737360"/>
-            <a:ext cx="11064240" cy="768096"/>
+            <a:off x="548640" y="1627632"/>
+            <a:ext cx="11064240" cy="512064"/>
           </a:xfrm>
           <a:prstGeom prst="roundRect">
             <a:avLst>
-              <a:gd name="adj" fmla="val 5952"/>
+              <a:gd name="adj" fmla="val 8929"/>
             </a:avLst>
           </a:prstGeom>
           <a:solidFill>
@@ -19194,12 +19338,222 @@
         </p:nvSpPr>
         <p:spPr>
           <a:xfrm>
-            <a:off x="804672" y="1956816"/>
-            <a:ext cx="310896" cy="310896"/>
+            <a:off x="786384" y="1746504"/>
+            <a:ext cx="274320" cy="274320"/>
           </a:xfrm>
           <a:prstGeom prst="roundRect">
             <a:avLst>
-              <a:gd name="adj" fmla="val 26471"/>
+              <a:gd name="adj" fmla="val 30000"/>
+            </a:avLst>
+          </a:prstGeom>
+          <a:solidFill>
+            <a:srgbClr val="3FB950"/>
+          </a:solidFill>
+          <a:ln w="12700">
+            <a:solidFill>
+              <a:srgbClr val="3FB950"/>
+            </a:solidFill>
+            <a:prstDash val="solid"/>
+          </a:ln>
+        </p:spPr>
+      </p:sp>
+      <p:sp>
+        <p:nvSpPr>
+          <p:cNvPr id="7" name="Text 5"/>
+          <p:cNvSpPr/>
+          <p:nvPr/>
+        </p:nvSpPr>
+        <p:spPr>
+          <a:xfrm>
+            <a:off x="786384" y="1746504"/>
+            <a:ext cx="274320" cy="274320"/>
+          </a:xfrm>
+          <a:prstGeom prst="rect">
+            <a:avLst/>
+          </a:prstGeom>
+          <a:noFill/>
+          <a:ln/>
+        </p:spPr>
+        <p:txBody>
+          <a:bodyPr wrap="square" lIns="0" tIns="0" rIns="0" bIns="0" rtlCol="0" anchor="ctr"/>
+          <a:lstStyle/>
+          <a:p>
+            <a:pPr algn="ctr" indent="0" marL="0">
+              <a:buNone/>
+            </a:pPr>
+            <a:r>
+              <a:rPr lang="en-US" sz="1300" b="1" dirty="0">
+                <a:solidFill>
+                  <a:srgbClr val="FFFFFF"/>
+                </a:solidFill>
+                <a:latin typeface="Calibri" pitchFamily="34" charset="0"/>
+                <a:ea typeface="Calibri" pitchFamily="34" charset="-122"/>
+                <a:cs typeface="Calibri" pitchFamily="34" charset="-120"/>
+              </a:rPr>
+              <a:t>1</a:t>
+            </a:r>
+            <a:endParaRPr lang="en-US" sz="1300" dirty="0"/>
+          </a:p>
+        </p:txBody>
+      </p:sp>
+      <p:sp>
+        <p:nvSpPr>
+          <p:cNvPr id="8" name="Text 6"/>
+          <p:cNvSpPr/>
+          <p:nvPr/>
+        </p:nvSpPr>
+        <p:spPr>
+          <a:xfrm>
+            <a:off x="1207008" y="1691640"/>
+            <a:ext cx="4663440" cy="237744"/>
+          </a:xfrm>
+          <a:prstGeom prst="rect">
+            <a:avLst/>
+          </a:prstGeom>
+          <a:noFill/>
+          <a:ln/>
+        </p:spPr>
+        <p:txBody>
+          <a:bodyPr wrap="square" lIns="0" tIns="0" rIns="0" bIns="0" rtlCol="0" anchor="t"/>
+          <a:lstStyle/>
+          <a:p>
+            <a:pPr indent="0" marL="0">
+              <a:buNone/>
+            </a:pPr>
+            <a:r>
+              <a:rPr lang="en-US" sz="1150" b="1" dirty="0">
+                <a:solidFill>
+                  <a:srgbClr val="FFFFFF"/>
+                </a:solidFill>
+                <a:latin typeface="Calibri" pitchFamily="34" charset="0"/>
+                <a:ea typeface="Calibri" pitchFamily="34" charset="-122"/>
+                <a:cs typeface="Calibri" pitchFamily="34" charset="-120"/>
+              </a:rPr>
+              <a:t>KoiScanTracker  (automation)</a:t>
+            </a:r>
+            <a:endParaRPr lang="en-US" sz="1150" dirty="0"/>
+          </a:p>
+        </p:txBody>
+      </p:sp>
+      <p:sp>
+        <p:nvSpPr>
+          <p:cNvPr id="9" name="Text 7"/>
+          <p:cNvSpPr/>
+          <p:nvPr/>
+        </p:nvSpPr>
+        <p:spPr>
+          <a:xfrm>
+            <a:off x="1207008" y="1920240"/>
+            <a:ext cx="4663440" cy="201168"/>
+          </a:xfrm>
+          <a:prstGeom prst="rect">
+            <a:avLst/>
+          </a:prstGeom>
+          <a:noFill/>
+          <a:ln/>
+        </p:spPr>
+        <p:txBody>
+          <a:bodyPr wrap="square" lIns="0" tIns="0" rIns="0" bIns="0" rtlCol="0" anchor="t"/>
+          <a:lstStyle/>
+          <a:p>
+            <a:pPr indent="0" marL="0">
+              <a:buNone/>
+            </a:pPr>
+            <a:r>
+              <a:rPr lang="en-US" sz="950" dirty="0">
+                <a:solidFill>
+                  <a:srgbClr val="6E747E"/>
+                </a:solidFill>
+                <a:latin typeface="Calibri" pitchFamily="34" charset="0"/>
+                <a:ea typeface="Calibri" pitchFamily="34" charset="-122"/>
+                <a:cs typeface="Calibri" pitchFamily="34" charset="-120"/>
+              </a:rPr>
+              <a:t>Automation → Scripts → Import</a:t>
+            </a:r>
+            <a:endParaRPr lang="en-US" sz="950" dirty="0"/>
+          </a:p>
+        </p:txBody>
+      </p:sp>
+      <p:sp>
+        <p:nvSpPr>
+          <p:cNvPr id="10" name="Text 8"/>
+          <p:cNvSpPr/>
+          <p:nvPr/>
+        </p:nvSpPr>
+        <p:spPr>
+          <a:xfrm>
+            <a:off x="6035040" y="1792224"/>
+            <a:ext cx="5303520" cy="274320"/>
+          </a:xfrm>
+          <a:prstGeom prst="rect">
+            <a:avLst/>
+          </a:prstGeom>
+          <a:noFill/>
+          <a:ln/>
+        </p:spPr>
+        <p:txBody>
+          <a:bodyPr wrap="square" lIns="0" tIns="0" rIns="0" bIns="0" rtlCol="0" anchor="t"/>
+          <a:lstStyle/>
+          <a:p>
+            <a:pPr indent="0" marL="0">
+              <a:buNone/>
+            </a:pPr>
+            <a:r>
+              <a:rPr lang="en-US" sz="1050" dirty="0">
+                <a:solidFill>
+                  <a:srgbClr val="B4B7BD"/>
+                </a:solidFill>
+                <a:latin typeface="Calibri" pitchFamily="34" charset="0"/>
+                <a:ea typeface="Calibri" pitchFamily="34" charset="-122"/>
+                <a:cs typeface="Calibri" pitchFamily="34" charset="-120"/>
+              </a:rPr>
+              <a:t>Import first — every playbook below calls it.</a:t>
+            </a:r>
+            <a:endParaRPr lang="en-US" sz="1050" dirty="0"/>
+          </a:p>
+        </p:txBody>
+      </p:sp>
+      <p:sp>
+        <p:nvSpPr>
+          <p:cNvPr id="11" name="Shape 9"/>
+          <p:cNvSpPr/>
+          <p:nvPr/>
+        </p:nvSpPr>
+        <p:spPr>
+          <a:xfrm>
+            <a:off x="548640" y="2231136"/>
+            <a:ext cx="11064240" cy="512064"/>
+          </a:xfrm>
+          <a:prstGeom prst="roundRect">
+            <a:avLst>
+              <a:gd name="adj" fmla="val 8929"/>
+            </a:avLst>
+          </a:prstGeom>
+          <a:solidFill>
+            <a:srgbClr val="15171B"/>
+          </a:solidFill>
+          <a:ln w="12700">
+            <a:solidFill>
+              <a:srgbClr val="15171B"/>
+            </a:solidFill>
+            <a:prstDash val="solid"/>
+          </a:ln>
+        </p:spPr>
+      </p:sp>
+      <p:sp>
+        <p:nvSpPr>
+          <p:cNvPr id="12" name="Shape 10"/>
+          <p:cNvSpPr/>
+          <p:nvPr/>
+        </p:nvSpPr>
+        <p:spPr>
+          <a:xfrm>
+            <a:off x="786384" y="2350008"/>
+            <a:ext cx="274320" cy="274320"/>
+          </a:xfrm>
+          <a:prstGeom prst="roundRect">
+            <a:avLst>
+              <a:gd name="adj" fmla="val 30000"/>
             </a:avLst>
           </a:prstGeom>
           <a:solidFill>
@@ -19215,14 +19569,14 @@
       </p:sp>
       <p:sp>
         <p:nvSpPr>
-          <p:cNvPr id="7" name="Text 5"/>
-          <p:cNvSpPr/>
-          <p:nvPr/>
-        </p:nvSpPr>
-        <p:spPr>
-          <a:xfrm>
-            <a:off x="804672" y="1956816"/>
-            <a:ext cx="310896" cy="310896"/>
+          <p:cNvPr id="13" name="Text 11"/>
+          <p:cNvSpPr/>
+          <p:nvPr/>
+        </p:nvSpPr>
+        <p:spPr>
+          <a:xfrm>
+            <a:off x="786384" y="2350008"/>
+            <a:ext cx="274320" cy="274320"/>
           </a:xfrm>
           <a:prstGeom prst="rect">
             <a:avLst/>
@@ -19246,7 +19600,7 @@
                 <a:ea typeface="Calibri" pitchFamily="34" charset="-122"/>
                 <a:cs typeface="Calibri" pitchFamily="34" charset="-120"/>
               </a:rPr>
-              <a:t>1</a:t>
+              <a:t>2</a:t>
             </a:r>
             <a:endParaRPr lang="en-US" sz="1300" dirty="0"/>
           </a:p>
@@ -19254,30 +19608,30 @@
       </p:sp>
       <p:sp>
         <p:nvSpPr>
-          <p:cNvPr id="8" name="Text 6"/>
-          <p:cNvSpPr/>
-          <p:nvPr/>
-        </p:nvSpPr>
-        <p:spPr>
-          <a:xfrm>
-            <a:off x="1298448" y="1883664"/>
-            <a:ext cx="4023360" cy="256032"/>
-          </a:xfrm>
-          <a:prstGeom prst="rect">
-            <a:avLst/>
-          </a:prstGeom>
-          <a:noFill/>
-          <a:ln/>
-        </p:spPr>
-        <p:txBody>
-          <a:bodyPr wrap="square" lIns="0" tIns="0" rIns="0" bIns="0" rtlCol="0" anchor="t"/>
-          <a:lstStyle/>
-          <a:p>
-            <a:pPr indent="0" marL="0">
-              <a:buNone/>
-            </a:pPr>
-            <a:r>
-              <a:rPr lang="en-US" sz="1200" b="1" dirty="0">
+          <p:cNvPr id="14" name="Text 12"/>
+          <p:cNvSpPr/>
+          <p:nvPr/>
+        </p:nvSpPr>
+        <p:spPr>
+          <a:xfrm>
+            <a:off x="1207008" y="2295144"/>
+            <a:ext cx="4663440" cy="237744"/>
+          </a:xfrm>
+          <a:prstGeom prst="rect">
+            <a:avLst/>
+          </a:prstGeom>
+          <a:noFill/>
+          <a:ln/>
+        </p:spPr>
+        <p:txBody>
+          <a:bodyPr wrap="square" lIns="0" tIns="0" rIns="0" bIns="0" rtlCol="0" anchor="t"/>
+          <a:lstStyle/>
+          <a:p>
+            <a:pPr indent="0" marL="0">
+              <a:buNone/>
+            </a:pPr>
+            <a:r>
+              <a:rPr lang="en-US" sz="1150" b="1" dirty="0">
                 <a:solidFill>
                   <a:srgbClr val="FFFFFF"/>
                 </a:solidFill>
@@ -19287,36 +19641,36 @@
               </a:rPr>
               <a:t>Koi Unified - Execute Endpoint Script</a:t>
             </a:r>
-            <a:endParaRPr lang="en-US" sz="1200" dirty="0"/>
-          </a:p>
-        </p:txBody>
-      </p:sp>
-      <p:sp>
-        <p:nvSpPr>
-          <p:cNvPr id="9" name="Text 7"/>
-          <p:cNvSpPr/>
-          <p:nvPr/>
-        </p:nvSpPr>
-        <p:spPr>
-          <a:xfrm>
-            <a:off x="1298448" y="2157984"/>
-            <a:ext cx="4023360" cy="237744"/>
-          </a:xfrm>
-          <a:prstGeom prst="rect">
-            <a:avLst/>
-          </a:prstGeom>
-          <a:noFill/>
-          <a:ln/>
-        </p:spPr>
-        <p:txBody>
-          <a:bodyPr wrap="square" lIns="0" tIns="0" rIns="0" bIns="0" rtlCol="0" anchor="t"/>
-          <a:lstStyle/>
-          <a:p>
-            <a:pPr indent="0" marL="0">
-              <a:buNone/>
-            </a:pPr>
-            <a:r>
-              <a:rPr lang="en-US" sz="1000" dirty="0">
+            <a:endParaRPr lang="en-US" sz="1150" dirty="0"/>
+          </a:p>
+        </p:txBody>
+      </p:sp>
+      <p:sp>
+        <p:nvSpPr>
+          <p:cNvPr id="15" name="Text 13"/>
+          <p:cNvSpPr/>
+          <p:nvPr/>
+        </p:nvSpPr>
+        <p:spPr>
+          <a:xfrm>
+            <a:off x="1207008" y="2523744"/>
+            <a:ext cx="4663440" cy="201168"/>
+          </a:xfrm>
+          <a:prstGeom prst="rect">
+            <a:avLst/>
+          </a:prstGeom>
+          <a:noFill/>
+          <a:ln/>
+        </p:spPr>
+        <p:txBody>
+          <a:bodyPr wrap="square" lIns="0" tIns="0" rIns="0" bIns="0" rtlCol="0" anchor="t"/>
+          <a:lstStyle/>
+          <a:p>
+            <a:pPr indent="0" marL="0">
+              <a:buNone/>
+            </a:pPr>
+            <a:r>
+              <a:rPr lang="en-US" sz="950" dirty="0">
                 <a:solidFill>
                   <a:srgbClr val="6E747E"/>
                 </a:solidFill>
@@ -19324,22 +19678,22 @@
                 <a:ea typeface="Calibri" pitchFamily="34" charset="-122"/>
                 <a:cs typeface="Calibri" pitchFamily="34" charset="-120"/>
               </a:rPr>
-              <a:t>Playbooks → Import</a:t>
-            </a:r>
-            <a:endParaRPr lang="en-US" sz="1000" dirty="0"/>
-          </a:p>
-        </p:txBody>
-      </p:sp>
-      <p:sp>
-        <p:nvSpPr>
-          <p:cNvPr id="10" name="Text 8"/>
-          <p:cNvSpPr/>
-          <p:nvPr/>
-        </p:nvSpPr>
-        <p:spPr>
-          <a:xfrm>
-            <a:off x="5577840" y="1993392"/>
-            <a:ext cx="5760720" cy="274320"/>
+              <a:t>Automation → Playbooks → Import</a:t>
+            </a:r>
+            <a:endParaRPr lang="en-US" sz="950" dirty="0"/>
+          </a:p>
+        </p:txBody>
+      </p:sp>
+      <p:sp>
+        <p:nvSpPr>
+          <p:cNvPr id="16" name="Text 14"/>
+          <p:cNvSpPr/>
+          <p:nvPr/>
+        </p:nvSpPr>
+        <p:spPr>
+          <a:xfrm>
+            <a:off x="6035040" y="2395728"/>
+            <a:ext cx="5303520" cy="274320"/>
           </a:xfrm>
           <a:prstGeom prst="rect">
             <a:avLst/>
@@ -19363,7 +19717,7 @@
                 <a:ea typeface="Calibri" pitchFamily="34" charset="-122"/>
                 <a:cs typeface="Calibri" pitchFamily="34" charset="-120"/>
               </a:rPr>
-              <a:t>Import first — the others reference it by name.</a:t>
+              <a:t>Selects due endpoints, runs, marks.</a:t>
             </a:r>
             <a:endParaRPr lang="en-US" sz="1050" dirty="0"/>
           </a:p>
@@ -19371,18 +19725,18 @@
       </p:sp>
       <p:sp>
         <p:nvSpPr>
-          <p:cNvPr id="11" name="Shape 9"/>
-          <p:cNvSpPr/>
-          <p:nvPr/>
-        </p:nvSpPr>
-        <p:spPr>
-          <a:xfrm>
-            <a:off x="548640" y="2651760"/>
-            <a:ext cx="11064240" cy="768096"/>
+          <p:cNvPr id="17" name="Shape 15"/>
+          <p:cNvSpPr/>
+          <p:nvPr/>
+        </p:nvSpPr>
+        <p:spPr>
+          <a:xfrm>
+            <a:off x="548640" y="2834640"/>
+            <a:ext cx="11064240" cy="512064"/>
           </a:xfrm>
           <a:prstGeom prst="roundRect">
             <a:avLst>
-              <a:gd name="adj" fmla="val 5952"/>
+              <a:gd name="adj" fmla="val 8929"/>
             </a:avLst>
           </a:prstGeom>
           <a:solidFill>
@@ -19398,18 +19752,18 @@
       </p:sp>
       <p:sp>
         <p:nvSpPr>
-          <p:cNvPr id="12" name="Shape 10"/>
-          <p:cNvSpPr/>
-          <p:nvPr/>
-        </p:nvSpPr>
-        <p:spPr>
-          <a:xfrm>
-            <a:off x="804672" y="2871216"/>
-            <a:ext cx="310896" cy="310896"/>
+          <p:cNvPr id="18" name="Shape 16"/>
+          <p:cNvSpPr/>
+          <p:nvPr/>
+        </p:nvSpPr>
+        <p:spPr>
+          <a:xfrm>
+            <a:off x="786384" y="2953512"/>
+            <a:ext cx="274320" cy="274320"/>
           </a:xfrm>
           <a:prstGeom prst="roundRect">
             <a:avLst>
-              <a:gd name="adj" fmla="val 26471"/>
+              <a:gd name="adj" fmla="val 30000"/>
             </a:avLst>
           </a:prstGeom>
           <a:solidFill>
@@ -19425,14 +19779,14 @@
       </p:sp>
       <p:sp>
         <p:nvSpPr>
-          <p:cNvPr id="13" name="Text 11"/>
-          <p:cNvSpPr/>
-          <p:nvPr/>
-        </p:nvSpPr>
-        <p:spPr>
-          <a:xfrm>
-            <a:off x="804672" y="2871216"/>
-            <a:ext cx="310896" cy="310896"/>
+          <p:cNvPr id="19" name="Text 17"/>
+          <p:cNvSpPr/>
+          <p:nvPr/>
+        </p:nvSpPr>
+        <p:spPr>
+          <a:xfrm>
+            <a:off x="786384" y="2953512"/>
+            <a:ext cx="274320" cy="274320"/>
           </a:xfrm>
           <a:prstGeom prst="rect">
             <a:avLst/>
@@ -19456,7 +19810,7 @@
                 <a:ea typeface="Calibri" pitchFamily="34" charset="-122"/>
                 <a:cs typeface="Calibri" pitchFamily="34" charset="-120"/>
               </a:rPr>
-              <a:t>2</a:t>
+              <a:t>3</a:t>
             </a:r>
             <a:endParaRPr lang="en-US" sz="1300" dirty="0"/>
           </a:p>
@@ -19464,30 +19818,30 @@
       </p:sp>
       <p:sp>
         <p:nvSpPr>
-          <p:cNvPr id="14" name="Text 12"/>
-          <p:cNvSpPr/>
-          <p:nvPr/>
-        </p:nvSpPr>
-        <p:spPr>
-          <a:xfrm>
-            <a:off x="1298448" y="2798064"/>
-            <a:ext cx="4023360" cy="256032"/>
-          </a:xfrm>
-          <a:prstGeom prst="rect">
-            <a:avLst/>
-          </a:prstGeom>
-          <a:noFill/>
-          <a:ln/>
-        </p:spPr>
-        <p:txBody>
-          <a:bodyPr wrap="square" lIns="0" tIns="0" rIns="0" bIns="0" rtlCol="0" anchor="t"/>
-          <a:lstStyle/>
-          <a:p>
-            <a:pPr indent="0" marL="0">
-              <a:buNone/>
-            </a:pPr>
-            <a:r>
-              <a:rPr lang="en-US" sz="1200" b="1" dirty="0">
+          <p:cNvPr id="20" name="Text 18"/>
+          <p:cNvSpPr/>
+          <p:nvPr/>
+        </p:nvSpPr>
+        <p:spPr>
+          <a:xfrm>
+            <a:off x="1207008" y="2898648"/>
+            <a:ext cx="4663440" cy="237744"/>
+          </a:xfrm>
+          <a:prstGeom prst="rect">
+            <a:avLst/>
+          </a:prstGeom>
+          <a:noFill/>
+          <a:ln/>
+        </p:spPr>
+        <p:txBody>
+          <a:bodyPr wrap="square" lIns="0" tIns="0" rIns="0" bIns="0" rtlCol="0" anchor="t"/>
+          <a:lstStyle/>
+          <a:p>
+            <a:pPr indent="0" marL="0">
+              <a:buNone/>
+            </a:pPr>
+            <a:r>
+              <a:rPr lang="en-US" sz="1150" b="1" dirty="0">
                 <a:solidFill>
                   <a:srgbClr val="FFFFFF"/>
                 </a:solidFill>
@@ -19497,36 +19851,36 @@
               </a:rPr>
               <a:t>Koi Unified - Process Config Entry</a:t>
             </a:r>
-            <a:endParaRPr lang="en-US" sz="1200" dirty="0"/>
-          </a:p>
-        </p:txBody>
-      </p:sp>
-      <p:sp>
-        <p:nvSpPr>
-          <p:cNvPr id="15" name="Text 13"/>
-          <p:cNvSpPr/>
-          <p:nvPr/>
-        </p:nvSpPr>
-        <p:spPr>
-          <a:xfrm>
-            <a:off x="1298448" y="3072384"/>
-            <a:ext cx="4023360" cy="237744"/>
-          </a:xfrm>
-          <a:prstGeom prst="rect">
-            <a:avLst/>
-          </a:prstGeom>
-          <a:noFill/>
-          <a:ln/>
-        </p:spPr>
-        <p:txBody>
-          <a:bodyPr wrap="square" lIns="0" tIns="0" rIns="0" bIns="0" rtlCol="0" anchor="t"/>
-          <a:lstStyle/>
-          <a:p>
-            <a:pPr indent="0" marL="0">
-              <a:buNone/>
-            </a:pPr>
-            <a:r>
-              <a:rPr lang="en-US" sz="1000" dirty="0">
+            <a:endParaRPr lang="en-US" sz="1150" dirty="0"/>
+          </a:p>
+        </p:txBody>
+      </p:sp>
+      <p:sp>
+        <p:nvSpPr>
+          <p:cNvPr id="21" name="Text 19"/>
+          <p:cNvSpPr/>
+          <p:nvPr/>
+        </p:nvSpPr>
+        <p:spPr>
+          <a:xfrm>
+            <a:off x="1207008" y="3127248"/>
+            <a:ext cx="4663440" cy="201168"/>
+          </a:xfrm>
+          <a:prstGeom prst="rect">
+            <a:avLst/>
+          </a:prstGeom>
+          <a:noFill/>
+          <a:ln/>
+        </p:spPr>
+        <p:txBody>
+          <a:bodyPr wrap="square" lIns="0" tIns="0" rIns="0" bIns="0" rtlCol="0" anchor="t"/>
+          <a:lstStyle/>
+          <a:p>
+            <a:pPr indent="0" marL="0">
+              <a:buNone/>
+            </a:pPr>
+            <a:r>
+              <a:rPr lang="en-US" sz="950" dirty="0">
                 <a:solidFill>
                   <a:srgbClr val="6E747E"/>
                 </a:solidFill>
@@ -19534,22 +19888,22 @@
                 <a:ea typeface="Calibri" pitchFamily="34" charset="-122"/>
                 <a:cs typeface="Calibri" pitchFamily="34" charset="-120"/>
               </a:rPr>
-              <a:t>Playbooks → Import</a:t>
-            </a:r>
-            <a:endParaRPr lang="en-US" sz="1000" dirty="0"/>
-          </a:p>
-        </p:txBody>
-      </p:sp>
-      <p:sp>
-        <p:nvSpPr>
-          <p:cNvPr id="16" name="Text 14"/>
-          <p:cNvSpPr/>
-          <p:nvPr/>
-        </p:nvSpPr>
-        <p:spPr>
-          <a:xfrm>
-            <a:off x="5577840" y="2907792"/>
-            <a:ext cx="5760720" cy="274320"/>
+              <a:t>Automation → Playbooks → Import</a:t>
+            </a:r>
+            <a:endParaRPr lang="en-US" sz="950" dirty="0"/>
+          </a:p>
+        </p:txBody>
+      </p:sp>
+      <p:sp>
+        <p:nvSpPr>
+          <p:cNvPr id="22" name="Text 20"/>
+          <p:cNvSpPr/>
+          <p:nvPr/>
+        </p:nvSpPr>
+        <p:spPr>
+          <a:xfrm>
+            <a:off x="6035040" y="2999232"/>
+            <a:ext cx="5303520" cy="274320"/>
           </a:xfrm>
           <a:prstGeom prst="rect">
             <a:avLst/>
@@ -19573,7 +19927,7 @@
                 <a:ea typeface="Calibri" pitchFamily="34" charset="-122"/>
                 <a:cs typeface="Calibri" pitchFamily="34" charset="-120"/>
               </a:rPr>
-              <a:t>Import second — calls the executor above.</a:t>
+              <a:t>Calls the executor above.</a:t>
             </a:r>
             <a:endParaRPr lang="en-US" sz="1050" dirty="0"/>
           </a:p>
@@ -19581,18 +19935,18 @@
       </p:sp>
       <p:sp>
         <p:nvSpPr>
-          <p:cNvPr id="17" name="Shape 15"/>
-          <p:cNvSpPr/>
-          <p:nvPr/>
-        </p:nvSpPr>
-        <p:spPr>
-          <a:xfrm>
-            <a:off x="548640" y="3566160"/>
-            <a:ext cx="11064240" cy="768096"/>
+          <p:cNvPr id="23" name="Shape 21"/>
+          <p:cNvSpPr/>
+          <p:nvPr/>
+        </p:nvSpPr>
+        <p:spPr>
+          <a:xfrm>
+            <a:off x="548640" y="3438144"/>
+            <a:ext cx="11064240" cy="512064"/>
           </a:xfrm>
           <a:prstGeom prst="roundRect">
             <a:avLst>
-              <a:gd name="adj" fmla="val 5952"/>
+              <a:gd name="adj" fmla="val 8929"/>
             </a:avLst>
           </a:prstGeom>
           <a:solidFill>
@@ -19608,18 +19962,18 @@
       </p:sp>
       <p:sp>
         <p:nvSpPr>
-          <p:cNvPr id="18" name="Shape 16"/>
-          <p:cNvSpPr/>
-          <p:nvPr/>
-        </p:nvSpPr>
-        <p:spPr>
-          <a:xfrm>
-            <a:off x="804672" y="3785616"/>
-            <a:ext cx="310896" cy="310896"/>
+          <p:cNvPr id="24" name="Shape 22"/>
+          <p:cNvSpPr/>
+          <p:nvPr/>
+        </p:nvSpPr>
+        <p:spPr>
+          <a:xfrm>
+            <a:off x="786384" y="3557016"/>
+            <a:ext cx="274320" cy="274320"/>
           </a:xfrm>
           <a:prstGeom prst="roundRect">
             <a:avLst>
-              <a:gd name="adj" fmla="val 26471"/>
+              <a:gd name="adj" fmla="val 30000"/>
             </a:avLst>
           </a:prstGeom>
           <a:solidFill>
@@ -19635,14 +19989,14 @@
       </p:sp>
       <p:sp>
         <p:nvSpPr>
-          <p:cNvPr id="19" name="Text 17"/>
-          <p:cNvSpPr/>
-          <p:nvPr/>
-        </p:nvSpPr>
-        <p:spPr>
-          <a:xfrm>
-            <a:off x="804672" y="3785616"/>
-            <a:ext cx="310896" cy="310896"/>
+          <p:cNvPr id="25" name="Text 23"/>
+          <p:cNvSpPr/>
+          <p:nvPr/>
+        </p:nvSpPr>
+        <p:spPr>
+          <a:xfrm>
+            <a:off x="786384" y="3557016"/>
+            <a:ext cx="274320" cy="274320"/>
           </a:xfrm>
           <a:prstGeom prst="rect">
             <a:avLst/>
@@ -19666,7 +20020,7 @@
                 <a:ea typeface="Calibri" pitchFamily="34" charset="-122"/>
                 <a:cs typeface="Calibri" pitchFamily="34" charset="-120"/>
               </a:rPr>
-              <a:t>3</a:t>
+              <a:t>4</a:t>
             </a:r>
             <a:endParaRPr lang="en-US" sz="1300" dirty="0"/>
           </a:p>
@@ -19674,30 +20028,30 @@
       </p:sp>
       <p:sp>
         <p:nvSpPr>
-          <p:cNvPr id="20" name="Text 18"/>
-          <p:cNvSpPr/>
-          <p:nvPr/>
-        </p:nvSpPr>
-        <p:spPr>
-          <a:xfrm>
-            <a:off x="1298448" y="3712464"/>
-            <a:ext cx="4023360" cy="256032"/>
-          </a:xfrm>
-          <a:prstGeom prst="rect">
-            <a:avLst/>
-          </a:prstGeom>
-          <a:noFill/>
-          <a:ln/>
-        </p:spPr>
-        <p:txBody>
-          <a:bodyPr wrap="square" lIns="0" tIns="0" rIns="0" bIns="0" rtlCol="0" anchor="t"/>
-          <a:lstStyle/>
-          <a:p>
-            <a:pPr indent="0" marL="0">
-              <a:buNone/>
-            </a:pPr>
-            <a:r>
-              <a:rPr lang="en-US" sz="1200" b="1" dirty="0">
+          <p:cNvPr id="26" name="Text 24"/>
+          <p:cNvSpPr/>
+          <p:nvPr/>
+        </p:nvSpPr>
+        <p:spPr>
+          <a:xfrm>
+            <a:off x="1207008" y="3502152"/>
+            <a:ext cx="4663440" cy="237744"/>
+          </a:xfrm>
+          <a:prstGeom prst="rect">
+            <a:avLst/>
+          </a:prstGeom>
+          <a:noFill/>
+          <a:ln/>
+        </p:spPr>
+        <p:txBody>
+          <a:bodyPr wrap="square" lIns="0" tIns="0" rIns="0" bIns="0" rtlCol="0" anchor="t"/>
+          <a:lstStyle/>
+          <a:p>
+            <a:pPr indent="0" marL="0">
+              <a:buNone/>
+            </a:pPr>
+            <a:r>
+              <a:rPr lang="en-US" sz="1150" b="1" dirty="0">
                 <a:solidFill>
                   <a:srgbClr val="FFFFFF"/>
                 </a:solidFill>
@@ -19705,38 +20059,38 @@
                 <a:ea typeface="Calibri" pitchFamily="34" charset="-122"/>
                 <a:cs typeface="Calibri" pitchFamily="34" charset="-120"/>
               </a:rPr>
-              <a:t>Koi Unified - Script Runner</a:t>
-            </a:r>
-            <a:endParaRPr lang="en-US" sz="1200" dirty="0"/>
-          </a:p>
-        </p:txBody>
-      </p:sp>
-      <p:sp>
-        <p:nvSpPr>
-          <p:cNvPr id="21" name="Text 19"/>
-          <p:cNvSpPr/>
-          <p:nvPr/>
-        </p:nvSpPr>
-        <p:spPr>
-          <a:xfrm>
-            <a:off x="1298448" y="3986784"/>
-            <a:ext cx="4023360" cy="237744"/>
-          </a:xfrm>
-          <a:prstGeom prst="rect">
-            <a:avLst/>
-          </a:prstGeom>
-          <a:noFill/>
-          <a:ln/>
-        </p:spPr>
-        <p:txBody>
-          <a:bodyPr wrap="square" lIns="0" tIns="0" rIns="0" bIns="0" rtlCol="0" anchor="t"/>
-          <a:lstStyle/>
-          <a:p>
-            <a:pPr indent="0" marL="0">
-              <a:buNone/>
-            </a:pPr>
-            <a:r>
-              <a:rPr lang="en-US" sz="1000" dirty="0">
+              <a:t>Koi Unified - Refresh Entry</a:t>
+            </a:r>
+            <a:endParaRPr lang="en-US" sz="1150" dirty="0"/>
+          </a:p>
+        </p:txBody>
+      </p:sp>
+      <p:sp>
+        <p:nvSpPr>
+          <p:cNvPr id="27" name="Text 25"/>
+          <p:cNvSpPr/>
+          <p:nvPr/>
+        </p:nvSpPr>
+        <p:spPr>
+          <a:xfrm>
+            <a:off x="1207008" y="3730752"/>
+            <a:ext cx="4663440" cy="201168"/>
+          </a:xfrm>
+          <a:prstGeom prst="rect">
+            <a:avLst/>
+          </a:prstGeom>
+          <a:noFill/>
+          <a:ln/>
+        </p:spPr>
+        <p:txBody>
+          <a:bodyPr wrap="square" lIns="0" tIns="0" rIns="0" bIns="0" rtlCol="0" anchor="t"/>
+          <a:lstStyle/>
+          <a:p>
+            <a:pPr indent="0" marL="0">
+              <a:buNone/>
+            </a:pPr>
+            <a:r>
+              <a:rPr lang="en-US" sz="950" dirty="0">
                 <a:solidFill>
                   <a:srgbClr val="6E747E"/>
                 </a:solidFill>
@@ -19744,22 +20098,22 @@
                 <a:ea typeface="Calibri" pitchFamily="34" charset="-122"/>
                 <a:cs typeface="Calibri" pitchFamily="34" charset="-120"/>
               </a:rPr>
-              <a:t>Playbooks → Import</a:t>
-            </a:r>
-            <a:endParaRPr lang="en-US" sz="1000" dirty="0"/>
-          </a:p>
-        </p:txBody>
-      </p:sp>
-      <p:sp>
-        <p:nvSpPr>
-          <p:cNvPr id="22" name="Text 20"/>
-          <p:cNvSpPr/>
-          <p:nvPr/>
-        </p:nvSpPr>
-        <p:spPr>
-          <a:xfrm>
-            <a:off x="5577840" y="3822192"/>
-            <a:ext cx="5760720" cy="274320"/>
+              <a:t>Automation → Playbooks → Import</a:t>
+            </a:r>
+            <a:endParaRPr lang="en-US" sz="950" dirty="0"/>
+          </a:p>
+        </p:txBody>
+      </p:sp>
+      <p:sp>
+        <p:nvSpPr>
+          <p:cNvPr id="28" name="Text 26"/>
+          <p:cNvSpPr/>
+          <p:nvPr/>
+        </p:nvSpPr>
+        <p:spPr>
+          <a:xfrm>
+            <a:off x="6035040" y="3602736"/>
+            <a:ext cx="5303520" cy="274320"/>
           </a:xfrm>
           <a:prstGeom prst="rect">
             <a:avLst/>
@@ -19783,7 +20137,7 @@
                 <a:ea typeface="Calibri" pitchFamily="34" charset="-122"/>
                 <a:cs typeface="Calibri" pitchFamily="34" charset="-120"/>
               </a:rPr>
-              <a:t>Import third — the Job entry point.</a:t>
+              <a:t>Walks the group, upserts the tracker.</a:t>
             </a:r>
             <a:endParaRPr lang="en-US" sz="1050" dirty="0"/>
           </a:p>
@@ -19791,18 +20145,18 @@
       </p:sp>
       <p:sp>
         <p:nvSpPr>
-          <p:cNvPr id="23" name="Shape 21"/>
-          <p:cNvSpPr/>
-          <p:nvPr/>
-        </p:nvSpPr>
-        <p:spPr>
-          <a:xfrm>
-            <a:off x="548640" y="4480560"/>
-            <a:ext cx="11064240" cy="768096"/>
+          <p:cNvPr id="29" name="Shape 27"/>
+          <p:cNvSpPr/>
+          <p:nvPr/>
+        </p:nvSpPr>
+        <p:spPr>
+          <a:xfrm>
+            <a:off x="548640" y="4041648"/>
+            <a:ext cx="11064240" cy="512064"/>
           </a:xfrm>
           <a:prstGeom prst="roundRect">
             <a:avLst>
-              <a:gd name="adj" fmla="val 5952"/>
+              <a:gd name="adj" fmla="val 8929"/>
             </a:avLst>
           </a:prstGeom>
           <a:solidFill>
@@ -19818,26 +20172,26 @@
       </p:sp>
       <p:sp>
         <p:nvSpPr>
-          <p:cNvPr id="24" name="Shape 22"/>
-          <p:cNvSpPr/>
-          <p:nvPr/>
-        </p:nvSpPr>
-        <p:spPr>
-          <a:xfrm>
-            <a:off x="804672" y="4700016"/>
-            <a:ext cx="310896" cy="310896"/>
+          <p:cNvPr id="30" name="Shape 28"/>
+          <p:cNvSpPr/>
+          <p:nvPr/>
+        </p:nvSpPr>
+        <p:spPr>
+          <a:xfrm>
+            <a:off x="786384" y="4160520"/>
+            <a:ext cx="274320" cy="274320"/>
           </a:xfrm>
           <a:prstGeom prst="roundRect">
             <a:avLst>
-              <a:gd name="adj" fmla="val 26471"/>
+              <a:gd name="adj" fmla="val 30000"/>
             </a:avLst>
           </a:prstGeom>
           <a:solidFill>
-            <a:srgbClr val="E8551F"/>
+            <a:srgbClr val="22D3EE"/>
           </a:solidFill>
           <a:ln w="12700">
             <a:solidFill>
-              <a:srgbClr val="E8551F"/>
+              <a:srgbClr val="22D3EE"/>
             </a:solidFill>
             <a:prstDash val="solid"/>
           </a:ln>
@@ -19845,14 +20199,14 @@
       </p:sp>
       <p:sp>
         <p:nvSpPr>
-          <p:cNvPr id="25" name="Text 23"/>
-          <p:cNvSpPr/>
-          <p:nvPr/>
-        </p:nvSpPr>
-        <p:spPr>
-          <a:xfrm>
-            <a:off x="804672" y="4700016"/>
-            <a:ext cx="310896" cy="310896"/>
+          <p:cNvPr id="31" name="Text 29"/>
+          <p:cNvSpPr/>
+          <p:nvPr/>
+        </p:nvSpPr>
+        <p:spPr>
+          <a:xfrm>
+            <a:off x="786384" y="4160520"/>
+            <a:ext cx="274320" cy="274320"/>
           </a:xfrm>
           <a:prstGeom prst="rect">
             <a:avLst/>
@@ -19876,7 +20230,7 @@
                 <a:ea typeface="Calibri" pitchFamily="34" charset="-122"/>
                 <a:cs typeface="Calibri" pitchFamily="34" charset="-120"/>
               </a:rPr>
-              <a:t>4</a:t>
+              <a:t>5</a:t>
             </a:r>
             <a:endParaRPr lang="en-US" sz="1300" dirty="0"/>
           </a:p>
@@ -19884,30 +20238,30 @@
       </p:sp>
       <p:sp>
         <p:nvSpPr>
-          <p:cNvPr id="26" name="Text 24"/>
-          <p:cNvSpPr/>
-          <p:nvPr/>
-        </p:nvSpPr>
-        <p:spPr>
-          <a:xfrm>
-            <a:off x="1298448" y="4626864"/>
-            <a:ext cx="4023360" cy="256032"/>
-          </a:xfrm>
-          <a:prstGeom prst="rect">
-            <a:avLst/>
-          </a:prstGeom>
-          <a:noFill/>
-          <a:ln/>
-        </p:spPr>
-        <p:txBody>
-          <a:bodyPr wrap="square" lIns="0" tIns="0" rIns="0" bIns="0" rtlCol="0" anchor="t"/>
-          <a:lstStyle/>
-          <a:p>
-            <a:pPr indent="0" marL="0">
-              <a:buNone/>
-            </a:pPr>
-            <a:r>
-              <a:rPr lang="en-US" sz="1200" b="1" dirty="0">
+          <p:cNvPr id="32" name="Text 30"/>
+          <p:cNvSpPr/>
+          <p:nvPr/>
+        </p:nvSpPr>
+        <p:spPr>
+          <a:xfrm>
+            <a:off x="1207008" y="4105656"/>
+            <a:ext cx="4663440" cy="237744"/>
+          </a:xfrm>
+          <a:prstGeom prst="rect">
+            <a:avLst/>
+          </a:prstGeom>
+          <a:noFill/>
+          <a:ln/>
+        </p:spPr>
+        <p:txBody>
+          <a:bodyPr wrap="square" lIns="0" tIns="0" rIns="0" bIns="0" rtlCol="0" anchor="t"/>
+          <a:lstStyle/>
+          <a:p>
+            <a:pPr indent="0" marL="0">
+              <a:buNone/>
+            </a:pPr>
+            <a:r>
+              <a:rPr lang="en-US" sz="1150" b="1" dirty="0">
                 <a:solidFill>
                   <a:srgbClr val="FFFFFF"/>
                 </a:solidFill>
@@ -19915,38 +20269,38 @@
                 <a:ea typeface="Calibri" pitchFamily="34" charset="-122"/>
                 <a:cs typeface="Calibri" pitchFamily="34" charset="-120"/>
               </a:rPr>
-              <a:t>Koi Script Runner</a:t>
-            </a:r>
-            <a:endParaRPr lang="en-US" sz="1200" dirty="0"/>
-          </a:p>
-        </p:txBody>
-      </p:sp>
-      <p:sp>
-        <p:nvSpPr>
-          <p:cNvPr id="27" name="Text 25"/>
-          <p:cNvSpPr/>
-          <p:nvPr/>
-        </p:nvSpPr>
-        <p:spPr>
-          <a:xfrm>
-            <a:off x="1298448" y="4901184"/>
-            <a:ext cx="4023360" cy="237744"/>
-          </a:xfrm>
-          <a:prstGeom prst="rect">
-            <a:avLst/>
-          </a:prstGeom>
-          <a:noFill/>
-          <a:ln/>
-        </p:spPr>
-        <p:txBody>
-          <a:bodyPr wrap="square" lIns="0" tIns="0" rIns="0" bIns="0" rtlCol="0" anchor="t"/>
-          <a:lstStyle/>
-          <a:p>
-            <a:pPr indent="0" marL="0">
-              <a:buNone/>
-            </a:pPr>
-            <a:r>
-              <a:rPr lang="en-US" sz="1000" dirty="0">
+              <a:t>Koi Unified - Refresh Tracker</a:t>
+            </a:r>
+            <a:endParaRPr lang="en-US" sz="1150" dirty="0"/>
+          </a:p>
+        </p:txBody>
+      </p:sp>
+      <p:sp>
+        <p:nvSpPr>
+          <p:cNvPr id="33" name="Text 31"/>
+          <p:cNvSpPr/>
+          <p:nvPr/>
+        </p:nvSpPr>
+        <p:spPr>
+          <a:xfrm>
+            <a:off x="1207008" y="4334256"/>
+            <a:ext cx="4663440" cy="201168"/>
+          </a:xfrm>
+          <a:prstGeom prst="rect">
+            <a:avLst/>
+          </a:prstGeom>
+          <a:noFill/>
+          <a:ln/>
+        </p:spPr>
+        <p:txBody>
+          <a:bodyPr wrap="square" lIns="0" tIns="0" rIns="0" bIns="0" rtlCol="0" anchor="t"/>
+          <a:lstStyle/>
+          <a:p>
+            <a:pPr indent="0" marL="0">
+              <a:buNone/>
+            </a:pPr>
+            <a:r>
+              <a:rPr lang="en-US" sz="950" dirty="0">
                 <a:solidFill>
                   <a:srgbClr val="6E747E"/>
                 </a:solidFill>
@@ -19954,22 +20308,22 @@
                 <a:ea typeface="Calibri" pitchFamily="34" charset="-122"/>
                 <a:cs typeface="Calibri" pitchFamily="34" charset="-120"/>
               </a:rPr>
-              <a:t>Object Setup → Lists, type JSON</a:t>
-            </a:r>
-            <a:endParaRPr lang="en-US" sz="1000" dirty="0"/>
-          </a:p>
-        </p:txBody>
-      </p:sp>
-      <p:sp>
-        <p:nvSpPr>
-          <p:cNvPr id="28" name="Text 26"/>
-          <p:cNvSpPr/>
-          <p:nvPr/>
-        </p:nvSpPr>
-        <p:spPr>
-          <a:xfrm>
-            <a:off x="5577840" y="4736592"/>
-            <a:ext cx="5760720" cy="274320"/>
+              <a:t>Automation → Playbooks → Import</a:t>
+            </a:r>
+            <a:endParaRPr lang="en-US" sz="950" dirty="0"/>
+          </a:p>
+        </p:txBody>
+      </p:sp>
+      <p:sp>
+        <p:nvSpPr>
+          <p:cNvPr id="34" name="Text 32"/>
+          <p:cNvSpPr/>
+          <p:nvPr/>
+        </p:nvSpPr>
+        <p:spPr>
+          <a:xfrm>
+            <a:off x="6035040" y="4206240"/>
+            <a:ext cx="5303520" cy="274320"/>
           </a:xfrm>
           <a:prstGeom prst="rect">
             <a:avLst/>
@@ -19993,7 +20347,7 @@
                 <a:ea typeface="Calibri" pitchFamily="34" charset="-122"/>
                 <a:cs typeface="Calibri" pitchFamily="34" charset="-120"/>
               </a:rPr>
-              <a:t>The configuration array. Name must be exact.</a:t>
+              <a:t>Refresh job entry — calls Refresh Entry.</a:t>
             </a:r>
             <a:endParaRPr lang="en-US" sz="1050" dirty="0"/>
           </a:p>
@@ -20001,18 +20355,228 @@
       </p:sp>
       <p:sp>
         <p:nvSpPr>
-          <p:cNvPr id="29" name="Shape 27"/>
-          <p:cNvSpPr/>
-          <p:nvPr/>
-        </p:nvSpPr>
-        <p:spPr>
-          <a:xfrm>
-            <a:off x="548640" y="5413248"/>
-            <a:ext cx="11064240" cy="969264"/>
+          <p:cNvPr id="35" name="Shape 33"/>
+          <p:cNvSpPr/>
+          <p:nvPr/>
+        </p:nvSpPr>
+        <p:spPr>
+          <a:xfrm>
+            <a:off x="548640" y="4645152"/>
+            <a:ext cx="11064240" cy="512064"/>
           </a:xfrm>
           <a:prstGeom prst="roundRect">
             <a:avLst>
-              <a:gd name="adj" fmla="val 4717"/>
+              <a:gd name="adj" fmla="val 8929"/>
+            </a:avLst>
+          </a:prstGeom>
+          <a:solidFill>
+            <a:srgbClr val="15171B"/>
+          </a:solidFill>
+          <a:ln w="12700">
+            <a:solidFill>
+              <a:srgbClr val="15171B"/>
+            </a:solidFill>
+            <a:prstDash val="solid"/>
+          </a:ln>
+        </p:spPr>
+      </p:sp>
+      <p:sp>
+        <p:nvSpPr>
+          <p:cNvPr id="36" name="Shape 34"/>
+          <p:cNvSpPr/>
+          <p:nvPr/>
+        </p:nvSpPr>
+        <p:spPr>
+          <a:xfrm>
+            <a:off x="786384" y="4764024"/>
+            <a:ext cx="274320" cy="274320"/>
+          </a:xfrm>
+          <a:prstGeom prst="roundRect">
+            <a:avLst>
+              <a:gd name="adj" fmla="val 30000"/>
+            </a:avLst>
+          </a:prstGeom>
+          <a:solidFill>
+            <a:srgbClr val="22D3EE"/>
+          </a:solidFill>
+          <a:ln w="12700">
+            <a:solidFill>
+              <a:srgbClr val="22D3EE"/>
+            </a:solidFill>
+            <a:prstDash val="solid"/>
+          </a:ln>
+        </p:spPr>
+      </p:sp>
+      <p:sp>
+        <p:nvSpPr>
+          <p:cNvPr id="37" name="Text 35"/>
+          <p:cNvSpPr/>
+          <p:nvPr/>
+        </p:nvSpPr>
+        <p:spPr>
+          <a:xfrm>
+            <a:off x="786384" y="4764024"/>
+            <a:ext cx="274320" cy="274320"/>
+          </a:xfrm>
+          <a:prstGeom prst="rect">
+            <a:avLst/>
+          </a:prstGeom>
+          <a:noFill/>
+          <a:ln/>
+        </p:spPr>
+        <p:txBody>
+          <a:bodyPr wrap="square" lIns="0" tIns="0" rIns="0" bIns="0" rtlCol="0" anchor="ctr"/>
+          <a:lstStyle/>
+          <a:p>
+            <a:pPr algn="ctr" indent="0" marL="0">
+              <a:buNone/>
+            </a:pPr>
+            <a:r>
+              <a:rPr lang="en-US" sz="1300" b="1" dirty="0">
+                <a:solidFill>
+                  <a:srgbClr val="FFFFFF"/>
+                </a:solidFill>
+                <a:latin typeface="Calibri" pitchFamily="34" charset="0"/>
+                <a:ea typeface="Calibri" pitchFamily="34" charset="-122"/>
+                <a:cs typeface="Calibri" pitchFamily="34" charset="-120"/>
+              </a:rPr>
+              <a:t>6</a:t>
+            </a:r>
+            <a:endParaRPr lang="en-US" sz="1300" dirty="0"/>
+          </a:p>
+        </p:txBody>
+      </p:sp>
+      <p:sp>
+        <p:nvSpPr>
+          <p:cNvPr id="38" name="Text 36"/>
+          <p:cNvSpPr/>
+          <p:nvPr/>
+        </p:nvSpPr>
+        <p:spPr>
+          <a:xfrm>
+            <a:off x="1207008" y="4709160"/>
+            <a:ext cx="4663440" cy="237744"/>
+          </a:xfrm>
+          <a:prstGeom prst="rect">
+            <a:avLst/>
+          </a:prstGeom>
+          <a:noFill/>
+          <a:ln/>
+        </p:spPr>
+        <p:txBody>
+          <a:bodyPr wrap="square" lIns="0" tIns="0" rIns="0" bIns="0" rtlCol="0" anchor="t"/>
+          <a:lstStyle/>
+          <a:p>
+            <a:pPr indent="0" marL="0">
+              <a:buNone/>
+            </a:pPr>
+            <a:r>
+              <a:rPr lang="en-US" sz="1150" b="1" dirty="0">
+                <a:solidFill>
+                  <a:srgbClr val="FFFFFF"/>
+                </a:solidFill>
+                <a:latin typeface="Calibri" pitchFamily="34" charset="0"/>
+                <a:ea typeface="Calibri" pitchFamily="34" charset="-122"/>
+                <a:cs typeface="Calibri" pitchFamily="34" charset="-120"/>
+              </a:rPr>
+              <a:t>Koi Unified - Script Runner</a:t>
+            </a:r>
+            <a:endParaRPr lang="en-US" sz="1150" dirty="0"/>
+          </a:p>
+        </p:txBody>
+      </p:sp>
+      <p:sp>
+        <p:nvSpPr>
+          <p:cNvPr id="39" name="Text 37"/>
+          <p:cNvSpPr/>
+          <p:nvPr/>
+        </p:nvSpPr>
+        <p:spPr>
+          <a:xfrm>
+            <a:off x="1207008" y="4937760"/>
+            <a:ext cx="4663440" cy="201168"/>
+          </a:xfrm>
+          <a:prstGeom prst="rect">
+            <a:avLst/>
+          </a:prstGeom>
+          <a:noFill/>
+          <a:ln/>
+        </p:spPr>
+        <p:txBody>
+          <a:bodyPr wrap="square" lIns="0" tIns="0" rIns="0" bIns="0" rtlCol="0" anchor="t"/>
+          <a:lstStyle/>
+          <a:p>
+            <a:pPr indent="0" marL="0">
+              <a:buNone/>
+            </a:pPr>
+            <a:r>
+              <a:rPr lang="en-US" sz="950" dirty="0">
+                <a:solidFill>
+                  <a:srgbClr val="6E747E"/>
+                </a:solidFill>
+                <a:latin typeface="Calibri" pitchFamily="34" charset="0"/>
+                <a:ea typeface="Calibri" pitchFamily="34" charset="-122"/>
+                <a:cs typeface="Calibri" pitchFamily="34" charset="-120"/>
+              </a:rPr>
+              <a:t>Automation → Playbooks → Import</a:t>
+            </a:r>
+            <a:endParaRPr lang="en-US" sz="950" dirty="0"/>
+          </a:p>
+        </p:txBody>
+      </p:sp>
+      <p:sp>
+        <p:nvSpPr>
+          <p:cNvPr id="40" name="Text 38"/>
+          <p:cNvSpPr/>
+          <p:nvPr/>
+        </p:nvSpPr>
+        <p:spPr>
+          <a:xfrm>
+            <a:off x="6035040" y="4809744"/>
+            <a:ext cx="5303520" cy="274320"/>
+          </a:xfrm>
+          <a:prstGeom prst="rect">
+            <a:avLst/>
+          </a:prstGeom>
+          <a:noFill/>
+          <a:ln/>
+        </p:spPr>
+        <p:txBody>
+          <a:bodyPr wrap="square" lIns="0" tIns="0" rIns="0" bIns="0" rtlCol="0" anchor="t"/>
+          <a:lstStyle/>
+          <a:p>
+            <a:pPr indent="0" marL="0">
+              <a:buNone/>
+            </a:pPr>
+            <a:r>
+              <a:rPr lang="en-US" sz="1050" dirty="0">
+                <a:solidFill>
+                  <a:srgbClr val="B4B7BD"/>
+                </a:solidFill>
+                <a:latin typeface="Calibri" pitchFamily="34" charset="0"/>
+                <a:ea typeface="Calibri" pitchFamily="34" charset="-122"/>
+                <a:cs typeface="Calibri" pitchFamily="34" charset="-120"/>
+              </a:rPr>
+              <a:t>Scan job entry — calls Process Config Entry.</a:t>
+            </a:r>
+            <a:endParaRPr lang="en-US" sz="1050" dirty="0"/>
+          </a:p>
+        </p:txBody>
+      </p:sp>
+      <p:sp>
+        <p:nvSpPr>
+          <p:cNvPr id="41" name="Shape 39"/>
+          <p:cNvSpPr/>
+          <p:nvPr/>
+        </p:nvSpPr>
+        <p:spPr>
+          <a:xfrm>
+            <a:off x="548640" y="5303520"/>
+            <a:ext cx="11064240" cy="932688"/>
+          </a:xfrm>
+          <a:prstGeom prst="roundRect">
+            <a:avLst>
+              <a:gd name="adj" fmla="val 4902"/>
             </a:avLst>
           </a:prstGeom>
           <a:solidFill>
@@ -20028,14 +20592,14 @@
       </p:sp>
       <p:sp>
         <p:nvSpPr>
-          <p:cNvPr id="30" name="Text 28"/>
-          <p:cNvSpPr/>
-          <p:nvPr/>
-        </p:nvSpPr>
-        <p:spPr>
-          <a:xfrm>
-            <a:off x="841248" y="5541264"/>
-            <a:ext cx="3108960" cy="256032"/>
+          <p:cNvPr id="42" name="Text 40"/>
+          <p:cNvSpPr/>
+          <p:nvPr/>
+        </p:nvSpPr>
+        <p:spPr>
+          <a:xfrm>
+            <a:off x="841248" y="5413248"/>
+            <a:ext cx="4023360" cy="256032"/>
           </a:xfrm>
           <a:prstGeom prst="rect">
             <a:avLst/>
@@ -20059,7 +20623,7 @@
                 <a:ea typeface="Calibri" pitchFamily="34" charset="-122"/>
                 <a:cs typeface="Calibri" pitchFamily="34" charset="-120"/>
               </a:rPr>
-              <a:t>Then create the Job</a:t>
+              <a:t>Then the List + two Jobs</a:t>
             </a:r>
             <a:endParaRPr lang="en-US" sz="1150" dirty="0"/>
           </a:p>
@@ -20067,14 +20631,14 @@
       </p:sp>
       <p:sp>
         <p:nvSpPr>
-          <p:cNvPr id="31" name="Text 29"/>
-          <p:cNvSpPr/>
-          <p:nvPr/>
-        </p:nvSpPr>
-        <p:spPr>
-          <a:xfrm>
-            <a:off x="841248" y="5833872"/>
-            <a:ext cx="10479024" cy="457200"/>
+          <p:cNvPr id="43" name="Text 41"/>
+          <p:cNvSpPr/>
+          <p:nvPr/>
+        </p:nvSpPr>
+        <p:spPr>
+          <a:xfrm>
+            <a:off x="841248" y="5669280"/>
+            <a:ext cx="10479024" cy="512064"/>
           </a:xfrm>
           <a:prstGeom prst="rect">
             <a:avLst/>
@@ -20088,12 +20652,12 @@
           <a:p>
             <a:pPr indent="0" marL="0">
               <a:lnSpc>
-                <a:spcPts val="1300"/>
+                <a:spcPts val="1200"/>
               </a:lnSpc>
               <a:buNone/>
             </a:pPr>
             <a:r>
-              <a:rPr lang="en-US" sz="1050" dirty="0">
+              <a:rPr lang="en-US" sz="1000" dirty="0">
                 <a:solidFill>
                   <a:srgbClr val="B4B7BD"/>
                 </a:solidFill>
@@ -20101,9 +20665,9 @@
                 <a:ea typeface="Calibri" pitchFamily="34" charset="-122"/>
                 <a:cs typeface="Calibri" pitchFamily="34" charset="-120"/>
               </a:rPr>
-              <a:t>Automation → Jobs → New Job, Time-triggered, playbook Koi Unified - Script Runner. You do NOT need the KOI integration, an API key, the parsing or modeling rules, the dashboard, or any of the seven KOI triage playbooks — the Script Runner set calls no KOI API command.</a:t>
-            </a:r>
-            <a:endParaRPr lang="en-US" sz="1050" dirty="0"/>
+              <a:t>Create the JSON List Koi Script Runner (Object Setup → Lists). Then two Time-triggered Jobs: Scan → Koi Unified - Script Runner (frequent, e.g. 10 min); Refresh → Koi Unified - Refresh Tracker (hourly). The per-scope tracker Lists auto-create on the first Refresh. You still need the built-in Core REST API integration enabled — no KOI key, no KOI instance, no rules or dashboard.</a:t>
+            </a:r>
+            <a:endParaRPr lang="en-US" sz="1000" dirty="0"/>
           </a:p>
         </p:txBody>
       </p:sp>
@@ -21644,7 +22208,7 @@
         <p:spPr>
           <a:xfrm>
             <a:off x="859536" y="2286000"/>
-            <a:ext cx="5321808" cy="2560320"/>
+            <a:ext cx="5321808" cy="2651760"/>
           </a:xfrm>
           <a:prstGeom prst="rect">
             <a:avLst/>
@@ -21658,12 +22222,12 @@
           <a:p>
             <a:pPr indent="0" marL="0">
               <a:lnSpc>
-                <a:spcPts val="1500"/>
+                <a:spcPts val="1400"/>
               </a:lnSpc>
               <a:buNone/>
             </a:pPr>
             <a:r>
-              <a:rPr lang="en-US" sz="1000" dirty="0">
+              <a:rPr lang="en-US" sz="950" dirty="0">
                 <a:solidFill>
                   <a:srgbClr val="22D3EE"/>
                 </a:solidFill>
@@ -21673,17 +22237,17 @@
               </a:rPr>
               <a:t>[</a:t>
             </a:r>
-            <a:endParaRPr lang="en-US" sz="1000" dirty="0"/>
+            <a:endParaRPr lang="en-US" sz="950" dirty="0"/>
           </a:p>
           <a:p>
             <a:pPr indent="0" marL="0">
               <a:lnSpc>
-                <a:spcPts val="1500"/>
+                <a:spcPts val="1400"/>
               </a:lnSpc>
               <a:buNone/>
             </a:pPr>
             <a:r>
-              <a:rPr lang="en-US" sz="1000" dirty="0">
+              <a:rPr lang="en-US" sz="950" dirty="0">
                 <a:solidFill>
                   <a:srgbClr val="22D3EE"/>
                 </a:solidFill>
@@ -21693,17 +22257,17 @@
               </a:rPr>
               <a:t>  {</a:t>
             </a:r>
-            <a:endParaRPr lang="en-US" sz="1000" dirty="0"/>
+            <a:endParaRPr lang="en-US" sz="950" dirty="0"/>
           </a:p>
           <a:p>
             <a:pPr indent="0" marL="0">
               <a:lnSpc>
-                <a:spcPts val="1500"/>
+                <a:spcPts val="1400"/>
               </a:lnSpc>
               <a:buNone/>
             </a:pPr>
             <a:r>
-              <a:rPr lang="en-US" sz="1000" dirty="0">
+              <a:rPr lang="en-US" sz="950" dirty="0">
                 <a:solidFill>
                   <a:srgbClr val="22D3EE"/>
                 </a:solidFill>
@@ -21713,17 +22277,17 @@
               </a:rPr>
               <a:t>    "script": { "name": "KOI Deployment Script - Windows" },</a:t>
             </a:r>
-            <a:endParaRPr lang="en-US" sz="1000" dirty="0"/>
+            <a:endParaRPr lang="en-US" sz="950" dirty="0"/>
           </a:p>
           <a:p>
             <a:pPr indent="0" marL="0">
               <a:lnSpc>
-                <a:spcPts val="1500"/>
+                <a:spcPts val="1400"/>
               </a:lnSpc>
               <a:buNone/>
             </a:pPr>
             <a:r>
-              <a:rPr lang="en-US" sz="1000" dirty="0">
+              <a:rPr lang="en-US" sz="950" dirty="0">
                 <a:solidFill>
                   <a:srgbClr val="22D3EE"/>
                 </a:solidFill>
@@ -21733,17 +22297,17 @@
               </a:rPr>
               <a:t>    "target": {</a:t>
             </a:r>
-            <a:endParaRPr lang="en-US" sz="1000" dirty="0"/>
+            <a:endParaRPr lang="en-US" sz="950" dirty="0"/>
           </a:p>
           <a:p>
             <a:pPr indent="0" marL="0">
               <a:lnSpc>
-                <a:spcPts val="1500"/>
+                <a:spcPts val="1400"/>
               </a:lnSpc>
               <a:buNone/>
             </a:pPr>
             <a:r>
-              <a:rPr lang="en-US" sz="1000" dirty="0">
+              <a:rPr lang="en-US" sz="950" dirty="0">
                 <a:solidFill>
                   <a:srgbClr val="22D3EE"/>
                 </a:solidFill>
@@ -21753,17 +22317,17 @@
               </a:rPr>
               <a:t>      "endpoint_groups": ["KOI Endpoints"],</a:t>
             </a:r>
-            <a:endParaRPr lang="en-US" sz="1000" dirty="0"/>
+            <a:endParaRPr lang="en-US" sz="950" dirty="0"/>
           </a:p>
           <a:p>
             <a:pPr indent="0" marL="0">
               <a:lnSpc>
-                <a:spcPts val="1500"/>
+                <a:spcPts val="1400"/>
               </a:lnSpc>
               <a:buNone/>
             </a:pPr>
             <a:r>
-              <a:rPr lang="en-US" sz="1000" dirty="0">
+              <a:rPr lang="en-US" sz="950" dirty="0">
                 <a:solidFill>
                   <a:srgbClr val="22D3EE"/>
                 </a:solidFill>
@@ -21771,19 +22335,19 @@
                 <a:ea typeface="Courier New" pitchFamily="34" charset="-122"/>
                 <a:cs typeface="Courier New" pitchFamily="34" charset="-120"/>
               </a:rPr>
-              <a:t>      "endpoint_os": "Windows"</a:t>
-            </a:r>
-            <a:endParaRPr lang="en-US" sz="1000" dirty="0"/>
+              <a:t>      "endpoint_os": "Windows",</a:t>
+            </a:r>
+            <a:endParaRPr lang="en-US" sz="950" dirty="0"/>
           </a:p>
           <a:p>
             <a:pPr indent="0" marL="0">
               <a:lnSpc>
-                <a:spcPts val="1500"/>
+                <a:spcPts val="1400"/>
               </a:lnSpc>
               <a:buNone/>
             </a:pPr>
             <a:r>
-              <a:rPr lang="en-US" sz="1000" dirty="0">
+              <a:rPr lang="en-US" sz="950" dirty="0">
                 <a:solidFill>
                   <a:srgbClr val="22D3EE"/>
                 </a:solidFill>
@@ -21791,19 +22355,19 @@
                 <a:ea typeface="Courier New" pitchFamily="34" charset="-122"/>
                 <a:cs typeface="Courier New" pitchFamily="34" charset="-120"/>
               </a:rPr>
-              <a:t>    }</a:t>
-            </a:r>
-            <a:endParaRPr lang="en-US" sz="1000" dirty="0"/>
+              <a:t>      "tracker_list": "Koi Scan Tracker - Windows",</a:t>
+            </a:r>
+            <a:endParaRPr lang="en-US" sz="950" dirty="0"/>
           </a:p>
           <a:p>
             <a:pPr indent="0" marL="0">
               <a:lnSpc>
-                <a:spcPts val="1500"/>
+                <a:spcPts val="1400"/>
               </a:lnSpc>
               <a:buNone/>
             </a:pPr>
             <a:r>
-              <a:rPr lang="en-US" sz="1000" dirty="0">
+              <a:rPr lang="en-US" sz="950" dirty="0">
                 <a:solidFill>
                   <a:srgbClr val="22D3EE"/>
                 </a:solidFill>
@@ -21811,19 +22375,19 @@
                 <a:ea typeface="Courier New" pitchFamily="34" charset="-122"/>
                 <a:cs typeface="Courier New" pitchFamily="34" charset="-120"/>
               </a:rPr>
-              <a:t>  },</a:t>
-            </a:r>
-            <a:endParaRPr lang="en-US" sz="1000" dirty="0"/>
+              <a:t>      "rescan_interval_hours": 720</a:t>
+            </a:r>
+            <a:endParaRPr lang="en-US" sz="950" dirty="0"/>
           </a:p>
           <a:p>
             <a:pPr indent="0" marL="0">
               <a:lnSpc>
-                <a:spcPts val="1500"/>
+                <a:spcPts val="1400"/>
               </a:lnSpc>
               <a:buNone/>
             </a:pPr>
             <a:r>
-              <a:rPr lang="en-US" sz="1000" dirty="0">
+              <a:rPr lang="en-US" sz="950" dirty="0">
                 <a:solidFill>
                   <a:srgbClr val="22D3EE"/>
                 </a:solidFill>
@@ -21831,19 +22395,19 @@
                 <a:ea typeface="Courier New" pitchFamily="34" charset="-122"/>
                 <a:cs typeface="Courier New" pitchFamily="34" charset="-120"/>
               </a:rPr>
-              <a:t>  { ...one more entry per OS you deploy to... }</a:t>
-            </a:r>
-            <a:endParaRPr lang="en-US" sz="1000" dirty="0"/>
+              <a:t>    }</a:t>
+            </a:r>
+            <a:endParaRPr lang="en-US" sz="950" dirty="0"/>
           </a:p>
           <a:p>
             <a:pPr indent="0" marL="0">
               <a:lnSpc>
-                <a:spcPts val="1500"/>
+                <a:spcPts val="1400"/>
               </a:lnSpc>
               <a:buNone/>
             </a:pPr>
             <a:r>
-              <a:rPr lang="en-US" sz="1000" dirty="0">
+              <a:rPr lang="en-US" sz="950" dirty="0">
                 <a:solidFill>
                   <a:srgbClr val="22D3EE"/>
                 </a:solidFill>
@@ -21851,9 +22415,49 @@
                 <a:ea typeface="Courier New" pitchFamily="34" charset="-122"/>
                 <a:cs typeface="Courier New" pitchFamily="34" charset="-120"/>
               </a:rPr>
+              <a:t>  },</a:t>
+            </a:r>
+            <a:endParaRPr lang="en-US" sz="950" dirty="0"/>
+          </a:p>
+          <a:p>
+            <a:pPr indent="0" marL="0">
+              <a:lnSpc>
+                <a:spcPts val="1400"/>
+              </a:lnSpc>
+              <a:buNone/>
+            </a:pPr>
+            <a:r>
+              <a:rPr lang="en-US" sz="950" dirty="0">
+                <a:solidFill>
+                  <a:srgbClr val="22D3EE"/>
+                </a:solidFill>
+                <a:latin typeface="Courier New" pitchFamily="34" charset="0"/>
+                <a:ea typeface="Courier New" pitchFamily="34" charset="-122"/>
+                <a:cs typeface="Courier New" pitchFamily="34" charset="-120"/>
+              </a:rPr>
+              <a:t>  { ...one more entry per OS you deploy to... }</a:t>
+            </a:r>
+            <a:endParaRPr lang="en-US" sz="950" dirty="0"/>
+          </a:p>
+          <a:p>
+            <a:pPr indent="0" marL="0">
+              <a:lnSpc>
+                <a:spcPts val="1400"/>
+              </a:lnSpc>
+              <a:buNone/>
+            </a:pPr>
+            <a:r>
+              <a:rPr lang="en-US" sz="950" dirty="0">
+                <a:solidFill>
+                  <a:srgbClr val="22D3EE"/>
+                </a:solidFill>
+                <a:latin typeface="Courier New" pitchFamily="34" charset="0"/>
+                <a:ea typeface="Courier New" pitchFamily="34" charset="-122"/>
+                <a:cs typeface="Courier New" pitchFamily="34" charset="-120"/>
+              </a:rPr>
               <a:t>]</a:t>
             </a:r>
-            <a:endParaRPr lang="en-US" sz="1000" dirty="0"/>
+            <a:endParaRPr lang="en-US" sz="950" dirty="0"/>
           </a:p>
         </p:txBody>
       </p:sp>
@@ -21892,7 +22496,7 @@
         </p:nvSpPr>
         <p:spPr>
           <a:xfrm>
-            <a:off x="7168896" y="1938528"/>
+            <a:off x="7168896" y="1920240"/>
             <a:ext cx="4133088" cy="274320"/>
           </a:xfrm>
           <a:prstGeom prst="rect">
@@ -21917,7 +22521,7 @@
                 <a:ea typeface="Calibri" pitchFamily="34" charset="-122"/>
                 <a:cs typeface="Calibri" pitchFamily="34" charset="-120"/>
               </a:rPr>
-              <a:t>The three pointers you set</a:t>
+              <a:t>The four pointers you set</a:t>
             </a:r>
             <a:endParaRPr lang="en-US" sz="1200" dirty="0"/>
           </a:p>
@@ -21931,24 +22535,24 @@
         </p:nvSpPr>
         <p:spPr>
           <a:xfrm>
-            <a:off x="7168896" y="2340864"/>
-            <a:ext cx="4133088" cy="237744"/>
-          </a:xfrm>
-          <a:prstGeom prst="rect">
-            <a:avLst/>
-          </a:prstGeom>
-          <a:noFill/>
-          <a:ln/>
-        </p:spPr>
-        <p:txBody>
-          <a:bodyPr wrap="square" lIns="0" tIns="0" rIns="0" bIns="0" rtlCol="0" anchor="t"/>
-          <a:lstStyle/>
-          <a:p>
-            <a:pPr indent="0" marL="0">
-              <a:buNone/>
-            </a:pPr>
-            <a:r>
-              <a:rPr lang="en-US" sz="1050" b="1" dirty="0">
+            <a:off x="7168896" y="2267712"/>
+            <a:ext cx="4133088" cy="219456"/>
+          </a:xfrm>
+          <a:prstGeom prst="rect">
+            <a:avLst/>
+          </a:prstGeom>
+          <a:noFill/>
+          <a:ln/>
+        </p:spPr>
+        <p:txBody>
+          <a:bodyPr wrap="square" lIns="0" tIns="0" rIns="0" bIns="0" rtlCol="0" anchor="t"/>
+          <a:lstStyle/>
+          <a:p>
+            <a:pPr indent="0" marL="0">
+              <a:buNone/>
+            </a:pPr>
+            <a:r>
+              <a:rPr lang="en-US" sz="1000" b="1" dirty="0">
                 <a:solidFill>
                   <a:srgbClr val="22D3EE"/>
                 </a:solidFill>
@@ -21958,7 +22562,7 @@
               </a:rPr>
               <a:t>script.name</a:t>
             </a:r>
-            <a:endParaRPr lang="en-US" sz="1050" dirty="0"/>
+            <a:endParaRPr lang="en-US" sz="1000" dirty="0"/>
           </a:p>
         </p:txBody>
       </p:sp>
@@ -21970,8 +22574,8 @@
         </p:nvSpPr>
         <p:spPr>
           <a:xfrm>
-            <a:off x="7168896" y="2596896"/>
-            <a:ext cx="4133088" cy="237744"/>
+            <a:off x="7168896" y="2478024"/>
+            <a:ext cx="4133088" cy="219456"/>
           </a:xfrm>
           <a:prstGeom prst="rect">
             <a:avLst/>
@@ -21985,12 +22589,12 @@
           <a:p>
             <a:pPr indent="0" marL="0">
               <a:lnSpc>
-                <a:spcPts val="1300"/>
+                <a:spcPts val="1200"/>
               </a:lnSpc>
               <a:buNone/>
             </a:pPr>
             <a:r>
-              <a:rPr lang="en-US" sz="1050" dirty="0">
+              <a:rPr lang="en-US" sz="1000" dirty="0">
                 <a:solidFill>
                   <a:srgbClr val="B4B7BD"/>
                 </a:solidFill>
@@ -22000,7 +22604,7 @@
               </a:rPr>
               <a:t>A script package in Action Center → Scripts Library</a:t>
             </a:r>
-            <a:endParaRPr lang="en-US" sz="1050" dirty="0"/>
+            <a:endParaRPr lang="en-US" sz="1000" dirty="0"/>
           </a:p>
         </p:txBody>
       </p:sp>
@@ -22012,7 +22616,46 @@
         </p:nvSpPr>
         <p:spPr>
           <a:xfrm>
-            <a:off x="7168896" y="2889504"/>
+            <a:off x="7168896" y="2679192"/>
+            <a:ext cx="4133088" cy="201168"/>
+          </a:xfrm>
+          <a:prstGeom prst="rect">
+            <a:avLst/>
+          </a:prstGeom>
+          <a:noFill/>
+          <a:ln/>
+        </p:spPr>
+        <p:txBody>
+          <a:bodyPr wrap="square" lIns="0" tIns="0" rIns="0" bIns="0" rtlCol="0" anchor="t"/>
+          <a:lstStyle/>
+          <a:p>
+            <a:pPr indent="0" marL="0">
+              <a:buNone/>
+            </a:pPr>
+            <a:r>
+              <a:rPr lang="en-US" sz="900" i="1" dirty="0">
+                <a:solidFill>
+                  <a:srgbClr val="6E747E"/>
+                </a:solidFill>
+                <a:latin typeface="Calibri" pitchFamily="34" charset="0"/>
+                <a:ea typeface="Calibri" pitchFamily="34" charset="-122"/>
+                <a:cs typeface="Calibri" pitchFamily="34" charset="-120"/>
+              </a:rPr>
+              <a:t>Sample: KOI Deployment Script - Windows</a:t>
+            </a:r>
+            <a:endParaRPr lang="en-US" sz="900" dirty="0"/>
+          </a:p>
+        </p:txBody>
+      </p:sp>
+      <p:sp>
+        <p:nvSpPr>
+          <p:cNvPr id="13" name="Text 11"/>
+          <p:cNvSpPr/>
+          <p:nvPr/>
+        </p:nvSpPr>
+        <p:spPr>
+          <a:xfrm>
+            <a:off x="7168896" y="2926080"/>
             <a:ext cx="4133088" cy="219456"/>
           </a:xfrm>
           <a:prstGeom prst="rect">
@@ -22029,46 +22672,7 @@
               <a:buNone/>
             </a:pPr>
             <a:r>
-              <a:rPr lang="en-US" sz="1000" i="1" dirty="0">
-                <a:solidFill>
-                  <a:srgbClr val="6E747E"/>
-                </a:solidFill>
-                <a:latin typeface="Calibri" pitchFamily="34" charset="0"/>
-                <a:ea typeface="Calibri" pitchFamily="34" charset="-122"/>
-                <a:cs typeface="Calibri" pitchFamily="34" charset="-120"/>
-              </a:rPr>
-              <a:t>Sample: KOI Deployment Script - Windows</a:t>
-            </a:r>
-            <a:endParaRPr lang="en-US" sz="1000" dirty="0"/>
-          </a:p>
-        </p:txBody>
-      </p:sp>
-      <p:sp>
-        <p:nvSpPr>
-          <p:cNvPr id="13" name="Text 11"/>
-          <p:cNvSpPr/>
-          <p:nvPr/>
-        </p:nvSpPr>
-        <p:spPr>
-          <a:xfrm>
-            <a:off x="7168896" y="3200400"/>
-            <a:ext cx="4133088" cy="237744"/>
-          </a:xfrm>
-          <a:prstGeom prst="rect">
-            <a:avLst/>
-          </a:prstGeom>
-          <a:noFill/>
-          <a:ln/>
-        </p:spPr>
-        <p:txBody>
-          <a:bodyPr wrap="square" lIns="0" tIns="0" rIns="0" bIns="0" rtlCol="0" anchor="t"/>
-          <a:lstStyle/>
-          <a:p>
-            <a:pPr indent="0" marL="0">
-              <a:buNone/>
-            </a:pPr>
-            <a:r>
-              <a:rPr lang="en-US" sz="1050" b="1" dirty="0">
+              <a:rPr lang="en-US" sz="1000" b="1" dirty="0">
                 <a:solidFill>
                   <a:srgbClr val="22D3EE"/>
                 </a:solidFill>
@@ -22078,7 +22682,7 @@
               </a:rPr>
               <a:t>target.endpoint_groups</a:t>
             </a:r>
-            <a:endParaRPr lang="en-US" sz="1050" dirty="0"/>
+            <a:endParaRPr lang="en-US" sz="1000" dirty="0"/>
           </a:p>
         </p:txBody>
       </p:sp>
@@ -22090,8 +22694,8 @@
         </p:nvSpPr>
         <p:spPr>
           <a:xfrm>
-            <a:off x="7168896" y="3456432"/>
-            <a:ext cx="4133088" cy="237744"/>
+            <a:off x="7168896" y="3136392"/>
+            <a:ext cx="4133088" cy="219456"/>
           </a:xfrm>
           <a:prstGeom prst="rect">
             <a:avLst/>
@@ -22105,12 +22709,12 @@
           <a:p>
             <a:pPr indent="0" marL="0">
               <a:lnSpc>
-                <a:spcPts val="1300"/>
+                <a:spcPts val="1200"/>
               </a:lnSpc>
               <a:buNone/>
             </a:pPr>
             <a:r>
-              <a:rPr lang="en-US" sz="1050" dirty="0">
+              <a:rPr lang="en-US" sz="1000" dirty="0">
                 <a:solidFill>
                   <a:srgbClr val="B4B7BD"/>
                 </a:solidFill>
@@ -22118,9 +22722,9 @@
                 <a:ea typeface="Calibri" pitchFamily="34" charset="-122"/>
                 <a:cs typeface="Calibri" pitchFamily="34" charset="-120"/>
               </a:rPr>
-              <a:t>An endpoint group holding connected, unisolated agents</a:t>
-            </a:r>
-            <a:endParaRPr lang="en-US" sz="1050" dirty="0"/>
+              <a:t>An endpoint group of connected, unisolated agents</a:t>
+            </a:r>
+            <a:endParaRPr lang="en-US" sz="1000" dirty="0"/>
           </a:p>
         </p:txBody>
       </p:sp>
@@ -22132,7 +22736,46 @@
         </p:nvSpPr>
         <p:spPr>
           <a:xfrm>
-            <a:off x="7168896" y="3749040"/>
+            <a:off x="7168896" y="3337560"/>
+            <a:ext cx="4133088" cy="201168"/>
+          </a:xfrm>
+          <a:prstGeom prst="rect">
+            <a:avLst/>
+          </a:prstGeom>
+          <a:noFill/>
+          <a:ln/>
+        </p:spPr>
+        <p:txBody>
+          <a:bodyPr wrap="square" lIns="0" tIns="0" rIns="0" bIns="0" rtlCol="0" anchor="t"/>
+          <a:lstStyle/>
+          <a:p>
+            <a:pPr indent="0" marL="0">
+              <a:buNone/>
+            </a:pPr>
+            <a:r>
+              <a:rPr lang="en-US" sz="900" i="1" dirty="0">
+                <a:solidFill>
+                  <a:srgbClr val="6E747E"/>
+                </a:solidFill>
+                <a:latin typeface="Calibri" pitchFamily="34" charset="0"/>
+                <a:ea typeface="Calibri" pitchFamily="34" charset="-122"/>
+                <a:cs typeface="Calibri" pitchFamily="34" charset="-120"/>
+              </a:rPr>
+              <a:t>Sample: KOI Endpoints</a:t>
+            </a:r>
+            <a:endParaRPr lang="en-US" sz="900" dirty="0"/>
+          </a:p>
+        </p:txBody>
+      </p:sp>
+      <p:sp>
+        <p:nvSpPr>
+          <p:cNvPr id="16" name="Text 14"/>
+          <p:cNvSpPr/>
+          <p:nvPr/>
+        </p:nvSpPr>
+        <p:spPr>
+          <a:xfrm>
+            <a:off x="7168896" y="3584448"/>
             <a:ext cx="4133088" cy="219456"/>
           </a:xfrm>
           <a:prstGeom prst="rect">
@@ -22149,46 +22792,7 @@
               <a:buNone/>
             </a:pPr>
             <a:r>
-              <a:rPr lang="en-US" sz="1000" i="1" dirty="0">
-                <a:solidFill>
-                  <a:srgbClr val="6E747E"/>
-                </a:solidFill>
-                <a:latin typeface="Calibri" pitchFamily="34" charset="0"/>
-                <a:ea typeface="Calibri" pitchFamily="34" charset="-122"/>
-                <a:cs typeface="Calibri" pitchFamily="34" charset="-120"/>
-              </a:rPr>
-              <a:t>Sample: KOI Endpoints</a:t>
-            </a:r>
-            <a:endParaRPr lang="en-US" sz="1000" dirty="0"/>
-          </a:p>
-        </p:txBody>
-      </p:sp>
-      <p:sp>
-        <p:nvSpPr>
-          <p:cNvPr id="16" name="Text 14"/>
-          <p:cNvSpPr/>
-          <p:nvPr/>
-        </p:nvSpPr>
-        <p:spPr>
-          <a:xfrm>
-            <a:off x="7168896" y="4059936"/>
-            <a:ext cx="4133088" cy="237744"/>
-          </a:xfrm>
-          <a:prstGeom prst="rect">
-            <a:avLst/>
-          </a:prstGeom>
-          <a:noFill/>
-          <a:ln/>
-        </p:spPr>
-        <p:txBody>
-          <a:bodyPr wrap="square" lIns="0" tIns="0" rIns="0" bIns="0" rtlCol="0" anchor="t"/>
-          <a:lstStyle/>
-          <a:p>
-            <a:pPr indent="0" marL="0">
-              <a:buNone/>
-            </a:pPr>
-            <a:r>
-              <a:rPr lang="en-US" sz="1050" b="1" dirty="0">
+              <a:rPr lang="en-US" sz="1000" b="1" dirty="0">
                 <a:solidFill>
                   <a:srgbClr val="22D3EE"/>
                 </a:solidFill>
@@ -22198,7 +22802,7 @@
               </a:rPr>
               <a:t>target.endpoint_os</a:t>
             </a:r>
-            <a:endParaRPr lang="en-US" sz="1050" dirty="0"/>
+            <a:endParaRPr lang="en-US" sz="1000" dirty="0"/>
           </a:p>
         </p:txBody>
       </p:sp>
@@ -22210,8 +22814,8 @@
         </p:nvSpPr>
         <p:spPr>
           <a:xfrm>
-            <a:off x="7168896" y="4315968"/>
-            <a:ext cx="4133088" cy="237744"/>
+            <a:off x="7168896" y="3794760"/>
+            <a:ext cx="4133088" cy="219456"/>
           </a:xfrm>
           <a:prstGeom prst="rect">
             <a:avLst/>
@@ -22225,12 +22829,12 @@
           <a:p>
             <a:pPr indent="0" marL="0">
               <a:lnSpc>
-                <a:spcPts val="1300"/>
+                <a:spcPts val="1200"/>
               </a:lnSpc>
               <a:buNone/>
             </a:pPr>
             <a:r>
-              <a:rPr lang="en-US" sz="1050" dirty="0">
+              <a:rPr lang="en-US" sz="1000" dirty="0">
                 <a:solidFill>
                   <a:srgbClr val="B4B7BD"/>
                 </a:solidFill>
@@ -22240,7 +22844,7 @@
               </a:rPr>
               <a:t>The OS scope for that entry</a:t>
             </a:r>
-            <a:endParaRPr lang="en-US" sz="1050" dirty="0"/>
+            <a:endParaRPr lang="en-US" sz="1000" dirty="0"/>
           </a:p>
         </p:txBody>
       </p:sp>
@@ -22252,7 +22856,46 @@
         </p:nvSpPr>
         <p:spPr>
           <a:xfrm>
-            <a:off x="7168896" y="4608576"/>
+            <a:off x="7168896" y="3995928"/>
+            <a:ext cx="4133088" cy="201168"/>
+          </a:xfrm>
+          <a:prstGeom prst="rect">
+            <a:avLst/>
+          </a:prstGeom>
+          <a:noFill/>
+          <a:ln/>
+        </p:spPr>
+        <p:txBody>
+          <a:bodyPr wrap="square" lIns="0" tIns="0" rIns="0" bIns="0" rtlCol="0" anchor="t"/>
+          <a:lstStyle/>
+          <a:p>
+            <a:pPr indent="0" marL="0">
+              <a:buNone/>
+            </a:pPr>
+            <a:r>
+              <a:rPr lang="en-US" sz="900" i="1" dirty="0">
+                <a:solidFill>
+                  <a:srgbClr val="6E747E"/>
+                </a:solidFill>
+                <a:latin typeface="Calibri" pitchFamily="34" charset="0"/>
+                <a:ea typeface="Calibri" pitchFamily="34" charset="-122"/>
+                <a:cs typeface="Calibri" pitchFamily="34" charset="-120"/>
+              </a:rPr>
+              <a:t>Windows, macOS or Linux</a:t>
+            </a:r>
+            <a:endParaRPr lang="en-US" sz="900" dirty="0"/>
+          </a:p>
+        </p:txBody>
+      </p:sp>
+      <p:sp>
+        <p:nvSpPr>
+          <p:cNvPr id="19" name="Text 17"/>
+          <p:cNvSpPr/>
+          <p:nvPr/>
+        </p:nvSpPr>
+        <p:spPr>
+          <a:xfrm>
+            <a:off x="7168896" y="4242816"/>
             <a:ext cx="4133088" cy="219456"/>
           </a:xfrm>
           <a:prstGeom prst="rect">
@@ -22269,7 +22912,88 @@
               <a:buNone/>
             </a:pPr>
             <a:r>
-              <a:rPr lang="en-US" sz="1000" i="1" dirty="0">
+              <a:rPr lang="en-US" sz="1000" b="1" dirty="0">
+                <a:solidFill>
+                  <a:srgbClr val="22D3EE"/>
+                </a:solidFill>
+                <a:latin typeface="Courier New" pitchFamily="34" charset="0"/>
+                <a:ea typeface="Courier New" pitchFamily="34" charset="-122"/>
+                <a:cs typeface="Courier New" pitchFamily="34" charset="-120"/>
+              </a:rPr>
+              <a:t>target.tracker_list</a:t>
+            </a:r>
+            <a:endParaRPr lang="en-US" sz="1000" dirty="0"/>
+          </a:p>
+        </p:txBody>
+      </p:sp>
+      <p:sp>
+        <p:nvSpPr>
+          <p:cNvPr id="20" name="Text 18"/>
+          <p:cNvSpPr/>
+          <p:nvPr/>
+        </p:nvSpPr>
+        <p:spPr>
+          <a:xfrm>
+            <a:off x="7168896" y="4453128"/>
+            <a:ext cx="4133088" cy="219456"/>
+          </a:xfrm>
+          <a:prstGeom prst="rect">
+            <a:avLst/>
+          </a:prstGeom>
+          <a:noFill/>
+          <a:ln/>
+        </p:spPr>
+        <p:txBody>
+          <a:bodyPr wrap="square" lIns="0" tIns="0" rIns="0" bIns="0" rtlCol="0" anchor="t"/>
+          <a:lstStyle/>
+          <a:p>
+            <a:pPr indent="0" marL="0">
+              <a:lnSpc>
+                <a:spcPts val="1200"/>
+              </a:lnSpc>
+              <a:buNone/>
+            </a:pPr>
+            <a:r>
+              <a:rPr lang="en-US" sz="1000" dirty="0">
+                <a:solidFill>
+                  <a:srgbClr val="B4B7BD"/>
+                </a:solidFill>
+                <a:latin typeface="Calibri" pitchFamily="34" charset="0"/>
+                <a:ea typeface="Calibri" pitchFamily="34" charset="-122"/>
+                <a:cs typeface="Calibri" pitchFamily="34" charset="-120"/>
+              </a:rPr>
+              <a:t>The CSV List this scope's coverage is tracked in</a:t>
+            </a:r>
+            <a:endParaRPr lang="en-US" sz="1000" dirty="0"/>
+          </a:p>
+        </p:txBody>
+      </p:sp>
+      <p:sp>
+        <p:nvSpPr>
+          <p:cNvPr id="21" name="Text 19"/>
+          <p:cNvSpPr/>
+          <p:nvPr/>
+        </p:nvSpPr>
+        <p:spPr>
+          <a:xfrm>
+            <a:off x="7168896" y="4654296"/>
+            <a:ext cx="4133088" cy="201168"/>
+          </a:xfrm>
+          <a:prstGeom prst="rect">
+            <a:avLst/>
+          </a:prstGeom>
+          <a:noFill/>
+          <a:ln/>
+        </p:spPr>
+        <p:txBody>
+          <a:bodyPr wrap="square" lIns="0" tIns="0" rIns="0" bIns="0" rtlCol="0" anchor="t"/>
+          <a:lstStyle/>
+          <a:p>
+            <a:pPr indent="0" marL="0">
+              <a:buNone/>
+            </a:pPr>
+            <a:r>
+              <a:rPr lang="en-US" sz="900" i="1" dirty="0">
                 <a:solidFill>
                   <a:srgbClr val="6E747E"/>
                 </a:solidFill>
@@ -22277,15 +23001,15 @@
                 <a:ea typeface="Calibri" pitchFamily="34" charset="-122"/>
                 <a:cs typeface="Calibri" pitchFamily="34" charset="-120"/>
               </a:rPr>
-              <a:t>Windows, macOS or Linux</a:t>
-            </a:r>
-            <a:endParaRPr lang="en-US" sz="1000" dirty="0"/>
-          </a:p>
-        </p:txBody>
-      </p:sp>
-      <p:sp>
-        <p:nvSpPr>
-          <p:cNvPr id="19" name="Shape 17"/>
+              <a:t>Auto-created by Refresh · Koi Scan Tracker - Windows</a:t>
+            </a:r>
+            <a:endParaRPr lang="en-US" sz="900" dirty="0"/>
+          </a:p>
+        </p:txBody>
+      </p:sp>
+      <p:sp>
+        <p:nvSpPr>
+          <p:cNvPr id="22" name="Shape 20"/>
           <p:cNvSpPr/>
           <p:nvPr/>
         </p:nvSpPr>
@@ -22312,7 +23036,7 @@
       </p:sp>
       <p:sp>
         <p:nvSpPr>
-          <p:cNvPr id="20" name="Shape 18"/>
+          <p:cNvPr id="23" name="Shape 21"/>
           <p:cNvSpPr/>
           <p:nvPr/>
         </p:nvSpPr>
@@ -22339,7 +23063,7 @@
       </p:sp>
       <p:sp>
         <p:nvSpPr>
-          <p:cNvPr id="21" name="Text 19"/>
+          <p:cNvPr id="24" name="Text 22"/>
           <p:cNvSpPr/>
           <p:nvPr/>
         </p:nvSpPr>
@@ -22378,7 +23102,7 @@
       </p:sp>
       <p:sp>
         <p:nvSpPr>
-          <p:cNvPr id="22" name="Text 20"/>
+          <p:cNvPr id="25" name="Text 23"/>
           <p:cNvSpPr/>
           <p:nvPr/>
         </p:nvSpPr>
@@ -22653,12 +23377,12 @@
         </p:nvSpPr>
         <p:spPr>
           <a:xfrm>
-            <a:off x="548640" y="1682496"/>
-            <a:ext cx="11064240" cy="365760"/>
+            <a:off x="548640" y="1627632"/>
+            <a:ext cx="11064240" cy="320040"/>
           </a:xfrm>
           <a:prstGeom prst="roundRect">
             <a:avLst>
-              <a:gd name="adj" fmla="val 12500"/>
+              <a:gd name="adj" fmla="val 14286"/>
             </a:avLst>
           </a:prstGeom>
           <a:solidFill>
@@ -22680,24 +23404,24 @@
         </p:nvSpPr>
         <p:spPr>
           <a:xfrm>
-            <a:off x="822960" y="1764792"/>
-            <a:ext cx="3840480" cy="237744"/>
-          </a:xfrm>
-          <a:prstGeom prst="rect">
-            <a:avLst/>
-          </a:prstGeom>
-          <a:noFill/>
-          <a:ln/>
-        </p:spPr>
-        <p:txBody>
-          <a:bodyPr wrap="square" lIns="0" tIns="0" rIns="0" bIns="0" rtlCol="0" anchor="t"/>
-          <a:lstStyle/>
-          <a:p>
-            <a:pPr indent="0" marL="0">
-              <a:buNone/>
-            </a:pPr>
-            <a:r>
-              <a:rPr lang="en-US" sz="1000" b="1" dirty="0">
+            <a:off x="822960" y="1691640"/>
+            <a:ext cx="3840480" cy="219456"/>
+          </a:xfrm>
+          <a:prstGeom prst="rect">
+            <a:avLst/>
+          </a:prstGeom>
+          <a:noFill/>
+          <a:ln/>
+        </p:spPr>
+        <p:txBody>
+          <a:bodyPr wrap="square" lIns="0" tIns="0" rIns="0" bIns="0" rtlCol="0" anchor="t"/>
+          <a:lstStyle/>
+          <a:p>
+            <a:pPr indent="0" marL="0">
+              <a:buNone/>
+            </a:pPr>
+            <a:r>
+              <a:rPr lang="en-US" sz="950" b="1" dirty="0">
                 <a:solidFill>
                   <a:srgbClr val="22D3EE"/>
                 </a:solidFill>
@@ -22707,7 +23431,7 @@
               </a:rPr>
               <a:t>script.name</a:t>
             </a:r>
-            <a:endParaRPr lang="en-US" sz="1000" dirty="0"/>
+            <a:endParaRPr lang="en-US" sz="950" dirty="0"/>
           </a:p>
         </p:txBody>
       </p:sp>
@@ -22719,24 +23443,24 @@
         </p:nvSpPr>
         <p:spPr>
           <a:xfrm>
-            <a:off x="4846320" y="1764792"/>
-            <a:ext cx="1463040" cy="237744"/>
-          </a:xfrm>
-          <a:prstGeom prst="rect">
-            <a:avLst/>
-          </a:prstGeom>
-          <a:noFill/>
-          <a:ln/>
-        </p:spPr>
-        <p:txBody>
-          <a:bodyPr wrap="square" lIns="0" tIns="0" rIns="0" bIns="0" rtlCol="0" anchor="t"/>
-          <a:lstStyle/>
-          <a:p>
-            <a:pPr indent="0" marL="0">
-              <a:buNone/>
-            </a:pPr>
-            <a:r>
-              <a:rPr lang="en-US" sz="1000" b="1" dirty="0">
+            <a:off x="4846320" y="1691640"/>
+            <a:ext cx="1463040" cy="219456"/>
+          </a:xfrm>
+          <a:prstGeom prst="rect">
+            <a:avLst/>
+          </a:prstGeom>
+          <a:noFill/>
+          <a:ln/>
+        </p:spPr>
+        <p:txBody>
+          <a:bodyPr wrap="square" lIns="0" tIns="0" rIns="0" bIns="0" rtlCol="0" anchor="t"/>
+          <a:lstStyle/>
+          <a:p>
+            <a:pPr indent="0" marL="0">
+              <a:buNone/>
+            </a:pPr>
+            <a:r>
+              <a:rPr lang="en-US" sz="950" b="1" dirty="0">
                 <a:solidFill>
                   <a:srgbClr val="3FB950"/>
                 </a:solidFill>
@@ -22746,7 +23470,7 @@
               </a:rPr>
               <a:t>Yes *</a:t>
             </a:r>
-            <a:endParaRPr lang="en-US" sz="1000" dirty="0"/>
+            <a:endParaRPr lang="en-US" sz="950" dirty="0"/>
           </a:p>
         </p:txBody>
       </p:sp>
@@ -22758,24 +23482,24 @@
         </p:nvSpPr>
         <p:spPr>
           <a:xfrm>
-            <a:off x="6492240" y="1764792"/>
-            <a:ext cx="4846320" cy="237744"/>
-          </a:xfrm>
-          <a:prstGeom prst="rect">
-            <a:avLst/>
-          </a:prstGeom>
-          <a:noFill/>
-          <a:ln/>
-        </p:spPr>
-        <p:txBody>
-          <a:bodyPr wrap="square" lIns="0" tIns="0" rIns="0" bIns="0" rtlCol="0" anchor="t"/>
-          <a:lstStyle/>
-          <a:p>
-            <a:pPr indent="0" marL="0">
-              <a:buNone/>
-            </a:pPr>
-            <a:r>
-              <a:rPr lang="en-US" sz="1000" dirty="0">
+            <a:off x="6492240" y="1691640"/>
+            <a:ext cx="4846320" cy="219456"/>
+          </a:xfrm>
+          <a:prstGeom prst="rect">
+            <a:avLst/>
+          </a:prstGeom>
+          <a:noFill/>
+          <a:ln/>
+        </p:spPr>
+        <p:txBody>
+          <a:bodyPr wrap="square" lIns="0" tIns="0" rIns="0" bIns="0" rtlCol="0" anchor="t"/>
+          <a:lstStyle/>
+          <a:p>
+            <a:pPr indent="0" marL="0">
+              <a:buNone/>
+            </a:pPr>
+            <a:r>
+              <a:rPr lang="en-US" sz="950" dirty="0">
                 <a:solidFill>
                   <a:srgbClr val="B4B7BD"/>
                 </a:solidFill>
@@ -22783,9 +23507,9 @@
                 <a:ea typeface="Calibri" pitchFamily="34" charset="-122"/>
                 <a:cs typeface="Calibri" pitchFamily="34" charset="-120"/>
               </a:rPr>
-              <a:t>No default. Must equal the Scripts Library name exactly.</a:t>
-            </a:r>
-            <a:endParaRPr lang="en-US" sz="1000" dirty="0"/>
+              <a:t>No default. Must equal the Scripts Library name exactly. Must be parameterless.</a:t>
+            </a:r>
+            <a:endParaRPr lang="en-US" sz="950" dirty="0"/>
           </a:p>
         </p:txBody>
       </p:sp>
@@ -22797,12 +23521,12 @@
         </p:nvSpPr>
         <p:spPr>
           <a:xfrm>
-            <a:off x="548640" y="2103120"/>
-            <a:ext cx="11064240" cy="365760"/>
+            <a:off x="548640" y="1993392"/>
+            <a:ext cx="11064240" cy="320040"/>
           </a:xfrm>
           <a:prstGeom prst="roundRect">
             <a:avLst>
-              <a:gd name="adj" fmla="val 12500"/>
+              <a:gd name="adj" fmla="val 14286"/>
             </a:avLst>
           </a:prstGeom>
           <a:solidFill>
@@ -22824,24 +23548,24 @@
         </p:nvSpPr>
         <p:spPr>
           <a:xfrm>
-            <a:off x="822960" y="2185416"/>
-            <a:ext cx="3840480" cy="237744"/>
-          </a:xfrm>
-          <a:prstGeom prst="rect">
-            <a:avLst/>
-          </a:prstGeom>
-          <a:noFill/>
-          <a:ln/>
-        </p:spPr>
-        <p:txBody>
-          <a:bodyPr wrap="square" lIns="0" tIns="0" rIns="0" bIns="0" rtlCol="0" anchor="t"/>
-          <a:lstStyle/>
-          <a:p>
-            <a:pPr indent="0" marL="0">
-              <a:buNone/>
-            </a:pPr>
-            <a:r>
-              <a:rPr lang="en-US" sz="1000" b="1" dirty="0">
+            <a:off x="822960" y="2057400"/>
+            <a:ext cx="3840480" cy="219456"/>
+          </a:xfrm>
+          <a:prstGeom prst="rect">
+            <a:avLst/>
+          </a:prstGeom>
+          <a:noFill/>
+          <a:ln/>
+        </p:spPr>
+        <p:txBody>
+          <a:bodyPr wrap="square" lIns="0" tIns="0" rIns="0" bIns="0" rtlCol="0" anchor="t"/>
+          <a:lstStyle/>
+          <a:p>
+            <a:pPr indent="0" marL="0">
+              <a:buNone/>
+            </a:pPr>
+            <a:r>
+              <a:rPr lang="en-US" sz="950" b="1" dirty="0">
                 <a:solidFill>
                   <a:srgbClr val="22D3EE"/>
                 </a:solidFill>
@@ -22851,7 +23575,7 @@
               </a:rPr>
               <a:t>script.uuid</a:t>
             </a:r>
-            <a:endParaRPr lang="en-US" sz="1000" dirty="0"/>
+            <a:endParaRPr lang="en-US" sz="950" dirty="0"/>
           </a:p>
         </p:txBody>
       </p:sp>
@@ -22863,24 +23587,24 @@
         </p:nvSpPr>
         <p:spPr>
           <a:xfrm>
-            <a:off x="4846320" y="2185416"/>
-            <a:ext cx="1463040" cy="237744"/>
-          </a:xfrm>
-          <a:prstGeom prst="rect">
-            <a:avLst/>
-          </a:prstGeom>
-          <a:noFill/>
-          <a:ln/>
-        </p:spPr>
-        <p:txBody>
-          <a:bodyPr wrap="square" lIns="0" tIns="0" rIns="0" bIns="0" rtlCol="0" anchor="t"/>
-          <a:lstStyle/>
-          <a:p>
-            <a:pPr indent="0" marL="0">
-              <a:buNone/>
-            </a:pPr>
-            <a:r>
-              <a:rPr lang="en-US" sz="1000" b="1" dirty="0">
+            <a:off x="4846320" y="2057400"/>
+            <a:ext cx="1463040" cy="219456"/>
+          </a:xfrm>
+          <a:prstGeom prst="rect">
+            <a:avLst/>
+          </a:prstGeom>
+          <a:noFill/>
+          <a:ln/>
+        </p:spPr>
+        <p:txBody>
+          <a:bodyPr wrap="square" lIns="0" tIns="0" rIns="0" bIns="0" rtlCol="0" anchor="t"/>
+          <a:lstStyle/>
+          <a:p>
+            <a:pPr indent="0" marL="0">
+              <a:buNone/>
+            </a:pPr>
+            <a:r>
+              <a:rPr lang="en-US" sz="950" b="1" dirty="0">
                 <a:solidFill>
                   <a:srgbClr val="6E747E"/>
                 </a:solidFill>
@@ -22890,7 +23614,7 @@
               </a:rPr>
               <a:t>No</a:t>
             </a:r>
-            <a:endParaRPr lang="en-US" sz="1000" dirty="0"/>
+            <a:endParaRPr lang="en-US" sz="950" dirty="0"/>
           </a:p>
         </p:txBody>
       </p:sp>
@@ -22902,24 +23626,24 @@
         </p:nvSpPr>
         <p:spPr>
           <a:xfrm>
-            <a:off x="6492240" y="2185416"/>
-            <a:ext cx="4846320" cy="237744"/>
-          </a:xfrm>
-          <a:prstGeom prst="rect">
-            <a:avLst/>
-          </a:prstGeom>
-          <a:noFill/>
-          <a:ln/>
-        </p:spPr>
-        <p:txBody>
-          <a:bodyPr wrap="square" lIns="0" tIns="0" rIns="0" bIns="0" rtlCol="0" anchor="t"/>
-          <a:lstStyle/>
-          <a:p>
-            <a:pPr indent="0" marL="0">
-              <a:buNone/>
-            </a:pPr>
-            <a:r>
-              <a:rPr lang="en-US" sz="1000" dirty="0">
+            <a:off x="6492240" y="2057400"/>
+            <a:ext cx="4846320" cy="219456"/>
+          </a:xfrm>
+          <a:prstGeom prst="rect">
+            <a:avLst/>
+          </a:prstGeom>
+          <a:noFill/>
+          <a:ln/>
+        </p:spPr>
+        <p:txBody>
+          <a:bodyPr wrap="square" lIns="0" tIns="0" rIns="0" bIns="0" rtlCol="0" anchor="t"/>
+          <a:lstStyle/>
+          <a:p>
+            <a:pPr indent="0" marL="0">
+              <a:buNone/>
+            </a:pPr>
+            <a:r>
+              <a:rPr lang="en-US" sz="950" dirty="0">
                 <a:solidFill>
                   <a:srgbClr val="B4B7BD"/>
                 </a:solidFill>
@@ -22929,7 +23653,7 @@
               </a:rPr>
               <a:t>Wins over script.name. Use it to survive renames or duplicates.</a:t>
             </a:r>
-            <a:endParaRPr lang="en-US" sz="1000" dirty="0"/>
+            <a:endParaRPr lang="en-US" sz="950" dirty="0"/>
           </a:p>
         </p:txBody>
       </p:sp>
@@ -22941,12 +23665,12 @@
         </p:nvSpPr>
         <p:spPr>
           <a:xfrm>
-            <a:off x="548640" y="2523744"/>
-            <a:ext cx="11064240" cy="365760"/>
+            <a:off x="548640" y="2359152"/>
+            <a:ext cx="11064240" cy="320040"/>
           </a:xfrm>
           <a:prstGeom prst="roundRect">
             <a:avLst>
-              <a:gd name="adj" fmla="val 12500"/>
+              <a:gd name="adj" fmla="val 14286"/>
             </a:avLst>
           </a:prstGeom>
           <a:solidFill>
@@ -22968,24 +23692,24 @@
         </p:nvSpPr>
         <p:spPr>
           <a:xfrm>
-            <a:off x="822960" y="2606040"/>
-            <a:ext cx="3840480" cy="237744"/>
-          </a:xfrm>
-          <a:prstGeom prst="rect">
-            <a:avLst/>
-          </a:prstGeom>
-          <a:noFill/>
-          <a:ln/>
-        </p:spPr>
-        <p:txBody>
-          <a:bodyPr wrap="square" lIns="0" tIns="0" rIns="0" bIns="0" rtlCol="0" anchor="t"/>
-          <a:lstStyle/>
-          <a:p>
-            <a:pPr indent="0" marL="0">
-              <a:buNone/>
-            </a:pPr>
-            <a:r>
-              <a:rPr lang="en-US" sz="1000" b="1" dirty="0">
+            <a:off x="822960" y="2423160"/>
+            <a:ext cx="3840480" cy="219456"/>
+          </a:xfrm>
+          <a:prstGeom prst="rect">
+            <a:avLst/>
+          </a:prstGeom>
+          <a:noFill/>
+          <a:ln/>
+        </p:spPr>
+        <p:txBody>
+          <a:bodyPr wrap="square" lIns="0" tIns="0" rIns="0" bIns="0" rtlCol="0" anchor="t"/>
+          <a:lstStyle/>
+          <a:p>
+            <a:pPr indent="0" marL="0">
+              <a:buNone/>
+            </a:pPr>
+            <a:r>
+              <a:rPr lang="en-US" sz="950" b="1" dirty="0">
                 <a:solidFill>
                   <a:srgbClr val="22D3EE"/>
                 </a:solidFill>
@@ -22995,7 +23719,7 @@
               </a:rPr>
               <a:t>script.polling_interval_in_seconds</a:t>
             </a:r>
-            <a:endParaRPr lang="en-US" sz="1000" dirty="0"/>
+            <a:endParaRPr lang="en-US" sz="950" dirty="0"/>
           </a:p>
         </p:txBody>
       </p:sp>
@@ -23007,24 +23731,24 @@
         </p:nvSpPr>
         <p:spPr>
           <a:xfrm>
-            <a:off x="4846320" y="2606040"/>
-            <a:ext cx="1463040" cy="237744"/>
-          </a:xfrm>
-          <a:prstGeom prst="rect">
-            <a:avLst/>
-          </a:prstGeom>
-          <a:noFill/>
-          <a:ln/>
-        </p:spPr>
-        <p:txBody>
-          <a:bodyPr wrap="square" lIns="0" tIns="0" rIns="0" bIns="0" rtlCol="0" anchor="t"/>
-          <a:lstStyle/>
-          <a:p>
-            <a:pPr indent="0" marL="0">
-              <a:buNone/>
-            </a:pPr>
-            <a:r>
-              <a:rPr lang="en-US" sz="1000" b="1" dirty="0">
+            <a:off x="4846320" y="2423160"/>
+            <a:ext cx="1463040" cy="219456"/>
+          </a:xfrm>
+          <a:prstGeom prst="rect">
+            <a:avLst/>
+          </a:prstGeom>
+          <a:noFill/>
+          <a:ln/>
+        </p:spPr>
+        <p:txBody>
+          <a:bodyPr wrap="square" lIns="0" tIns="0" rIns="0" bIns="0" rtlCol="0" anchor="t"/>
+          <a:lstStyle/>
+          <a:p>
+            <a:pPr indent="0" marL="0">
+              <a:buNone/>
+            </a:pPr>
+            <a:r>
+              <a:rPr lang="en-US" sz="950" b="1" dirty="0">
                 <a:solidFill>
                   <a:srgbClr val="6E747E"/>
                 </a:solidFill>
@@ -23034,7 +23758,7 @@
               </a:rPr>
               <a:t>No</a:t>
             </a:r>
-            <a:endParaRPr lang="en-US" sz="1000" dirty="0"/>
+            <a:endParaRPr lang="en-US" sz="950" dirty="0"/>
           </a:p>
         </p:txBody>
       </p:sp>
@@ -23046,24 +23770,24 @@
         </p:nvSpPr>
         <p:spPr>
           <a:xfrm>
-            <a:off x="6492240" y="2606040"/>
-            <a:ext cx="4846320" cy="237744"/>
-          </a:xfrm>
-          <a:prstGeom prst="rect">
-            <a:avLst/>
-          </a:prstGeom>
-          <a:noFill/>
-          <a:ln/>
-        </p:spPr>
-        <p:txBody>
-          <a:bodyPr wrap="square" lIns="0" tIns="0" rIns="0" bIns="0" rtlCol="0" anchor="t"/>
-          <a:lstStyle/>
-          <a:p>
-            <a:pPr indent="0" marL="0">
-              <a:buNone/>
-            </a:pPr>
-            <a:r>
-              <a:rPr lang="en-US" sz="1000" dirty="0">
+            <a:off x="6492240" y="2423160"/>
+            <a:ext cx="4846320" cy="219456"/>
+          </a:xfrm>
+          <a:prstGeom prst="rect">
+            <a:avLst/>
+          </a:prstGeom>
+          <a:noFill/>
+          <a:ln/>
+        </p:spPr>
+        <p:txBody>
+          <a:bodyPr wrap="square" lIns="0" tIns="0" rIns="0" bIns="0" rtlCol="0" anchor="t"/>
+          <a:lstStyle/>
+          <a:p>
+            <a:pPr indent="0" marL="0">
+              <a:buNone/>
+            </a:pPr>
+            <a:r>
+              <a:rPr lang="en-US" sz="950" dirty="0">
                 <a:solidFill>
                   <a:srgbClr val="B4B7BD"/>
                 </a:solidFill>
@@ -23073,7 +23797,7 @@
               </a:rPr>
               <a:t>60 seconds.</a:t>
             </a:r>
-            <a:endParaRPr lang="en-US" sz="1000" dirty="0"/>
+            <a:endParaRPr lang="en-US" sz="950" dirty="0"/>
           </a:p>
         </p:txBody>
       </p:sp>
@@ -23085,12 +23809,12 @@
         </p:nvSpPr>
         <p:spPr>
           <a:xfrm>
-            <a:off x="548640" y="2944368"/>
-            <a:ext cx="11064240" cy="365760"/>
+            <a:off x="548640" y="2724912"/>
+            <a:ext cx="11064240" cy="320040"/>
           </a:xfrm>
           <a:prstGeom prst="roundRect">
             <a:avLst>
-              <a:gd name="adj" fmla="val 12500"/>
+              <a:gd name="adj" fmla="val 14286"/>
             </a:avLst>
           </a:prstGeom>
           <a:solidFill>
@@ -23112,24 +23836,24 @@
         </p:nvSpPr>
         <p:spPr>
           <a:xfrm>
-            <a:off x="822960" y="3026664"/>
-            <a:ext cx="3840480" cy="237744"/>
-          </a:xfrm>
-          <a:prstGeom prst="rect">
-            <a:avLst/>
-          </a:prstGeom>
-          <a:noFill/>
-          <a:ln/>
-        </p:spPr>
-        <p:txBody>
-          <a:bodyPr wrap="square" lIns="0" tIns="0" rIns="0" bIns="0" rtlCol="0" anchor="t"/>
-          <a:lstStyle/>
-          <a:p>
-            <a:pPr indent="0" marL="0">
-              <a:buNone/>
-            </a:pPr>
-            <a:r>
-              <a:rPr lang="en-US" sz="1000" b="1" dirty="0">
+            <a:off x="822960" y="2788920"/>
+            <a:ext cx="3840480" cy="219456"/>
+          </a:xfrm>
+          <a:prstGeom prst="rect">
+            <a:avLst/>
+          </a:prstGeom>
+          <a:noFill/>
+          <a:ln/>
+        </p:spPr>
+        <p:txBody>
+          <a:bodyPr wrap="square" lIns="0" tIns="0" rIns="0" bIns="0" rtlCol="0" anchor="t"/>
+          <a:lstStyle/>
+          <a:p>
+            <a:pPr indent="0" marL="0">
+              <a:buNone/>
+            </a:pPr>
+            <a:r>
+              <a:rPr lang="en-US" sz="950" b="1" dirty="0">
                 <a:solidFill>
                   <a:srgbClr val="22D3EE"/>
                 </a:solidFill>
@@ -23139,7 +23863,7 @@
               </a:rPr>
               <a:t>script.timeout_in_seconds</a:t>
             </a:r>
-            <a:endParaRPr lang="en-US" sz="1000" dirty="0"/>
+            <a:endParaRPr lang="en-US" sz="950" dirty="0"/>
           </a:p>
         </p:txBody>
       </p:sp>
@@ -23151,24 +23875,24 @@
         </p:nvSpPr>
         <p:spPr>
           <a:xfrm>
-            <a:off x="4846320" y="3026664"/>
-            <a:ext cx="1463040" cy="237744"/>
-          </a:xfrm>
-          <a:prstGeom prst="rect">
-            <a:avLst/>
-          </a:prstGeom>
-          <a:noFill/>
-          <a:ln/>
-        </p:spPr>
-        <p:txBody>
-          <a:bodyPr wrap="square" lIns="0" tIns="0" rIns="0" bIns="0" rtlCol="0" anchor="t"/>
-          <a:lstStyle/>
-          <a:p>
-            <a:pPr indent="0" marL="0">
-              <a:buNone/>
-            </a:pPr>
-            <a:r>
-              <a:rPr lang="en-US" sz="1000" b="1" dirty="0">
+            <a:off x="4846320" y="2788920"/>
+            <a:ext cx="1463040" cy="219456"/>
+          </a:xfrm>
+          <a:prstGeom prst="rect">
+            <a:avLst/>
+          </a:prstGeom>
+          <a:noFill/>
+          <a:ln/>
+        </p:spPr>
+        <p:txBody>
+          <a:bodyPr wrap="square" lIns="0" tIns="0" rIns="0" bIns="0" rtlCol="0" anchor="t"/>
+          <a:lstStyle/>
+          <a:p>
+            <a:pPr indent="0" marL="0">
+              <a:buNone/>
+            </a:pPr>
+            <a:r>
+              <a:rPr lang="en-US" sz="950" b="1" dirty="0">
                 <a:solidFill>
                   <a:srgbClr val="6E747E"/>
                 </a:solidFill>
@@ -23178,7 +23902,7 @@
               </a:rPr>
               <a:t>No</a:t>
             </a:r>
-            <a:endParaRPr lang="en-US" sz="1000" dirty="0"/>
+            <a:endParaRPr lang="en-US" sz="950" dirty="0"/>
           </a:p>
         </p:txBody>
       </p:sp>
@@ -23190,24 +23914,24 @@
         </p:nvSpPr>
         <p:spPr>
           <a:xfrm>
-            <a:off x="6492240" y="3026664"/>
-            <a:ext cx="4846320" cy="237744"/>
-          </a:xfrm>
-          <a:prstGeom prst="rect">
-            <a:avLst/>
-          </a:prstGeom>
-          <a:noFill/>
-          <a:ln/>
-        </p:spPr>
-        <p:txBody>
-          <a:bodyPr wrap="square" lIns="0" tIns="0" rIns="0" bIns="0" rtlCol="0" anchor="t"/>
-          <a:lstStyle/>
-          <a:p>
-            <a:pPr indent="0" marL="0">
-              <a:buNone/>
-            </a:pPr>
-            <a:r>
-              <a:rPr lang="en-US" sz="1000" dirty="0">
+            <a:off x="6492240" y="2788920"/>
+            <a:ext cx="4846320" cy="219456"/>
+          </a:xfrm>
+          <a:prstGeom prst="rect">
+            <a:avLst/>
+          </a:prstGeom>
+          <a:noFill/>
+          <a:ln/>
+        </p:spPr>
+        <p:txBody>
+          <a:bodyPr wrap="square" lIns="0" tIns="0" rIns="0" bIns="0" rtlCol="0" anchor="t"/>
+          <a:lstStyle/>
+          <a:p>
+            <a:pPr indent="0" marL="0">
+              <a:buNone/>
+            </a:pPr>
+            <a:r>
+              <a:rPr lang="en-US" sz="950" dirty="0">
                 <a:solidFill>
                   <a:srgbClr val="B4B7BD"/>
                 </a:solidFill>
@@ -23217,7 +23941,7 @@
               </a:rPr>
               <a:t>1800 seconds.</a:t>
             </a:r>
-            <a:endParaRPr lang="en-US" sz="1000" dirty="0"/>
+            <a:endParaRPr lang="en-US" sz="950" dirty="0"/>
           </a:p>
         </p:txBody>
       </p:sp>
@@ -23229,12 +23953,12 @@
         </p:nvSpPr>
         <p:spPr>
           <a:xfrm>
-            <a:off x="548640" y="3364992"/>
-            <a:ext cx="11064240" cy="365760"/>
+            <a:off x="548640" y="3090672"/>
+            <a:ext cx="11064240" cy="320040"/>
           </a:xfrm>
           <a:prstGeom prst="roundRect">
             <a:avLst>
-              <a:gd name="adj" fmla="val 12500"/>
+              <a:gd name="adj" fmla="val 14286"/>
             </a:avLst>
           </a:prstGeom>
           <a:solidFill>
@@ -23256,24 +23980,24 @@
         </p:nvSpPr>
         <p:spPr>
           <a:xfrm>
-            <a:off x="822960" y="3447288"/>
-            <a:ext cx="3840480" cy="237744"/>
-          </a:xfrm>
-          <a:prstGeom prst="rect">
-            <a:avLst/>
-          </a:prstGeom>
-          <a:noFill/>
-          <a:ln/>
-        </p:spPr>
-        <p:txBody>
-          <a:bodyPr wrap="square" lIns="0" tIns="0" rIns="0" bIns="0" rtlCol="0" anchor="t"/>
-          <a:lstStyle/>
-          <a:p>
-            <a:pPr indent="0" marL="0">
-              <a:buNone/>
-            </a:pPr>
-            <a:r>
-              <a:rPr lang="en-US" sz="1000" b="1" dirty="0">
+            <a:off x="822960" y="3154680"/>
+            <a:ext cx="3840480" cy="219456"/>
+          </a:xfrm>
+          <a:prstGeom prst="rect">
+            <a:avLst/>
+          </a:prstGeom>
+          <a:noFill/>
+          <a:ln/>
+        </p:spPr>
+        <p:txBody>
+          <a:bodyPr wrap="square" lIns="0" tIns="0" rIns="0" bIns="0" rtlCol="0" anchor="t"/>
+          <a:lstStyle/>
+          <a:p>
+            <a:pPr indent="0" marL="0">
+              <a:buNone/>
+            </a:pPr>
+            <a:r>
+              <a:rPr lang="en-US" sz="950" b="1" dirty="0">
                 <a:solidFill>
                   <a:srgbClr val="22D3EE"/>
                 </a:solidFill>
@@ -23283,7 +24007,7 @@
               </a:rPr>
               <a:t>target.endpoint_os</a:t>
             </a:r>
-            <a:endParaRPr lang="en-US" sz="1000" dirty="0"/>
+            <a:endParaRPr lang="en-US" sz="950" dirty="0"/>
           </a:p>
         </p:txBody>
       </p:sp>
@@ -23295,24 +24019,24 @@
         </p:nvSpPr>
         <p:spPr>
           <a:xfrm>
-            <a:off x="4846320" y="3447288"/>
-            <a:ext cx="1463040" cy="237744"/>
-          </a:xfrm>
-          <a:prstGeom prst="rect">
-            <a:avLst/>
-          </a:prstGeom>
-          <a:noFill/>
-          <a:ln/>
-        </p:spPr>
-        <p:txBody>
-          <a:bodyPr wrap="square" lIns="0" tIns="0" rIns="0" bIns="0" rtlCol="0" anchor="t"/>
-          <a:lstStyle/>
-          <a:p>
-            <a:pPr indent="0" marL="0">
-              <a:buNone/>
-            </a:pPr>
-            <a:r>
-              <a:rPr lang="en-US" sz="1000" b="1" dirty="0">
+            <a:off x="4846320" y="3154680"/>
+            <a:ext cx="1463040" cy="219456"/>
+          </a:xfrm>
+          <a:prstGeom prst="rect">
+            <a:avLst/>
+          </a:prstGeom>
+          <a:noFill/>
+          <a:ln/>
+        </p:spPr>
+        <p:txBody>
+          <a:bodyPr wrap="square" lIns="0" tIns="0" rIns="0" bIns="0" rtlCol="0" anchor="t"/>
+          <a:lstStyle/>
+          <a:p>
+            <a:pPr indent="0" marL="0">
+              <a:buNone/>
+            </a:pPr>
+            <a:r>
+              <a:rPr lang="en-US" sz="950" b="1" dirty="0">
                 <a:solidFill>
                   <a:srgbClr val="3FB950"/>
                 </a:solidFill>
@@ -23322,7 +24046,7 @@
               </a:rPr>
               <a:t>Yes</a:t>
             </a:r>
-            <a:endParaRPr lang="en-US" sz="1000" dirty="0"/>
+            <a:endParaRPr lang="en-US" sz="950" dirty="0"/>
           </a:p>
         </p:txBody>
       </p:sp>
@@ -23334,24 +24058,24 @@
         </p:nvSpPr>
         <p:spPr>
           <a:xfrm>
-            <a:off x="6492240" y="3447288"/>
-            <a:ext cx="4846320" cy="237744"/>
-          </a:xfrm>
-          <a:prstGeom prst="rect">
-            <a:avLst/>
-          </a:prstGeom>
-          <a:noFill/>
-          <a:ln/>
-        </p:spPr>
-        <p:txBody>
-          <a:bodyPr wrap="square" lIns="0" tIns="0" rIns="0" bIns="0" rtlCol="0" anchor="t"/>
-          <a:lstStyle/>
-          <a:p>
-            <a:pPr indent="0" marL="0">
-              <a:buNone/>
-            </a:pPr>
-            <a:r>
-              <a:rPr lang="en-US" sz="1000" dirty="0">
+            <a:off x="6492240" y="3154680"/>
+            <a:ext cx="4846320" cy="219456"/>
+          </a:xfrm>
+          <a:prstGeom prst="rect">
+            <a:avLst/>
+          </a:prstGeom>
+          <a:noFill/>
+          <a:ln/>
+        </p:spPr>
+        <p:txBody>
+          <a:bodyPr wrap="square" lIns="0" tIns="0" rIns="0" bIns="0" rtlCol="0" anchor="t"/>
+          <a:lstStyle/>
+          <a:p>
+            <a:pPr indent="0" marL="0">
+              <a:buNone/>
+            </a:pPr>
+            <a:r>
+              <a:rPr lang="en-US" sz="950" dirty="0">
                 <a:solidFill>
                   <a:srgbClr val="B4B7BD"/>
                 </a:solidFill>
@@ -23361,7 +24085,7 @@
               </a:rPr>
               <a:t>No default. Windows, macOS or Linux — case-insensitive.</a:t>
             </a:r>
-            <a:endParaRPr lang="en-US" sz="1000" dirty="0"/>
+            <a:endParaRPr lang="en-US" sz="950" dirty="0"/>
           </a:p>
         </p:txBody>
       </p:sp>
@@ -23373,12 +24097,12 @@
         </p:nvSpPr>
         <p:spPr>
           <a:xfrm>
-            <a:off x="548640" y="3785616"/>
-            <a:ext cx="11064240" cy="365760"/>
+            <a:off x="548640" y="3456432"/>
+            <a:ext cx="11064240" cy="320040"/>
           </a:xfrm>
           <a:prstGeom prst="roundRect">
             <a:avLst>
-              <a:gd name="adj" fmla="val 12500"/>
+              <a:gd name="adj" fmla="val 14286"/>
             </a:avLst>
           </a:prstGeom>
           <a:solidFill>
@@ -23400,24 +24124,24 @@
         </p:nvSpPr>
         <p:spPr>
           <a:xfrm>
-            <a:off x="822960" y="3867912"/>
-            <a:ext cx="3840480" cy="237744"/>
-          </a:xfrm>
-          <a:prstGeom prst="rect">
-            <a:avLst/>
-          </a:prstGeom>
-          <a:noFill/>
-          <a:ln/>
-        </p:spPr>
-        <p:txBody>
-          <a:bodyPr wrap="square" lIns="0" tIns="0" rIns="0" bIns="0" rtlCol="0" anchor="t"/>
-          <a:lstStyle/>
-          <a:p>
-            <a:pPr indent="0" marL="0">
-              <a:buNone/>
-            </a:pPr>
-            <a:r>
-              <a:rPr lang="en-US" sz="1000" b="1" dirty="0">
+            <a:off x="822960" y="3520440"/>
+            <a:ext cx="3840480" cy="219456"/>
+          </a:xfrm>
+          <a:prstGeom prst="rect">
+            <a:avLst/>
+          </a:prstGeom>
+          <a:noFill/>
+          <a:ln/>
+        </p:spPr>
+        <p:txBody>
+          <a:bodyPr wrap="square" lIns="0" tIns="0" rIns="0" bIns="0" rtlCol="0" anchor="t"/>
+          <a:lstStyle/>
+          <a:p>
+            <a:pPr indent="0" marL="0">
+              <a:buNone/>
+            </a:pPr>
+            <a:r>
+              <a:rPr lang="en-US" sz="950" b="1" dirty="0">
                 <a:solidFill>
                   <a:srgbClr val="22D3EE"/>
                 </a:solidFill>
@@ -23427,7 +24151,7 @@
               </a:rPr>
               <a:t>target.endpoint_groups</a:t>
             </a:r>
-            <a:endParaRPr lang="en-US" sz="1000" dirty="0"/>
+            <a:endParaRPr lang="en-US" sz="950" dirty="0"/>
           </a:p>
         </p:txBody>
       </p:sp>
@@ -23439,24 +24163,24 @@
         </p:nvSpPr>
         <p:spPr>
           <a:xfrm>
-            <a:off x="4846320" y="3867912"/>
-            <a:ext cx="1463040" cy="237744"/>
-          </a:xfrm>
-          <a:prstGeom prst="rect">
-            <a:avLst/>
-          </a:prstGeom>
-          <a:noFill/>
-          <a:ln/>
-        </p:spPr>
-        <p:txBody>
-          <a:bodyPr wrap="square" lIns="0" tIns="0" rIns="0" bIns="0" rtlCol="0" anchor="t"/>
-          <a:lstStyle/>
-          <a:p>
-            <a:pPr indent="0" marL="0">
-              <a:buNone/>
-            </a:pPr>
-            <a:r>
-              <a:rPr lang="en-US" sz="1000" b="1" dirty="0">
+            <a:off x="4846320" y="3520440"/>
+            <a:ext cx="1463040" cy="219456"/>
+          </a:xfrm>
+          <a:prstGeom prst="rect">
+            <a:avLst/>
+          </a:prstGeom>
+          <a:noFill/>
+          <a:ln/>
+        </p:spPr>
+        <p:txBody>
+          <a:bodyPr wrap="square" lIns="0" tIns="0" rIns="0" bIns="0" rtlCol="0" anchor="t"/>
+          <a:lstStyle/>
+          <a:p>
+            <a:pPr indent="0" marL="0">
+              <a:buNone/>
+            </a:pPr>
+            <a:r>
+              <a:rPr lang="en-US" sz="950" b="1" dirty="0">
                 <a:solidFill>
                   <a:srgbClr val="3FB950"/>
                 </a:solidFill>
@@ -23466,7 +24190,7 @@
               </a:rPr>
               <a:t>One of these</a:t>
             </a:r>
-            <a:endParaRPr lang="en-US" sz="1000" dirty="0"/>
+            <a:endParaRPr lang="en-US" sz="950" dirty="0"/>
           </a:p>
         </p:txBody>
       </p:sp>
@@ -23478,24 +24202,24 @@
         </p:nvSpPr>
         <p:spPr>
           <a:xfrm>
-            <a:off x="6492240" y="3867912"/>
-            <a:ext cx="4846320" cy="237744"/>
-          </a:xfrm>
-          <a:prstGeom prst="rect">
-            <a:avLst/>
-          </a:prstGeom>
-          <a:noFill/>
-          <a:ln/>
-        </p:spPr>
-        <p:txBody>
-          <a:bodyPr wrap="square" lIns="0" tIns="0" rIns="0" bIns="0" rtlCol="0" anchor="t"/>
-          <a:lstStyle/>
-          <a:p>
-            <a:pPr indent="0" marL="0">
-              <a:buNone/>
-            </a:pPr>
-            <a:r>
-              <a:rPr lang="en-US" sz="1000" dirty="0">
+            <a:off x="6492240" y="3520440"/>
+            <a:ext cx="4846320" cy="219456"/>
+          </a:xfrm>
+          <a:prstGeom prst="rect">
+            <a:avLst/>
+          </a:prstGeom>
+          <a:noFill/>
+          <a:ln/>
+        </p:spPr>
+        <p:txBody>
+          <a:bodyPr wrap="square" lIns="0" tIns="0" rIns="0" bIns="0" rtlCol="0" anchor="t"/>
+          <a:lstStyle/>
+          <a:p>
+            <a:pPr indent="0" marL="0">
+              <a:buNone/>
+            </a:pPr>
+            <a:r>
+              <a:rPr lang="en-US" sz="950" dirty="0">
                 <a:solidFill>
                   <a:srgbClr val="B4B7BD"/>
                 </a:solidFill>
@@ -23505,7 +24229,7 @@
               </a:rPr>
               <a:t>No default. Group names holding the target agents.</a:t>
             </a:r>
-            <a:endParaRPr lang="en-US" sz="1000" dirty="0"/>
+            <a:endParaRPr lang="en-US" sz="950" dirty="0"/>
           </a:p>
         </p:txBody>
       </p:sp>
@@ -23517,12 +24241,12 @@
         </p:nvSpPr>
         <p:spPr>
           <a:xfrm>
-            <a:off x="548640" y="4206240"/>
-            <a:ext cx="11064240" cy="365760"/>
+            <a:off x="548640" y="3822192"/>
+            <a:ext cx="11064240" cy="320040"/>
           </a:xfrm>
           <a:prstGeom prst="roundRect">
             <a:avLst>
-              <a:gd name="adj" fmla="val 12500"/>
+              <a:gd name="adj" fmla="val 14286"/>
             </a:avLst>
           </a:prstGeom>
           <a:solidFill>
@@ -23544,24 +24268,24 @@
         </p:nvSpPr>
         <p:spPr>
           <a:xfrm>
-            <a:off x="822960" y="4288536"/>
-            <a:ext cx="3840480" cy="237744"/>
-          </a:xfrm>
-          <a:prstGeom prst="rect">
-            <a:avLst/>
-          </a:prstGeom>
-          <a:noFill/>
-          <a:ln/>
-        </p:spPr>
-        <p:txBody>
-          <a:bodyPr wrap="square" lIns="0" tIns="0" rIns="0" bIns="0" rtlCol="0" anchor="t"/>
-          <a:lstStyle/>
-          <a:p>
-            <a:pPr indent="0" marL="0">
-              <a:buNone/>
-            </a:pPr>
-            <a:r>
-              <a:rPr lang="en-US" sz="1000" b="1" dirty="0">
+            <a:off x="822960" y="3886200"/>
+            <a:ext cx="3840480" cy="219456"/>
+          </a:xfrm>
+          <a:prstGeom prst="rect">
+            <a:avLst/>
+          </a:prstGeom>
+          <a:noFill/>
+          <a:ln/>
+        </p:spPr>
+        <p:txBody>
+          <a:bodyPr wrap="square" lIns="0" tIns="0" rIns="0" bIns="0" rtlCol="0" anchor="t"/>
+          <a:lstStyle/>
+          <a:p>
+            <a:pPr indent="0" marL="0">
+              <a:buNone/>
+            </a:pPr>
+            <a:r>
+              <a:rPr lang="en-US" sz="950" b="1" dirty="0">
                 <a:solidFill>
                   <a:srgbClr val="22D3EE"/>
                 </a:solidFill>
@@ -23571,7 +24295,7 @@
               </a:rPr>
               <a:t>target.endpoint_hostnames</a:t>
             </a:r>
-            <a:endParaRPr lang="en-US" sz="1000" dirty="0"/>
+            <a:endParaRPr lang="en-US" sz="950" dirty="0"/>
           </a:p>
         </p:txBody>
       </p:sp>
@@ -23583,24 +24307,24 @@
         </p:nvSpPr>
         <p:spPr>
           <a:xfrm>
-            <a:off x="4846320" y="4288536"/>
-            <a:ext cx="1463040" cy="237744"/>
-          </a:xfrm>
-          <a:prstGeom prst="rect">
-            <a:avLst/>
-          </a:prstGeom>
-          <a:noFill/>
-          <a:ln/>
-        </p:spPr>
-        <p:txBody>
-          <a:bodyPr wrap="square" lIns="0" tIns="0" rIns="0" bIns="0" rtlCol="0" anchor="t"/>
-          <a:lstStyle/>
-          <a:p>
-            <a:pPr indent="0" marL="0">
-              <a:buNone/>
-            </a:pPr>
-            <a:r>
-              <a:rPr lang="en-US" sz="1000" b="1" dirty="0">
+            <a:off x="4846320" y="3886200"/>
+            <a:ext cx="1463040" cy="219456"/>
+          </a:xfrm>
+          <a:prstGeom prst="rect">
+            <a:avLst/>
+          </a:prstGeom>
+          <a:noFill/>
+          <a:ln/>
+        </p:spPr>
+        <p:txBody>
+          <a:bodyPr wrap="square" lIns="0" tIns="0" rIns="0" bIns="0" rtlCol="0" anchor="t"/>
+          <a:lstStyle/>
+          <a:p>
+            <a:pPr indent="0" marL="0">
+              <a:buNone/>
+            </a:pPr>
+            <a:r>
+              <a:rPr lang="en-US" sz="950" b="1" dirty="0">
                 <a:solidFill>
                   <a:srgbClr val="3FB950"/>
                 </a:solidFill>
@@ -23610,7 +24334,7 @@
               </a:rPr>
               <a:t>One of these</a:t>
             </a:r>
-            <a:endParaRPr lang="en-US" sz="1000" dirty="0"/>
+            <a:endParaRPr lang="en-US" sz="950" dirty="0"/>
           </a:p>
         </p:txBody>
       </p:sp>
@@ -23622,24 +24346,24 @@
         </p:nvSpPr>
         <p:spPr>
           <a:xfrm>
-            <a:off x="6492240" y="4288536"/>
-            <a:ext cx="4846320" cy="237744"/>
-          </a:xfrm>
-          <a:prstGeom prst="rect">
-            <a:avLst/>
-          </a:prstGeom>
-          <a:noFill/>
-          <a:ln/>
-        </p:spPr>
-        <p:txBody>
-          <a:bodyPr wrap="square" lIns="0" tIns="0" rIns="0" bIns="0" rtlCol="0" anchor="t"/>
-          <a:lstStyle/>
-          <a:p>
-            <a:pPr indent="0" marL="0">
-              <a:buNone/>
-            </a:pPr>
-            <a:r>
-              <a:rPr lang="en-US" sz="1000" dirty="0">
+            <a:off x="6492240" y="3886200"/>
+            <a:ext cx="4846320" cy="219456"/>
+          </a:xfrm>
+          <a:prstGeom prst="rect">
+            <a:avLst/>
+          </a:prstGeom>
+          <a:noFill/>
+          <a:ln/>
+        </p:spPr>
+        <p:txBody>
+          <a:bodyPr wrap="square" lIns="0" tIns="0" rIns="0" bIns="0" rtlCol="0" anchor="t"/>
+          <a:lstStyle/>
+          <a:p>
+            <a:pPr indent="0" marL="0">
+              <a:buNone/>
+            </a:pPr>
+            <a:r>
+              <a:rPr lang="en-US" sz="950" dirty="0">
                 <a:solidFill>
                   <a:srgbClr val="B4B7BD"/>
                 </a:solidFill>
@@ -23649,7 +24373,7 @@
               </a:rPr>
               <a:t>No default. Specific hostnames instead of a group.</a:t>
             </a:r>
-            <a:endParaRPr lang="en-US" sz="1000" dirty="0"/>
+            <a:endParaRPr lang="en-US" sz="950" dirty="0"/>
           </a:p>
         </p:txBody>
       </p:sp>
@@ -23661,12 +24385,12 @@
         </p:nvSpPr>
         <p:spPr>
           <a:xfrm>
-            <a:off x="548640" y="4626864"/>
-            <a:ext cx="11064240" cy="365760"/>
+            <a:off x="548640" y="4187952"/>
+            <a:ext cx="11064240" cy="320040"/>
           </a:xfrm>
           <a:prstGeom prst="roundRect">
             <a:avLst>
-              <a:gd name="adj" fmla="val 12500"/>
+              <a:gd name="adj" fmla="val 14286"/>
             </a:avLst>
           </a:prstGeom>
           <a:solidFill>
@@ -23688,24 +24412,24 @@
         </p:nvSpPr>
         <p:spPr>
           <a:xfrm>
-            <a:off x="822960" y="4709160"/>
-            <a:ext cx="3840480" cy="237744"/>
-          </a:xfrm>
-          <a:prstGeom prst="rect">
-            <a:avLst/>
-          </a:prstGeom>
-          <a:noFill/>
-          <a:ln/>
-        </p:spPr>
-        <p:txBody>
-          <a:bodyPr wrap="square" lIns="0" tIns="0" rIns="0" bIns="0" rtlCol="0" anchor="t"/>
-          <a:lstStyle/>
-          <a:p>
-            <a:pPr indent="0" marL="0">
-              <a:buNone/>
-            </a:pPr>
-            <a:r>
-              <a:rPr lang="en-US" sz="1000" b="1" dirty="0">
+            <a:off x="822960" y="4251960"/>
+            <a:ext cx="3840480" cy="219456"/>
+          </a:xfrm>
+          <a:prstGeom prst="rect">
+            <a:avLst/>
+          </a:prstGeom>
+          <a:noFill/>
+          <a:ln/>
+        </p:spPr>
+        <p:txBody>
+          <a:bodyPr wrap="square" lIns="0" tIns="0" rIns="0" bIns="0" rtlCol="0" anchor="t"/>
+          <a:lstStyle/>
+          <a:p>
+            <a:pPr indent="0" marL="0">
+              <a:buNone/>
+            </a:pPr>
+            <a:r>
+              <a:rPr lang="en-US" sz="950" b="1" dirty="0">
                 <a:solidFill>
                   <a:srgbClr val="22D3EE"/>
                 </a:solidFill>
@@ -23713,9 +24437,9 @@
                 <a:ea typeface="Courier New" pitchFamily="34" charset="-122"/>
                 <a:cs typeface="Courier New" pitchFamily="34" charset="-120"/>
               </a:rPr>
-              <a:t>notification.recipients</a:t>
-            </a:r>
-            <a:endParaRPr lang="en-US" sz="1000" dirty="0"/>
+              <a:t>target.tracker_list</a:t>
+            </a:r>
+            <a:endParaRPr lang="en-US" sz="950" dirty="0"/>
           </a:p>
         </p:txBody>
       </p:sp>
@@ -23727,34 +24451,34 @@
         </p:nvSpPr>
         <p:spPr>
           <a:xfrm>
-            <a:off x="4846320" y="4709160"/>
-            <a:ext cx="1463040" cy="237744"/>
-          </a:xfrm>
-          <a:prstGeom prst="rect">
-            <a:avLst/>
-          </a:prstGeom>
-          <a:noFill/>
-          <a:ln/>
-        </p:spPr>
-        <p:txBody>
-          <a:bodyPr wrap="square" lIns="0" tIns="0" rIns="0" bIns="0" rtlCol="0" anchor="t"/>
-          <a:lstStyle/>
-          <a:p>
-            <a:pPr indent="0" marL="0">
-              <a:buNone/>
-            </a:pPr>
-            <a:r>
-              <a:rPr lang="en-US" sz="1000" b="1" dirty="0">
-                <a:solidFill>
-                  <a:srgbClr val="6E747E"/>
-                </a:solidFill>
-                <a:latin typeface="Calibri" pitchFamily="34" charset="0"/>
-                <a:ea typeface="Calibri" pitchFamily="34" charset="-122"/>
-                <a:cs typeface="Calibri" pitchFamily="34" charset="-120"/>
-              </a:rPr>
-              <a:t>No</a:t>
-            </a:r>
-            <a:endParaRPr lang="en-US" sz="1000" dirty="0"/>
+            <a:off x="4846320" y="4251960"/>
+            <a:ext cx="1463040" cy="219456"/>
+          </a:xfrm>
+          <a:prstGeom prst="rect">
+            <a:avLst/>
+          </a:prstGeom>
+          <a:noFill/>
+          <a:ln/>
+        </p:spPr>
+        <p:txBody>
+          <a:bodyPr wrap="square" lIns="0" tIns="0" rIns="0" bIns="0" rtlCol="0" anchor="t"/>
+          <a:lstStyle/>
+          <a:p>
+            <a:pPr indent="0" marL="0">
+              <a:buNone/>
+            </a:pPr>
+            <a:r>
+              <a:rPr lang="en-US" sz="950" b="1" dirty="0">
+                <a:solidFill>
+                  <a:srgbClr val="3FB950"/>
+                </a:solidFill>
+                <a:latin typeface="Calibri" pitchFamily="34" charset="0"/>
+                <a:ea typeface="Calibri" pitchFamily="34" charset="-122"/>
+                <a:cs typeface="Calibri" pitchFamily="34" charset="-120"/>
+              </a:rPr>
+              <a:t>Yes</a:t>
+            </a:r>
+            <a:endParaRPr lang="en-US" sz="950" dirty="0"/>
           </a:p>
         </p:txBody>
       </p:sp>
@@ -23766,24 +24490,24 @@
         </p:nvSpPr>
         <p:spPr>
           <a:xfrm>
-            <a:off x="6492240" y="4709160"/>
-            <a:ext cx="4846320" cy="237744"/>
-          </a:xfrm>
-          <a:prstGeom prst="rect">
-            <a:avLst/>
-          </a:prstGeom>
-          <a:noFill/>
-          <a:ln/>
-        </p:spPr>
-        <p:txBody>
-          <a:bodyPr wrap="square" lIns="0" tIns="0" rIns="0" bIns="0" rtlCol="0" anchor="t"/>
-          <a:lstStyle/>
-          <a:p>
-            <a:pPr indent="0" marL="0">
-              <a:buNone/>
-            </a:pPr>
-            <a:r>
-              <a:rPr lang="en-US" sz="1000" dirty="0">
+            <a:off x="6492240" y="4251960"/>
+            <a:ext cx="4846320" cy="219456"/>
+          </a:xfrm>
+          <a:prstGeom prst="rect">
+            <a:avLst/>
+          </a:prstGeom>
+          <a:noFill/>
+          <a:ln/>
+        </p:spPr>
+        <p:txBody>
+          <a:bodyPr wrap="square" lIns="0" tIns="0" rIns="0" bIns="0" rtlCol="0" anchor="t"/>
+          <a:lstStyle/>
+          <a:p>
+            <a:pPr indent="0" marL="0">
+              <a:buNone/>
+            </a:pPr>
+            <a:r>
+              <a:rPr lang="en-US" sz="950" dirty="0">
                 <a:solidFill>
                   <a:srgbClr val="B4B7BD"/>
                 </a:solidFill>
@@ -23791,9 +24515,9 @@
                 <a:ea typeface="Calibri" pitchFamily="34" charset="-122"/>
                 <a:cs typeface="Calibri" pitchFamily="34" charset="-120"/>
               </a:rPr>
-              <a:t>Omit for no email at all.</a:t>
-            </a:r>
-            <a:endParaRPr lang="en-US" sz="1000" dirty="0"/>
+              <a:t>No default. The CSV List this scope is tracked in; Refresh creates it.</a:t>
+            </a:r>
+            <a:endParaRPr lang="en-US" sz="950" dirty="0"/>
           </a:p>
         </p:txBody>
       </p:sp>
@@ -23805,12 +24529,12 @@
         </p:nvSpPr>
         <p:spPr>
           <a:xfrm>
-            <a:off x="548640" y="5047488"/>
-            <a:ext cx="11064240" cy="365760"/>
+            <a:off x="548640" y="4553712"/>
+            <a:ext cx="11064240" cy="320040"/>
           </a:xfrm>
           <a:prstGeom prst="roundRect">
             <a:avLst>
-              <a:gd name="adj" fmla="val 12500"/>
+              <a:gd name="adj" fmla="val 14286"/>
             </a:avLst>
           </a:prstGeom>
           <a:solidFill>
@@ -23832,24 +24556,24 @@
         </p:nvSpPr>
         <p:spPr>
           <a:xfrm>
-            <a:off x="822960" y="5129784"/>
-            <a:ext cx="3840480" cy="237744"/>
-          </a:xfrm>
-          <a:prstGeom prst="rect">
-            <a:avLst/>
-          </a:prstGeom>
-          <a:noFill/>
-          <a:ln/>
-        </p:spPr>
-        <p:txBody>
-          <a:bodyPr wrap="square" lIns="0" tIns="0" rIns="0" bIns="0" rtlCol="0" anchor="t"/>
-          <a:lstStyle/>
-          <a:p>
-            <a:pPr indent="0" marL="0">
-              <a:buNone/>
-            </a:pPr>
-            <a:r>
-              <a:rPr lang="en-US" sz="1000" b="1" dirty="0">
+            <a:off x="822960" y="4617720"/>
+            <a:ext cx="3840480" cy="219456"/>
+          </a:xfrm>
+          <a:prstGeom prst="rect">
+            <a:avLst/>
+          </a:prstGeom>
+          <a:noFill/>
+          <a:ln/>
+        </p:spPr>
+        <p:txBody>
+          <a:bodyPr wrap="square" lIns="0" tIns="0" rIns="0" bIns="0" rtlCol="0" anchor="t"/>
+          <a:lstStyle/>
+          <a:p>
+            <a:pPr indent="0" marL="0">
+              <a:buNone/>
+            </a:pPr>
+            <a:r>
+              <a:rPr lang="en-US" sz="950" b="1" dirty="0">
                 <a:solidFill>
                   <a:srgbClr val="22D3EE"/>
                 </a:solidFill>
@@ -23857,9 +24581,9 @@
                 <a:ea typeface="Courier New" pitchFamily="34" charset="-122"/>
                 <a:cs typeface="Courier New" pitchFamily="34" charset="-120"/>
               </a:rPr>
-              <a:t>notification.sendmail_instance.name</a:t>
-            </a:r>
-            <a:endParaRPr lang="en-US" sz="1000" dirty="0"/>
+              <a:t>target.rescan_interval_hours</a:t>
+            </a:r>
+            <a:endParaRPr lang="en-US" sz="950" dirty="0"/>
           </a:p>
         </p:txBody>
       </p:sp>
@@ -23871,24 +24595,24 @@
         </p:nvSpPr>
         <p:spPr>
           <a:xfrm>
-            <a:off x="4846320" y="5129784"/>
-            <a:ext cx="1463040" cy="237744"/>
-          </a:xfrm>
-          <a:prstGeom prst="rect">
-            <a:avLst/>
-          </a:prstGeom>
-          <a:noFill/>
-          <a:ln/>
-        </p:spPr>
-        <p:txBody>
-          <a:bodyPr wrap="square" lIns="0" tIns="0" rIns="0" bIns="0" rtlCol="0" anchor="t"/>
-          <a:lstStyle/>
-          <a:p>
-            <a:pPr indent="0" marL="0">
-              <a:buNone/>
-            </a:pPr>
-            <a:r>
-              <a:rPr lang="en-US" sz="1000" b="1" dirty="0">
+            <a:off x="4846320" y="4617720"/>
+            <a:ext cx="1463040" cy="219456"/>
+          </a:xfrm>
+          <a:prstGeom prst="rect">
+            <a:avLst/>
+          </a:prstGeom>
+          <a:noFill/>
+          <a:ln/>
+        </p:spPr>
+        <p:txBody>
+          <a:bodyPr wrap="square" lIns="0" tIns="0" rIns="0" bIns="0" rtlCol="0" anchor="t"/>
+          <a:lstStyle/>
+          <a:p>
+            <a:pPr indent="0" marL="0">
+              <a:buNone/>
+            </a:pPr>
+            <a:r>
+              <a:rPr lang="en-US" sz="950" b="1" dirty="0">
                 <a:solidFill>
                   <a:srgbClr val="6E747E"/>
                 </a:solidFill>
@@ -23898,7 +24622,7 @@
               </a:rPr>
               <a:t>No</a:t>
             </a:r>
-            <a:endParaRPr lang="en-US" sz="1000" dirty="0"/>
+            <a:endParaRPr lang="en-US" sz="950" dirty="0"/>
           </a:p>
         </p:txBody>
       </p:sp>
@@ -23910,24 +24634,24 @@
         </p:nvSpPr>
         <p:spPr>
           <a:xfrm>
-            <a:off x="6492240" y="5129784"/>
-            <a:ext cx="4846320" cy="237744"/>
-          </a:xfrm>
-          <a:prstGeom prst="rect">
-            <a:avLst/>
-          </a:prstGeom>
-          <a:noFill/>
-          <a:ln/>
-        </p:spPr>
-        <p:txBody>
-          <a:bodyPr wrap="square" lIns="0" tIns="0" rIns="0" bIns="0" rtlCol="0" anchor="t"/>
-          <a:lstStyle/>
-          <a:p>
-            <a:pPr indent="0" marL="0">
-              <a:buNone/>
-            </a:pPr>
-            <a:r>
-              <a:rPr lang="en-US" sz="1000" dirty="0">
+            <a:off x="6492240" y="4617720"/>
+            <a:ext cx="4846320" cy="219456"/>
+          </a:xfrm>
+          <a:prstGeom prst="rect">
+            <a:avLst/>
+          </a:prstGeom>
+          <a:noFill/>
+          <a:ln/>
+        </p:spPr>
+        <p:txBody>
+          <a:bodyPr wrap="square" lIns="0" tIns="0" rIns="0" bIns="0" rtlCol="0" anchor="t"/>
+          <a:lstStyle/>
+          <a:p>
+            <a:pPr indent="0" marL="0">
+              <a:buNone/>
+            </a:pPr>
+            <a:r>
+              <a:rPr lang="en-US" sz="950" dirty="0">
                 <a:solidFill>
                   <a:srgbClr val="B4B7BD"/>
                 </a:solidFill>
@@ -23935,9 +24659,9 @@
                 <a:ea typeface="Calibri" pitchFamily="34" charset="-122"/>
                 <a:cs typeface="Calibri" pitchFamily="34" charset="-120"/>
               </a:rPr>
-              <a:t>Omit to use any enabled mail instance.</a:t>
-            </a:r>
-            <a:endParaRPr lang="en-US" sz="1000" dirty="0"/>
+              <a:t>720 (30 days). Hours before a scanned endpoint is due again.</a:t>
+            </a:r>
+            <a:endParaRPr lang="en-US" sz="950" dirty="0"/>
           </a:p>
         </p:txBody>
       </p:sp>
@@ -23949,12 +24673,12 @@
         </p:nvSpPr>
         <p:spPr>
           <a:xfrm>
-            <a:off x="548640" y="5468112"/>
-            <a:ext cx="11064240" cy="365760"/>
+            <a:off x="548640" y="4919472"/>
+            <a:ext cx="11064240" cy="320040"/>
           </a:xfrm>
           <a:prstGeom prst="roundRect">
             <a:avLst>
-              <a:gd name="adj" fmla="val 12500"/>
+              <a:gd name="adj" fmla="val 14286"/>
             </a:avLst>
           </a:prstGeom>
           <a:solidFill>
@@ -23976,24 +24700,24 @@
         </p:nvSpPr>
         <p:spPr>
           <a:xfrm>
-            <a:off x="822960" y="5550408"/>
-            <a:ext cx="3840480" cy="237744"/>
-          </a:xfrm>
-          <a:prstGeom prst="rect">
-            <a:avLst/>
-          </a:prstGeom>
-          <a:noFill/>
-          <a:ln/>
-        </p:spPr>
-        <p:txBody>
-          <a:bodyPr wrap="square" lIns="0" tIns="0" rIns="0" bIns="0" rtlCol="0" anchor="t"/>
-          <a:lstStyle/>
-          <a:p>
-            <a:pPr indent="0" marL="0">
-              <a:buNone/>
-            </a:pPr>
-            <a:r>
-              <a:rPr lang="en-US" sz="1000" b="1" dirty="0">
+            <a:off x="822960" y="4983480"/>
+            <a:ext cx="3840480" cy="219456"/>
+          </a:xfrm>
+          <a:prstGeom prst="rect">
+            <a:avLst/>
+          </a:prstGeom>
+          <a:noFill/>
+          <a:ln/>
+        </p:spPr>
+        <p:txBody>
+          <a:bodyPr wrap="square" lIns="0" tIns="0" rIns="0" bIns="0" rtlCol="0" anchor="t"/>
+          <a:lstStyle/>
+          <a:p>
+            <a:pPr indent="0" marL="0">
+              <a:buNone/>
+            </a:pPr>
+            <a:r>
+              <a:rPr lang="en-US" sz="950" b="1" dirty="0">
                 <a:solidFill>
                   <a:srgbClr val="22D3EE"/>
                 </a:solidFill>
@@ -24001,38 +24725,326 @@
                 <a:ea typeface="Courier New" pitchFamily="34" charset="-122"/>
                 <a:cs typeface="Courier New" pitchFamily="34" charset="-120"/>
               </a:rPr>
+              <a:t>notification.recipients</a:t>
+            </a:r>
+            <a:endParaRPr lang="en-US" sz="950" dirty="0"/>
+          </a:p>
+        </p:txBody>
+      </p:sp>
+      <p:sp>
+        <p:nvSpPr>
+          <p:cNvPr id="45" name="Text 43"/>
+          <p:cNvSpPr/>
+          <p:nvPr/>
+        </p:nvSpPr>
+        <p:spPr>
+          <a:xfrm>
+            <a:off x="4846320" y="4983480"/>
+            <a:ext cx="1463040" cy="219456"/>
+          </a:xfrm>
+          <a:prstGeom prst="rect">
+            <a:avLst/>
+          </a:prstGeom>
+          <a:noFill/>
+          <a:ln/>
+        </p:spPr>
+        <p:txBody>
+          <a:bodyPr wrap="square" lIns="0" tIns="0" rIns="0" bIns="0" rtlCol="0" anchor="t"/>
+          <a:lstStyle/>
+          <a:p>
+            <a:pPr indent="0" marL="0">
+              <a:buNone/>
+            </a:pPr>
+            <a:r>
+              <a:rPr lang="en-US" sz="950" b="1" dirty="0">
+                <a:solidFill>
+                  <a:srgbClr val="6E747E"/>
+                </a:solidFill>
+                <a:latin typeface="Calibri" pitchFamily="34" charset="0"/>
+                <a:ea typeface="Calibri" pitchFamily="34" charset="-122"/>
+                <a:cs typeface="Calibri" pitchFamily="34" charset="-120"/>
+              </a:rPr>
+              <a:t>No</a:t>
+            </a:r>
+            <a:endParaRPr lang="en-US" sz="950" dirty="0"/>
+          </a:p>
+        </p:txBody>
+      </p:sp>
+      <p:sp>
+        <p:nvSpPr>
+          <p:cNvPr id="46" name="Text 44"/>
+          <p:cNvSpPr/>
+          <p:nvPr/>
+        </p:nvSpPr>
+        <p:spPr>
+          <a:xfrm>
+            <a:off x="6492240" y="4983480"/>
+            <a:ext cx="4846320" cy="219456"/>
+          </a:xfrm>
+          <a:prstGeom prst="rect">
+            <a:avLst/>
+          </a:prstGeom>
+          <a:noFill/>
+          <a:ln/>
+        </p:spPr>
+        <p:txBody>
+          <a:bodyPr wrap="square" lIns="0" tIns="0" rIns="0" bIns="0" rtlCol="0" anchor="t"/>
+          <a:lstStyle/>
+          <a:p>
+            <a:pPr indent="0" marL="0">
+              <a:buNone/>
+            </a:pPr>
+            <a:r>
+              <a:rPr lang="en-US" sz="950" dirty="0">
+                <a:solidFill>
+                  <a:srgbClr val="B4B7BD"/>
+                </a:solidFill>
+                <a:latin typeface="Calibri" pitchFamily="34" charset="0"/>
+                <a:ea typeface="Calibri" pitchFamily="34" charset="-122"/>
+                <a:cs typeface="Calibri" pitchFamily="34" charset="-120"/>
+              </a:rPr>
+              <a:t>Omit for no email at all.</a:t>
+            </a:r>
+            <a:endParaRPr lang="en-US" sz="950" dirty="0"/>
+          </a:p>
+        </p:txBody>
+      </p:sp>
+      <p:sp>
+        <p:nvSpPr>
+          <p:cNvPr id="47" name="Shape 45"/>
+          <p:cNvSpPr/>
+          <p:nvPr/>
+        </p:nvSpPr>
+        <p:spPr>
+          <a:xfrm>
+            <a:off x="548640" y="5285232"/>
+            <a:ext cx="11064240" cy="320040"/>
+          </a:xfrm>
+          <a:prstGeom prst="roundRect">
+            <a:avLst>
+              <a:gd name="adj" fmla="val 14286"/>
+            </a:avLst>
+          </a:prstGeom>
+          <a:solidFill>
+            <a:srgbClr val="15171B"/>
+          </a:solidFill>
+          <a:ln w="12700">
+            <a:solidFill>
+              <a:srgbClr val="15171B"/>
+            </a:solidFill>
+            <a:prstDash val="solid"/>
+          </a:ln>
+        </p:spPr>
+      </p:sp>
+      <p:sp>
+        <p:nvSpPr>
+          <p:cNvPr id="48" name="Text 46"/>
+          <p:cNvSpPr/>
+          <p:nvPr/>
+        </p:nvSpPr>
+        <p:spPr>
+          <a:xfrm>
+            <a:off x="822960" y="5349240"/>
+            <a:ext cx="3840480" cy="219456"/>
+          </a:xfrm>
+          <a:prstGeom prst="rect">
+            <a:avLst/>
+          </a:prstGeom>
+          <a:noFill/>
+          <a:ln/>
+        </p:spPr>
+        <p:txBody>
+          <a:bodyPr wrap="square" lIns="0" tIns="0" rIns="0" bIns="0" rtlCol="0" anchor="t"/>
+          <a:lstStyle/>
+          <a:p>
+            <a:pPr indent="0" marL="0">
+              <a:buNone/>
+            </a:pPr>
+            <a:r>
+              <a:rPr lang="en-US" sz="950" b="1" dirty="0">
+                <a:solidFill>
+                  <a:srgbClr val="22D3EE"/>
+                </a:solidFill>
+                <a:latin typeface="Courier New" pitchFamily="34" charset="0"/>
+                <a:ea typeface="Courier New" pitchFamily="34" charset="-122"/>
+                <a:cs typeface="Courier New" pitchFamily="34" charset="-120"/>
+              </a:rPr>
+              <a:t>notification.sendmail_instance.name</a:t>
+            </a:r>
+            <a:endParaRPr lang="en-US" sz="950" dirty="0"/>
+          </a:p>
+        </p:txBody>
+      </p:sp>
+      <p:sp>
+        <p:nvSpPr>
+          <p:cNvPr id="49" name="Text 47"/>
+          <p:cNvSpPr/>
+          <p:nvPr/>
+        </p:nvSpPr>
+        <p:spPr>
+          <a:xfrm>
+            <a:off x="4846320" y="5349240"/>
+            <a:ext cx="1463040" cy="219456"/>
+          </a:xfrm>
+          <a:prstGeom prst="rect">
+            <a:avLst/>
+          </a:prstGeom>
+          <a:noFill/>
+          <a:ln/>
+        </p:spPr>
+        <p:txBody>
+          <a:bodyPr wrap="square" lIns="0" tIns="0" rIns="0" bIns="0" rtlCol="0" anchor="t"/>
+          <a:lstStyle/>
+          <a:p>
+            <a:pPr indent="0" marL="0">
+              <a:buNone/>
+            </a:pPr>
+            <a:r>
+              <a:rPr lang="en-US" sz="950" b="1" dirty="0">
+                <a:solidFill>
+                  <a:srgbClr val="6E747E"/>
+                </a:solidFill>
+                <a:latin typeface="Calibri" pitchFamily="34" charset="0"/>
+                <a:ea typeface="Calibri" pitchFamily="34" charset="-122"/>
+                <a:cs typeface="Calibri" pitchFamily="34" charset="-120"/>
+              </a:rPr>
+              <a:t>No</a:t>
+            </a:r>
+            <a:endParaRPr lang="en-US" sz="950" dirty="0"/>
+          </a:p>
+        </p:txBody>
+      </p:sp>
+      <p:sp>
+        <p:nvSpPr>
+          <p:cNvPr id="50" name="Text 48"/>
+          <p:cNvSpPr/>
+          <p:nvPr/>
+        </p:nvSpPr>
+        <p:spPr>
+          <a:xfrm>
+            <a:off x="6492240" y="5349240"/>
+            <a:ext cx="4846320" cy="219456"/>
+          </a:xfrm>
+          <a:prstGeom prst="rect">
+            <a:avLst/>
+          </a:prstGeom>
+          <a:noFill/>
+          <a:ln/>
+        </p:spPr>
+        <p:txBody>
+          <a:bodyPr wrap="square" lIns="0" tIns="0" rIns="0" bIns="0" rtlCol="0" anchor="t"/>
+          <a:lstStyle/>
+          <a:p>
+            <a:pPr indent="0" marL="0">
+              <a:buNone/>
+            </a:pPr>
+            <a:r>
+              <a:rPr lang="en-US" sz="950" dirty="0">
+                <a:solidFill>
+                  <a:srgbClr val="B4B7BD"/>
+                </a:solidFill>
+                <a:latin typeface="Calibri" pitchFamily="34" charset="0"/>
+                <a:ea typeface="Calibri" pitchFamily="34" charset="-122"/>
+                <a:cs typeface="Calibri" pitchFamily="34" charset="-120"/>
+              </a:rPr>
+              <a:t>Omit to use any enabled mail instance.</a:t>
+            </a:r>
+            <a:endParaRPr lang="en-US" sz="950" dirty="0"/>
+          </a:p>
+        </p:txBody>
+      </p:sp>
+      <p:sp>
+        <p:nvSpPr>
+          <p:cNvPr id="51" name="Shape 49"/>
+          <p:cNvSpPr/>
+          <p:nvPr/>
+        </p:nvSpPr>
+        <p:spPr>
+          <a:xfrm>
+            <a:off x="548640" y="5650992"/>
+            <a:ext cx="11064240" cy="320040"/>
+          </a:xfrm>
+          <a:prstGeom prst="roundRect">
+            <a:avLst>
+              <a:gd name="adj" fmla="val 14286"/>
+            </a:avLst>
+          </a:prstGeom>
+          <a:solidFill>
+            <a:srgbClr val="15171B"/>
+          </a:solidFill>
+          <a:ln w="12700">
+            <a:solidFill>
+              <a:srgbClr val="15171B"/>
+            </a:solidFill>
+            <a:prstDash val="solid"/>
+          </a:ln>
+        </p:spPr>
+      </p:sp>
+      <p:sp>
+        <p:nvSpPr>
+          <p:cNvPr id="52" name="Text 50"/>
+          <p:cNvSpPr/>
+          <p:nvPr/>
+        </p:nvSpPr>
+        <p:spPr>
+          <a:xfrm>
+            <a:off x="822960" y="5715000"/>
+            <a:ext cx="3840480" cy="219456"/>
+          </a:xfrm>
+          <a:prstGeom prst="rect">
+            <a:avLst/>
+          </a:prstGeom>
+          <a:noFill/>
+          <a:ln/>
+        </p:spPr>
+        <p:txBody>
+          <a:bodyPr wrap="square" lIns="0" tIns="0" rIns="0" bIns="0" rtlCol="0" anchor="t"/>
+          <a:lstStyle/>
+          <a:p>
+            <a:pPr indent="0" marL="0">
+              <a:buNone/>
+            </a:pPr>
+            <a:r>
+              <a:rPr lang="en-US" sz="950" b="1" dirty="0">
+                <a:solidFill>
+                  <a:srgbClr val="22D3EE"/>
+                </a:solidFill>
+                <a:latin typeface="Courier New" pitchFamily="34" charset="0"/>
+                <a:ea typeface="Courier New" pitchFamily="34" charset="-122"/>
+                <a:cs typeface="Courier New" pitchFamily="34" charset="-120"/>
+              </a:rPr>
               <a:t>disabled</a:t>
             </a:r>
-            <a:endParaRPr lang="en-US" sz="1000" dirty="0"/>
-          </a:p>
-        </p:txBody>
-      </p:sp>
-      <p:sp>
-        <p:nvSpPr>
-          <p:cNvPr id="45" name="Text 43"/>
-          <p:cNvSpPr/>
-          <p:nvPr/>
-        </p:nvSpPr>
-        <p:spPr>
-          <a:xfrm>
-            <a:off x="4846320" y="5550408"/>
-            <a:ext cx="1463040" cy="237744"/>
-          </a:xfrm>
-          <a:prstGeom prst="rect">
-            <a:avLst/>
-          </a:prstGeom>
-          <a:noFill/>
-          <a:ln/>
-        </p:spPr>
-        <p:txBody>
-          <a:bodyPr wrap="square" lIns="0" tIns="0" rIns="0" bIns="0" rtlCol="0" anchor="t"/>
-          <a:lstStyle/>
-          <a:p>
-            <a:pPr indent="0" marL="0">
-              <a:buNone/>
-            </a:pPr>
-            <a:r>
-              <a:rPr lang="en-US" sz="1000" b="1" dirty="0">
+            <a:endParaRPr lang="en-US" sz="950" dirty="0"/>
+          </a:p>
+        </p:txBody>
+      </p:sp>
+      <p:sp>
+        <p:nvSpPr>
+          <p:cNvPr id="53" name="Text 51"/>
+          <p:cNvSpPr/>
+          <p:nvPr/>
+        </p:nvSpPr>
+        <p:spPr>
+          <a:xfrm>
+            <a:off x="4846320" y="5715000"/>
+            <a:ext cx="1463040" cy="219456"/>
+          </a:xfrm>
+          <a:prstGeom prst="rect">
+            <a:avLst/>
+          </a:prstGeom>
+          <a:noFill/>
+          <a:ln/>
+        </p:spPr>
+        <p:txBody>
+          <a:bodyPr wrap="square" lIns="0" tIns="0" rIns="0" bIns="0" rtlCol="0" anchor="t"/>
+          <a:lstStyle/>
+          <a:p>
+            <a:pPr indent="0" marL="0">
+              <a:buNone/>
+            </a:pPr>
+            <a:r>
+              <a:rPr lang="en-US" sz="950" b="1" dirty="0">
                 <a:solidFill>
                   <a:srgbClr val="6E747E"/>
                 </a:solidFill>
@@ -24042,36 +25054,36 @@
               </a:rPr>
               <a:t>No</a:t>
             </a:r>
-            <a:endParaRPr lang="en-US" sz="1000" dirty="0"/>
-          </a:p>
-        </p:txBody>
-      </p:sp>
-      <p:sp>
-        <p:nvSpPr>
-          <p:cNvPr id="46" name="Text 44"/>
-          <p:cNvSpPr/>
-          <p:nvPr/>
-        </p:nvSpPr>
-        <p:spPr>
-          <a:xfrm>
-            <a:off x="6492240" y="5550408"/>
-            <a:ext cx="4846320" cy="237744"/>
-          </a:xfrm>
-          <a:prstGeom prst="rect">
-            <a:avLst/>
-          </a:prstGeom>
-          <a:noFill/>
-          <a:ln/>
-        </p:spPr>
-        <p:txBody>
-          <a:bodyPr wrap="square" lIns="0" tIns="0" rIns="0" bIns="0" rtlCol="0" anchor="t"/>
-          <a:lstStyle/>
-          <a:p>
-            <a:pPr indent="0" marL="0">
-              <a:buNone/>
-            </a:pPr>
-            <a:r>
-              <a:rPr lang="en-US" sz="1000" dirty="0">
+            <a:endParaRPr lang="en-US" sz="950" dirty="0"/>
+          </a:p>
+        </p:txBody>
+      </p:sp>
+      <p:sp>
+        <p:nvSpPr>
+          <p:cNvPr id="54" name="Text 52"/>
+          <p:cNvSpPr/>
+          <p:nvPr/>
+        </p:nvSpPr>
+        <p:spPr>
+          <a:xfrm>
+            <a:off x="6492240" y="5715000"/>
+            <a:ext cx="4846320" cy="219456"/>
+          </a:xfrm>
+          <a:prstGeom prst="rect">
+            <a:avLst/>
+          </a:prstGeom>
+          <a:noFill/>
+          <a:ln/>
+        </p:spPr>
+        <p:txBody>
+          <a:bodyPr wrap="square" lIns="0" tIns="0" rIns="0" bIns="0" rtlCol="0" anchor="t"/>
+          <a:lstStyle/>
+          <a:p>
+            <a:pPr indent="0" marL="0">
+              <a:buNone/>
+            </a:pPr>
+            <a:r>
+              <a:rPr lang="en-US" sz="950" dirty="0">
                 <a:solidFill>
                   <a:srgbClr val="B4B7BD"/>
                 </a:solidFill>
@@ -24081,19 +25093,19 @@
               </a:rPr>
               <a:t>false. Set true to skip the entry without deleting it.</a:t>
             </a:r>
-            <a:endParaRPr lang="en-US" sz="1000" dirty="0"/>
-          </a:p>
-        </p:txBody>
-      </p:sp>
-      <p:sp>
-        <p:nvSpPr>
-          <p:cNvPr id="47" name="Text 45"/>
-          <p:cNvSpPr/>
-          <p:nvPr/>
-        </p:nvSpPr>
-        <p:spPr>
-          <a:xfrm>
-            <a:off x="548640" y="6016752"/>
+            <a:endParaRPr lang="en-US" sz="950" dirty="0"/>
+          </a:p>
+        </p:txBody>
+      </p:sp>
+      <p:sp>
+        <p:nvSpPr>
+          <p:cNvPr id="55" name="Text 53"/>
+          <p:cNvSpPr/>
+          <p:nvPr/>
+        </p:nvSpPr>
+        <p:spPr>
+          <a:xfrm>
+            <a:off x="548640" y="6126480"/>
             <a:ext cx="11064240" cy="274320"/>
           </a:xfrm>
           <a:prstGeom prst="rect">
@@ -24110,7 +25122,7 @@
               <a:buNone/>
             </a:pPr>
             <a:r>
-              <a:rPr lang="en-US" sz="1000" i="1" dirty="0">
+              <a:rPr lang="en-US" sz="950" i="1" dirty="0">
                 <a:solidFill>
                   <a:srgbClr val="6E747E"/>
                 </a:solidFill>
@@ -24118,9 +25130,9 @@
                 <a:ea typeface="Calibri" pitchFamily="34" charset="-122"/>
                 <a:cs typeface="Calibri" pitchFamily="34" charset="-120"/>
               </a:rPr>
-              <a:t>*  script.name or script.uuid — one of the two is required.   Every entry also needs endpoint_os, plus endpoint_groups or endpoint_hostnames.</a:t>
-            </a:r>
-            <a:endParaRPr lang="en-US" sz="1000" dirty="0"/>
+              <a:t>*  script.name or script.uuid — one of the two is required.   Every entry also needs endpoint_os, tracker_list, plus endpoint_groups or endpoint_hostnames.</a:t>
+            </a:r>
+            <a:endParaRPr lang="en-US" sz="950" dirty="0"/>
           </a:p>
         </p:txBody>
       </p:sp>

--- a/docs/KOI_Content_Pack_Test_Guide.pptx
+++ b/docs/KOI_Content_Pack_Test_Guide.pptx
@@ -16822,7 +16822,7 @@
                 <a:ea typeface="Calibri" pitchFamily="34" charset="-122"/>
                 <a:cs typeface="Calibri" pitchFamily="34" charset="-120"/>
               </a:rPr>
-              <a:t>Full detail for every step is in the customer guide — KOI_Integration_Customer_Guide_v1.3.0 (Word and PDF).</a:t>
+              <a:t>Full detail for every step is in the customer guide — KOI_Integration_Customer_Guide_v1.4.0 (Word and PDF).</a:t>
             </a:r>
             <a:endParaRPr lang="en-US" sz="1100" dirty="0"/>
           </a:p>

--- a/docs/KOI_Content_Pack_Test_Guide.pptx
+++ b/docs/KOI_Content_Pack_Test_Guide.pptx
@@ -13000,7 +13000,7 @@
                 <a:ea typeface="Calibri" pitchFamily="34" charset="-122"/>
                 <a:cs typeface="Calibri" pitchFamily="34" charset="-120"/>
               </a:rPr>
-              <a:t>Two jobs: Refresh builds the tracker, Scan runs the due endpoints — run Refresh once before the first Scan. Mark-on-dispatch means a poll timeout logs STILL RUNNING and never emails; a SKIPPED entry is not a failure.</a:t>
+              <a:t>Two jobs (enable both after creating them): Refresh builds the tracker, Scan runs the due endpoints — run Refresh once before the first Scan. Mark-on-dispatch means a poll timeout logs STILL RUNNING and never emails; a SKIPPED entry is not a failure.</a:t>
             </a:r>
             <a:endParaRPr lang="en-US" sz="1050" dirty="0"/>
           </a:p>
@@ -20665,7 +20665,7 @@
                 <a:ea typeface="Calibri" pitchFamily="34" charset="-122"/>
                 <a:cs typeface="Calibri" pitchFamily="34" charset="-120"/>
               </a:rPr>
-              <a:t>Create the JSON List Koi Script Runner (Object Setup → Lists). Then two Time-triggered Jobs: Scan → Koi Unified - Script Runner (frequent, e.g. 10 min); Refresh → Koi Unified - Refresh Tracker (hourly). The per-scope tracker Lists auto-create on the first Refresh. You still need the built-in Core REST API integration enabled — no KOI key, no KOI instance, no rules or dashboard.</a:t>
+              <a:t>Create the JSON List Koi Script Runner (Object Setup → Lists). Then two Time-triggered Jobs: Scan → Koi Unified - Script Runner (e.g. 10 min); Refresh → Koi Unified - Refresh Tracker (hourly). Enable both — a new Job can be created disabled. The tracker Lists auto-create on the first Refresh. Also enable the built-in Core REST API integration — no KOI key, instance, rules or dashboard.</a:t>
             </a:r>
             <a:endParaRPr lang="en-US" sz="1000" dirty="0"/>
           </a:p>

--- a/docs/KOI_Content_Pack_Test_Guide.pptx
+++ b/docs/KOI_Content_Pack_Test_Guide.pptx
@@ -4430,7 +4430,7 @@
                 <a:ea typeface="Courier New" pitchFamily="34" charset="-122"/>
                 <a:cs typeface="Courier New" pitchFamily="34" charset="-120"/>
               </a:rPr>
-              <a:t>!setPlaybook playbookId="KOI - Alert Triage"</a:t>
+              <a:t>!setPlaybook playbookId="KOI IR - Alert Triage"</a:t>
             </a:r>
             <a:endParaRPr lang="en-US" sz="1050" dirty="0"/>
           </a:p>
@@ -5515,7 +5515,7 @@
                 <a:ea typeface="Calibri" pitchFamily="34" charset="-122"/>
                 <a:cs typeface="Calibri" pitchFamily="34" charset="-120"/>
               </a:rPr>
-              <a:t>Automation → Playbooks → KOI - Investigate Item → Run.</a:t>
+              <a:t>Automation → Playbooks → KOI IR - Investigate Item → Run.</a:t>
             </a:r>
             <a:endParaRPr lang="en-US" sz="1150" dirty="0"/>
           </a:p>
@@ -5677,7 +5677,7 @@
                 <a:ea typeface="Calibri" pitchFamily="34" charset="-122"/>
                 <a:cs typeface="Calibri" pitchFamily="34" charset="-120"/>
               </a:rPr>
-              <a:t>Repeat with KOI - Investigate Device and a device id.</a:t>
+              <a:t>Repeat with KOI IR - Investigate Device and a device id.</a:t>
             </a:r>
             <a:endParaRPr lang="en-US" sz="1150" dirty="0"/>
           </a:p>
@@ -6759,7 +6759,7 @@
                 <a:ea typeface="Calibri" pitchFamily="34" charset="-122"/>
                 <a:cs typeface="Calibri" pitchFamily="34" charset="-120"/>
               </a:rPr>
-              <a:t>Automation → Playbooks → KOI - Block and Remediate → Run.</a:t>
+              <a:t>Automation → Playbooks → KOI IR - Block and Remediate → Run.</a:t>
             </a:r>
             <a:endParaRPr lang="en-US" sz="1150" dirty="0"/>
           </a:p>
@@ -7928,7 +7928,7 @@
                 <a:ea typeface="Calibri" pitchFamily="34" charset="-122"/>
                 <a:cs typeface="Calibri" pitchFamily="34" charset="-120"/>
               </a:rPr>
-              <a:t>Automation → Playbooks → KOI - MCP Server Audit → Run.</a:t>
+              <a:t>Automation → Playbooks → KOI Hunting - MCP Server Audit → Run.</a:t>
             </a:r>
             <a:endParaRPr lang="en-US" sz="1150" dirty="0"/>
           </a:p>
@@ -9331,7 +9331,7 @@
                 <a:ea typeface="Calibri" pitchFamily="34" charset="-122"/>
                 <a:cs typeface="Calibri" pitchFamily="34" charset="-120"/>
               </a:rPr>
-              <a:t>Automation → Jobs → New Job → time-triggered → playbook Koi Unified - Refresh Tracker.</a:t>
+              <a:t>Automation → Jobs → New Job → time-triggered → playbook KOI Script Runner - Refresh Job.</a:t>
             </a:r>
             <a:endParaRPr lang="en-US" sz="1150" dirty="0"/>
           </a:p>
@@ -10335,7 +10335,7 @@
                 <a:ea typeface="Calibri" pitchFamily="34" charset="-122"/>
                 <a:cs typeface="Calibri" pitchFamily="34" charset="-120"/>
               </a:rPr>
-              <a:t>Automation → Jobs → New Job → time-triggered → playbook Koi Unified - Script Runner.</a:t>
+              <a:t>Automation → Jobs → New Job → time-triggered → playbook KOI Script Runner - Scan Job.</a:t>
             </a:r>
             <a:endParaRPr lang="en-US" sz="1150" dirty="0"/>
           </a:p>

--- a/docs/KOI_Content_Pack_Test_Guide.pptx
+++ b/docs/KOI_Content_Pack_Test_Guide.pptx
@@ -8944,7 +8944,7 @@
                 <a:ea typeface="Calibri" pitchFamily="34" charset="-122"/>
                 <a:cs typeface="Calibri" pitchFamily="34" charset="-120"/>
               </a:rPr>
-              <a:t>An endpoint group containing your agents</a:t>
+              <a:t>An endpoint group — easiest is to tag the agents, then make a dynamic group on that tag</a:t>
             </a:r>
             <a:endParaRPr lang="en-US" sz="1050" dirty="0"/>
           </a:p>
@@ -11435,7 +11435,7 @@
                 <a:ea typeface="Calibri" pitchFamily="34" charset="-122"/>
                 <a:cs typeface="Calibri" pitchFamily="34" charset="-120"/>
               </a:rPr>
-              <a:t>Cortex XDR data for the cross-dataset hunts (optional)</a:t>
+              <a:t>Nothing else — the cross-dataset hunts read xdr_data, which XSIAM holds natively</a:t>
             </a:r>
             <a:endParaRPr lang="en-US" sz="1050" dirty="0"/>
           </a:p>
@@ -18588,7 +18588,7 @@
                 <a:ea typeface="Calibri" pitchFamily="34" charset="-122"/>
                 <a:cs typeface="Calibri" pitchFamily="34" charset="-120"/>
               </a:rPr>
-              <a:t>Tests 1 to 4 prove data is arriving and correct. Tests 5 to 8 prove the automation. Tests 9 and 10 prove fleet script execution — they are the only ones that need the Core REST API integration. Tests 11 and 12 are the query library and the simulator, and can be run at any time.</a:t>
+              <a:t>Tests 1 to 4 prove data is arriving and correct. Tests 5 to 8 prove the automation. Tests 9 and 10 prove fleet script execution — the only ones needing the Core REST API integration. Tests 11 and 12 are the query library and the simulator, and run any time. Nothing here needs a Cortex XDR integration: XSIAM is the XDR, and its XQL engine is built in.</a:t>
             </a:r>
             <a:endParaRPr lang="en-US" sz="1100" dirty="0"/>
           </a:p>
@@ -19679,7 +19679,7 @@
                 <a:ea typeface="Calibri" pitchFamily="34" charset="-122"/>
                 <a:cs typeface="Calibri" pitchFamily="34" charset="-120"/>
               </a:rPr>
-              <a:t>Endpoints → Endpoint Groups</a:t>
+              <a:t>Tag the agents, then Endpoints → Endpoint Groups → dynamic</a:t>
             </a:r>
             <a:endParaRPr lang="en-US" sz="1000" dirty="0"/>
           </a:p>

--- a/docs/KOI_Content_Pack_Test_Guide.pptx
+++ b/docs/KOI_Content_Pack_Test_Guide.pptx
@@ -8866,7 +8866,7 @@
                 <a:ea typeface="Calibri" pitchFamily="34" charset="-122"/>
                 <a:cs typeface="Calibri" pitchFamily="34" charset="-120"/>
               </a:rPr>
-              <a:t>A KOI script uploaded in Action Center → Scripts Library (it must take no parameters)</a:t>
+              <a:t>The KOI deployment script — download it from YOUR KOI console, then upload it to Action Center → Scripts Library. This is KOI's script, not a Cortex one. It must take no parameters</a:t>
             </a:r>
             <a:endParaRPr lang="en-US" sz="1050" dirty="0"/>
           </a:p>
@@ -9022,7 +9022,7 @@
                 <a:ea typeface="Calibri" pitchFamily="34" charset="-122"/>
                 <a:cs typeface="Calibri" pitchFamily="34" charset="-120"/>
               </a:rPr>
-              <a:t>A JSON List named exactly "Koi Script Runner"</a:t>
+              <a:t>A JSON List named exactly "Koi Script Runner" — sample content ships with this pack</a:t>
             </a:r>
             <a:endParaRPr lang="en-US" sz="1050" dirty="0"/>
           </a:p>
@@ -9037,11 +9037,11 @@
         <p:spPr>
           <a:xfrm>
             <a:off x="548640" y="2651760"/>
-            <a:ext cx="6400800" cy="2665476"/>
+            <a:ext cx="6400800" cy="3200400"/>
           </a:xfrm>
           <a:prstGeom prst="roundRect">
             <a:avLst>
-              <a:gd name="adj" fmla="val 1715"/>
+              <a:gd name="adj" fmla="val 1429"/>
             </a:avLst>
           </a:prstGeom>
           <a:solidFill>
@@ -9169,7 +9169,7 @@
                 <a:ea typeface="Calibri" pitchFamily="34" charset="-122"/>
                 <a:cs typeface="Calibri" pitchFamily="34" charset="-120"/>
               </a:rPr>
-              <a:t>Settings → Object Setup → Lists → New List, type JSON, named Koi Script Runner.</a:t>
+              <a:t>Settings → Object Setup → Lists → New List, type JSON, named exactly Koi Script Runner.</a:t>
             </a:r>
             <a:endParaRPr lang="en-US" sz="1150" dirty="0"/>
           </a:p>
@@ -9250,7 +9250,7 @@
                 <a:ea typeface="Calibri" pitchFamily="34" charset="-122"/>
                 <a:cs typeface="Calibri" pitchFamily="34" charset="-120"/>
               </a:rPr>
-              <a:t>Give each entry a script name, endpoint_os, endpoint group, tracker_list and rescan_interval_hours.</a:t>
+              <a:t>Paste the sample list content that ships with this pack (see the pack README), then edit it.</a:t>
             </a:r>
             <a:endParaRPr lang="en-US" sz="1150" dirty="0"/>
           </a:p>
@@ -9331,7 +9331,7 @@
                 <a:ea typeface="Calibri" pitchFamily="34" charset="-122"/>
                 <a:cs typeface="Calibri" pitchFamily="34" charset="-120"/>
               </a:rPr>
-              <a:t>Automation → Jobs → New Job → time-triggered → playbook KOI Script Runner - Refresh Job.</a:t>
+              <a:t>Set endpoint_groups to your group name and script.name to the KOI script exactly as it appears in Action Center.</a:t>
             </a:r>
             <a:endParaRPr lang="en-US" sz="1150" dirty="0"/>
           </a:p>
@@ -9385,7 +9385,7 @@
         <p:spPr>
           <a:xfrm>
             <a:off x="1152144" y="4768596"/>
-            <a:ext cx="5486400" cy="246888"/>
+            <a:ext cx="5486400" cy="438912"/>
           </a:xfrm>
           <a:prstGeom prst="rect">
             <a:avLst/>
@@ -9412,6 +9412,249 @@
                 <a:ea typeface="Calibri" pitchFamily="34" charset="-122"/>
                 <a:cs typeface="Calibri" pitchFamily="34" charset="-120"/>
               </a:rPr>
+              <a:t>Add one entry per operating system you deploy to — each entry pairs one script with one OS.</a:t>
+            </a:r>
+            <a:endParaRPr lang="en-US" sz="1150" dirty="0"/>
+          </a:p>
+        </p:txBody>
+      </p:sp>
+      <p:sp>
+        <p:nvSpPr>
+          <p:cNvPr id="24" name="Text 22"/>
+          <p:cNvSpPr/>
+          <p:nvPr/>
+        </p:nvSpPr>
+        <p:spPr>
+          <a:xfrm>
+            <a:off x="859536" y="5285232"/>
+            <a:ext cx="219456" cy="256032"/>
+          </a:xfrm>
+          <a:prstGeom prst="rect">
+            <a:avLst/>
+          </a:prstGeom>
+          <a:noFill/>
+          <a:ln/>
+        </p:spPr>
+        <p:txBody>
+          <a:bodyPr wrap="square" lIns="0" tIns="0" rIns="0" bIns="0" rtlCol="0" anchor="t"/>
+          <a:lstStyle/>
+          <a:p>
+            <a:pPr indent="0" marL="0">
+              <a:buNone/>
+            </a:pPr>
+            <a:r>
+              <a:rPr lang="en-US" sz="1150" b="1" dirty="0">
+                <a:solidFill>
+                  <a:srgbClr val="E8551F"/>
+                </a:solidFill>
+                <a:latin typeface="Calibri" pitchFamily="34" charset="0"/>
+                <a:ea typeface="Calibri" pitchFamily="34" charset="-122"/>
+                <a:cs typeface="Calibri" pitchFamily="34" charset="-120"/>
+              </a:rPr>
+              <a:t>5</a:t>
+            </a:r>
+            <a:endParaRPr lang="en-US" sz="1150" dirty="0"/>
+          </a:p>
+        </p:txBody>
+      </p:sp>
+      <p:sp>
+        <p:nvSpPr>
+          <p:cNvPr id="25" name="Text 23"/>
+          <p:cNvSpPr/>
+          <p:nvPr/>
+        </p:nvSpPr>
+        <p:spPr>
+          <a:xfrm>
+            <a:off x="1152144" y="5285232"/>
+            <a:ext cx="5486400" cy="438912"/>
+          </a:xfrm>
+          <a:prstGeom prst="rect">
+            <a:avLst/>
+          </a:prstGeom>
+          <a:noFill/>
+          <a:ln/>
+        </p:spPr>
+        <p:txBody>
+          <a:bodyPr wrap="square" lIns="0" tIns="0" rIns="0" bIns="0" rtlCol="0" anchor="t"/>
+          <a:lstStyle/>
+          <a:p>
+            <a:pPr indent="0" marL="0">
+              <a:lnSpc>
+                <a:spcPts val="1500"/>
+              </a:lnSpc>
+              <a:buNone/>
+            </a:pPr>
+            <a:r>
+              <a:rPr lang="en-US" sz="1150" dirty="0">
+                <a:solidFill>
+                  <a:srgbClr val="B4B7BD"/>
+                </a:solidFill>
+                <a:latin typeface="Calibri" pitchFamily="34" charset="0"/>
+                <a:ea typeface="Calibri" pitchFamily="34" charset="-122"/>
+                <a:cs typeface="Calibri" pitchFamily="34" charset="-120"/>
+              </a:rPr>
+              <a:t>tracker_list and rescan_interval_hours already carry working defaults — leave them unless you want a different rescan window.</a:t>
+            </a:r>
+            <a:endParaRPr lang="en-US" sz="1150" dirty="0"/>
+          </a:p>
+        </p:txBody>
+      </p:sp>
+      <p:sp>
+        <p:nvSpPr>
+          <p:cNvPr id="26" name="Text 24"/>
+          <p:cNvSpPr/>
+          <p:nvPr/>
+        </p:nvSpPr>
+        <p:spPr>
+          <a:xfrm>
+            <a:off x="859536" y="5801868"/>
+            <a:ext cx="219456" cy="256032"/>
+          </a:xfrm>
+          <a:prstGeom prst="rect">
+            <a:avLst/>
+          </a:prstGeom>
+          <a:noFill/>
+          <a:ln/>
+        </p:spPr>
+        <p:txBody>
+          <a:bodyPr wrap="square" lIns="0" tIns="0" rIns="0" bIns="0" rtlCol="0" anchor="t"/>
+          <a:lstStyle/>
+          <a:p>
+            <a:pPr indent="0" marL="0">
+              <a:buNone/>
+            </a:pPr>
+            <a:r>
+              <a:rPr lang="en-US" sz="1150" b="1" dirty="0">
+                <a:solidFill>
+                  <a:srgbClr val="E8551F"/>
+                </a:solidFill>
+                <a:latin typeface="Calibri" pitchFamily="34" charset="0"/>
+                <a:ea typeface="Calibri" pitchFamily="34" charset="-122"/>
+                <a:cs typeface="Calibri" pitchFamily="34" charset="-120"/>
+              </a:rPr>
+              <a:t>6</a:t>
+            </a:r>
+            <a:endParaRPr lang="en-US" sz="1150" dirty="0"/>
+          </a:p>
+        </p:txBody>
+      </p:sp>
+      <p:sp>
+        <p:nvSpPr>
+          <p:cNvPr id="27" name="Text 25"/>
+          <p:cNvSpPr/>
+          <p:nvPr/>
+        </p:nvSpPr>
+        <p:spPr>
+          <a:xfrm>
+            <a:off x="1152144" y="5801868"/>
+            <a:ext cx="5486400" cy="438912"/>
+          </a:xfrm>
+          <a:prstGeom prst="rect">
+            <a:avLst/>
+          </a:prstGeom>
+          <a:noFill/>
+          <a:ln/>
+        </p:spPr>
+        <p:txBody>
+          <a:bodyPr wrap="square" lIns="0" tIns="0" rIns="0" bIns="0" rtlCol="0" anchor="t"/>
+          <a:lstStyle/>
+          <a:p>
+            <a:pPr indent="0" marL="0">
+              <a:lnSpc>
+                <a:spcPts val="1500"/>
+              </a:lnSpc>
+              <a:buNone/>
+            </a:pPr>
+            <a:r>
+              <a:rPr lang="en-US" sz="1150" dirty="0">
+                <a:solidFill>
+                  <a:srgbClr val="B4B7BD"/>
+                </a:solidFill>
+                <a:latin typeface="Calibri" pitchFamily="34" charset="0"/>
+                <a:ea typeface="Calibri" pitchFamily="34" charset="-122"/>
+                <a:cs typeface="Calibri" pitchFamily="34" charset="-120"/>
+              </a:rPr>
+              <a:t>Automation → Jobs → New Job → time-triggered → playbook KOI Script Runner - Refresh Job.</a:t>
+            </a:r>
+            <a:endParaRPr lang="en-US" sz="1150" dirty="0"/>
+          </a:p>
+        </p:txBody>
+      </p:sp>
+      <p:sp>
+        <p:nvSpPr>
+          <p:cNvPr id="28" name="Text 26"/>
+          <p:cNvSpPr/>
+          <p:nvPr/>
+        </p:nvSpPr>
+        <p:spPr>
+          <a:xfrm>
+            <a:off x="859536" y="6318504"/>
+            <a:ext cx="219456" cy="256032"/>
+          </a:xfrm>
+          <a:prstGeom prst="rect">
+            <a:avLst/>
+          </a:prstGeom>
+          <a:noFill/>
+          <a:ln/>
+        </p:spPr>
+        <p:txBody>
+          <a:bodyPr wrap="square" lIns="0" tIns="0" rIns="0" bIns="0" rtlCol="0" anchor="t"/>
+          <a:lstStyle/>
+          <a:p>
+            <a:pPr indent="0" marL="0">
+              <a:buNone/>
+            </a:pPr>
+            <a:r>
+              <a:rPr lang="en-US" sz="1150" b="1" dirty="0">
+                <a:solidFill>
+                  <a:srgbClr val="E8551F"/>
+                </a:solidFill>
+                <a:latin typeface="Calibri" pitchFamily="34" charset="0"/>
+                <a:ea typeface="Calibri" pitchFamily="34" charset="-122"/>
+                <a:cs typeface="Calibri" pitchFamily="34" charset="-120"/>
+              </a:rPr>
+              <a:t>7</a:t>
+            </a:r>
+            <a:endParaRPr lang="en-US" sz="1150" dirty="0"/>
+          </a:p>
+        </p:txBody>
+      </p:sp>
+      <p:sp>
+        <p:nvSpPr>
+          <p:cNvPr id="29" name="Text 27"/>
+          <p:cNvSpPr/>
+          <p:nvPr/>
+        </p:nvSpPr>
+        <p:spPr>
+          <a:xfrm>
+            <a:off x="1152144" y="6318504"/>
+            <a:ext cx="5486400" cy="246888"/>
+          </a:xfrm>
+          <a:prstGeom prst="rect">
+            <a:avLst/>
+          </a:prstGeom>
+          <a:noFill/>
+          <a:ln/>
+        </p:spPr>
+        <p:txBody>
+          <a:bodyPr wrap="square" lIns="0" tIns="0" rIns="0" bIns="0" rtlCol="0" anchor="t"/>
+          <a:lstStyle/>
+          <a:p>
+            <a:pPr indent="0" marL="0">
+              <a:lnSpc>
+                <a:spcPts val="1500"/>
+              </a:lnSpc>
+              <a:buNone/>
+            </a:pPr>
+            <a:r>
+              <a:rPr lang="en-US" sz="1150" dirty="0">
+                <a:solidFill>
+                  <a:srgbClr val="B4B7BD"/>
+                </a:solidFill>
+                <a:latin typeface="Calibri" pitchFamily="34" charset="0"/>
+                <a:ea typeface="Calibri" pitchFamily="34" charset="-122"/>
+                <a:cs typeface="Calibri" pitchFamily="34" charset="-120"/>
+              </a:rPr>
               <a:t>Enable the Job, then use Run now.</a:t>
             </a:r>
             <a:endParaRPr lang="en-US" sz="1150" dirty="0"/>
@@ -9420,18 +9663,18 @@
       </p:sp>
       <p:sp>
         <p:nvSpPr>
-          <p:cNvPr id="24" name="Shape 22"/>
+          <p:cNvPr id="30" name="Shape 28"/>
           <p:cNvSpPr/>
           <p:nvPr/>
         </p:nvSpPr>
         <p:spPr>
           <a:xfrm>
             <a:off x="7315200" y="2651760"/>
-            <a:ext cx="4297680" cy="2665476"/>
+            <a:ext cx="4297680" cy="3200400"/>
           </a:xfrm>
           <a:prstGeom prst="roundRect">
             <a:avLst>
-              <a:gd name="adj" fmla="val 1715"/>
+              <a:gd name="adj" fmla="val 1429"/>
             </a:avLst>
           </a:prstGeom>
           <a:solidFill>
@@ -9447,7 +9690,7 @@
       </p:sp>
       <p:sp>
         <p:nvSpPr>
-          <p:cNvPr id="25" name="Text 23"/>
+          <p:cNvPr id="31" name="Text 29"/>
           <p:cNvSpPr/>
           <p:nvPr/>
         </p:nvSpPr>
@@ -9486,7 +9729,7 @@
       </p:sp>
       <p:sp>
         <p:nvSpPr>
-          <p:cNvPr id="26" name="Text 24"/>
+          <p:cNvPr id="32" name="Text 30"/>
           <p:cNvSpPr/>
           <p:nvPr/>
         </p:nvSpPr>
@@ -9525,7 +9768,7 @@
       </p:sp>
       <p:sp>
         <p:nvSpPr>
-          <p:cNvPr id="27" name="Text 25"/>
+          <p:cNvPr id="33" name="Text 31"/>
           <p:cNvSpPr/>
           <p:nvPr/>
         </p:nvSpPr>
@@ -9567,7 +9810,7 @@
       </p:sp>
       <p:sp>
         <p:nvSpPr>
-          <p:cNvPr id="28" name="Text 26"/>
+          <p:cNvPr id="34" name="Text 32"/>
           <p:cNvSpPr/>
           <p:nvPr/>
         </p:nvSpPr>
@@ -9606,7 +9849,7 @@
       </p:sp>
       <p:sp>
         <p:nvSpPr>
-          <p:cNvPr id="29" name="Text 27"/>
+          <p:cNvPr id="35" name="Text 33"/>
           <p:cNvSpPr/>
           <p:nvPr/>
         </p:nvSpPr>
@@ -9648,7 +9891,7 @@
       </p:sp>
       <p:sp>
         <p:nvSpPr>
-          <p:cNvPr id="30" name="Text 28"/>
+          <p:cNvPr id="36" name="Text 34"/>
           <p:cNvSpPr/>
           <p:nvPr/>
         </p:nvSpPr>
@@ -9687,7 +9930,7 @@
       </p:sp>
       <p:sp>
         <p:nvSpPr>
-          <p:cNvPr id="31" name="Text 29"/>
+          <p:cNvPr id="37" name="Text 35"/>
           <p:cNvSpPr/>
           <p:nvPr/>
         </p:nvSpPr>
@@ -9729,13 +9972,13 @@
       </p:sp>
       <p:sp>
         <p:nvSpPr>
-          <p:cNvPr id="32" name="Shape 30"/>
-          <p:cNvSpPr/>
-          <p:nvPr/>
-        </p:nvSpPr>
-        <p:spPr>
-          <a:xfrm>
-            <a:off x="548640" y="5463540"/>
+          <p:cNvPr id="38" name="Shape 36"/>
+          <p:cNvSpPr/>
+          <p:nvPr/>
+        </p:nvSpPr>
+        <p:spPr>
+          <a:xfrm>
+            <a:off x="548640" y="5998464"/>
             <a:ext cx="11064240" cy="658368"/>
           </a:xfrm>
           <a:prstGeom prst="roundRect">
@@ -9756,13 +9999,13 @@
       </p:sp>
       <p:sp>
         <p:nvSpPr>
-          <p:cNvPr id="33" name="Shape 31"/>
-          <p:cNvSpPr/>
-          <p:nvPr/>
-        </p:nvSpPr>
-        <p:spPr>
-          <a:xfrm>
-            <a:off x="786384" y="5646420"/>
+          <p:cNvPr id="39" name="Shape 37"/>
+          <p:cNvSpPr/>
+          <p:nvPr/>
+        </p:nvSpPr>
+        <p:spPr>
+          <a:xfrm>
+            <a:off x="786384" y="6181344"/>
             <a:ext cx="292608" cy="292608"/>
           </a:xfrm>
           <a:prstGeom prst="roundRect">
@@ -9783,13 +10026,13 @@
       </p:sp>
       <p:sp>
         <p:nvSpPr>
-          <p:cNvPr id="34" name="Text 32"/>
-          <p:cNvSpPr/>
-          <p:nvPr/>
-        </p:nvSpPr>
-        <p:spPr>
-          <a:xfrm>
-            <a:off x="786384" y="5646420"/>
+          <p:cNvPr id="40" name="Text 38"/>
+          <p:cNvSpPr/>
+          <p:nvPr/>
+        </p:nvSpPr>
+        <p:spPr>
+          <a:xfrm>
+            <a:off x="786384" y="6181344"/>
             <a:ext cx="292608" cy="292608"/>
           </a:xfrm>
           <a:prstGeom prst="rect">
@@ -9822,13 +10065,13 @@
       </p:sp>
       <p:sp>
         <p:nvSpPr>
-          <p:cNvPr id="35" name="Text 33"/>
-          <p:cNvSpPr/>
-          <p:nvPr/>
-        </p:nvSpPr>
-        <p:spPr>
-          <a:xfrm>
-            <a:off x="1243584" y="5573268"/>
+          <p:cNvPr id="41" name="Text 39"/>
+          <p:cNvSpPr/>
+          <p:nvPr/>
+        </p:nvSpPr>
+        <p:spPr>
+          <a:xfrm>
+            <a:off x="1243584" y="6108192"/>
             <a:ext cx="10058400" cy="438912"/>
           </a:xfrm>
           <a:prstGeom prst="rect">

--- a/docs/KOI_Content_Pack_Test_Guide.pptx
+++ b/docs/KOI_Content_Pack_Test_Guide.pptx
@@ -10792,7 +10792,7 @@
         <p:spPr>
           <a:xfrm>
             <a:off x="1152144" y="4091940"/>
-            <a:ext cx="5486400" cy="438912"/>
+            <a:ext cx="5486400" cy="630936"/>
           </a:xfrm>
           <a:prstGeom prst="rect">
             <a:avLst/>
@@ -10819,7 +10819,7 @@
                 <a:ea typeface="Calibri" pitchFamily="34" charset="-122"/>
                 <a:cs typeface="Calibri" pitchFamily="34" charset="-120"/>
               </a:rPr>
-              <a:t>Open Lists/list-Koi_Script_Runner.json in the pack, copy its data value, and paste it in.</a:t>
+              <a:t>Open Lists/README.md in the pack and copy the JSON block — it is formatted ready to paste (do NOT copy from list-Koi_Script_Runner.json; its data field is escaped).</a:t>
             </a:r>
             <a:endParaRPr lang="en-US" sz="1150" dirty="0"/>
           </a:p>
@@ -10833,7 +10833,7 @@
         </p:nvSpPr>
         <p:spPr>
           <a:xfrm>
-            <a:off x="859536" y="4608576"/>
+            <a:off x="859536" y="4796028"/>
             <a:ext cx="219456" cy="256032"/>
           </a:xfrm>
           <a:prstGeom prst="rect">
@@ -10872,7 +10872,7 @@
         </p:nvSpPr>
         <p:spPr>
           <a:xfrm>
-            <a:off x="1152144" y="4608576"/>
+            <a:off x="1152144" y="4796028"/>
             <a:ext cx="5486400" cy="438912"/>
           </a:xfrm>
           <a:prstGeom prst="rect">
@@ -10914,7 +10914,7 @@
         </p:nvSpPr>
         <p:spPr>
           <a:xfrm>
-            <a:off x="859536" y="5125212"/>
+            <a:off x="859536" y="5312664"/>
             <a:ext cx="219456" cy="256032"/>
           </a:xfrm>
           <a:prstGeom prst="rect">
@@ -10953,7 +10953,7 @@
         </p:nvSpPr>
         <p:spPr>
           <a:xfrm>
-            <a:off x="1152144" y="5125212"/>
+            <a:off x="1152144" y="5312664"/>
             <a:ext cx="5486400" cy="438912"/>
           </a:xfrm>
           <a:prstGeom prst="rect">
@@ -10995,7 +10995,7 @@
         </p:nvSpPr>
         <p:spPr>
           <a:xfrm>
-            <a:off x="859536" y="5641848"/>
+            <a:off x="859536" y="5829300"/>
             <a:ext cx="219456" cy="256032"/>
           </a:xfrm>
           <a:prstGeom prst="rect">
@@ -11034,7 +11034,7 @@
         </p:nvSpPr>
         <p:spPr>
           <a:xfrm>
-            <a:off x="1152144" y="5641848"/>
+            <a:off x="1152144" y="5829300"/>
             <a:ext cx="5486400" cy="438912"/>
           </a:xfrm>
           <a:prstGeom prst="rect">
@@ -11076,7 +11076,7 @@
         </p:nvSpPr>
         <p:spPr>
           <a:xfrm>
-            <a:off x="859536" y="6158484"/>
+            <a:off x="859536" y="6345936"/>
             <a:ext cx="219456" cy="256032"/>
           </a:xfrm>
           <a:prstGeom prst="rect">
@@ -11115,7 +11115,7 @@
         </p:nvSpPr>
         <p:spPr>
           <a:xfrm>
-            <a:off x="1152144" y="6158484"/>
+            <a:off x="1152144" y="6345936"/>
             <a:ext cx="5486400" cy="246888"/>
           </a:xfrm>
           <a:prstGeom prst="rect">

--- a/docs/KOI_Content_Pack_Test_Guide.pptx
+++ b/docs/KOI_Content_Pack_Test_Guide.pptx
@@ -24,10 +24,9 @@
     <p:sldId id="272" r:id="rId18"/>
     <p:sldId id="273" r:id="rId19"/>
     <p:sldId id="274" r:id="rId20"/>
-    <p:sldId id="275" r:id="rId21"/>
   </p:sldIdLst>
   <p:notesMasterIdLst>
-    <p:notesMasterId r:id="rId22"/>
+    <p:notesMasterId r:id="rId21"/>
   </p:notesMasterIdLst>
   <p:sldSz cx="12192000" cy="6858000"/>
   <p:notesSz cx="6858000" cy="12192000"/>
@@ -1513,94 +1512,6 @@
             <a:fld id="{F7021451-1387-4CA6-816F-3879F97B5CBC}" type="slidenum">
               <a:rPr lang="en-US"/>
               <a:t>2</a:t>
-            </a:fld>
-            <a:endParaRPr lang="en-US"/>
-          </a:p>
-        </p:txBody>
-      </p:sp>
-    </p:spTree>
-    <p:extLst>
-      <p:ext uri="{BB962C8B-B14F-4D97-AF65-F5344CB8AC3E}">
-        <p14:creationId xmlns:p14="http://schemas.microsoft.com/office/powerpoint/2010/main" val="1024086991"/>
-      </p:ext>
-    </p:extLst>
-  </p:cSld>
-  <p:clrMapOvr>
-    <a:masterClrMapping/>
-  </p:clrMapOvr>
-</p:notes>
-</file>
-
-<file path=ppt/notesSlides/notesSlide20.xml><?xml version="1.0" encoding="utf-8"?>
-<p:notes xmlns:a="http://schemas.openxmlformats.org/drawingml/2006/main" xmlns:r="http://schemas.openxmlformats.org/officeDocument/2006/relationships" xmlns:p="http://schemas.openxmlformats.org/presentationml/2006/main">
-  <p:cSld>
-    <p:spTree>
-      <p:nvGrpSpPr>
-        <p:cNvPr id="1" name=""/>
-        <p:cNvGrpSpPr/>
-        <p:nvPr/>
-      </p:nvGrpSpPr>
-      <p:grpSpPr>
-        <a:xfrm>
-          <a:off x="0" y="0"/>
-          <a:ext cx="0" cy="0"/>
-          <a:chOff x="0" y="0"/>
-          <a:chExt cx="0" cy="0"/>
-        </a:xfrm>
-      </p:grpSpPr>
-      <p:sp>
-        <p:nvSpPr>
-          <p:cNvPr id="2" name="Slide Image Placeholder 1"/>
-          <p:cNvSpPr>
-            <a:spLocks noGrp="1" noRot="1" noChangeAspect="1"/>
-          </p:cNvSpPr>
-          <p:nvPr>
-            <p:ph type="sldImg"/>
-          </p:nvPr>
-        </p:nvSpPr>
-        <p:spPr/>
-      </p:sp>
-      <p:sp>
-        <p:nvSpPr>
-          <p:cNvPr id="3" name="Notes Placeholder 2"/>
-          <p:cNvSpPr>
-            <a:spLocks noGrp="1"/>
-          </p:cNvSpPr>
-          <p:nvPr>
-            <p:ph type="body" idx="1"/>
-          </p:nvPr>
-        </p:nvSpPr>
-        <p:spPr/>
-        <p:txBody>
-          <a:bodyPr/>
-          <a:lstStyle/>
-          <a:p>
-            <a:r>
-              <a:rPr lang="en-US" dirty="0"/>
-              <a:t/>
-            </a:r>
-            <a:endParaRPr lang="en-US" dirty="0"/>
-          </a:p>
-        </p:txBody>
-      </p:sp>
-      <p:sp>
-        <p:nvSpPr>
-          <p:cNvPr id="4" name="Slide Number Placeholder 3"/>
-          <p:cNvSpPr>
-            <a:spLocks noGrp="1"/>
-          </p:cNvSpPr>
-          <p:nvPr>
-            <p:ph type="sldNum" sz="quarter" idx="10"/>
-          </p:nvPr>
-        </p:nvSpPr>
-        <p:spPr/>
-        <p:txBody>
-          <a:bodyPr/>
-          <a:lstStyle/>
-          <a:p>
-            <a:fld id="{F7021451-1387-4CA6-816F-3879F97B5CBC}" type="slidenum">
-              <a:rPr lang="en-US"/>
-              <a:t>20</a:t>
             </a:fld>
             <a:endParaRPr lang="en-US"/>
           </a:p>
@@ -3864,141 +3775,6 @@
           </a:p>
         </p:txBody>
       </p:sp>
-      <p:sp>
-        <p:nvSpPr>
-          <p:cNvPr id="29" name="Shape 27"/>
-          <p:cNvSpPr/>
-          <p:nvPr/>
-        </p:nvSpPr>
-        <p:spPr>
-          <a:xfrm>
-            <a:off x="548640" y="4498848"/>
-            <a:ext cx="11064240" cy="658368"/>
-          </a:xfrm>
-          <a:prstGeom prst="roundRect">
-            <a:avLst>
-              <a:gd name="adj" fmla="val 6944"/>
-            </a:avLst>
-          </a:prstGeom>
-          <a:solidFill>
-            <a:srgbClr val="1C2026"/>
-          </a:solidFill>
-          <a:ln w="12700">
-            <a:solidFill>
-              <a:srgbClr val="1C2026"/>
-            </a:solidFill>
-            <a:prstDash val="solid"/>
-          </a:ln>
-        </p:spPr>
-      </p:sp>
-      <p:sp>
-        <p:nvSpPr>
-          <p:cNvPr id="30" name="Shape 28"/>
-          <p:cNvSpPr/>
-          <p:nvPr/>
-        </p:nvSpPr>
-        <p:spPr>
-          <a:xfrm>
-            <a:off x="786384" y="4681728"/>
-            <a:ext cx="292608" cy="292608"/>
-          </a:xfrm>
-          <a:prstGeom prst="roundRect">
-            <a:avLst>
-              <a:gd name="adj" fmla="val 28125"/>
-            </a:avLst>
-          </a:prstGeom>
-          <a:solidFill>
-            <a:srgbClr val="F5A524"/>
-          </a:solidFill>
-          <a:ln w="12700">
-            <a:solidFill>
-              <a:srgbClr val="F5A524"/>
-            </a:solidFill>
-            <a:prstDash val="solid"/>
-          </a:ln>
-        </p:spPr>
-      </p:sp>
-      <p:sp>
-        <p:nvSpPr>
-          <p:cNvPr id="31" name="Text 29"/>
-          <p:cNvSpPr/>
-          <p:nvPr/>
-        </p:nvSpPr>
-        <p:spPr>
-          <a:xfrm>
-            <a:off x="786384" y="4681728"/>
-            <a:ext cx="292608" cy="292608"/>
-          </a:xfrm>
-          <a:prstGeom prst="rect">
-            <a:avLst/>
-          </a:prstGeom>
-          <a:noFill/>
-          <a:ln/>
-        </p:spPr>
-        <p:txBody>
-          <a:bodyPr wrap="square" lIns="0" tIns="0" rIns="0" bIns="0" rtlCol="0" anchor="ctr"/>
-          <a:lstStyle/>
-          <a:p>
-            <a:pPr algn="ctr" indent="0" marL="0">
-              <a:buNone/>
-            </a:pPr>
-            <a:r>
-              <a:rPr lang="en-US" sz="1300" b="1" dirty="0">
-                <a:solidFill>
-                  <a:srgbClr val="FFFFFF"/>
-                </a:solidFill>
-                <a:latin typeface="Calibri" pitchFamily="34" charset="0"/>
-                <a:ea typeface="Calibri" pitchFamily="34" charset="-122"/>
-                <a:cs typeface="Calibri" pitchFamily="34" charset="-120"/>
-              </a:rPr>
-              <a:t>!</a:t>
-            </a:r>
-            <a:endParaRPr lang="en-US" sz="1300" dirty="0"/>
-          </a:p>
-        </p:txBody>
-      </p:sp>
-      <p:sp>
-        <p:nvSpPr>
-          <p:cNvPr id="32" name="Text 30"/>
-          <p:cNvSpPr/>
-          <p:nvPr/>
-        </p:nvSpPr>
-        <p:spPr>
-          <a:xfrm>
-            <a:off x="1243584" y="4608576"/>
-            <a:ext cx="10058400" cy="438912"/>
-          </a:xfrm>
-          <a:prstGeom prst="rect">
-            <a:avLst/>
-          </a:prstGeom>
-          <a:noFill/>
-          <a:ln/>
-        </p:spPr>
-        <p:txBody>
-          <a:bodyPr wrap="square" lIns="0" tIns="0" rIns="0" bIns="0" rtlCol="0" anchor="t"/>
-          <a:lstStyle/>
-          <a:p>
-            <a:pPr indent="0" marL="0">
-              <a:lnSpc>
-                <a:spcPts val="1200"/>
-              </a:lnSpc>
-              <a:buNone/>
-            </a:pPr>
-            <a:r>
-              <a:rPr lang="en-US" sz="1000" dirty="0">
-                <a:solidFill>
-                  <a:srgbClr val="B4B7BD"/>
-                </a:solidFill>
-                <a:latin typeface="Calibri" pitchFamily="34" charset="0"/>
-                <a:ea typeface="Calibri" pitchFamily="34" charset="-122"/>
-                <a:cs typeface="Calibri" pitchFamily="34" charset="-120"/>
-              </a:rPr>
-              <a:t>A widget whose number climbs steadily while nothing new happens in KOI would be counting deliveries rather than alerts. Every widget in this pack de-duplicates first.</a:t>
-            </a:r>
-            <a:endParaRPr lang="en-US" sz="1000" dirty="0"/>
-          </a:p>
-        </p:txBody>
-      </p:sp>
     </p:spTree>
   </p:cSld>
   <p:clrMapOvr>
@@ -5480,141 +5256,6 @@
           </a:p>
         </p:txBody>
       </p:sp>
-      <p:sp>
-        <p:nvSpPr>
-          <p:cNvPr id="39" name="Shape 37"/>
-          <p:cNvSpPr/>
-          <p:nvPr/>
-        </p:nvSpPr>
-        <p:spPr>
-          <a:xfrm>
-            <a:off x="548640" y="5463540"/>
-            <a:ext cx="11064240" cy="658368"/>
-          </a:xfrm>
-          <a:prstGeom prst="roundRect">
-            <a:avLst>
-              <a:gd name="adj" fmla="val 6944"/>
-            </a:avLst>
-          </a:prstGeom>
-          <a:solidFill>
-            <a:srgbClr val="1C2026"/>
-          </a:solidFill>
-          <a:ln w="12700">
-            <a:solidFill>
-              <a:srgbClr val="1C2026"/>
-            </a:solidFill>
-            <a:prstDash val="solid"/>
-          </a:ln>
-        </p:spPr>
-      </p:sp>
-      <p:sp>
-        <p:nvSpPr>
-          <p:cNvPr id="40" name="Shape 38"/>
-          <p:cNvSpPr/>
-          <p:nvPr/>
-        </p:nvSpPr>
-        <p:spPr>
-          <a:xfrm>
-            <a:off x="786384" y="5646420"/>
-            <a:ext cx="292608" cy="292608"/>
-          </a:xfrm>
-          <a:prstGeom prst="roundRect">
-            <a:avLst>
-              <a:gd name="adj" fmla="val 28125"/>
-            </a:avLst>
-          </a:prstGeom>
-          <a:solidFill>
-            <a:srgbClr val="F5A524"/>
-          </a:solidFill>
-          <a:ln w="12700">
-            <a:solidFill>
-              <a:srgbClr val="F5A524"/>
-            </a:solidFill>
-            <a:prstDash val="solid"/>
-          </a:ln>
-        </p:spPr>
-      </p:sp>
-      <p:sp>
-        <p:nvSpPr>
-          <p:cNvPr id="41" name="Text 39"/>
-          <p:cNvSpPr/>
-          <p:nvPr/>
-        </p:nvSpPr>
-        <p:spPr>
-          <a:xfrm>
-            <a:off x="786384" y="5646420"/>
-            <a:ext cx="292608" cy="292608"/>
-          </a:xfrm>
-          <a:prstGeom prst="rect">
-            <a:avLst/>
-          </a:prstGeom>
-          <a:noFill/>
-          <a:ln/>
-        </p:spPr>
-        <p:txBody>
-          <a:bodyPr wrap="square" lIns="0" tIns="0" rIns="0" bIns="0" rtlCol="0" anchor="ctr"/>
-          <a:lstStyle/>
-          <a:p>
-            <a:pPr algn="ctr" indent="0" marL="0">
-              <a:buNone/>
-            </a:pPr>
-            <a:r>
-              <a:rPr lang="en-US" sz="1300" b="1" dirty="0">
-                <a:solidFill>
-                  <a:srgbClr val="FFFFFF"/>
-                </a:solidFill>
-                <a:latin typeface="Calibri" pitchFamily="34" charset="0"/>
-                <a:ea typeface="Calibri" pitchFamily="34" charset="-122"/>
-                <a:cs typeface="Calibri" pitchFamily="34" charset="-120"/>
-              </a:rPr>
-              <a:t>!</a:t>
-            </a:r>
-            <a:endParaRPr lang="en-US" sz="1300" dirty="0"/>
-          </a:p>
-        </p:txBody>
-      </p:sp>
-      <p:sp>
-        <p:nvSpPr>
-          <p:cNvPr id="42" name="Text 40"/>
-          <p:cNvSpPr/>
-          <p:nvPr/>
-        </p:nvSpPr>
-        <p:spPr>
-          <a:xfrm>
-            <a:off x="1243584" y="5573268"/>
-            <a:ext cx="10058400" cy="438912"/>
-          </a:xfrm>
-          <a:prstGeom prst="rect">
-            <a:avLst/>
-          </a:prstGeom>
-          <a:noFill/>
-          <a:ln/>
-        </p:spPr>
-        <p:txBody>
-          <a:bodyPr wrap="square" lIns="0" tIns="0" rIns="0" bIns="0" rtlCol="0" anchor="t"/>
-          <a:lstStyle/>
-          <a:p>
-            <a:pPr indent="0" marL="0">
-              <a:lnSpc>
-                <a:spcPts val="1200"/>
-              </a:lnSpc>
-              <a:buNone/>
-            </a:pPr>
-            <a:r>
-              <a:rPr lang="en-US" sz="1000" dirty="0">
-                <a:solidFill>
-                  <a:srgbClr val="B4B7BD"/>
-                </a:solidFill>
-                <a:latin typeface="Calibri" pitchFamily="34" charset="0"/>
-                <a:ea typeface="Calibri" pitchFamily="34" charset="-122"/>
-                <a:cs typeface="Calibri" pitchFamily="34" charset="-120"/>
-              </a:rPr>
-              <a:t>Everything coming out Suspicious usually means the alert carried no KOI detail for the playbook to read. Check the correlation rule passes the KOI fields through. Pending means KOI has not finished scoring — it deliberately never auto-closes.</a:t>
-            </a:r>
-            <a:endParaRPr lang="en-US" sz="1000" dirty="0"/>
-          </a:p>
-        </p:txBody>
-      </p:sp>
     </p:spTree>
   </p:cSld>
   <p:clrMapOvr>
@@ -6934,141 +6575,6 @@
           </a:p>
         </p:txBody>
       </p:sp>
-      <p:sp>
-        <p:nvSpPr>
-          <p:cNvPr id="35" name="Shape 33"/>
-          <p:cNvSpPr/>
-          <p:nvPr/>
-        </p:nvSpPr>
-        <p:spPr>
-          <a:xfrm>
-            <a:off x="548640" y="5426964"/>
-            <a:ext cx="11064240" cy="658368"/>
-          </a:xfrm>
-          <a:prstGeom prst="roundRect">
-            <a:avLst>
-              <a:gd name="adj" fmla="val 6944"/>
-            </a:avLst>
-          </a:prstGeom>
-          <a:solidFill>
-            <a:srgbClr val="1C2026"/>
-          </a:solidFill>
-          <a:ln w="12700">
-            <a:solidFill>
-              <a:srgbClr val="1C2026"/>
-            </a:solidFill>
-            <a:prstDash val="solid"/>
-          </a:ln>
-        </p:spPr>
-      </p:sp>
-      <p:sp>
-        <p:nvSpPr>
-          <p:cNvPr id="36" name="Shape 34"/>
-          <p:cNvSpPr/>
-          <p:nvPr/>
-        </p:nvSpPr>
-        <p:spPr>
-          <a:xfrm>
-            <a:off x="786384" y="5609844"/>
-            <a:ext cx="292608" cy="292608"/>
-          </a:xfrm>
-          <a:prstGeom prst="roundRect">
-            <a:avLst>
-              <a:gd name="adj" fmla="val 28125"/>
-            </a:avLst>
-          </a:prstGeom>
-          <a:solidFill>
-            <a:srgbClr val="F5A524"/>
-          </a:solidFill>
-          <a:ln w="12700">
-            <a:solidFill>
-              <a:srgbClr val="F5A524"/>
-            </a:solidFill>
-            <a:prstDash val="solid"/>
-          </a:ln>
-        </p:spPr>
-      </p:sp>
-      <p:sp>
-        <p:nvSpPr>
-          <p:cNvPr id="37" name="Text 35"/>
-          <p:cNvSpPr/>
-          <p:nvPr/>
-        </p:nvSpPr>
-        <p:spPr>
-          <a:xfrm>
-            <a:off x="786384" y="5609844"/>
-            <a:ext cx="292608" cy="292608"/>
-          </a:xfrm>
-          <a:prstGeom prst="rect">
-            <a:avLst/>
-          </a:prstGeom>
-          <a:noFill/>
-          <a:ln/>
-        </p:spPr>
-        <p:txBody>
-          <a:bodyPr wrap="square" lIns="0" tIns="0" rIns="0" bIns="0" rtlCol="0" anchor="ctr"/>
-          <a:lstStyle/>
-          <a:p>
-            <a:pPr algn="ctr" indent="0" marL="0">
-              <a:buNone/>
-            </a:pPr>
-            <a:r>
-              <a:rPr lang="en-US" sz="1300" b="1" dirty="0">
-                <a:solidFill>
-                  <a:srgbClr val="FFFFFF"/>
-                </a:solidFill>
-                <a:latin typeface="Calibri" pitchFamily="34" charset="0"/>
-                <a:ea typeface="Calibri" pitchFamily="34" charset="-122"/>
-                <a:cs typeface="Calibri" pitchFamily="34" charset="-120"/>
-              </a:rPr>
-              <a:t>!</a:t>
-            </a:r>
-            <a:endParaRPr lang="en-US" sz="1300" dirty="0"/>
-          </a:p>
-        </p:txBody>
-      </p:sp>
-      <p:sp>
-        <p:nvSpPr>
-          <p:cNvPr id="38" name="Text 36"/>
-          <p:cNvSpPr/>
-          <p:nvPr/>
-        </p:nvSpPr>
-        <p:spPr>
-          <a:xfrm>
-            <a:off x="1243584" y="5536692"/>
-            <a:ext cx="10058400" cy="438912"/>
-          </a:xfrm>
-          <a:prstGeom prst="rect">
-            <a:avLst/>
-          </a:prstGeom>
-          <a:noFill/>
-          <a:ln/>
-        </p:spPr>
-        <p:txBody>
-          <a:bodyPr wrap="square" lIns="0" tIns="0" rIns="0" bIns="0" rtlCol="0" anchor="t"/>
-          <a:lstStyle/>
-          <a:p>
-            <a:pPr indent="0" marL="0">
-              <a:lnSpc>
-                <a:spcPts val="1200"/>
-              </a:lnSpc>
-              <a:buNone/>
-            </a:pPr>
-            <a:r>
-              <a:rPr lang="en-US" sz="1000" dirty="0">
-                <a:solidFill>
-                  <a:srgbClr val="B4B7BD"/>
-                </a:solidFill>
-                <a:latin typeface="Calibri" pitchFamily="34" charset="0"/>
-                <a:ea typeface="Calibri" pitchFamily="34" charset="-122"/>
-                <a:cs typeface="Calibri" pitchFamily="34" charset="-120"/>
-              </a:rPr>
-              <a:t>Both governance counts matter. Zero blocklist hits alone does not mean nobody has governed the item — it may have been explicitly allowed, and blocking it would override that decision.</a:t>
-            </a:r>
-            <a:endParaRPr lang="en-US" sz="1000" dirty="0"/>
-          </a:p>
-        </p:txBody>
-      </p:sp>
     </p:spTree>
   </p:cSld>
   <p:clrMapOvr>
@@ -8469,141 +7975,6 @@
           </a:p>
         </p:txBody>
       </p:sp>
-      <p:sp>
-        <p:nvSpPr>
-          <p:cNvPr id="37" name="Shape 35"/>
-          <p:cNvSpPr/>
-          <p:nvPr/>
-        </p:nvSpPr>
-        <p:spPr>
-          <a:xfrm>
-            <a:off x="548640" y="5239512"/>
-            <a:ext cx="11064240" cy="658368"/>
-          </a:xfrm>
-          <a:prstGeom prst="roundRect">
-            <a:avLst>
-              <a:gd name="adj" fmla="val 6944"/>
-            </a:avLst>
-          </a:prstGeom>
-          <a:solidFill>
-            <a:srgbClr val="1C2026"/>
-          </a:solidFill>
-          <a:ln w="12700">
-            <a:solidFill>
-              <a:srgbClr val="1C2026"/>
-            </a:solidFill>
-            <a:prstDash val="solid"/>
-          </a:ln>
-        </p:spPr>
-      </p:sp>
-      <p:sp>
-        <p:nvSpPr>
-          <p:cNvPr id="38" name="Shape 36"/>
-          <p:cNvSpPr/>
-          <p:nvPr/>
-        </p:nvSpPr>
-        <p:spPr>
-          <a:xfrm>
-            <a:off x="786384" y="5422392"/>
-            <a:ext cx="292608" cy="292608"/>
-          </a:xfrm>
-          <a:prstGeom prst="roundRect">
-            <a:avLst>
-              <a:gd name="adj" fmla="val 28125"/>
-            </a:avLst>
-          </a:prstGeom>
-          <a:solidFill>
-            <a:srgbClr val="F5A524"/>
-          </a:solidFill>
-          <a:ln w="12700">
-            <a:solidFill>
-              <a:srgbClr val="F5A524"/>
-            </a:solidFill>
-            <a:prstDash val="solid"/>
-          </a:ln>
-        </p:spPr>
-      </p:sp>
-      <p:sp>
-        <p:nvSpPr>
-          <p:cNvPr id="39" name="Text 37"/>
-          <p:cNvSpPr/>
-          <p:nvPr/>
-        </p:nvSpPr>
-        <p:spPr>
-          <a:xfrm>
-            <a:off x="786384" y="5422392"/>
-            <a:ext cx="292608" cy="292608"/>
-          </a:xfrm>
-          <a:prstGeom prst="rect">
-            <a:avLst/>
-          </a:prstGeom>
-          <a:noFill/>
-          <a:ln/>
-        </p:spPr>
-        <p:txBody>
-          <a:bodyPr wrap="square" lIns="0" tIns="0" rIns="0" bIns="0" rtlCol="0" anchor="ctr"/>
-          <a:lstStyle/>
-          <a:p>
-            <a:pPr algn="ctr" indent="0" marL="0">
-              <a:buNone/>
-            </a:pPr>
-            <a:r>
-              <a:rPr lang="en-US" sz="1300" b="1" dirty="0">
-                <a:solidFill>
-                  <a:srgbClr val="FFFFFF"/>
-                </a:solidFill>
-                <a:latin typeface="Calibri" pitchFamily="34" charset="0"/>
-                <a:ea typeface="Calibri" pitchFamily="34" charset="-122"/>
-                <a:cs typeface="Calibri" pitchFamily="34" charset="-120"/>
-              </a:rPr>
-              <a:t>!</a:t>
-            </a:r>
-            <a:endParaRPr lang="en-US" sz="1300" dirty="0"/>
-          </a:p>
-        </p:txBody>
-      </p:sp>
-      <p:sp>
-        <p:nvSpPr>
-          <p:cNvPr id="40" name="Text 38"/>
-          <p:cNvSpPr/>
-          <p:nvPr/>
-        </p:nvSpPr>
-        <p:spPr>
-          <a:xfrm>
-            <a:off x="1243584" y="5349240"/>
-            <a:ext cx="10058400" cy="438912"/>
-          </a:xfrm>
-          <a:prstGeom prst="rect">
-            <a:avLst/>
-          </a:prstGeom>
-          <a:noFill/>
-          <a:ln/>
-        </p:spPr>
-        <p:txBody>
-          <a:bodyPr wrap="square" lIns="0" tIns="0" rIns="0" bIns="0" rtlCol="0" anchor="t"/>
-          <a:lstStyle/>
-          <a:p>
-            <a:pPr indent="0" marL="0">
-              <a:lnSpc>
-                <a:spcPts val="1200"/>
-              </a:lnSpc>
-              <a:buNone/>
-            </a:pPr>
-            <a:r>
-              <a:rPr lang="en-US" sz="1000" dirty="0">
-                <a:solidFill>
-                  <a:srgbClr val="B4B7BD"/>
-                </a:solidFill>
-                <a:latin typeface="Calibri" pitchFamily="34" charset="0"/>
-                <a:ea typeface="Calibri" pitchFamily="34" charset="-122"/>
-                <a:cs typeface="Calibri" pitchFamily="34" charset="-120"/>
-              </a:rPr>
-              <a:t>This is the test to repeat after any change to the response playbook. If a run ever completes without stopping for approval, stop and investigate before using the pack in production.</a:t>
-            </a:r>
-            <a:endParaRPr lang="en-US" sz="1000" dirty="0"/>
-          </a:p>
-        </p:txBody>
-      </p:sp>
     </p:spTree>
   </p:cSld>
   <p:clrMapOvr>
@@ -9599,141 +8970,6 @@
           </a:p>
         </p:txBody>
       </p:sp>
-      <p:sp>
-        <p:nvSpPr>
-          <p:cNvPr id="27" name="Shape 25"/>
-          <p:cNvSpPr/>
-          <p:nvPr/>
-        </p:nvSpPr>
-        <p:spPr>
-          <a:xfrm>
-            <a:off x="548640" y="4229100"/>
-            <a:ext cx="11064240" cy="658368"/>
-          </a:xfrm>
-          <a:prstGeom prst="roundRect">
-            <a:avLst>
-              <a:gd name="adj" fmla="val 6944"/>
-            </a:avLst>
-          </a:prstGeom>
-          <a:solidFill>
-            <a:srgbClr val="1C2026"/>
-          </a:solidFill>
-          <a:ln w="12700">
-            <a:solidFill>
-              <a:srgbClr val="1C2026"/>
-            </a:solidFill>
-            <a:prstDash val="solid"/>
-          </a:ln>
-        </p:spPr>
-      </p:sp>
-      <p:sp>
-        <p:nvSpPr>
-          <p:cNvPr id="28" name="Shape 26"/>
-          <p:cNvSpPr/>
-          <p:nvPr/>
-        </p:nvSpPr>
-        <p:spPr>
-          <a:xfrm>
-            <a:off x="786384" y="4411980"/>
-            <a:ext cx="292608" cy="292608"/>
-          </a:xfrm>
-          <a:prstGeom prst="roundRect">
-            <a:avLst>
-              <a:gd name="adj" fmla="val 28125"/>
-            </a:avLst>
-          </a:prstGeom>
-          <a:solidFill>
-            <a:srgbClr val="F5A524"/>
-          </a:solidFill>
-          <a:ln w="12700">
-            <a:solidFill>
-              <a:srgbClr val="F5A524"/>
-            </a:solidFill>
-            <a:prstDash val="solid"/>
-          </a:ln>
-        </p:spPr>
-      </p:sp>
-      <p:sp>
-        <p:nvSpPr>
-          <p:cNvPr id="29" name="Text 27"/>
-          <p:cNvSpPr/>
-          <p:nvPr/>
-        </p:nvSpPr>
-        <p:spPr>
-          <a:xfrm>
-            <a:off x="786384" y="4411980"/>
-            <a:ext cx="292608" cy="292608"/>
-          </a:xfrm>
-          <a:prstGeom prst="rect">
-            <a:avLst/>
-          </a:prstGeom>
-          <a:noFill/>
-          <a:ln/>
-        </p:spPr>
-        <p:txBody>
-          <a:bodyPr wrap="square" lIns="0" tIns="0" rIns="0" bIns="0" rtlCol="0" anchor="ctr"/>
-          <a:lstStyle/>
-          <a:p>
-            <a:pPr algn="ctr" indent="0" marL="0">
-              <a:buNone/>
-            </a:pPr>
-            <a:r>
-              <a:rPr lang="en-US" sz="1300" b="1" dirty="0">
-                <a:solidFill>
-                  <a:srgbClr val="FFFFFF"/>
-                </a:solidFill>
-                <a:latin typeface="Calibri" pitchFamily="34" charset="0"/>
-                <a:ea typeface="Calibri" pitchFamily="34" charset="-122"/>
-                <a:cs typeface="Calibri" pitchFamily="34" charset="-120"/>
-              </a:rPr>
-              <a:t>!</a:t>
-            </a:r>
-            <a:endParaRPr lang="en-US" sz="1300" dirty="0"/>
-          </a:p>
-        </p:txBody>
-      </p:sp>
-      <p:sp>
-        <p:nvSpPr>
-          <p:cNvPr id="30" name="Text 28"/>
-          <p:cNvSpPr/>
-          <p:nvPr/>
-        </p:nvSpPr>
-        <p:spPr>
-          <a:xfrm>
-            <a:off x="1243584" y="4338828"/>
-            <a:ext cx="10058400" cy="438912"/>
-          </a:xfrm>
-          <a:prstGeom prst="rect">
-            <a:avLst/>
-          </a:prstGeom>
-          <a:noFill/>
-          <a:ln/>
-        </p:spPr>
-        <p:txBody>
-          <a:bodyPr wrap="square" lIns="0" tIns="0" rIns="0" bIns="0" rtlCol="0" anchor="t"/>
-          <a:lstStyle/>
-          <a:p>
-            <a:pPr indent="0" marL="0">
-              <a:lnSpc>
-                <a:spcPts val="1200"/>
-              </a:lnSpc>
-              <a:buNone/>
-            </a:pPr>
-            <a:r>
-              <a:rPr lang="en-US" sz="1000" dirty="0">
-                <a:solidFill>
-                  <a:srgbClr val="B4B7BD"/>
-                </a:solidFill>
-                <a:latin typeface="Calibri" pitchFamily="34" charset="0"/>
-                <a:ea typeface="Calibri" pitchFamily="34" charset="-122"/>
-                <a:cs typeface="Calibri" pitchFamily="34" charset="-120"/>
-              </a:rPr>
-              <a:t>This asks KOI what it has already scored. It finds risky agentic-AI assets without waiting for an alert about them.</a:t>
-            </a:r>
-            <a:endParaRPr lang="en-US" sz="1000" dirty="0"/>
-          </a:p>
-        </p:txBody>
-      </p:sp>
     </p:spTree>
   </p:cSld>
   <p:clrMapOvr>
@@ -10606,11 +9842,11 @@
         <p:spPr>
           <a:xfrm>
             <a:off x="548640" y="3044952"/>
-            <a:ext cx="6400800" cy="2843784"/>
+            <a:ext cx="6400800" cy="3538728"/>
           </a:xfrm>
           <a:prstGeom prst="roundRect">
             <a:avLst>
-              <a:gd name="adj" fmla="val 1608"/>
+              <a:gd name="adj" fmla="val 1292"/>
             </a:avLst>
           </a:prstGeom>
           <a:solidFill>
@@ -11158,11 +10394,11 @@
         <p:spPr>
           <a:xfrm>
             <a:off x="7315200" y="3044952"/>
-            <a:ext cx="4297680" cy="2843784"/>
+            <a:ext cx="4297680" cy="3538728"/>
           </a:xfrm>
           <a:prstGeom prst="roundRect">
             <a:avLst>
-              <a:gd name="adj" fmla="val 1608"/>
+              <a:gd name="adj" fmla="val 1292"/>
             </a:avLst>
           </a:prstGeom>
           <a:solidFill>
@@ -11455,141 +10691,6 @@
               <a:t>Re-running adds new endpoints without disturbing existing rows.</a:t>
             </a:r>
             <a:endParaRPr lang="en-US" sz="1150" dirty="0"/>
-          </a:p>
-        </p:txBody>
-      </p:sp>
-      <p:sp>
-        <p:nvSpPr>
-          <p:cNvPr id="45" name="Shape 43"/>
-          <p:cNvSpPr/>
-          <p:nvPr/>
-        </p:nvSpPr>
-        <p:spPr>
-          <a:xfrm>
-            <a:off x="548640" y="6016752"/>
-            <a:ext cx="11064240" cy="658368"/>
-          </a:xfrm>
-          <a:prstGeom prst="roundRect">
-            <a:avLst>
-              <a:gd name="adj" fmla="val 6944"/>
-            </a:avLst>
-          </a:prstGeom>
-          <a:solidFill>
-            <a:srgbClr val="1C2026"/>
-          </a:solidFill>
-          <a:ln w="12700">
-            <a:solidFill>
-              <a:srgbClr val="1C2026"/>
-            </a:solidFill>
-            <a:prstDash val="solid"/>
-          </a:ln>
-        </p:spPr>
-      </p:sp>
-      <p:sp>
-        <p:nvSpPr>
-          <p:cNvPr id="46" name="Shape 44"/>
-          <p:cNvSpPr/>
-          <p:nvPr/>
-        </p:nvSpPr>
-        <p:spPr>
-          <a:xfrm>
-            <a:off x="786384" y="6199632"/>
-            <a:ext cx="292608" cy="292608"/>
-          </a:xfrm>
-          <a:prstGeom prst="roundRect">
-            <a:avLst>
-              <a:gd name="adj" fmla="val 28125"/>
-            </a:avLst>
-          </a:prstGeom>
-          <a:solidFill>
-            <a:srgbClr val="F5A524"/>
-          </a:solidFill>
-          <a:ln w="12700">
-            <a:solidFill>
-              <a:srgbClr val="F5A524"/>
-            </a:solidFill>
-            <a:prstDash val="solid"/>
-          </a:ln>
-        </p:spPr>
-      </p:sp>
-      <p:sp>
-        <p:nvSpPr>
-          <p:cNvPr id="47" name="Text 45"/>
-          <p:cNvSpPr/>
-          <p:nvPr/>
-        </p:nvSpPr>
-        <p:spPr>
-          <a:xfrm>
-            <a:off x="786384" y="6199632"/>
-            <a:ext cx="292608" cy="292608"/>
-          </a:xfrm>
-          <a:prstGeom prst="rect">
-            <a:avLst/>
-          </a:prstGeom>
-          <a:noFill/>
-          <a:ln/>
-        </p:spPr>
-        <p:txBody>
-          <a:bodyPr wrap="square" lIns="0" tIns="0" rIns="0" bIns="0" rtlCol="0" anchor="ctr"/>
-          <a:lstStyle/>
-          <a:p>
-            <a:pPr algn="ctr" indent="0" marL="0">
-              <a:buNone/>
-            </a:pPr>
-            <a:r>
-              <a:rPr lang="en-US" sz="1300" b="1" dirty="0">
-                <a:solidFill>
-                  <a:srgbClr val="FFFFFF"/>
-                </a:solidFill>
-                <a:latin typeface="Calibri" pitchFamily="34" charset="0"/>
-                <a:ea typeface="Calibri" pitchFamily="34" charset="-122"/>
-                <a:cs typeface="Calibri" pitchFamily="34" charset="-120"/>
-              </a:rPr>
-              <a:t>!</a:t>
-            </a:r>
-            <a:endParaRPr lang="en-US" sz="1300" dirty="0"/>
-          </a:p>
-        </p:txBody>
-      </p:sp>
-      <p:sp>
-        <p:nvSpPr>
-          <p:cNvPr id="48" name="Text 46"/>
-          <p:cNvSpPr/>
-          <p:nvPr/>
-        </p:nvSpPr>
-        <p:spPr>
-          <a:xfrm>
-            <a:off x="1243584" y="6126480"/>
-            <a:ext cx="10058400" cy="438912"/>
-          </a:xfrm>
-          <a:prstGeom prst="rect">
-            <a:avLst/>
-          </a:prstGeom>
-          <a:noFill/>
-          <a:ln/>
-        </p:spPr>
-        <p:txBody>
-          <a:bodyPr wrap="square" lIns="0" tIns="0" rIns="0" bIns="0" rtlCol="0" anchor="t"/>
-          <a:lstStyle/>
-          <a:p>
-            <a:pPr indent="0" marL="0">
-              <a:lnSpc>
-                <a:spcPts val="1200"/>
-              </a:lnSpc>
-              <a:buNone/>
-            </a:pPr>
-            <a:r>
-              <a:rPr lang="en-US" sz="1000" dirty="0">
-                <a:solidFill>
-                  <a:srgbClr val="B4B7BD"/>
-                </a:solidFill>
-                <a:latin typeface="Calibri" pitchFamily="34" charset="0"/>
-                <a:ea typeface="Calibri" pitchFamily="34" charset="-122"/>
-                <a:cs typeface="Calibri" pitchFamily="34" charset="-120"/>
-              </a:rPr>
-              <a:t>Without a Core REST API instance this test cannot pass — the refresh reads endpoint groups through it. The tracker simply stays empty, which looks like a broken playbook.</a:t>
-            </a:r>
-            <a:endParaRPr lang="en-US" sz="1000" dirty="0"/>
           </a:p>
         </p:txBody>
       </p:sp>
@@ -12303,11 +11404,11 @@
         <p:spPr>
           <a:xfrm>
             <a:off x="548640" y="2670048"/>
-            <a:ext cx="6400800" cy="2852928"/>
+            <a:ext cx="6400800" cy="3557016"/>
           </a:xfrm>
           <a:prstGeom prst="roundRect">
             <a:avLst>
-              <a:gd name="adj" fmla="val 1603"/>
+              <a:gd name="adj" fmla="val 1285"/>
             </a:avLst>
           </a:prstGeom>
           <a:solidFill>
@@ -12693,11 +11794,11 @@
         <p:spPr>
           <a:xfrm>
             <a:off x="7315200" y="2670048"/>
-            <a:ext cx="4297680" cy="2852928"/>
+            <a:ext cx="4297680" cy="3557016"/>
           </a:xfrm>
           <a:prstGeom prst="roundRect">
             <a:avLst>
-              <a:gd name="adj" fmla="val 1603"/>
+              <a:gd name="adj" fmla="val 1285"/>
             </a:avLst>
           </a:prstGeom>
           <a:solidFill>
@@ -13076,107 +12177,53 @@
       </p:sp>
       <p:sp>
         <p:nvSpPr>
-          <p:cNvPr id="39" name="Shape 37"/>
-          <p:cNvSpPr/>
-          <p:nvPr/>
-        </p:nvSpPr>
-        <p:spPr>
-          <a:xfrm>
-            <a:off x="548640" y="5650992"/>
-            <a:ext cx="11064240" cy="658368"/>
-          </a:xfrm>
-          <a:prstGeom prst="roundRect">
-            <a:avLst>
-              <a:gd name="adj" fmla="val 6944"/>
-            </a:avLst>
-          </a:prstGeom>
-          <a:solidFill>
-            <a:srgbClr val="1C2026"/>
-          </a:solidFill>
-          <a:ln w="12700">
-            <a:solidFill>
-              <a:srgbClr val="1C2026"/>
-            </a:solidFill>
-            <a:prstDash val="solid"/>
-          </a:ln>
-        </p:spPr>
-      </p:sp>
-      <p:sp>
-        <p:nvSpPr>
-          <p:cNvPr id="40" name="Shape 38"/>
-          <p:cNvSpPr/>
-          <p:nvPr/>
-        </p:nvSpPr>
-        <p:spPr>
-          <a:xfrm>
-            <a:off x="786384" y="5833872"/>
-            <a:ext cx="292608" cy="292608"/>
-          </a:xfrm>
-          <a:prstGeom prst="roundRect">
-            <a:avLst>
-              <a:gd name="adj" fmla="val 28125"/>
-            </a:avLst>
-          </a:prstGeom>
-          <a:solidFill>
-            <a:srgbClr val="F5A524"/>
-          </a:solidFill>
-          <a:ln w="12700">
-            <a:solidFill>
-              <a:srgbClr val="F5A524"/>
-            </a:solidFill>
-            <a:prstDash val="solid"/>
-          </a:ln>
-        </p:spPr>
-      </p:sp>
-      <p:sp>
-        <p:nvSpPr>
-          <p:cNvPr id="41" name="Text 39"/>
-          <p:cNvSpPr/>
-          <p:nvPr/>
-        </p:nvSpPr>
-        <p:spPr>
-          <a:xfrm>
-            <a:off x="786384" y="5833872"/>
-            <a:ext cx="292608" cy="292608"/>
-          </a:xfrm>
-          <a:prstGeom prst="rect">
-            <a:avLst/>
-          </a:prstGeom>
-          <a:noFill/>
-          <a:ln/>
-        </p:spPr>
-        <p:txBody>
-          <a:bodyPr wrap="square" lIns="0" tIns="0" rIns="0" bIns="0" rtlCol="0" anchor="ctr"/>
-          <a:lstStyle/>
-          <a:p>
-            <a:pPr algn="ctr" indent="0" marL="0">
-              <a:buNone/>
-            </a:pPr>
-            <a:r>
-              <a:rPr lang="en-US" sz="1300" b="1" dirty="0">
-                <a:solidFill>
-                  <a:srgbClr val="FFFFFF"/>
-                </a:solidFill>
-                <a:latin typeface="Calibri" pitchFamily="34" charset="0"/>
-                <a:ea typeface="Calibri" pitchFamily="34" charset="-122"/>
-                <a:cs typeface="Calibri" pitchFamily="34" charset="-120"/>
-              </a:rPr>
-              <a:t>!</a:t>
-            </a:r>
-            <a:endParaRPr lang="en-US" sz="1300" dirty="0"/>
-          </a:p>
-        </p:txBody>
-      </p:sp>
-      <p:sp>
-        <p:nvSpPr>
-          <p:cNvPr id="42" name="Text 40"/>
-          <p:cNvSpPr/>
-          <p:nvPr/>
-        </p:nvSpPr>
-        <p:spPr>
-          <a:xfrm>
-            <a:off x="1243584" y="5760720"/>
-            <a:ext cx="10058400" cy="438912"/>
+          <p:cNvPr id="39" name="Text 37"/>
+          <p:cNvSpPr/>
+          <p:nvPr/>
+        </p:nvSpPr>
+        <p:spPr>
+          <a:xfrm>
+            <a:off x="7626096" y="5266944"/>
+            <a:ext cx="219456" cy="256032"/>
+          </a:xfrm>
+          <a:prstGeom prst="rect">
+            <a:avLst/>
+          </a:prstGeom>
+          <a:noFill/>
+          <a:ln/>
+        </p:spPr>
+        <p:txBody>
+          <a:bodyPr wrap="square" lIns="0" tIns="0" rIns="0" bIns="0" rtlCol="0" anchor="t"/>
+          <a:lstStyle/>
+          <a:p>
+            <a:pPr indent="0" marL="0">
+              <a:buNone/>
+            </a:pPr>
+            <a:r>
+              <a:rPr lang="en-US" sz="1150" b="1" dirty="0">
+                <a:solidFill>
+                  <a:srgbClr val="3FB950"/>
+                </a:solidFill>
+                <a:latin typeface="Calibri" pitchFamily="34" charset="0"/>
+                <a:ea typeface="Calibri" pitchFamily="34" charset="-122"/>
+                <a:cs typeface="Calibri" pitchFamily="34" charset="-120"/>
+              </a:rPr>
+              <a:t>✓</a:t>
+            </a:r>
+            <a:endParaRPr lang="en-US" sz="1150" dirty="0"/>
+          </a:p>
+        </p:txBody>
+      </p:sp>
+      <p:sp>
+        <p:nvSpPr>
+          <p:cNvPr id="40" name="Text 38"/>
+          <p:cNvSpPr/>
+          <p:nvPr/>
+        </p:nvSpPr>
+        <p:spPr>
+          <a:xfrm>
+            <a:off x="7918704" y="5266944"/>
+            <a:ext cx="3383280" cy="630936"/>
           </a:xfrm>
           <a:prstGeom prst="rect">
             <a:avLst/>
@@ -13190,12 +12237,12 @@
           <a:p>
             <a:pPr indent="0" marL="0">
               <a:lnSpc>
-                <a:spcPts val="1200"/>
+                <a:spcPts val="1500"/>
               </a:lnSpc>
               <a:buNone/>
             </a:pPr>
             <a:r>
-              <a:rPr lang="en-US" sz="1000" dirty="0">
+              <a:rPr lang="en-US" sz="1150" dirty="0">
                 <a:solidFill>
                   <a:srgbClr val="B4B7BD"/>
                 </a:solidFill>
@@ -13203,9 +12250,9 @@
                 <a:ea typeface="Calibri" pitchFamily="34" charset="-122"/>
                 <a:cs typeface="Calibri" pitchFamily="34" charset="-120"/>
               </a:rPr>
-              <a:t>SKIPPED means nothing is due right now and sends no email, by design. STILL RUNNING means the script was dispatched and Action Center is finishing on its own. Neither is a failure.</a:t>
-            </a:r>
-            <a:endParaRPr lang="en-US" sz="1000" dirty="0"/>
+              <a:t>A SKIPPED entry means nothing was due; a STILL RUNNING entry means Action Center is finishing on its own. Both are normal and send no email.</a:t>
+            </a:r>
+            <a:endParaRPr lang="en-US" sz="1150" dirty="0"/>
           </a:p>
         </p:txBody>
       </p:sp>
@@ -14366,141 +13413,6 @@
           </a:p>
         </p:txBody>
       </p:sp>
-      <p:sp>
-        <p:nvSpPr>
-          <p:cNvPr id="31" name="Shape 29"/>
-          <p:cNvSpPr/>
-          <p:nvPr/>
-        </p:nvSpPr>
-        <p:spPr>
-          <a:xfrm>
-            <a:off x="548640" y="4686300"/>
-            <a:ext cx="11064240" cy="658368"/>
-          </a:xfrm>
-          <a:prstGeom prst="roundRect">
-            <a:avLst>
-              <a:gd name="adj" fmla="val 6944"/>
-            </a:avLst>
-          </a:prstGeom>
-          <a:solidFill>
-            <a:srgbClr val="1C2026"/>
-          </a:solidFill>
-          <a:ln w="12700">
-            <a:solidFill>
-              <a:srgbClr val="1C2026"/>
-            </a:solidFill>
-            <a:prstDash val="solid"/>
-          </a:ln>
-        </p:spPr>
-      </p:sp>
-      <p:sp>
-        <p:nvSpPr>
-          <p:cNvPr id="32" name="Shape 30"/>
-          <p:cNvSpPr/>
-          <p:nvPr/>
-        </p:nvSpPr>
-        <p:spPr>
-          <a:xfrm>
-            <a:off x="786384" y="4869180"/>
-            <a:ext cx="292608" cy="292608"/>
-          </a:xfrm>
-          <a:prstGeom prst="roundRect">
-            <a:avLst>
-              <a:gd name="adj" fmla="val 28125"/>
-            </a:avLst>
-          </a:prstGeom>
-          <a:solidFill>
-            <a:srgbClr val="F5A524"/>
-          </a:solidFill>
-          <a:ln w="12700">
-            <a:solidFill>
-              <a:srgbClr val="F5A524"/>
-            </a:solidFill>
-            <a:prstDash val="solid"/>
-          </a:ln>
-        </p:spPr>
-      </p:sp>
-      <p:sp>
-        <p:nvSpPr>
-          <p:cNvPr id="33" name="Text 31"/>
-          <p:cNvSpPr/>
-          <p:nvPr/>
-        </p:nvSpPr>
-        <p:spPr>
-          <a:xfrm>
-            <a:off x="786384" y="4869180"/>
-            <a:ext cx="292608" cy="292608"/>
-          </a:xfrm>
-          <a:prstGeom prst="rect">
-            <a:avLst/>
-          </a:prstGeom>
-          <a:noFill/>
-          <a:ln/>
-        </p:spPr>
-        <p:txBody>
-          <a:bodyPr wrap="square" lIns="0" tIns="0" rIns="0" bIns="0" rtlCol="0" anchor="ctr"/>
-          <a:lstStyle/>
-          <a:p>
-            <a:pPr algn="ctr" indent="0" marL="0">
-              <a:buNone/>
-            </a:pPr>
-            <a:r>
-              <a:rPr lang="en-US" sz="1300" b="1" dirty="0">
-                <a:solidFill>
-                  <a:srgbClr val="FFFFFF"/>
-                </a:solidFill>
-                <a:latin typeface="Calibri" pitchFamily="34" charset="0"/>
-                <a:ea typeface="Calibri" pitchFamily="34" charset="-122"/>
-                <a:cs typeface="Calibri" pitchFamily="34" charset="-120"/>
-              </a:rPr>
-              <a:t>!</a:t>
-            </a:r>
-            <a:endParaRPr lang="en-US" sz="1300" dirty="0"/>
-          </a:p>
-        </p:txBody>
-      </p:sp>
-      <p:sp>
-        <p:nvSpPr>
-          <p:cNvPr id="34" name="Text 32"/>
-          <p:cNvSpPr/>
-          <p:nvPr/>
-        </p:nvSpPr>
-        <p:spPr>
-          <a:xfrm>
-            <a:off x="1243584" y="4796028"/>
-            <a:ext cx="10058400" cy="438912"/>
-          </a:xfrm>
-          <a:prstGeom prst="rect">
-            <a:avLst/>
-          </a:prstGeom>
-          <a:noFill/>
-          <a:ln/>
-        </p:spPr>
-        <p:txBody>
-          <a:bodyPr wrap="square" lIns="0" tIns="0" rIns="0" bIns="0" rtlCol="0" anchor="t"/>
-          <a:lstStyle/>
-          <a:p>
-            <a:pPr indent="0" marL="0">
-              <a:lnSpc>
-                <a:spcPts val="1200"/>
-              </a:lnSpc>
-              <a:buNone/>
-            </a:pPr>
-            <a:r>
-              <a:rPr lang="en-US" sz="1000" dirty="0">
-                <a:solidFill>
-                  <a:srgbClr val="B4B7BD"/>
-                </a:solidFill>
-                <a:latin typeface="Calibri" pitchFamily="34" charset="0"/>
-                <a:ea typeface="Calibri" pitchFamily="34" charset="-122"/>
-                <a:cs typeface="Calibri" pitchFamily="34" charset="-120"/>
-              </a:rPr>
-              <a:t>These read raw event fields, so they keep working regardless of the modeling rule. An empty result is a valid answer, not a failure.</a:t>
-            </a:r>
-            <a:endParaRPr lang="en-US" sz="1000" dirty="0"/>
-          </a:p>
-        </p:txBody>
-      </p:sp>
     </p:spTree>
   </p:cSld>
   <p:clrMapOvr>
@@ -15739,141 +14651,6 @@
           </a:p>
         </p:txBody>
       </p:sp>
-      <p:sp>
-        <p:nvSpPr>
-          <p:cNvPr id="33" name="Shape 31"/>
-          <p:cNvSpPr/>
-          <p:nvPr/>
-        </p:nvSpPr>
-        <p:spPr>
-          <a:xfrm>
-            <a:off x="548640" y="4969764"/>
-            <a:ext cx="11064240" cy="658368"/>
-          </a:xfrm>
-          <a:prstGeom prst="roundRect">
-            <a:avLst>
-              <a:gd name="adj" fmla="val 6944"/>
-            </a:avLst>
-          </a:prstGeom>
-          <a:solidFill>
-            <a:srgbClr val="1C2026"/>
-          </a:solidFill>
-          <a:ln w="12700">
-            <a:solidFill>
-              <a:srgbClr val="1C2026"/>
-            </a:solidFill>
-            <a:prstDash val="solid"/>
-          </a:ln>
-        </p:spPr>
-      </p:sp>
-      <p:sp>
-        <p:nvSpPr>
-          <p:cNvPr id="34" name="Shape 32"/>
-          <p:cNvSpPr/>
-          <p:nvPr/>
-        </p:nvSpPr>
-        <p:spPr>
-          <a:xfrm>
-            <a:off x="786384" y="5152644"/>
-            <a:ext cx="292608" cy="292608"/>
-          </a:xfrm>
-          <a:prstGeom prst="roundRect">
-            <a:avLst>
-              <a:gd name="adj" fmla="val 28125"/>
-            </a:avLst>
-          </a:prstGeom>
-          <a:solidFill>
-            <a:srgbClr val="F5A524"/>
-          </a:solidFill>
-          <a:ln w="12700">
-            <a:solidFill>
-              <a:srgbClr val="F5A524"/>
-            </a:solidFill>
-            <a:prstDash val="solid"/>
-          </a:ln>
-        </p:spPr>
-      </p:sp>
-      <p:sp>
-        <p:nvSpPr>
-          <p:cNvPr id="35" name="Text 33"/>
-          <p:cNvSpPr/>
-          <p:nvPr/>
-        </p:nvSpPr>
-        <p:spPr>
-          <a:xfrm>
-            <a:off x="786384" y="5152644"/>
-            <a:ext cx="292608" cy="292608"/>
-          </a:xfrm>
-          <a:prstGeom prst="rect">
-            <a:avLst/>
-          </a:prstGeom>
-          <a:noFill/>
-          <a:ln/>
-        </p:spPr>
-        <p:txBody>
-          <a:bodyPr wrap="square" lIns="0" tIns="0" rIns="0" bIns="0" rtlCol="0" anchor="ctr"/>
-          <a:lstStyle/>
-          <a:p>
-            <a:pPr algn="ctr" indent="0" marL="0">
-              <a:buNone/>
-            </a:pPr>
-            <a:r>
-              <a:rPr lang="en-US" sz="1300" b="1" dirty="0">
-                <a:solidFill>
-                  <a:srgbClr val="FFFFFF"/>
-                </a:solidFill>
-                <a:latin typeface="Calibri" pitchFamily="34" charset="0"/>
-                <a:ea typeface="Calibri" pitchFamily="34" charset="-122"/>
-                <a:cs typeface="Calibri" pitchFamily="34" charset="-120"/>
-              </a:rPr>
-              <a:t>!</a:t>
-            </a:r>
-            <a:endParaRPr lang="en-US" sz="1300" dirty="0"/>
-          </a:p>
-        </p:txBody>
-      </p:sp>
-      <p:sp>
-        <p:nvSpPr>
-          <p:cNvPr id="36" name="Text 34"/>
-          <p:cNvSpPr/>
-          <p:nvPr/>
-        </p:nvSpPr>
-        <p:spPr>
-          <a:xfrm>
-            <a:off x="1243584" y="5079492"/>
-            <a:ext cx="10058400" cy="438912"/>
-          </a:xfrm>
-          <a:prstGeom prst="rect">
-            <a:avLst/>
-          </a:prstGeom>
-          <a:noFill/>
-          <a:ln/>
-        </p:spPr>
-        <p:txBody>
-          <a:bodyPr wrap="square" lIns="0" tIns="0" rIns="0" bIns="0" rtlCol="0" anchor="t"/>
-          <a:lstStyle/>
-          <a:p>
-            <a:pPr indent="0" marL="0">
-              <a:lnSpc>
-                <a:spcPts val="1200"/>
-              </a:lnSpc>
-              <a:buNone/>
-            </a:pPr>
-            <a:r>
-              <a:rPr lang="en-US" sz="1000" dirty="0">
-                <a:solidFill>
-                  <a:srgbClr val="B4B7BD"/>
-                </a:solidFill>
-                <a:latin typeface="Calibri" pitchFamily="34" charset="0"/>
-                <a:ea typeface="Calibri" pitchFamily="34" charset="-122"/>
-                <a:cs typeface="Calibri" pitchFamily="34" charset="-120"/>
-              </a:rPr>
-              <a:t>It writes to its own dataset, never koi_koi_raw, so it cannot disturb real data. Use it to see the pack working before real KOI activity exists.</a:t>
-            </a:r>
-            <a:endParaRPr lang="en-US" sz="1000" dirty="0"/>
-          </a:p>
-        </p:txBody>
-      </p:sp>
     </p:spTree>
   </p:cSld>
   <p:clrMapOvr>
@@ -15908,7 +14685,34 @@
       </p:grpSpPr>
       <p:sp>
         <p:nvSpPr>
-          <p:cNvPr id="2" name="Text 0"/>
+          <p:cNvPr id="2" name="Shape 0"/>
+          <p:cNvSpPr/>
+          <p:nvPr/>
+        </p:nvSpPr>
+        <p:spPr>
+          <a:xfrm>
+            <a:off x="10424160" y="-3108960"/>
+            <a:ext cx="4389120" cy="4389120"/>
+          </a:xfrm>
+          <a:prstGeom prst="ellipse">
+            <a:avLst/>
+          </a:prstGeom>
+          <a:solidFill>
+            <a:srgbClr val="3FB950">
+              <a:alpha val="7000"/>
+            </a:srgbClr>
+          </a:solidFill>
+          <a:ln w="12700">
+            <a:solidFill>
+              <a:srgbClr val="3FB950"/>
+            </a:solidFill>
+            <a:prstDash val="solid"/>
+          </a:ln>
+        </p:spPr>
+      </p:sp>
+      <p:sp>
+        <p:nvSpPr>
+          <p:cNvPr id="3" name="Text 1"/>
           <p:cNvSpPr/>
           <p:nvPr/>
         </p:nvSpPr>
@@ -15939,7 +14743,7 @@
                 <a:ea typeface="Calibri" pitchFamily="34" charset="-122"/>
                 <a:cs typeface="Calibri" pitchFamily="34" charset="-120"/>
               </a:rPr>
-              <a:t>IF SOMETHING FAILS</a:t>
+              <a:t>SIGN-OFF</a:t>
             </a:r>
             <a:endParaRPr lang="en-US" sz="1100" dirty="0"/>
           </a:p>
@@ -15947,7 +14751,7 @@
       </p:sp>
       <p:sp>
         <p:nvSpPr>
-          <p:cNvPr id="3" name="Text 1"/>
+          <p:cNvPr id="4" name="Text 2"/>
           <p:cNvSpPr/>
           <p:nvPr/>
         </p:nvSpPr>
@@ -15978,7 +14782,7 @@
                 <a:ea typeface="Calibri" pitchFamily="34" charset="-122"/>
                 <a:cs typeface="Calibri" pitchFamily="34" charset="-120"/>
               </a:rPr>
-              <a:t>Check the prerequisite before the product</a:t>
+              <a:t>One line of evidence per test</a:t>
             </a:r>
             <a:endParaRPr lang="en-US" sz="3100" dirty="0"/>
           </a:p>
@@ -15986,18 +14790,18 @@
       </p:sp>
       <p:sp>
         <p:nvSpPr>
-          <p:cNvPr id="4" name="Shape 2"/>
-          <p:cNvSpPr/>
-          <p:nvPr/>
-        </p:nvSpPr>
-        <p:spPr>
-          <a:xfrm>
-            <a:off x="548640" y="1371600"/>
-            <a:ext cx="11064240" cy="457200"/>
+          <p:cNvPr id="5" name="Shape 3"/>
+          <p:cNvSpPr/>
+          <p:nvPr/>
+        </p:nvSpPr>
+        <p:spPr>
+          <a:xfrm>
+            <a:off x="548640" y="1417320"/>
+            <a:ext cx="5349240" cy="548640"/>
           </a:xfrm>
           <a:prstGeom prst="roundRect">
             <a:avLst>
-              <a:gd name="adj" fmla="val 10000"/>
+              <a:gd name="adj" fmla="val 8333"/>
             </a:avLst>
           </a:prstGeom>
           <a:solidFill>
@@ -16013,135 +14817,126 @@
       </p:sp>
       <p:sp>
         <p:nvSpPr>
-          <p:cNvPr id="5" name="Text 3"/>
-          <p:cNvSpPr/>
-          <p:nvPr/>
-        </p:nvSpPr>
-        <p:spPr>
-          <a:xfrm>
-            <a:off x="822960" y="1499616"/>
-            <a:ext cx="3017520" cy="237744"/>
-          </a:xfrm>
-          <a:prstGeom prst="rect">
-            <a:avLst/>
-          </a:prstGeom>
-          <a:noFill/>
-          <a:ln/>
-        </p:spPr>
-        <p:txBody>
-          <a:bodyPr wrap="square" lIns="0" tIns="0" rIns="0" bIns="0" rtlCol="0" anchor="t"/>
-          <a:lstStyle/>
-          <a:p>
-            <a:pPr indent="0" marL="0">
-              <a:buNone/>
-            </a:pPr>
-            <a:r>
-              <a:rPr lang="en-US" sz="1100" b="1" dirty="0">
-                <a:solidFill>
-                  <a:srgbClr val="FFFFFF"/>
-                </a:solidFill>
-                <a:latin typeface="Calibri" pitchFamily="34" charset="0"/>
-                <a:ea typeface="Calibri" pitchFamily="34" charset="-122"/>
-                <a:cs typeface="Calibri" pitchFamily="34" charset="-120"/>
-              </a:rPr>
-              <a:t>403 on KOI commands</a:t>
-            </a:r>
-            <a:endParaRPr lang="en-US" sz="1100" dirty="0"/>
-          </a:p>
-        </p:txBody>
-      </p:sp>
-      <p:sp>
-        <p:nvSpPr>
-          <p:cNvPr id="6" name="Text 4"/>
-          <p:cNvSpPr/>
-          <p:nvPr/>
-        </p:nvSpPr>
-        <p:spPr>
-          <a:xfrm>
-            <a:off x="4023360" y="1508760"/>
-            <a:ext cx="3108960" cy="237744"/>
-          </a:xfrm>
-          <a:prstGeom prst="rect">
-            <a:avLst/>
-          </a:prstGeom>
-          <a:noFill/>
-          <a:ln/>
-        </p:spPr>
-        <p:txBody>
-          <a:bodyPr wrap="square" lIns="0" tIns="0" rIns="0" bIns="0" rtlCol="0" anchor="t"/>
-          <a:lstStyle/>
-          <a:p>
-            <a:pPr indent="0" marL="0">
-              <a:buNone/>
-            </a:pPr>
-            <a:r>
-              <a:rPr lang="en-US" sz="1000" dirty="0">
-                <a:solidFill>
-                  <a:srgbClr val="F5A524"/>
-                </a:solidFill>
-                <a:latin typeface="Calibri" pitchFamily="34" charset="0"/>
-                <a:ea typeface="Calibri" pitchFamily="34" charset="-122"/>
-                <a:cs typeface="Calibri" pitchFamily="34" charset="-120"/>
-              </a:rPr>
-              <a:t>Source IP not accepted by KOI</a:t>
-            </a:r>
-            <a:endParaRPr lang="en-US" sz="1000" dirty="0"/>
-          </a:p>
-        </p:txBody>
-      </p:sp>
-      <p:sp>
-        <p:nvSpPr>
-          <p:cNvPr id="7" name="Text 5"/>
-          <p:cNvSpPr/>
-          <p:nvPr/>
-        </p:nvSpPr>
-        <p:spPr>
-          <a:xfrm>
-            <a:off x="7315200" y="1508760"/>
-            <a:ext cx="4023360" cy="237744"/>
-          </a:xfrm>
-          <a:prstGeom prst="rect">
-            <a:avLst/>
-          </a:prstGeom>
-          <a:noFill/>
-          <a:ln/>
-        </p:spPr>
-        <p:txBody>
-          <a:bodyPr wrap="square" lIns="0" tIns="0" rIns="0" bIns="0" rtlCol="0" anchor="t"/>
-          <a:lstStyle/>
-          <a:p>
-            <a:pPr indent="0" marL="0">
-              <a:buNone/>
-            </a:pPr>
-            <a:r>
-              <a:rPr lang="en-US" sz="1000" dirty="0">
-                <a:solidFill>
-                  <a:srgbClr val="B4B7BD"/>
-                </a:solidFill>
-                <a:latin typeface="Calibri" pitchFamily="34" charset="0"/>
-                <a:ea typeface="Calibri" pitchFamily="34" charset="-122"/>
-                <a:cs typeface="Calibri" pitchFamily="34" charset="-120"/>
-              </a:rPr>
-              <a:t>Run the instance on a Cortex engine KOI accepts</a:t>
-            </a:r>
-            <a:endParaRPr lang="en-US" sz="1000" dirty="0"/>
-          </a:p>
-        </p:txBody>
-      </p:sp>
-      <p:sp>
-        <p:nvSpPr>
-          <p:cNvPr id="8" name="Shape 6"/>
-          <p:cNvSpPr/>
-          <p:nvPr/>
-        </p:nvSpPr>
-        <p:spPr>
-          <a:xfrm>
-            <a:off x="548640" y="1929384"/>
-            <a:ext cx="11064240" cy="457200"/>
+          <p:cNvPr id="6" name="Shape 4"/>
+          <p:cNvSpPr/>
+          <p:nvPr/>
+        </p:nvSpPr>
+        <p:spPr>
+          <a:xfrm>
+            <a:off x="749808" y="1536192"/>
+            <a:ext cx="310896" cy="310896"/>
           </a:xfrm>
           <a:prstGeom prst="roundRect">
             <a:avLst>
-              <a:gd name="adj" fmla="val 10000"/>
+              <a:gd name="adj" fmla="val 26471"/>
+            </a:avLst>
+          </a:prstGeom>
+          <a:solidFill>
+            <a:srgbClr val="3FB950"/>
+          </a:solidFill>
+          <a:ln w="12700">
+            <a:solidFill>
+              <a:srgbClr val="3FB950"/>
+            </a:solidFill>
+            <a:prstDash val="solid"/>
+          </a:ln>
+        </p:spPr>
+      </p:sp>
+      <p:sp>
+        <p:nvSpPr>
+          <p:cNvPr id="7" name="Text 5"/>
+          <p:cNvSpPr/>
+          <p:nvPr/>
+        </p:nvSpPr>
+        <p:spPr>
+          <a:xfrm>
+            <a:off x="749808" y="1536192"/>
+            <a:ext cx="310896" cy="310896"/>
+          </a:xfrm>
+          <a:prstGeom prst="rect">
+            <a:avLst/>
+          </a:prstGeom>
+          <a:noFill/>
+          <a:ln/>
+        </p:spPr>
+        <p:txBody>
+          <a:bodyPr wrap="square" lIns="0" tIns="0" rIns="0" bIns="0" rtlCol="0" anchor="ctr"/>
+          <a:lstStyle/>
+          <a:p>
+            <a:pPr algn="ctr" indent="0" marL="0">
+              <a:buNone/>
+            </a:pPr>
+            <a:r>
+              <a:rPr lang="en-US" sz="1300" b="1" dirty="0">
+                <a:solidFill>
+                  <a:srgbClr val="FFFFFF"/>
+                </a:solidFill>
+                <a:latin typeface="Calibri" pitchFamily="34" charset="0"/>
+                <a:ea typeface="Calibri" pitchFamily="34" charset="-122"/>
+                <a:cs typeface="Calibri" pitchFamily="34" charset="-120"/>
+              </a:rPr>
+              <a:t>1</a:t>
+            </a:r>
+            <a:endParaRPr lang="en-US" sz="1300" dirty="0"/>
+          </a:p>
+        </p:txBody>
+      </p:sp>
+      <p:sp>
+        <p:nvSpPr>
+          <p:cNvPr id="8" name="Text 6"/>
+          <p:cNvSpPr/>
+          <p:nvPr/>
+        </p:nvSpPr>
+        <p:spPr>
+          <a:xfrm>
+            <a:off x="1225296" y="1554480"/>
+            <a:ext cx="4453128" cy="329184"/>
+          </a:xfrm>
+          <a:prstGeom prst="rect">
+            <a:avLst/>
+          </a:prstGeom>
+          <a:noFill/>
+          <a:ln/>
+        </p:spPr>
+        <p:txBody>
+          <a:bodyPr wrap="square" lIns="0" tIns="0" rIns="0" bIns="0" rtlCol="0" anchor="t"/>
+          <a:lstStyle/>
+          <a:p>
+            <a:pPr indent="0" marL="0">
+              <a:lnSpc>
+                <a:spcPts val="1200"/>
+              </a:lnSpc>
+              <a:buNone/>
+            </a:pPr>
+            <a:r>
+              <a:rPr lang="en-US" sz="1050" dirty="0">
+                <a:solidFill>
+                  <a:srgbClr val="B4B7BD"/>
+                </a:solidFill>
+                <a:latin typeface="Calibri" pitchFamily="34" charset="0"/>
+                <a:ea typeface="Calibri" pitchFamily="34" charset="-122"/>
+                <a:cs typeface="Calibri" pitchFamily="34" charset="-120"/>
+              </a:rPr>
+              <a:t>Test returns Success; devices list returns rows</a:t>
+            </a:r>
+            <a:endParaRPr lang="en-US" sz="1050" dirty="0"/>
+          </a:p>
+        </p:txBody>
+      </p:sp>
+      <p:sp>
+        <p:nvSpPr>
+          <p:cNvPr id="9" name="Shape 7"/>
+          <p:cNvSpPr/>
+          <p:nvPr/>
+        </p:nvSpPr>
+        <p:spPr>
+          <a:xfrm>
+            <a:off x="548640" y="2075688"/>
+            <a:ext cx="5349240" cy="548640"/>
+          </a:xfrm>
+          <a:prstGeom prst="roundRect">
+            <a:avLst>
+              <a:gd name="adj" fmla="val 8333"/>
             </a:avLst>
           </a:prstGeom>
           <a:solidFill>
@@ -16157,135 +14952,126 @@
       </p:sp>
       <p:sp>
         <p:nvSpPr>
-          <p:cNvPr id="9" name="Text 7"/>
-          <p:cNvSpPr/>
-          <p:nvPr/>
-        </p:nvSpPr>
-        <p:spPr>
-          <a:xfrm>
-            <a:off x="822960" y="2057400"/>
-            <a:ext cx="3017520" cy="237744"/>
-          </a:xfrm>
-          <a:prstGeom prst="rect">
-            <a:avLst/>
-          </a:prstGeom>
-          <a:noFill/>
-          <a:ln/>
-        </p:spPr>
-        <p:txBody>
-          <a:bodyPr wrap="square" lIns="0" tIns="0" rIns="0" bIns="0" rtlCol="0" anchor="t"/>
-          <a:lstStyle/>
-          <a:p>
-            <a:pPr indent="0" marL="0">
-              <a:buNone/>
-            </a:pPr>
-            <a:r>
-              <a:rPr lang="en-US" sz="1100" b="1" dirty="0">
-                <a:solidFill>
-                  <a:srgbClr val="FFFFFF"/>
-                </a:solidFill>
-                <a:latin typeface="Calibri" pitchFamily="34" charset="0"/>
-                <a:ea typeface="Calibri" pitchFamily="34" charset="-122"/>
-                <a:cs typeface="Calibri" pitchFamily="34" charset="-120"/>
-              </a:rPr>
-              <a:t>401 on KOI commands</a:t>
-            </a:r>
-            <a:endParaRPr lang="en-US" sz="1100" dirty="0"/>
-          </a:p>
-        </p:txBody>
-      </p:sp>
-      <p:sp>
-        <p:nvSpPr>
-          <p:cNvPr id="10" name="Text 8"/>
-          <p:cNvSpPr/>
-          <p:nvPr/>
-        </p:nvSpPr>
-        <p:spPr>
-          <a:xfrm>
-            <a:off x="4023360" y="2066544"/>
-            <a:ext cx="3108960" cy="237744"/>
-          </a:xfrm>
-          <a:prstGeom prst="rect">
-            <a:avLst/>
-          </a:prstGeom>
-          <a:noFill/>
-          <a:ln/>
-        </p:spPr>
-        <p:txBody>
-          <a:bodyPr wrap="square" lIns="0" tIns="0" rIns="0" bIns="0" rtlCol="0" anchor="t"/>
-          <a:lstStyle/>
-          <a:p>
-            <a:pPr indent="0" marL="0">
-              <a:buNone/>
-            </a:pPr>
-            <a:r>
-              <a:rPr lang="en-US" sz="1000" dirty="0">
-                <a:solidFill>
-                  <a:srgbClr val="F5A524"/>
-                </a:solidFill>
-                <a:latin typeface="Calibri" pitchFamily="34" charset="0"/>
-                <a:ea typeface="Calibri" pitchFamily="34" charset="-122"/>
-                <a:cs typeface="Calibri" pitchFamily="34" charset="-120"/>
-              </a:rPr>
-              <a:t>The API key itself</a:t>
-            </a:r>
-            <a:endParaRPr lang="en-US" sz="1000" dirty="0"/>
-          </a:p>
-        </p:txBody>
-      </p:sp>
-      <p:sp>
-        <p:nvSpPr>
-          <p:cNvPr id="11" name="Text 9"/>
-          <p:cNvSpPr/>
-          <p:nvPr/>
-        </p:nvSpPr>
-        <p:spPr>
-          <a:xfrm>
-            <a:off x="7315200" y="2066544"/>
-            <a:ext cx="4023360" cy="237744"/>
-          </a:xfrm>
-          <a:prstGeom prst="rect">
-            <a:avLst/>
-          </a:prstGeom>
-          <a:noFill/>
-          <a:ln/>
-        </p:spPr>
-        <p:txBody>
-          <a:bodyPr wrap="square" lIns="0" tIns="0" rIns="0" bIns="0" rtlCol="0" anchor="t"/>
-          <a:lstStyle/>
-          <a:p>
-            <a:pPr indent="0" marL="0">
-              <a:buNone/>
-            </a:pPr>
-            <a:r>
-              <a:rPr lang="en-US" sz="1000" dirty="0">
-                <a:solidFill>
-                  <a:srgbClr val="B4B7BD"/>
-                </a:solidFill>
-                <a:latin typeface="Calibri" pitchFamily="34" charset="0"/>
-                <a:ea typeface="Calibri" pitchFamily="34" charset="-122"/>
-                <a:cs typeface="Calibri" pitchFamily="34" charset="-120"/>
-              </a:rPr>
-              <a:t>Re-create the key with the xt-Administrator role</a:t>
-            </a:r>
-            <a:endParaRPr lang="en-US" sz="1000" dirty="0"/>
-          </a:p>
-        </p:txBody>
-      </p:sp>
-      <p:sp>
-        <p:nvSpPr>
-          <p:cNvPr id="12" name="Shape 10"/>
-          <p:cNvSpPr/>
-          <p:nvPr/>
-        </p:nvSpPr>
-        <p:spPr>
-          <a:xfrm>
-            <a:off x="548640" y="2487168"/>
-            <a:ext cx="11064240" cy="457200"/>
+          <p:cNvPr id="10" name="Shape 8"/>
+          <p:cNvSpPr/>
+          <p:nvPr/>
+        </p:nvSpPr>
+        <p:spPr>
+          <a:xfrm>
+            <a:off x="749808" y="2194560"/>
+            <a:ext cx="310896" cy="310896"/>
           </a:xfrm>
           <a:prstGeom prst="roundRect">
             <a:avLst>
-              <a:gd name="adj" fmla="val 10000"/>
+              <a:gd name="adj" fmla="val 26471"/>
+            </a:avLst>
+          </a:prstGeom>
+          <a:solidFill>
+            <a:srgbClr val="3FB950"/>
+          </a:solidFill>
+          <a:ln w="12700">
+            <a:solidFill>
+              <a:srgbClr val="3FB950"/>
+            </a:solidFill>
+            <a:prstDash val="solid"/>
+          </a:ln>
+        </p:spPr>
+      </p:sp>
+      <p:sp>
+        <p:nvSpPr>
+          <p:cNvPr id="11" name="Text 9"/>
+          <p:cNvSpPr/>
+          <p:nvPr/>
+        </p:nvSpPr>
+        <p:spPr>
+          <a:xfrm>
+            <a:off x="749808" y="2194560"/>
+            <a:ext cx="310896" cy="310896"/>
+          </a:xfrm>
+          <a:prstGeom prst="rect">
+            <a:avLst/>
+          </a:prstGeom>
+          <a:noFill/>
+          <a:ln/>
+        </p:spPr>
+        <p:txBody>
+          <a:bodyPr wrap="square" lIns="0" tIns="0" rIns="0" bIns="0" rtlCol="0" anchor="ctr"/>
+          <a:lstStyle/>
+          <a:p>
+            <a:pPr algn="ctr" indent="0" marL="0">
+              <a:buNone/>
+            </a:pPr>
+            <a:r>
+              <a:rPr lang="en-US" sz="1300" b="1" dirty="0">
+                <a:solidFill>
+                  <a:srgbClr val="FFFFFF"/>
+                </a:solidFill>
+                <a:latin typeface="Calibri" pitchFamily="34" charset="0"/>
+                <a:ea typeface="Calibri" pitchFamily="34" charset="-122"/>
+                <a:cs typeface="Calibri" pitchFamily="34" charset="-120"/>
+              </a:rPr>
+              <a:t>2</a:t>
+            </a:r>
+            <a:endParaRPr lang="en-US" sz="1300" dirty="0"/>
+          </a:p>
+        </p:txBody>
+      </p:sp>
+      <p:sp>
+        <p:nvSpPr>
+          <p:cNvPr id="12" name="Text 10"/>
+          <p:cNvSpPr/>
+          <p:nvPr/>
+        </p:nvSpPr>
+        <p:spPr>
+          <a:xfrm>
+            <a:off x="1225296" y="2212848"/>
+            <a:ext cx="4453128" cy="329184"/>
+          </a:xfrm>
+          <a:prstGeom prst="rect">
+            <a:avLst/>
+          </a:prstGeom>
+          <a:noFill/>
+          <a:ln/>
+        </p:spPr>
+        <p:txBody>
+          <a:bodyPr wrap="square" lIns="0" tIns="0" rIns="0" bIns="0" rtlCol="0" anchor="t"/>
+          <a:lstStyle/>
+          <a:p>
+            <a:pPr indent="0" marL="0">
+              <a:lnSpc>
+                <a:spcPts val="1200"/>
+              </a:lnSpc>
+              <a:buNone/>
+            </a:pPr>
+            <a:r>
+              <a:rPr lang="en-US" sz="1050" dirty="0">
+                <a:solidFill>
+                  <a:srgbClr val="B4B7BD"/>
+                </a:solidFill>
+                <a:latin typeface="Calibri" pitchFamily="34" charset="0"/>
+                <a:ea typeface="Calibri" pitchFamily="34" charset="-122"/>
+                <a:cs typeface="Calibri" pitchFamily="34" charset="-120"/>
+              </a:rPr>
+              <a:t>koi_koi_raw grows between collection cycles</a:t>
+            </a:r>
+            <a:endParaRPr lang="en-US" sz="1050" dirty="0"/>
+          </a:p>
+        </p:txBody>
+      </p:sp>
+      <p:sp>
+        <p:nvSpPr>
+          <p:cNvPr id="13" name="Shape 11"/>
+          <p:cNvSpPr/>
+          <p:nvPr/>
+        </p:nvSpPr>
+        <p:spPr>
+          <a:xfrm>
+            <a:off x="548640" y="2734056"/>
+            <a:ext cx="5349240" cy="548640"/>
+          </a:xfrm>
+          <a:prstGeom prst="roundRect">
+            <a:avLst>
+              <a:gd name="adj" fmla="val 8333"/>
             </a:avLst>
           </a:prstGeom>
           <a:solidFill>
@@ -16301,135 +15087,126 @@
       </p:sp>
       <p:sp>
         <p:nvSpPr>
-          <p:cNvPr id="13" name="Text 11"/>
-          <p:cNvSpPr/>
-          <p:nvPr/>
-        </p:nvSpPr>
-        <p:spPr>
-          <a:xfrm>
-            <a:off x="822960" y="2615184"/>
-            <a:ext cx="3017520" cy="237744"/>
-          </a:xfrm>
-          <a:prstGeom prst="rect">
-            <a:avLst/>
-          </a:prstGeom>
-          <a:noFill/>
-          <a:ln/>
-        </p:spPr>
-        <p:txBody>
-          <a:bodyPr wrap="square" lIns="0" tIns="0" rIns="0" bIns="0" rtlCol="0" anchor="t"/>
-          <a:lstStyle/>
-          <a:p>
-            <a:pPr indent="0" marL="0">
-              <a:buNone/>
-            </a:pPr>
-            <a:r>
-              <a:rPr lang="en-US" sz="1100" b="1" dirty="0">
-                <a:solidFill>
-                  <a:srgbClr val="FFFFFF"/>
-                </a:solidFill>
-                <a:latin typeface="Calibri" pitchFamily="34" charset="0"/>
-                <a:ea typeface="Calibri" pitchFamily="34" charset="-122"/>
-                <a:cs typeface="Calibri" pitchFamily="34" charset="-120"/>
-              </a:rPr>
-              <a:t>Engine is not connected</a:t>
-            </a:r>
-            <a:endParaRPr lang="en-US" sz="1100" dirty="0"/>
-          </a:p>
-        </p:txBody>
-      </p:sp>
-      <p:sp>
-        <p:nvSpPr>
-          <p:cNvPr id="14" name="Text 12"/>
-          <p:cNvSpPr/>
-          <p:nvPr/>
-        </p:nvSpPr>
-        <p:spPr>
-          <a:xfrm>
-            <a:off x="4023360" y="2624328"/>
-            <a:ext cx="3108960" cy="237744"/>
-          </a:xfrm>
-          <a:prstGeom prst="rect">
-            <a:avLst/>
-          </a:prstGeom>
-          <a:noFill/>
-          <a:ln/>
-        </p:spPr>
-        <p:txBody>
-          <a:bodyPr wrap="square" lIns="0" tIns="0" rIns="0" bIns="0" rtlCol="0" anchor="t"/>
-          <a:lstStyle/>
-          <a:p>
-            <a:pPr indent="0" marL="0">
-              <a:buNone/>
-            </a:pPr>
-            <a:r>
-              <a:rPr lang="en-US" sz="1000" dirty="0">
-                <a:solidFill>
-                  <a:srgbClr val="F5A524"/>
-                </a:solidFill>
-                <a:latin typeface="Calibri" pitchFamily="34" charset="0"/>
-                <a:ea typeface="Calibri" pitchFamily="34" charset="-122"/>
-                <a:cs typeface="Calibri" pitchFamily="34" charset="-120"/>
-              </a:rPr>
-              <a:t>The Cortex engine is offline</a:t>
-            </a:r>
-            <a:endParaRPr lang="en-US" sz="1000" dirty="0"/>
-          </a:p>
-        </p:txBody>
-      </p:sp>
-      <p:sp>
-        <p:nvSpPr>
-          <p:cNvPr id="15" name="Text 13"/>
-          <p:cNvSpPr/>
-          <p:nvPr/>
-        </p:nvSpPr>
-        <p:spPr>
-          <a:xfrm>
-            <a:off x="7315200" y="2624328"/>
-            <a:ext cx="4023360" cy="237744"/>
-          </a:xfrm>
-          <a:prstGeom prst="rect">
-            <a:avLst/>
-          </a:prstGeom>
-          <a:noFill/>
-          <a:ln/>
-        </p:spPr>
-        <p:txBody>
-          <a:bodyPr wrap="square" lIns="0" tIns="0" rIns="0" bIns="0" rtlCol="0" anchor="t"/>
-          <a:lstStyle/>
-          <a:p>
-            <a:pPr indent="0" marL="0">
-              <a:buNone/>
-            </a:pPr>
-            <a:r>
-              <a:rPr lang="en-US" sz="1000" dirty="0">
-                <a:solidFill>
-                  <a:srgbClr val="B4B7BD"/>
-                </a:solidFill>
-                <a:latin typeface="Calibri" pitchFamily="34" charset="0"/>
-                <a:ea typeface="Calibri" pitchFamily="34" charset="-122"/>
-                <a:cs typeface="Calibri" pitchFamily="34" charset="-120"/>
-              </a:rPr>
-              <a:t>Every koi- command fails before reaching KOI. Restart the engine</a:t>
-            </a:r>
-            <a:endParaRPr lang="en-US" sz="1000" dirty="0"/>
-          </a:p>
-        </p:txBody>
-      </p:sp>
-      <p:sp>
-        <p:nvSpPr>
-          <p:cNvPr id="16" name="Shape 14"/>
-          <p:cNvSpPr/>
-          <p:nvPr/>
-        </p:nvSpPr>
-        <p:spPr>
-          <a:xfrm>
-            <a:off x="548640" y="3044952"/>
-            <a:ext cx="11064240" cy="457200"/>
+          <p:cNvPr id="14" name="Shape 12"/>
+          <p:cNvSpPr/>
+          <p:nvPr/>
+        </p:nvSpPr>
+        <p:spPr>
+          <a:xfrm>
+            <a:off x="749808" y="2852928"/>
+            <a:ext cx="310896" cy="310896"/>
           </a:xfrm>
           <a:prstGeom prst="roundRect">
             <a:avLst>
-              <a:gd name="adj" fmla="val 10000"/>
+              <a:gd name="adj" fmla="val 26471"/>
+            </a:avLst>
+          </a:prstGeom>
+          <a:solidFill>
+            <a:srgbClr val="3FB950"/>
+          </a:solidFill>
+          <a:ln w="12700">
+            <a:solidFill>
+              <a:srgbClr val="3FB950"/>
+            </a:solidFill>
+            <a:prstDash val="solid"/>
+          </a:ln>
+        </p:spPr>
+      </p:sp>
+      <p:sp>
+        <p:nvSpPr>
+          <p:cNvPr id="15" name="Text 13"/>
+          <p:cNvSpPr/>
+          <p:nvPr/>
+        </p:nvSpPr>
+        <p:spPr>
+          <a:xfrm>
+            <a:off x="749808" y="2852928"/>
+            <a:ext cx="310896" cy="310896"/>
+          </a:xfrm>
+          <a:prstGeom prst="rect">
+            <a:avLst/>
+          </a:prstGeom>
+          <a:noFill/>
+          <a:ln/>
+        </p:spPr>
+        <p:txBody>
+          <a:bodyPr wrap="square" lIns="0" tIns="0" rIns="0" bIns="0" rtlCol="0" anchor="ctr"/>
+          <a:lstStyle/>
+          <a:p>
+            <a:pPr algn="ctr" indent="0" marL="0">
+              <a:buNone/>
+            </a:pPr>
+            <a:r>
+              <a:rPr lang="en-US" sz="1300" b="1" dirty="0">
+                <a:solidFill>
+                  <a:srgbClr val="FFFFFF"/>
+                </a:solidFill>
+                <a:latin typeface="Calibri" pitchFamily="34" charset="0"/>
+                <a:ea typeface="Calibri" pitchFamily="34" charset="-122"/>
+                <a:cs typeface="Calibri" pitchFamily="34" charset="-120"/>
+              </a:rPr>
+              <a:t>3</a:t>
+            </a:r>
+            <a:endParaRPr lang="en-US" sz="1300" dirty="0"/>
+          </a:p>
+        </p:txBody>
+      </p:sp>
+      <p:sp>
+        <p:nvSpPr>
+          <p:cNvPr id="16" name="Text 14"/>
+          <p:cNvSpPr/>
+          <p:nvPr/>
+        </p:nvSpPr>
+        <p:spPr>
+          <a:xfrm>
+            <a:off x="1225296" y="2871216"/>
+            <a:ext cx="4453128" cy="329184"/>
+          </a:xfrm>
+          <a:prstGeom prst="rect">
+            <a:avLst/>
+          </a:prstGeom>
+          <a:noFill/>
+          <a:ln/>
+        </p:spPr>
+        <p:txBody>
+          <a:bodyPr wrap="square" lIns="0" tIns="0" rIns="0" bIns="0" rtlCol="0" anchor="t"/>
+          <a:lstStyle/>
+          <a:p>
+            <a:pPr indent="0" marL="0">
+              <a:lnSpc>
+                <a:spcPts val="1200"/>
+              </a:lnSpc>
+              <a:buNone/>
+            </a:pPr>
+            <a:r>
+              <a:rPr lang="en-US" sz="1050" dirty="0">
+                <a:solidFill>
+                  <a:srgbClr val="B4B7BD"/>
+                </a:solidFill>
+                <a:latin typeface="Calibri" pitchFamily="34" charset="0"/>
+                <a:ea typeface="Calibri" pitchFamily="34" charset="-122"/>
+                <a:cs typeface="Calibri" pitchFamily="34" charset="-120"/>
+              </a:rPr>
+              <a:t>Distinct alerts far below raw rows — and that is correct</a:t>
+            </a:r>
+            <a:endParaRPr lang="en-US" sz="1050" dirty="0"/>
+          </a:p>
+        </p:txBody>
+      </p:sp>
+      <p:sp>
+        <p:nvSpPr>
+          <p:cNvPr id="17" name="Shape 15"/>
+          <p:cNvSpPr/>
+          <p:nvPr/>
+        </p:nvSpPr>
+        <p:spPr>
+          <a:xfrm>
+            <a:off x="548640" y="3392424"/>
+            <a:ext cx="5349240" cy="548640"/>
+          </a:xfrm>
+          <a:prstGeom prst="roundRect">
+            <a:avLst>
+              <a:gd name="adj" fmla="val 8333"/>
             </a:avLst>
           </a:prstGeom>
           <a:solidFill>
@@ -16445,135 +15222,126 @@
       </p:sp>
       <p:sp>
         <p:nvSpPr>
-          <p:cNvPr id="17" name="Text 15"/>
-          <p:cNvSpPr/>
-          <p:nvPr/>
-        </p:nvSpPr>
-        <p:spPr>
-          <a:xfrm>
-            <a:off x="822960" y="3172968"/>
-            <a:ext cx="3017520" cy="237744"/>
-          </a:xfrm>
-          <a:prstGeom prst="rect">
-            <a:avLst/>
-          </a:prstGeom>
-          <a:noFill/>
-          <a:ln/>
-        </p:spPr>
-        <p:txBody>
-          <a:bodyPr wrap="square" lIns="0" tIns="0" rIns="0" bIns="0" rtlCol="0" anchor="t"/>
-          <a:lstStyle/>
-          <a:p>
-            <a:pPr indent="0" marL="0">
-              <a:buNone/>
-            </a:pPr>
-            <a:r>
-              <a:rPr lang="en-US" sz="1100" b="1" dirty="0">
-                <a:solidFill>
-                  <a:srgbClr val="FFFFFF"/>
-                </a:solidFill>
-                <a:latin typeface="Calibri" pitchFamily="34" charset="0"/>
-                <a:ea typeface="Calibri" pitchFamily="34" charset="-122"/>
-                <a:cs typeface="Calibri" pitchFamily="34" charset="-120"/>
-              </a:rPr>
-              <a:t>No events after enabling fetch</a:t>
-            </a:r>
-            <a:endParaRPr lang="en-US" sz="1100" dirty="0"/>
-          </a:p>
-        </p:txBody>
-      </p:sp>
-      <p:sp>
-        <p:nvSpPr>
-          <p:cNvPr id="18" name="Text 16"/>
-          <p:cNvSpPr/>
-          <p:nvPr/>
-        </p:nvSpPr>
-        <p:spPr>
-          <a:xfrm>
-            <a:off x="4023360" y="3182112"/>
-            <a:ext cx="3108960" cy="237744"/>
-          </a:xfrm>
-          <a:prstGeom prst="rect">
-            <a:avLst/>
-          </a:prstGeom>
-          <a:noFill/>
-          <a:ln/>
-        </p:spPr>
-        <p:txBody>
-          <a:bodyPr wrap="square" lIns="0" tIns="0" rIns="0" bIns="0" rtlCol="0" anchor="t"/>
-          <a:lstStyle/>
-          <a:p>
-            <a:pPr indent="0" marL="0">
-              <a:buNone/>
-            </a:pPr>
-            <a:r>
-              <a:rPr lang="en-US" sz="1000" dirty="0">
-                <a:solidFill>
-                  <a:srgbClr val="F5A524"/>
-                </a:solidFill>
-                <a:latin typeface="Calibri" pitchFamily="34" charset="0"/>
-                <a:ea typeface="Calibri" pitchFamily="34" charset="-122"/>
-                <a:cs typeface="Calibri" pitchFamily="34" charset="-120"/>
-              </a:rPr>
-              <a:t>Only one cycle has run</a:t>
-            </a:r>
-            <a:endParaRPr lang="en-US" sz="1000" dirty="0"/>
-          </a:p>
-        </p:txBody>
-      </p:sp>
-      <p:sp>
-        <p:nvSpPr>
-          <p:cNvPr id="19" name="Text 17"/>
-          <p:cNvSpPr/>
-          <p:nvPr/>
-        </p:nvSpPr>
-        <p:spPr>
-          <a:xfrm>
-            <a:off x="7315200" y="3182112"/>
-            <a:ext cx="4023360" cy="237744"/>
-          </a:xfrm>
-          <a:prstGeom prst="rect">
-            <a:avLst/>
-          </a:prstGeom>
-          <a:noFill/>
-          <a:ln/>
-        </p:spPr>
-        <p:txBody>
-          <a:bodyPr wrap="square" lIns="0" tIns="0" rIns="0" bIns="0" rtlCol="0" anchor="t"/>
-          <a:lstStyle/>
-          <a:p>
-            <a:pPr indent="0" marL="0">
-              <a:buNone/>
-            </a:pPr>
-            <a:r>
-              <a:rPr lang="en-US" sz="1000" dirty="0">
-                <a:solidFill>
-                  <a:srgbClr val="B4B7BD"/>
-                </a:solidFill>
-                <a:latin typeface="Calibri" pitchFamily="34" charset="0"/>
-                <a:ea typeface="Calibri" pitchFamily="34" charset="-122"/>
-                <a:cs typeface="Calibri" pitchFamily="34" charset="-120"/>
-              </a:rPr>
-              <a:t>Wait two cycles, then re-check Test 2</a:t>
-            </a:r>
-            <a:endParaRPr lang="en-US" sz="1000" dirty="0"/>
-          </a:p>
-        </p:txBody>
-      </p:sp>
-      <p:sp>
-        <p:nvSpPr>
-          <p:cNvPr id="20" name="Shape 18"/>
-          <p:cNvSpPr/>
-          <p:nvPr/>
-        </p:nvSpPr>
-        <p:spPr>
-          <a:xfrm>
-            <a:off x="548640" y="3602736"/>
-            <a:ext cx="11064240" cy="457200"/>
+          <p:cNvPr id="18" name="Shape 16"/>
+          <p:cNvSpPr/>
+          <p:nvPr/>
+        </p:nvSpPr>
+        <p:spPr>
+          <a:xfrm>
+            <a:off x="749808" y="3511296"/>
+            <a:ext cx="310896" cy="310896"/>
           </a:xfrm>
           <a:prstGeom prst="roundRect">
             <a:avLst>
-              <a:gd name="adj" fmla="val 10000"/>
+              <a:gd name="adj" fmla="val 26471"/>
+            </a:avLst>
+          </a:prstGeom>
+          <a:solidFill>
+            <a:srgbClr val="3FB950"/>
+          </a:solidFill>
+          <a:ln w="12700">
+            <a:solidFill>
+              <a:srgbClr val="3FB950"/>
+            </a:solidFill>
+            <a:prstDash val="solid"/>
+          </a:ln>
+        </p:spPr>
+      </p:sp>
+      <p:sp>
+        <p:nvSpPr>
+          <p:cNvPr id="19" name="Text 17"/>
+          <p:cNvSpPr/>
+          <p:nvPr/>
+        </p:nvSpPr>
+        <p:spPr>
+          <a:xfrm>
+            <a:off x="749808" y="3511296"/>
+            <a:ext cx="310896" cy="310896"/>
+          </a:xfrm>
+          <a:prstGeom prst="rect">
+            <a:avLst/>
+          </a:prstGeom>
+          <a:noFill/>
+          <a:ln/>
+        </p:spPr>
+        <p:txBody>
+          <a:bodyPr wrap="square" lIns="0" tIns="0" rIns="0" bIns="0" rtlCol="0" anchor="ctr"/>
+          <a:lstStyle/>
+          <a:p>
+            <a:pPr algn="ctr" indent="0" marL="0">
+              <a:buNone/>
+            </a:pPr>
+            <a:r>
+              <a:rPr lang="en-US" sz="1300" b="1" dirty="0">
+                <a:solidFill>
+                  <a:srgbClr val="FFFFFF"/>
+                </a:solidFill>
+                <a:latin typeface="Calibri" pitchFamily="34" charset="0"/>
+                <a:ea typeface="Calibri" pitchFamily="34" charset="-122"/>
+                <a:cs typeface="Calibri" pitchFamily="34" charset="-120"/>
+              </a:rPr>
+              <a:t>4</a:t>
+            </a:r>
+            <a:endParaRPr lang="en-US" sz="1300" dirty="0"/>
+          </a:p>
+        </p:txBody>
+      </p:sp>
+      <p:sp>
+        <p:nvSpPr>
+          <p:cNvPr id="20" name="Text 18"/>
+          <p:cNvSpPr/>
+          <p:nvPr/>
+        </p:nvSpPr>
+        <p:spPr>
+          <a:xfrm>
+            <a:off x="1225296" y="3529584"/>
+            <a:ext cx="4453128" cy="329184"/>
+          </a:xfrm>
+          <a:prstGeom prst="rect">
+            <a:avLst/>
+          </a:prstGeom>
+          <a:noFill/>
+          <a:ln/>
+        </p:spPr>
+        <p:txBody>
+          <a:bodyPr wrap="square" lIns="0" tIns="0" rIns="0" bIns="0" rtlCol="0" anchor="t"/>
+          <a:lstStyle/>
+          <a:p>
+            <a:pPr indent="0" marL="0">
+              <a:lnSpc>
+                <a:spcPts val="1200"/>
+              </a:lnSpc>
+              <a:buNone/>
+            </a:pPr>
+            <a:r>
+              <a:rPr lang="en-US" sz="1050" dirty="0">
+                <a:solidFill>
+                  <a:srgbClr val="B4B7BD"/>
+                </a:solidFill>
+                <a:latin typeface="Calibri" pitchFamily="34" charset="0"/>
+                <a:ea typeface="Calibri" pitchFamily="34" charset="-122"/>
+                <a:cs typeface="Calibri" pitchFamily="34" charset="-120"/>
+              </a:rPr>
+              <a:t>Dashboard renders; counts stay stable across fetches</a:t>
+            </a:r>
+            <a:endParaRPr lang="en-US" sz="1050" dirty="0"/>
+          </a:p>
+        </p:txBody>
+      </p:sp>
+      <p:sp>
+        <p:nvSpPr>
+          <p:cNvPr id="21" name="Shape 19"/>
+          <p:cNvSpPr/>
+          <p:nvPr/>
+        </p:nvSpPr>
+        <p:spPr>
+          <a:xfrm>
+            <a:off x="548640" y="4050792"/>
+            <a:ext cx="5349240" cy="548640"/>
+          </a:xfrm>
+          <a:prstGeom prst="roundRect">
+            <a:avLst>
+              <a:gd name="adj" fmla="val 8333"/>
             </a:avLst>
           </a:prstGeom>
           <a:solidFill>
@@ -16589,135 +15357,126 @@
       </p:sp>
       <p:sp>
         <p:nvSpPr>
-          <p:cNvPr id="21" name="Text 19"/>
-          <p:cNvSpPr/>
-          <p:nvPr/>
-        </p:nvSpPr>
-        <p:spPr>
-          <a:xfrm>
-            <a:off x="822960" y="3730752"/>
-            <a:ext cx="3017520" cy="237744"/>
-          </a:xfrm>
-          <a:prstGeom prst="rect">
-            <a:avLst/>
-          </a:prstGeom>
-          <a:noFill/>
-          <a:ln/>
-        </p:spPr>
-        <p:txBody>
-          <a:bodyPr wrap="square" lIns="0" tIns="0" rIns="0" bIns="0" rtlCol="0" anchor="t"/>
-          <a:lstStyle/>
-          <a:p>
-            <a:pPr indent="0" marL="0">
-              <a:buNone/>
-            </a:pPr>
-            <a:r>
-              <a:rPr lang="en-US" sz="1100" b="1" dirty="0">
-                <a:solidFill>
-                  <a:srgbClr val="FFFFFF"/>
-                </a:solidFill>
-                <a:latin typeface="Calibri" pitchFamily="34" charset="0"/>
-                <a:ea typeface="Calibri" pitchFamily="34" charset="-122"/>
-                <a:cs typeface="Calibri" pitchFamily="34" charset="-120"/>
-              </a:rPr>
-              <a:t>Everything triages as Suspicious</a:t>
-            </a:r>
-            <a:endParaRPr lang="en-US" sz="1100" dirty="0"/>
-          </a:p>
-        </p:txBody>
-      </p:sp>
-      <p:sp>
-        <p:nvSpPr>
-          <p:cNvPr id="22" name="Text 20"/>
-          <p:cNvSpPr/>
-          <p:nvPr/>
-        </p:nvSpPr>
-        <p:spPr>
-          <a:xfrm>
-            <a:off x="4023360" y="3739896"/>
-            <a:ext cx="3108960" cy="237744"/>
-          </a:xfrm>
-          <a:prstGeom prst="rect">
-            <a:avLst/>
-          </a:prstGeom>
-          <a:noFill/>
-          <a:ln/>
-        </p:spPr>
-        <p:txBody>
-          <a:bodyPr wrap="square" lIns="0" tIns="0" rIns="0" bIns="0" rtlCol="0" anchor="t"/>
-          <a:lstStyle/>
-          <a:p>
-            <a:pPr indent="0" marL="0">
-              <a:buNone/>
-            </a:pPr>
-            <a:r>
-              <a:rPr lang="en-US" sz="1000" dirty="0">
-                <a:solidFill>
-                  <a:srgbClr val="F5A524"/>
-                </a:solidFill>
-                <a:latin typeface="Calibri" pitchFamily="34" charset="0"/>
-                <a:ea typeface="Calibri" pitchFamily="34" charset="-122"/>
-                <a:cs typeface="Calibri" pitchFamily="34" charset="-120"/>
-              </a:rPr>
-              <a:t>The alert carried no KOI detail</a:t>
-            </a:r>
-            <a:endParaRPr lang="en-US" sz="1000" dirty="0"/>
-          </a:p>
-        </p:txBody>
-      </p:sp>
-      <p:sp>
-        <p:nvSpPr>
-          <p:cNvPr id="23" name="Text 21"/>
-          <p:cNvSpPr/>
-          <p:nvPr/>
-        </p:nvSpPr>
-        <p:spPr>
-          <a:xfrm>
-            <a:off x="7315200" y="3739896"/>
-            <a:ext cx="4023360" cy="237744"/>
-          </a:xfrm>
-          <a:prstGeom prst="rect">
-            <a:avLst/>
-          </a:prstGeom>
-          <a:noFill/>
-          <a:ln/>
-        </p:spPr>
-        <p:txBody>
-          <a:bodyPr wrap="square" lIns="0" tIns="0" rIns="0" bIns="0" rtlCol="0" anchor="t"/>
-          <a:lstStyle/>
-          <a:p>
-            <a:pPr indent="0" marL="0">
-              <a:buNone/>
-            </a:pPr>
-            <a:r>
-              <a:rPr lang="en-US" sz="1000" dirty="0">
-                <a:solidFill>
-                  <a:srgbClr val="B4B7BD"/>
-                </a:solidFill>
-                <a:latin typeface="Calibri" pitchFamily="34" charset="0"/>
-                <a:ea typeface="Calibri" pitchFamily="34" charset="-122"/>
-                <a:cs typeface="Calibri" pitchFamily="34" charset="-120"/>
-              </a:rPr>
-              <a:t>Check the correlation rule passes KOI fields through</a:t>
-            </a:r>
-            <a:endParaRPr lang="en-US" sz="1000" dirty="0"/>
-          </a:p>
-        </p:txBody>
-      </p:sp>
-      <p:sp>
-        <p:nvSpPr>
-          <p:cNvPr id="24" name="Shape 22"/>
-          <p:cNvSpPr/>
-          <p:nvPr/>
-        </p:nvSpPr>
-        <p:spPr>
-          <a:xfrm>
-            <a:off x="548640" y="4160520"/>
-            <a:ext cx="11064240" cy="457200"/>
+          <p:cNvPr id="22" name="Shape 20"/>
+          <p:cNvSpPr/>
+          <p:nvPr/>
+        </p:nvSpPr>
+        <p:spPr>
+          <a:xfrm>
+            <a:off x="749808" y="4169664"/>
+            <a:ext cx="310896" cy="310896"/>
           </a:xfrm>
           <a:prstGeom prst="roundRect">
             <a:avLst>
-              <a:gd name="adj" fmla="val 10000"/>
+              <a:gd name="adj" fmla="val 26471"/>
+            </a:avLst>
+          </a:prstGeom>
+          <a:solidFill>
+            <a:srgbClr val="3FB950"/>
+          </a:solidFill>
+          <a:ln w="12700">
+            <a:solidFill>
+              <a:srgbClr val="3FB950"/>
+            </a:solidFill>
+            <a:prstDash val="solid"/>
+          </a:ln>
+        </p:spPr>
+      </p:sp>
+      <p:sp>
+        <p:nvSpPr>
+          <p:cNvPr id="23" name="Text 21"/>
+          <p:cNvSpPr/>
+          <p:nvPr/>
+        </p:nvSpPr>
+        <p:spPr>
+          <a:xfrm>
+            <a:off x="749808" y="4169664"/>
+            <a:ext cx="310896" cy="310896"/>
+          </a:xfrm>
+          <a:prstGeom prst="rect">
+            <a:avLst/>
+          </a:prstGeom>
+          <a:noFill/>
+          <a:ln/>
+        </p:spPr>
+        <p:txBody>
+          <a:bodyPr wrap="square" lIns="0" tIns="0" rIns="0" bIns="0" rtlCol="0" anchor="ctr"/>
+          <a:lstStyle/>
+          <a:p>
+            <a:pPr algn="ctr" indent="0" marL="0">
+              <a:buNone/>
+            </a:pPr>
+            <a:r>
+              <a:rPr lang="en-US" sz="1300" b="1" dirty="0">
+                <a:solidFill>
+                  <a:srgbClr val="FFFFFF"/>
+                </a:solidFill>
+                <a:latin typeface="Calibri" pitchFamily="34" charset="0"/>
+                <a:ea typeface="Calibri" pitchFamily="34" charset="-122"/>
+                <a:cs typeface="Calibri" pitchFamily="34" charset="-120"/>
+              </a:rPr>
+              <a:t>5</a:t>
+            </a:r>
+            <a:endParaRPr lang="en-US" sz="1300" dirty="0"/>
+          </a:p>
+        </p:txBody>
+      </p:sp>
+      <p:sp>
+        <p:nvSpPr>
+          <p:cNvPr id="24" name="Text 22"/>
+          <p:cNvSpPr/>
+          <p:nvPr/>
+        </p:nvSpPr>
+        <p:spPr>
+          <a:xfrm>
+            <a:off x="1225296" y="4187952"/>
+            <a:ext cx="4453128" cy="329184"/>
+          </a:xfrm>
+          <a:prstGeom prst="rect">
+            <a:avLst/>
+          </a:prstGeom>
+          <a:noFill/>
+          <a:ln/>
+        </p:spPr>
+        <p:txBody>
+          <a:bodyPr wrap="square" lIns="0" tIns="0" rIns="0" bIns="0" rtlCol="0" anchor="t"/>
+          <a:lstStyle/>
+          <a:p>
+            <a:pPr indent="0" marL="0">
+              <a:lnSpc>
+                <a:spcPts val="1200"/>
+              </a:lnSpc>
+              <a:buNone/>
+            </a:pPr>
+            <a:r>
+              <a:rPr lang="en-US" sz="1050" dirty="0">
+                <a:solidFill>
+                  <a:srgbClr val="B4B7BD"/>
+                </a:solidFill>
+                <a:latin typeface="Calibri" pitchFamily="34" charset="0"/>
+                <a:ea typeface="Calibri" pitchFamily="34" charset="-122"/>
+                <a:cs typeface="Calibri" pitchFamily="34" charset="-120"/>
+              </a:rPr>
+              <a:t>A verdict is reached; low risk auto-closes</a:t>
+            </a:r>
+            <a:endParaRPr lang="en-US" sz="1050" dirty="0"/>
+          </a:p>
+        </p:txBody>
+      </p:sp>
+      <p:sp>
+        <p:nvSpPr>
+          <p:cNvPr id="25" name="Shape 23"/>
+          <p:cNvSpPr/>
+          <p:nvPr/>
+        </p:nvSpPr>
+        <p:spPr>
+          <a:xfrm>
+            <a:off x="548640" y="4709160"/>
+            <a:ext cx="5349240" cy="548640"/>
+          </a:xfrm>
+          <a:prstGeom prst="roundRect">
+            <a:avLst>
+              <a:gd name="adj" fmla="val 8333"/>
             </a:avLst>
           </a:prstGeom>
           <a:solidFill>
@@ -16733,135 +15492,126 @@
       </p:sp>
       <p:sp>
         <p:nvSpPr>
-          <p:cNvPr id="25" name="Text 23"/>
-          <p:cNvSpPr/>
-          <p:nvPr/>
-        </p:nvSpPr>
-        <p:spPr>
-          <a:xfrm>
-            <a:off x="822960" y="4288536"/>
-            <a:ext cx="3017520" cy="237744"/>
-          </a:xfrm>
-          <a:prstGeom prst="rect">
-            <a:avLst/>
-          </a:prstGeom>
-          <a:noFill/>
-          <a:ln/>
-        </p:spPr>
-        <p:txBody>
-          <a:bodyPr wrap="square" lIns="0" tIns="0" rIns="0" bIns="0" rtlCol="0" anchor="t"/>
-          <a:lstStyle/>
-          <a:p>
-            <a:pPr indent="0" marL="0">
-              <a:buNone/>
-            </a:pPr>
-            <a:r>
-              <a:rPr lang="en-US" sz="1100" b="1" dirty="0">
-                <a:solidFill>
-                  <a:srgbClr val="FFFFFF"/>
-                </a:solidFill>
-                <a:latin typeface="Calibri" pitchFamily="34" charset="0"/>
-                <a:ea typeface="Calibri" pitchFamily="34" charset="-122"/>
-                <a:cs typeface="Calibri" pitchFamily="34" charset="-120"/>
-              </a:rPr>
-              <a:t>Tracker List stays empty</a:t>
-            </a:r>
-            <a:endParaRPr lang="en-US" sz="1100" dirty="0"/>
-          </a:p>
-        </p:txBody>
-      </p:sp>
-      <p:sp>
-        <p:nvSpPr>
-          <p:cNvPr id="26" name="Text 24"/>
-          <p:cNvSpPr/>
-          <p:nvPr/>
-        </p:nvSpPr>
-        <p:spPr>
-          <a:xfrm>
-            <a:off x="4023360" y="4297680"/>
-            <a:ext cx="3108960" cy="237744"/>
-          </a:xfrm>
-          <a:prstGeom prst="rect">
-            <a:avLst/>
-          </a:prstGeom>
-          <a:noFill/>
-          <a:ln/>
-        </p:spPr>
-        <p:txBody>
-          <a:bodyPr wrap="square" lIns="0" tIns="0" rIns="0" bIns="0" rtlCol="0" anchor="t"/>
-          <a:lstStyle/>
-          <a:p>
-            <a:pPr indent="0" marL="0">
-              <a:buNone/>
-            </a:pPr>
-            <a:r>
-              <a:rPr lang="en-US" sz="1000" dirty="0">
-                <a:solidFill>
-                  <a:srgbClr val="F5A524"/>
-                </a:solidFill>
-                <a:latin typeface="Calibri" pitchFamily="34" charset="0"/>
-                <a:ea typeface="Calibri" pitchFamily="34" charset="-122"/>
-                <a:cs typeface="Calibri" pitchFamily="34" charset="-120"/>
-              </a:rPr>
-              <a:t>No Core REST API instance</a:t>
-            </a:r>
-            <a:endParaRPr lang="en-US" sz="1000" dirty="0"/>
-          </a:p>
-        </p:txBody>
-      </p:sp>
-      <p:sp>
-        <p:nvSpPr>
-          <p:cNvPr id="27" name="Text 25"/>
-          <p:cNvSpPr/>
-          <p:nvPr/>
-        </p:nvSpPr>
-        <p:spPr>
-          <a:xfrm>
-            <a:off x="7315200" y="4297680"/>
-            <a:ext cx="4023360" cy="237744"/>
-          </a:xfrm>
-          <a:prstGeom prst="rect">
-            <a:avLst/>
-          </a:prstGeom>
-          <a:noFill/>
-          <a:ln/>
-        </p:spPr>
-        <p:txBody>
-          <a:bodyPr wrap="square" lIns="0" tIns="0" rIns="0" bIns="0" rtlCol="0" anchor="t"/>
-          <a:lstStyle/>
-          <a:p>
-            <a:pPr indent="0" marL="0">
-              <a:buNone/>
-            </a:pPr>
-            <a:r>
-              <a:rPr lang="en-US" sz="1000" dirty="0">
-                <a:solidFill>
-                  <a:srgbClr val="B4B7BD"/>
-                </a:solidFill>
-                <a:latin typeface="Calibri" pitchFamily="34" charset="0"/>
-                <a:ea typeface="Calibri" pitchFamily="34" charset="-122"/>
-                <a:cs typeface="Calibri" pitchFamily="34" charset="-120"/>
-              </a:rPr>
-              <a:t>Configure it — Test 9 cannot pass without it</a:t>
-            </a:r>
-            <a:endParaRPr lang="en-US" sz="1000" dirty="0"/>
-          </a:p>
-        </p:txBody>
-      </p:sp>
-      <p:sp>
-        <p:nvSpPr>
-          <p:cNvPr id="28" name="Shape 26"/>
-          <p:cNvSpPr/>
-          <p:nvPr/>
-        </p:nvSpPr>
-        <p:spPr>
-          <a:xfrm>
-            <a:off x="548640" y="4718304"/>
-            <a:ext cx="11064240" cy="457200"/>
+          <p:cNvPr id="26" name="Shape 24"/>
+          <p:cNvSpPr/>
+          <p:nvPr/>
+        </p:nvSpPr>
+        <p:spPr>
+          <a:xfrm>
+            <a:off x="749808" y="4828032"/>
+            <a:ext cx="310896" cy="310896"/>
           </a:xfrm>
           <a:prstGeom prst="roundRect">
             <a:avLst>
-              <a:gd name="adj" fmla="val 10000"/>
+              <a:gd name="adj" fmla="val 26471"/>
+            </a:avLst>
+          </a:prstGeom>
+          <a:solidFill>
+            <a:srgbClr val="3FB950"/>
+          </a:solidFill>
+          <a:ln w="12700">
+            <a:solidFill>
+              <a:srgbClr val="3FB950"/>
+            </a:solidFill>
+            <a:prstDash val="solid"/>
+          </a:ln>
+        </p:spPr>
+      </p:sp>
+      <p:sp>
+        <p:nvSpPr>
+          <p:cNvPr id="27" name="Text 25"/>
+          <p:cNvSpPr/>
+          <p:nvPr/>
+        </p:nvSpPr>
+        <p:spPr>
+          <a:xfrm>
+            <a:off x="749808" y="4828032"/>
+            <a:ext cx="310896" cy="310896"/>
+          </a:xfrm>
+          <a:prstGeom prst="rect">
+            <a:avLst/>
+          </a:prstGeom>
+          <a:noFill/>
+          <a:ln/>
+        </p:spPr>
+        <p:txBody>
+          <a:bodyPr wrap="square" lIns="0" tIns="0" rIns="0" bIns="0" rtlCol="0" anchor="ctr"/>
+          <a:lstStyle/>
+          <a:p>
+            <a:pPr algn="ctr" indent="0" marL="0">
+              <a:buNone/>
+            </a:pPr>
+            <a:r>
+              <a:rPr lang="en-US" sz="1300" b="1" dirty="0">
+                <a:solidFill>
+                  <a:srgbClr val="FFFFFF"/>
+                </a:solidFill>
+                <a:latin typeface="Calibri" pitchFamily="34" charset="0"/>
+                <a:ea typeface="Calibri" pitchFamily="34" charset="-122"/>
+                <a:cs typeface="Calibri" pitchFamily="34" charset="-120"/>
+              </a:rPr>
+              <a:t>6</a:t>
+            </a:r>
+            <a:endParaRPr lang="en-US" sz="1300" dirty="0"/>
+          </a:p>
+        </p:txBody>
+      </p:sp>
+      <p:sp>
+        <p:nvSpPr>
+          <p:cNvPr id="28" name="Text 26"/>
+          <p:cNvSpPr/>
+          <p:nvPr/>
+        </p:nvSpPr>
+        <p:spPr>
+          <a:xfrm>
+            <a:off x="1225296" y="4846320"/>
+            <a:ext cx="4453128" cy="329184"/>
+          </a:xfrm>
+          <a:prstGeom prst="rect">
+            <a:avLst/>
+          </a:prstGeom>
+          <a:noFill/>
+          <a:ln/>
+        </p:spPr>
+        <p:txBody>
+          <a:bodyPr wrap="square" lIns="0" tIns="0" rIns="0" bIns="0" rtlCol="0" anchor="t"/>
+          <a:lstStyle/>
+          <a:p>
+            <a:pPr indent="0" marL="0">
+              <a:lnSpc>
+                <a:spcPts val="1200"/>
+              </a:lnSpc>
+              <a:buNone/>
+            </a:pPr>
+            <a:r>
+              <a:rPr lang="en-US" sz="1050" dirty="0">
+                <a:solidFill>
+                  <a:srgbClr val="B4B7BD"/>
+                </a:solidFill>
+                <a:latin typeface="Calibri" pitchFamily="34" charset="0"/>
+                <a:ea typeface="Calibri" pitchFamily="34" charset="-122"/>
+                <a:cs typeface="Calibri" pitchFamily="34" charset="-120"/>
+              </a:rPr>
+              <a:t>Investigation shows catalog risk and both governance counts</a:t>
+            </a:r>
+            <a:endParaRPr lang="en-US" sz="1050" dirty="0"/>
+          </a:p>
+        </p:txBody>
+      </p:sp>
+      <p:sp>
+        <p:nvSpPr>
+          <p:cNvPr id="29" name="Shape 27"/>
+          <p:cNvSpPr/>
+          <p:nvPr/>
+        </p:nvSpPr>
+        <p:spPr>
+          <a:xfrm>
+            <a:off x="6263640" y="1417320"/>
+            <a:ext cx="5349240" cy="548640"/>
+          </a:xfrm>
+          <a:prstGeom prst="roundRect">
+            <a:avLst>
+              <a:gd name="adj" fmla="val 8333"/>
             </a:avLst>
           </a:prstGeom>
           <a:solidFill>
@@ -16877,135 +15627,126 @@
       </p:sp>
       <p:sp>
         <p:nvSpPr>
-          <p:cNvPr id="29" name="Text 27"/>
-          <p:cNvSpPr/>
-          <p:nvPr/>
-        </p:nvSpPr>
-        <p:spPr>
-          <a:xfrm>
-            <a:off x="822960" y="4846320"/>
-            <a:ext cx="3017520" cy="237744"/>
-          </a:xfrm>
-          <a:prstGeom prst="rect">
-            <a:avLst/>
-          </a:prstGeom>
-          <a:noFill/>
-          <a:ln/>
-        </p:spPr>
-        <p:txBody>
-          <a:bodyPr wrap="square" lIns="0" tIns="0" rIns="0" bIns="0" rtlCol="0" anchor="t"/>
-          <a:lstStyle/>
-          <a:p>
-            <a:pPr indent="0" marL="0">
-              <a:buNone/>
-            </a:pPr>
-            <a:r>
-              <a:rPr lang="en-US" sz="1100" b="1" dirty="0">
-                <a:solidFill>
-                  <a:srgbClr val="FFFFFF"/>
-                </a:solidFill>
-                <a:latin typeface="Calibri" pitchFamily="34" charset="0"/>
-                <a:ea typeface="Calibri" pitchFamily="34" charset="-122"/>
-                <a:cs typeface="Calibri" pitchFamily="34" charset="-120"/>
-              </a:rPr>
-              <a:t>Scan run does nothing</a:t>
-            </a:r>
-            <a:endParaRPr lang="en-US" sz="1100" dirty="0"/>
-          </a:p>
-        </p:txBody>
-      </p:sp>
-      <p:sp>
-        <p:nvSpPr>
-          <p:cNvPr id="30" name="Text 28"/>
-          <p:cNvSpPr/>
-          <p:nvPr/>
-        </p:nvSpPr>
-        <p:spPr>
-          <a:xfrm>
-            <a:off x="4023360" y="4855464"/>
-            <a:ext cx="3108960" cy="237744"/>
-          </a:xfrm>
-          <a:prstGeom prst="rect">
-            <a:avLst/>
-          </a:prstGeom>
-          <a:noFill/>
-          <a:ln/>
-        </p:spPr>
-        <p:txBody>
-          <a:bodyPr wrap="square" lIns="0" tIns="0" rIns="0" bIns="0" rtlCol="0" anchor="t"/>
-          <a:lstStyle/>
-          <a:p>
-            <a:pPr indent="0" marL="0">
-              <a:buNone/>
-            </a:pPr>
-            <a:r>
-              <a:rPr lang="en-US" sz="1000" dirty="0">
-                <a:solidFill>
-                  <a:srgbClr val="F5A524"/>
-                </a:solidFill>
-                <a:latin typeface="Calibri" pitchFamily="34" charset="0"/>
-                <a:ea typeface="Calibri" pitchFamily="34" charset="-122"/>
-                <a:cs typeface="Calibri" pitchFamily="34" charset="-120"/>
-              </a:rPr>
-              <a:t>Refresh has not run yet</a:t>
-            </a:r>
-            <a:endParaRPr lang="en-US" sz="1000" dirty="0"/>
-          </a:p>
-        </p:txBody>
-      </p:sp>
-      <p:sp>
-        <p:nvSpPr>
-          <p:cNvPr id="31" name="Text 29"/>
-          <p:cNvSpPr/>
-          <p:nvPr/>
-        </p:nvSpPr>
-        <p:spPr>
-          <a:xfrm>
-            <a:off x="7315200" y="4855464"/>
-            <a:ext cx="4023360" cy="237744"/>
-          </a:xfrm>
-          <a:prstGeom prst="rect">
-            <a:avLst/>
-          </a:prstGeom>
-          <a:noFill/>
-          <a:ln/>
-        </p:spPr>
-        <p:txBody>
-          <a:bodyPr wrap="square" lIns="0" tIns="0" rIns="0" bIns="0" rtlCol="0" anchor="t"/>
-          <a:lstStyle/>
-          <a:p>
-            <a:pPr indent="0" marL="0">
-              <a:buNone/>
-            </a:pPr>
-            <a:r>
-              <a:rPr lang="en-US" sz="1000" dirty="0">
-                <a:solidFill>
-                  <a:srgbClr val="B4B7BD"/>
-                </a:solidFill>
-                <a:latin typeface="Calibri" pitchFamily="34" charset="0"/>
-                <a:ea typeface="Calibri" pitchFamily="34" charset="-122"/>
-                <a:cs typeface="Calibri" pitchFamily="34" charset="-120"/>
-              </a:rPr>
-              <a:t>Run the Refresh job first; an empty tracker means nothing is due</a:t>
-            </a:r>
-            <a:endParaRPr lang="en-US" sz="1000" dirty="0"/>
-          </a:p>
-        </p:txBody>
-      </p:sp>
-      <p:sp>
-        <p:nvSpPr>
-          <p:cNvPr id="32" name="Shape 30"/>
-          <p:cNvSpPr/>
-          <p:nvPr/>
-        </p:nvSpPr>
-        <p:spPr>
-          <a:xfrm>
-            <a:off x="548640" y="5276088"/>
-            <a:ext cx="11064240" cy="457200"/>
+          <p:cNvPr id="30" name="Shape 28"/>
+          <p:cNvSpPr/>
+          <p:nvPr/>
+        </p:nvSpPr>
+        <p:spPr>
+          <a:xfrm>
+            <a:off x="6464808" y="1536192"/>
+            <a:ext cx="310896" cy="310896"/>
           </a:xfrm>
           <a:prstGeom prst="roundRect">
             <a:avLst>
-              <a:gd name="adj" fmla="val 10000"/>
+              <a:gd name="adj" fmla="val 26471"/>
+            </a:avLst>
+          </a:prstGeom>
+          <a:solidFill>
+            <a:srgbClr val="3FB950"/>
+          </a:solidFill>
+          <a:ln w="12700">
+            <a:solidFill>
+              <a:srgbClr val="3FB950"/>
+            </a:solidFill>
+            <a:prstDash val="solid"/>
+          </a:ln>
+        </p:spPr>
+      </p:sp>
+      <p:sp>
+        <p:nvSpPr>
+          <p:cNvPr id="31" name="Text 29"/>
+          <p:cNvSpPr/>
+          <p:nvPr/>
+        </p:nvSpPr>
+        <p:spPr>
+          <a:xfrm>
+            <a:off x="6464808" y="1536192"/>
+            <a:ext cx="310896" cy="310896"/>
+          </a:xfrm>
+          <a:prstGeom prst="rect">
+            <a:avLst/>
+          </a:prstGeom>
+          <a:noFill/>
+          <a:ln/>
+        </p:spPr>
+        <p:txBody>
+          <a:bodyPr wrap="square" lIns="0" tIns="0" rIns="0" bIns="0" rtlCol="0" anchor="ctr"/>
+          <a:lstStyle/>
+          <a:p>
+            <a:pPr algn="ctr" indent="0" marL="0">
+              <a:buNone/>
+            </a:pPr>
+            <a:r>
+              <a:rPr lang="en-US" sz="1300" b="1" dirty="0">
+                <a:solidFill>
+                  <a:srgbClr val="FFFFFF"/>
+                </a:solidFill>
+                <a:latin typeface="Calibri" pitchFamily="34" charset="0"/>
+                <a:ea typeface="Calibri" pitchFamily="34" charset="-122"/>
+                <a:cs typeface="Calibri" pitchFamily="34" charset="-120"/>
+              </a:rPr>
+              <a:t>7</a:t>
+            </a:r>
+            <a:endParaRPr lang="en-US" sz="1300" dirty="0"/>
+          </a:p>
+        </p:txBody>
+      </p:sp>
+      <p:sp>
+        <p:nvSpPr>
+          <p:cNvPr id="32" name="Text 30"/>
+          <p:cNvSpPr/>
+          <p:nvPr/>
+        </p:nvSpPr>
+        <p:spPr>
+          <a:xfrm>
+            <a:off x="6940296" y="1554480"/>
+            <a:ext cx="4453128" cy="329184"/>
+          </a:xfrm>
+          <a:prstGeom prst="rect">
+            <a:avLst/>
+          </a:prstGeom>
+          <a:noFill/>
+          <a:ln/>
+        </p:spPr>
+        <p:txBody>
+          <a:bodyPr wrap="square" lIns="0" tIns="0" rIns="0" bIns="0" rtlCol="0" anchor="t"/>
+          <a:lstStyle/>
+          <a:p>
+            <a:pPr indent="0" marL="0">
+              <a:lnSpc>
+                <a:spcPts val="1200"/>
+              </a:lnSpc>
+              <a:buNone/>
+            </a:pPr>
+            <a:r>
+              <a:rPr lang="en-US" sz="1050" dirty="0">
+                <a:solidFill>
+                  <a:srgbClr val="B4B7BD"/>
+                </a:solidFill>
+                <a:latin typeface="Calibri" pitchFamily="34" charset="0"/>
+                <a:ea typeface="Calibri" pitchFamily="34" charset="-122"/>
+                <a:cs typeface="Calibri" pitchFamily="34" charset="-120"/>
+              </a:rPr>
+              <a:t>Response parks on approval; blocklist untouched until approved</a:t>
+            </a:r>
+            <a:endParaRPr lang="en-US" sz="1050" dirty="0"/>
+          </a:p>
+        </p:txBody>
+      </p:sp>
+      <p:sp>
+        <p:nvSpPr>
+          <p:cNvPr id="33" name="Shape 31"/>
+          <p:cNvSpPr/>
+          <p:nvPr/>
+        </p:nvSpPr>
+        <p:spPr>
+          <a:xfrm>
+            <a:off x="6263640" y="2075688"/>
+            <a:ext cx="5349240" cy="548640"/>
+          </a:xfrm>
+          <a:prstGeom prst="roundRect">
+            <a:avLst>
+              <a:gd name="adj" fmla="val 8333"/>
             </a:avLst>
           </a:prstGeom>
           <a:solidFill>
@@ -17021,30 +15762,57 @@
       </p:sp>
       <p:sp>
         <p:nvSpPr>
-          <p:cNvPr id="33" name="Text 31"/>
-          <p:cNvSpPr/>
-          <p:nvPr/>
-        </p:nvSpPr>
-        <p:spPr>
-          <a:xfrm>
-            <a:off x="822960" y="5404104"/>
-            <a:ext cx="3017520" cy="237744"/>
-          </a:xfrm>
-          <a:prstGeom prst="rect">
-            <a:avLst/>
-          </a:prstGeom>
-          <a:noFill/>
-          <a:ln/>
-        </p:spPr>
-        <p:txBody>
-          <a:bodyPr wrap="square" lIns="0" tIns="0" rIns="0" bIns="0" rtlCol="0" anchor="t"/>
-          <a:lstStyle/>
-          <a:p>
-            <a:pPr indent="0" marL="0">
-              <a:buNone/>
-            </a:pPr>
-            <a:r>
-              <a:rPr lang="en-US" sz="1100" b="1" dirty="0">
+          <p:cNvPr id="34" name="Shape 32"/>
+          <p:cNvSpPr/>
+          <p:nvPr/>
+        </p:nvSpPr>
+        <p:spPr>
+          <a:xfrm>
+            <a:off x="6464808" y="2194560"/>
+            <a:ext cx="310896" cy="310896"/>
+          </a:xfrm>
+          <a:prstGeom prst="roundRect">
+            <a:avLst>
+              <a:gd name="adj" fmla="val 26471"/>
+            </a:avLst>
+          </a:prstGeom>
+          <a:solidFill>
+            <a:srgbClr val="3FB950"/>
+          </a:solidFill>
+          <a:ln w="12700">
+            <a:solidFill>
+              <a:srgbClr val="3FB950"/>
+            </a:solidFill>
+            <a:prstDash val="solid"/>
+          </a:ln>
+        </p:spPr>
+      </p:sp>
+      <p:sp>
+        <p:nvSpPr>
+          <p:cNvPr id="35" name="Text 33"/>
+          <p:cNvSpPr/>
+          <p:nvPr/>
+        </p:nvSpPr>
+        <p:spPr>
+          <a:xfrm>
+            <a:off x="6464808" y="2194560"/>
+            <a:ext cx="310896" cy="310896"/>
+          </a:xfrm>
+          <a:prstGeom prst="rect">
+            <a:avLst/>
+          </a:prstGeom>
+          <a:noFill/>
+          <a:ln/>
+        </p:spPr>
+        <p:txBody>
+          <a:bodyPr wrap="square" lIns="0" tIns="0" rIns="0" bIns="0" rtlCol="0" anchor="ctr"/>
+          <a:lstStyle/>
+          <a:p>
+            <a:pPr algn="ctr" indent="0" marL="0">
+              <a:buNone/>
+            </a:pPr>
+            <a:r>
+              <a:rPr lang="en-US" sz="1300" b="1" dirty="0">
                 <a:solidFill>
                   <a:srgbClr val="FFFFFF"/>
                 </a:solidFill>
@@ -17052,77 +15820,41 @@
                 <a:ea typeface="Calibri" pitchFamily="34" charset="-122"/>
                 <a:cs typeface="Calibri" pitchFamily="34" charset="-120"/>
               </a:rPr>
-              <a:t>A Job never fires</a:t>
-            </a:r>
-            <a:endParaRPr lang="en-US" sz="1100" dirty="0"/>
-          </a:p>
-        </p:txBody>
-      </p:sp>
-      <p:sp>
-        <p:nvSpPr>
-          <p:cNvPr id="34" name="Text 32"/>
-          <p:cNvSpPr/>
-          <p:nvPr/>
-        </p:nvSpPr>
-        <p:spPr>
-          <a:xfrm>
-            <a:off x="4023360" y="5413248"/>
-            <a:ext cx="3108960" cy="237744"/>
-          </a:xfrm>
-          <a:prstGeom prst="rect">
-            <a:avLst/>
-          </a:prstGeom>
-          <a:noFill/>
-          <a:ln/>
-        </p:spPr>
-        <p:txBody>
-          <a:bodyPr wrap="square" lIns="0" tIns="0" rIns="0" bIns="0" rtlCol="0" anchor="t"/>
-          <a:lstStyle/>
-          <a:p>
-            <a:pPr indent="0" marL="0">
-              <a:buNone/>
-            </a:pPr>
-            <a:r>
-              <a:rPr lang="en-US" sz="1000" dirty="0">
-                <a:solidFill>
-                  <a:srgbClr val="F5A524"/>
-                </a:solidFill>
-                <a:latin typeface="Calibri" pitchFamily="34" charset="0"/>
-                <a:ea typeface="Calibri" pitchFamily="34" charset="-122"/>
-                <a:cs typeface="Calibri" pitchFamily="34" charset="-120"/>
-              </a:rPr>
-              <a:t>It was created disabled</a:t>
-            </a:r>
-            <a:endParaRPr lang="en-US" sz="1000" dirty="0"/>
-          </a:p>
-        </p:txBody>
-      </p:sp>
-      <p:sp>
-        <p:nvSpPr>
-          <p:cNvPr id="35" name="Text 33"/>
-          <p:cNvSpPr/>
-          <p:nvPr/>
-        </p:nvSpPr>
-        <p:spPr>
-          <a:xfrm>
-            <a:off x="7315200" y="5413248"/>
-            <a:ext cx="4023360" cy="237744"/>
-          </a:xfrm>
-          <a:prstGeom prst="rect">
-            <a:avLst/>
-          </a:prstGeom>
-          <a:noFill/>
-          <a:ln/>
-        </p:spPr>
-        <p:txBody>
-          <a:bodyPr wrap="square" lIns="0" tIns="0" rIns="0" bIns="0" rtlCol="0" anchor="t"/>
-          <a:lstStyle/>
-          <a:p>
-            <a:pPr indent="0" marL="0">
-              <a:buNone/>
-            </a:pPr>
-            <a:r>
-              <a:rPr lang="en-US" sz="1000" dirty="0">
+              <a:t>8</a:t>
+            </a:r>
+            <a:endParaRPr lang="en-US" sz="1300" dirty="0"/>
+          </a:p>
+        </p:txBody>
+      </p:sp>
+      <p:sp>
+        <p:nvSpPr>
+          <p:cNvPr id="36" name="Text 34"/>
+          <p:cNvSpPr/>
+          <p:nvPr/>
+        </p:nvSpPr>
+        <p:spPr>
+          <a:xfrm>
+            <a:off x="6940296" y="2212848"/>
+            <a:ext cx="4453128" cy="329184"/>
+          </a:xfrm>
+          <a:prstGeom prst="rect">
+            <a:avLst/>
+          </a:prstGeom>
+          <a:noFill/>
+          <a:ln/>
+        </p:spPr>
+        <p:txBody>
+          <a:bodyPr wrap="square" lIns="0" tIns="0" rIns="0" bIns="0" rtlCol="0" anchor="t"/>
+          <a:lstStyle/>
+          <a:p>
+            <a:pPr indent="0" marL="0">
+              <a:lnSpc>
+                <a:spcPts val="1200"/>
+              </a:lnSpc>
+              <a:buNone/>
+            </a:pPr>
+            <a:r>
+              <a:rPr lang="en-US" sz="1050" dirty="0">
                 <a:solidFill>
                   <a:srgbClr val="B4B7BD"/>
                 </a:solidFill>
@@ -17130,21 +15862,627 @@
                 <a:ea typeface="Calibri" pitchFamily="34" charset="-122"/>
                 <a:cs typeface="Calibri" pitchFamily="34" charset="-120"/>
               </a:rPr>
-              <a:t>Enable it and confirm a next-run time is shown</a:t>
-            </a:r>
-            <a:endParaRPr lang="en-US" sz="1000" dirty="0"/>
-          </a:p>
-        </p:txBody>
-      </p:sp>
-      <p:sp>
-        <p:nvSpPr>
-          <p:cNvPr id="36" name="Text 34"/>
-          <p:cNvSpPr/>
-          <p:nvPr/>
-        </p:nvSpPr>
-        <p:spPr>
-          <a:xfrm>
-            <a:off x="548640" y="5925312"/>
+              <a:t>MCP audit returns servers at or above the threshold</a:t>
+            </a:r>
+            <a:endParaRPr lang="en-US" sz="1050" dirty="0"/>
+          </a:p>
+        </p:txBody>
+      </p:sp>
+      <p:sp>
+        <p:nvSpPr>
+          <p:cNvPr id="37" name="Shape 35"/>
+          <p:cNvSpPr/>
+          <p:nvPr/>
+        </p:nvSpPr>
+        <p:spPr>
+          <a:xfrm>
+            <a:off x="6263640" y="2734056"/>
+            <a:ext cx="5349240" cy="548640"/>
+          </a:xfrm>
+          <a:prstGeom prst="roundRect">
+            <a:avLst>
+              <a:gd name="adj" fmla="val 8333"/>
+            </a:avLst>
+          </a:prstGeom>
+          <a:solidFill>
+            <a:srgbClr val="15171B"/>
+          </a:solidFill>
+          <a:ln w="12700">
+            <a:solidFill>
+              <a:srgbClr val="15171B"/>
+            </a:solidFill>
+            <a:prstDash val="solid"/>
+          </a:ln>
+        </p:spPr>
+      </p:sp>
+      <p:sp>
+        <p:nvSpPr>
+          <p:cNvPr id="38" name="Shape 36"/>
+          <p:cNvSpPr/>
+          <p:nvPr/>
+        </p:nvSpPr>
+        <p:spPr>
+          <a:xfrm>
+            <a:off x="6464808" y="2852928"/>
+            <a:ext cx="310896" cy="310896"/>
+          </a:xfrm>
+          <a:prstGeom prst="roundRect">
+            <a:avLst>
+              <a:gd name="adj" fmla="val 26471"/>
+            </a:avLst>
+          </a:prstGeom>
+          <a:solidFill>
+            <a:srgbClr val="3FB950"/>
+          </a:solidFill>
+          <a:ln w="12700">
+            <a:solidFill>
+              <a:srgbClr val="3FB950"/>
+            </a:solidFill>
+            <a:prstDash val="solid"/>
+          </a:ln>
+        </p:spPr>
+      </p:sp>
+      <p:sp>
+        <p:nvSpPr>
+          <p:cNvPr id="39" name="Text 37"/>
+          <p:cNvSpPr/>
+          <p:nvPr/>
+        </p:nvSpPr>
+        <p:spPr>
+          <a:xfrm>
+            <a:off x="6464808" y="2852928"/>
+            <a:ext cx="310896" cy="310896"/>
+          </a:xfrm>
+          <a:prstGeom prst="rect">
+            <a:avLst/>
+          </a:prstGeom>
+          <a:noFill/>
+          <a:ln/>
+        </p:spPr>
+        <p:txBody>
+          <a:bodyPr wrap="square" lIns="0" tIns="0" rIns="0" bIns="0" rtlCol="0" anchor="ctr"/>
+          <a:lstStyle/>
+          <a:p>
+            <a:pPr algn="ctr" indent="0" marL="0">
+              <a:buNone/>
+            </a:pPr>
+            <a:r>
+              <a:rPr lang="en-US" sz="1300" b="1" dirty="0">
+                <a:solidFill>
+                  <a:srgbClr val="FFFFFF"/>
+                </a:solidFill>
+                <a:latin typeface="Calibri" pitchFamily="34" charset="0"/>
+                <a:ea typeface="Calibri" pitchFamily="34" charset="-122"/>
+                <a:cs typeface="Calibri" pitchFamily="34" charset="-120"/>
+              </a:rPr>
+              <a:t>9</a:t>
+            </a:r>
+            <a:endParaRPr lang="en-US" sz="1300" dirty="0"/>
+          </a:p>
+        </p:txBody>
+      </p:sp>
+      <p:sp>
+        <p:nvSpPr>
+          <p:cNvPr id="40" name="Text 38"/>
+          <p:cNvSpPr/>
+          <p:nvPr/>
+        </p:nvSpPr>
+        <p:spPr>
+          <a:xfrm>
+            <a:off x="6940296" y="2871216"/>
+            <a:ext cx="4453128" cy="329184"/>
+          </a:xfrm>
+          <a:prstGeom prst="rect">
+            <a:avLst/>
+          </a:prstGeom>
+          <a:noFill/>
+          <a:ln/>
+        </p:spPr>
+        <p:txBody>
+          <a:bodyPr wrap="square" lIns="0" tIns="0" rIns="0" bIns="0" rtlCol="0" anchor="t"/>
+          <a:lstStyle/>
+          <a:p>
+            <a:pPr indent="0" marL="0">
+              <a:lnSpc>
+                <a:spcPts val="1200"/>
+              </a:lnSpc>
+              <a:buNone/>
+            </a:pPr>
+            <a:r>
+              <a:rPr lang="en-US" sz="1050" dirty="0">
+                <a:solidFill>
+                  <a:srgbClr val="B4B7BD"/>
+                </a:solidFill>
+                <a:latin typeface="Calibri" pitchFamily="34" charset="0"/>
+                <a:ea typeface="Calibri" pitchFamily="34" charset="-122"/>
+                <a:cs typeface="Calibri" pitchFamily="34" charset="-120"/>
+              </a:rPr>
+              <a:t>Tracker List is created and fills with endpoints</a:t>
+            </a:r>
+            <a:endParaRPr lang="en-US" sz="1050" dirty="0"/>
+          </a:p>
+        </p:txBody>
+      </p:sp>
+      <p:sp>
+        <p:nvSpPr>
+          <p:cNvPr id="41" name="Shape 39"/>
+          <p:cNvSpPr/>
+          <p:nvPr/>
+        </p:nvSpPr>
+        <p:spPr>
+          <a:xfrm>
+            <a:off x="6263640" y="3392424"/>
+            <a:ext cx="5349240" cy="548640"/>
+          </a:xfrm>
+          <a:prstGeom prst="roundRect">
+            <a:avLst>
+              <a:gd name="adj" fmla="val 8333"/>
+            </a:avLst>
+          </a:prstGeom>
+          <a:solidFill>
+            <a:srgbClr val="15171B"/>
+          </a:solidFill>
+          <a:ln w="12700">
+            <a:solidFill>
+              <a:srgbClr val="15171B"/>
+            </a:solidFill>
+            <a:prstDash val="solid"/>
+          </a:ln>
+        </p:spPr>
+      </p:sp>
+      <p:sp>
+        <p:nvSpPr>
+          <p:cNvPr id="42" name="Shape 40"/>
+          <p:cNvSpPr/>
+          <p:nvPr/>
+        </p:nvSpPr>
+        <p:spPr>
+          <a:xfrm>
+            <a:off x="6464808" y="3511296"/>
+            <a:ext cx="310896" cy="310896"/>
+          </a:xfrm>
+          <a:prstGeom prst="roundRect">
+            <a:avLst>
+              <a:gd name="adj" fmla="val 26471"/>
+            </a:avLst>
+          </a:prstGeom>
+          <a:solidFill>
+            <a:srgbClr val="3FB950"/>
+          </a:solidFill>
+          <a:ln w="12700">
+            <a:solidFill>
+              <a:srgbClr val="3FB950"/>
+            </a:solidFill>
+            <a:prstDash val="solid"/>
+          </a:ln>
+        </p:spPr>
+      </p:sp>
+      <p:sp>
+        <p:nvSpPr>
+          <p:cNvPr id="43" name="Text 41"/>
+          <p:cNvSpPr/>
+          <p:nvPr/>
+        </p:nvSpPr>
+        <p:spPr>
+          <a:xfrm>
+            <a:off x="6464808" y="3511296"/>
+            <a:ext cx="310896" cy="310896"/>
+          </a:xfrm>
+          <a:prstGeom prst="rect">
+            <a:avLst/>
+          </a:prstGeom>
+          <a:noFill/>
+          <a:ln/>
+        </p:spPr>
+        <p:txBody>
+          <a:bodyPr wrap="square" lIns="0" tIns="0" rIns="0" bIns="0" rtlCol="0" anchor="ctr"/>
+          <a:lstStyle/>
+          <a:p>
+            <a:pPr algn="ctr" indent="0" marL="0">
+              <a:buNone/>
+            </a:pPr>
+            <a:r>
+              <a:rPr lang="en-US" sz="1300" b="1" dirty="0">
+                <a:solidFill>
+                  <a:srgbClr val="FFFFFF"/>
+                </a:solidFill>
+                <a:latin typeface="Calibri" pitchFamily="34" charset="0"/>
+                <a:ea typeface="Calibri" pitchFamily="34" charset="-122"/>
+                <a:cs typeface="Calibri" pitchFamily="34" charset="-120"/>
+              </a:rPr>
+              <a:t>10</a:t>
+            </a:r>
+            <a:endParaRPr lang="en-US" sz="1300" dirty="0"/>
+          </a:p>
+        </p:txBody>
+      </p:sp>
+      <p:sp>
+        <p:nvSpPr>
+          <p:cNvPr id="44" name="Text 42"/>
+          <p:cNvSpPr/>
+          <p:nvPr/>
+        </p:nvSpPr>
+        <p:spPr>
+          <a:xfrm>
+            <a:off x="6940296" y="3529584"/>
+            <a:ext cx="4453128" cy="329184"/>
+          </a:xfrm>
+          <a:prstGeom prst="rect">
+            <a:avLst/>
+          </a:prstGeom>
+          <a:noFill/>
+          <a:ln/>
+        </p:spPr>
+        <p:txBody>
+          <a:bodyPr wrap="square" lIns="0" tIns="0" rIns="0" bIns="0" rtlCol="0" anchor="t"/>
+          <a:lstStyle/>
+          <a:p>
+            <a:pPr indent="0" marL="0">
+              <a:lnSpc>
+                <a:spcPts val="1200"/>
+              </a:lnSpc>
+              <a:buNone/>
+            </a:pPr>
+            <a:r>
+              <a:rPr lang="en-US" sz="1050" dirty="0">
+                <a:solidFill>
+                  <a:srgbClr val="B4B7BD"/>
+                </a:solidFill>
+                <a:latin typeface="Calibri" pitchFamily="34" charset="0"/>
+                <a:ea typeface="Calibri" pitchFamily="34" charset="-122"/>
+                <a:cs typeface="Calibri" pitchFamily="34" charset="-120"/>
+              </a:rPr>
+              <a:t>Scan marks only due, connected endpoints; re-run is a no-op</a:t>
+            </a:r>
+            <a:endParaRPr lang="en-US" sz="1050" dirty="0"/>
+          </a:p>
+        </p:txBody>
+      </p:sp>
+      <p:sp>
+        <p:nvSpPr>
+          <p:cNvPr id="45" name="Shape 43"/>
+          <p:cNvSpPr/>
+          <p:nvPr/>
+        </p:nvSpPr>
+        <p:spPr>
+          <a:xfrm>
+            <a:off x="6263640" y="4050792"/>
+            <a:ext cx="5349240" cy="548640"/>
+          </a:xfrm>
+          <a:prstGeom prst="roundRect">
+            <a:avLst>
+              <a:gd name="adj" fmla="val 8333"/>
+            </a:avLst>
+          </a:prstGeom>
+          <a:solidFill>
+            <a:srgbClr val="15171B"/>
+          </a:solidFill>
+          <a:ln w="12700">
+            <a:solidFill>
+              <a:srgbClr val="15171B"/>
+            </a:solidFill>
+            <a:prstDash val="solid"/>
+          </a:ln>
+        </p:spPr>
+      </p:sp>
+      <p:sp>
+        <p:nvSpPr>
+          <p:cNvPr id="46" name="Shape 44"/>
+          <p:cNvSpPr/>
+          <p:nvPr/>
+        </p:nvSpPr>
+        <p:spPr>
+          <a:xfrm>
+            <a:off x="6464808" y="4169664"/>
+            <a:ext cx="310896" cy="310896"/>
+          </a:xfrm>
+          <a:prstGeom prst="roundRect">
+            <a:avLst>
+              <a:gd name="adj" fmla="val 26471"/>
+            </a:avLst>
+          </a:prstGeom>
+          <a:solidFill>
+            <a:srgbClr val="3FB950"/>
+          </a:solidFill>
+          <a:ln w="12700">
+            <a:solidFill>
+              <a:srgbClr val="3FB950"/>
+            </a:solidFill>
+            <a:prstDash val="solid"/>
+          </a:ln>
+        </p:spPr>
+      </p:sp>
+      <p:sp>
+        <p:nvSpPr>
+          <p:cNvPr id="47" name="Text 45"/>
+          <p:cNvSpPr/>
+          <p:nvPr/>
+        </p:nvSpPr>
+        <p:spPr>
+          <a:xfrm>
+            <a:off x="6464808" y="4169664"/>
+            <a:ext cx="310896" cy="310896"/>
+          </a:xfrm>
+          <a:prstGeom prst="rect">
+            <a:avLst/>
+          </a:prstGeom>
+          <a:noFill/>
+          <a:ln/>
+        </p:spPr>
+        <p:txBody>
+          <a:bodyPr wrap="square" lIns="0" tIns="0" rIns="0" bIns="0" rtlCol="0" anchor="ctr"/>
+          <a:lstStyle/>
+          <a:p>
+            <a:pPr algn="ctr" indent="0" marL="0">
+              <a:buNone/>
+            </a:pPr>
+            <a:r>
+              <a:rPr lang="en-US" sz="1300" b="1" dirty="0">
+                <a:solidFill>
+                  <a:srgbClr val="FFFFFF"/>
+                </a:solidFill>
+                <a:latin typeface="Calibri" pitchFamily="34" charset="0"/>
+                <a:ea typeface="Calibri" pitchFamily="34" charset="-122"/>
+                <a:cs typeface="Calibri" pitchFamily="34" charset="-120"/>
+              </a:rPr>
+              <a:t>11</a:t>
+            </a:r>
+            <a:endParaRPr lang="en-US" sz="1300" dirty="0"/>
+          </a:p>
+        </p:txBody>
+      </p:sp>
+      <p:sp>
+        <p:nvSpPr>
+          <p:cNvPr id="48" name="Text 46"/>
+          <p:cNvSpPr/>
+          <p:nvPr/>
+        </p:nvSpPr>
+        <p:spPr>
+          <a:xfrm>
+            <a:off x="6940296" y="4187952"/>
+            <a:ext cx="4453128" cy="329184"/>
+          </a:xfrm>
+          <a:prstGeom prst="rect">
+            <a:avLst/>
+          </a:prstGeom>
+          <a:noFill/>
+          <a:ln/>
+        </p:spPr>
+        <p:txBody>
+          <a:bodyPr wrap="square" lIns="0" tIns="0" rIns="0" bIns="0" rtlCol="0" anchor="t"/>
+          <a:lstStyle/>
+          <a:p>
+            <a:pPr indent="0" marL="0">
+              <a:lnSpc>
+                <a:spcPts val="1200"/>
+              </a:lnSpc>
+              <a:buNone/>
+            </a:pPr>
+            <a:r>
+              <a:rPr lang="en-US" sz="1050" dirty="0">
+                <a:solidFill>
+                  <a:srgbClr val="B4B7BD"/>
+                </a:solidFill>
+                <a:latin typeface="Calibri" pitchFamily="34" charset="0"/>
+                <a:ea typeface="Calibri" pitchFamily="34" charset="-122"/>
+                <a:cs typeface="Calibri" pitchFamily="34" charset="-120"/>
+              </a:rPr>
+              <a:t>Library queries run and return results</a:t>
+            </a:r>
+            <a:endParaRPr lang="en-US" sz="1050" dirty="0"/>
+          </a:p>
+        </p:txBody>
+      </p:sp>
+      <p:sp>
+        <p:nvSpPr>
+          <p:cNvPr id="49" name="Shape 47"/>
+          <p:cNvSpPr/>
+          <p:nvPr/>
+        </p:nvSpPr>
+        <p:spPr>
+          <a:xfrm>
+            <a:off x="6263640" y="4709160"/>
+            <a:ext cx="5349240" cy="548640"/>
+          </a:xfrm>
+          <a:prstGeom prst="roundRect">
+            <a:avLst>
+              <a:gd name="adj" fmla="val 8333"/>
+            </a:avLst>
+          </a:prstGeom>
+          <a:solidFill>
+            <a:srgbClr val="15171B"/>
+          </a:solidFill>
+          <a:ln w="12700">
+            <a:solidFill>
+              <a:srgbClr val="15171B"/>
+            </a:solidFill>
+            <a:prstDash val="solid"/>
+          </a:ln>
+        </p:spPr>
+      </p:sp>
+      <p:sp>
+        <p:nvSpPr>
+          <p:cNvPr id="50" name="Shape 48"/>
+          <p:cNvSpPr/>
+          <p:nvPr/>
+        </p:nvSpPr>
+        <p:spPr>
+          <a:xfrm>
+            <a:off x="6464808" y="4828032"/>
+            <a:ext cx="310896" cy="310896"/>
+          </a:xfrm>
+          <a:prstGeom prst="roundRect">
+            <a:avLst>
+              <a:gd name="adj" fmla="val 26471"/>
+            </a:avLst>
+          </a:prstGeom>
+          <a:solidFill>
+            <a:srgbClr val="3FB950"/>
+          </a:solidFill>
+          <a:ln w="12700">
+            <a:solidFill>
+              <a:srgbClr val="3FB950"/>
+            </a:solidFill>
+            <a:prstDash val="solid"/>
+          </a:ln>
+        </p:spPr>
+      </p:sp>
+      <p:sp>
+        <p:nvSpPr>
+          <p:cNvPr id="51" name="Text 49"/>
+          <p:cNvSpPr/>
+          <p:nvPr/>
+        </p:nvSpPr>
+        <p:spPr>
+          <a:xfrm>
+            <a:off x="6464808" y="4828032"/>
+            <a:ext cx="310896" cy="310896"/>
+          </a:xfrm>
+          <a:prstGeom prst="rect">
+            <a:avLst/>
+          </a:prstGeom>
+          <a:noFill/>
+          <a:ln/>
+        </p:spPr>
+        <p:txBody>
+          <a:bodyPr wrap="square" lIns="0" tIns="0" rIns="0" bIns="0" rtlCol="0" anchor="ctr"/>
+          <a:lstStyle/>
+          <a:p>
+            <a:pPr algn="ctr" indent="0" marL="0">
+              <a:buNone/>
+            </a:pPr>
+            <a:r>
+              <a:rPr lang="en-US" sz="1300" b="1" dirty="0">
+                <a:solidFill>
+                  <a:srgbClr val="FFFFFF"/>
+                </a:solidFill>
+                <a:latin typeface="Calibri" pitchFamily="34" charset="0"/>
+                <a:ea typeface="Calibri" pitchFamily="34" charset="-122"/>
+                <a:cs typeface="Calibri" pitchFamily="34" charset="-120"/>
+              </a:rPr>
+              <a:t>12</a:t>
+            </a:r>
+            <a:endParaRPr lang="en-US" sz="1300" dirty="0"/>
+          </a:p>
+        </p:txBody>
+      </p:sp>
+      <p:sp>
+        <p:nvSpPr>
+          <p:cNvPr id="52" name="Text 50"/>
+          <p:cNvSpPr/>
+          <p:nvPr/>
+        </p:nvSpPr>
+        <p:spPr>
+          <a:xfrm>
+            <a:off x="6940296" y="4846320"/>
+            <a:ext cx="4453128" cy="329184"/>
+          </a:xfrm>
+          <a:prstGeom prst="rect">
+            <a:avLst/>
+          </a:prstGeom>
+          <a:noFill/>
+          <a:ln/>
+        </p:spPr>
+        <p:txBody>
+          <a:bodyPr wrap="square" lIns="0" tIns="0" rIns="0" bIns="0" rtlCol="0" anchor="t"/>
+          <a:lstStyle/>
+          <a:p>
+            <a:pPr indent="0" marL="0">
+              <a:lnSpc>
+                <a:spcPts val="1200"/>
+              </a:lnSpc>
+              <a:buNone/>
+            </a:pPr>
+            <a:r>
+              <a:rPr lang="en-US" sz="1050" dirty="0">
+                <a:solidFill>
+                  <a:srgbClr val="B4B7BD"/>
+                </a:solidFill>
+                <a:latin typeface="Calibri" pitchFamily="34" charset="0"/>
+                <a:ea typeface="Calibri" pitchFamily="34" charset="-122"/>
+                <a:cs typeface="Calibri" pitchFamily="34" charset="-120"/>
+              </a:rPr>
+              <a:t>Simulated counts match the summary exactly</a:t>
+            </a:r>
+            <a:endParaRPr lang="en-US" sz="1050" dirty="0"/>
+          </a:p>
+        </p:txBody>
+      </p:sp>
+      <p:sp>
+        <p:nvSpPr>
+          <p:cNvPr id="53" name="Shape 51"/>
+          <p:cNvSpPr/>
+          <p:nvPr/>
+        </p:nvSpPr>
+        <p:spPr>
+          <a:xfrm>
+            <a:off x="548640" y="5440680"/>
+            <a:ext cx="11064240" cy="685800"/>
+          </a:xfrm>
+          <a:prstGeom prst="roundRect">
+            <a:avLst>
+              <a:gd name="adj" fmla="val 6667"/>
+            </a:avLst>
+          </a:prstGeom>
+          <a:solidFill>
+            <a:srgbClr val="1C2026"/>
+          </a:solidFill>
+          <a:ln w="12700">
+            <a:solidFill>
+              <a:srgbClr val="1C2026"/>
+            </a:solidFill>
+            <a:prstDash val="solid"/>
+          </a:ln>
+        </p:spPr>
+      </p:sp>
+      <p:sp>
+        <p:nvSpPr>
+          <p:cNvPr id="54" name="Text 52"/>
+          <p:cNvSpPr/>
+          <p:nvPr/>
+        </p:nvSpPr>
+        <p:spPr>
+          <a:xfrm>
+            <a:off x="859536" y="5623560"/>
+            <a:ext cx="7315200" cy="292608"/>
+          </a:xfrm>
+          <a:prstGeom prst="rect">
+            <a:avLst/>
+          </a:prstGeom>
+          <a:noFill/>
+          <a:ln/>
+        </p:spPr>
+        <p:txBody>
+          <a:bodyPr wrap="square" lIns="0" tIns="0" rIns="0" bIns="0" rtlCol="0" anchor="t"/>
+          <a:lstStyle/>
+          <a:p>
+            <a:pPr indent="0" marL="0">
+              <a:buNone/>
+            </a:pPr>
+            <a:r>
+              <a:rPr lang="en-US" sz="1300" b="1" i="1" dirty="0">
+                <a:solidFill>
+                  <a:srgbClr val="3FB950"/>
+                </a:solidFill>
+                <a:latin typeface="Calibri" pitchFamily="34" charset="0"/>
+                <a:ea typeface="Calibri" pitchFamily="34" charset="-122"/>
+                <a:cs typeface="Calibri" pitchFamily="34" charset="-120"/>
+              </a:rPr>
+              <a:t>All twelve green — the pack is ready for production use.</a:t>
+            </a:r>
+            <a:endParaRPr lang="en-US" sz="1300" dirty="0"/>
+          </a:p>
+        </p:txBody>
+      </p:sp>
+      <p:sp>
+        <p:nvSpPr>
+          <p:cNvPr id="55" name="Text 53"/>
+          <p:cNvSpPr/>
+          <p:nvPr/>
+        </p:nvSpPr>
+        <p:spPr>
+          <a:xfrm>
+            <a:off x="548640" y="6263640"/>
             <a:ext cx="11064240" cy="274320"/>
           </a:xfrm>
           <a:prstGeom prst="rect">
@@ -17161,7 +16499,7 @@
               <a:buNone/>
             </a:pPr>
             <a:r>
-              <a:rPr lang="en-US" sz="1050" i="1" dirty="0">
+              <a:rPr lang="en-US" sz="1050" dirty="0">
                 <a:solidFill>
                   <a:srgbClr val="6E747E"/>
                 </a:solidFill>
@@ -17169,7 +16507,7 @@
                 <a:ea typeface="Calibri" pitchFamily="34" charset="-122"/>
                 <a:cs typeface="Calibri" pitchFamily="34" charset="-120"/>
               </a:rPr>
-              <a:t>Six of these eight are tenant setup, not the pack. Check the amber panel on the test before raising a defect.</a:t>
+              <a:t>Full detail in KOI_Integration_Customer_Guide_v1.4.0. Diagnostics in the troubleshooting guide.</a:t>
             </a:r>
             <a:endParaRPr lang="en-US" sz="1050" dirty="0"/>
           </a:p>
@@ -18550,1868 +17888,6 @@
 </p:sld>
 </file>
 
-<file path=ppt/slides/slide20.xml><?xml version="1.0" encoding="utf-8"?>
-<p:sld xmlns:a="http://schemas.openxmlformats.org/drawingml/2006/main" xmlns:r="http://schemas.openxmlformats.org/officeDocument/2006/relationships" xmlns:p="http://schemas.openxmlformats.org/presentationml/2006/main">
-  <p:cSld name="Slide 20">
-    <p:bg>
-      <p:bgPr>
-        <a:solidFill>
-          <a:srgbClr val="000000"/>
-        </a:solidFill>
-      </p:bgPr>
-    </p:bg>
-    <p:spTree>
-      <p:nvGrpSpPr>
-        <p:cNvPr id="1" name=""/>
-        <p:cNvGrpSpPr/>
-        <p:nvPr/>
-      </p:nvGrpSpPr>
-      <p:grpSpPr>
-        <a:xfrm>
-          <a:off x="0" y="0"/>
-          <a:ext cx="0" cy="0"/>
-          <a:chOff x="0" y="0"/>
-          <a:chExt cx="0" cy="0"/>
-        </a:xfrm>
-      </p:grpSpPr>
-      <p:sp>
-        <p:nvSpPr>
-          <p:cNvPr id="2" name="Shape 0"/>
-          <p:cNvSpPr/>
-          <p:nvPr/>
-        </p:nvSpPr>
-        <p:spPr>
-          <a:xfrm>
-            <a:off x="10424160" y="-3108960"/>
-            <a:ext cx="4389120" cy="4389120"/>
-          </a:xfrm>
-          <a:prstGeom prst="ellipse">
-            <a:avLst/>
-          </a:prstGeom>
-          <a:solidFill>
-            <a:srgbClr val="3FB950">
-              <a:alpha val="7000"/>
-            </a:srgbClr>
-          </a:solidFill>
-          <a:ln w="12700">
-            <a:solidFill>
-              <a:srgbClr val="3FB950"/>
-            </a:solidFill>
-            <a:prstDash val="solid"/>
-          </a:ln>
-        </p:spPr>
-      </p:sp>
-      <p:sp>
-        <p:nvSpPr>
-          <p:cNvPr id="3" name="Text 1"/>
-          <p:cNvSpPr/>
-          <p:nvPr/>
-        </p:nvSpPr>
-        <p:spPr>
-          <a:xfrm>
-            <a:off x="548640" y="384048"/>
-            <a:ext cx="11064240" cy="237744"/>
-          </a:xfrm>
-          <a:prstGeom prst="rect">
-            <a:avLst/>
-          </a:prstGeom>
-          <a:noFill/>
-          <a:ln/>
-        </p:spPr>
-        <p:txBody>
-          <a:bodyPr wrap="square" lIns="0" tIns="0" rIns="0" bIns="0" rtlCol="0" anchor="t"/>
-          <a:lstStyle/>
-          <a:p>
-            <a:pPr indent="0" marL="0">
-              <a:buNone/>
-            </a:pPr>
-            <a:r>
-              <a:rPr lang="en-US" sz="1100" b="1" spc="200" kern="0" dirty="0">
-                <a:solidFill>
-                  <a:srgbClr val="E8551F"/>
-                </a:solidFill>
-                <a:latin typeface="Calibri" pitchFamily="34" charset="0"/>
-                <a:ea typeface="Calibri" pitchFamily="34" charset="-122"/>
-                <a:cs typeface="Calibri" pitchFamily="34" charset="-120"/>
-              </a:rPr>
-              <a:t>SIGN-OFF</a:t>
-            </a:r>
-            <a:endParaRPr lang="en-US" sz="1100" dirty="0"/>
-          </a:p>
-        </p:txBody>
-      </p:sp>
-      <p:sp>
-        <p:nvSpPr>
-          <p:cNvPr id="4" name="Text 2"/>
-          <p:cNvSpPr/>
-          <p:nvPr/>
-        </p:nvSpPr>
-        <p:spPr>
-          <a:xfrm>
-            <a:off x="548640" y="640080"/>
-            <a:ext cx="11064240" cy="640080"/>
-          </a:xfrm>
-          <a:prstGeom prst="rect">
-            <a:avLst/>
-          </a:prstGeom>
-          <a:noFill/>
-          <a:ln/>
-        </p:spPr>
-        <p:txBody>
-          <a:bodyPr wrap="square" lIns="0" tIns="0" rIns="0" bIns="0" rtlCol="0" anchor="t"/>
-          <a:lstStyle/>
-          <a:p>
-            <a:pPr indent="0" marL="0">
-              <a:buNone/>
-            </a:pPr>
-            <a:r>
-              <a:rPr lang="en-US" sz="3100" b="1" dirty="0">
-                <a:solidFill>
-                  <a:srgbClr val="FFFFFF"/>
-                </a:solidFill>
-                <a:latin typeface="Calibri" pitchFamily="34" charset="0"/>
-                <a:ea typeface="Calibri" pitchFamily="34" charset="-122"/>
-                <a:cs typeface="Calibri" pitchFamily="34" charset="-120"/>
-              </a:rPr>
-              <a:t>One line of evidence per test</a:t>
-            </a:r>
-            <a:endParaRPr lang="en-US" sz="3100" dirty="0"/>
-          </a:p>
-        </p:txBody>
-      </p:sp>
-      <p:sp>
-        <p:nvSpPr>
-          <p:cNvPr id="5" name="Shape 3"/>
-          <p:cNvSpPr/>
-          <p:nvPr/>
-        </p:nvSpPr>
-        <p:spPr>
-          <a:xfrm>
-            <a:off x="548640" y="1417320"/>
-            <a:ext cx="5349240" cy="548640"/>
-          </a:xfrm>
-          <a:prstGeom prst="roundRect">
-            <a:avLst>
-              <a:gd name="adj" fmla="val 8333"/>
-            </a:avLst>
-          </a:prstGeom>
-          <a:solidFill>
-            <a:srgbClr val="15171B"/>
-          </a:solidFill>
-          <a:ln w="12700">
-            <a:solidFill>
-              <a:srgbClr val="15171B"/>
-            </a:solidFill>
-            <a:prstDash val="solid"/>
-          </a:ln>
-        </p:spPr>
-      </p:sp>
-      <p:sp>
-        <p:nvSpPr>
-          <p:cNvPr id="6" name="Shape 4"/>
-          <p:cNvSpPr/>
-          <p:nvPr/>
-        </p:nvSpPr>
-        <p:spPr>
-          <a:xfrm>
-            <a:off x="749808" y="1536192"/>
-            <a:ext cx="310896" cy="310896"/>
-          </a:xfrm>
-          <a:prstGeom prst="roundRect">
-            <a:avLst>
-              <a:gd name="adj" fmla="val 26471"/>
-            </a:avLst>
-          </a:prstGeom>
-          <a:solidFill>
-            <a:srgbClr val="3FB950"/>
-          </a:solidFill>
-          <a:ln w="12700">
-            <a:solidFill>
-              <a:srgbClr val="3FB950"/>
-            </a:solidFill>
-            <a:prstDash val="solid"/>
-          </a:ln>
-        </p:spPr>
-      </p:sp>
-      <p:sp>
-        <p:nvSpPr>
-          <p:cNvPr id="7" name="Text 5"/>
-          <p:cNvSpPr/>
-          <p:nvPr/>
-        </p:nvSpPr>
-        <p:spPr>
-          <a:xfrm>
-            <a:off x="749808" y="1536192"/>
-            <a:ext cx="310896" cy="310896"/>
-          </a:xfrm>
-          <a:prstGeom prst="rect">
-            <a:avLst/>
-          </a:prstGeom>
-          <a:noFill/>
-          <a:ln/>
-        </p:spPr>
-        <p:txBody>
-          <a:bodyPr wrap="square" lIns="0" tIns="0" rIns="0" bIns="0" rtlCol="0" anchor="ctr"/>
-          <a:lstStyle/>
-          <a:p>
-            <a:pPr algn="ctr" indent="0" marL="0">
-              <a:buNone/>
-            </a:pPr>
-            <a:r>
-              <a:rPr lang="en-US" sz="1300" b="1" dirty="0">
-                <a:solidFill>
-                  <a:srgbClr val="FFFFFF"/>
-                </a:solidFill>
-                <a:latin typeface="Calibri" pitchFamily="34" charset="0"/>
-                <a:ea typeface="Calibri" pitchFamily="34" charset="-122"/>
-                <a:cs typeface="Calibri" pitchFamily="34" charset="-120"/>
-              </a:rPr>
-              <a:t>1</a:t>
-            </a:r>
-            <a:endParaRPr lang="en-US" sz="1300" dirty="0"/>
-          </a:p>
-        </p:txBody>
-      </p:sp>
-      <p:sp>
-        <p:nvSpPr>
-          <p:cNvPr id="8" name="Text 6"/>
-          <p:cNvSpPr/>
-          <p:nvPr/>
-        </p:nvSpPr>
-        <p:spPr>
-          <a:xfrm>
-            <a:off x="1225296" y="1554480"/>
-            <a:ext cx="4453128" cy="329184"/>
-          </a:xfrm>
-          <a:prstGeom prst="rect">
-            <a:avLst/>
-          </a:prstGeom>
-          <a:noFill/>
-          <a:ln/>
-        </p:spPr>
-        <p:txBody>
-          <a:bodyPr wrap="square" lIns="0" tIns="0" rIns="0" bIns="0" rtlCol="0" anchor="t"/>
-          <a:lstStyle/>
-          <a:p>
-            <a:pPr indent="0" marL="0">
-              <a:lnSpc>
-                <a:spcPts val="1200"/>
-              </a:lnSpc>
-              <a:buNone/>
-            </a:pPr>
-            <a:r>
-              <a:rPr lang="en-US" sz="1050" dirty="0">
-                <a:solidFill>
-                  <a:srgbClr val="B4B7BD"/>
-                </a:solidFill>
-                <a:latin typeface="Calibri" pitchFamily="34" charset="0"/>
-                <a:ea typeface="Calibri" pitchFamily="34" charset="-122"/>
-                <a:cs typeface="Calibri" pitchFamily="34" charset="-120"/>
-              </a:rPr>
-              <a:t>Test returns Success; devices list returns rows</a:t>
-            </a:r>
-            <a:endParaRPr lang="en-US" sz="1050" dirty="0"/>
-          </a:p>
-        </p:txBody>
-      </p:sp>
-      <p:sp>
-        <p:nvSpPr>
-          <p:cNvPr id="9" name="Shape 7"/>
-          <p:cNvSpPr/>
-          <p:nvPr/>
-        </p:nvSpPr>
-        <p:spPr>
-          <a:xfrm>
-            <a:off x="548640" y="2075688"/>
-            <a:ext cx="5349240" cy="548640"/>
-          </a:xfrm>
-          <a:prstGeom prst="roundRect">
-            <a:avLst>
-              <a:gd name="adj" fmla="val 8333"/>
-            </a:avLst>
-          </a:prstGeom>
-          <a:solidFill>
-            <a:srgbClr val="15171B"/>
-          </a:solidFill>
-          <a:ln w="12700">
-            <a:solidFill>
-              <a:srgbClr val="15171B"/>
-            </a:solidFill>
-            <a:prstDash val="solid"/>
-          </a:ln>
-        </p:spPr>
-      </p:sp>
-      <p:sp>
-        <p:nvSpPr>
-          <p:cNvPr id="10" name="Shape 8"/>
-          <p:cNvSpPr/>
-          <p:nvPr/>
-        </p:nvSpPr>
-        <p:spPr>
-          <a:xfrm>
-            <a:off x="749808" y="2194560"/>
-            <a:ext cx="310896" cy="310896"/>
-          </a:xfrm>
-          <a:prstGeom prst="roundRect">
-            <a:avLst>
-              <a:gd name="adj" fmla="val 26471"/>
-            </a:avLst>
-          </a:prstGeom>
-          <a:solidFill>
-            <a:srgbClr val="3FB950"/>
-          </a:solidFill>
-          <a:ln w="12700">
-            <a:solidFill>
-              <a:srgbClr val="3FB950"/>
-            </a:solidFill>
-            <a:prstDash val="solid"/>
-          </a:ln>
-        </p:spPr>
-      </p:sp>
-      <p:sp>
-        <p:nvSpPr>
-          <p:cNvPr id="11" name="Text 9"/>
-          <p:cNvSpPr/>
-          <p:nvPr/>
-        </p:nvSpPr>
-        <p:spPr>
-          <a:xfrm>
-            <a:off x="749808" y="2194560"/>
-            <a:ext cx="310896" cy="310896"/>
-          </a:xfrm>
-          <a:prstGeom prst="rect">
-            <a:avLst/>
-          </a:prstGeom>
-          <a:noFill/>
-          <a:ln/>
-        </p:spPr>
-        <p:txBody>
-          <a:bodyPr wrap="square" lIns="0" tIns="0" rIns="0" bIns="0" rtlCol="0" anchor="ctr"/>
-          <a:lstStyle/>
-          <a:p>
-            <a:pPr algn="ctr" indent="0" marL="0">
-              <a:buNone/>
-            </a:pPr>
-            <a:r>
-              <a:rPr lang="en-US" sz="1300" b="1" dirty="0">
-                <a:solidFill>
-                  <a:srgbClr val="FFFFFF"/>
-                </a:solidFill>
-                <a:latin typeface="Calibri" pitchFamily="34" charset="0"/>
-                <a:ea typeface="Calibri" pitchFamily="34" charset="-122"/>
-                <a:cs typeface="Calibri" pitchFamily="34" charset="-120"/>
-              </a:rPr>
-              <a:t>2</a:t>
-            </a:r>
-            <a:endParaRPr lang="en-US" sz="1300" dirty="0"/>
-          </a:p>
-        </p:txBody>
-      </p:sp>
-      <p:sp>
-        <p:nvSpPr>
-          <p:cNvPr id="12" name="Text 10"/>
-          <p:cNvSpPr/>
-          <p:nvPr/>
-        </p:nvSpPr>
-        <p:spPr>
-          <a:xfrm>
-            <a:off x="1225296" y="2212848"/>
-            <a:ext cx="4453128" cy="329184"/>
-          </a:xfrm>
-          <a:prstGeom prst="rect">
-            <a:avLst/>
-          </a:prstGeom>
-          <a:noFill/>
-          <a:ln/>
-        </p:spPr>
-        <p:txBody>
-          <a:bodyPr wrap="square" lIns="0" tIns="0" rIns="0" bIns="0" rtlCol="0" anchor="t"/>
-          <a:lstStyle/>
-          <a:p>
-            <a:pPr indent="0" marL="0">
-              <a:lnSpc>
-                <a:spcPts val="1200"/>
-              </a:lnSpc>
-              <a:buNone/>
-            </a:pPr>
-            <a:r>
-              <a:rPr lang="en-US" sz="1050" dirty="0">
-                <a:solidFill>
-                  <a:srgbClr val="B4B7BD"/>
-                </a:solidFill>
-                <a:latin typeface="Calibri" pitchFamily="34" charset="0"/>
-                <a:ea typeface="Calibri" pitchFamily="34" charset="-122"/>
-                <a:cs typeface="Calibri" pitchFamily="34" charset="-120"/>
-              </a:rPr>
-              <a:t>koi_koi_raw grows between collection cycles</a:t>
-            </a:r>
-            <a:endParaRPr lang="en-US" sz="1050" dirty="0"/>
-          </a:p>
-        </p:txBody>
-      </p:sp>
-      <p:sp>
-        <p:nvSpPr>
-          <p:cNvPr id="13" name="Shape 11"/>
-          <p:cNvSpPr/>
-          <p:nvPr/>
-        </p:nvSpPr>
-        <p:spPr>
-          <a:xfrm>
-            <a:off x="548640" y="2734056"/>
-            <a:ext cx="5349240" cy="548640"/>
-          </a:xfrm>
-          <a:prstGeom prst="roundRect">
-            <a:avLst>
-              <a:gd name="adj" fmla="val 8333"/>
-            </a:avLst>
-          </a:prstGeom>
-          <a:solidFill>
-            <a:srgbClr val="15171B"/>
-          </a:solidFill>
-          <a:ln w="12700">
-            <a:solidFill>
-              <a:srgbClr val="15171B"/>
-            </a:solidFill>
-            <a:prstDash val="solid"/>
-          </a:ln>
-        </p:spPr>
-      </p:sp>
-      <p:sp>
-        <p:nvSpPr>
-          <p:cNvPr id="14" name="Shape 12"/>
-          <p:cNvSpPr/>
-          <p:nvPr/>
-        </p:nvSpPr>
-        <p:spPr>
-          <a:xfrm>
-            <a:off x="749808" y="2852928"/>
-            <a:ext cx="310896" cy="310896"/>
-          </a:xfrm>
-          <a:prstGeom prst="roundRect">
-            <a:avLst>
-              <a:gd name="adj" fmla="val 26471"/>
-            </a:avLst>
-          </a:prstGeom>
-          <a:solidFill>
-            <a:srgbClr val="3FB950"/>
-          </a:solidFill>
-          <a:ln w="12700">
-            <a:solidFill>
-              <a:srgbClr val="3FB950"/>
-            </a:solidFill>
-            <a:prstDash val="solid"/>
-          </a:ln>
-        </p:spPr>
-      </p:sp>
-      <p:sp>
-        <p:nvSpPr>
-          <p:cNvPr id="15" name="Text 13"/>
-          <p:cNvSpPr/>
-          <p:nvPr/>
-        </p:nvSpPr>
-        <p:spPr>
-          <a:xfrm>
-            <a:off x="749808" y="2852928"/>
-            <a:ext cx="310896" cy="310896"/>
-          </a:xfrm>
-          <a:prstGeom prst="rect">
-            <a:avLst/>
-          </a:prstGeom>
-          <a:noFill/>
-          <a:ln/>
-        </p:spPr>
-        <p:txBody>
-          <a:bodyPr wrap="square" lIns="0" tIns="0" rIns="0" bIns="0" rtlCol="0" anchor="ctr"/>
-          <a:lstStyle/>
-          <a:p>
-            <a:pPr algn="ctr" indent="0" marL="0">
-              <a:buNone/>
-            </a:pPr>
-            <a:r>
-              <a:rPr lang="en-US" sz="1300" b="1" dirty="0">
-                <a:solidFill>
-                  <a:srgbClr val="FFFFFF"/>
-                </a:solidFill>
-                <a:latin typeface="Calibri" pitchFamily="34" charset="0"/>
-                <a:ea typeface="Calibri" pitchFamily="34" charset="-122"/>
-                <a:cs typeface="Calibri" pitchFamily="34" charset="-120"/>
-              </a:rPr>
-              <a:t>3</a:t>
-            </a:r>
-            <a:endParaRPr lang="en-US" sz="1300" dirty="0"/>
-          </a:p>
-        </p:txBody>
-      </p:sp>
-      <p:sp>
-        <p:nvSpPr>
-          <p:cNvPr id="16" name="Text 14"/>
-          <p:cNvSpPr/>
-          <p:nvPr/>
-        </p:nvSpPr>
-        <p:spPr>
-          <a:xfrm>
-            <a:off x="1225296" y="2871216"/>
-            <a:ext cx="4453128" cy="329184"/>
-          </a:xfrm>
-          <a:prstGeom prst="rect">
-            <a:avLst/>
-          </a:prstGeom>
-          <a:noFill/>
-          <a:ln/>
-        </p:spPr>
-        <p:txBody>
-          <a:bodyPr wrap="square" lIns="0" tIns="0" rIns="0" bIns="0" rtlCol="0" anchor="t"/>
-          <a:lstStyle/>
-          <a:p>
-            <a:pPr indent="0" marL="0">
-              <a:lnSpc>
-                <a:spcPts val="1200"/>
-              </a:lnSpc>
-              <a:buNone/>
-            </a:pPr>
-            <a:r>
-              <a:rPr lang="en-US" sz="1050" dirty="0">
-                <a:solidFill>
-                  <a:srgbClr val="B4B7BD"/>
-                </a:solidFill>
-                <a:latin typeface="Calibri" pitchFamily="34" charset="0"/>
-                <a:ea typeface="Calibri" pitchFamily="34" charset="-122"/>
-                <a:cs typeface="Calibri" pitchFamily="34" charset="-120"/>
-              </a:rPr>
-              <a:t>Distinct alerts far below raw rows — and that is correct</a:t>
-            </a:r>
-            <a:endParaRPr lang="en-US" sz="1050" dirty="0"/>
-          </a:p>
-        </p:txBody>
-      </p:sp>
-      <p:sp>
-        <p:nvSpPr>
-          <p:cNvPr id="17" name="Shape 15"/>
-          <p:cNvSpPr/>
-          <p:nvPr/>
-        </p:nvSpPr>
-        <p:spPr>
-          <a:xfrm>
-            <a:off x="548640" y="3392424"/>
-            <a:ext cx="5349240" cy="548640"/>
-          </a:xfrm>
-          <a:prstGeom prst="roundRect">
-            <a:avLst>
-              <a:gd name="adj" fmla="val 8333"/>
-            </a:avLst>
-          </a:prstGeom>
-          <a:solidFill>
-            <a:srgbClr val="15171B"/>
-          </a:solidFill>
-          <a:ln w="12700">
-            <a:solidFill>
-              <a:srgbClr val="15171B"/>
-            </a:solidFill>
-            <a:prstDash val="solid"/>
-          </a:ln>
-        </p:spPr>
-      </p:sp>
-      <p:sp>
-        <p:nvSpPr>
-          <p:cNvPr id="18" name="Shape 16"/>
-          <p:cNvSpPr/>
-          <p:nvPr/>
-        </p:nvSpPr>
-        <p:spPr>
-          <a:xfrm>
-            <a:off x="749808" y="3511296"/>
-            <a:ext cx="310896" cy="310896"/>
-          </a:xfrm>
-          <a:prstGeom prst="roundRect">
-            <a:avLst>
-              <a:gd name="adj" fmla="val 26471"/>
-            </a:avLst>
-          </a:prstGeom>
-          <a:solidFill>
-            <a:srgbClr val="3FB950"/>
-          </a:solidFill>
-          <a:ln w="12700">
-            <a:solidFill>
-              <a:srgbClr val="3FB950"/>
-            </a:solidFill>
-            <a:prstDash val="solid"/>
-          </a:ln>
-        </p:spPr>
-      </p:sp>
-      <p:sp>
-        <p:nvSpPr>
-          <p:cNvPr id="19" name="Text 17"/>
-          <p:cNvSpPr/>
-          <p:nvPr/>
-        </p:nvSpPr>
-        <p:spPr>
-          <a:xfrm>
-            <a:off x="749808" y="3511296"/>
-            <a:ext cx="310896" cy="310896"/>
-          </a:xfrm>
-          <a:prstGeom prst="rect">
-            <a:avLst/>
-          </a:prstGeom>
-          <a:noFill/>
-          <a:ln/>
-        </p:spPr>
-        <p:txBody>
-          <a:bodyPr wrap="square" lIns="0" tIns="0" rIns="0" bIns="0" rtlCol="0" anchor="ctr"/>
-          <a:lstStyle/>
-          <a:p>
-            <a:pPr algn="ctr" indent="0" marL="0">
-              <a:buNone/>
-            </a:pPr>
-            <a:r>
-              <a:rPr lang="en-US" sz="1300" b="1" dirty="0">
-                <a:solidFill>
-                  <a:srgbClr val="FFFFFF"/>
-                </a:solidFill>
-                <a:latin typeface="Calibri" pitchFamily="34" charset="0"/>
-                <a:ea typeface="Calibri" pitchFamily="34" charset="-122"/>
-                <a:cs typeface="Calibri" pitchFamily="34" charset="-120"/>
-              </a:rPr>
-              <a:t>4</a:t>
-            </a:r>
-            <a:endParaRPr lang="en-US" sz="1300" dirty="0"/>
-          </a:p>
-        </p:txBody>
-      </p:sp>
-      <p:sp>
-        <p:nvSpPr>
-          <p:cNvPr id="20" name="Text 18"/>
-          <p:cNvSpPr/>
-          <p:nvPr/>
-        </p:nvSpPr>
-        <p:spPr>
-          <a:xfrm>
-            <a:off x="1225296" y="3529584"/>
-            <a:ext cx="4453128" cy="329184"/>
-          </a:xfrm>
-          <a:prstGeom prst="rect">
-            <a:avLst/>
-          </a:prstGeom>
-          <a:noFill/>
-          <a:ln/>
-        </p:spPr>
-        <p:txBody>
-          <a:bodyPr wrap="square" lIns="0" tIns="0" rIns="0" bIns="0" rtlCol="0" anchor="t"/>
-          <a:lstStyle/>
-          <a:p>
-            <a:pPr indent="0" marL="0">
-              <a:lnSpc>
-                <a:spcPts val="1200"/>
-              </a:lnSpc>
-              <a:buNone/>
-            </a:pPr>
-            <a:r>
-              <a:rPr lang="en-US" sz="1050" dirty="0">
-                <a:solidFill>
-                  <a:srgbClr val="B4B7BD"/>
-                </a:solidFill>
-                <a:latin typeface="Calibri" pitchFamily="34" charset="0"/>
-                <a:ea typeface="Calibri" pitchFamily="34" charset="-122"/>
-                <a:cs typeface="Calibri" pitchFamily="34" charset="-120"/>
-              </a:rPr>
-              <a:t>Dashboard renders; counts stay stable across fetches</a:t>
-            </a:r>
-            <a:endParaRPr lang="en-US" sz="1050" dirty="0"/>
-          </a:p>
-        </p:txBody>
-      </p:sp>
-      <p:sp>
-        <p:nvSpPr>
-          <p:cNvPr id="21" name="Shape 19"/>
-          <p:cNvSpPr/>
-          <p:nvPr/>
-        </p:nvSpPr>
-        <p:spPr>
-          <a:xfrm>
-            <a:off x="548640" y="4050792"/>
-            <a:ext cx="5349240" cy="548640"/>
-          </a:xfrm>
-          <a:prstGeom prst="roundRect">
-            <a:avLst>
-              <a:gd name="adj" fmla="val 8333"/>
-            </a:avLst>
-          </a:prstGeom>
-          <a:solidFill>
-            <a:srgbClr val="15171B"/>
-          </a:solidFill>
-          <a:ln w="12700">
-            <a:solidFill>
-              <a:srgbClr val="15171B"/>
-            </a:solidFill>
-            <a:prstDash val="solid"/>
-          </a:ln>
-        </p:spPr>
-      </p:sp>
-      <p:sp>
-        <p:nvSpPr>
-          <p:cNvPr id="22" name="Shape 20"/>
-          <p:cNvSpPr/>
-          <p:nvPr/>
-        </p:nvSpPr>
-        <p:spPr>
-          <a:xfrm>
-            <a:off x="749808" y="4169664"/>
-            <a:ext cx="310896" cy="310896"/>
-          </a:xfrm>
-          <a:prstGeom prst="roundRect">
-            <a:avLst>
-              <a:gd name="adj" fmla="val 26471"/>
-            </a:avLst>
-          </a:prstGeom>
-          <a:solidFill>
-            <a:srgbClr val="3FB950"/>
-          </a:solidFill>
-          <a:ln w="12700">
-            <a:solidFill>
-              <a:srgbClr val="3FB950"/>
-            </a:solidFill>
-            <a:prstDash val="solid"/>
-          </a:ln>
-        </p:spPr>
-      </p:sp>
-      <p:sp>
-        <p:nvSpPr>
-          <p:cNvPr id="23" name="Text 21"/>
-          <p:cNvSpPr/>
-          <p:nvPr/>
-        </p:nvSpPr>
-        <p:spPr>
-          <a:xfrm>
-            <a:off x="749808" y="4169664"/>
-            <a:ext cx="310896" cy="310896"/>
-          </a:xfrm>
-          <a:prstGeom prst="rect">
-            <a:avLst/>
-          </a:prstGeom>
-          <a:noFill/>
-          <a:ln/>
-        </p:spPr>
-        <p:txBody>
-          <a:bodyPr wrap="square" lIns="0" tIns="0" rIns="0" bIns="0" rtlCol="0" anchor="ctr"/>
-          <a:lstStyle/>
-          <a:p>
-            <a:pPr algn="ctr" indent="0" marL="0">
-              <a:buNone/>
-            </a:pPr>
-            <a:r>
-              <a:rPr lang="en-US" sz="1300" b="1" dirty="0">
-                <a:solidFill>
-                  <a:srgbClr val="FFFFFF"/>
-                </a:solidFill>
-                <a:latin typeface="Calibri" pitchFamily="34" charset="0"/>
-                <a:ea typeface="Calibri" pitchFamily="34" charset="-122"/>
-                <a:cs typeface="Calibri" pitchFamily="34" charset="-120"/>
-              </a:rPr>
-              <a:t>5</a:t>
-            </a:r>
-            <a:endParaRPr lang="en-US" sz="1300" dirty="0"/>
-          </a:p>
-        </p:txBody>
-      </p:sp>
-      <p:sp>
-        <p:nvSpPr>
-          <p:cNvPr id="24" name="Text 22"/>
-          <p:cNvSpPr/>
-          <p:nvPr/>
-        </p:nvSpPr>
-        <p:spPr>
-          <a:xfrm>
-            <a:off x="1225296" y="4187952"/>
-            <a:ext cx="4453128" cy="329184"/>
-          </a:xfrm>
-          <a:prstGeom prst="rect">
-            <a:avLst/>
-          </a:prstGeom>
-          <a:noFill/>
-          <a:ln/>
-        </p:spPr>
-        <p:txBody>
-          <a:bodyPr wrap="square" lIns="0" tIns="0" rIns="0" bIns="0" rtlCol="0" anchor="t"/>
-          <a:lstStyle/>
-          <a:p>
-            <a:pPr indent="0" marL="0">
-              <a:lnSpc>
-                <a:spcPts val="1200"/>
-              </a:lnSpc>
-              <a:buNone/>
-            </a:pPr>
-            <a:r>
-              <a:rPr lang="en-US" sz="1050" dirty="0">
-                <a:solidFill>
-                  <a:srgbClr val="B4B7BD"/>
-                </a:solidFill>
-                <a:latin typeface="Calibri" pitchFamily="34" charset="0"/>
-                <a:ea typeface="Calibri" pitchFamily="34" charset="-122"/>
-                <a:cs typeface="Calibri" pitchFamily="34" charset="-120"/>
-              </a:rPr>
-              <a:t>A verdict is reached; low risk auto-closes</a:t>
-            </a:r>
-            <a:endParaRPr lang="en-US" sz="1050" dirty="0"/>
-          </a:p>
-        </p:txBody>
-      </p:sp>
-      <p:sp>
-        <p:nvSpPr>
-          <p:cNvPr id="25" name="Shape 23"/>
-          <p:cNvSpPr/>
-          <p:nvPr/>
-        </p:nvSpPr>
-        <p:spPr>
-          <a:xfrm>
-            <a:off x="548640" y="4709160"/>
-            <a:ext cx="5349240" cy="548640"/>
-          </a:xfrm>
-          <a:prstGeom prst="roundRect">
-            <a:avLst>
-              <a:gd name="adj" fmla="val 8333"/>
-            </a:avLst>
-          </a:prstGeom>
-          <a:solidFill>
-            <a:srgbClr val="15171B"/>
-          </a:solidFill>
-          <a:ln w="12700">
-            <a:solidFill>
-              <a:srgbClr val="15171B"/>
-            </a:solidFill>
-            <a:prstDash val="solid"/>
-          </a:ln>
-        </p:spPr>
-      </p:sp>
-      <p:sp>
-        <p:nvSpPr>
-          <p:cNvPr id="26" name="Shape 24"/>
-          <p:cNvSpPr/>
-          <p:nvPr/>
-        </p:nvSpPr>
-        <p:spPr>
-          <a:xfrm>
-            <a:off x="749808" y="4828032"/>
-            <a:ext cx="310896" cy="310896"/>
-          </a:xfrm>
-          <a:prstGeom prst="roundRect">
-            <a:avLst>
-              <a:gd name="adj" fmla="val 26471"/>
-            </a:avLst>
-          </a:prstGeom>
-          <a:solidFill>
-            <a:srgbClr val="3FB950"/>
-          </a:solidFill>
-          <a:ln w="12700">
-            <a:solidFill>
-              <a:srgbClr val="3FB950"/>
-            </a:solidFill>
-            <a:prstDash val="solid"/>
-          </a:ln>
-        </p:spPr>
-      </p:sp>
-      <p:sp>
-        <p:nvSpPr>
-          <p:cNvPr id="27" name="Text 25"/>
-          <p:cNvSpPr/>
-          <p:nvPr/>
-        </p:nvSpPr>
-        <p:spPr>
-          <a:xfrm>
-            <a:off x="749808" y="4828032"/>
-            <a:ext cx="310896" cy="310896"/>
-          </a:xfrm>
-          <a:prstGeom prst="rect">
-            <a:avLst/>
-          </a:prstGeom>
-          <a:noFill/>
-          <a:ln/>
-        </p:spPr>
-        <p:txBody>
-          <a:bodyPr wrap="square" lIns="0" tIns="0" rIns="0" bIns="0" rtlCol="0" anchor="ctr"/>
-          <a:lstStyle/>
-          <a:p>
-            <a:pPr algn="ctr" indent="0" marL="0">
-              <a:buNone/>
-            </a:pPr>
-            <a:r>
-              <a:rPr lang="en-US" sz="1300" b="1" dirty="0">
-                <a:solidFill>
-                  <a:srgbClr val="FFFFFF"/>
-                </a:solidFill>
-                <a:latin typeface="Calibri" pitchFamily="34" charset="0"/>
-                <a:ea typeface="Calibri" pitchFamily="34" charset="-122"/>
-                <a:cs typeface="Calibri" pitchFamily="34" charset="-120"/>
-              </a:rPr>
-              <a:t>6</a:t>
-            </a:r>
-            <a:endParaRPr lang="en-US" sz="1300" dirty="0"/>
-          </a:p>
-        </p:txBody>
-      </p:sp>
-      <p:sp>
-        <p:nvSpPr>
-          <p:cNvPr id="28" name="Text 26"/>
-          <p:cNvSpPr/>
-          <p:nvPr/>
-        </p:nvSpPr>
-        <p:spPr>
-          <a:xfrm>
-            <a:off x="1225296" y="4846320"/>
-            <a:ext cx="4453128" cy="329184"/>
-          </a:xfrm>
-          <a:prstGeom prst="rect">
-            <a:avLst/>
-          </a:prstGeom>
-          <a:noFill/>
-          <a:ln/>
-        </p:spPr>
-        <p:txBody>
-          <a:bodyPr wrap="square" lIns="0" tIns="0" rIns="0" bIns="0" rtlCol="0" anchor="t"/>
-          <a:lstStyle/>
-          <a:p>
-            <a:pPr indent="0" marL="0">
-              <a:lnSpc>
-                <a:spcPts val="1200"/>
-              </a:lnSpc>
-              <a:buNone/>
-            </a:pPr>
-            <a:r>
-              <a:rPr lang="en-US" sz="1050" dirty="0">
-                <a:solidFill>
-                  <a:srgbClr val="B4B7BD"/>
-                </a:solidFill>
-                <a:latin typeface="Calibri" pitchFamily="34" charset="0"/>
-                <a:ea typeface="Calibri" pitchFamily="34" charset="-122"/>
-                <a:cs typeface="Calibri" pitchFamily="34" charset="-120"/>
-              </a:rPr>
-              <a:t>Investigation shows catalog risk and both governance counts</a:t>
-            </a:r>
-            <a:endParaRPr lang="en-US" sz="1050" dirty="0"/>
-          </a:p>
-        </p:txBody>
-      </p:sp>
-      <p:sp>
-        <p:nvSpPr>
-          <p:cNvPr id="29" name="Shape 27"/>
-          <p:cNvSpPr/>
-          <p:nvPr/>
-        </p:nvSpPr>
-        <p:spPr>
-          <a:xfrm>
-            <a:off x="6263640" y="1417320"/>
-            <a:ext cx="5349240" cy="548640"/>
-          </a:xfrm>
-          <a:prstGeom prst="roundRect">
-            <a:avLst>
-              <a:gd name="adj" fmla="val 8333"/>
-            </a:avLst>
-          </a:prstGeom>
-          <a:solidFill>
-            <a:srgbClr val="15171B"/>
-          </a:solidFill>
-          <a:ln w="12700">
-            <a:solidFill>
-              <a:srgbClr val="15171B"/>
-            </a:solidFill>
-            <a:prstDash val="solid"/>
-          </a:ln>
-        </p:spPr>
-      </p:sp>
-      <p:sp>
-        <p:nvSpPr>
-          <p:cNvPr id="30" name="Shape 28"/>
-          <p:cNvSpPr/>
-          <p:nvPr/>
-        </p:nvSpPr>
-        <p:spPr>
-          <a:xfrm>
-            <a:off x="6464808" y="1536192"/>
-            <a:ext cx="310896" cy="310896"/>
-          </a:xfrm>
-          <a:prstGeom prst="roundRect">
-            <a:avLst>
-              <a:gd name="adj" fmla="val 26471"/>
-            </a:avLst>
-          </a:prstGeom>
-          <a:solidFill>
-            <a:srgbClr val="3FB950"/>
-          </a:solidFill>
-          <a:ln w="12700">
-            <a:solidFill>
-              <a:srgbClr val="3FB950"/>
-            </a:solidFill>
-            <a:prstDash val="solid"/>
-          </a:ln>
-        </p:spPr>
-      </p:sp>
-      <p:sp>
-        <p:nvSpPr>
-          <p:cNvPr id="31" name="Text 29"/>
-          <p:cNvSpPr/>
-          <p:nvPr/>
-        </p:nvSpPr>
-        <p:spPr>
-          <a:xfrm>
-            <a:off x="6464808" y="1536192"/>
-            <a:ext cx="310896" cy="310896"/>
-          </a:xfrm>
-          <a:prstGeom prst="rect">
-            <a:avLst/>
-          </a:prstGeom>
-          <a:noFill/>
-          <a:ln/>
-        </p:spPr>
-        <p:txBody>
-          <a:bodyPr wrap="square" lIns="0" tIns="0" rIns="0" bIns="0" rtlCol="0" anchor="ctr"/>
-          <a:lstStyle/>
-          <a:p>
-            <a:pPr algn="ctr" indent="0" marL="0">
-              <a:buNone/>
-            </a:pPr>
-            <a:r>
-              <a:rPr lang="en-US" sz="1300" b="1" dirty="0">
-                <a:solidFill>
-                  <a:srgbClr val="FFFFFF"/>
-                </a:solidFill>
-                <a:latin typeface="Calibri" pitchFamily="34" charset="0"/>
-                <a:ea typeface="Calibri" pitchFamily="34" charset="-122"/>
-                <a:cs typeface="Calibri" pitchFamily="34" charset="-120"/>
-              </a:rPr>
-              <a:t>7</a:t>
-            </a:r>
-            <a:endParaRPr lang="en-US" sz="1300" dirty="0"/>
-          </a:p>
-        </p:txBody>
-      </p:sp>
-      <p:sp>
-        <p:nvSpPr>
-          <p:cNvPr id="32" name="Text 30"/>
-          <p:cNvSpPr/>
-          <p:nvPr/>
-        </p:nvSpPr>
-        <p:spPr>
-          <a:xfrm>
-            <a:off x="6940296" y="1554480"/>
-            <a:ext cx="4453128" cy="329184"/>
-          </a:xfrm>
-          <a:prstGeom prst="rect">
-            <a:avLst/>
-          </a:prstGeom>
-          <a:noFill/>
-          <a:ln/>
-        </p:spPr>
-        <p:txBody>
-          <a:bodyPr wrap="square" lIns="0" tIns="0" rIns="0" bIns="0" rtlCol="0" anchor="t"/>
-          <a:lstStyle/>
-          <a:p>
-            <a:pPr indent="0" marL="0">
-              <a:lnSpc>
-                <a:spcPts val="1200"/>
-              </a:lnSpc>
-              <a:buNone/>
-            </a:pPr>
-            <a:r>
-              <a:rPr lang="en-US" sz="1050" dirty="0">
-                <a:solidFill>
-                  <a:srgbClr val="B4B7BD"/>
-                </a:solidFill>
-                <a:latin typeface="Calibri" pitchFamily="34" charset="0"/>
-                <a:ea typeface="Calibri" pitchFamily="34" charset="-122"/>
-                <a:cs typeface="Calibri" pitchFamily="34" charset="-120"/>
-              </a:rPr>
-              <a:t>Response parks on approval; blocklist untouched until approved</a:t>
-            </a:r>
-            <a:endParaRPr lang="en-US" sz="1050" dirty="0"/>
-          </a:p>
-        </p:txBody>
-      </p:sp>
-      <p:sp>
-        <p:nvSpPr>
-          <p:cNvPr id="33" name="Shape 31"/>
-          <p:cNvSpPr/>
-          <p:nvPr/>
-        </p:nvSpPr>
-        <p:spPr>
-          <a:xfrm>
-            <a:off x="6263640" y="2075688"/>
-            <a:ext cx="5349240" cy="548640"/>
-          </a:xfrm>
-          <a:prstGeom prst="roundRect">
-            <a:avLst>
-              <a:gd name="adj" fmla="val 8333"/>
-            </a:avLst>
-          </a:prstGeom>
-          <a:solidFill>
-            <a:srgbClr val="15171B"/>
-          </a:solidFill>
-          <a:ln w="12700">
-            <a:solidFill>
-              <a:srgbClr val="15171B"/>
-            </a:solidFill>
-            <a:prstDash val="solid"/>
-          </a:ln>
-        </p:spPr>
-      </p:sp>
-      <p:sp>
-        <p:nvSpPr>
-          <p:cNvPr id="34" name="Shape 32"/>
-          <p:cNvSpPr/>
-          <p:nvPr/>
-        </p:nvSpPr>
-        <p:spPr>
-          <a:xfrm>
-            <a:off x="6464808" y="2194560"/>
-            <a:ext cx="310896" cy="310896"/>
-          </a:xfrm>
-          <a:prstGeom prst="roundRect">
-            <a:avLst>
-              <a:gd name="adj" fmla="val 26471"/>
-            </a:avLst>
-          </a:prstGeom>
-          <a:solidFill>
-            <a:srgbClr val="3FB950"/>
-          </a:solidFill>
-          <a:ln w="12700">
-            <a:solidFill>
-              <a:srgbClr val="3FB950"/>
-            </a:solidFill>
-            <a:prstDash val="solid"/>
-          </a:ln>
-        </p:spPr>
-      </p:sp>
-      <p:sp>
-        <p:nvSpPr>
-          <p:cNvPr id="35" name="Text 33"/>
-          <p:cNvSpPr/>
-          <p:nvPr/>
-        </p:nvSpPr>
-        <p:spPr>
-          <a:xfrm>
-            <a:off x="6464808" y="2194560"/>
-            <a:ext cx="310896" cy="310896"/>
-          </a:xfrm>
-          <a:prstGeom prst="rect">
-            <a:avLst/>
-          </a:prstGeom>
-          <a:noFill/>
-          <a:ln/>
-        </p:spPr>
-        <p:txBody>
-          <a:bodyPr wrap="square" lIns="0" tIns="0" rIns="0" bIns="0" rtlCol="0" anchor="ctr"/>
-          <a:lstStyle/>
-          <a:p>
-            <a:pPr algn="ctr" indent="0" marL="0">
-              <a:buNone/>
-            </a:pPr>
-            <a:r>
-              <a:rPr lang="en-US" sz="1300" b="1" dirty="0">
-                <a:solidFill>
-                  <a:srgbClr val="FFFFFF"/>
-                </a:solidFill>
-                <a:latin typeface="Calibri" pitchFamily="34" charset="0"/>
-                <a:ea typeface="Calibri" pitchFamily="34" charset="-122"/>
-                <a:cs typeface="Calibri" pitchFamily="34" charset="-120"/>
-              </a:rPr>
-              <a:t>8</a:t>
-            </a:r>
-            <a:endParaRPr lang="en-US" sz="1300" dirty="0"/>
-          </a:p>
-        </p:txBody>
-      </p:sp>
-      <p:sp>
-        <p:nvSpPr>
-          <p:cNvPr id="36" name="Text 34"/>
-          <p:cNvSpPr/>
-          <p:nvPr/>
-        </p:nvSpPr>
-        <p:spPr>
-          <a:xfrm>
-            <a:off x="6940296" y="2212848"/>
-            <a:ext cx="4453128" cy="329184"/>
-          </a:xfrm>
-          <a:prstGeom prst="rect">
-            <a:avLst/>
-          </a:prstGeom>
-          <a:noFill/>
-          <a:ln/>
-        </p:spPr>
-        <p:txBody>
-          <a:bodyPr wrap="square" lIns="0" tIns="0" rIns="0" bIns="0" rtlCol="0" anchor="t"/>
-          <a:lstStyle/>
-          <a:p>
-            <a:pPr indent="0" marL="0">
-              <a:lnSpc>
-                <a:spcPts val="1200"/>
-              </a:lnSpc>
-              <a:buNone/>
-            </a:pPr>
-            <a:r>
-              <a:rPr lang="en-US" sz="1050" dirty="0">
-                <a:solidFill>
-                  <a:srgbClr val="B4B7BD"/>
-                </a:solidFill>
-                <a:latin typeface="Calibri" pitchFamily="34" charset="0"/>
-                <a:ea typeface="Calibri" pitchFamily="34" charset="-122"/>
-                <a:cs typeface="Calibri" pitchFamily="34" charset="-120"/>
-              </a:rPr>
-              <a:t>MCP audit returns servers at or above the threshold</a:t>
-            </a:r>
-            <a:endParaRPr lang="en-US" sz="1050" dirty="0"/>
-          </a:p>
-        </p:txBody>
-      </p:sp>
-      <p:sp>
-        <p:nvSpPr>
-          <p:cNvPr id="37" name="Shape 35"/>
-          <p:cNvSpPr/>
-          <p:nvPr/>
-        </p:nvSpPr>
-        <p:spPr>
-          <a:xfrm>
-            <a:off x="6263640" y="2734056"/>
-            <a:ext cx="5349240" cy="548640"/>
-          </a:xfrm>
-          <a:prstGeom prst="roundRect">
-            <a:avLst>
-              <a:gd name="adj" fmla="val 8333"/>
-            </a:avLst>
-          </a:prstGeom>
-          <a:solidFill>
-            <a:srgbClr val="15171B"/>
-          </a:solidFill>
-          <a:ln w="12700">
-            <a:solidFill>
-              <a:srgbClr val="15171B"/>
-            </a:solidFill>
-            <a:prstDash val="solid"/>
-          </a:ln>
-        </p:spPr>
-      </p:sp>
-      <p:sp>
-        <p:nvSpPr>
-          <p:cNvPr id="38" name="Shape 36"/>
-          <p:cNvSpPr/>
-          <p:nvPr/>
-        </p:nvSpPr>
-        <p:spPr>
-          <a:xfrm>
-            <a:off x="6464808" y="2852928"/>
-            <a:ext cx="310896" cy="310896"/>
-          </a:xfrm>
-          <a:prstGeom prst="roundRect">
-            <a:avLst>
-              <a:gd name="adj" fmla="val 26471"/>
-            </a:avLst>
-          </a:prstGeom>
-          <a:solidFill>
-            <a:srgbClr val="3FB950"/>
-          </a:solidFill>
-          <a:ln w="12700">
-            <a:solidFill>
-              <a:srgbClr val="3FB950"/>
-            </a:solidFill>
-            <a:prstDash val="solid"/>
-          </a:ln>
-        </p:spPr>
-      </p:sp>
-      <p:sp>
-        <p:nvSpPr>
-          <p:cNvPr id="39" name="Text 37"/>
-          <p:cNvSpPr/>
-          <p:nvPr/>
-        </p:nvSpPr>
-        <p:spPr>
-          <a:xfrm>
-            <a:off x="6464808" y="2852928"/>
-            <a:ext cx="310896" cy="310896"/>
-          </a:xfrm>
-          <a:prstGeom prst="rect">
-            <a:avLst/>
-          </a:prstGeom>
-          <a:noFill/>
-          <a:ln/>
-        </p:spPr>
-        <p:txBody>
-          <a:bodyPr wrap="square" lIns="0" tIns="0" rIns="0" bIns="0" rtlCol="0" anchor="ctr"/>
-          <a:lstStyle/>
-          <a:p>
-            <a:pPr algn="ctr" indent="0" marL="0">
-              <a:buNone/>
-            </a:pPr>
-            <a:r>
-              <a:rPr lang="en-US" sz="1300" b="1" dirty="0">
-                <a:solidFill>
-                  <a:srgbClr val="FFFFFF"/>
-                </a:solidFill>
-                <a:latin typeface="Calibri" pitchFamily="34" charset="0"/>
-                <a:ea typeface="Calibri" pitchFamily="34" charset="-122"/>
-                <a:cs typeface="Calibri" pitchFamily="34" charset="-120"/>
-              </a:rPr>
-              <a:t>9</a:t>
-            </a:r>
-            <a:endParaRPr lang="en-US" sz="1300" dirty="0"/>
-          </a:p>
-        </p:txBody>
-      </p:sp>
-      <p:sp>
-        <p:nvSpPr>
-          <p:cNvPr id="40" name="Text 38"/>
-          <p:cNvSpPr/>
-          <p:nvPr/>
-        </p:nvSpPr>
-        <p:spPr>
-          <a:xfrm>
-            <a:off x="6940296" y="2871216"/>
-            <a:ext cx="4453128" cy="329184"/>
-          </a:xfrm>
-          <a:prstGeom prst="rect">
-            <a:avLst/>
-          </a:prstGeom>
-          <a:noFill/>
-          <a:ln/>
-        </p:spPr>
-        <p:txBody>
-          <a:bodyPr wrap="square" lIns="0" tIns="0" rIns="0" bIns="0" rtlCol="0" anchor="t"/>
-          <a:lstStyle/>
-          <a:p>
-            <a:pPr indent="0" marL="0">
-              <a:lnSpc>
-                <a:spcPts val="1200"/>
-              </a:lnSpc>
-              <a:buNone/>
-            </a:pPr>
-            <a:r>
-              <a:rPr lang="en-US" sz="1050" dirty="0">
-                <a:solidFill>
-                  <a:srgbClr val="B4B7BD"/>
-                </a:solidFill>
-                <a:latin typeface="Calibri" pitchFamily="34" charset="0"/>
-                <a:ea typeface="Calibri" pitchFamily="34" charset="-122"/>
-                <a:cs typeface="Calibri" pitchFamily="34" charset="-120"/>
-              </a:rPr>
-              <a:t>Tracker List is created and fills with endpoints</a:t>
-            </a:r>
-            <a:endParaRPr lang="en-US" sz="1050" dirty="0"/>
-          </a:p>
-        </p:txBody>
-      </p:sp>
-      <p:sp>
-        <p:nvSpPr>
-          <p:cNvPr id="41" name="Shape 39"/>
-          <p:cNvSpPr/>
-          <p:nvPr/>
-        </p:nvSpPr>
-        <p:spPr>
-          <a:xfrm>
-            <a:off x="6263640" y="3392424"/>
-            <a:ext cx="5349240" cy="548640"/>
-          </a:xfrm>
-          <a:prstGeom prst="roundRect">
-            <a:avLst>
-              <a:gd name="adj" fmla="val 8333"/>
-            </a:avLst>
-          </a:prstGeom>
-          <a:solidFill>
-            <a:srgbClr val="15171B"/>
-          </a:solidFill>
-          <a:ln w="12700">
-            <a:solidFill>
-              <a:srgbClr val="15171B"/>
-            </a:solidFill>
-            <a:prstDash val="solid"/>
-          </a:ln>
-        </p:spPr>
-      </p:sp>
-      <p:sp>
-        <p:nvSpPr>
-          <p:cNvPr id="42" name="Shape 40"/>
-          <p:cNvSpPr/>
-          <p:nvPr/>
-        </p:nvSpPr>
-        <p:spPr>
-          <a:xfrm>
-            <a:off x="6464808" y="3511296"/>
-            <a:ext cx="310896" cy="310896"/>
-          </a:xfrm>
-          <a:prstGeom prst="roundRect">
-            <a:avLst>
-              <a:gd name="adj" fmla="val 26471"/>
-            </a:avLst>
-          </a:prstGeom>
-          <a:solidFill>
-            <a:srgbClr val="3FB950"/>
-          </a:solidFill>
-          <a:ln w="12700">
-            <a:solidFill>
-              <a:srgbClr val="3FB950"/>
-            </a:solidFill>
-            <a:prstDash val="solid"/>
-          </a:ln>
-        </p:spPr>
-      </p:sp>
-      <p:sp>
-        <p:nvSpPr>
-          <p:cNvPr id="43" name="Text 41"/>
-          <p:cNvSpPr/>
-          <p:nvPr/>
-        </p:nvSpPr>
-        <p:spPr>
-          <a:xfrm>
-            <a:off x="6464808" y="3511296"/>
-            <a:ext cx="310896" cy="310896"/>
-          </a:xfrm>
-          <a:prstGeom prst="rect">
-            <a:avLst/>
-          </a:prstGeom>
-          <a:noFill/>
-          <a:ln/>
-        </p:spPr>
-        <p:txBody>
-          <a:bodyPr wrap="square" lIns="0" tIns="0" rIns="0" bIns="0" rtlCol="0" anchor="ctr"/>
-          <a:lstStyle/>
-          <a:p>
-            <a:pPr algn="ctr" indent="0" marL="0">
-              <a:buNone/>
-            </a:pPr>
-            <a:r>
-              <a:rPr lang="en-US" sz="1300" b="1" dirty="0">
-                <a:solidFill>
-                  <a:srgbClr val="FFFFFF"/>
-                </a:solidFill>
-                <a:latin typeface="Calibri" pitchFamily="34" charset="0"/>
-                <a:ea typeface="Calibri" pitchFamily="34" charset="-122"/>
-                <a:cs typeface="Calibri" pitchFamily="34" charset="-120"/>
-              </a:rPr>
-              <a:t>10</a:t>
-            </a:r>
-            <a:endParaRPr lang="en-US" sz="1300" dirty="0"/>
-          </a:p>
-        </p:txBody>
-      </p:sp>
-      <p:sp>
-        <p:nvSpPr>
-          <p:cNvPr id="44" name="Text 42"/>
-          <p:cNvSpPr/>
-          <p:nvPr/>
-        </p:nvSpPr>
-        <p:spPr>
-          <a:xfrm>
-            <a:off x="6940296" y="3529584"/>
-            <a:ext cx="4453128" cy="329184"/>
-          </a:xfrm>
-          <a:prstGeom prst="rect">
-            <a:avLst/>
-          </a:prstGeom>
-          <a:noFill/>
-          <a:ln/>
-        </p:spPr>
-        <p:txBody>
-          <a:bodyPr wrap="square" lIns="0" tIns="0" rIns="0" bIns="0" rtlCol="0" anchor="t"/>
-          <a:lstStyle/>
-          <a:p>
-            <a:pPr indent="0" marL="0">
-              <a:lnSpc>
-                <a:spcPts val="1200"/>
-              </a:lnSpc>
-              <a:buNone/>
-            </a:pPr>
-            <a:r>
-              <a:rPr lang="en-US" sz="1050" dirty="0">
-                <a:solidFill>
-                  <a:srgbClr val="B4B7BD"/>
-                </a:solidFill>
-                <a:latin typeface="Calibri" pitchFamily="34" charset="0"/>
-                <a:ea typeface="Calibri" pitchFamily="34" charset="-122"/>
-                <a:cs typeface="Calibri" pitchFamily="34" charset="-120"/>
-              </a:rPr>
-              <a:t>Scan marks only due, connected endpoints; re-run is a no-op</a:t>
-            </a:r>
-            <a:endParaRPr lang="en-US" sz="1050" dirty="0"/>
-          </a:p>
-        </p:txBody>
-      </p:sp>
-      <p:sp>
-        <p:nvSpPr>
-          <p:cNvPr id="45" name="Shape 43"/>
-          <p:cNvSpPr/>
-          <p:nvPr/>
-        </p:nvSpPr>
-        <p:spPr>
-          <a:xfrm>
-            <a:off x="6263640" y="4050792"/>
-            <a:ext cx="5349240" cy="548640"/>
-          </a:xfrm>
-          <a:prstGeom prst="roundRect">
-            <a:avLst>
-              <a:gd name="adj" fmla="val 8333"/>
-            </a:avLst>
-          </a:prstGeom>
-          <a:solidFill>
-            <a:srgbClr val="15171B"/>
-          </a:solidFill>
-          <a:ln w="12700">
-            <a:solidFill>
-              <a:srgbClr val="15171B"/>
-            </a:solidFill>
-            <a:prstDash val="solid"/>
-          </a:ln>
-        </p:spPr>
-      </p:sp>
-      <p:sp>
-        <p:nvSpPr>
-          <p:cNvPr id="46" name="Shape 44"/>
-          <p:cNvSpPr/>
-          <p:nvPr/>
-        </p:nvSpPr>
-        <p:spPr>
-          <a:xfrm>
-            <a:off x="6464808" y="4169664"/>
-            <a:ext cx="310896" cy="310896"/>
-          </a:xfrm>
-          <a:prstGeom prst="roundRect">
-            <a:avLst>
-              <a:gd name="adj" fmla="val 26471"/>
-            </a:avLst>
-          </a:prstGeom>
-          <a:solidFill>
-            <a:srgbClr val="3FB950"/>
-          </a:solidFill>
-          <a:ln w="12700">
-            <a:solidFill>
-              <a:srgbClr val="3FB950"/>
-            </a:solidFill>
-            <a:prstDash val="solid"/>
-          </a:ln>
-        </p:spPr>
-      </p:sp>
-      <p:sp>
-        <p:nvSpPr>
-          <p:cNvPr id="47" name="Text 45"/>
-          <p:cNvSpPr/>
-          <p:nvPr/>
-        </p:nvSpPr>
-        <p:spPr>
-          <a:xfrm>
-            <a:off x="6464808" y="4169664"/>
-            <a:ext cx="310896" cy="310896"/>
-          </a:xfrm>
-          <a:prstGeom prst="rect">
-            <a:avLst/>
-          </a:prstGeom>
-          <a:noFill/>
-          <a:ln/>
-        </p:spPr>
-        <p:txBody>
-          <a:bodyPr wrap="square" lIns="0" tIns="0" rIns="0" bIns="0" rtlCol="0" anchor="ctr"/>
-          <a:lstStyle/>
-          <a:p>
-            <a:pPr algn="ctr" indent="0" marL="0">
-              <a:buNone/>
-            </a:pPr>
-            <a:r>
-              <a:rPr lang="en-US" sz="1300" b="1" dirty="0">
-                <a:solidFill>
-                  <a:srgbClr val="FFFFFF"/>
-                </a:solidFill>
-                <a:latin typeface="Calibri" pitchFamily="34" charset="0"/>
-                <a:ea typeface="Calibri" pitchFamily="34" charset="-122"/>
-                <a:cs typeface="Calibri" pitchFamily="34" charset="-120"/>
-              </a:rPr>
-              <a:t>11</a:t>
-            </a:r>
-            <a:endParaRPr lang="en-US" sz="1300" dirty="0"/>
-          </a:p>
-        </p:txBody>
-      </p:sp>
-      <p:sp>
-        <p:nvSpPr>
-          <p:cNvPr id="48" name="Text 46"/>
-          <p:cNvSpPr/>
-          <p:nvPr/>
-        </p:nvSpPr>
-        <p:spPr>
-          <a:xfrm>
-            <a:off x="6940296" y="4187952"/>
-            <a:ext cx="4453128" cy="329184"/>
-          </a:xfrm>
-          <a:prstGeom prst="rect">
-            <a:avLst/>
-          </a:prstGeom>
-          <a:noFill/>
-          <a:ln/>
-        </p:spPr>
-        <p:txBody>
-          <a:bodyPr wrap="square" lIns="0" tIns="0" rIns="0" bIns="0" rtlCol="0" anchor="t"/>
-          <a:lstStyle/>
-          <a:p>
-            <a:pPr indent="0" marL="0">
-              <a:lnSpc>
-                <a:spcPts val="1200"/>
-              </a:lnSpc>
-              <a:buNone/>
-            </a:pPr>
-            <a:r>
-              <a:rPr lang="en-US" sz="1050" dirty="0">
-                <a:solidFill>
-                  <a:srgbClr val="B4B7BD"/>
-                </a:solidFill>
-                <a:latin typeface="Calibri" pitchFamily="34" charset="0"/>
-                <a:ea typeface="Calibri" pitchFamily="34" charset="-122"/>
-                <a:cs typeface="Calibri" pitchFamily="34" charset="-120"/>
-              </a:rPr>
-              <a:t>Library queries run and return results</a:t>
-            </a:r>
-            <a:endParaRPr lang="en-US" sz="1050" dirty="0"/>
-          </a:p>
-        </p:txBody>
-      </p:sp>
-      <p:sp>
-        <p:nvSpPr>
-          <p:cNvPr id="49" name="Shape 47"/>
-          <p:cNvSpPr/>
-          <p:nvPr/>
-        </p:nvSpPr>
-        <p:spPr>
-          <a:xfrm>
-            <a:off x="6263640" y="4709160"/>
-            <a:ext cx="5349240" cy="548640"/>
-          </a:xfrm>
-          <a:prstGeom prst="roundRect">
-            <a:avLst>
-              <a:gd name="adj" fmla="val 8333"/>
-            </a:avLst>
-          </a:prstGeom>
-          <a:solidFill>
-            <a:srgbClr val="15171B"/>
-          </a:solidFill>
-          <a:ln w="12700">
-            <a:solidFill>
-              <a:srgbClr val="15171B"/>
-            </a:solidFill>
-            <a:prstDash val="solid"/>
-          </a:ln>
-        </p:spPr>
-      </p:sp>
-      <p:sp>
-        <p:nvSpPr>
-          <p:cNvPr id="50" name="Shape 48"/>
-          <p:cNvSpPr/>
-          <p:nvPr/>
-        </p:nvSpPr>
-        <p:spPr>
-          <a:xfrm>
-            <a:off x="6464808" y="4828032"/>
-            <a:ext cx="310896" cy="310896"/>
-          </a:xfrm>
-          <a:prstGeom prst="roundRect">
-            <a:avLst>
-              <a:gd name="adj" fmla="val 26471"/>
-            </a:avLst>
-          </a:prstGeom>
-          <a:solidFill>
-            <a:srgbClr val="3FB950"/>
-          </a:solidFill>
-          <a:ln w="12700">
-            <a:solidFill>
-              <a:srgbClr val="3FB950"/>
-            </a:solidFill>
-            <a:prstDash val="solid"/>
-          </a:ln>
-        </p:spPr>
-      </p:sp>
-      <p:sp>
-        <p:nvSpPr>
-          <p:cNvPr id="51" name="Text 49"/>
-          <p:cNvSpPr/>
-          <p:nvPr/>
-        </p:nvSpPr>
-        <p:spPr>
-          <a:xfrm>
-            <a:off x="6464808" y="4828032"/>
-            <a:ext cx="310896" cy="310896"/>
-          </a:xfrm>
-          <a:prstGeom prst="rect">
-            <a:avLst/>
-          </a:prstGeom>
-          <a:noFill/>
-          <a:ln/>
-        </p:spPr>
-        <p:txBody>
-          <a:bodyPr wrap="square" lIns="0" tIns="0" rIns="0" bIns="0" rtlCol="0" anchor="ctr"/>
-          <a:lstStyle/>
-          <a:p>
-            <a:pPr algn="ctr" indent="0" marL="0">
-              <a:buNone/>
-            </a:pPr>
-            <a:r>
-              <a:rPr lang="en-US" sz="1300" b="1" dirty="0">
-                <a:solidFill>
-                  <a:srgbClr val="FFFFFF"/>
-                </a:solidFill>
-                <a:latin typeface="Calibri" pitchFamily="34" charset="0"/>
-                <a:ea typeface="Calibri" pitchFamily="34" charset="-122"/>
-                <a:cs typeface="Calibri" pitchFamily="34" charset="-120"/>
-              </a:rPr>
-              <a:t>12</a:t>
-            </a:r>
-            <a:endParaRPr lang="en-US" sz="1300" dirty="0"/>
-          </a:p>
-        </p:txBody>
-      </p:sp>
-      <p:sp>
-        <p:nvSpPr>
-          <p:cNvPr id="52" name="Text 50"/>
-          <p:cNvSpPr/>
-          <p:nvPr/>
-        </p:nvSpPr>
-        <p:spPr>
-          <a:xfrm>
-            <a:off x="6940296" y="4846320"/>
-            <a:ext cx="4453128" cy="329184"/>
-          </a:xfrm>
-          <a:prstGeom prst="rect">
-            <a:avLst/>
-          </a:prstGeom>
-          <a:noFill/>
-          <a:ln/>
-        </p:spPr>
-        <p:txBody>
-          <a:bodyPr wrap="square" lIns="0" tIns="0" rIns="0" bIns="0" rtlCol="0" anchor="t"/>
-          <a:lstStyle/>
-          <a:p>
-            <a:pPr indent="0" marL="0">
-              <a:lnSpc>
-                <a:spcPts val="1200"/>
-              </a:lnSpc>
-              <a:buNone/>
-            </a:pPr>
-            <a:r>
-              <a:rPr lang="en-US" sz="1050" dirty="0">
-                <a:solidFill>
-                  <a:srgbClr val="B4B7BD"/>
-                </a:solidFill>
-                <a:latin typeface="Calibri" pitchFamily="34" charset="0"/>
-                <a:ea typeface="Calibri" pitchFamily="34" charset="-122"/>
-                <a:cs typeface="Calibri" pitchFamily="34" charset="-120"/>
-              </a:rPr>
-              <a:t>Simulated counts match the summary exactly</a:t>
-            </a:r>
-            <a:endParaRPr lang="en-US" sz="1050" dirty="0"/>
-          </a:p>
-        </p:txBody>
-      </p:sp>
-      <p:sp>
-        <p:nvSpPr>
-          <p:cNvPr id="53" name="Shape 51"/>
-          <p:cNvSpPr/>
-          <p:nvPr/>
-        </p:nvSpPr>
-        <p:spPr>
-          <a:xfrm>
-            <a:off x="548640" y="5440680"/>
-            <a:ext cx="11064240" cy="685800"/>
-          </a:xfrm>
-          <a:prstGeom prst="roundRect">
-            <a:avLst>
-              <a:gd name="adj" fmla="val 6667"/>
-            </a:avLst>
-          </a:prstGeom>
-          <a:solidFill>
-            <a:srgbClr val="1C2026"/>
-          </a:solidFill>
-          <a:ln w="12700">
-            <a:solidFill>
-              <a:srgbClr val="1C2026"/>
-            </a:solidFill>
-            <a:prstDash val="solid"/>
-          </a:ln>
-        </p:spPr>
-      </p:sp>
-      <p:sp>
-        <p:nvSpPr>
-          <p:cNvPr id="54" name="Text 52"/>
-          <p:cNvSpPr/>
-          <p:nvPr/>
-        </p:nvSpPr>
-        <p:spPr>
-          <a:xfrm>
-            <a:off x="859536" y="5623560"/>
-            <a:ext cx="7315200" cy="292608"/>
-          </a:xfrm>
-          <a:prstGeom prst="rect">
-            <a:avLst/>
-          </a:prstGeom>
-          <a:noFill/>
-          <a:ln/>
-        </p:spPr>
-        <p:txBody>
-          <a:bodyPr wrap="square" lIns="0" tIns="0" rIns="0" bIns="0" rtlCol="0" anchor="t"/>
-          <a:lstStyle/>
-          <a:p>
-            <a:pPr indent="0" marL="0">
-              <a:buNone/>
-            </a:pPr>
-            <a:r>
-              <a:rPr lang="en-US" sz="1300" b="1" i="1" dirty="0">
-                <a:solidFill>
-                  <a:srgbClr val="3FB950"/>
-                </a:solidFill>
-                <a:latin typeface="Calibri" pitchFamily="34" charset="0"/>
-                <a:ea typeface="Calibri" pitchFamily="34" charset="-122"/>
-                <a:cs typeface="Calibri" pitchFamily="34" charset="-120"/>
-              </a:rPr>
-              <a:t>All twelve green — the pack is ready for production use.</a:t>
-            </a:r>
-            <a:endParaRPr lang="en-US" sz="1300" dirty="0"/>
-          </a:p>
-        </p:txBody>
-      </p:sp>
-      <p:sp>
-        <p:nvSpPr>
-          <p:cNvPr id="55" name="Text 53"/>
-          <p:cNvSpPr/>
-          <p:nvPr/>
-        </p:nvSpPr>
-        <p:spPr>
-          <a:xfrm>
-            <a:off x="548640" y="6263640"/>
-            <a:ext cx="11064240" cy="274320"/>
-          </a:xfrm>
-          <a:prstGeom prst="rect">
-            <a:avLst/>
-          </a:prstGeom>
-          <a:noFill/>
-          <a:ln/>
-        </p:spPr>
-        <p:txBody>
-          <a:bodyPr wrap="square" lIns="0" tIns="0" rIns="0" bIns="0" rtlCol="0" anchor="t"/>
-          <a:lstStyle/>
-          <a:p>
-            <a:pPr indent="0" marL="0">
-              <a:buNone/>
-            </a:pPr>
-            <a:r>
-              <a:rPr lang="en-US" sz="1050" dirty="0">
-                <a:solidFill>
-                  <a:srgbClr val="6E747E"/>
-                </a:solidFill>
-                <a:latin typeface="Calibri" pitchFamily="34" charset="0"/>
-                <a:ea typeface="Calibri" pitchFamily="34" charset="-122"/>
-                <a:cs typeface="Calibri" pitchFamily="34" charset="-120"/>
-              </a:rPr>
-              <a:t>Full detail in KOI_Integration_Customer_Guide_v1.4.0. Diagnostics in the troubleshooting guide.</a:t>
-            </a:r>
-            <a:endParaRPr lang="en-US" sz="1050" dirty="0"/>
-          </a:p>
-        </p:txBody>
-      </p:sp>
-    </p:spTree>
-  </p:cSld>
-  <p:clrMapOvr>
-    <a:masterClrMapping/>
-  </p:clrMapOvr>
-</p:sld>
-</file>
-
 <file path=ppt/slides/slide3.xml><?xml version="1.0" encoding="utf-8"?>
 <p:sld xmlns:a="http://schemas.openxmlformats.org/drawingml/2006/main" xmlns:r="http://schemas.openxmlformats.org/officeDocument/2006/relationships" xmlns:p="http://schemas.openxmlformats.org/presentationml/2006/main">
   <p:cSld name="Slide 3">
@@ -20568,13 +18044,13 @@
             <a:r>
               <a:rPr lang="en-US" sz="1100" b="1" spc="150" kern="0" dirty="0">
                 <a:solidFill>
-                  <a:srgbClr val="F5A524"/>
-                </a:solidFill>
-                <a:latin typeface="Calibri" pitchFamily="34" charset="0"/>
-                <a:ea typeface="Calibri" pitchFamily="34" charset="-122"/>
-                <a:cs typeface="Calibri" pitchFamily="34" charset="-120"/>
-              </a:rPr>
-              <a:t>WHAT YOU NEED FIRST</a:t>
+                  <a:srgbClr val="22D3EE"/>
+                </a:solidFill>
+                <a:latin typeface="Calibri" pitchFamily="34" charset="0"/>
+                <a:ea typeface="Calibri" pitchFamily="34" charset="-122"/>
+                <a:cs typeface="Calibri" pitchFamily="34" charset="-120"/>
+              </a:rPr>
+              <a:t>PACK CONTENT</a:t>
             </a:r>
             <a:endParaRPr lang="en-US" sz="1100" dirty="0"/>
           </a:p>
@@ -20616,7 +18092,7 @@
                 <a:ea typeface="Calibri" pitchFamily="34" charset="-122"/>
                 <a:cs typeface="Calibri" pitchFamily="34" charset="-120"/>
               </a:rPr>
-              <a:t>The tenant setup this test depends on — an integration instance, a List, a script in Action Center. If something here is missing the test cannot pass, and it will look like a product fault.</a:t>
+              <a:t>The content items that must be on the tenant for this test — playbooks, automations, rules, Lists. Useful if you upload the pack piece by piece rather than in one go.</a:t>
             </a:r>
             <a:endParaRPr lang="en-US" sz="1100" dirty="0"/>
           </a:p>
@@ -20676,13 +18152,13 @@
             <a:r>
               <a:rPr lang="en-US" sz="1100" b="1" spc="150" kern="0" dirty="0">
                 <a:solidFill>
-                  <a:srgbClr val="E8551F"/>
-                </a:solidFill>
-                <a:latin typeface="Calibri" pitchFamily="34" charset="0"/>
-                <a:ea typeface="Calibri" pitchFamily="34" charset="-122"/>
-                <a:cs typeface="Calibri" pitchFamily="34" charset="-120"/>
-              </a:rPr>
-              <a:t>STEPS</a:t>
+                  <a:srgbClr val="F5A524"/>
+                </a:solidFill>
+                <a:latin typeface="Calibri" pitchFamily="34" charset="0"/>
+                <a:ea typeface="Calibri" pitchFamily="34" charset="-122"/>
+                <a:cs typeface="Calibri" pitchFamily="34" charset="-120"/>
+              </a:rPr>
+              <a:t>TENANT SETUP</a:t>
             </a:r>
             <a:endParaRPr lang="en-US" sz="1100" dirty="0"/>
           </a:p>
@@ -20724,7 +18200,7 @@
                 <a:ea typeface="Calibri" pitchFamily="34" charset="-122"/>
                 <a:cs typeface="Calibri" pitchFamily="34" charset="-120"/>
               </a:rPr>
-              <a:t>What to click, in order, in the Cortex XSIAM console. Commands to paste are shown in monospace.</a:t>
+              <a:t>What you configure yourself: integration instances, an endpoint group, a script in Action Center, the configuration List.</a:t>
             </a:r>
             <a:endParaRPr lang="en-US" sz="1100" dirty="0"/>
           </a:p>
@@ -20784,13 +18260,13 @@
             <a:r>
               <a:rPr lang="en-US" sz="1100" b="1" spc="150" kern="0" dirty="0">
                 <a:solidFill>
-                  <a:srgbClr val="3FB950"/>
-                </a:solidFill>
-                <a:latin typeface="Calibri" pitchFamily="34" charset="0"/>
-                <a:ea typeface="Calibri" pitchFamily="34" charset="-122"/>
-                <a:cs typeface="Calibri" pitchFamily="34" charset="-120"/>
-              </a:rPr>
-              <a:t>WHAT TO EXPECT</a:t>
+                  <a:srgbClr val="E8551F"/>
+                </a:solidFill>
+                <a:latin typeface="Calibri" pitchFamily="34" charset="0"/>
+                <a:ea typeface="Calibri" pitchFamily="34" charset="-122"/>
+                <a:cs typeface="Calibri" pitchFamily="34" charset="-120"/>
+              </a:rPr>
+              <a:t>STEPS  +  WHAT TO EXPECT</a:t>
             </a:r>
             <a:endParaRPr lang="en-US" sz="1100" dirty="0"/>
           </a:p>
@@ -20832,7 +18308,7 @@
                 <a:ea typeface="Calibri" pitchFamily="34" charset="-122"/>
                 <a:cs typeface="Calibri" pitchFamily="34" charset="-120"/>
               </a:rPr>
-              <a:t>What a passing test looks like. Where a result commonly looks wrong but is correct, it says so.</a:t>
+              <a:t>What to click, in order, in the Cortex XSIAM console — and what a passing test looks like. Anything to paste is shown in monospace.</a:t>
             </a:r>
             <a:endParaRPr lang="en-US" sz="1100" dirty="0"/>
           </a:p>
@@ -20973,13 +18449,13 @@
             <a:r>
               <a:rPr lang="en-US" sz="1100" i="1" dirty="0">
                 <a:solidFill>
-                  <a:srgbClr val="F5A524"/>
-                </a:solidFill>
-                <a:latin typeface="Calibri" pitchFamily="34" charset="0"/>
-                <a:ea typeface="Calibri" pitchFamily="34" charset="-122"/>
-                <a:cs typeface="Calibri" pitchFamily="34" charset="-120"/>
-              </a:rPr>
-              <a:t>A test that fails on a missing prerequisite is not a product defect — check the amber panel first.</a:t>
+                  <a:srgbClr val="6E747E"/>
+                </a:solidFill>
+                <a:latin typeface="Calibri" pitchFamily="34" charset="0"/>
+                <a:ea typeface="Calibri" pitchFamily="34" charset="-122"/>
+                <a:cs typeface="Calibri" pitchFamily="34" charset="-120"/>
+              </a:rPr>
+              <a:t>Each test lists its own prerequisites — set those up first and the test runs straight through.</a:t>
             </a:r>
             <a:endParaRPr lang="en-US" sz="1100" dirty="0"/>
           </a:p>
@@ -22493,7 +19969,7 @@
                 <a:ea typeface="Calibri" pitchFamily="34" charset="-122"/>
                 <a:cs typeface="Calibri" pitchFamily="34" charset="-120"/>
               </a:rPr>
-              <a:t>The Core REST API instance is the one people miss. The Script Runner uses it to read endpoint groups larger than 100 — without it the tracker stays empty and every scan run does nothing, which looks exactly like a broken playbook.</a:t>
+              <a:t>The Core REST API instance is required for tests 9 and 10 only. The Script Runner reads endpoint groups through it, which is how it covers groups larger than 100 endpoints. Everything else in this guide runs without it.</a:t>
             </a:r>
             <a:endParaRPr lang="en-US" sz="1050" dirty="0"/>
           </a:p>
@@ -25727,141 +23203,6 @@
           </a:p>
         </p:txBody>
       </p:sp>
-      <p:sp>
-        <p:nvSpPr>
-          <p:cNvPr id="35" name="Shape 33"/>
-          <p:cNvSpPr/>
-          <p:nvPr/>
-        </p:nvSpPr>
-        <p:spPr>
-          <a:xfrm>
-            <a:off x="548640" y="5111496"/>
-            <a:ext cx="11064240" cy="658368"/>
-          </a:xfrm>
-          <a:prstGeom prst="roundRect">
-            <a:avLst>
-              <a:gd name="adj" fmla="val 6944"/>
-            </a:avLst>
-          </a:prstGeom>
-          <a:solidFill>
-            <a:srgbClr val="1C2026"/>
-          </a:solidFill>
-          <a:ln w="12700">
-            <a:solidFill>
-              <a:srgbClr val="1C2026"/>
-            </a:solidFill>
-            <a:prstDash val="solid"/>
-          </a:ln>
-        </p:spPr>
-      </p:sp>
-      <p:sp>
-        <p:nvSpPr>
-          <p:cNvPr id="36" name="Shape 34"/>
-          <p:cNvSpPr/>
-          <p:nvPr/>
-        </p:nvSpPr>
-        <p:spPr>
-          <a:xfrm>
-            <a:off x="786384" y="5294376"/>
-            <a:ext cx="292608" cy="292608"/>
-          </a:xfrm>
-          <a:prstGeom prst="roundRect">
-            <a:avLst>
-              <a:gd name="adj" fmla="val 28125"/>
-            </a:avLst>
-          </a:prstGeom>
-          <a:solidFill>
-            <a:srgbClr val="F5A524"/>
-          </a:solidFill>
-          <a:ln w="12700">
-            <a:solidFill>
-              <a:srgbClr val="F5A524"/>
-            </a:solidFill>
-            <a:prstDash val="solid"/>
-          </a:ln>
-        </p:spPr>
-      </p:sp>
-      <p:sp>
-        <p:nvSpPr>
-          <p:cNvPr id="37" name="Text 35"/>
-          <p:cNvSpPr/>
-          <p:nvPr/>
-        </p:nvSpPr>
-        <p:spPr>
-          <a:xfrm>
-            <a:off x="786384" y="5294376"/>
-            <a:ext cx="292608" cy="292608"/>
-          </a:xfrm>
-          <a:prstGeom prst="rect">
-            <a:avLst/>
-          </a:prstGeom>
-          <a:noFill/>
-          <a:ln/>
-        </p:spPr>
-        <p:txBody>
-          <a:bodyPr wrap="square" lIns="0" tIns="0" rIns="0" bIns="0" rtlCol="0" anchor="ctr"/>
-          <a:lstStyle/>
-          <a:p>
-            <a:pPr algn="ctr" indent="0" marL="0">
-              <a:buNone/>
-            </a:pPr>
-            <a:r>
-              <a:rPr lang="en-US" sz="1300" b="1" dirty="0">
-                <a:solidFill>
-                  <a:srgbClr val="FFFFFF"/>
-                </a:solidFill>
-                <a:latin typeface="Calibri" pitchFamily="34" charset="0"/>
-                <a:ea typeface="Calibri" pitchFamily="34" charset="-122"/>
-                <a:cs typeface="Calibri" pitchFamily="34" charset="-120"/>
-              </a:rPr>
-              <a:t>!</a:t>
-            </a:r>
-            <a:endParaRPr lang="en-US" sz="1300" dirty="0"/>
-          </a:p>
-        </p:txBody>
-      </p:sp>
-      <p:sp>
-        <p:nvSpPr>
-          <p:cNvPr id="38" name="Text 36"/>
-          <p:cNvSpPr/>
-          <p:nvPr/>
-        </p:nvSpPr>
-        <p:spPr>
-          <a:xfrm>
-            <a:off x="1243584" y="5221224"/>
-            <a:ext cx="10058400" cy="438912"/>
-          </a:xfrm>
-          <a:prstGeom prst="rect">
-            <a:avLst/>
-          </a:prstGeom>
-          <a:noFill/>
-          <a:ln/>
-        </p:spPr>
-        <p:txBody>
-          <a:bodyPr wrap="square" lIns="0" tIns="0" rIns="0" bIns="0" rtlCol="0" anchor="t"/>
-          <a:lstStyle/>
-          <a:p>
-            <a:pPr indent="0" marL="0">
-              <a:lnSpc>
-                <a:spcPts val="1200"/>
-              </a:lnSpc>
-              <a:buNone/>
-            </a:pPr>
-            <a:r>
-              <a:rPr lang="en-US" sz="1000" dirty="0">
-                <a:solidFill>
-                  <a:srgbClr val="B4B7BD"/>
-                </a:solidFill>
-                <a:latin typeface="Calibri" pitchFamily="34" charset="0"/>
-                <a:ea typeface="Calibri" pitchFamily="34" charset="-122"/>
-                <a:cs typeface="Calibri" pitchFamily="34" charset="-120"/>
-              </a:rPr>
-              <a:t>A 403 here almost always means egress, not a bad key: KOI restricts its sensitive endpoints by source IP. Run the instance on a Cortex engine whose address KOI accepts. A 401 means the key itself.</a:t>
-            </a:r>
-            <a:endParaRPr lang="en-US" sz="1000" dirty="0"/>
-          </a:p>
-        </p:txBody>
-      </p:sp>
     </p:spTree>
   </p:cSld>
   <p:clrMapOvr>
@@ -27181,141 +24522,6 @@
           </a:p>
         </p:txBody>
       </p:sp>
-      <p:sp>
-        <p:nvSpPr>
-          <p:cNvPr id="35" name="Shape 33"/>
-          <p:cNvSpPr/>
-          <p:nvPr/>
-        </p:nvSpPr>
-        <p:spPr>
-          <a:xfrm>
-            <a:off x="548640" y="5111496"/>
-            <a:ext cx="11064240" cy="658368"/>
-          </a:xfrm>
-          <a:prstGeom prst="roundRect">
-            <a:avLst>
-              <a:gd name="adj" fmla="val 6944"/>
-            </a:avLst>
-          </a:prstGeom>
-          <a:solidFill>
-            <a:srgbClr val="1C2026"/>
-          </a:solidFill>
-          <a:ln w="12700">
-            <a:solidFill>
-              <a:srgbClr val="1C2026"/>
-            </a:solidFill>
-            <a:prstDash val="solid"/>
-          </a:ln>
-        </p:spPr>
-      </p:sp>
-      <p:sp>
-        <p:nvSpPr>
-          <p:cNvPr id="36" name="Shape 34"/>
-          <p:cNvSpPr/>
-          <p:nvPr/>
-        </p:nvSpPr>
-        <p:spPr>
-          <a:xfrm>
-            <a:off x="786384" y="5294376"/>
-            <a:ext cx="292608" cy="292608"/>
-          </a:xfrm>
-          <a:prstGeom prst="roundRect">
-            <a:avLst>
-              <a:gd name="adj" fmla="val 28125"/>
-            </a:avLst>
-          </a:prstGeom>
-          <a:solidFill>
-            <a:srgbClr val="F5A524"/>
-          </a:solidFill>
-          <a:ln w="12700">
-            <a:solidFill>
-              <a:srgbClr val="F5A524"/>
-            </a:solidFill>
-            <a:prstDash val="solid"/>
-          </a:ln>
-        </p:spPr>
-      </p:sp>
-      <p:sp>
-        <p:nvSpPr>
-          <p:cNvPr id="37" name="Text 35"/>
-          <p:cNvSpPr/>
-          <p:nvPr/>
-        </p:nvSpPr>
-        <p:spPr>
-          <a:xfrm>
-            <a:off x="786384" y="5294376"/>
-            <a:ext cx="292608" cy="292608"/>
-          </a:xfrm>
-          <a:prstGeom prst="rect">
-            <a:avLst/>
-          </a:prstGeom>
-          <a:noFill/>
-          <a:ln/>
-        </p:spPr>
-        <p:txBody>
-          <a:bodyPr wrap="square" lIns="0" tIns="0" rIns="0" bIns="0" rtlCol="0" anchor="ctr"/>
-          <a:lstStyle/>
-          <a:p>
-            <a:pPr algn="ctr" indent="0" marL="0">
-              <a:buNone/>
-            </a:pPr>
-            <a:r>
-              <a:rPr lang="en-US" sz="1300" b="1" dirty="0">
-                <a:solidFill>
-                  <a:srgbClr val="FFFFFF"/>
-                </a:solidFill>
-                <a:latin typeface="Calibri" pitchFamily="34" charset="0"/>
-                <a:ea typeface="Calibri" pitchFamily="34" charset="-122"/>
-                <a:cs typeface="Calibri" pitchFamily="34" charset="-120"/>
-              </a:rPr>
-              <a:t>!</a:t>
-            </a:r>
-            <a:endParaRPr lang="en-US" sz="1300" dirty="0"/>
-          </a:p>
-        </p:txBody>
-      </p:sp>
-      <p:sp>
-        <p:nvSpPr>
-          <p:cNvPr id="38" name="Text 36"/>
-          <p:cNvSpPr/>
-          <p:nvPr/>
-        </p:nvSpPr>
-        <p:spPr>
-          <a:xfrm>
-            <a:off x="1243584" y="5221224"/>
-            <a:ext cx="10058400" cy="438912"/>
-          </a:xfrm>
-          <a:prstGeom prst="rect">
-            <a:avLst/>
-          </a:prstGeom>
-          <a:noFill/>
-          <a:ln/>
-        </p:spPr>
-        <p:txBody>
-          <a:bodyPr wrap="square" lIns="0" tIns="0" rIns="0" bIns="0" rtlCol="0" anchor="t"/>
-          <a:lstStyle/>
-          <a:p>
-            <a:pPr indent="0" marL="0">
-              <a:lnSpc>
-                <a:spcPts val="1200"/>
-              </a:lnSpc>
-              <a:buNone/>
-            </a:pPr>
-            <a:r>
-              <a:rPr lang="en-US" sz="1000" dirty="0">
-                <a:solidFill>
-                  <a:srgbClr val="B4B7BD"/>
-                </a:solidFill>
-                <a:latin typeface="Calibri" pitchFamily="34" charset="0"/>
-                <a:ea typeface="Calibri" pitchFamily="34" charset="-122"/>
-                <a:cs typeface="Calibri" pitchFamily="34" charset="-120"/>
-              </a:rPr>
-              <a:t>No rows at all usually means fetch was only just enabled — give it two cycles. Audit missing on its own means the Audit types filter is narrowed; leave it empty for all types.</a:t>
-            </a:r>
-            <a:endParaRPr lang="en-US" sz="1000" dirty="0"/>
-          </a:p>
-        </p:txBody>
-      </p:sp>
     </p:spTree>
   </p:cSld>
   <p:clrMapOvr>
@@ -28551,141 +25757,6 @@
               <a:t>Fields such as item_id, alert_hostname and risk_level are populated and directly queryable.</a:t>
             </a:r>
             <a:endParaRPr lang="en-US" sz="1150" dirty="0"/>
-          </a:p>
-        </p:txBody>
-      </p:sp>
-      <p:sp>
-        <p:nvSpPr>
-          <p:cNvPr id="33" name="Shape 31"/>
-          <p:cNvSpPr/>
-          <p:nvPr/>
-        </p:nvSpPr>
-        <p:spPr>
-          <a:xfrm>
-            <a:off x="548640" y="4969764"/>
-            <a:ext cx="11064240" cy="658368"/>
-          </a:xfrm>
-          <a:prstGeom prst="roundRect">
-            <a:avLst>
-              <a:gd name="adj" fmla="val 6944"/>
-            </a:avLst>
-          </a:prstGeom>
-          <a:solidFill>
-            <a:srgbClr val="1C2026"/>
-          </a:solidFill>
-          <a:ln w="12700">
-            <a:solidFill>
-              <a:srgbClr val="1C2026"/>
-            </a:solidFill>
-            <a:prstDash val="solid"/>
-          </a:ln>
-        </p:spPr>
-      </p:sp>
-      <p:sp>
-        <p:nvSpPr>
-          <p:cNvPr id="34" name="Shape 32"/>
-          <p:cNvSpPr/>
-          <p:nvPr/>
-        </p:nvSpPr>
-        <p:spPr>
-          <a:xfrm>
-            <a:off x="786384" y="5152644"/>
-            <a:ext cx="292608" cy="292608"/>
-          </a:xfrm>
-          <a:prstGeom prst="roundRect">
-            <a:avLst>
-              <a:gd name="adj" fmla="val 28125"/>
-            </a:avLst>
-          </a:prstGeom>
-          <a:solidFill>
-            <a:srgbClr val="F5A524"/>
-          </a:solidFill>
-          <a:ln w="12700">
-            <a:solidFill>
-              <a:srgbClr val="F5A524"/>
-            </a:solidFill>
-            <a:prstDash val="solid"/>
-          </a:ln>
-        </p:spPr>
-      </p:sp>
-      <p:sp>
-        <p:nvSpPr>
-          <p:cNvPr id="35" name="Text 33"/>
-          <p:cNvSpPr/>
-          <p:nvPr/>
-        </p:nvSpPr>
-        <p:spPr>
-          <a:xfrm>
-            <a:off x="786384" y="5152644"/>
-            <a:ext cx="292608" cy="292608"/>
-          </a:xfrm>
-          <a:prstGeom prst="rect">
-            <a:avLst/>
-          </a:prstGeom>
-          <a:noFill/>
-          <a:ln/>
-        </p:spPr>
-        <p:txBody>
-          <a:bodyPr wrap="square" lIns="0" tIns="0" rIns="0" bIns="0" rtlCol="0" anchor="ctr"/>
-          <a:lstStyle/>
-          <a:p>
-            <a:pPr algn="ctr" indent="0" marL="0">
-              <a:buNone/>
-            </a:pPr>
-            <a:r>
-              <a:rPr lang="en-US" sz="1300" b="1" dirty="0">
-                <a:solidFill>
-                  <a:srgbClr val="FFFFFF"/>
-                </a:solidFill>
-                <a:latin typeface="Calibri" pitchFamily="34" charset="0"/>
-                <a:ea typeface="Calibri" pitchFamily="34" charset="-122"/>
-                <a:cs typeface="Calibri" pitchFamily="34" charset="-120"/>
-              </a:rPr>
-              <a:t>!</a:t>
-            </a:r>
-            <a:endParaRPr lang="en-US" sz="1300" dirty="0"/>
-          </a:p>
-        </p:txBody>
-      </p:sp>
-      <p:sp>
-        <p:nvSpPr>
-          <p:cNvPr id="36" name="Text 34"/>
-          <p:cNvSpPr/>
-          <p:nvPr/>
-        </p:nvSpPr>
-        <p:spPr>
-          <a:xfrm>
-            <a:off x="1243584" y="5079492"/>
-            <a:ext cx="10058400" cy="438912"/>
-          </a:xfrm>
-          <a:prstGeom prst="rect">
-            <a:avLst/>
-          </a:prstGeom>
-          <a:noFill/>
-          <a:ln/>
-        </p:spPr>
-        <p:txBody>
-          <a:bodyPr wrap="square" lIns="0" tIns="0" rIns="0" bIns="0" rtlCol="0" anchor="t"/>
-          <a:lstStyle/>
-          <a:p>
-            <a:pPr indent="0" marL="0">
-              <a:lnSpc>
-                <a:spcPts val="1200"/>
-              </a:lnSpc>
-              <a:buNone/>
-            </a:pPr>
-            <a:r>
-              <a:rPr lang="en-US" sz="1000" dirty="0">
-                <a:solidFill>
-                  <a:srgbClr val="B4B7BD"/>
-                </a:solidFill>
-                <a:latin typeface="Calibri" pitchFamily="34" charset="0"/>
-                <a:ea typeface="Calibri" pitchFamily="34" charset="-122"/>
-                <a:cs typeface="Calibri" pitchFamily="34" charset="-120"/>
-              </a:rPr>
-              <a:t>rows far exceeding real_alerts is CORRECT. KOI re-sends every still-open alert on each fetch, so a row is a delivery, not an alert. Anything counting alerts must count distinct notification ids — the dashboard already does.</a:t>
-            </a:r>
-            <a:endParaRPr lang="en-US" sz="1000" dirty="0"/>
           </a:p>
         </p:txBody>
       </p:sp>

--- a/docs/KOI_Content_Pack_Test_Guide.pptx
+++ b/docs/KOI_Content_Pack_Test_Guide.pptx
@@ -9974,7 +9974,7 @@
                 <a:ea typeface="Calibri" pitchFamily="34" charset="-122"/>
                 <a:cs typeface="Calibri" pitchFamily="34" charset="-120"/>
               </a:rPr>
-              <a:t>Settings → Object Setup → Lists → New List, type JSON, named exactly Koi Script Runner.</a:t>
+              <a:t>If you installed the pack: the Koi Script Runner List is already there — open Settings → Object Setup → Lists and go to the next step.</a:t>
             </a:r>
             <a:endParaRPr lang="en-US" sz="1150" dirty="0"/>
           </a:p>
@@ -10028,7 +10028,7 @@
         <p:spPr>
           <a:xfrm>
             <a:off x="1152144" y="4091940"/>
-            <a:ext cx="5486400" cy="630936"/>
+            <a:ext cx="5486400" cy="822960"/>
           </a:xfrm>
           <a:prstGeom prst="rect">
             <a:avLst/>
@@ -10055,7 +10055,7 @@
                 <a:ea typeface="Calibri" pitchFamily="34" charset="-122"/>
                 <a:cs typeface="Calibri" pitchFamily="34" charset="-120"/>
               </a:rPr>
-              <a:t>Open Lists/README.md in the pack and copy the JSON block — it is formatted ready to paste (do NOT copy from list-Koi_Script_Runner.json; its data field is escaped).</a:t>
+              <a:t>If you uploaded selectively: upload the playbooks and automation listed under PACK CONTENT, then create the List — New List, type JSON, named exactly Koi Script Runner — and paste the block from Lists/README.md (not from list-Koi_Script_Runner.json; its data field is escaped).</a:t>
             </a:r>
             <a:endParaRPr lang="en-US" sz="1150" dirty="0"/>
           </a:p>
@@ -10069,7 +10069,7 @@
         </p:nvSpPr>
         <p:spPr>
           <a:xfrm>
-            <a:off x="859536" y="4796028"/>
+            <a:off x="859536" y="4983480"/>
             <a:ext cx="219456" cy="256032"/>
           </a:xfrm>
           <a:prstGeom prst="rect">
@@ -10108,7 +10108,7 @@
         </p:nvSpPr>
         <p:spPr>
           <a:xfrm>
-            <a:off x="1152144" y="4796028"/>
+            <a:off x="1152144" y="4983480"/>
             <a:ext cx="5486400" cy="438912"/>
           </a:xfrm>
           <a:prstGeom prst="rect">
@@ -10150,7 +10150,7 @@
         </p:nvSpPr>
         <p:spPr>
           <a:xfrm>
-            <a:off x="859536" y="5312664"/>
+            <a:off x="859536" y="5500116"/>
             <a:ext cx="219456" cy="256032"/>
           </a:xfrm>
           <a:prstGeom prst="rect">
@@ -10189,7 +10189,7 @@
         </p:nvSpPr>
         <p:spPr>
           <a:xfrm>
-            <a:off x="1152144" y="5312664"/>
+            <a:off x="1152144" y="5500116"/>
             <a:ext cx="5486400" cy="438912"/>
           </a:xfrm>
           <a:prstGeom prst="rect">
@@ -10231,7 +10231,7 @@
         </p:nvSpPr>
         <p:spPr>
           <a:xfrm>
-            <a:off x="859536" y="5829300"/>
+            <a:off x="859536" y="6016752"/>
             <a:ext cx="219456" cy="256032"/>
           </a:xfrm>
           <a:prstGeom prst="rect">
@@ -10270,7 +10270,7 @@
         </p:nvSpPr>
         <p:spPr>
           <a:xfrm>
-            <a:off x="1152144" y="5829300"/>
+            <a:off x="1152144" y="6016752"/>
             <a:ext cx="5486400" cy="438912"/>
           </a:xfrm>
           <a:prstGeom prst="rect">
@@ -10312,7 +10312,7 @@
         </p:nvSpPr>
         <p:spPr>
           <a:xfrm>
-            <a:off x="859536" y="6345936"/>
+            <a:off x="859536" y="6533388"/>
             <a:ext cx="219456" cy="256032"/>
           </a:xfrm>
           <a:prstGeom prst="rect">
@@ -10351,7 +10351,7 @@
         </p:nvSpPr>
         <p:spPr>
           <a:xfrm>
-            <a:off x="1152144" y="6345936"/>
+            <a:off x="1152144" y="6533388"/>
             <a:ext cx="5486400" cy="246888"/>
           </a:xfrm>
           <a:prstGeom prst="rect">
@@ -20634,7 +20634,7 @@
         <p:spPr>
           <a:xfrm>
             <a:off x="859536" y="4773168"/>
-            <a:ext cx="3657600" cy="274320"/>
+            <a:ext cx="6400800" cy="274320"/>
           </a:xfrm>
           <a:prstGeom prst="rect">
             <a:avLst/>
@@ -20658,7 +20658,7 @@
                 <a:ea typeface="Calibri" pitchFamily="34" charset="-122"/>
                 <a:cs typeface="Calibri" pitchFamily="34" charset="-120"/>
               </a:rPr>
-              <a:t>Confirm it landed</a:t>
+              <a:t>Installed the pack, or uploading piece by piece?</a:t>
             </a:r>
             <a:endParaRPr lang="en-US" sz="1250" dirty="0"/>
           </a:p>
@@ -20739,7 +20739,7 @@
                 <a:ea typeface="Calibri" pitchFamily="34" charset="-122"/>
                 <a:cs typeface="Calibri" pitchFamily="34" charset="-120"/>
               </a:rPr>
-              <a:t>Settings → Data Sources — a KOI integration is offered.</a:t>
+              <a:t>Installed the whole pack: every playbook, automation, rule and the Koi Script Runner List are already on the tenant. Nothing to upload.</a:t>
             </a:r>
             <a:endParaRPr lang="en-US" sz="1150" dirty="0"/>
           </a:p>
@@ -20820,88 +20820,7 @@
                 <a:ea typeface="Calibri" pitchFamily="34" charset="-122"/>
                 <a:cs typeface="Calibri" pitchFamily="34" charset="-120"/>
               </a:rPr>
-              <a:t>Automation → Playbooks — 12 playbooks whose names start with KOI.</a:t>
-            </a:r>
-            <a:endParaRPr lang="en-US" sz="1150" dirty="0"/>
-          </a:p>
-        </p:txBody>
-      </p:sp>
-      <p:sp>
-        <p:nvSpPr>
-          <p:cNvPr id="24" name="Text 22"/>
-          <p:cNvSpPr/>
-          <p:nvPr/>
-        </p:nvSpPr>
-        <p:spPr>
-          <a:xfrm>
-            <a:off x="859536" y="5779008"/>
-            <a:ext cx="219456" cy="256032"/>
-          </a:xfrm>
-          <a:prstGeom prst="rect">
-            <a:avLst/>
-          </a:prstGeom>
-          <a:noFill/>
-          <a:ln/>
-        </p:spPr>
-        <p:txBody>
-          <a:bodyPr wrap="square" lIns="0" tIns="0" rIns="0" bIns="0" rtlCol="0" anchor="t"/>
-          <a:lstStyle/>
-          <a:p>
-            <a:pPr indent="0" marL="0">
-              <a:buNone/>
-            </a:pPr>
-            <a:r>
-              <a:rPr lang="en-US" sz="1150" b="1" dirty="0">
-                <a:solidFill>
-                  <a:srgbClr val="3FB950"/>
-                </a:solidFill>
-                <a:latin typeface="Calibri" pitchFamily="34" charset="0"/>
-                <a:ea typeface="Calibri" pitchFamily="34" charset="-122"/>
-                <a:cs typeface="Calibri" pitchFamily="34" charset="-120"/>
-              </a:rPr>
-              <a:t>✓</a:t>
-            </a:r>
-            <a:endParaRPr lang="en-US" sz="1150" dirty="0"/>
-          </a:p>
-        </p:txBody>
-      </p:sp>
-      <p:sp>
-        <p:nvSpPr>
-          <p:cNvPr id="25" name="Text 23"/>
-          <p:cNvSpPr/>
-          <p:nvPr/>
-        </p:nvSpPr>
-        <p:spPr>
-          <a:xfrm>
-            <a:off x="1152144" y="5779008"/>
-            <a:ext cx="10149840" cy="246888"/>
-          </a:xfrm>
-          <a:prstGeom prst="rect">
-            <a:avLst/>
-          </a:prstGeom>
-          <a:noFill/>
-          <a:ln/>
-        </p:spPr>
-        <p:txBody>
-          <a:bodyPr wrap="square" lIns="0" tIns="0" rIns="0" bIns="0" rtlCol="0" anchor="t"/>
-          <a:lstStyle/>
-          <a:p>
-            <a:pPr indent="0" marL="0">
-              <a:lnSpc>
-                <a:spcPts val="1500"/>
-              </a:lnSpc>
-              <a:buNone/>
-            </a:pPr>
-            <a:r>
-              <a:rPr lang="en-US" sz="1150" dirty="0">
-                <a:solidFill>
-                  <a:srgbClr val="B4B7BD"/>
-                </a:solidFill>
-                <a:latin typeface="Calibri" pitchFamily="34" charset="0"/>
-                <a:ea typeface="Calibri" pitchFamily="34" charset="-122"/>
-                <a:cs typeface="Calibri" pitchFamily="34" charset="-120"/>
-              </a:rPr>
-              <a:t>Dashboards &amp; Reports — the KOI Alerts Dashboard exists.</a:t>
+              <a:t>Uploading selectively: the PACK CONTENT column on each test is your upload checklist for that test.</a:t>
             </a:r>
             <a:endParaRPr lang="en-US" sz="1150" dirty="0"/>
           </a:p>

--- a/docs/KOI_Content_Pack_Test_Guide.pptx
+++ b/docs/KOI_Content_Pack_Test_Guide.pptx
@@ -24,9 +24,10 @@
     <p:sldId id="272" r:id="rId18"/>
     <p:sldId id="273" r:id="rId19"/>
     <p:sldId id="274" r:id="rId20"/>
+    <p:sldId id="275" r:id="rId21"/>
   </p:sldIdLst>
   <p:notesMasterIdLst>
-    <p:notesMasterId r:id="rId21"/>
+    <p:notesMasterId r:id="rId22"/>
   </p:notesMasterIdLst>
   <p:sldSz cx="12192000" cy="6858000"/>
   <p:notesSz cx="6858000" cy="12192000"/>
@@ -1048,7 +1049,7 @@
           <a:p>
             <a:r>
               <a:rPr lang="en-US" dirty="0"/>
-              <a:t>Refresh must run before Scan. An empty tracker means Scan has nothing to do.</a:t>
+              <a:t/>
             </a:r>
             <a:endParaRPr lang="en-US" dirty="0"/>
           </a:p>
@@ -1136,7 +1137,7 @@
           <a:p>
             <a:r>
               <a:rPr lang="en-US" dirty="0"/>
-              <a:t/>
+              <a:t>Refresh must run before Scan. An empty tracker means Scan has nothing to do.</a:t>
             </a:r>
             <a:endParaRPr lang="en-US" dirty="0"/>
           </a:p>
@@ -1312,7 +1313,7 @@
           <a:p>
             <a:r>
               <a:rPr lang="en-US" dirty="0"/>
-              <a:t>Fastest possible demo: no KOI key, no waiting, and the expected numbers are printed up front.</a:t>
+              <a:t/>
             </a:r>
             <a:endParaRPr lang="en-US" dirty="0"/>
           </a:p>
@@ -1400,7 +1401,7 @@
           <a:p>
             <a:r>
               <a:rPr lang="en-US" dirty="0"/>
-              <a:t/>
+              <a:t>Fastest possible demo: no KOI key, no waiting, and the expected numbers are printed up front.</a:t>
             </a:r>
             <a:endParaRPr lang="en-US" dirty="0"/>
           </a:p>
@@ -1512,6 +1513,94 @@
             <a:fld id="{F7021451-1387-4CA6-816F-3879F97B5CBC}" type="slidenum">
               <a:rPr lang="en-US"/>
               <a:t>2</a:t>
+            </a:fld>
+            <a:endParaRPr lang="en-US"/>
+          </a:p>
+        </p:txBody>
+      </p:sp>
+    </p:spTree>
+    <p:extLst>
+      <p:ext uri="{BB962C8B-B14F-4D97-AF65-F5344CB8AC3E}">
+        <p14:creationId xmlns:p14="http://schemas.microsoft.com/office/powerpoint/2010/main" val="1024086991"/>
+      </p:ext>
+    </p:extLst>
+  </p:cSld>
+  <p:clrMapOvr>
+    <a:masterClrMapping/>
+  </p:clrMapOvr>
+</p:notes>
+</file>
+
+<file path=ppt/notesSlides/notesSlide20.xml><?xml version="1.0" encoding="utf-8"?>
+<p:notes xmlns:a="http://schemas.openxmlformats.org/drawingml/2006/main" xmlns:r="http://schemas.openxmlformats.org/officeDocument/2006/relationships" xmlns:p="http://schemas.openxmlformats.org/presentationml/2006/main">
+  <p:cSld>
+    <p:spTree>
+      <p:nvGrpSpPr>
+        <p:cNvPr id="1" name=""/>
+        <p:cNvGrpSpPr/>
+        <p:nvPr/>
+      </p:nvGrpSpPr>
+      <p:grpSpPr>
+        <a:xfrm>
+          <a:off x="0" y="0"/>
+          <a:ext cx="0" cy="0"/>
+          <a:chOff x="0" y="0"/>
+          <a:chExt cx="0" cy="0"/>
+        </a:xfrm>
+      </p:grpSpPr>
+      <p:sp>
+        <p:nvSpPr>
+          <p:cNvPr id="2" name="Slide Image Placeholder 1"/>
+          <p:cNvSpPr>
+            <a:spLocks noGrp="1" noRot="1" noChangeAspect="1"/>
+          </p:cNvSpPr>
+          <p:nvPr>
+            <p:ph type="sldImg"/>
+          </p:nvPr>
+        </p:nvSpPr>
+        <p:spPr/>
+      </p:sp>
+      <p:sp>
+        <p:nvSpPr>
+          <p:cNvPr id="3" name="Notes Placeholder 2"/>
+          <p:cNvSpPr>
+            <a:spLocks noGrp="1"/>
+          </p:cNvSpPr>
+          <p:nvPr>
+            <p:ph type="body" idx="1"/>
+          </p:nvPr>
+        </p:nvSpPr>
+        <p:spPr/>
+        <p:txBody>
+          <a:bodyPr/>
+          <a:lstStyle/>
+          <a:p>
+            <a:r>
+              <a:rPr lang="en-US" dirty="0"/>
+              <a:t/>
+            </a:r>
+            <a:endParaRPr lang="en-US" dirty="0"/>
+          </a:p>
+        </p:txBody>
+      </p:sp>
+      <p:sp>
+        <p:nvSpPr>
+          <p:cNvPr id="4" name="Slide Number Placeholder 3"/>
+          <p:cNvSpPr>
+            <a:spLocks noGrp="1"/>
+          </p:cNvSpPr>
+          <p:nvPr>
+            <p:ph type="sldNum" sz="quarter" idx="10"/>
+          </p:nvPr>
+        </p:nvSpPr>
+        <p:spPr/>
+        <p:txBody>
+          <a:bodyPr/>
+          <a:lstStyle/>
+          <a:p>
+            <a:fld id="{F7021451-1387-4CA6-816F-3879F97B5CBC}" type="slidenum">
+              <a:rPr lang="en-US"/>
+              <a:t>20</a:t>
             </a:fld>
             <a:endParaRPr lang="en-US"/>
           </a:p>
@@ -9035,7 +9124,7 @@
                 <a:ea typeface="Calibri" pitchFamily="34" charset="-122"/>
                 <a:cs typeface="Calibri" pitchFamily="34" charset="-120"/>
               </a:rPr>
-              <a:t>TEST 9</a:t>
+              <a:t>TESTS 9 AND 10 — PREPARE</a:t>
             </a:r>
             <a:endParaRPr lang="en-US" sz="1100" dirty="0"/>
           </a:p>
@@ -9074,7 +9163,7 @@
                 <a:ea typeface="Calibri" pitchFamily="34" charset="-122"/>
                 <a:cs typeface="Calibri" pitchFamily="34" charset="-120"/>
               </a:rPr>
-              <a:t>Script Runner — refresh the tracker</a:t>
+              <a:t>Script Runner: everything this use case needs</a:t>
             </a:r>
             <a:endParaRPr lang="en-US" sz="3100" dirty="0"/>
           </a:p>
@@ -9088,12 +9177,393 @@
         </p:nvSpPr>
         <p:spPr>
           <a:xfrm>
-            <a:off x="548640" y="1280160"/>
-            <a:ext cx="11064240" cy="1581912"/>
+            <a:off x="548640" y="1298448"/>
+            <a:ext cx="5943600" cy="2788920"/>
           </a:xfrm>
           <a:prstGeom prst="roundRect">
             <a:avLst>
-              <a:gd name="adj" fmla="val 2890"/>
+              <a:gd name="adj" fmla="val 1639"/>
+            </a:avLst>
+          </a:prstGeom>
+          <a:solidFill>
+            <a:srgbClr val="15171B"/>
+          </a:solidFill>
+          <a:ln w="12700">
+            <a:solidFill>
+              <a:srgbClr val="15171B"/>
+            </a:solidFill>
+            <a:prstDash val="solid"/>
+          </a:ln>
+        </p:spPr>
+      </p:sp>
+      <p:sp>
+        <p:nvSpPr>
+          <p:cNvPr id="5" name="Text 3"/>
+          <p:cNvSpPr/>
+          <p:nvPr/>
+        </p:nvSpPr>
+        <p:spPr>
+          <a:xfrm>
+            <a:off x="822960" y="1463040"/>
+            <a:ext cx="5394960" cy="237744"/>
+          </a:xfrm>
+          <a:prstGeom prst="rect">
+            <a:avLst/>
+          </a:prstGeom>
+          <a:noFill/>
+          <a:ln/>
+        </p:spPr>
+        <p:txBody>
+          <a:bodyPr wrap="square" lIns="0" tIns="0" rIns="0" bIns="0" rtlCol="0" anchor="t"/>
+          <a:lstStyle/>
+          <a:p>
+            <a:pPr indent="0" marL="0">
+              <a:buNone/>
+            </a:pPr>
+            <a:r>
+              <a:rPr lang="en-US" sz="1050" b="1" spc="100" kern="0" dirty="0">
+                <a:solidFill>
+                  <a:srgbClr val="22D3EE"/>
+                </a:solidFill>
+                <a:latin typeface="Calibri" pitchFamily="34" charset="0"/>
+                <a:ea typeface="Calibri" pitchFamily="34" charset="-122"/>
+                <a:cs typeface="Calibri" pitchFamily="34" charset="-120"/>
+              </a:rPr>
+              <a:t>PACK CONTENT — all of it</a:t>
+            </a:r>
+            <a:endParaRPr lang="en-US" sz="1050" dirty="0"/>
+          </a:p>
+        </p:txBody>
+      </p:sp>
+      <p:sp>
+        <p:nvSpPr>
+          <p:cNvPr id="6" name="Text 4"/>
+          <p:cNvSpPr/>
+          <p:nvPr/>
+        </p:nvSpPr>
+        <p:spPr>
+          <a:xfrm>
+            <a:off x="822960" y="1755648"/>
+            <a:ext cx="5394960" cy="219456"/>
+          </a:xfrm>
+          <a:prstGeom prst="rect">
+            <a:avLst/>
+          </a:prstGeom>
+          <a:noFill/>
+          <a:ln/>
+        </p:spPr>
+        <p:txBody>
+          <a:bodyPr wrap="square" lIns="0" tIns="0" rIns="0" bIns="0" rtlCol="0" anchor="t"/>
+          <a:lstStyle/>
+          <a:p>
+            <a:pPr indent="0" marL="0">
+              <a:buNone/>
+            </a:pPr>
+            <a:r>
+              <a:rPr lang="en-US" sz="1000" i="1" dirty="0">
+                <a:solidFill>
+                  <a:srgbClr val="6E747E"/>
+                </a:solidFill>
+                <a:latin typeface="Calibri" pitchFamily="34" charset="0"/>
+                <a:ea typeface="Calibri" pitchFamily="34" charset="-122"/>
+                <a:cs typeface="Calibri" pitchFamily="34" charset="-120"/>
+              </a:rPr>
+              <a:t>Five playbooks — import child before parent:</a:t>
+            </a:r>
+            <a:endParaRPr lang="en-US" sz="1000" dirty="0"/>
+          </a:p>
+        </p:txBody>
+      </p:sp>
+      <p:sp>
+        <p:nvSpPr>
+          <p:cNvPr id="7" name="Text 5"/>
+          <p:cNvSpPr/>
+          <p:nvPr/>
+        </p:nvSpPr>
+        <p:spPr>
+          <a:xfrm>
+            <a:off x="932688" y="2011680"/>
+            <a:ext cx="5303520" cy="219456"/>
+          </a:xfrm>
+          <a:prstGeom prst="rect">
+            <a:avLst/>
+          </a:prstGeom>
+          <a:noFill/>
+          <a:ln/>
+        </p:spPr>
+        <p:txBody>
+          <a:bodyPr wrap="square" lIns="0" tIns="0" rIns="0" bIns="0" rtlCol="0" anchor="t"/>
+          <a:lstStyle/>
+          <a:p>
+            <a:pPr indent="0" marL="0">
+              <a:buNone/>
+            </a:pPr>
+            <a:r>
+              <a:rPr lang="en-US" sz="1050" dirty="0">
+                <a:solidFill>
+                  <a:srgbClr val="B4B7BD"/>
+                </a:solidFill>
+                <a:latin typeface="Calibri" pitchFamily="34" charset="0"/>
+                <a:ea typeface="Calibri" pitchFamily="34" charset="-122"/>
+                <a:cs typeface="Calibri" pitchFamily="34" charset="-120"/>
+              </a:rPr>
+              <a:t>1  KOI Script Runner - Execute Endpoint Script</a:t>
+            </a:r>
+            <a:endParaRPr lang="en-US" sz="1050" dirty="0"/>
+          </a:p>
+        </p:txBody>
+      </p:sp>
+      <p:sp>
+        <p:nvSpPr>
+          <p:cNvPr id="8" name="Text 6"/>
+          <p:cNvSpPr/>
+          <p:nvPr/>
+        </p:nvSpPr>
+        <p:spPr>
+          <a:xfrm>
+            <a:off x="932688" y="2235708"/>
+            <a:ext cx="5303520" cy="219456"/>
+          </a:xfrm>
+          <a:prstGeom prst="rect">
+            <a:avLst/>
+          </a:prstGeom>
+          <a:noFill/>
+          <a:ln/>
+        </p:spPr>
+        <p:txBody>
+          <a:bodyPr wrap="square" lIns="0" tIns="0" rIns="0" bIns="0" rtlCol="0" anchor="t"/>
+          <a:lstStyle/>
+          <a:p>
+            <a:pPr indent="0" marL="0">
+              <a:buNone/>
+            </a:pPr>
+            <a:r>
+              <a:rPr lang="en-US" sz="1050" dirty="0">
+                <a:solidFill>
+                  <a:srgbClr val="B4B7BD"/>
+                </a:solidFill>
+                <a:latin typeface="Calibri" pitchFamily="34" charset="0"/>
+                <a:ea typeface="Calibri" pitchFamily="34" charset="-122"/>
+                <a:cs typeface="Calibri" pitchFamily="34" charset="-120"/>
+              </a:rPr>
+              <a:t>2  KOI Script Runner - Process Config Entry</a:t>
+            </a:r>
+            <a:endParaRPr lang="en-US" sz="1050" dirty="0"/>
+          </a:p>
+        </p:txBody>
+      </p:sp>
+      <p:sp>
+        <p:nvSpPr>
+          <p:cNvPr id="9" name="Text 7"/>
+          <p:cNvSpPr/>
+          <p:nvPr/>
+        </p:nvSpPr>
+        <p:spPr>
+          <a:xfrm>
+            <a:off x="932688" y="2459736"/>
+            <a:ext cx="5303520" cy="219456"/>
+          </a:xfrm>
+          <a:prstGeom prst="rect">
+            <a:avLst/>
+          </a:prstGeom>
+          <a:noFill/>
+          <a:ln/>
+        </p:spPr>
+        <p:txBody>
+          <a:bodyPr wrap="square" lIns="0" tIns="0" rIns="0" bIns="0" rtlCol="0" anchor="t"/>
+          <a:lstStyle/>
+          <a:p>
+            <a:pPr indent="0" marL="0">
+              <a:buNone/>
+            </a:pPr>
+            <a:r>
+              <a:rPr lang="en-US" sz="1050" dirty="0">
+                <a:solidFill>
+                  <a:srgbClr val="B4B7BD"/>
+                </a:solidFill>
+                <a:latin typeface="Calibri" pitchFamily="34" charset="0"/>
+                <a:ea typeface="Calibri" pitchFamily="34" charset="-122"/>
+                <a:cs typeface="Calibri" pitchFamily="34" charset="-120"/>
+              </a:rPr>
+              <a:t>3  KOI Script Runner - Refresh Entry</a:t>
+            </a:r>
+            <a:endParaRPr lang="en-US" sz="1050" dirty="0"/>
+          </a:p>
+        </p:txBody>
+      </p:sp>
+      <p:sp>
+        <p:nvSpPr>
+          <p:cNvPr id="10" name="Text 8"/>
+          <p:cNvSpPr/>
+          <p:nvPr/>
+        </p:nvSpPr>
+        <p:spPr>
+          <a:xfrm>
+            <a:off x="932688" y="2683764"/>
+            <a:ext cx="5303520" cy="219456"/>
+          </a:xfrm>
+          <a:prstGeom prst="rect">
+            <a:avLst/>
+          </a:prstGeom>
+          <a:noFill/>
+          <a:ln/>
+        </p:spPr>
+        <p:txBody>
+          <a:bodyPr wrap="square" lIns="0" tIns="0" rIns="0" bIns="0" rtlCol="0" anchor="t"/>
+          <a:lstStyle/>
+          <a:p>
+            <a:pPr indent="0" marL="0">
+              <a:buNone/>
+            </a:pPr>
+            <a:r>
+              <a:rPr lang="en-US" sz="1050" dirty="0">
+                <a:solidFill>
+                  <a:srgbClr val="B4B7BD"/>
+                </a:solidFill>
+                <a:latin typeface="Calibri" pitchFamily="34" charset="0"/>
+                <a:ea typeface="Calibri" pitchFamily="34" charset="-122"/>
+                <a:cs typeface="Calibri" pitchFamily="34" charset="-120"/>
+              </a:rPr>
+              <a:t>4  KOI Script Runner - Refresh Job</a:t>
+            </a:r>
+            <a:endParaRPr lang="en-US" sz="1050" dirty="0"/>
+          </a:p>
+        </p:txBody>
+      </p:sp>
+      <p:sp>
+        <p:nvSpPr>
+          <p:cNvPr id="11" name="Text 9"/>
+          <p:cNvSpPr/>
+          <p:nvPr/>
+        </p:nvSpPr>
+        <p:spPr>
+          <a:xfrm>
+            <a:off x="932688" y="2907792"/>
+            <a:ext cx="5303520" cy="219456"/>
+          </a:xfrm>
+          <a:prstGeom prst="rect">
+            <a:avLst/>
+          </a:prstGeom>
+          <a:noFill/>
+          <a:ln/>
+        </p:spPr>
+        <p:txBody>
+          <a:bodyPr wrap="square" lIns="0" tIns="0" rIns="0" bIns="0" rtlCol="0" anchor="t"/>
+          <a:lstStyle/>
+          <a:p>
+            <a:pPr indent="0" marL="0">
+              <a:buNone/>
+            </a:pPr>
+            <a:r>
+              <a:rPr lang="en-US" sz="1050" dirty="0">
+                <a:solidFill>
+                  <a:srgbClr val="B4B7BD"/>
+                </a:solidFill>
+                <a:latin typeface="Calibri" pitchFamily="34" charset="0"/>
+                <a:ea typeface="Calibri" pitchFamily="34" charset="-122"/>
+                <a:cs typeface="Calibri" pitchFamily="34" charset="-120"/>
+              </a:rPr>
+              <a:t>5  KOI Script Runner - Scan Job</a:t>
+            </a:r>
+            <a:endParaRPr lang="en-US" sz="1050" dirty="0"/>
+          </a:p>
+        </p:txBody>
+      </p:sp>
+      <p:sp>
+        <p:nvSpPr>
+          <p:cNvPr id="12" name="Text 10"/>
+          <p:cNvSpPr/>
+          <p:nvPr/>
+        </p:nvSpPr>
+        <p:spPr>
+          <a:xfrm>
+            <a:off x="822960" y="3200400"/>
+            <a:ext cx="914400" cy="219456"/>
+          </a:xfrm>
+          <a:prstGeom prst="rect">
+            <a:avLst/>
+          </a:prstGeom>
+          <a:noFill/>
+          <a:ln/>
+        </p:spPr>
+        <p:txBody>
+          <a:bodyPr wrap="square" lIns="0" tIns="0" rIns="0" bIns="0" rtlCol="0" anchor="t"/>
+          <a:lstStyle/>
+          <a:p>
+            <a:pPr indent="0" marL="0">
+              <a:buNone/>
+            </a:pPr>
+            <a:r>
+              <a:rPr lang="en-US" sz="1000" i="1" dirty="0">
+                <a:solidFill>
+                  <a:srgbClr val="6E747E"/>
+                </a:solidFill>
+                <a:latin typeface="Calibri" pitchFamily="34" charset="0"/>
+                <a:ea typeface="Calibri" pitchFamily="34" charset="-122"/>
+                <a:cs typeface="Calibri" pitchFamily="34" charset="-120"/>
+              </a:rPr>
+              <a:t>Plus:</a:t>
+            </a:r>
+            <a:endParaRPr lang="en-US" sz="1000" dirty="0"/>
+          </a:p>
+        </p:txBody>
+      </p:sp>
+      <p:sp>
+        <p:nvSpPr>
+          <p:cNvPr id="13" name="Text 11"/>
+          <p:cNvSpPr/>
+          <p:nvPr/>
+        </p:nvSpPr>
+        <p:spPr>
+          <a:xfrm>
+            <a:off x="932688" y="3419856"/>
+            <a:ext cx="5303520" cy="566928"/>
+          </a:xfrm>
+          <a:prstGeom prst="rect">
+            <a:avLst/>
+          </a:prstGeom>
+          <a:noFill/>
+          <a:ln/>
+        </p:spPr>
+        <p:txBody>
+          <a:bodyPr wrap="square" lIns="0" tIns="0" rIns="0" bIns="0" rtlCol="0" anchor="t"/>
+          <a:lstStyle/>
+          <a:p>
+            <a:pPr indent="0" marL="0">
+              <a:lnSpc>
+                <a:spcPts val="1200"/>
+              </a:lnSpc>
+              <a:buNone/>
+            </a:pPr>
+            <a:r>
+              <a:rPr lang="en-US" sz="1050" dirty="0">
+                <a:solidFill>
+                  <a:srgbClr val="B4B7BD"/>
+                </a:solidFill>
+                <a:latin typeface="Calibri" pitchFamily="34" charset="0"/>
+                <a:ea typeface="Calibri" pitchFamily="34" charset="-122"/>
+                <a:cs typeface="Calibri" pitchFamily="34" charset="-120"/>
+              </a:rPr>
+              <a:t>KoiScanTracker — an automation, not a playbook. Ours, and different from the KOI deployment script opposite. For manual upload use dist/automation-KoiScanTracker.yml (one file).</a:t>
+            </a:r>
+            <a:endParaRPr lang="en-US" sz="1050" dirty="0"/>
+          </a:p>
+        </p:txBody>
+      </p:sp>
+      <p:sp>
+        <p:nvSpPr>
+          <p:cNvPr id="14" name="Shape 12"/>
+          <p:cNvSpPr/>
+          <p:nvPr/>
+        </p:nvSpPr>
+        <p:spPr>
+          <a:xfrm>
+            <a:off x="6858000" y="1298448"/>
+            <a:ext cx="4754880" cy="2788920"/>
+          </a:xfrm>
+          <a:prstGeom prst="roundRect">
+            <a:avLst>
+              <a:gd name="adj" fmla="val 1639"/>
             </a:avLst>
           </a:prstGeom>
           <a:solidFill>
@@ -9109,92 +9579,92 @@
       </p:sp>
       <p:sp>
         <p:nvSpPr>
-          <p:cNvPr id="5" name="Text 3"/>
-          <p:cNvSpPr/>
-          <p:nvPr/>
-        </p:nvSpPr>
-        <p:spPr>
-          <a:xfrm>
-            <a:off x="804672" y="1408176"/>
-            <a:ext cx="1463040" cy="201168"/>
-          </a:xfrm>
-          <a:prstGeom prst="rect">
-            <a:avLst/>
-          </a:prstGeom>
-          <a:noFill/>
-          <a:ln/>
-        </p:spPr>
-        <p:txBody>
-          <a:bodyPr wrap="square" lIns="0" tIns="0" rIns="0" bIns="0" rtlCol="0" anchor="t"/>
-          <a:lstStyle/>
-          <a:p>
-            <a:pPr indent="0" marL="0">
-              <a:buNone/>
-            </a:pPr>
-            <a:r>
-              <a:rPr lang="en-US" sz="900" b="1" spc="100" kern="0" dirty="0">
-                <a:solidFill>
-                  <a:srgbClr val="22D3EE"/>
-                </a:solidFill>
-                <a:latin typeface="Calibri" pitchFamily="34" charset="0"/>
-                <a:ea typeface="Calibri" pitchFamily="34" charset="-122"/>
-                <a:cs typeface="Calibri" pitchFamily="34" charset="-120"/>
-              </a:rPr>
-              <a:t>PACK CONTENT</a:t>
-            </a:r>
-            <a:endParaRPr lang="en-US" sz="900" dirty="0"/>
-          </a:p>
-        </p:txBody>
-      </p:sp>
-      <p:sp>
-        <p:nvSpPr>
-          <p:cNvPr id="6" name="Text 4"/>
-          <p:cNvSpPr/>
-          <p:nvPr/>
-        </p:nvSpPr>
-        <p:spPr>
-          <a:xfrm>
-            <a:off x="2139696" y="1408176"/>
-            <a:ext cx="128016" cy="201168"/>
-          </a:xfrm>
-          <a:prstGeom prst="rect">
-            <a:avLst/>
-          </a:prstGeom>
-          <a:noFill/>
-          <a:ln/>
-        </p:spPr>
-        <p:txBody>
-          <a:bodyPr wrap="square" lIns="0" tIns="0" rIns="0" bIns="0" rtlCol="0" anchor="t"/>
-          <a:lstStyle/>
-          <a:p>
-            <a:pPr indent="0" marL="0">
-              <a:buNone/>
-            </a:pPr>
-            <a:r>
-              <a:rPr lang="en-US" sz="1000" b="1" dirty="0">
-                <a:solidFill>
-                  <a:srgbClr val="22D3EE"/>
-                </a:solidFill>
-                <a:latin typeface="Calibri" pitchFamily="34" charset="0"/>
-                <a:ea typeface="Calibri" pitchFamily="34" charset="-122"/>
-                <a:cs typeface="Calibri" pitchFamily="34" charset="-120"/>
-              </a:rPr>
-              <a:t>•</a:t>
-            </a:r>
-            <a:endParaRPr lang="en-US" sz="1000" dirty="0"/>
-          </a:p>
-        </p:txBody>
-      </p:sp>
-      <p:sp>
-        <p:nvSpPr>
-          <p:cNvPr id="7" name="Text 5"/>
-          <p:cNvSpPr/>
-          <p:nvPr/>
-        </p:nvSpPr>
-        <p:spPr>
-          <a:xfrm>
-            <a:off x="2286000" y="1408176"/>
-            <a:ext cx="4343400" cy="192024"/>
+          <p:cNvPr id="15" name="Text 13"/>
+          <p:cNvSpPr/>
+          <p:nvPr/>
+        </p:nvSpPr>
+        <p:spPr>
+          <a:xfrm>
+            <a:off x="7132320" y="1463040"/>
+            <a:ext cx="4206240" cy="237744"/>
+          </a:xfrm>
+          <a:prstGeom prst="rect">
+            <a:avLst/>
+          </a:prstGeom>
+          <a:noFill/>
+          <a:ln/>
+        </p:spPr>
+        <p:txBody>
+          <a:bodyPr wrap="square" lIns="0" tIns="0" rIns="0" bIns="0" rtlCol="0" anchor="t"/>
+          <a:lstStyle/>
+          <a:p>
+            <a:pPr indent="0" marL="0">
+              <a:buNone/>
+            </a:pPr>
+            <a:r>
+              <a:rPr lang="en-US" sz="1050" b="1" spc="100" kern="0" dirty="0">
+                <a:solidFill>
+                  <a:srgbClr val="F5A524"/>
+                </a:solidFill>
+                <a:latin typeface="Calibri" pitchFamily="34" charset="0"/>
+                <a:ea typeface="Calibri" pitchFamily="34" charset="-122"/>
+                <a:cs typeface="Calibri" pitchFamily="34" charset="-120"/>
+              </a:rPr>
+              <a:t>TENANT SETUP</a:t>
+            </a:r>
+            <a:endParaRPr lang="en-US" sz="1050" dirty="0"/>
+          </a:p>
+        </p:txBody>
+      </p:sp>
+      <p:sp>
+        <p:nvSpPr>
+          <p:cNvPr id="16" name="Text 14"/>
+          <p:cNvSpPr/>
+          <p:nvPr/>
+        </p:nvSpPr>
+        <p:spPr>
+          <a:xfrm>
+            <a:off x="7168896" y="1773936"/>
+            <a:ext cx="219456" cy="256032"/>
+          </a:xfrm>
+          <a:prstGeom prst="rect">
+            <a:avLst/>
+          </a:prstGeom>
+          <a:noFill/>
+          <a:ln/>
+        </p:spPr>
+        <p:txBody>
+          <a:bodyPr wrap="square" lIns="0" tIns="0" rIns="0" bIns="0" rtlCol="0" anchor="t"/>
+          <a:lstStyle/>
+          <a:p>
+            <a:pPr indent="0" marL="0">
+              <a:buNone/>
+            </a:pPr>
+            <a:r>
+              <a:rPr lang="en-US" sz="1150" b="1" dirty="0">
+                <a:solidFill>
+                  <a:srgbClr val="3FB950"/>
+                </a:solidFill>
+                <a:latin typeface="Calibri" pitchFamily="34" charset="0"/>
+                <a:ea typeface="Calibri" pitchFamily="34" charset="-122"/>
+                <a:cs typeface="Calibri" pitchFamily="34" charset="-120"/>
+              </a:rPr>
+              <a:t>✓</a:t>
+            </a:r>
+            <a:endParaRPr lang="en-US" sz="1150" dirty="0"/>
+          </a:p>
+        </p:txBody>
+      </p:sp>
+      <p:sp>
+        <p:nvSpPr>
+          <p:cNvPr id="17" name="Text 15"/>
+          <p:cNvSpPr/>
+          <p:nvPr/>
+        </p:nvSpPr>
+        <p:spPr>
+          <a:xfrm>
+            <a:off x="7461504" y="1773936"/>
+            <a:ext cx="3840480" cy="438912"/>
           </a:xfrm>
           <a:prstGeom prst="rect">
             <a:avLst/>
@@ -9208,12 +9678,12 @@
           <a:p>
             <a:pPr indent="0" marL="0">
               <a:lnSpc>
-                <a:spcPts val="1200"/>
+                <a:spcPts val="1500"/>
               </a:lnSpc>
               <a:buNone/>
             </a:pPr>
             <a:r>
-              <a:rPr lang="en-US" sz="1000" dirty="0">
+              <a:rPr lang="en-US" sz="1150" dirty="0">
                 <a:solidFill>
                   <a:srgbClr val="B4B7BD"/>
                 </a:solidFill>
@@ -9221,61 +9691,61 @@
                 <a:ea typeface="Calibri" pitchFamily="34" charset="-122"/>
                 <a:cs typeface="Calibri" pitchFamily="34" charset="-120"/>
               </a:rPr>
-              <a:t>KOI Script Runner - Refresh Job</a:t>
-            </a:r>
-            <a:endParaRPr lang="en-US" sz="1000" dirty="0"/>
-          </a:p>
-        </p:txBody>
-      </p:sp>
-      <p:sp>
-        <p:nvSpPr>
-          <p:cNvPr id="8" name="Text 6"/>
-          <p:cNvSpPr/>
-          <p:nvPr/>
-        </p:nvSpPr>
-        <p:spPr>
-          <a:xfrm>
-            <a:off x="2139696" y="1632204"/>
-            <a:ext cx="128016" cy="201168"/>
-          </a:xfrm>
-          <a:prstGeom prst="rect">
-            <a:avLst/>
-          </a:prstGeom>
-          <a:noFill/>
-          <a:ln/>
-        </p:spPr>
-        <p:txBody>
-          <a:bodyPr wrap="square" lIns="0" tIns="0" rIns="0" bIns="0" rtlCol="0" anchor="t"/>
-          <a:lstStyle/>
-          <a:p>
-            <a:pPr indent="0" marL="0">
-              <a:buNone/>
-            </a:pPr>
-            <a:r>
-              <a:rPr lang="en-US" sz="1000" b="1" dirty="0">
-                <a:solidFill>
-                  <a:srgbClr val="22D3EE"/>
-                </a:solidFill>
-                <a:latin typeface="Calibri" pitchFamily="34" charset="0"/>
-                <a:ea typeface="Calibri" pitchFamily="34" charset="-122"/>
-                <a:cs typeface="Calibri" pitchFamily="34" charset="-120"/>
-              </a:rPr>
-              <a:t>•</a:t>
-            </a:r>
-            <a:endParaRPr lang="en-US" sz="1000" dirty="0"/>
-          </a:p>
-        </p:txBody>
-      </p:sp>
-      <p:sp>
-        <p:nvSpPr>
-          <p:cNvPr id="9" name="Text 7"/>
-          <p:cNvSpPr/>
-          <p:nvPr/>
-        </p:nvSpPr>
-        <p:spPr>
-          <a:xfrm>
-            <a:off x="2286000" y="1632204"/>
-            <a:ext cx="4343400" cy="192024"/>
+              <a:t>Core REST API integration instance — the Refresh job reads endpoint groups through it.</a:t>
+            </a:r>
+            <a:endParaRPr lang="en-US" sz="1150" dirty="0"/>
+          </a:p>
+        </p:txBody>
+      </p:sp>
+      <p:sp>
+        <p:nvSpPr>
+          <p:cNvPr id="18" name="Text 16"/>
+          <p:cNvSpPr/>
+          <p:nvPr/>
+        </p:nvSpPr>
+        <p:spPr>
+          <a:xfrm>
+            <a:off x="7168896" y="2290572"/>
+            <a:ext cx="219456" cy="256032"/>
+          </a:xfrm>
+          <a:prstGeom prst="rect">
+            <a:avLst/>
+          </a:prstGeom>
+          <a:noFill/>
+          <a:ln/>
+        </p:spPr>
+        <p:txBody>
+          <a:bodyPr wrap="square" lIns="0" tIns="0" rIns="0" bIns="0" rtlCol="0" anchor="t"/>
+          <a:lstStyle/>
+          <a:p>
+            <a:pPr indent="0" marL="0">
+              <a:buNone/>
+            </a:pPr>
+            <a:r>
+              <a:rPr lang="en-US" sz="1150" b="1" dirty="0">
+                <a:solidFill>
+                  <a:srgbClr val="3FB950"/>
+                </a:solidFill>
+                <a:latin typeface="Calibri" pitchFamily="34" charset="0"/>
+                <a:ea typeface="Calibri" pitchFamily="34" charset="-122"/>
+                <a:cs typeface="Calibri" pitchFamily="34" charset="-120"/>
+              </a:rPr>
+              <a:t>✓</a:t>
+            </a:r>
+            <a:endParaRPr lang="en-US" sz="1150" dirty="0"/>
+          </a:p>
+        </p:txBody>
+      </p:sp>
+      <p:sp>
+        <p:nvSpPr>
+          <p:cNvPr id="19" name="Text 17"/>
+          <p:cNvSpPr/>
+          <p:nvPr/>
+        </p:nvSpPr>
+        <p:spPr>
+          <a:xfrm>
+            <a:off x="7461504" y="2290572"/>
+            <a:ext cx="3840480" cy="822960"/>
           </a:xfrm>
           <a:prstGeom prst="rect">
             <a:avLst/>
@@ -9289,12 +9759,12 @@
           <a:p>
             <a:pPr indent="0" marL="0">
               <a:lnSpc>
-                <a:spcPts val="1200"/>
+                <a:spcPts val="1500"/>
               </a:lnSpc>
               <a:buNone/>
             </a:pPr>
             <a:r>
-              <a:rPr lang="en-US" sz="1000" dirty="0">
+              <a:rPr lang="en-US" sz="1150" dirty="0">
                 <a:solidFill>
                   <a:srgbClr val="B4B7BD"/>
                 </a:solidFill>
@@ -9302,61 +9772,61 @@
                 <a:ea typeface="Calibri" pitchFamily="34" charset="-122"/>
                 <a:cs typeface="Calibri" pitchFamily="34" charset="-120"/>
               </a:rPr>
-              <a:t>KOI Script Runner - Refresh Entry</a:t>
-            </a:r>
-            <a:endParaRPr lang="en-US" sz="1000" dirty="0"/>
-          </a:p>
-        </p:txBody>
-      </p:sp>
-      <p:sp>
-        <p:nvSpPr>
-          <p:cNvPr id="10" name="Text 8"/>
-          <p:cNvSpPr/>
-          <p:nvPr/>
-        </p:nvSpPr>
-        <p:spPr>
-          <a:xfrm>
-            <a:off x="2139696" y="1856232"/>
-            <a:ext cx="128016" cy="201168"/>
-          </a:xfrm>
-          <a:prstGeom prst="rect">
-            <a:avLst/>
-          </a:prstGeom>
-          <a:noFill/>
-          <a:ln/>
-        </p:spPr>
-        <p:txBody>
-          <a:bodyPr wrap="square" lIns="0" tIns="0" rIns="0" bIns="0" rtlCol="0" anchor="t"/>
-          <a:lstStyle/>
-          <a:p>
-            <a:pPr indent="0" marL="0">
-              <a:buNone/>
-            </a:pPr>
-            <a:r>
-              <a:rPr lang="en-US" sz="1000" b="1" dirty="0">
-                <a:solidFill>
-                  <a:srgbClr val="22D3EE"/>
-                </a:solidFill>
-                <a:latin typeface="Calibri" pitchFamily="34" charset="0"/>
-                <a:ea typeface="Calibri" pitchFamily="34" charset="-122"/>
-                <a:cs typeface="Calibri" pitchFamily="34" charset="-120"/>
-              </a:rPr>
-              <a:t>•</a:t>
-            </a:r>
-            <a:endParaRPr lang="en-US" sz="1000" dirty="0"/>
-          </a:p>
-        </p:txBody>
-      </p:sp>
-      <p:sp>
-        <p:nvSpPr>
-          <p:cNvPr id="11" name="Text 9"/>
-          <p:cNvSpPr/>
-          <p:nvPr/>
-        </p:nvSpPr>
-        <p:spPr>
-          <a:xfrm>
-            <a:off x="2286000" y="1856232"/>
-            <a:ext cx="4343400" cy="192024"/>
+              <a:t>The KOI deployment script in Action Center → Scripts Library. Download it from YOUR KOI console; it is KOI's script, not a Cortex one, and must take no parameters.</a:t>
+            </a:r>
+            <a:endParaRPr lang="en-US" sz="1150" dirty="0"/>
+          </a:p>
+        </p:txBody>
+      </p:sp>
+      <p:sp>
+        <p:nvSpPr>
+          <p:cNvPr id="20" name="Text 18"/>
+          <p:cNvSpPr/>
+          <p:nvPr/>
+        </p:nvSpPr>
+        <p:spPr>
+          <a:xfrm>
+            <a:off x="7168896" y="3182112"/>
+            <a:ext cx="219456" cy="256032"/>
+          </a:xfrm>
+          <a:prstGeom prst="rect">
+            <a:avLst/>
+          </a:prstGeom>
+          <a:noFill/>
+          <a:ln/>
+        </p:spPr>
+        <p:txBody>
+          <a:bodyPr wrap="square" lIns="0" tIns="0" rIns="0" bIns="0" rtlCol="0" anchor="t"/>
+          <a:lstStyle/>
+          <a:p>
+            <a:pPr indent="0" marL="0">
+              <a:buNone/>
+            </a:pPr>
+            <a:r>
+              <a:rPr lang="en-US" sz="1150" b="1" dirty="0">
+                <a:solidFill>
+                  <a:srgbClr val="3FB950"/>
+                </a:solidFill>
+                <a:latin typeface="Calibri" pitchFamily="34" charset="0"/>
+                <a:ea typeface="Calibri" pitchFamily="34" charset="-122"/>
+                <a:cs typeface="Calibri" pitchFamily="34" charset="-120"/>
+              </a:rPr>
+              <a:t>✓</a:t>
+            </a:r>
+            <a:endParaRPr lang="en-US" sz="1150" dirty="0"/>
+          </a:p>
+        </p:txBody>
+      </p:sp>
+      <p:sp>
+        <p:nvSpPr>
+          <p:cNvPr id="21" name="Text 19"/>
+          <p:cNvSpPr/>
+          <p:nvPr/>
+        </p:nvSpPr>
+        <p:spPr>
+          <a:xfrm>
+            <a:off x="7461504" y="3182112"/>
+            <a:ext cx="3840480" cy="438912"/>
           </a:xfrm>
           <a:prstGeom prst="rect">
             <a:avLst/>
@@ -9370,12 +9840,12 @@
           <a:p>
             <a:pPr indent="0" marL="0">
               <a:lnSpc>
-                <a:spcPts val="1200"/>
+                <a:spcPts val="1500"/>
               </a:lnSpc>
               <a:buNone/>
             </a:pPr>
             <a:r>
-              <a:rPr lang="en-US" sz="1000" dirty="0">
+              <a:rPr lang="en-US" sz="1150" dirty="0">
                 <a:solidFill>
                   <a:srgbClr val="B4B7BD"/>
                 </a:solidFill>
@@ -9383,470 +9853,26 @@
                 <a:ea typeface="Calibri" pitchFamily="34" charset="-122"/>
                 <a:cs typeface="Calibri" pitchFamily="34" charset="-120"/>
               </a:rPr>
-              <a:t>KoiScanTracker  (our automation — not the KOI script)</a:t>
-            </a:r>
-            <a:endParaRPr lang="en-US" sz="1000" dirty="0"/>
-          </a:p>
-        </p:txBody>
-      </p:sp>
-      <p:sp>
-        <p:nvSpPr>
-          <p:cNvPr id="12" name="Text 10"/>
-          <p:cNvSpPr/>
-          <p:nvPr/>
-        </p:nvSpPr>
-        <p:spPr>
-          <a:xfrm>
-            <a:off x="2139696" y="2080260"/>
-            <a:ext cx="128016" cy="201168"/>
-          </a:xfrm>
-          <a:prstGeom prst="rect">
-            <a:avLst/>
-          </a:prstGeom>
-          <a:noFill/>
-          <a:ln/>
-        </p:spPr>
-        <p:txBody>
-          <a:bodyPr wrap="square" lIns="0" tIns="0" rIns="0" bIns="0" rtlCol="0" anchor="t"/>
-          <a:lstStyle/>
-          <a:p>
-            <a:pPr indent="0" marL="0">
-              <a:buNone/>
-            </a:pPr>
-            <a:r>
-              <a:rPr lang="en-US" sz="1000" b="1" dirty="0">
-                <a:solidFill>
-                  <a:srgbClr val="22D3EE"/>
-                </a:solidFill>
-                <a:latin typeface="Calibri" pitchFamily="34" charset="0"/>
-                <a:ea typeface="Calibri" pitchFamily="34" charset="-122"/>
-                <a:cs typeface="Calibri" pitchFamily="34" charset="-120"/>
-              </a:rPr>
-              <a:t>•</a:t>
-            </a:r>
-            <a:endParaRPr lang="en-US" sz="1000" dirty="0"/>
-          </a:p>
-        </p:txBody>
-      </p:sp>
-      <p:sp>
-        <p:nvSpPr>
-          <p:cNvPr id="13" name="Text 11"/>
-          <p:cNvSpPr/>
-          <p:nvPr/>
-        </p:nvSpPr>
-        <p:spPr>
-          <a:xfrm>
-            <a:off x="2286000" y="2080260"/>
-            <a:ext cx="4343400" cy="192024"/>
-          </a:xfrm>
-          <a:prstGeom prst="rect">
-            <a:avLst/>
-          </a:prstGeom>
-          <a:noFill/>
-          <a:ln/>
-        </p:spPr>
-        <p:txBody>
-          <a:bodyPr wrap="square" lIns="0" tIns="0" rIns="0" bIns="0" rtlCol="0" anchor="t"/>
-          <a:lstStyle/>
-          <a:p>
-            <a:pPr indent="0" marL="0">
-              <a:lnSpc>
-                <a:spcPts val="1200"/>
-              </a:lnSpc>
-              <a:buNone/>
-            </a:pPr>
-            <a:r>
-              <a:rPr lang="en-US" sz="1000" dirty="0">
-                <a:solidFill>
-                  <a:srgbClr val="B4B7BD"/>
-                </a:solidFill>
-                <a:latin typeface="Calibri" pitchFamily="34" charset="0"/>
-                <a:ea typeface="Calibri" pitchFamily="34" charset="-122"/>
-                <a:cs typeface="Calibri" pitchFamily="34" charset="-120"/>
-              </a:rPr>
-              <a:t>List: Koi Script Runner</a:t>
-            </a:r>
-            <a:endParaRPr lang="en-US" sz="1000" dirty="0"/>
-          </a:p>
-        </p:txBody>
-      </p:sp>
-      <p:sp>
-        <p:nvSpPr>
-          <p:cNvPr id="14" name="Text 12"/>
-          <p:cNvSpPr/>
-          <p:nvPr/>
-        </p:nvSpPr>
-        <p:spPr>
-          <a:xfrm>
-            <a:off x="5669280" y="1408176"/>
-            <a:ext cx="1371600" cy="201168"/>
-          </a:xfrm>
-          <a:prstGeom prst="rect">
-            <a:avLst/>
-          </a:prstGeom>
-          <a:noFill/>
-          <a:ln/>
-        </p:spPr>
-        <p:txBody>
-          <a:bodyPr wrap="square" lIns="0" tIns="0" rIns="0" bIns="0" rtlCol="0" anchor="t"/>
-          <a:lstStyle/>
-          <a:p>
-            <a:pPr indent="0" marL="0">
-              <a:buNone/>
-            </a:pPr>
-            <a:r>
-              <a:rPr lang="en-US" sz="900" b="1" spc="100" kern="0" dirty="0">
-                <a:solidFill>
-                  <a:srgbClr val="F5A524"/>
-                </a:solidFill>
-                <a:latin typeface="Calibri" pitchFamily="34" charset="0"/>
-                <a:ea typeface="Calibri" pitchFamily="34" charset="-122"/>
-                <a:cs typeface="Calibri" pitchFamily="34" charset="-120"/>
-              </a:rPr>
-              <a:t>TENANT SETUP</a:t>
-            </a:r>
-            <a:endParaRPr lang="en-US" sz="900" dirty="0"/>
-          </a:p>
-        </p:txBody>
-      </p:sp>
-      <p:sp>
-        <p:nvSpPr>
-          <p:cNvPr id="15" name="Text 13"/>
-          <p:cNvSpPr/>
-          <p:nvPr/>
-        </p:nvSpPr>
-        <p:spPr>
-          <a:xfrm>
-            <a:off x="6940296" y="1408176"/>
-            <a:ext cx="128016" cy="201168"/>
-          </a:xfrm>
-          <a:prstGeom prst="rect">
-            <a:avLst/>
-          </a:prstGeom>
-          <a:noFill/>
-          <a:ln/>
-        </p:spPr>
-        <p:txBody>
-          <a:bodyPr wrap="square" lIns="0" tIns="0" rIns="0" bIns="0" rtlCol="0" anchor="t"/>
-          <a:lstStyle/>
-          <a:p>
-            <a:pPr indent="0" marL="0">
-              <a:buNone/>
-            </a:pPr>
-            <a:r>
-              <a:rPr lang="en-US" sz="1000" b="1" dirty="0">
-                <a:solidFill>
-                  <a:srgbClr val="F5A524"/>
-                </a:solidFill>
-                <a:latin typeface="Calibri" pitchFamily="34" charset="0"/>
-                <a:ea typeface="Calibri" pitchFamily="34" charset="-122"/>
-                <a:cs typeface="Calibri" pitchFamily="34" charset="-120"/>
-              </a:rPr>
-              <a:t>•</a:t>
-            </a:r>
-            <a:endParaRPr lang="en-US" sz="1000" dirty="0"/>
-          </a:p>
-        </p:txBody>
-      </p:sp>
-      <p:sp>
-        <p:nvSpPr>
-          <p:cNvPr id="16" name="Text 14"/>
-          <p:cNvSpPr/>
-          <p:nvPr/>
-        </p:nvSpPr>
-        <p:spPr>
-          <a:xfrm>
-            <a:off x="7086600" y="1408176"/>
-            <a:ext cx="4343400" cy="192024"/>
-          </a:xfrm>
-          <a:prstGeom prst="rect">
-            <a:avLst/>
-          </a:prstGeom>
-          <a:noFill/>
-          <a:ln/>
-        </p:spPr>
-        <p:txBody>
-          <a:bodyPr wrap="square" lIns="0" tIns="0" rIns="0" bIns="0" rtlCol="0" anchor="t"/>
-          <a:lstStyle/>
-          <a:p>
-            <a:pPr indent="0" marL="0">
-              <a:lnSpc>
-                <a:spcPts val="1200"/>
-              </a:lnSpc>
-              <a:buNone/>
-            </a:pPr>
-            <a:r>
-              <a:rPr lang="en-US" sz="1000" dirty="0">
-                <a:solidFill>
-                  <a:srgbClr val="B4B7BD"/>
-                </a:solidFill>
-                <a:latin typeface="Calibri" pitchFamily="34" charset="0"/>
-                <a:ea typeface="Calibri" pitchFamily="34" charset="-122"/>
-                <a:cs typeface="Calibri" pitchFamily="34" charset="-120"/>
-              </a:rPr>
-              <a:t>Core REST API instance  ← the one people miss</a:t>
-            </a:r>
-            <a:endParaRPr lang="en-US" sz="1000" dirty="0"/>
-          </a:p>
-        </p:txBody>
-      </p:sp>
-      <p:sp>
-        <p:nvSpPr>
-          <p:cNvPr id="17" name="Text 15"/>
-          <p:cNvSpPr/>
-          <p:nvPr/>
-        </p:nvSpPr>
-        <p:spPr>
-          <a:xfrm>
-            <a:off x="6940296" y="1632204"/>
-            <a:ext cx="128016" cy="201168"/>
-          </a:xfrm>
-          <a:prstGeom prst="rect">
-            <a:avLst/>
-          </a:prstGeom>
-          <a:noFill/>
-          <a:ln/>
-        </p:spPr>
-        <p:txBody>
-          <a:bodyPr wrap="square" lIns="0" tIns="0" rIns="0" bIns="0" rtlCol="0" anchor="t"/>
-          <a:lstStyle/>
-          <a:p>
-            <a:pPr indent="0" marL="0">
-              <a:buNone/>
-            </a:pPr>
-            <a:r>
-              <a:rPr lang="en-US" sz="1000" b="1" dirty="0">
-                <a:solidFill>
-                  <a:srgbClr val="F5A524"/>
-                </a:solidFill>
-                <a:latin typeface="Calibri" pitchFamily="34" charset="0"/>
-                <a:ea typeface="Calibri" pitchFamily="34" charset="-122"/>
-                <a:cs typeface="Calibri" pitchFamily="34" charset="-120"/>
-              </a:rPr>
-              <a:t>•</a:t>
-            </a:r>
-            <a:endParaRPr lang="en-US" sz="1000" dirty="0"/>
-          </a:p>
-        </p:txBody>
-      </p:sp>
-      <p:sp>
-        <p:nvSpPr>
-          <p:cNvPr id="18" name="Text 16"/>
-          <p:cNvSpPr/>
-          <p:nvPr/>
-        </p:nvSpPr>
-        <p:spPr>
-          <a:xfrm>
-            <a:off x="7086600" y="1632204"/>
-            <a:ext cx="4343400" cy="576072"/>
-          </a:xfrm>
-          <a:prstGeom prst="rect">
-            <a:avLst/>
-          </a:prstGeom>
-          <a:noFill/>
-          <a:ln/>
-        </p:spPr>
-        <p:txBody>
-          <a:bodyPr wrap="square" lIns="0" tIns="0" rIns="0" bIns="0" rtlCol="0" anchor="t"/>
-          <a:lstStyle/>
-          <a:p>
-            <a:pPr indent="0" marL="0">
-              <a:lnSpc>
-                <a:spcPts val="1200"/>
-              </a:lnSpc>
-              <a:buNone/>
-            </a:pPr>
-            <a:r>
-              <a:rPr lang="en-US" sz="1000" dirty="0">
-                <a:solidFill>
-                  <a:srgbClr val="B4B7BD"/>
-                </a:solidFill>
-                <a:latin typeface="Calibri" pitchFamily="34" charset="0"/>
-                <a:ea typeface="Calibri" pitchFamily="34" charset="-122"/>
-                <a:cs typeface="Calibri" pitchFamily="34" charset="-120"/>
-              </a:rPr>
-              <a:t>KOI deployment script in Action Center — download it from YOUR KOI console first (KOI's script, not a Cortex one; no parameters)</a:t>
-            </a:r>
-            <a:endParaRPr lang="en-US" sz="1000" dirty="0"/>
-          </a:p>
-        </p:txBody>
-      </p:sp>
-      <p:sp>
-        <p:nvSpPr>
-          <p:cNvPr id="19" name="Text 17"/>
-          <p:cNvSpPr/>
-          <p:nvPr/>
-        </p:nvSpPr>
-        <p:spPr>
-          <a:xfrm>
-            <a:off x="6940296" y="2231136"/>
-            <a:ext cx="128016" cy="201168"/>
-          </a:xfrm>
-          <a:prstGeom prst="rect">
-            <a:avLst/>
-          </a:prstGeom>
-          <a:noFill/>
-          <a:ln/>
-        </p:spPr>
-        <p:txBody>
-          <a:bodyPr wrap="square" lIns="0" tIns="0" rIns="0" bIns="0" rtlCol="0" anchor="t"/>
-          <a:lstStyle/>
-          <a:p>
-            <a:pPr indent="0" marL="0">
-              <a:buNone/>
-            </a:pPr>
-            <a:r>
-              <a:rPr lang="en-US" sz="1000" b="1" dirty="0">
-                <a:solidFill>
-                  <a:srgbClr val="F5A524"/>
-                </a:solidFill>
-                <a:latin typeface="Calibri" pitchFamily="34" charset="0"/>
-                <a:ea typeface="Calibri" pitchFamily="34" charset="-122"/>
-                <a:cs typeface="Calibri" pitchFamily="34" charset="-120"/>
-              </a:rPr>
-              <a:t>•</a:t>
-            </a:r>
-            <a:endParaRPr lang="en-US" sz="1000" dirty="0"/>
-          </a:p>
-        </p:txBody>
-      </p:sp>
-      <p:sp>
-        <p:nvSpPr>
-          <p:cNvPr id="20" name="Text 18"/>
-          <p:cNvSpPr/>
-          <p:nvPr/>
-        </p:nvSpPr>
-        <p:spPr>
-          <a:xfrm>
-            <a:off x="7086600" y="2231136"/>
-            <a:ext cx="4343400" cy="192024"/>
-          </a:xfrm>
-          <a:prstGeom prst="rect">
-            <a:avLst/>
-          </a:prstGeom>
-          <a:noFill/>
-          <a:ln/>
-        </p:spPr>
-        <p:txBody>
-          <a:bodyPr wrap="square" lIns="0" tIns="0" rIns="0" bIns="0" rtlCol="0" anchor="t"/>
-          <a:lstStyle/>
-          <a:p>
-            <a:pPr indent="0" marL="0">
-              <a:lnSpc>
-                <a:spcPts val="1200"/>
-              </a:lnSpc>
-              <a:buNone/>
-            </a:pPr>
-            <a:r>
-              <a:rPr lang="en-US" sz="1000" dirty="0">
-                <a:solidFill>
-                  <a:srgbClr val="B4B7BD"/>
-                </a:solidFill>
-                <a:latin typeface="Calibri" pitchFamily="34" charset="0"/>
-                <a:ea typeface="Calibri" pitchFamily="34" charset="-122"/>
-                <a:cs typeface="Calibri" pitchFamily="34" charset="-120"/>
-              </a:rPr>
-              <a:t>An endpoint group — tag the agents, then use a dynamic group</a:t>
-            </a:r>
-            <a:endParaRPr lang="en-US" sz="1000" dirty="0"/>
-          </a:p>
-        </p:txBody>
-      </p:sp>
-      <p:sp>
-        <p:nvSpPr>
-          <p:cNvPr id="21" name="Text 19"/>
-          <p:cNvSpPr/>
-          <p:nvPr/>
-        </p:nvSpPr>
-        <p:spPr>
-          <a:xfrm>
-            <a:off x="6940296" y="2455164"/>
-            <a:ext cx="128016" cy="201168"/>
-          </a:xfrm>
-          <a:prstGeom prst="rect">
-            <a:avLst/>
-          </a:prstGeom>
-          <a:noFill/>
-          <a:ln/>
-        </p:spPr>
-        <p:txBody>
-          <a:bodyPr wrap="square" lIns="0" tIns="0" rIns="0" bIns="0" rtlCol="0" anchor="t"/>
-          <a:lstStyle/>
-          <a:p>
-            <a:pPr indent="0" marL="0">
-              <a:buNone/>
-            </a:pPr>
-            <a:r>
-              <a:rPr lang="en-US" sz="1000" b="1" dirty="0">
-                <a:solidFill>
-                  <a:srgbClr val="F5A524"/>
-                </a:solidFill>
-                <a:latin typeface="Calibri" pitchFamily="34" charset="0"/>
-                <a:ea typeface="Calibri" pitchFamily="34" charset="-122"/>
-                <a:cs typeface="Calibri" pitchFamily="34" charset="-120"/>
-              </a:rPr>
-              <a:t>•</a:t>
-            </a:r>
-            <a:endParaRPr lang="en-US" sz="1000" dirty="0"/>
-          </a:p>
-        </p:txBody>
-      </p:sp>
-      <p:sp>
-        <p:nvSpPr>
-          <p:cNvPr id="22" name="Text 20"/>
-          <p:cNvSpPr/>
-          <p:nvPr/>
-        </p:nvSpPr>
-        <p:spPr>
-          <a:xfrm>
-            <a:off x="7086600" y="2455164"/>
-            <a:ext cx="4343400" cy="192024"/>
-          </a:xfrm>
-          <a:prstGeom prst="rect">
-            <a:avLst/>
-          </a:prstGeom>
-          <a:noFill/>
-          <a:ln/>
-        </p:spPr>
-        <p:txBody>
-          <a:bodyPr wrap="square" lIns="0" tIns="0" rIns="0" bIns="0" rtlCol="0" anchor="t"/>
-          <a:lstStyle/>
-          <a:p>
-            <a:pPr indent="0" marL="0">
-              <a:lnSpc>
-                <a:spcPts val="1200"/>
-              </a:lnSpc>
-              <a:buNone/>
-            </a:pPr>
-            <a:r>
-              <a:rPr lang="en-US" sz="1000" dirty="0">
-                <a:solidFill>
-                  <a:srgbClr val="B4B7BD"/>
-                </a:solidFill>
-                <a:latin typeface="Calibri" pitchFamily="34" charset="0"/>
-                <a:ea typeface="Calibri" pitchFamily="34" charset="-122"/>
-                <a:cs typeface="Calibri" pitchFamily="34" charset="-120"/>
-              </a:rPr>
-              <a:t>The Koi Script Runner List created (step 1)</a:t>
-            </a:r>
-            <a:endParaRPr lang="en-US" sz="1000" dirty="0"/>
-          </a:p>
-        </p:txBody>
-      </p:sp>
-      <p:sp>
-        <p:nvSpPr>
-          <p:cNvPr id="23" name="Shape 21"/>
-          <p:cNvSpPr/>
-          <p:nvPr/>
-        </p:nvSpPr>
-        <p:spPr>
-          <a:xfrm>
-            <a:off x="548640" y="3044952"/>
-            <a:ext cx="6400800" cy="3538728"/>
+              <a:t>An endpoint group — tag the agents, then build a dynamic group on that tag.</a:t>
+            </a:r>
+            <a:endParaRPr lang="en-US" sz="1150" dirty="0"/>
+          </a:p>
+        </p:txBody>
+      </p:sp>
+      <p:sp>
+        <p:nvSpPr>
+          <p:cNvPr id="22" name="Shape 20"/>
+          <p:cNvSpPr/>
+          <p:nvPr/>
+        </p:nvSpPr>
+        <p:spPr>
+          <a:xfrm>
+            <a:off x="548640" y="4187952"/>
+            <a:ext cx="11064240" cy="2395728"/>
           </a:xfrm>
           <a:prstGeom prst="roundRect">
             <a:avLst>
-              <a:gd name="adj" fmla="val 1292"/>
+              <a:gd name="adj" fmla="val 1908"/>
             </a:avLst>
           </a:prstGeom>
           <a:solidFill>
@@ -9862,30 +9888,69 @@
       </p:sp>
       <p:sp>
         <p:nvSpPr>
+          <p:cNvPr id="23" name="Text 21"/>
+          <p:cNvSpPr/>
+          <p:nvPr/>
+        </p:nvSpPr>
+        <p:spPr>
+          <a:xfrm>
+            <a:off x="859536" y="4389120"/>
+            <a:ext cx="5486400" cy="256032"/>
+          </a:xfrm>
+          <a:prstGeom prst="rect">
+            <a:avLst/>
+          </a:prstGeom>
+          <a:noFill/>
+          <a:ln/>
+        </p:spPr>
+        <p:txBody>
+          <a:bodyPr wrap="square" lIns="0" tIns="0" rIns="0" bIns="0" rtlCol="0" anchor="t"/>
+          <a:lstStyle/>
+          <a:p>
+            <a:pPr indent="0" marL="0">
+              <a:buNone/>
+            </a:pPr>
+            <a:r>
+              <a:rPr lang="en-US" sz="1200" b="1" spc="100" kern="0" dirty="0">
+                <a:solidFill>
+                  <a:srgbClr val="E8551F"/>
+                </a:solidFill>
+                <a:latin typeface="Calibri" pitchFamily="34" charset="0"/>
+                <a:ea typeface="Calibri" pitchFamily="34" charset="-122"/>
+                <a:cs typeface="Calibri" pitchFamily="34" charset="-120"/>
+              </a:rPr>
+              <a:t>Do this once, before tests 9 and 10</a:t>
+            </a:r>
+            <a:endParaRPr lang="en-US" sz="1200" dirty="0"/>
+          </a:p>
+        </p:txBody>
+      </p:sp>
+      <p:sp>
+        <p:nvSpPr>
           <p:cNvPr id="24" name="Text 22"/>
           <p:cNvSpPr/>
           <p:nvPr/>
         </p:nvSpPr>
         <p:spPr>
           <a:xfrm>
-            <a:off x="859536" y="3227832"/>
-            <a:ext cx="2743200" cy="256032"/>
-          </a:xfrm>
-          <a:prstGeom prst="rect">
-            <a:avLst/>
-          </a:prstGeom>
-          <a:noFill/>
-          <a:ln/>
-        </p:spPr>
-        <p:txBody>
-          <a:bodyPr wrap="square" lIns="0" tIns="0" rIns="0" bIns="0" rtlCol="0" anchor="t"/>
-          <a:lstStyle/>
-          <a:p>
-            <a:pPr indent="0" marL="0">
-              <a:buNone/>
-            </a:pPr>
-            <a:r>
-              <a:rPr lang="en-US" sz="1200" b="1" spc="100" kern="0" dirty="0">
+            <a:off x="859536" y="4736592"/>
+            <a:ext cx="219456" cy="256032"/>
+          </a:xfrm>
+          <a:prstGeom prst="rect">
+            <a:avLst/>
+          </a:prstGeom>
+          <a:noFill/>
+          <a:ln/>
+        </p:spPr>
+        <p:txBody>
+          <a:bodyPr wrap="square" lIns="0" tIns="0" rIns="0" bIns="0" rtlCol="0" anchor="t"/>
+          <a:lstStyle/>
+          <a:p>
+            <a:pPr indent="0" marL="0">
+              <a:buNone/>
+            </a:pPr>
+            <a:r>
+              <a:rPr lang="en-US" sz="1150" b="1" dirty="0">
                 <a:solidFill>
                   <a:srgbClr val="E8551F"/>
                 </a:solidFill>
@@ -9893,9 +9958,9 @@
                 <a:ea typeface="Calibri" pitchFamily="34" charset="-122"/>
                 <a:cs typeface="Calibri" pitchFamily="34" charset="-120"/>
               </a:rPr>
-              <a:t>Steps</a:t>
-            </a:r>
-            <a:endParaRPr lang="en-US" sz="1200" dirty="0"/>
+              <a:t>1</a:t>
+            </a:r>
+            <a:endParaRPr lang="en-US" sz="1150" dirty="0"/>
           </a:p>
         </p:txBody>
       </p:sp>
@@ -9907,47 +9972,8 @@
         </p:nvSpPr>
         <p:spPr>
           <a:xfrm>
-            <a:off x="859536" y="3575304"/>
-            <a:ext cx="219456" cy="256032"/>
-          </a:xfrm>
-          <a:prstGeom prst="rect">
-            <a:avLst/>
-          </a:prstGeom>
-          <a:noFill/>
-          <a:ln/>
-        </p:spPr>
-        <p:txBody>
-          <a:bodyPr wrap="square" lIns="0" tIns="0" rIns="0" bIns="0" rtlCol="0" anchor="t"/>
-          <a:lstStyle/>
-          <a:p>
-            <a:pPr indent="0" marL="0">
-              <a:buNone/>
-            </a:pPr>
-            <a:r>
-              <a:rPr lang="en-US" sz="1150" b="1" dirty="0">
-                <a:solidFill>
-                  <a:srgbClr val="E8551F"/>
-                </a:solidFill>
-                <a:latin typeface="Calibri" pitchFamily="34" charset="0"/>
-                <a:ea typeface="Calibri" pitchFamily="34" charset="-122"/>
-                <a:cs typeface="Calibri" pitchFamily="34" charset="-120"/>
-              </a:rPr>
-              <a:t>1</a:t>
-            </a:r>
-            <a:endParaRPr lang="en-US" sz="1150" dirty="0"/>
-          </a:p>
-        </p:txBody>
-      </p:sp>
-      <p:sp>
-        <p:nvSpPr>
-          <p:cNvPr id="26" name="Text 24"/>
-          <p:cNvSpPr/>
-          <p:nvPr/>
-        </p:nvSpPr>
-        <p:spPr>
-          <a:xfrm>
-            <a:off x="1152144" y="3575304"/>
-            <a:ext cx="5486400" cy="438912"/>
+            <a:off x="1152144" y="4736592"/>
+            <a:ext cx="10149840" cy="246888"/>
           </a:xfrm>
           <a:prstGeom prst="rect">
             <a:avLst/>
@@ -9974,7 +10000,7 @@
                 <a:ea typeface="Calibri" pitchFamily="34" charset="-122"/>
                 <a:cs typeface="Calibri" pitchFamily="34" charset="-120"/>
               </a:rPr>
-              <a:t>If you installed the pack: the Koi Script Runner List is already there — open Settings → Object Setup → Lists and go to the next step.</a:t>
+              <a:t>Installed the whole pack? All of the above is already on the tenant — go straight to test 9.</a:t>
             </a:r>
             <a:endParaRPr lang="en-US" sz="1150" dirty="0"/>
           </a:p>
@@ -9982,53 +10008,53 @@
       </p:sp>
       <p:sp>
         <p:nvSpPr>
+          <p:cNvPr id="26" name="Text 24"/>
+          <p:cNvSpPr/>
+          <p:nvPr/>
+        </p:nvSpPr>
+        <p:spPr>
+          <a:xfrm>
+            <a:off x="859536" y="5065776"/>
+            <a:ext cx="219456" cy="256032"/>
+          </a:xfrm>
+          <a:prstGeom prst="rect">
+            <a:avLst/>
+          </a:prstGeom>
+          <a:noFill/>
+          <a:ln/>
+        </p:spPr>
+        <p:txBody>
+          <a:bodyPr wrap="square" lIns="0" tIns="0" rIns="0" bIns="0" rtlCol="0" anchor="t"/>
+          <a:lstStyle/>
+          <a:p>
+            <a:pPr indent="0" marL="0">
+              <a:buNone/>
+            </a:pPr>
+            <a:r>
+              <a:rPr lang="en-US" sz="1150" b="1" dirty="0">
+                <a:solidFill>
+                  <a:srgbClr val="E8551F"/>
+                </a:solidFill>
+                <a:latin typeface="Calibri" pitchFamily="34" charset="0"/>
+                <a:ea typeface="Calibri" pitchFamily="34" charset="-122"/>
+                <a:cs typeface="Calibri" pitchFamily="34" charset="-120"/>
+              </a:rPr>
+              <a:t>2</a:t>
+            </a:r>
+            <a:endParaRPr lang="en-US" sz="1150" dirty="0"/>
+          </a:p>
+        </p:txBody>
+      </p:sp>
+      <p:sp>
+        <p:nvSpPr>
           <p:cNvPr id="27" name="Text 25"/>
           <p:cNvSpPr/>
           <p:nvPr/>
         </p:nvSpPr>
         <p:spPr>
           <a:xfrm>
-            <a:off x="859536" y="4091940"/>
-            <a:ext cx="219456" cy="256032"/>
-          </a:xfrm>
-          <a:prstGeom prst="rect">
-            <a:avLst/>
-          </a:prstGeom>
-          <a:noFill/>
-          <a:ln/>
-        </p:spPr>
-        <p:txBody>
-          <a:bodyPr wrap="square" lIns="0" tIns="0" rIns="0" bIns="0" rtlCol="0" anchor="t"/>
-          <a:lstStyle/>
-          <a:p>
-            <a:pPr indent="0" marL="0">
-              <a:buNone/>
-            </a:pPr>
-            <a:r>
-              <a:rPr lang="en-US" sz="1150" b="1" dirty="0">
-                <a:solidFill>
-                  <a:srgbClr val="E8551F"/>
-                </a:solidFill>
-                <a:latin typeface="Calibri" pitchFamily="34" charset="0"/>
-                <a:ea typeface="Calibri" pitchFamily="34" charset="-122"/>
-                <a:cs typeface="Calibri" pitchFamily="34" charset="-120"/>
-              </a:rPr>
-              <a:t>2</a:t>
-            </a:r>
-            <a:endParaRPr lang="en-US" sz="1150" dirty="0"/>
-          </a:p>
-        </p:txBody>
-      </p:sp>
-      <p:sp>
-        <p:nvSpPr>
-          <p:cNvPr id="28" name="Text 26"/>
-          <p:cNvSpPr/>
-          <p:nvPr/>
-        </p:nvSpPr>
-        <p:spPr>
-          <a:xfrm>
-            <a:off x="1152144" y="4091940"/>
-            <a:ext cx="5486400" cy="822960"/>
+            <a:off x="1152144" y="5065776"/>
+            <a:ext cx="10149840" cy="246888"/>
           </a:xfrm>
           <a:prstGeom prst="rect">
             <a:avLst/>
@@ -10055,7 +10081,7 @@
                 <a:ea typeface="Calibri" pitchFamily="34" charset="-122"/>
                 <a:cs typeface="Calibri" pitchFamily="34" charset="-120"/>
               </a:rPr>
-              <a:t>If you uploaded selectively: upload the playbooks and automation listed under PACK CONTENT, then create the List — New List, type JSON, named exactly Koi Script Runner — and paste the block from Lists/README.md (not from list-Koi_Script_Runner.json; its data field is escaped).</a:t>
+              <a:t>Uploading selectively? Automation → Playbooks → Import for the five playbooks, in the order listed.</a:t>
             </a:r>
             <a:endParaRPr lang="en-US" sz="1150" dirty="0"/>
           </a:p>
@@ -10063,53 +10089,53 @@
       </p:sp>
       <p:sp>
         <p:nvSpPr>
+          <p:cNvPr id="28" name="Text 26"/>
+          <p:cNvSpPr/>
+          <p:nvPr/>
+        </p:nvSpPr>
+        <p:spPr>
+          <a:xfrm>
+            <a:off x="859536" y="5394960"/>
+            <a:ext cx="219456" cy="256032"/>
+          </a:xfrm>
+          <a:prstGeom prst="rect">
+            <a:avLst/>
+          </a:prstGeom>
+          <a:noFill/>
+          <a:ln/>
+        </p:spPr>
+        <p:txBody>
+          <a:bodyPr wrap="square" lIns="0" tIns="0" rIns="0" bIns="0" rtlCol="0" anchor="t"/>
+          <a:lstStyle/>
+          <a:p>
+            <a:pPr indent="0" marL="0">
+              <a:buNone/>
+            </a:pPr>
+            <a:r>
+              <a:rPr lang="en-US" sz="1150" b="1" dirty="0">
+                <a:solidFill>
+                  <a:srgbClr val="E8551F"/>
+                </a:solidFill>
+                <a:latin typeface="Calibri" pitchFamily="34" charset="0"/>
+                <a:ea typeface="Calibri" pitchFamily="34" charset="-122"/>
+                <a:cs typeface="Calibri" pitchFamily="34" charset="-120"/>
+              </a:rPr>
+              <a:t>3</a:t>
+            </a:r>
+            <a:endParaRPr lang="en-US" sz="1150" dirty="0"/>
+          </a:p>
+        </p:txBody>
+      </p:sp>
+      <p:sp>
+        <p:nvSpPr>
           <p:cNvPr id="29" name="Text 27"/>
           <p:cNvSpPr/>
           <p:nvPr/>
         </p:nvSpPr>
         <p:spPr>
           <a:xfrm>
-            <a:off x="859536" y="4983480"/>
-            <a:ext cx="219456" cy="256032"/>
-          </a:xfrm>
-          <a:prstGeom prst="rect">
-            <a:avLst/>
-          </a:prstGeom>
-          <a:noFill/>
-          <a:ln/>
-        </p:spPr>
-        <p:txBody>
-          <a:bodyPr wrap="square" lIns="0" tIns="0" rIns="0" bIns="0" rtlCol="0" anchor="t"/>
-          <a:lstStyle/>
-          <a:p>
-            <a:pPr indent="0" marL="0">
-              <a:buNone/>
-            </a:pPr>
-            <a:r>
-              <a:rPr lang="en-US" sz="1150" b="1" dirty="0">
-                <a:solidFill>
-                  <a:srgbClr val="E8551F"/>
-                </a:solidFill>
-                <a:latin typeface="Calibri" pitchFamily="34" charset="0"/>
-                <a:ea typeface="Calibri" pitchFamily="34" charset="-122"/>
-                <a:cs typeface="Calibri" pitchFamily="34" charset="-120"/>
-              </a:rPr>
-              <a:t>3</a:t>
-            </a:r>
-            <a:endParaRPr lang="en-US" sz="1150" dirty="0"/>
-          </a:p>
-        </p:txBody>
-      </p:sp>
-      <p:sp>
-        <p:nvSpPr>
-          <p:cNvPr id="30" name="Text 28"/>
-          <p:cNvSpPr/>
-          <p:nvPr/>
-        </p:nvSpPr>
-        <p:spPr>
-          <a:xfrm>
-            <a:off x="1152144" y="4983480"/>
-            <a:ext cx="5486400" cy="438912"/>
+            <a:off x="1152144" y="5394960"/>
+            <a:ext cx="10149840" cy="438912"/>
           </a:xfrm>
           <a:prstGeom prst="rect">
             <a:avLst/>
@@ -10136,7 +10162,7 @@
                 <a:ea typeface="Calibri" pitchFamily="34" charset="-122"/>
                 <a:cs typeface="Calibri" pitchFamily="34" charset="-120"/>
               </a:rPr>
-              <a:t>Edit two things only: endpoint_groups (your group) and script.name (the KOI script exactly as it appears in Action Center). One entry per OS.</a:t>
+              <a:t>Automation → Scripts → Import for KoiScanTracker — upload dist/automation-KoiScanTracker.yml. One file, code already inside; do not upload the two files under Scripts/.</a:t>
             </a:r>
             <a:endParaRPr lang="en-US" sz="1150" dirty="0"/>
           </a:p>
@@ -10144,53 +10170,53 @@
       </p:sp>
       <p:sp>
         <p:nvSpPr>
+          <p:cNvPr id="30" name="Text 28"/>
+          <p:cNvSpPr/>
+          <p:nvPr/>
+        </p:nvSpPr>
+        <p:spPr>
+          <a:xfrm>
+            <a:off x="859536" y="5911596"/>
+            <a:ext cx="219456" cy="256032"/>
+          </a:xfrm>
+          <a:prstGeom prst="rect">
+            <a:avLst/>
+          </a:prstGeom>
+          <a:noFill/>
+          <a:ln/>
+        </p:spPr>
+        <p:txBody>
+          <a:bodyPr wrap="square" lIns="0" tIns="0" rIns="0" bIns="0" rtlCol="0" anchor="t"/>
+          <a:lstStyle/>
+          <a:p>
+            <a:pPr indent="0" marL="0">
+              <a:buNone/>
+            </a:pPr>
+            <a:r>
+              <a:rPr lang="en-US" sz="1150" b="1" dirty="0">
+                <a:solidFill>
+                  <a:srgbClr val="E8551F"/>
+                </a:solidFill>
+                <a:latin typeface="Calibri" pitchFamily="34" charset="0"/>
+                <a:ea typeface="Calibri" pitchFamily="34" charset="-122"/>
+                <a:cs typeface="Calibri" pitchFamily="34" charset="-120"/>
+              </a:rPr>
+              <a:t>4</a:t>
+            </a:r>
+            <a:endParaRPr lang="en-US" sz="1150" dirty="0"/>
+          </a:p>
+        </p:txBody>
+      </p:sp>
+      <p:sp>
+        <p:nvSpPr>
           <p:cNvPr id="31" name="Text 29"/>
           <p:cNvSpPr/>
           <p:nvPr/>
         </p:nvSpPr>
         <p:spPr>
           <a:xfrm>
-            <a:off x="859536" y="5500116"/>
-            <a:ext cx="219456" cy="256032"/>
-          </a:xfrm>
-          <a:prstGeom prst="rect">
-            <a:avLst/>
-          </a:prstGeom>
-          <a:noFill/>
-          <a:ln/>
-        </p:spPr>
-        <p:txBody>
-          <a:bodyPr wrap="square" lIns="0" tIns="0" rIns="0" bIns="0" rtlCol="0" anchor="t"/>
-          <a:lstStyle/>
-          <a:p>
-            <a:pPr indent="0" marL="0">
-              <a:buNone/>
-            </a:pPr>
-            <a:r>
-              <a:rPr lang="en-US" sz="1150" b="1" dirty="0">
-                <a:solidFill>
-                  <a:srgbClr val="E8551F"/>
-                </a:solidFill>
-                <a:latin typeface="Calibri" pitchFamily="34" charset="0"/>
-                <a:ea typeface="Calibri" pitchFamily="34" charset="-122"/>
-                <a:cs typeface="Calibri" pitchFamily="34" charset="-120"/>
-              </a:rPr>
-              <a:t>4</a:t>
-            </a:r>
-            <a:endParaRPr lang="en-US" sz="1150" dirty="0"/>
-          </a:p>
-        </p:txBody>
-      </p:sp>
-      <p:sp>
-        <p:nvSpPr>
-          <p:cNvPr id="32" name="Text 30"/>
-          <p:cNvSpPr/>
-          <p:nvPr/>
-        </p:nvSpPr>
-        <p:spPr>
-          <a:xfrm>
-            <a:off x="1152144" y="5500116"/>
-            <a:ext cx="5486400" cy="438912"/>
+            <a:off x="1152144" y="5911596"/>
+            <a:ext cx="10149840" cy="246888"/>
           </a:xfrm>
           <a:prstGeom prst="rect">
             <a:avLst/>
@@ -10217,7 +10243,7 @@
                 <a:ea typeface="Calibri" pitchFamily="34" charset="-122"/>
                 <a:cs typeface="Calibri" pitchFamily="34" charset="-120"/>
               </a:rPr>
-              <a:t>Everything else — tracker_list, rescan_interval_hours, max_endpoints — already has working defaults.</a:t>
+              <a:t>Settings → Object Setup → Lists → New List, type JSON, named exactly Koi Script Runner. Paste the block from Lists/README.md.</a:t>
             </a:r>
             <a:endParaRPr lang="en-US" sz="1150" dirty="0"/>
           </a:p>
@@ -10225,53 +10251,53 @@
       </p:sp>
       <p:sp>
         <p:nvSpPr>
+          <p:cNvPr id="32" name="Text 30"/>
+          <p:cNvSpPr/>
+          <p:nvPr/>
+        </p:nvSpPr>
+        <p:spPr>
+          <a:xfrm>
+            <a:off x="859536" y="6240780"/>
+            <a:ext cx="219456" cy="256032"/>
+          </a:xfrm>
+          <a:prstGeom prst="rect">
+            <a:avLst/>
+          </a:prstGeom>
+          <a:noFill/>
+          <a:ln/>
+        </p:spPr>
+        <p:txBody>
+          <a:bodyPr wrap="square" lIns="0" tIns="0" rIns="0" bIns="0" rtlCol="0" anchor="t"/>
+          <a:lstStyle/>
+          <a:p>
+            <a:pPr indent="0" marL="0">
+              <a:buNone/>
+            </a:pPr>
+            <a:r>
+              <a:rPr lang="en-US" sz="1150" b="1" dirty="0">
+                <a:solidFill>
+                  <a:srgbClr val="E8551F"/>
+                </a:solidFill>
+                <a:latin typeface="Calibri" pitchFamily="34" charset="0"/>
+                <a:ea typeface="Calibri" pitchFamily="34" charset="-122"/>
+                <a:cs typeface="Calibri" pitchFamily="34" charset="-120"/>
+              </a:rPr>
+              <a:t>5</a:t>
+            </a:r>
+            <a:endParaRPr lang="en-US" sz="1150" dirty="0"/>
+          </a:p>
+        </p:txBody>
+      </p:sp>
+      <p:sp>
+        <p:nvSpPr>
           <p:cNvPr id="33" name="Text 31"/>
           <p:cNvSpPr/>
           <p:nvPr/>
         </p:nvSpPr>
         <p:spPr>
           <a:xfrm>
-            <a:off x="859536" y="6016752"/>
-            <a:ext cx="219456" cy="256032"/>
-          </a:xfrm>
-          <a:prstGeom prst="rect">
-            <a:avLst/>
-          </a:prstGeom>
-          <a:noFill/>
-          <a:ln/>
-        </p:spPr>
-        <p:txBody>
-          <a:bodyPr wrap="square" lIns="0" tIns="0" rIns="0" bIns="0" rtlCol="0" anchor="t"/>
-          <a:lstStyle/>
-          <a:p>
-            <a:pPr indent="0" marL="0">
-              <a:buNone/>
-            </a:pPr>
-            <a:r>
-              <a:rPr lang="en-US" sz="1150" b="1" dirty="0">
-                <a:solidFill>
-                  <a:srgbClr val="E8551F"/>
-                </a:solidFill>
-                <a:latin typeface="Calibri" pitchFamily="34" charset="0"/>
-                <a:ea typeface="Calibri" pitchFamily="34" charset="-122"/>
-                <a:cs typeface="Calibri" pitchFamily="34" charset="-120"/>
-              </a:rPr>
-              <a:t>5</a:t>
-            </a:r>
-            <a:endParaRPr lang="en-US" sz="1150" dirty="0"/>
-          </a:p>
-        </p:txBody>
-      </p:sp>
-      <p:sp>
-        <p:nvSpPr>
-          <p:cNvPr id="34" name="Text 32"/>
-          <p:cNvSpPr/>
-          <p:nvPr/>
-        </p:nvSpPr>
-        <p:spPr>
-          <a:xfrm>
-            <a:off x="1152144" y="6016752"/>
-            <a:ext cx="5486400" cy="438912"/>
+            <a:off x="1152144" y="6240780"/>
+            <a:ext cx="10149840" cy="246888"/>
           </a:xfrm>
           <a:prstGeom prst="rect">
             <a:avLst/>
@@ -10298,397 +10324,7 @@
                 <a:ea typeface="Calibri" pitchFamily="34" charset="-122"/>
                 <a:cs typeface="Calibri" pitchFamily="34" charset="-120"/>
               </a:rPr>
-              <a:t>Automation → Jobs → New Job → time-triggered → playbook KOI Script Runner - Refresh Job.</a:t>
-            </a:r>
-            <a:endParaRPr lang="en-US" sz="1150" dirty="0"/>
-          </a:p>
-        </p:txBody>
-      </p:sp>
-      <p:sp>
-        <p:nvSpPr>
-          <p:cNvPr id="35" name="Text 33"/>
-          <p:cNvSpPr/>
-          <p:nvPr/>
-        </p:nvSpPr>
-        <p:spPr>
-          <a:xfrm>
-            <a:off x="859536" y="6533388"/>
-            <a:ext cx="219456" cy="256032"/>
-          </a:xfrm>
-          <a:prstGeom prst="rect">
-            <a:avLst/>
-          </a:prstGeom>
-          <a:noFill/>
-          <a:ln/>
-        </p:spPr>
-        <p:txBody>
-          <a:bodyPr wrap="square" lIns="0" tIns="0" rIns="0" bIns="0" rtlCol="0" anchor="t"/>
-          <a:lstStyle/>
-          <a:p>
-            <a:pPr indent="0" marL="0">
-              <a:buNone/>
-            </a:pPr>
-            <a:r>
-              <a:rPr lang="en-US" sz="1150" b="1" dirty="0">
-                <a:solidFill>
-                  <a:srgbClr val="E8551F"/>
-                </a:solidFill>
-                <a:latin typeface="Calibri" pitchFamily="34" charset="0"/>
-                <a:ea typeface="Calibri" pitchFamily="34" charset="-122"/>
-                <a:cs typeface="Calibri" pitchFamily="34" charset="-120"/>
-              </a:rPr>
-              <a:t>6</a:t>
-            </a:r>
-            <a:endParaRPr lang="en-US" sz="1150" dirty="0"/>
-          </a:p>
-        </p:txBody>
-      </p:sp>
-      <p:sp>
-        <p:nvSpPr>
-          <p:cNvPr id="36" name="Text 34"/>
-          <p:cNvSpPr/>
-          <p:nvPr/>
-        </p:nvSpPr>
-        <p:spPr>
-          <a:xfrm>
-            <a:off x="1152144" y="6533388"/>
-            <a:ext cx="5486400" cy="246888"/>
-          </a:xfrm>
-          <a:prstGeom prst="rect">
-            <a:avLst/>
-          </a:prstGeom>
-          <a:noFill/>
-          <a:ln/>
-        </p:spPr>
-        <p:txBody>
-          <a:bodyPr wrap="square" lIns="0" tIns="0" rIns="0" bIns="0" rtlCol="0" anchor="t"/>
-          <a:lstStyle/>
-          <a:p>
-            <a:pPr indent="0" marL="0">
-              <a:lnSpc>
-                <a:spcPts val="1500"/>
-              </a:lnSpc>
-              <a:buNone/>
-            </a:pPr>
-            <a:r>
-              <a:rPr lang="en-US" sz="1150" dirty="0">
-                <a:solidFill>
-                  <a:srgbClr val="B4B7BD"/>
-                </a:solidFill>
-                <a:latin typeface="Calibri" pitchFamily="34" charset="0"/>
-                <a:ea typeface="Calibri" pitchFamily="34" charset="-122"/>
-                <a:cs typeface="Calibri" pitchFamily="34" charset="-120"/>
-              </a:rPr>
-              <a:t>Enable the Job, then use Run now.</a:t>
-            </a:r>
-            <a:endParaRPr lang="en-US" sz="1150" dirty="0"/>
-          </a:p>
-        </p:txBody>
-      </p:sp>
-      <p:sp>
-        <p:nvSpPr>
-          <p:cNvPr id="37" name="Shape 35"/>
-          <p:cNvSpPr/>
-          <p:nvPr/>
-        </p:nvSpPr>
-        <p:spPr>
-          <a:xfrm>
-            <a:off x="7315200" y="3044952"/>
-            <a:ext cx="4297680" cy="3538728"/>
-          </a:xfrm>
-          <a:prstGeom prst="roundRect">
-            <a:avLst>
-              <a:gd name="adj" fmla="val 1292"/>
-            </a:avLst>
-          </a:prstGeom>
-          <a:solidFill>
-            <a:srgbClr val="1C2026"/>
-          </a:solidFill>
-          <a:ln w="12700">
-            <a:solidFill>
-              <a:srgbClr val="1C2026"/>
-            </a:solidFill>
-            <a:prstDash val="solid"/>
-          </a:ln>
-        </p:spPr>
-      </p:sp>
-      <p:sp>
-        <p:nvSpPr>
-          <p:cNvPr id="38" name="Text 36"/>
-          <p:cNvSpPr/>
-          <p:nvPr/>
-        </p:nvSpPr>
-        <p:spPr>
-          <a:xfrm>
-            <a:off x="7626096" y="3227832"/>
-            <a:ext cx="3108960" cy="256032"/>
-          </a:xfrm>
-          <a:prstGeom prst="rect">
-            <a:avLst/>
-          </a:prstGeom>
-          <a:noFill/>
-          <a:ln/>
-        </p:spPr>
-        <p:txBody>
-          <a:bodyPr wrap="square" lIns="0" tIns="0" rIns="0" bIns="0" rtlCol="0" anchor="t"/>
-          <a:lstStyle/>
-          <a:p>
-            <a:pPr indent="0" marL="0">
-              <a:buNone/>
-            </a:pPr>
-            <a:r>
-              <a:rPr lang="en-US" sz="1200" b="1" spc="100" kern="0" dirty="0">
-                <a:solidFill>
-                  <a:srgbClr val="3FB950"/>
-                </a:solidFill>
-                <a:latin typeface="Calibri" pitchFamily="34" charset="0"/>
-                <a:ea typeface="Calibri" pitchFamily="34" charset="-122"/>
-                <a:cs typeface="Calibri" pitchFamily="34" charset="-120"/>
-              </a:rPr>
-              <a:t>What to expect</a:t>
-            </a:r>
-            <a:endParaRPr lang="en-US" sz="1200" dirty="0"/>
-          </a:p>
-        </p:txBody>
-      </p:sp>
-      <p:sp>
-        <p:nvSpPr>
-          <p:cNvPr id="39" name="Text 37"/>
-          <p:cNvSpPr/>
-          <p:nvPr/>
-        </p:nvSpPr>
-        <p:spPr>
-          <a:xfrm>
-            <a:off x="7626096" y="3575304"/>
-            <a:ext cx="219456" cy="256032"/>
-          </a:xfrm>
-          <a:prstGeom prst="rect">
-            <a:avLst/>
-          </a:prstGeom>
-          <a:noFill/>
-          <a:ln/>
-        </p:spPr>
-        <p:txBody>
-          <a:bodyPr wrap="square" lIns="0" tIns="0" rIns="0" bIns="0" rtlCol="0" anchor="t"/>
-          <a:lstStyle/>
-          <a:p>
-            <a:pPr indent="0" marL="0">
-              <a:buNone/>
-            </a:pPr>
-            <a:r>
-              <a:rPr lang="en-US" sz="1150" b="1" dirty="0">
-                <a:solidFill>
-                  <a:srgbClr val="3FB950"/>
-                </a:solidFill>
-                <a:latin typeface="Calibri" pitchFamily="34" charset="0"/>
-                <a:ea typeface="Calibri" pitchFamily="34" charset="-122"/>
-                <a:cs typeface="Calibri" pitchFamily="34" charset="-120"/>
-              </a:rPr>
-              <a:t>✓</a:t>
-            </a:r>
-            <a:endParaRPr lang="en-US" sz="1150" dirty="0"/>
-          </a:p>
-        </p:txBody>
-      </p:sp>
-      <p:sp>
-        <p:nvSpPr>
-          <p:cNvPr id="40" name="Text 38"/>
-          <p:cNvSpPr/>
-          <p:nvPr/>
-        </p:nvSpPr>
-        <p:spPr>
-          <a:xfrm>
-            <a:off x="7918704" y="3575304"/>
-            <a:ext cx="3383280" cy="438912"/>
-          </a:xfrm>
-          <a:prstGeom prst="rect">
-            <a:avLst/>
-          </a:prstGeom>
-          <a:noFill/>
-          <a:ln/>
-        </p:spPr>
-        <p:txBody>
-          <a:bodyPr wrap="square" lIns="0" tIns="0" rIns="0" bIns="0" rtlCol="0" anchor="t"/>
-          <a:lstStyle/>
-          <a:p>
-            <a:pPr indent="0" marL="0">
-              <a:lnSpc>
-                <a:spcPts val="1500"/>
-              </a:lnSpc>
-              <a:buNone/>
-            </a:pPr>
-            <a:r>
-              <a:rPr lang="en-US" sz="1150" dirty="0">
-                <a:solidFill>
-                  <a:srgbClr val="B4B7BD"/>
-                </a:solidFill>
-                <a:latin typeface="Calibri" pitchFamily="34" charset="0"/>
-                <a:ea typeface="Calibri" pitchFamily="34" charset="-122"/>
-                <a:cs typeface="Calibri" pitchFamily="34" charset="-120"/>
-              </a:rPr>
-              <a:t>A tracker List appears under Lists, named as in your entry.</a:t>
-            </a:r>
-            <a:endParaRPr lang="en-US" sz="1150" dirty="0"/>
-          </a:p>
-        </p:txBody>
-      </p:sp>
-      <p:sp>
-        <p:nvSpPr>
-          <p:cNvPr id="41" name="Text 39"/>
-          <p:cNvSpPr/>
-          <p:nvPr/>
-        </p:nvSpPr>
-        <p:spPr>
-          <a:xfrm>
-            <a:off x="7626096" y="4091940"/>
-            <a:ext cx="219456" cy="256032"/>
-          </a:xfrm>
-          <a:prstGeom prst="rect">
-            <a:avLst/>
-          </a:prstGeom>
-          <a:noFill/>
-          <a:ln/>
-        </p:spPr>
-        <p:txBody>
-          <a:bodyPr wrap="square" lIns="0" tIns="0" rIns="0" bIns="0" rtlCol="0" anchor="t"/>
-          <a:lstStyle/>
-          <a:p>
-            <a:pPr indent="0" marL="0">
-              <a:buNone/>
-            </a:pPr>
-            <a:r>
-              <a:rPr lang="en-US" sz="1150" b="1" dirty="0">
-                <a:solidFill>
-                  <a:srgbClr val="3FB950"/>
-                </a:solidFill>
-                <a:latin typeface="Calibri" pitchFamily="34" charset="0"/>
-                <a:ea typeface="Calibri" pitchFamily="34" charset="-122"/>
-                <a:cs typeface="Calibri" pitchFamily="34" charset="-120"/>
-              </a:rPr>
-              <a:t>✓</a:t>
-            </a:r>
-            <a:endParaRPr lang="en-US" sz="1150" dirty="0"/>
-          </a:p>
-        </p:txBody>
-      </p:sp>
-      <p:sp>
-        <p:nvSpPr>
-          <p:cNvPr id="42" name="Text 40"/>
-          <p:cNvSpPr/>
-          <p:nvPr/>
-        </p:nvSpPr>
-        <p:spPr>
-          <a:xfrm>
-            <a:off x="7918704" y="4091940"/>
-            <a:ext cx="3383280" cy="438912"/>
-          </a:xfrm>
-          <a:prstGeom prst="rect">
-            <a:avLst/>
-          </a:prstGeom>
-          <a:noFill/>
-          <a:ln/>
-        </p:spPr>
-        <p:txBody>
-          <a:bodyPr wrap="square" lIns="0" tIns="0" rIns="0" bIns="0" rtlCol="0" anchor="t"/>
-          <a:lstStyle/>
-          <a:p>
-            <a:pPr indent="0" marL="0">
-              <a:lnSpc>
-                <a:spcPts val="1500"/>
-              </a:lnSpc>
-              <a:buNone/>
-            </a:pPr>
-            <a:r>
-              <a:rPr lang="en-US" sz="1150" dirty="0">
-                <a:solidFill>
-                  <a:srgbClr val="B4B7BD"/>
-                </a:solidFill>
-                <a:latin typeface="Calibri" pitchFamily="34" charset="0"/>
-                <a:ea typeface="Calibri" pitchFamily="34" charset="-122"/>
-                <a:cs typeface="Calibri" pitchFamily="34" charset="-120"/>
-              </a:rPr>
-              <a:t>It fills with one row per endpoint: an id and a last-scan value.</a:t>
-            </a:r>
-            <a:endParaRPr lang="en-US" sz="1150" dirty="0"/>
-          </a:p>
-        </p:txBody>
-      </p:sp>
-      <p:sp>
-        <p:nvSpPr>
-          <p:cNvPr id="43" name="Text 41"/>
-          <p:cNvSpPr/>
-          <p:nvPr/>
-        </p:nvSpPr>
-        <p:spPr>
-          <a:xfrm>
-            <a:off x="7626096" y="4608576"/>
-            <a:ext cx="219456" cy="256032"/>
-          </a:xfrm>
-          <a:prstGeom prst="rect">
-            <a:avLst/>
-          </a:prstGeom>
-          <a:noFill/>
-          <a:ln/>
-        </p:spPr>
-        <p:txBody>
-          <a:bodyPr wrap="square" lIns="0" tIns="0" rIns="0" bIns="0" rtlCol="0" anchor="t"/>
-          <a:lstStyle/>
-          <a:p>
-            <a:pPr indent="0" marL="0">
-              <a:buNone/>
-            </a:pPr>
-            <a:r>
-              <a:rPr lang="en-US" sz="1150" b="1" dirty="0">
-                <a:solidFill>
-                  <a:srgbClr val="3FB950"/>
-                </a:solidFill>
-                <a:latin typeface="Calibri" pitchFamily="34" charset="0"/>
-                <a:ea typeface="Calibri" pitchFamily="34" charset="-122"/>
-                <a:cs typeface="Calibri" pitchFamily="34" charset="-120"/>
-              </a:rPr>
-              <a:t>✓</a:t>
-            </a:r>
-            <a:endParaRPr lang="en-US" sz="1150" dirty="0"/>
-          </a:p>
-        </p:txBody>
-      </p:sp>
-      <p:sp>
-        <p:nvSpPr>
-          <p:cNvPr id="44" name="Text 42"/>
-          <p:cNvSpPr/>
-          <p:nvPr/>
-        </p:nvSpPr>
-        <p:spPr>
-          <a:xfrm>
-            <a:off x="7918704" y="4608576"/>
-            <a:ext cx="3383280" cy="438912"/>
-          </a:xfrm>
-          <a:prstGeom prst="rect">
-            <a:avLst/>
-          </a:prstGeom>
-          <a:noFill/>
-          <a:ln/>
-        </p:spPr>
-        <p:txBody>
-          <a:bodyPr wrap="square" lIns="0" tIns="0" rIns="0" bIns="0" rtlCol="0" anchor="t"/>
-          <a:lstStyle/>
-          <a:p>
-            <a:pPr indent="0" marL="0">
-              <a:lnSpc>
-                <a:spcPts val="1500"/>
-              </a:lnSpc>
-              <a:buNone/>
-            </a:pPr>
-            <a:r>
-              <a:rPr lang="en-US" sz="1150" dirty="0">
-                <a:solidFill>
-                  <a:srgbClr val="B4B7BD"/>
-                </a:solidFill>
-                <a:latin typeface="Calibri" pitchFamily="34" charset="0"/>
-                <a:ea typeface="Calibri" pitchFamily="34" charset="-122"/>
-                <a:cs typeface="Calibri" pitchFamily="34" charset="-120"/>
-              </a:rPr>
-              <a:t>Re-running adds new endpoints without disturbing existing rows.</a:t>
+              <a:t>Edit two things in that List: endpoint_groups and script.name. One entry per OS; the rest has working defaults.</a:t>
             </a:r>
             <a:endParaRPr lang="en-US" sz="1150" dirty="0"/>
           </a:p>
@@ -10759,7 +10395,7 @@
                 <a:ea typeface="Calibri" pitchFamily="34" charset="-122"/>
                 <a:cs typeface="Calibri" pitchFamily="34" charset="-120"/>
               </a:rPr>
-              <a:t>TEST 10</a:t>
+              <a:t>TEST 9</a:t>
             </a:r>
             <a:endParaRPr lang="en-US" sz="1100" dirty="0"/>
           </a:p>
@@ -10798,7 +10434,7 @@
                 <a:ea typeface="Calibri" pitchFamily="34" charset="-122"/>
                 <a:cs typeface="Calibri" pitchFamily="34" charset="-120"/>
               </a:rPr>
-              <a:t>Script Runner — scan due endpoints</a:t>
+              <a:t>Script Runner — refresh the tracker</a:t>
             </a:r>
             <a:endParaRPr lang="en-US" sz="3100" dirty="0"/>
           </a:p>
@@ -10945,7 +10581,7 @@
                 <a:ea typeface="Calibri" pitchFamily="34" charset="-122"/>
                 <a:cs typeface="Calibri" pitchFamily="34" charset="-120"/>
               </a:rPr>
-              <a:t>KOI Script Runner - Scan Job</a:t>
+              <a:t>KOI Script Runner - Refresh Job</a:t>
             </a:r>
             <a:endParaRPr lang="en-US" sz="1000" dirty="0"/>
           </a:p>
@@ -11026,7 +10662,7 @@
                 <a:ea typeface="Calibri" pitchFamily="34" charset="-122"/>
                 <a:cs typeface="Calibri" pitchFamily="34" charset="-120"/>
               </a:rPr>
-              <a:t>KOI Script Runner - Process Config Entry</a:t>
+              <a:t>KOI Script Runner - Refresh Entry</a:t>
             </a:r>
             <a:endParaRPr lang="en-US" sz="1000" dirty="0"/>
           </a:p>
@@ -11107,7 +10743,7 @@
                 <a:ea typeface="Calibri" pitchFamily="34" charset="-122"/>
                 <a:cs typeface="Calibri" pitchFamily="34" charset="-120"/>
               </a:rPr>
-              <a:t>KOI Script Runner - Execute Endpoint Script</a:t>
+              <a:t>KoiScanTracker  (automation)</a:t>
             </a:r>
             <a:endParaRPr lang="en-US" sz="1000" dirty="0"/>
           </a:p>
@@ -11188,7 +10824,7 @@
                 <a:ea typeface="Calibri" pitchFamily="34" charset="-122"/>
                 <a:cs typeface="Calibri" pitchFamily="34" charset="-120"/>
               </a:rPr>
-              <a:t>KoiScanTracker  (our automation)</a:t>
+              <a:t>List: Koi Script Runner</a:t>
             </a:r>
             <a:endParaRPr lang="en-US" sz="1000" dirty="0"/>
           </a:p>
@@ -11308,7 +10944,7 @@
                 <a:ea typeface="Calibri" pitchFamily="34" charset="-122"/>
                 <a:cs typeface="Calibri" pitchFamily="34" charset="-120"/>
               </a:rPr>
-              <a:t>Test 9 passing — the tracker List has rows</a:t>
+              <a:t>Everything on the previous slide is in place</a:t>
             </a:r>
             <a:endParaRPr lang="en-US" sz="1000" dirty="0"/>
           </a:p>
@@ -11316,99 +10952,18 @@
       </p:sp>
       <p:sp>
         <p:nvSpPr>
-          <p:cNvPr id="17" name="Text 15"/>
-          <p:cNvSpPr/>
-          <p:nvPr/>
-        </p:nvSpPr>
-        <p:spPr>
-          <a:xfrm>
-            <a:off x="6940296" y="1632204"/>
-            <a:ext cx="128016" cy="201168"/>
-          </a:xfrm>
-          <a:prstGeom prst="rect">
-            <a:avLst/>
-          </a:prstGeom>
-          <a:noFill/>
-          <a:ln/>
-        </p:spPr>
-        <p:txBody>
-          <a:bodyPr wrap="square" lIns="0" tIns="0" rIns="0" bIns="0" rtlCol="0" anchor="t"/>
-          <a:lstStyle/>
-          <a:p>
-            <a:pPr indent="0" marL="0">
-              <a:buNone/>
-            </a:pPr>
-            <a:r>
-              <a:rPr lang="en-US" sz="1000" b="1" dirty="0">
-                <a:solidFill>
-                  <a:srgbClr val="F5A524"/>
-                </a:solidFill>
-                <a:latin typeface="Calibri" pitchFamily="34" charset="0"/>
-                <a:ea typeface="Calibri" pitchFamily="34" charset="-122"/>
-                <a:cs typeface="Calibri" pitchFamily="34" charset="-120"/>
-              </a:rPr>
-              <a:t>•</a:t>
-            </a:r>
-            <a:endParaRPr lang="en-US" sz="1000" dirty="0"/>
-          </a:p>
-        </p:txBody>
-      </p:sp>
-      <p:sp>
-        <p:nvSpPr>
-          <p:cNvPr id="18" name="Text 16"/>
-          <p:cNvSpPr/>
-          <p:nvPr/>
-        </p:nvSpPr>
-        <p:spPr>
-          <a:xfrm>
-            <a:off x="7086600" y="1632204"/>
-            <a:ext cx="4343400" cy="384048"/>
-          </a:xfrm>
-          <a:prstGeom prst="rect">
-            <a:avLst/>
-          </a:prstGeom>
-          <a:noFill/>
-          <a:ln/>
-        </p:spPr>
-        <p:txBody>
-          <a:bodyPr wrap="square" lIns="0" tIns="0" rIns="0" bIns="0" rtlCol="0" anchor="t"/>
-          <a:lstStyle/>
-          <a:p>
-            <a:pPr indent="0" marL="0">
-              <a:lnSpc>
-                <a:spcPts val="1200"/>
-              </a:lnSpc>
-              <a:buNone/>
-            </a:pPr>
-            <a:r>
-              <a:rPr lang="en-US" sz="1000" dirty="0">
-                <a:solidFill>
-                  <a:srgbClr val="B4B7BD"/>
-                </a:solidFill>
-                <a:latin typeface="Calibri" pitchFamily="34" charset="0"/>
-                <a:ea typeface="Calibri" pitchFamily="34" charset="-122"/>
-                <a:cs typeface="Calibri" pitchFamily="34" charset="-120"/>
-              </a:rPr>
-              <a:t>Connected agents in the group, matching the entry's endpoint_os</a:t>
-            </a:r>
-            <a:endParaRPr lang="en-US" sz="1000" dirty="0"/>
-          </a:p>
-        </p:txBody>
-      </p:sp>
-      <p:sp>
-        <p:nvSpPr>
-          <p:cNvPr id="19" name="Shape 17"/>
+          <p:cNvPr id="17" name="Shape 15"/>
           <p:cNvSpPr/>
           <p:nvPr/>
         </p:nvSpPr>
         <p:spPr>
           <a:xfrm>
             <a:off x="548640" y="2670048"/>
-            <a:ext cx="6400800" cy="3557016"/>
+            <a:ext cx="6400800" cy="2336292"/>
           </a:xfrm>
           <a:prstGeom prst="roundRect">
             <a:avLst>
-              <a:gd name="adj" fmla="val 1285"/>
+              <a:gd name="adj" fmla="val 1957"/>
             </a:avLst>
           </a:prstGeom>
           <a:solidFill>
@@ -11424,7 +10979,7 @@
       </p:sp>
       <p:sp>
         <p:nvSpPr>
-          <p:cNvPr id="20" name="Text 18"/>
+          <p:cNvPr id="18" name="Text 16"/>
           <p:cNvSpPr/>
           <p:nvPr/>
         </p:nvSpPr>
@@ -11463,7 +11018,7 @@
       </p:sp>
       <p:sp>
         <p:nvSpPr>
-          <p:cNvPr id="21" name="Text 19"/>
+          <p:cNvPr id="19" name="Text 17"/>
           <p:cNvSpPr/>
           <p:nvPr/>
         </p:nvSpPr>
@@ -11502,7 +11057,7 @@
       </p:sp>
       <p:sp>
         <p:nvSpPr>
-          <p:cNvPr id="22" name="Text 20"/>
+          <p:cNvPr id="20" name="Text 18"/>
           <p:cNvSpPr/>
           <p:nvPr/>
         </p:nvSpPr>
@@ -11536,7 +11091,7 @@
                 <a:ea typeface="Calibri" pitchFamily="34" charset="-122"/>
                 <a:cs typeface="Calibri" pitchFamily="34" charset="-120"/>
               </a:rPr>
-              <a:t>Automation → Jobs → New Job → time-triggered → playbook KOI Script Runner - Scan Job.</a:t>
+              <a:t>Automation → Jobs → New Job, time-triggered, playbook KOI Script Runner - Refresh Job.</a:t>
             </a:r>
             <a:endParaRPr lang="en-US" sz="1150" dirty="0"/>
           </a:p>
@@ -11544,7 +11099,7 @@
       </p:sp>
       <p:sp>
         <p:nvSpPr>
-          <p:cNvPr id="23" name="Text 21"/>
+          <p:cNvPr id="21" name="Text 19"/>
           <p:cNvSpPr/>
           <p:nvPr/>
         </p:nvSpPr>
@@ -11583,7 +11138,7 @@
       </p:sp>
       <p:sp>
         <p:nvSpPr>
-          <p:cNvPr id="24" name="Text 22"/>
+          <p:cNvPr id="22" name="Text 20"/>
           <p:cNvSpPr/>
           <p:nvPr/>
         </p:nvSpPr>
@@ -11617,7 +11172,7 @@
                 <a:ea typeface="Calibri" pitchFamily="34" charset="-122"/>
                 <a:cs typeface="Calibri" pitchFamily="34" charset="-120"/>
               </a:rPr>
-              <a:t>Enable the Job, then Run now.</a:t>
+              <a:t>Enable the Job, then use Run now.</a:t>
             </a:r>
             <a:endParaRPr lang="en-US" sz="1150" dirty="0"/>
           </a:p>
@@ -11625,180 +11180,18 @@
       </p:sp>
       <p:sp>
         <p:nvSpPr>
-          <p:cNvPr id="25" name="Text 23"/>
-          <p:cNvSpPr/>
-          <p:nvPr/>
-        </p:nvSpPr>
-        <p:spPr>
-          <a:xfrm>
-            <a:off x="859536" y="4046220"/>
-            <a:ext cx="219456" cy="256032"/>
-          </a:xfrm>
-          <a:prstGeom prst="rect">
-            <a:avLst/>
-          </a:prstGeom>
-          <a:noFill/>
-          <a:ln/>
-        </p:spPr>
-        <p:txBody>
-          <a:bodyPr wrap="square" lIns="0" tIns="0" rIns="0" bIns="0" rtlCol="0" anchor="t"/>
-          <a:lstStyle/>
-          <a:p>
-            <a:pPr indent="0" marL="0">
-              <a:buNone/>
-            </a:pPr>
-            <a:r>
-              <a:rPr lang="en-US" sz="1150" b="1" dirty="0">
-                <a:solidFill>
-                  <a:srgbClr val="E8551F"/>
-                </a:solidFill>
-                <a:latin typeface="Calibri" pitchFamily="34" charset="0"/>
-                <a:ea typeface="Calibri" pitchFamily="34" charset="-122"/>
-                <a:cs typeface="Calibri" pitchFamily="34" charset="-120"/>
-              </a:rPr>
-              <a:t>3</a:t>
-            </a:r>
-            <a:endParaRPr lang="en-US" sz="1150" dirty="0"/>
-          </a:p>
-        </p:txBody>
-      </p:sp>
-      <p:sp>
-        <p:nvSpPr>
-          <p:cNvPr id="26" name="Text 24"/>
-          <p:cNvSpPr/>
-          <p:nvPr/>
-        </p:nvSpPr>
-        <p:spPr>
-          <a:xfrm>
-            <a:off x="1152144" y="4046220"/>
-            <a:ext cx="5486400" cy="246888"/>
-          </a:xfrm>
-          <a:prstGeom prst="rect">
-            <a:avLst/>
-          </a:prstGeom>
-          <a:noFill/>
-          <a:ln/>
-        </p:spPr>
-        <p:txBody>
-          <a:bodyPr wrap="square" lIns="0" tIns="0" rIns="0" bIns="0" rtlCol="0" anchor="t"/>
-          <a:lstStyle/>
-          <a:p>
-            <a:pPr indent="0" marL="0">
-              <a:lnSpc>
-                <a:spcPts val="1500"/>
-              </a:lnSpc>
-              <a:buNone/>
-            </a:pPr>
-            <a:r>
-              <a:rPr lang="en-US" sz="1150" dirty="0">
-                <a:solidFill>
-                  <a:srgbClr val="B4B7BD"/>
-                </a:solidFill>
-                <a:latin typeface="Calibri" pitchFamily="34" charset="0"/>
-                <a:ea typeface="Calibri" pitchFamily="34" charset="-122"/>
-                <a:cs typeface="Calibri" pitchFamily="34" charset="-120"/>
-              </a:rPr>
-              <a:t>Open the run, then check Action Center.</a:t>
-            </a:r>
-            <a:endParaRPr lang="en-US" sz="1150" dirty="0"/>
-          </a:p>
-        </p:txBody>
-      </p:sp>
-      <p:sp>
-        <p:nvSpPr>
-          <p:cNvPr id="27" name="Text 25"/>
-          <p:cNvSpPr/>
-          <p:nvPr/>
-        </p:nvSpPr>
-        <p:spPr>
-          <a:xfrm>
-            <a:off x="859536" y="4375404"/>
-            <a:ext cx="219456" cy="256032"/>
-          </a:xfrm>
-          <a:prstGeom prst="rect">
-            <a:avLst/>
-          </a:prstGeom>
-          <a:noFill/>
-          <a:ln/>
-        </p:spPr>
-        <p:txBody>
-          <a:bodyPr wrap="square" lIns="0" tIns="0" rIns="0" bIns="0" rtlCol="0" anchor="t"/>
-          <a:lstStyle/>
-          <a:p>
-            <a:pPr indent="0" marL="0">
-              <a:buNone/>
-            </a:pPr>
-            <a:r>
-              <a:rPr lang="en-US" sz="1150" b="1" dirty="0">
-                <a:solidFill>
-                  <a:srgbClr val="E8551F"/>
-                </a:solidFill>
-                <a:latin typeface="Calibri" pitchFamily="34" charset="0"/>
-                <a:ea typeface="Calibri" pitchFamily="34" charset="-122"/>
-                <a:cs typeface="Calibri" pitchFamily="34" charset="-120"/>
-              </a:rPr>
-              <a:t>4</a:t>
-            </a:r>
-            <a:endParaRPr lang="en-US" sz="1150" dirty="0"/>
-          </a:p>
-        </p:txBody>
-      </p:sp>
-      <p:sp>
-        <p:nvSpPr>
-          <p:cNvPr id="28" name="Text 26"/>
-          <p:cNvSpPr/>
-          <p:nvPr/>
-        </p:nvSpPr>
-        <p:spPr>
-          <a:xfrm>
-            <a:off x="1152144" y="4375404"/>
-            <a:ext cx="5486400" cy="246888"/>
-          </a:xfrm>
-          <a:prstGeom prst="rect">
-            <a:avLst/>
-          </a:prstGeom>
-          <a:noFill/>
-          <a:ln/>
-        </p:spPr>
-        <p:txBody>
-          <a:bodyPr wrap="square" lIns="0" tIns="0" rIns="0" bIns="0" rtlCol="0" anchor="t"/>
-          <a:lstStyle/>
-          <a:p>
-            <a:pPr indent="0" marL="0">
-              <a:lnSpc>
-                <a:spcPts val="1500"/>
-              </a:lnSpc>
-              <a:buNone/>
-            </a:pPr>
-            <a:r>
-              <a:rPr lang="en-US" sz="1150" dirty="0">
-                <a:solidFill>
-                  <a:srgbClr val="B4B7BD"/>
-                </a:solidFill>
-                <a:latin typeface="Calibri" pitchFamily="34" charset="0"/>
-                <a:ea typeface="Calibri" pitchFamily="34" charset="-122"/>
-                <a:cs typeface="Calibri" pitchFamily="34" charset="-120"/>
-              </a:rPr>
-              <a:t>Run it a second time immediately.</a:t>
-            </a:r>
-            <a:endParaRPr lang="en-US" sz="1150" dirty="0"/>
-          </a:p>
-        </p:txBody>
-      </p:sp>
-      <p:sp>
-        <p:nvSpPr>
-          <p:cNvPr id="29" name="Shape 27"/>
+          <p:cNvPr id="23" name="Shape 21"/>
           <p:cNvSpPr/>
           <p:nvPr/>
         </p:nvSpPr>
         <p:spPr>
           <a:xfrm>
             <a:off x="7315200" y="2670048"/>
-            <a:ext cx="4297680" cy="3557016"/>
+            <a:ext cx="4297680" cy="2336292"/>
           </a:xfrm>
           <a:prstGeom prst="roundRect">
             <a:avLst>
-              <a:gd name="adj" fmla="val 1285"/>
+              <a:gd name="adj" fmla="val 1957"/>
             </a:avLst>
           </a:prstGeom>
           <a:solidFill>
@@ -11814,7 +11207,7 @@
       </p:sp>
       <p:sp>
         <p:nvSpPr>
-          <p:cNvPr id="30" name="Text 28"/>
+          <p:cNvPr id="24" name="Text 22"/>
           <p:cNvSpPr/>
           <p:nvPr/>
         </p:nvSpPr>
@@ -11853,7 +11246,7 @@
       </p:sp>
       <p:sp>
         <p:nvSpPr>
-          <p:cNvPr id="31" name="Text 29"/>
+          <p:cNvPr id="25" name="Text 23"/>
           <p:cNvSpPr/>
           <p:nvPr/>
         </p:nvSpPr>
@@ -11892,7 +11285,7 @@
       </p:sp>
       <p:sp>
         <p:nvSpPr>
-          <p:cNvPr id="32" name="Text 30"/>
+          <p:cNvPr id="26" name="Text 24"/>
           <p:cNvSpPr/>
           <p:nvPr/>
         </p:nvSpPr>
@@ -11926,7 +11319,7 @@
                 <a:ea typeface="Calibri" pitchFamily="34" charset="-122"/>
                 <a:cs typeface="Calibri" pitchFamily="34" charset="-120"/>
               </a:rPr>
-              <a:t>The script is dispatched to due, connected endpoints.</a:t>
+              <a:t>A tracker List appears under Lists, named as in your entry.</a:t>
             </a:r>
             <a:endParaRPr lang="en-US" sz="1150" dirty="0"/>
           </a:p>
@@ -11934,7 +11327,7 @@
       </p:sp>
       <p:sp>
         <p:nvSpPr>
-          <p:cNvPr id="33" name="Text 31"/>
+          <p:cNvPr id="27" name="Text 25"/>
           <p:cNvSpPr/>
           <p:nvPr/>
         </p:nvSpPr>
@@ -11973,7 +11366,7 @@
       </p:sp>
       <p:sp>
         <p:nvSpPr>
-          <p:cNvPr id="34" name="Text 32"/>
+          <p:cNvPr id="28" name="Text 26"/>
           <p:cNvSpPr/>
           <p:nvPr/>
         </p:nvSpPr>
@@ -12007,7 +11400,7 @@
                 <a:ea typeface="Calibri" pitchFamily="34" charset="-122"/>
                 <a:cs typeface="Calibri" pitchFamily="34" charset="-120"/>
               </a:rPr>
-              <a:t>Those endpoints get a last-scan timestamp in the tracker.</a:t>
+              <a:t>It fills with one row per endpoint: an id and a last-scan value.</a:t>
             </a:r>
             <a:endParaRPr lang="en-US" sz="1150" dirty="0"/>
           </a:p>
@@ -12015,7 +11408,7 @@
       </p:sp>
       <p:sp>
         <p:nvSpPr>
-          <p:cNvPr id="35" name="Text 33"/>
+          <p:cNvPr id="29" name="Text 27"/>
           <p:cNvSpPr/>
           <p:nvPr/>
         </p:nvSpPr>
@@ -12054,7 +11447,7 @@
       </p:sp>
       <p:sp>
         <p:nvSpPr>
-          <p:cNvPr id="36" name="Text 34"/>
+          <p:cNvPr id="30" name="Text 28"/>
           <p:cNvSpPr/>
           <p:nvPr/>
         </p:nvSpPr>
@@ -12088,169 +11481,7 @@
                 <a:ea typeface="Calibri" pitchFamily="34" charset="-122"/>
                 <a:cs typeface="Calibri" pitchFamily="34" charset="-120"/>
               </a:rPr>
-              <a:t>Offline, wrong-OS and unknown endpoints stay due and retry later.</a:t>
-            </a:r>
-            <a:endParaRPr lang="en-US" sz="1150" dirty="0"/>
-          </a:p>
-        </p:txBody>
-      </p:sp>
-      <p:sp>
-        <p:nvSpPr>
-          <p:cNvPr id="37" name="Text 35"/>
-          <p:cNvSpPr/>
-          <p:nvPr/>
-        </p:nvSpPr>
-        <p:spPr>
-          <a:xfrm>
-            <a:off x="7626096" y="4750308"/>
-            <a:ext cx="219456" cy="256032"/>
-          </a:xfrm>
-          <a:prstGeom prst="rect">
-            <a:avLst/>
-          </a:prstGeom>
-          <a:noFill/>
-          <a:ln/>
-        </p:spPr>
-        <p:txBody>
-          <a:bodyPr wrap="square" lIns="0" tIns="0" rIns="0" bIns="0" rtlCol="0" anchor="t"/>
-          <a:lstStyle/>
-          <a:p>
-            <a:pPr indent="0" marL="0">
-              <a:buNone/>
-            </a:pPr>
-            <a:r>
-              <a:rPr lang="en-US" sz="1150" b="1" dirty="0">
-                <a:solidFill>
-                  <a:srgbClr val="3FB950"/>
-                </a:solidFill>
-                <a:latin typeface="Calibri" pitchFamily="34" charset="0"/>
-                <a:ea typeface="Calibri" pitchFamily="34" charset="-122"/>
-                <a:cs typeface="Calibri" pitchFamily="34" charset="-120"/>
-              </a:rPr>
-              <a:t>✓</a:t>
-            </a:r>
-            <a:endParaRPr lang="en-US" sz="1150" dirty="0"/>
-          </a:p>
-        </p:txBody>
-      </p:sp>
-      <p:sp>
-        <p:nvSpPr>
-          <p:cNvPr id="38" name="Text 36"/>
-          <p:cNvSpPr/>
-          <p:nvPr/>
-        </p:nvSpPr>
-        <p:spPr>
-          <a:xfrm>
-            <a:off x="7918704" y="4750308"/>
-            <a:ext cx="3383280" cy="438912"/>
-          </a:xfrm>
-          <a:prstGeom prst="rect">
-            <a:avLst/>
-          </a:prstGeom>
-          <a:noFill/>
-          <a:ln/>
-        </p:spPr>
-        <p:txBody>
-          <a:bodyPr wrap="square" lIns="0" tIns="0" rIns="0" bIns="0" rtlCol="0" anchor="t"/>
-          <a:lstStyle/>
-          <a:p>
-            <a:pPr indent="0" marL="0">
-              <a:lnSpc>
-                <a:spcPts val="1500"/>
-              </a:lnSpc>
-              <a:buNone/>
-            </a:pPr>
-            <a:r>
-              <a:rPr lang="en-US" sz="1150" dirty="0">
-                <a:solidFill>
-                  <a:srgbClr val="B4B7BD"/>
-                </a:solidFill>
-                <a:latin typeface="Calibri" pitchFamily="34" charset="0"/>
-                <a:ea typeface="Calibri" pitchFamily="34" charset="-122"/>
-                <a:cs typeface="Calibri" pitchFamily="34" charset="-120"/>
-              </a:rPr>
-              <a:t>The second run does nothing — everything is inside the rescan interval.</a:t>
-            </a:r>
-            <a:endParaRPr lang="en-US" sz="1150" dirty="0"/>
-          </a:p>
-        </p:txBody>
-      </p:sp>
-      <p:sp>
-        <p:nvSpPr>
-          <p:cNvPr id="39" name="Text 37"/>
-          <p:cNvSpPr/>
-          <p:nvPr/>
-        </p:nvSpPr>
-        <p:spPr>
-          <a:xfrm>
-            <a:off x="7626096" y="5266944"/>
-            <a:ext cx="219456" cy="256032"/>
-          </a:xfrm>
-          <a:prstGeom prst="rect">
-            <a:avLst/>
-          </a:prstGeom>
-          <a:noFill/>
-          <a:ln/>
-        </p:spPr>
-        <p:txBody>
-          <a:bodyPr wrap="square" lIns="0" tIns="0" rIns="0" bIns="0" rtlCol="0" anchor="t"/>
-          <a:lstStyle/>
-          <a:p>
-            <a:pPr indent="0" marL="0">
-              <a:buNone/>
-            </a:pPr>
-            <a:r>
-              <a:rPr lang="en-US" sz="1150" b="1" dirty="0">
-                <a:solidFill>
-                  <a:srgbClr val="3FB950"/>
-                </a:solidFill>
-                <a:latin typeface="Calibri" pitchFamily="34" charset="0"/>
-                <a:ea typeface="Calibri" pitchFamily="34" charset="-122"/>
-                <a:cs typeface="Calibri" pitchFamily="34" charset="-120"/>
-              </a:rPr>
-              <a:t>✓</a:t>
-            </a:r>
-            <a:endParaRPr lang="en-US" sz="1150" dirty="0"/>
-          </a:p>
-        </p:txBody>
-      </p:sp>
-      <p:sp>
-        <p:nvSpPr>
-          <p:cNvPr id="40" name="Text 38"/>
-          <p:cNvSpPr/>
-          <p:nvPr/>
-        </p:nvSpPr>
-        <p:spPr>
-          <a:xfrm>
-            <a:off x="7918704" y="5266944"/>
-            <a:ext cx="3383280" cy="630936"/>
-          </a:xfrm>
-          <a:prstGeom prst="rect">
-            <a:avLst/>
-          </a:prstGeom>
-          <a:noFill/>
-          <a:ln/>
-        </p:spPr>
-        <p:txBody>
-          <a:bodyPr wrap="square" lIns="0" tIns="0" rIns="0" bIns="0" rtlCol="0" anchor="t"/>
-          <a:lstStyle/>
-          <a:p>
-            <a:pPr indent="0" marL="0">
-              <a:lnSpc>
-                <a:spcPts val="1500"/>
-              </a:lnSpc>
-              <a:buNone/>
-            </a:pPr>
-            <a:r>
-              <a:rPr lang="en-US" sz="1150" dirty="0">
-                <a:solidFill>
-                  <a:srgbClr val="B4B7BD"/>
-                </a:solidFill>
-                <a:latin typeface="Calibri" pitchFamily="34" charset="0"/>
-                <a:ea typeface="Calibri" pitchFamily="34" charset="-122"/>
-                <a:cs typeface="Calibri" pitchFamily="34" charset="-120"/>
-              </a:rPr>
-              <a:t>A SKIPPED entry means nothing was due; a STILL RUNNING entry means Action Center is finishing on its own. Both are normal and send no email.</a:t>
+              <a:t>Re-running adds new endpoints without disturbing existing rows.</a:t>
             </a:r>
             <a:endParaRPr lang="en-US" sz="1150" dirty="0"/>
           </a:p>
@@ -12321,7 +11552,7 @@
                 <a:ea typeface="Calibri" pitchFamily="34" charset="-122"/>
                 <a:cs typeface="Calibri" pitchFamily="34" charset="-120"/>
               </a:rPr>
-              <a:t>TEST 11</a:t>
+              <a:t>TEST 10</a:t>
             </a:r>
             <a:endParaRPr lang="en-US" sz="1100" dirty="0"/>
           </a:p>
@@ -12360,7 +11591,7 @@
                 <a:ea typeface="Calibri" pitchFamily="34" charset="-122"/>
                 <a:cs typeface="Calibri" pitchFamily="34" charset="-120"/>
               </a:rPr>
-              <a:t>Threat-hunting query library</a:t>
+              <a:t>Script Runner — scan due endpoints</a:t>
             </a:r>
             <a:endParaRPr lang="en-US" sz="3100" dirty="0"/>
           </a:p>
@@ -12375,11 +11606,11 @@
         <p:spPr>
           <a:xfrm>
             <a:off x="548640" y="1280160"/>
-            <a:ext cx="11064240" cy="946404"/>
+            <a:ext cx="11064240" cy="1207008"/>
           </a:xfrm>
           <a:prstGeom prst="roundRect">
             <a:avLst>
-              <a:gd name="adj" fmla="val 4831"/>
+              <a:gd name="adj" fmla="val 3788"/>
             </a:avLst>
           </a:prstGeom>
           <a:solidFill>
@@ -12507,7 +11738,7 @@
                 <a:ea typeface="Calibri" pitchFamily="34" charset="-122"/>
                 <a:cs typeface="Calibri" pitchFamily="34" charset="-120"/>
               </a:rPr>
-              <a:t>none — the queries are files you paste</a:t>
+              <a:t>KOI Script Runner - Scan Job</a:t>
             </a:r>
             <a:endParaRPr lang="en-US" sz="1000" dirty="0"/>
           </a:p>
@@ -12521,34 +11752,34 @@
         </p:nvSpPr>
         <p:spPr>
           <a:xfrm>
-            <a:off x="5669280" y="1408176"/>
-            <a:ext cx="1371600" cy="201168"/>
-          </a:xfrm>
-          <a:prstGeom prst="rect">
-            <a:avLst/>
-          </a:prstGeom>
-          <a:noFill/>
-          <a:ln/>
-        </p:spPr>
-        <p:txBody>
-          <a:bodyPr wrap="square" lIns="0" tIns="0" rIns="0" bIns="0" rtlCol="0" anchor="t"/>
-          <a:lstStyle/>
-          <a:p>
-            <a:pPr indent="0" marL="0">
-              <a:buNone/>
-            </a:pPr>
-            <a:r>
-              <a:rPr lang="en-US" sz="900" b="1" spc="100" kern="0" dirty="0">
-                <a:solidFill>
-                  <a:srgbClr val="F5A524"/>
-                </a:solidFill>
-                <a:latin typeface="Calibri" pitchFamily="34" charset="0"/>
-                <a:ea typeface="Calibri" pitchFamily="34" charset="-122"/>
-                <a:cs typeface="Calibri" pitchFamily="34" charset="-120"/>
-              </a:rPr>
-              <a:t>TENANT SETUP</a:t>
-            </a:r>
-            <a:endParaRPr lang="en-US" sz="900" dirty="0"/>
+            <a:off x="2139696" y="1632204"/>
+            <a:ext cx="128016" cy="201168"/>
+          </a:xfrm>
+          <a:prstGeom prst="rect">
+            <a:avLst/>
+          </a:prstGeom>
+          <a:noFill/>
+          <a:ln/>
+        </p:spPr>
+        <p:txBody>
+          <a:bodyPr wrap="square" lIns="0" tIns="0" rIns="0" bIns="0" rtlCol="0" anchor="t"/>
+          <a:lstStyle/>
+          <a:p>
+            <a:pPr indent="0" marL="0">
+              <a:buNone/>
+            </a:pPr>
+            <a:r>
+              <a:rPr lang="en-US" sz="1000" b="1" dirty="0">
+                <a:solidFill>
+                  <a:srgbClr val="22D3EE"/>
+                </a:solidFill>
+                <a:latin typeface="Calibri" pitchFamily="34" charset="0"/>
+                <a:ea typeface="Calibri" pitchFamily="34" charset="-122"/>
+                <a:cs typeface="Calibri" pitchFamily="34" charset="-120"/>
+              </a:rPr>
+              <a:t>•</a:t>
+            </a:r>
+            <a:endParaRPr lang="en-US" sz="1000" dirty="0"/>
           </a:p>
         </p:txBody>
       </p:sp>
@@ -12560,46 +11791,7 @@
         </p:nvSpPr>
         <p:spPr>
           <a:xfrm>
-            <a:off x="6940296" y="1408176"/>
-            <a:ext cx="128016" cy="201168"/>
-          </a:xfrm>
-          <a:prstGeom prst="rect">
-            <a:avLst/>
-          </a:prstGeom>
-          <a:noFill/>
-          <a:ln/>
-        </p:spPr>
-        <p:txBody>
-          <a:bodyPr wrap="square" lIns="0" tIns="0" rIns="0" bIns="0" rtlCol="0" anchor="t"/>
-          <a:lstStyle/>
-          <a:p>
-            <a:pPr indent="0" marL="0">
-              <a:buNone/>
-            </a:pPr>
-            <a:r>
-              <a:rPr lang="en-US" sz="1000" b="1" dirty="0">
-                <a:solidFill>
-                  <a:srgbClr val="F5A524"/>
-                </a:solidFill>
-                <a:latin typeface="Calibri" pitchFamily="34" charset="0"/>
-                <a:ea typeface="Calibri" pitchFamily="34" charset="-122"/>
-                <a:cs typeface="Calibri" pitchFamily="34" charset="-120"/>
-              </a:rPr>
-              <a:t>•</a:t>
-            </a:r>
-            <a:endParaRPr lang="en-US" sz="1000" dirty="0"/>
-          </a:p>
-        </p:txBody>
-      </p:sp>
-      <p:sp>
-        <p:nvSpPr>
-          <p:cNvPr id="10" name="Text 8"/>
-          <p:cNvSpPr/>
-          <p:nvPr/>
-        </p:nvSpPr>
-        <p:spPr>
-          <a:xfrm>
-            <a:off x="7086600" y="1408176"/>
+            <a:off x="2286000" y="1632204"/>
             <a:ext cx="4343400" cy="192024"/>
           </a:xfrm>
           <a:prstGeom prst="rect">
@@ -12627,7 +11819,7 @@
                 <a:ea typeface="Calibri" pitchFamily="34" charset="-122"/>
                 <a:cs typeface="Calibri" pitchFamily="34" charset="-120"/>
               </a:rPr>
-              <a:t>Test 2 passing — events present</a:t>
+              <a:t>KOI Script Runner - Process Config Entry</a:t>
             </a:r>
             <a:endParaRPr lang="en-US" sz="1000" dirty="0"/>
           </a:p>
@@ -12635,53 +11827,53 @@
       </p:sp>
       <p:sp>
         <p:nvSpPr>
+          <p:cNvPr id="10" name="Text 8"/>
+          <p:cNvSpPr/>
+          <p:nvPr/>
+        </p:nvSpPr>
+        <p:spPr>
+          <a:xfrm>
+            <a:off x="2139696" y="1856232"/>
+            <a:ext cx="128016" cy="201168"/>
+          </a:xfrm>
+          <a:prstGeom prst="rect">
+            <a:avLst/>
+          </a:prstGeom>
+          <a:noFill/>
+          <a:ln/>
+        </p:spPr>
+        <p:txBody>
+          <a:bodyPr wrap="square" lIns="0" tIns="0" rIns="0" bIns="0" rtlCol="0" anchor="t"/>
+          <a:lstStyle/>
+          <a:p>
+            <a:pPr indent="0" marL="0">
+              <a:buNone/>
+            </a:pPr>
+            <a:r>
+              <a:rPr lang="en-US" sz="1000" b="1" dirty="0">
+                <a:solidFill>
+                  <a:srgbClr val="22D3EE"/>
+                </a:solidFill>
+                <a:latin typeface="Calibri" pitchFamily="34" charset="0"/>
+                <a:ea typeface="Calibri" pitchFamily="34" charset="-122"/>
+                <a:cs typeface="Calibri" pitchFamily="34" charset="-120"/>
+              </a:rPr>
+              <a:t>•</a:t>
+            </a:r>
+            <a:endParaRPr lang="en-US" sz="1000" dirty="0"/>
+          </a:p>
+        </p:txBody>
+      </p:sp>
+      <p:sp>
+        <p:nvSpPr>
           <p:cNvPr id="11" name="Text 9"/>
           <p:cNvSpPr/>
           <p:nvPr/>
         </p:nvSpPr>
         <p:spPr>
           <a:xfrm>
-            <a:off x="6940296" y="1632204"/>
-            <a:ext cx="128016" cy="201168"/>
-          </a:xfrm>
-          <a:prstGeom prst="rect">
-            <a:avLst/>
-          </a:prstGeom>
-          <a:noFill/>
-          <a:ln/>
-        </p:spPr>
-        <p:txBody>
-          <a:bodyPr wrap="square" lIns="0" tIns="0" rIns="0" bIns="0" rtlCol="0" anchor="t"/>
-          <a:lstStyle/>
-          <a:p>
-            <a:pPr indent="0" marL="0">
-              <a:buNone/>
-            </a:pPr>
-            <a:r>
-              <a:rPr lang="en-US" sz="1000" b="1" dirty="0">
-                <a:solidFill>
-                  <a:srgbClr val="F5A524"/>
-                </a:solidFill>
-                <a:latin typeface="Calibri" pitchFamily="34" charset="0"/>
-                <a:ea typeface="Calibri" pitchFamily="34" charset="-122"/>
-                <a:cs typeface="Calibri" pitchFamily="34" charset="-120"/>
-              </a:rPr>
-              <a:t>•</a:t>
-            </a:r>
-            <a:endParaRPr lang="en-US" sz="1000" dirty="0"/>
-          </a:p>
-        </p:txBody>
-      </p:sp>
-      <p:sp>
-        <p:nvSpPr>
-          <p:cNvPr id="12" name="Text 10"/>
-          <p:cNvSpPr/>
-          <p:nvPr/>
-        </p:nvSpPr>
-        <p:spPr>
-          <a:xfrm>
-            <a:off x="7086600" y="1632204"/>
-            <a:ext cx="4343400" cy="384048"/>
+            <a:off x="2286000" y="1856232"/>
+            <a:ext cx="4343400" cy="192024"/>
           </a:xfrm>
           <a:prstGeom prst="rect">
             <a:avLst/>
@@ -12708,7 +11900,7 @@
                 <a:ea typeface="Calibri" pitchFamily="34" charset="-122"/>
                 <a:cs typeface="Calibri" pitchFamily="34" charset="-120"/>
               </a:rPr>
-              <a:t>Nothing else — the cross-dataset hunts read xdr_data, which XSIAM holds natively</a:t>
+              <a:t>KOI Script Runner - Execute Endpoint Script</a:t>
             </a:r>
             <a:endParaRPr lang="en-US" sz="1000" dirty="0"/>
           </a:p>
@@ -12716,18 +11908,300 @@
       </p:sp>
       <p:sp>
         <p:nvSpPr>
-          <p:cNvPr id="13" name="Shape 11"/>
-          <p:cNvSpPr/>
-          <p:nvPr/>
-        </p:nvSpPr>
-        <p:spPr>
-          <a:xfrm>
-            <a:off x="548640" y="2409444"/>
-            <a:ext cx="6400800" cy="2148840"/>
+          <p:cNvPr id="12" name="Text 10"/>
+          <p:cNvSpPr/>
+          <p:nvPr/>
+        </p:nvSpPr>
+        <p:spPr>
+          <a:xfrm>
+            <a:off x="2139696" y="2080260"/>
+            <a:ext cx="128016" cy="201168"/>
+          </a:xfrm>
+          <a:prstGeom prst="rect">
+            <a:avLst/>
+          </a:prstGeom>
+          <a:noFill/>
+          <a:ln/>
+        </p:spPr>
+        <p:txBody>
+          <a:bodyPr wrap="square" lIns="0" tIns="0" rIns="0" bIns="0" rtlCol="0" anchor="t"/>
+          <a:lstStyle/>
+          <a:p>
+            <a:pPr indent="0" marL="0">
+              <a:buNone/>
+            </a:pPr>
+            <a:r>
+              <a:rPr lang="en-US" sz="1000" b="1" dirty="0">
+                <a:solidFill>
+                  <a:srgbClr val="22D3EE"/>
+                </a:solidFill>
+                <a:latin typeface="Calibri" pitchFamily="34" charset="0"/>
+                <a:ea typeface="Calibri" pitchFamily="34" charset="-122"/>
+                <a:cs typeface="Calibri" pitchFamily="34" charset="-120"/>
+              </a:rPr>
+              <a:t>•</a:t>
+            </a:r>
+            <a:endParaRPr lang="en-US" sz="1000" dirty="0"/>
+          </a:p>
+        </p:txBody>
+      </p:sp>
+      <p:sp>
+        <p:nvSpPr>
+          <p:cNvPr id="13" name="Text 11"/>
+          <p:cNvSpPr/>
+          <p:nvPr/>
+        </p:nvSpPr>
+        <p:spPr>
+          <a:xfrm>
+            <a:off x="2286000" y="2080260"/>
+            <a:ext cx="4343400" cy="192024"/>
+          </a:xfrm>
+          <a:prstGeom prst="rect">
+            <a:avLst/>
+          </a:prstGeom>
+          <a:noFill/>
+          <a:ln/>
+        </p:spPr>
+        <p:txBody>
+          <a:bodyPr wrap="square" lIns="0" tIns="0" rIns="0" bIns="0" rtlCol="0" anchor="t"/>
+          <a:lstStyle/>
+          <a:p>
+            <a:pPr indent="0" marL="0">
+              <a:lnSpc>
+                <a:spcPts val="1200"/>
+              </a:lnSpc>
+              <a:buNone/>
+            </a:pPr>
+            <a:r>
+              <a:rPr lang="en-US" sz="1000" dirty="0">
+                <a:solidFill>
+                  <a:srgbClr val="B4B7BD"/>
+                </a:solidFill>
+                <a:latin typeface="Calibri" pitchFamily="34" charset="0"/>
+                <a:ea typeface="Calibri" pitchFamily="34" charset="-122"/>
+                <a:cs typeface="Calibri" pitchFamily="34" charset="-120"/>
+              </a:rPr>
+              <a:t>KoiScanTracker  (our automation)</a:t>
+            </a:r>
+            <a:endParaRPr lang="en-US" sz="1000" dirty="0"/>
+          </a:p>
+        </p:txBody>
+      </p:sp>
+      <p:sp>
+        <p:nvSpPr>
+          <p:cNvPr id="14" name="Text 12"/>
+          <p:cNvSpPr/>
+          <p:nvPr/>
+        </p:nvSpPr>
+        <p:spPr>
+          <a:xfrm>
+            <a:off x="5669280" y="1408176"/>
+            <a:ext cx="1371600" cy="201168"/>
+          </a:xfrm>
+          <a:prstGeom prst="rect">
+            <a:avLst/>
+          </a:prstGeom>
+          <a:noFill/>
+          <a:ln/>
+        </p:spPr>
+        <p:txBody>
+          <a:bodyPr wrap="square" lIns="0" tIns="0" rIns="0" bIns="0" rtlCol="0" anchor="t"/>
+          <a:lstStyle/>
+          <a:p>
+            <a:pPr indent="0" marL="0">
+              <a:buNone/>
+            </a:pPr>
+            <a:r>
+              <a:rPr lang="en-US" sz="900" b="1" spc="100" kern="0" dirty="0">
+                <a:solidFill>
+                  <a:srgbClr val="F5A524"/>
+                </a:solidFill>
+                <a:latin typeface="Calibri" pitchFamily="34" charset="0"/>
+                <a:ea typeface="Calibri" pitchFamily="34" charset="-122"/>
+                <a:cs typeface="Calibri" pitchFamily="34" charset="-120"/>
+              </a:rPr>
+              <a:t>TENANT SETUP</a:t>
+            </a:r>
+            <a:endParaRPr lang="en-US" sz="900" dirty="0"/>
+          </a:p>
+        </p:txBody>
+      </p:sp>
+      <p:sp>
+        <p:nvSpPr>
+          <p:cNvPr id="15" name="Text 13"/>
+          <p:cNvSpPr/>
+          <p:nvPr/>
+        </p:nvSpPr>
+        <p:spPr>
+          <a:xfrm>
+            <a:off x="6940296" y="1408176"/>
+            <a:ext cx="128016" cy="201168"/>
+          </a:xfrm>
+          <a:prstGeom prst="rect">
+            <a:avLst/>
+          </a:prstGeom>
+          <a:noFill/>
+          <a:ln/>
+        </p:spPr>
+        <p:txBody>
+          <a:bodyPr wrap="square" lIns="0" tIns="0" rIns="0" bIns="0" rtlCol="0" anchor="t"/>
+          <a:lstStyle/>
+          <a:p>
+            <a:pPr indent="0" marL="0">
+              <a:buNone/>
+            </a:pPr>
+            <a:r>
+              <a:rPr lang="en-US" sz="1000" b="1" dirty="0">
+                <a:solidFill>
+                  <a:srgbClr val="F5A524"/>
+                </a:solidFill>
+                <a:latin typeface="Calibri" pitchFamily="34" charset="0"/>
+                <a:ea typeface="Calibri" pitchFamily="34" charset="-122"/>
+                <a:cs typeface="Calibri" pitchFamily="34" charset="-120"/>
+              </a:rPr>
+              <a:t>•</a:t>
+            </a:r>
+            <a:endParaRPr lang="en-US" sz="1000" dirty="0"/>
+          </a:p>
+        </p:txBody>
+      </p:sp>
+      <p:sp>
+        <p:nvSpPr>
+          <p:cNvPr id="16" name="Text 14"/>
+          <p:cNvSpPr/>
+          <p:nvPr/>
+        </p:nvSpPr>
+        <p:spPr>
+          <a:xfrm>
+            <a:off x="7086600" y="1408176"/>
+            <a:ext cx="4343400" cy="192024"/>
+          </a:xfrm>
+          <a:prstGeom prst="rect">
+            <a:avLst/>
+          </a:prstGeom>
+          <a:noFill/>
+          <a:ln/>
+        </p:spPr>
+        <p:txBody>
+          <a:bodyPr wrap="square" lIns="0" tIns="0" rIns="0" bIns="0" rtlCol="0" anchor="t"/>
+          <a:lstStyle/>
+          <a:p>
+            <a:pPr indent="0" marL="0">
+              <a:lnSpc>
+                <a:spcPts val="1200"/>
+              </a:lnSpc>
+              <a:buNone/>
+            </a:pPr>
+            <a:r>
+              <a:rPr lang="en-US" sz="1000" dirty="0">
+                <a:solidFill>
+                  <a:srgbClr val="B4B7BD"/>
+                </a:solidFill>
+                <a:latin typeface="Calibri" pitchFamily="34" charset="0"/>
+                <a:ea typeface="Calibri" pitchFamily="34" charset="-122"/>
+                <a:cs typeface="Calibri" pitchFamily="34" charset="-120"/>
+              </a:rPr>
+              <a:t>Test 9 passing — the tracker List has rows</a:t>
+            </a:r>
+            <a:endParaRPr lang="en-US" sz="1000" dirty="0"/>
+          </a:p>
+        </p:txBody>
+      </p:sp>
+      <p:sp>
+        <p:nvSpPr>
+          <p:cNvPr id="17" name="Text 15"/>
+          <p:cNvSpPr/>
+          <p:nvPr/>
+        </p:nvSpPr>
+        <p:spPr>
+          <a:xfrm>
+            <a:off x="6940296" y="1632204"/>
+            <a:ext cx="128016" cy="201168"/>
+          </a:xfrm>
+          <a:prstGeom prst="rect">
+            <a:avLst/>
+          </a:prstGeom>
+          <a:noFill/>
+          <a:ln/>
+        </p:spPr>
+        <p:txBody>
+          <a:bodyPr wrap="square" lIns="0" tIns="0" rIns="0" bIns="0" rtlCol="0" anchor="t"/>
+          <a:lstStyle/>
+          <a:p>
+            <a:pPr indent="0" marL="0">
+              <a:buNone/>
+            </a:pPr>
+            <a:r>
+              <a:rPr lang="en-US" sz="1000" b="1" dirty="0">
+                <a:solidFill>
+                  <a:srgbClr val="F5A524"/>
+                </a:solidFill>
+                <a:latin typeface="Calibri" pitchFamily="34" charset="0"/>
+                <a:ea typeface="Calibri" pitchFamily="34" charset="-122"/>
+                <a:cs typeface="Calibri" pitchFamily="34" charset="-120"/>
+              </a:rPr>
+              <a:t>•</a:t>
+            </a:r>
+            <a:endParaRPr lang="en-US" sz="1000" dirty="0"/>
+          </a:p>
+        </p:txBody>
+      </p:sp>
+      <p:sp>
+        <p:nvSpPr>
+          <p:cNvPr id="18" name="Text 16"/>
+          <p:cNvSpPr/>
+          <p:nvPr/>
+        </p:nvSpPr>
+        <p:spPr>
+          <a:xfrm>
+            <a:off x="7086600" y="1632204"/>
+            <a:ext cx="4343400" cy="384048"/>
+          </a:xfrm>
+          <a:prstGeom prst="rect">
+            <a:avLst/>
+          </a:prstGeom>
+          <a:noFill/>
+          <a:ln/>
+        </p:spPr>
+        <p:txBody>
+          <a:bodyPr wrap="square" lIns="0" tIns="0" rIns="0" bIns="0" rtlCol="0" anchor="t"/>
+          <a:lstStyle/>
+          <a:p>
+            <a:pPr indent="0" marL="0">
+              <a:lnSpc>
+                <a:spcPts val="1200"/>
+              </a:lnSpc>
+              <a:buNone/>
+            </a:pPr>
+            <a:r>
+              <a:rPr lang="en-US" sz="1000" dirty="0">
+                <a:solidFill>
+                  <a:srgbClr val="B4B7BD"/>
+                </a:solidFill>
+                <a:latin typeface="Calibri" pitchFamily="34" charset="0"/>
+                <a:ea typeface="Calibri" pitchFamily="34" charset="-122"/>
+                <a:cs typeface="Calibri" pitchFamily="34" charset="-120"/>
+              </a:rPr>
+              <a:t>Connected agents in the group, matching the entry's endpoint_os</a:t>
+            </a:r>
+            <a:endParaRPr lang="en-US" sz="1000" dirty="0"/>
+          </a:p>
+        </p:txBody>
+      </p:sp>
+      <p:sp>
+        <p:nvSpPr>
+          <p:cNvPr id="19" name="Shape 17"/>
+          <p:cNvSpPr/>
+          <p:nvPr/>
+        </p:nvSpPr>
+        <p:spPr>
+          <a:xfrm>
+            <a:off x="548640" y="2670048"/>
+            <a:ext cx="6400800" cy="3557016"/>
           </a:xfrm>
           <a:prstGeom prst="roundRect">
             <a:avLst>
-              <a:gd name="adj" fmla="val 2128"/>
+              <a:gd name="adj" fmla="val 1285"/>
             </a:avLst>
           </a:prstGeom>
           <a:solidFill>
@@ -12743,13 +12217,13 @@
       </p:sp>
       <p:sp>
         <p:nvSpPr>
-          <p:cNvPr id="14" name="Text 12"/>
-          <p:cNvSpPr/>
-          <p:nvPr/>
-        </p:nvSpPr>
-        <p:spPr>
-          <a:xfrm>
-            <a:off x="859536" y="2592324"/>
+          <p:cNvPr id="20" name="Text 18"/>
+          <p:cNvSpPr/>
+          <p:nvPr/>
+        </p:nvSpPr>
+        <p:spPr>
+          <a:xfrm>
+            <a:off x="859536" y="2852928"/>
             <a:ext cx="2743200" cy="256032"/>
           </a:xfrm>
           <a:prstGeom prst="rect">
@@ -12782,13 +12256,13 @@
       </p:sp>
       <p:sp>
         <p:nvSpPr>
-          <p:cNvPr id="15" name="Text 13"/>
-          <p:cNvSpPr/>
-          <p:nvPr/>
-        </p:nvSpPr>
-        <p:spPr>
-          <a:xfrm>
-            <a:off x="859536" y="2939796"/>
+          <p:cNvPr id="21" name="Text 19"/>
+          <p:cNvSpPr/>
+          <p:nvPr/>
+        </p:nvSpPr>
+        <p:spPr>
+          <a:xfrm>
+            <a:off x="859536" y="3200400"/>
             <a:ext cx="219456" cy="256032"/>
           </a:xfrm>
           <a:prstGeom prst="rect">
@@ -12821,14 +12295,14 @@
       </p:sp>
       <p:sp>
         <p:nvSpPr>
-          <p:cNvPr id="16" name="Text 14"/>
-          <p:cNvSpPr/>
-          <p:nvPr/>
-        </p:nvSpPr>
-        <p:spPr>
-          <a:xfrm>
-            <a:off x="1152144" y="2939796"/>
-            <a:ext cx="5486400" cy="246888"/>
+          <p:cNvPr id="22" name="Text 20"/>
+          <p:cNvSpPr/>
+          <p:nvPr/>
+        </p:nvSpPr>
+        <p:spPr>
+          <a:xfrm>
+            <a:off x="1152144" y="3200400"/>
+            <a:ext cx="5486400" cy="438912"/>
           </a:xfrm>
           <a:prstGeom prst="rect">
             <a:avLst/>
@@ -12855,7 +12329,7 @@
                 <a:ea typeface="Calibri" pitchFamily="34" charset="-122"/>
                 <a:cs typeface="Calibri" pitchFamily="34" charset="-120"/>
               </a:rPr>
-              <a:t>Open docs/xql in the pack you were sent.</a:t>
+              <a:t>Automation → Jobs → New Job → time-triggered → playbook KOI Script Runner - Scan Job.</a:t>
             </a:r>
             <a:endParaRPr lang="en-US" sz="1150" dirty="0"/>
           </a:p>
@@ -12863,13 +12337,13 @@
       </p:sp>
       <p:sp>
         <p:nvSpPr>
-          <p:cNvPr id="17" name="Text 15"/>
-          <p:cNvSpPr/>
-          <p:nvPr/>
-        </p:nvSpPr>
-        <p:spPr>
-          <a:xfrm>
-            <a:off x="859536" y="3268980"/>
+          <p:cNvPr id="23" name="Text 21"/>
+          <p:cNvSpPr/>
+          <p:nvPr/>
+        </p:nvSpPr>
+        <p:spPr>
+          <a:xfrm>
+            <a:off x="859536" y="3717036"/>
             <a:ext cx="219456" cy="256032"/>
           </a:xfrm>
           <a:prstGeom prst="rect">
@@ -12902,13 +12376,13 @@
       </p:sp>
       <p:sp>
         <p:nvSpPr>
-          <p:cNvPr id="18" name="Text 16"/>
-          <p:cNvSpPr/>
-          <p:nvPr/>
-        </p:nvSpPr>
-        <p:spPr>
-          <a:xfrm>
-            <a:off x="1152144" y="3268980"/>
+          <p:cNvPr id="24" name="Text 22"/>
+          <p:cNvSpPr/>
+          <p:nvPr/>
+        </p:nvSpPr>
+        <p:spPr>
+          <a:xfrm>
+            <a:off x="1152144" y="3717036"/>
             <a:ext cx="5486400" cy="246888"/>
           </a:xfrm>
           <a:prstGeom prst="rect">
@@ -12936,7 +12410,7 @@
                 <a:ea typeface="Calibri" pitchFamily="34" charset="-122"/>
                 <a:cs typeface="Calibri" pitchFamily="34" charset="-120"/>
               </a:rPr>
-              <a:t>Read QUERY_LIBRARY.md first — it explains the rules.</a:t>
+              <a:t>Enable the Job, then Run now.</a:t>
             </a:r>
             <a:endParaRPr lang="en-US" sz="1150" dirty="0"/>
           </a:p>
@@ -12944,13 +12418,13 @@
       </p:sp>
       <p:sp>
         <p:nvSpPr>
-          <p:cNvPr id="19" name="Text 17"/>
-          <p:cNvSpPr/>
-          <p:nvPr/>
-        </p:nvSpPr>
-        <p:spPr>
-          <a:xfrm>
-            <a:off x="859536" y="3598164"/>
+          <p:cNvPr id="25" name="Text 23"/>
+          <p:cNvSpPr/>
+          <p:nvPr/>
+        </p:nvSpPr>
+        <p:spPr>
+          <a:xfrm>
+            <a:off x="859536" y="4046220"/>
             <a:ext cx="219456" cy="256032"/>
           </a:xfrm>
           <a:prstGeom prst="rect">
@@ -12983,13 +12457,13 @@
       </p:sp>
       <p:sp>
         <p:nvSpPr>
-          <p:cNvPr id="20" name="Text 18"/>
-          <p:cNvSpPr/>
-          <p:nvPr/>
-        </p:nvSpPr>
-        <p:spPr>
-          <a:xfrm>
-            <a:off x="1152144" y="3598164"/>
+          <p:cNvPr id="26" name="Text 24"/>
+          <p:cNvSpPr/>
+          <p:nvPr/>
+        </p:nvSpPr>
+        <p:spPr>
+          <a:xfrm>
+            <a:off x="1152144" y="4046220"/>
             <a:ext cx="5486400" cy="246888"/>
           </a:xfrm>
           <a:prstGeom prst="rect">
@@ -13017,7 +12491,7 @@
                 <a:ea typeface="Calibri" pitchFamily="34" charset="-122"/>
                 <a:cs typeface="Calibri" pitchFamily="34" charset="-120"/>
               </a:rPr>
-              <a:t>Paste a hunt into Query Builder, starting with H2.1.</a:t>
+              <a:t>Open the run, then check Action Center.</a:t>
             </a:r>
             <a:endParaRPr lang="en-US" sz="1150" dirty="0"/>
           </a:p>
@@ -13025,13 +12499,13 @@
       </p:sp>
       <p:sp>
         <p:nvSpPr>
-          <p:cNvPr id="21" name="Text 19"/>
-          <p:cNvSpPr/>
-          <p:nvPr/>
-        </p:nvSpPr>
-        <p:spPr>
-          <a:xfrm>
-            <a:off x="859536" y="3927348"/>
+          <p:cNvPr id="27" name="Text 25"/>
+          <p:cNvSpPr/>
+          <p:nvPr/>
+        </p:nvSpPr>
+        <p:spPr>
+          <a:xfrm>
+            <a:off x="859536" y="4375404"/>
             <a:ext cx="219456" cy="256032"/>
           </a:xfrm>
           <a:prstGeom prst="rect">
@@ -13064,13 +12538,13 @@
       </p:sp>
       <p:sp>
         <p:nvSpPr>
-          <p:cNvPr id="22" name="Text 20"/>
-          <p:cNvSpPr/>
-          <p:nvPr/>
-        </p:nvSpPr>
-        <p:spPr>
-          <a:xfrm>
-            <a:off x="1152144" y="3927348"/>
+          <p:cNvPr id="28" name="Text 26"/>
+          <p:cNvSpPr/>
+          <p:nvPr/>
+        </p:nvSpPr>
+        <p:spPr>
+          <a:xfrm>
+            <a:off x="1152144" y="4375404"/>
             <a:ext cx="5486400" cy="246888"/>
           </a:xfrm>
           <a:prstGeom prst="rect">
@@ -13098,7 +12572,7 @@
                 <a:ea typeface="Calibri" pitchFamily="34" charset="-122"/>
                 <a:cs typeface="Calibri" pitchFamily="34" charset="-120"/>
               </a:rPr>
-              <a:t>Try a detection too, for example A1.</a:t>
+              <a:t>Run it a second time immediately.</a:t>
             </a:r>
             <a:endParaRPr lang="en-US" sz="1150" dirty="0"/>
           </a:p>
@@ -13106,18 +12580,18 @@
       </p:sp>
       <p:sp>
         <p:nvSpPr>
-          <p:cNvPr id="23" name="Shape 21"/>
-          <p:cNvSpPr/>
-          <p:nvPr/>
-        </p:nvSpPr>
-        <p:spPr>
-          <a:xfrm>
-            <a:off x="7315200" y="2409444"/>
-            <a:ext cx="4297680" cy="2148840"/>
+          <p:cNvPr id="29" name="Shape 27"/>
+          <p:cNvSpPr/>
+          <p:nvPr/>
+        </p:nvSpPr>
+        <p:spPr>
+          <a:xfrm>
+            <a:off x="7315200" y="2670048"/>
+            <a:ext cx="4297680" cy="3557016"/>
           </a:xfrm>
           <a:prstGeom prst="roundRect">
             <a:avLst>
-              <a:gd name="adj" fmla="val 2128"/>
+              <a:gd name="adj" fmla="val 1285"/>
             </a:avLst>
           </a:prstGeom>
           <a:solidFill>
@@ -13133,13 +12607,13 @@
       </p:sp>
       <p:sp>
         <p:nvSpPr>
-          <p:cNvPr id="24" name="Text 22"/>
-          <p:cNvSpPr/>
-          <p:nvPr/>
-        </p:nvSpPr>
-        <p:spPr>
-          <a:xfrm>
-            <a:off x="7626096" y="2592324"/>
+          <p:cNvPr id="30" name="Text 28"/>
+          <p:cNvSpPr/>
+          <p:nvPr/>
+        </p:nvSpPr>
+        <p:spPr>
+          <a:xfrm>
+            <a:off x="7626096" y="2852928"/>
             <a:ext cx="3108960" cy="256032"/>
           </a:xfrm>
           <a:prstGeom prst="rect">
@@ -13172,13 +12646,13 @@
       </p:sp>
       <p:sp>
         <p:nvSpPr>
-          <p:cNvPr id="25" name="Text 23"/>
-          <p:cNvSpPr/>
-          <p:nvPr/>
-        </p:nvSpPr>
-        <p:spPr>
-          <a:xfrm>
-            <a:off x="7626096" y="2939796"/>
+          <p:cNvPr id="31" name="Text 29"/>
+          <p:cNvSpPr/>
+          <p:nvPr/>
+        </p:nvSpPr>
+        <p:spPr>
+          <a:xfrm>
+            <a:off x="7626096" y="3200400"/>
             <a:ext cx="219456" cy="256032"/>
           </a:xfrm>
           <a:prstGeom prst="rect">
@@ -13211,13 +12685,13 @@
       </p:sp>
       <p:sp>
         <p:nvSpPr>
-          <p:cNvPr id="26" name="Text 24"/>
-          <p:cNvSpPr/>
-          <p:nvPr/>
-        </p:nvSpPr>
-        <p:spPr>
-          <a:xfrm>
-            <a:off x="7918704" y="2939796"/>
+          <p:cNvPr id="32" name="Text 30"/>
+          <p:cNvSpPr/>
+          <p:nvPr/>
+        </p:nvSpPr>
+        <p:spPr>
+          <a:xfrm>
+            <a:off x="7918704" y="3200400"/>
             <a:ext cx="3383280" cy="438912"/>
           </a:xfrm>
           <a:prstGeom prst="rect">
@@ -13245,7 +12719,7 @@
                 <a:ea typeface="Calibri" pitchFamily="34" charset="-122"/>
                 <a:cs typeface="Calibri" pitchFamily="34" charset="-120"/>
               </a:rPr>
-              <a:t>Each query runs and returns rows, or a clean empty result.</a:t>
+              <a:t>The script is dispatched to due, connected endpoints.</a:t>
             </a:r>
             <a:endParaRPr lang="en-US" sz="1150" dirty="0"/>
           </a:p>
@@ -13253,13 +12727,13 @@
       </p:sp>
       <p:sp>
         <p:nvSpPr>
-          <p:cNvPr id="27" name="Text 25"/>
-          <p:cNvSpPr/>
-          <p:nvPr/>
-        </p:nvSpPr>
-        <p:spPr>
-          <a:xfrm>
-            <a:off x="7626096" y="3456432"/>
+          <p:cNvPr id="33" name="Text 31"/>
+          <p:cNvSpPr/>
+          <p:nvPr/>
+        </p:nvSpPr>
+        <p:spPr>
+          <a:xfrm>
+            <a:off x="7626096" y="3717036"/>
             <a:ext cx="219456" cy="256032"/>
           </a:xfrm>
           <a:prstGeom prst="rect">
@@ -13292,13 +12766,13 @@
       </p:sp>
       <p:sp>
         <p:nvSpPr>
-          <p:cNvPr id="28" name="Text 26"/>
-          <p:cNvSpPr/>
-          <p:nvPr/>
-        </p:nvSpPr>
-        <p:spPr>
-          <a:xfrm>
-            <a:off x="7918704" y="3456432"/>
+          <p:cNvPr id="34" name="Text 32"/>
+          <p:cNvSpPr/>
+          <p:nvPr/>
+        </p:nvSpPr>
+        <p:spPr>
+          <a:xfrm>
+            <a:off x="7918704" y="3717036"/>
             <a:ext cx="3383280" cy="438912"/>
           </a:xfrm>
           <a:prstGeom prst="rect">
@@ -13326,7 +12800,7 @@
                 <a:ea typeface="Calibri" pitchFamily="34" charset="-122"/>
                 <a:cs typeface="Calibri" pitchFamily="34" charset="-120"/>
               </a:rPr>
-              <a:t>Hunts surface findings KOI scored that nobody actioned.</a:t>
+              <a:t>Those endpoints get a last-scan timestamp in the tracker.</a:t>
             </a:r>
             <a:endParaRPr lang="en-US" sz="1150" dirty="0"/>
           </a:p>
@@ -13334,13 +12808,13 @@
       </p:sp>
       <p:sp>
         <p:nvSpPr>
-          <p:cNvPr id="29" name="Text 27"/>
-          <p:cNvSpPr/>
-          <p:nvPr/>
-        </p:nvSpPr>
-        <p:spPr>
-          <a:xfrm>
-            <a:off x="7626096" y="3973068"/>
+          <p:cNvPr id="35" name="Text 33"/>
+          <p:cNvSpPr/>
+          <p:nvPr/>
+        </p:nvSpPr>
+        <p:spPr>
+          <a:xfrm>
+            <a:off x="7626096" y="4233672"/>
             <a:ext cx="219456" cy="256032"/>
           </a:xfrm>
           <a:prstGeom prst="rect">
@@ -13373,14 +12847,14 @@
       </p:sp>
       <p:sp>
         <p:nvSpPr>
-          <p:cNvPr id="30" name="Text 28"/>
-          <p:cNvSpPr/>
-          <p:nvPr/>
-        </p:nvSpPr>
-        <p:spPr>
-          <a:xfrm>
-            <a:off x="7918704" y="3973068"/>
-            <a:ext cx="3383280" cy="246888"/>
+          <p:cNvPr id="36" name="Text 34"/>
+          <p:cNvSpPr/>
+          <p:nvPr/>
+        </p:nvSpPr>
+        <p:spPr>
+          <a:xfrm>
+            <a:off x="7918704" y="4233672"/>
+            <a:ext cx="3383280" cy="438912"/>
           </a:xfrm>
           <a:prstGeom prst="rect">
             <a:avLst/>
@@ -13407,7 +12881,169 @@
                 <a:ea typeface="Calibri" pitchFamily="34" charset="-122"/>
                 <a:cs typeface="Calibri" pitchFamily="34" charset="-120"/>
               </a:rPr>
-              <a:t>26 hunts and 46 detections are included.</a:t>
+              <a:t>Offline, wrong-OS and unknown endpoints stay due and retry later.</a:t>
+            </a:r>
+            <a:endParaRPr lang="en-US" sz="1150" dirty="0"/>
+          </a:p>
+        </p:txBody>
+      </p:sp>
+      <p:sp>
+        <p:nvSpPr>
+          <p:cNvPr id="37" name="Text 35"/>
+          <p:cNvSpPr/>
+          <p:nvPr/>
+        </p:nvSpPr>
+        <p:spPr>
+          <a:xfrm>
+            <a:off x="7626096" y="4750308"/>
+            <a:ext cx="219456" cy="256032"/>
+          </a:xfrm>
+          <a:prstGeom prst="rect">
+            <a:avLst/>
+          </a:prstGeom>
+          <a:noFill/>
+          <a:ln/>
+        </p:spPr>
+        <p:txBody>
+          <a:bodyPr wrap="square" lIns="0" tIns="0" rIns="0" bIns="0" rtlCol="0" anchor="t"/>
+          <a:lstStyle/>
+          <a:p>
+            <a:pPr indent="0" marL="0">
+              <a:buNone/>
+            </a:pPr>
+            <a:r>
+              <a:rPr lang="en-US" sz="1150" b="1" dirty="0">
+                <a:solidFill>
+                  <a:srgbClr val="3FB950"/>
+                </a:solidFill>
+                <a:latin typeface="Calibri" pitchFamily="34" charset="0"/>
+                <a:ea typeface="Calibri" pitchFamily="34" charset="-122"/>
+                <a:cs typeface="Calibri" pitchFamily="34" charset="-120"/>
+              </a:rPr>
+              <a:t>✓</a:t>
+            </a:r>
+            <a:endParaRPr lang="en-US" sz="1150" dirty="0"/>
+          </a:p>
+        </p:txBody>
+      </p:sp>
+      <p:sp>
+        <p:nvSpPr>
+          <p:cNvPr id="38" name="Text 36"/>
+          <p:cNvSpPr/>
+          <p:nvPr/>
+        </p:nvSpPr>
+        <p:spPr>
+          <a:xfrm>
+            <a:off x="7918704" y="4750308"/>
+            <a:ext cx="3383280" cy="438912"/>
+          </a:xfrm>
+          <a:prstGeom prst="rect">
+            <a:avLst/>
+          </a:prstGeom>
+          <a:noFill/>
+          <a:ln/>
+        </p:spPr>
+        <p:txBody>
+          <a:bodyPr wrap="square" lIns="0" tIns="0" rIns="0" bIns="0" rtlCol="0" anchor="t"/>
+          <a:lstStyle/>
+          <a:p>
+            <a:pPr indent="0" marL="0">
+              <a:lnSpc>
+                <a:spcPts val="1500"/>
+              </a:lnSpc>
+              <a:buNone/>
+            </a:pPr>
+            <a:r>
+              <a:rPr lang="en-US" sz="1150" dirty="0">
+                <a:solidFill>
+                  <a:srgbClr val="B4B7BD"/>
+                </a:solidFill>
+                <a:latin typeface="Calibri" pitchFamily="34" charset="0"/>
+                <a:ea typeface="Calibri" pitchFamily="34" charset="-122"/>
+                <a:cs typeface="Calibri" pitchFamily="34" charset="-120"/>
+              </a:rPr>
+              <a:t>The second run does nothing — everything is inside the rescan interval.</a:t>
+            </a:r>
+            <a:endParaRPr lang="en-US" sz="1150" dirty="0"/>
+          </a:p>
+        </p:txBody>
+      </p:sp>
+      <p:sp>
+        <p:nvSpPr>
+          <p:cNvPr id="39" name="Text 37"/>
+          <p:cNvSpPr/>
+          <p:nvPr/>
+        </p:nvSpPr>
+        <p:spPr>
+          <a:xfrm>
+            <a:off x="7626096" y="5266944"/>
+            <a:ext cx="219456" cy="256032"/>
+          </a:xfrm>
+          <a:prstGeom prst="rect">
+            <a:avLst/>
+          </a:prstGeom>
+          <a:noFill/>
+          <a:ln/>
+        </p:spPr>
+        <p:txBody>
+          <a:bodyPr wrap="square" lIns="0" tIns="0" rIns="0" bIns="0" rtlCol="0" anchor="t"/>
+          <a:lstStyle/>
+          <a:p>
+            <a:pPr indent="0" marL="0">
+              <a:buNone/>
+            </a:pPr>
+            <a:r>
+              <a:rPr lang="en-US" sz="1150" b="1" dirty="0">
+                <a:solidFill>
+                  <a:srgbClr val="3FB950"/>
+                </a:solidFill>
+                <a:latin typeface="Calibri" pitchFamily="34" charset="0"/>
+                <a:ea typeface="Calibri" pitchFamily="34" charset="-122"/>
+                <a:cs typeface="Calibri" pitchFamily="34" charset="-120"/>
+              </a:rPr>
+              <a:t>✓</a:t>
+            </a:r>
+            <a:endParaRPr lang="en-US" sz="1150" dirty="0"/>
+          </a:p>
+        </p:txBody>
+      </p:sp>
+      <p:sp>
+        <p:nvSpPr>
+          <p:cNvPr id="40" name="Text 38"/>
+          <p:cNvSpPr/>
+          <p:nvPr/>
+        </p:nvSpPr>
+        <p:spPr>
+          <a:xfrm>
+            <a:off x="7918704" y="5266944"/>
+            <a:ext cx="3383280" cy="630936"/>
+          </a:xfrm>
+          <a:prstGeom prst="rect">
+            <a:avLst/>
+          </a:prstGeom>
+          <a:noFill/>
+          <a:ln/>
+        </p:spPr>
+        <p:txBody>
+          <a:bodyPr wrap="square" lIns="0" tIns="0" rIns="0" bIns="0" rtlCol="0" anchor="t"/>
+          <a:lstStyle/>
+          <a:p>
+            <a:pPr indent="0" marL="0">
+              <a:lnSpc>
+                <a:spcPts val="1500"/>
+              </a:lnSpc>
+              <a:buNone/>
+            </a:pPr>
+            <a:r>
+              <a:rPr lang="en-US" sz="1150" dirty="0">
+                <a:solidFill>
+                  <a:srgbClr val="B4B7BD"/>
+                </a:solidFill>
+                <a:latin typeface="Calibri" pitchFamily="34" charset="0"/>
+                <a:ea typeface="Calibri" pitchFamily="34" charset="-122"/>
+                <a:cs typeface="Calibri" pitchFamily="34" charset="-120"/>
+              </a:rPr>
+              <a:t>A SKIPPED entry means nothing was due; a STILL RUNNING entry means Action Center is finishing on its own. Both are normal and send no email.</a:t>
             </a:r>
             <a:endParaRPr lang="en-US" sz="1150" dirty="0"/>
           </a:p>
@@ -13478,7 +13114,7 @@
                 <a:ea typeface="Calibri" pitchFamily="34" charset="-122"/>
                 <a:cs typeface="Calibri" pitchFamily="34" charset="-120"/>
               </a:rPr>
-              <a:t>TEST 12</a:t>
+              <a:t>TEST 11</a:t>
             </a:r>
             <a:endParaRPr lang="en-US" sz="1100" dirty="0"/>
           </a:p>
@@ -13517,7 +13153,7 @@
                 <a:ea typeface="Calibri" pitchFamily="34" charset="-122"/>
                 <a:cs typeface="Calibri" pitchFamily="34" charset="-120"/>
               </a:rPr>
-              <a:t>Simulated test data</a:t>
+              <a:t>Threat-hunting query library</a:t>
             </a:r>
             <a:endParaRPr lang="en-US" sz="3100" dirty="0"/>
           </a:p>
@@ -13664,7 +13300,7 @@
                 <a:ea typeface="Calibri" pitchFamily="34" charset="-122"/>
                 <a:cs typeface="Calibri" pitchFamily="34" charset="-120"/>
               </a:rPr>
-              <a:t>KoiSimulateEvents  (test automation)</a:t>
+              <a:t>none — the queries are files you paste</a:t>
             </a:r>
             <a:endParaRPr lang="en-US" sz="1000" dirty="0"/>
           </a:p>
@@ -13757,7 +13393,7 @@
         <p:spPr>
           <a:xfrm>
             <a:off x="7086600" y="1408176"/>
-            <a:ext cx="4343400" cy="384048"/>
+            <a:ext cx="4343400" cy="192024"/>
           </a:xfrm>
           <a:prstGeom prst="rect">
             <a:avLst/>
@@ -13784,7 +13420,7 @@
                 <a:ea typeface="Calibri" pitchFamily="34" charset="-122"/>
                 <a:cs typeface="Calibri" pitchFamily="34" charset="-120"/>
               </a:rPr>
-              <a:t>The KoiSimulateEvents automation imported (ships in TestTools)</a:t>
+              <a:t>Test 2 passing — events present</a:t>
             </a:r>
             <a:endParaRPr lang="en-US" sz="1000" dirty="0"/>
           </a:p>
@@ -13798,7 +13434,7 @@
         </p:nvSpPr>
         <p:spPr>
           <a:xfrm>
-            <a:off x="6940296" y="1819656"/>
+            <a:off x="6940296" y="1632204"/>
             <a:ext cx="128016" cy="201168"/>
           </a:xfrm>
           <a:prstGeom prst="rect">
@@ -13837,8 +13473,8 @@
         </p:nvSpPr>
         <p:spPr>
           <a:xfrm>
-            <a:off x="7086600" y="1819656"/>
-            <a:ext cx="4343400" cy="192024"/>
+            <a:off x="7086600" y="1632204"/>
+            <a:ext cx="4343400" cy="384048"/>
           </a:xfrm>
           <a:prstGeom prst="rect">
             <a:avLst/>
@@ -13865,7 +13501,7 @@
                 <a:ea typeface="Calibri" pitchFamily="34" charset="-122"/>
                 <a:cs typeface="Calibri" pitchFamily="34" charset="-120"/>
               </a:rPr>
-              <a:t>No KOI API key and no Core REST API needed</a:t>
+              <a:t>Nothing else — the cross-dataset hunts read xdr_data, which XSIAM holds natively</a:t>
             </a:r>
             <a:endParaRPr lang="en-US" sz="1000" dirty="0"/>
           </a:p>
@@ -13880,11 +13516,11 @@
         <p:spPr>
           <a:xfrm>
             <a:off x="548640" y="2409444"/>
-            <a:ext cx="6400800" cy="2432304"/>
+            <a:ext cx="6400800" cy="2148840"/>
           </a:xfrm>
           <a:prstGeom prst="roundRect">
             <a:avLst>
-              <a:gd name="adj" fmla="val 1880"/>
+              <a:gd name="adj" fmla="val 2128"/>
             </a:avLst>
           </a:prstGeom>
           <a:solidFill>
@@ -14012,7 +13648,7 @@
                 <a:ea typeface="Calibri" pitchFamily="34" charset="-122"/>
                 <a:cs typeface="Calibri" pitchFamily="34" charset="-120"/>
               </a:rPr>
-              <a:t>Open the CLI on any incident.</a:t>
+              <a:t>Open docs/xql in the pack you were sent.</a:t>
             </a:r>
             <a:endParaRPr lang="en-US" sz="1150" dirty="0"/>
           </a:p>
@@ -14093,7 +13729,7 @@
                 <a:ea typeface="Calibri" pitchFamily="34" charset="-122"/>
                 <a:cs typeface="Calibri" pitchFamily="34" charset="-120"/>
               </a:rPr>
-              <a:t>Run:</a:t>
+              <a:t>Read QUERY_LIBRARY.md first — it explains the rules.</a:t>
             </a:r>
             <a:endParaRPr lang="en-US" sz="1150" dirty="0"/>
           </a:p>
@@ -14166,17 +13802,17 @@
               <a:buNone/>
             </a:pPr>
             <a:r>
-              <a:rPr lang="en-US" sz="1050" dirty="0">
-                <a:solidFill>
-                  <a:srgbClr val="22D3EE"/>
-                </a:solidFill>
-                <a:latin typeface="Courier New" pitchFamily="34" charset="0"/>
-                <a:ea typeface="Courier New" pitchFamily="34" charset="-122"/>
-                <a:cs typeface="Courier New" pitchFamily="34" charset="-120"/>
-              </a:rPr>
-              <a:t>!KoiSimulateEvents alerts=40 duplicate_factor=8 audit=60</a:t>
-            </a:r>
-            <a:endParaRPr lang="en-US" sz="1050" dirty="0"/>
+              <a:rPr lang="en-US" sz="1150" dirty="0">
+                <a:solidFill>
+                  <a:srgbClr val="B4B7BD"/>
+                </a:solidFill>
+                <a:latin typeface="Calibri" pitchFamily="34" charset="0"/>
+                <a:ea typeface="Calibri" pitchFamily="34" charset="-122"/>
+                <a:cs typeface="Calibri" pitchFamily="34" charset="-120"/>
+              </a:rPr>
+              <a:t>Paste a hunt into Query Builder, starting with H2.1.</a:t>
+            </a:r>
+            <a:endParaRPr lang="en-US" sz="1150" dirty="0"/>
           </a:p>
         </p:txBody>
       </p:sp>
@@ -14255,7 +13891,7 @@
                 <a:ea typeface="Calibri" pitchFamily="34" charset="-122"/>
                 <a:cs typeface="Calibri" pitchFamily="34" charset="-120"/>
               </a:rPr>
-              <a:t>Read the summary it prints — it tells you the answers in advance.</a:t>
+              <a:t>Try a detection too, for example A1.</a:t>
             </a:r>
             <a:endParaRPr lang="en-US" sz="1150" dirty="0"/>
           </a:p>
@@ -14263,99 +13899,18 @@
       </p:sp>
       <p:sp>
         <p:nvSpPr>
-          <p:cNvPr id="23" name="Text 21"/>
-          <p:cNvSpPr/>
-          <p:nvPr/>
-        </p:nvSpPr>
-        <p:spPr>
-          <a:xfrm>
-            <a:off x="859536" y="4256532"/>
-            <a:ext cx="219456" cy="256032"/>
-          </a:xfrm>
-          <a:prstGeom prst="rect">
-            <a:avLst/>
-          </a:prstGeom>
-          <a:noFill/>
-          <a:ln/>
-        </p:spPr>
-        <p:txBody>
-          <a:bodyPr wrap="square" lIns="0" tIns="0" rIns="0" bIns="0" rtlCol="0" anchor="t"/>
-          <a:lstStyle/>
-          <a:p>
-            <a:pPr indent="0" marL="0">
-              <a:buNone/>
-            </a:pPr>
-            <a:r>
-              <a:rPr lang="en-US" sz="1150" b="1" dirty="0">
-                <a:solidFill>
-                  <a:srgbClr val="E8551F"/>
-                </a:solidFill>
-                <a:latin typeface="Calibri" pitchFamily="34" charset="0"/>
-                <a:ea typeface="Calibri" pitchFamily="34" charset="-122"/>
-                <a:cs typeface="Calibri" pitchFamily="34" charset="-120"/>
-              </a:rPr>
-              <a:t>5</a:t>
-            </a:r>
-            <a:endParaRPr lang="en-US" sz="1150" dirty="0"/>
-          </a:p>
-        </p:txBody>
-      </p:sp>
-      <p:sp>
-        <p:nvSpPr>
-          <p:cNvPr id="24" name="Text 22"/>
-          <p:cNvSpPr/>
-          <p:nvPr/>
-        </p:nvSpPr>
-        <p:spPr>
-          <a:xfrm>
-            <a:off x="1152144" y="4256532"/>
-            <a:ext cx="5486400" cy="246888"/>
-          </a:xfrm>
-          <a:prstGeom prst="rect">
-            <a:avLst/>
-          </a:prstGeom>
-          <a:noFill/>
-          <a:ln/>
-        </p:spPr>
-        <p:txBody>
-          <a:bodyPr wrap="square" lIns="0" tIns="0" rIns="0" bIns="0" rtlCol="0" anchor="t"/>
-          <a:lstStyle/>
-          <a:p>
-            <a:pPr indent="0" marL="0">
-              <a:lnSpc>
-                <a:spcPts val="1500"/>
-              </a:lnSpc>
-              <a:buNone/>
-            </a:pPr>
-            <a:r>
-              <a:rPr lang="en-US" sz="1150" dirty="0">
-                <a:solidFill>
-                  <a:srgbClr val="B4B7BD"/>
-                </a:solidFill>
-                <a:latin typeface="Calibri" pitchFamily="34" charset="0"/>
-                <a:ea typeface="Calibri" pitchFamily="34" charset="-122"/>
-                <a:cs typeface="Calibri" pitchFamily="34" charset="-120"/>
-              </a:rPr>
-              <a:t>Query koisim_koisim_raw to check them.</a:t>
-            </a:r>
-            <a:endParaRPr lang="en-US" sz="1150" dirty="0"/>
-          </a:p>
-        </p:txBody>
-      </p:sp>
-      <p:sp>
-        <p:nvSpPr>
-          <p:cNvPr id="25" name="Shape 23"/>
+          <p:cNvPr id="23" name="Shape 21"/>
           <p:cNvSpPr/>
           <p:nvPr/>
         </p:nvSpPr>
         <p:spPr>
           <a:xfrm>
             <a:off x="7315200" y="2409444"/>
-            <a:ext cx="4297680" cy="2432304"/>
+            <a:ext cx="4297680" cy="2148840"/>
           </a:xfrm>
           <a:prstGeom prst="roundRect">
             <a:avLst>
-              <a:gd name="adj" fmla="val 1880"/>
+              <a:gd name="adj" fmla="val 2128"/>
             </a:avLst>
           </a:prstGeom>
           <a:solidFill>
@@ -14371,7 +13926,7 @@
       </p:sp>
       <p:sp>
         <p:nvSpPr>
-          <p:cNvPr id="26" name="Text 24"/>
+          <p:cNvPr id="24" name="Text 22"/>
           <p:cNvSpPr/>
           <p:nvPr/>
         </p:nvSpPr>
@@ -14410,7 +13965,7 @@
       </p:sp>
       <p:sp>
         <p:nvSpPr>
-          <p:cNvPr id="27" name="Text 25"/>
+          <p:cNvPr id="25" name="Text 23"/>
           <p:cNvSpPr/>
           <p:nvPr/>
         </p:nvSpPr>
@@ -14449,14 +14004,14 @@
       </p:sp>
       <p:sp>
         <p:nvSpPr>
-          <p:cNvPr id="28" name="Text 26"/>
+          <p:cNvPr id="26" name="Text 24"/>
           <p:cNvSpPr/>
           <p:nvPr/>
         </p:nvSpPr>
         <p:spPr>
           <a:xfrm>
             <a:off x="7918704" y="2939796"/>
-            <a:ext cx="3383280" cy="246888"/>
+            <a:ext cx="3383280" cy="438912"/>
           </a:xfrm>
           <a:prstGeom prst="rect">
             <a:avLst/>
@@ -14483,7 +14038,7 @@
                 <a:ea typeface="Calibri" pitchFamily="34" charset="-122"/>
                 <a:cs typeface="Calibri" pitchFamily="34" charset="-120"/>
               </a:rPr>
-              <a:t>380 events land in koisim_koisim_raw.</a:t>
+              <a:t>Each query runs and returns rows, or a clean empty result.</a:t>
             </a:r>
             <a:endParaRPr lang="en-US" sz="1150" dirty="0"/>
           </a:p>
@@ -14491,13 +14046,13 @@
       </p:sp>
       <p:sp>
         <p:nvSpPr>
-          <p:cNvPr id="29" name="Text 27"/>
-          <p:cNvSpPr/>
-          <p:nvPr/>
-        </p:nvSpPr>
-        <p:spPr>
-          <a:xfrm>
-            <a:off x="7626096" y="3268980"/>
+          <p:cNvPr id="27" name="Text 25"/>
+          <p:cNvSpPr/>
+          <p:nvPr/>
+        </p:nvSpPr>
+        <p:spPr>
+          <a:xfrm>
+            <a:off x="7626096" y="3456432"/>
             <a:ext cx="219456" cy="256032"/>
           </a:xfrm>
           <a:prstGeom prst="rect">
@@ -14530,13 +14085,13 @@
       </p:sp>
       <p:sp>
         <p:nvSpPr>
-          <p:cNvPr id="30" name="Text 28"/>
-          <p:cNvSpPr/>
-          <p:nvPr/>
-        </p:nvSpPr>
-        <p:spPr>
-          <a:xfrm>
-            <a:off x="7918704" y="3268980"/>
+          <p:cNvPr id="28" name="Text 26"/>
+          <p:cNvSpPr/>
+          <p:nvPr/>
+        </p:nvSpPr>
+        <p:spPr>
+          <a:xfrm>
+            <a:off x="7918704" y="3456432"/>
             <a:ext cx="3383280" cy="438912"/>
           </a:xfrm>
           <a:prstGeom prst="rect">
@@ -14564,7 +14119,7 @@
                 <a:ea typeface="Calibri" pitchFamily="34" charset="-122"/>
                 <a:cs typeface="Calibri" pitchFamily="34" charset="-120"/>
               </a:rPr>
-              <a:t>40 distinct alerts delivered 8 times each, as real KOI does.</a:t>
+              <a:t>Hunts surface findings KOI scored that nobody actioned.</a:t>
             </a:r>
             <a:endParaRPr lang="en-US" sz="1150" dirty="0"/>
           </a:p>
@@ -14572,13 +14127,13 @@
       </p:sp>
       <p:sp>
         <p:nvSpPr>
-          <p:cNvPr id="31" name="Text 29"/>
-          <p:cNvSpPr/>
-          <p:nvPr/>
-        </p:nvSpPr>
-        <p:spPr>
-          <a:xfrm>
-            <a:off x="7626096" y="3785616"/>
+          <p:cNvPr id="29" name="Text 27"/>
+          <p:cNvSpPr/>
+          <p:nvPr/>
+        </p:nvSpPr>
+        <p:spPr>
+          <a:xfrm>
+            <a:off x="7626096" y="3973068"/>
             <a:ext cx="219456" cy="256032"/>
           </a:xfrm>
           <a:prstGeom prst="rect">
@@ -14611,14 +14166,14 @@
       </p:sp>
       <p:sp>
         <p:nvSpPr>
-          <p:cNvPr id="32" name="Text 30"/>
-          <p:cNvSpPr/>
-          <p:nvPr/>
-        </p:nvSpPr>
-        <p:spPr>
-          <a:xfrm>
-            <a:off x="7918704" y="3785616"/>
-            <a:ext cx="3383280" cy="438912"/>
+          <p:cNvPr id="30" name="Text 28"/>
+          <p:cNvSpPr/>
+          <p:nvPr/>
+        </p:nvSpPr>
+        <p:spPr>
+          <a:xfrm>
+            <a:off x="7918704" y="3973068"/>
+            <a:ext cx="3383280" cy="246888"/>
           </a:xfrm>
           <a:prstGeom prst="rect">
             <a:avLst/>
@@ -14645,7 +14200,7 @@
                 <a:ea typeface="Calibri" pitchFamily="34" charset="-122"/>
                 <a:cs typeface="Calibri" pitchFamily="34" charset="-120"/>
               </a:rPr>
-              <a:t>The counts you measure match the summary exactly.</a:t>
+              <a:t>26 hunts and 46 detections are included.</a:t>
             </a:r>
             <a:endParaRPr lang="en-US" sz="1150" dirty="0"/>
           </a:p>
@@ -14685,26 +14240,104 @@
       </p:grpSpPr>
       <p:sp>
         <p:nvSpPr>
-          <p:cNvPr id="2" name="Shape 0"/>
-          <p:cNvSpPr/>
-          <p:nvPr/>
-        </p:nvSpPr>
-        <p:spPr>
-          <a:xfrm>
-            <a:off x="10424160" y="-3108960"/>
-            <a:ext cx="4389120" cy="4389120"/>
-          </a:xfrm>
-          <a:prstGeom prst="ellipse">
-            <a:avLst/>
+          <p:cNvPr id="2" name="Text 0"/>
+          <p:cNvSpPr/>
+          <p:nvPr/>
+        </p:nvSpPr>
+        <p:spPr>
+          <a:xfrm>
+            <a:off x="548640" y="384048"/>
+            <a:ext cx="11064240" cy="237744"/>
+          </a:xfrm>
+          <a:prstGeom prst="rect">
+            <a:avLst/>
+          </a:prstGeom>
+          <a:noFill/>
+          <a:ln/>
+        </p:spPr>
+        <p:txBody>
+          <a:bodyPr wrap="square" lIns="0" tIns="0" rIns="0" bIns="0" rtlCol="0" anchor="t"/>
+          <a:lstStyle/>
+          <a:p>
+            <a:pPr indent="0" marL="0">
+              <a:buNone/>
+            </a:pPr>
+            <a:r>
+              <a:rPr lang="en-US" sz="1100" b="1" spc="200" kern="0" dirty="0">
+                <a:solidFill>
+                  <a:srgbClr val="E8551F"/>
+                </a:solidFill>
+                <a:latin typeface="Calibri" pitchFamily="34" charset="0"/>
+                <a:ea typeface="Calibri" pitchFamily="34" charset="-122"/>
+                <a:cs typeface="Calibri" pitchFamily="34" charset="-120"/>
+              </a:rPr>
+              <a:t>TEST 12</a:t>
+            </a:r>
+            <a:endParaRPr lang="en-US" sz="1100" dirty="0"/>
+          </a:p>
+        </p:txBody>
+      </p:sp>
+      <p:sp>
+        <p:nvSpPr>
+          <p:cNvPr id="3" name="Text 1"/>
+          <p:cNvSpPr/>
+          <p:nvPr/>
+        </p:nvSpPr>
+        <p:spPr>
+          <a:xfrm>
+            <a:off x="548640" y="640080"/>
+            <a:ext cx="11064240" cy="640080"/>
+          </a:xfrm>
+          <a:prstGeom prst="rect">
+            <a:avLst/>
+          </a:prstGeom>
+          <a:noFill/>
+          <a:ln/>
+        </p:spPr>
+        <p:txBody>
+          <a:bodyPr wrap="square" lIns="0" tIns="0" rIns="0" bIns="0" rtlCol="0" anchor="t"/>
+          <a:lstStyle/>
+          <a:p>
+            <a:pPr indent="0" marL="0">
+              <a:buNone/>
+            </a:pPr>
+            <a:r>
+              <a:rPr lang="en-US" sz="3100" b="1" dirty="0">
+                <a:solidFill>
+                  <a:srgbClr val="FFFFFF"/>
+                </a:solidFill>
+                <a:latin typeface="Calibri" pitchFamily="34" charset="0"/>
+                <a:ea typeface="Calibri" pitchFamily="34" charset="-122"/>
+                <a:cs typeface="Calibri" pitchFamily="34" charset="-120"/>
+              </a:rPr>
+              <a:t>Simulated test data</a:t>
+            </a:r>
+            <a:endParaRPr lang="en-US" sz="3100" dirty="0"/>
+          </a:p>
+        </p:txBody>
+      </p:sp>
+      <p:sp>
+        <p:nvSpPr>
+          <p:cNvPr id="4" name="Shape 2"/>
+          <p:cNvSpPr/>
+          <p:nvPr/>
+        </p:nvSpPr>
+        <p:spPr>
+          <a:xfrm>
+            <a:off x="548640" y="1280160"/>
+            <a:ext cx="11064240" cy="946404"/>
+          </a:xfrm>
+          <a:prstGeom prst="roundRect">
+            <a:avLst>
+              <a:gd name="adj" fmla="val 4831"/>
+            </a:avLst>
           </a:prstGeom>
           <a:solidFill>
-            <a:srgbClr val="3FB950">
-              <a:alpha val="7000"/>
-            </a:srgbClr>
+            <a:srgbClr val="1C2026"/>
           </a:solidFill>
           <a:ln w="12700">
             <a:solidFill>
-              <a:srgbClr val="3FB950"/>
+              <a:srgbClr val="1C2026"/>
             </a:solidFill>
             <a:prstDash val="solid"/>
           </a:ln>
@@ -14712,96 +14345,339 @@
       </p:sp>
       <p:sp>
         <p:nvSpPr>
-          <p:cNvPr id="3" name="Text 1"/>
-          <p:cNvSpPr/>
-          <p:nvPr/>
-        </p:nvSpPr>
-        <p:spPr>
-          <a:xfrm>
-            <a:off x="548640" y="384048"/>
-            <a:ext cx="11064240" cy="237744"/>
-          </a:xfrm>
-          <a:prstGeom prst="rect">
-            <a:avLst/>
-          </a:prstGeom>
-          <a:noFill/>
-          <a:ln/>
-        </p:spPr>
-        <p:txBody>
-          <a:bodyPr wrap="square" lIns="0" tIns="0" rIns="0" bIns="0" rtlCol="0" anchor="t"/>
-          <a:lstStyle/>
-          <a:p>
-            <a:pPr indent="0" marL="0">
-              <a:buNone/>
-            </a:pPr>
-            <a:r>
-              <a:rPr lang="en-US" sz="1100" b="1" spc="200" kern="0" dirty="0">
-                <a:solidFill>
-                  <a:srgbClr val="E8551F"/>
-                </a:solidFill>
-                <a:latin typeface="Calibri" pitchFamily="34" charset="0"/>
-                <a:ea typeface="Calibri" pitchFamily="34" charset="-122"/>
-                <a:cs typeface="Calibri" pitchFamily="34" charset="-120"/>
-              </a:rPr>
-              <a:t>SIGN-OFF</a:t>
-            </a:r>
-            <a:endParaRPr lang="en-US" sz="1100" dirty="0"/>
-          </a:p>
-        </p:txBody>
-      </p:sp>
-      <p:sp>
-        <p:nvSpPr>
-          <p:cNvPr id="4" name="Text 2"/>
-          <p:cNvSpPr/>
-          <p:nvPr/>
-        </p:nvSpPr>
-        <p:spPr>
-          <a:xfrm>
-            <a:off x="548640" y="640080"/>
-            <a:ext cx="11064240" cy="640080"/>
-          </a:xfrm>
-          <a:prstGeom prst="rect">
-            <a:avLst/>
-          </a:prstGeom>
-          <a:noFill/>
-          <a:ln/>
-        </p:spPr>
-        <p:txBody>
-          <a:bodyPr wrap="square" lIns="0" tIns="0" rIns="0" bIns="0" rtlCol="0" anchor="t"/>
-          <a:lstStyle/>
-          <a:p>
-            <a:pPr indent="0" marL="0">
-              <a:buNone/>
-            </a:pPr>
-            <a:r>
-              <a:rPr lang="en-US" sz="3100" b="1" dirty="0">
-                <a:solidFill>
-                  <a:srgbClr val="FFFFFF"/>
-                </a:solidFill>
-                <a:latin typeface="Calibri" pitchFamily="34" charset="0"/>
-                <a:ea typeface="Calibri" pitchFamily="34" charset="-122"/>
-                <a:cs typeface="Calibri" pitchFamily="34" charset="-120"/>
-              </a:rPr>
-              <a:t>One line of evidence per test</a:t>
-            </a:r>
-            <a:endParaRPr lang="en-US" sz="3100" dirty="0"/>
-          </a:p>
-        </p:txBody>
-      </p:sp>
-      <p:sp>
-        <p:nvSpPr>
-          <p:cNvPr id="5" name="Shape 3"/>
-          <p:cNvSpPr/>
-          <p:nvPr/>
-        </p:nvSpPr>
-        <p:spPr>
-          <a:xfrm>
-            <a:off x="548640" y="1417320"/>
-            <a:ext cx="5349240" cy="548640"/>
+          <p:cNvPr id="5" name="Text 3"/>
+          <p:cNvSpPr/>
+          <p:nvPr/>
+        </p:nvSpPr>
+        <p:spPr>
+          <a:xfrm>
+            <a:off x="804672" y="1408176"/>
+            <a:ext cx="1463040" cy="201168"/>
+          </a:xfrm>
+          <a:prstGeom prst="rect">
+            <a:avLst/>
+          </a:prstGeom>
+          <a:noFill/>
+          <a:ln/>
+        </p:spPr>
+        <p:txBody>
+          <a:bodyPr wrap="square" lIns="0" tIns="0" rIns="0" bIns="0" rtlCol="0" anchor="t"/>
+          <a:lstStyle/>
+          <a:p>
+            <a:pPr indent="0" marL="0">
+              <a:buNone/>
+            </a:pPr>
+            <a:r>
+              <a:rPr lang="en-US" sz="900" b="1" spc="100" kern="0" dirty="0">
+                <a:solidFill>
+                  <a:srgbClr val="22D3EE"/>
+                </a:solidFill>
+                <a:latin typeface="Calibri" pitchFamily="34" charset="0"/>
+                <a:ea typeface="Calibri" pitchFamily="34" charset="-122"/>
+                <a:cs typeface="Calibri" pitchFamily="34" charset="-120"/>
+              </a:rPr>
+              <a:t>PACK CONTENT</a:t>
+            </a:r>
+            <a:endParaRPr lang="en-US" sz="900" dirty="0"/>
+          </a:p>
+        </p:txBody>
+      </p:sp>
+      <p:sp>
+        <p:nvSpPr>
+          <p:cNvPr id="6" name="Text 4"/>
+          <p:cNvSpPr/>
+          <p:nvPr/>
+        </p:nvSpPr>
+        <p:spPr>
+          <a:xfrm>
+            <a:off x="2139696" y="1408176"/>
+            <a:ext cx="128016" cy="201168"/>
+          </a:xfrm>
+          <a:prstGeom prst="rect">
+            <a:avLst/>
+          </a:prstGeom>
+          <a:noFill/>
+          <a:ln/>
+        </p:spPr>
+        <p:txBody>
+          <a:bodyPr wrap="square" lIns="0" tIns="0" rIns="0" bIns="0" rtlCol="0" anchor="t"/>
+          <a:lstStyle/>
+          <a:p>
+            <a:pPr indent="0" marL="0">
+              <a:buNone/>
+            </a:pPr>
+            <a:r>
+              <a:rPr lang="en-US" sz="1000" b="1" dirty="0">
+                <a:solidFill>
+                  <a:srgbClr val="22D3EE"/>
+                </a:solidFill>
+                <a:latin typeface="Calibri" pitchFamily="34" charset="0"/>
+                <a:ea typeface="Calibri" pitchFamily="34" charset="-122"/>
+                <a:cs typeface="Calibri" pitchFamily="34" charset="-120"/>
+              </a:rPr>
+              <a:t>•</a:t>
+            </a:r>
+            <a:endParaRPr lang="en-US" sz="1000" dirty="0"/>
+          </a:p>
+        </p:txBody>
+      </p:sp>
+      <p:sp>
+        <p:nvSpPr>
+          <p:cNvPr id="7" name="Text 5"/>
+          <p:cNvSpPr/>
+          <p:nvPr/>
+        </p:nvSpPr>
+        <p:spPr>
+          <a:xfrm>
+            <a:off x="2286000" y="1408176"/>
+            <a:ext cx="4343400" cy="192024"/>
+          </a:xfrm>
+          <a:prstGeom prst="rect">
+            <a:avLst/>
+          </a:prstGeom>
+          <a:noFill/>
+          <a:ln/>
+        </p:spPr>
+        <p:txBody>
+          <a:bodyPr wrap="square" lIns="0" tIns="0" rIns="0" bIns="0" rtlCol="0" anchor="t"/>
+          <a:lstStyle/>
+          <a:p>
+            <a:pPr indent="0" marL="0">
+              <a:lnSpc>
+                <a:spcPts val="1200"/>
+              </a:lnSpc>
+              <a:buNone/>
+            </a:pPr>
+            <a:r>
+              <a:rPr lang="en-US" sz="1000" dirty="0">
+                <a:solidFill>
+                  <a:srgbClr val="B4B7BD"/>
+                </a:solidFill>
+                <a:latin typeface="Calibri" pitchFamily="34" charset="0"/>
+                <a:ea typeface="Calibri" pitchFamily="34" charset="-122"/>
+                <a:cs typeface="Calibri" pitchFamily="34" charset="-120"/>
+              </a:rPr>
+              <a:t>KoiSimulateEvents  (test automation)</a:t>
+            </a:r>
+            <a:endParaRPr lang="en-US" sz="1000" dirty="0"/>
+          </a:p>
+        </p:txBody>
+      </p:sp>
+      <p:sp>
+        <p:nvSpPr>
+          <p:cNvPr id="8" name="Text 6"/>
+          <p:cNvSpPr/>
+          <p:nvPr/>
+        </p:nvSpPr>
+        <p:spPr>
+          <a:xfrm>
+            <a:off x="5669280" y="1408176"/>
+            <a:ext cx="1371600" cy="201168"/>
+          </a:xfrm>
+          <a:prstGeom prst="rect">
+            <a:avLst/>
+          </a:prstGeom>
+          <a:noFill/>
+          <a:ln/>
+        </p:spPr>
+        <p:txBody>
+          <a:bodyPr wrap="square" lIns="0" tIns="0" rIns="0" bIns="0" rtlCol="0" anchor="t"/>
+          <a:lstStyle/>
+          <a:p>
+            <a:pPr indent="0" marL="0">
+              <a:buNone/>
+            </a:pPr>
+            <a:r>
+              <a:rPr lang="en-US" sz="900" b="1" spc="100" kern="0" dirty="0">
+                <a:solidFill>
+                  <a:srgbClr val="F5A524"/>
+                </a:solidFill>
+                <a:latin typeface="Calibri" pitchFamily="34" charset="0"/>
+                <a:ea typeface="Calibri" pitchFamily="34" charset="-122"/>
+                <a:cs typeface="Calibri" pitchFamily="34" charset="-120"/>
+              </a:rPr>
+              <a:t>TENANT SETUP</a:t>
+            </a:r>
+            <a:endParaRPr lang="en-US" sz="900" dirty="0"/>
+          </a:p>
+        </p:txBody>
+      </p:sp>
+      <p:sp>
+        <p:nvSpPr>
+          <p:cNvPr id="9" name="Text 7"/>
+          <p:cNvSpPr/>
+          <p:nvPr/>
+        </p:nvSpPr>
+        <p:spPr>
+          <a:xfrm>
+            <a:off x="6940296" y="1408176"/>
+            <a:ext cx="128016" cy="201168"/>
+          </a:xfrm>
+          <a:prstGeom prst="rect">
+            <a:avLst/>
+          </a:prstGeom>
+          <a:noFill/>
+          <a:ln/>
+        </p:spPr>
+        <p:txBody>
+          <a:bodyPr wrap="square" lIns="0" tIns="0" rIns="0" bIns="0" rtlCol="0" anchor="t"/>
+          <a:lstStyle/>
+          <a:p>
+            <a:pPr indent="0" marL="0">
+              <a:buNone/>
+            </a:pPr>
+            <a:r>
+              <a:rPr lang="en-US" sz="1000" b="1" dirty="0">
+                <a:solidFill>
+                  <a:srgbClr val="F5A524"/>
+                </a:solidFill>
+                <a:latin typeface="Calibri" pitchFamily="34" charset="0"/>
+                <a:ea typeface="Calibri" pitchFamily="34" charset="-122"/>
+                <a:cs typeface="Calibri" pitchFamily="34" charset="-120"/>
+              </a:rPr>
+              <a:t>•</a:t>
+            </a:r>
+            <a:endParaRPr lang="en-US" sz="1000" dirty="0"/>
+          </a:p>
+        </p:txBody>
+      </p:sp>
+      <p:sp>
+        <p:nvSpPr>
+          <p:cNvPr id="10" name="Text 8"/>
+          <p:cNvSpPr/>
+          <p:nvPr/>
+        </p:nvSpPr>
+        <p:spPr>
+          <a:xfrm>
+            <a:off x="7086600" y="1408176"/>
+            <a:ext cx="4343400" cy="384048"/>
+          </a:xfrm>
+          <a:prstGeom prst="rect">
+            <a:avLst/>
+          </a:prstGeom>
+          <a:noFill/>
+          <a:ln/>
+        </p:spPr>
+        <p:txBody>
+          <a:bodyPr wrap="square" lIns="0" tIns="0" rIns="0" bIns="0" rtlCol="0" anchor="t"/>
+          <a:lstStyle/>
+          <a:p>
+            <a:pPr indent="0" marL="0">
+              <a:lnSpc>
+                <a:spcPts val="1200"/>
+              </a:lnSpc>
+              <a:buNone/>
+            </a:pPr>
+            <a:r>
+              <a:rPr lang="en-US" sz="1000" dirty="0">
+                <a:solidFill>
+                  <a:srgbClr val="B4B7BD"/>
+                </a:solidFill>
+                <a:latin typeface="Calibri" pitchFamily="34" charset="0"/>
+                <a:ea typeface="Calibri" pitchFamily="34" charset="-122"/>
+                <a:cs typeface="Calibri" pitchFamily="34" charset="-120"/>
+              </a:rPr>
+              <a:t>The KoiSimulateEvents automation imported (ships in TestTools)</a:t>
+            </a:r>
+            <a:endParaRPr lang="en-US" sz="1000" dirty="0"/>
+          </a:p>
+        </p:txBody>
+      </p:sp>
+      <p:sp>
+        <p:nvSpPr>
+          <p:cNvPr id="11" name="Text 9"/>
+          <p:cNvSpPr/>
+          <p:nvPr/>
+        </p:nvSpPr>
+        <p:spPr>
+          <a:xfrm>
+            <a:off x="6940296" y="1819656"/>
+            <a:ext cx="128016" cy="201168"/>
+          </a:xfrm>
+          <a:prstGeom prst="rect">
+            <a:avLst/>
+          </a:prstGeom>
+          <a:noFill/>
+          <a:ln/>
+        </p:spPr>
+        <p:txBody>
+          <a:bodyPr wrap="square" lIns="0" tIns="0" rIns="0" bIns="0" rtlCol="0" anchor="t"/>
+          <a:lstStyle/>
+          <a:p>
+            <a:pPr indent="0" marL="0">
+              <a:buNone/>
+            </a:pPr>
+            <a:r>
+              <a:rPr lang="en-US" sz="1000" b="1" dirty="0">
+                <a:solidFill>
+                  <a:srgbClr val="F5A524"/>
+                </a:solidFill>
+                <a:latin typeface="Calibri" pitchFamily="34" charset="0"/>
+                <a:ea typeface="Calibri" pitchFamily="34" charset="-122"/>
+                <a:cs typeface="Calibri" pitchFamily="34" charset="-120"/>
+              </a:rPr>
+              <a:t>•</a:t>
+            </a:r>
+            <a:endParaRPr lang="en-US" sz="1000" dirty="0"/>
+          </a:p>
+        </p:txBody>
+      </p:sp>
+      <p:sp>
+        <p:nvSpPr>
+          <p:cNvPr id="12" name="Text 10"/>
+          <p:cNvSpPr/>
+          <p:nvPr/>
+        </p:nvSpPr>
+        <p:spPr>
+          <a:xfrm>
+            <a:off x="7086600" y="1819656"/>
+            <a:ext cx="4343400" cy="192024"/>
+          </a:xfrm>
+          <a:prstGeom prst="rect">
+            <a:avLst/>
+          </a:prstGeom>
+          <a:noFill/>
+          <a:ln/>
+        </p:spPr>
+        <p:txBody>
+          <a:bodyPr wrap="square" lIns="0" tIns="0" rIns="0" bIns="0" rtlCol="0" anchor="t"/>
+          <a:lstStyle/>
+          <a:p>
+            <a:pPr indent="0" marL="0">
+              <a:lnSpc>
+                <a:spcPts val="1200"/>
+              </a:lnSpc>
+              <a:buNone/>
+            </a:pPr>
+            <a:r>
+              <a:rPr lang="en-US" sz="1000" dirty="0">
+                <a:solidFill>
+                  <a:srgbClr val="B4B7BD"/>
+                </a:solidFill>
+                <a:latin typeface="Calibri" pitchFamily="34" charset="0"/>
+                <a:ea typeface="Calibri" pitchFamily="34" charset="-122"/>
+                <a:cs typeface="Calibri" pitchFamily="34" charset="-120"/>
+              </a:rPr>
+              <a:t>No KOI API key and no Core REST API needed</a:t>
+            </a:r>
+            <a:endParaRPr lang="en-US" sz="1000" dirty="0"/>
+          </a:p>
+        </p:txBody>
+      </p:sp>
+      <p:sp>
+        <p:nvSpPr>
+          <p:cNvPr id="13" name="Shape 11"/>
+          <p:cNvSpPr/>
+          <p:nvPr/>
+        </p:nvSpPr>
+        <p:spPr>
+          <a:xfrm>
+            <a:off x="548640" y="2409444"/>
+            <a:ext cx="6400800" cy="2432304"/>
           </a:xfrm>
           <a:prstGeom prst="roundRect">
             <a:avLst>
-              <a:gd name="adj" fmla="val 8333"/>
+              <a:gd name="adj" fmla="val 1880"/>
             </a:avLst>
           </a:prstGeom>
           <a:solidFill>
@@ -14817,1611 +14693,462 @@
       </p:sp>
       <p:sp>
         <p:nvSpPr>
-          <p:cNvPr id="6" name="Shape 4"/>
-          <p:cNvSpPr/>
-          <p:nvPr/>
-        </p:nvSpPr>
-        <p:spPr>
-          <a:xfrm>
-            <a:off x="749808" y="1536192"/>
-            <a:ext cx="310896" cy="310896"/>
+          <p:cNvPr id="14" name="Text 12"/>
+          <p:cNvSpPr/>
+          <p:nvPr/>
+        </p:nvSpPr>
+        <p:spPr>
+          <a:xfrm>
+            <a:off x="859536" y="2592324"/>
+            <a:ext cx="2743200" cy="256032"/>
+          </a:xfrm>
+          <a:prstGeom prst="rect">
+            <a:avLst/>
+          </a:prstGeom>
+          <a:noFill/>
+          <a:ln/>
+        </p:spPr>
+        <p:txBody>
+          <a:bodyPr wrap="square" lIns="0" tIns="0" rIns="0" bIns="0" rtlCol="0" anchor="t"/>
+          <a:lstStyle/>
+          <a:p>
+            <a:pPr indent="0" marL="0">
+              <a:buNone/>
+            </a:pPr>
+            <a:r>
+              <a:rPr lang="en-US" sz="1200" b="1" spc="100" kern="0" dirty="0">
+                <a:solidFill>
+                  <a:srgbClr val="E8551F"/>
+                </a:solidFill>
+                <a:latin typeface="Calibri" pitchFamily="34" charset="0"/>
+                <a:ea typeface="Calibri" pitchFamily="34" charset="-122"/>
+                <a:cs typeface="Calibri" pitchFamily="34" charset="-120"/>
+              </a:rPr>
+              <a:t>Steps</a:t>
+            </a:r>
+            <a:endParaRPr lang="en-US" sz="1200" dirty="0"/>
+          </a:p>
+        </p:txBody>
+      </p:sp>
+      <p:sp>
+        <p:nvSpPr>
+          <p:cNvPr id="15" name="Text 13"/>
+          <p:cNvSpPr/>
+          <p:nvPr/>
+        </p:nvSpPr>
+        <p:spPr>
+          <a:xfrm>
+            <a:off x="859536" y="2939796"/>
+            <a:ext cx="219456" cy="256032"/>
+          </a:xfrm>
+          <a:prstGeom prst="rect">
+            <a:avLst/>
+          </a:prstGeom>
+          <a:noFill/>
+          <a:ln/>
+        </p:spPr>
+        <p:txBody>
+          <a:bodyPr wrap="square" lIns="0" tIns="0" rIns="0" bIns="0" rtlCol="0" anchor="t"/>
+          <a:lstStyle/>
+          <a:p>
+            <a:pPr indent="0" marL="0">
+              <a:buNone/>
+            </a:pPr>
+            <a:r>
+              <a:rPr lang="en-US" sz="1150" b="1" dirty="0">
+                <a:solidFill>
+                  <a:srgbClr val="E8551F"/>
+                </a:solidFill>
+                <a:latin typeface="Calibri" pitchFamily="34" charset="0"/>
+                <a:ea typeface="Calibri" pitchFamily="34" charset="-122"/>
+                <a:cs typeface="Calibri" pitchFamily="34" charset="-120"/>
+              </a:rPr>
+              <a:t>1</a:t>
+            </a:r>
+            <a:endParaRPr lang="en-US" sz="1150" dirty="0"/>
+          </a:p>
+        </p:txBody>
+      </p:sp>
+      <p:sp>
+        <p:nvSpPr>
+          <p:cNvPr id="16" name="Text 14"/>
+          <p:cNvSpPr/>
+          <p:nvPr/>
+        </p:nvSpPr>
+        <p:spPr>
+          <a:xfrm>
+            <a:off x="1152144" y="2939796"/>
+            <a:ext cx="5486400" cy="246888"/>
+          </a:xfrm>
+          <a:prstGeom prst="rect">
+            <a:avLst/>
+          </a:prstGeom>
+          <a:noFill/>
+          <a:ln/>
+        </p:spPr>
+        <p:txBody>
+          <a:bodyPr wrap="square" lIns="0" tIns="0" rIns="0" bIns="0" rtlCol="0" anchor="t"/>
+          <a:lstStyle/>
+          <a:p>
+            <a:pPr indent="0" marL="0">
+              <a:lnSpc>
+                <a:spcPts val="1500"/>
+              </a:lnSpc>
+              <a:buNone/>
+            </a:pPr>
+            <a:r>
+              <a:rPr lang="en-US" sz="1150" dirty="0">
+                <a:solidFill>
+                  <a:srgbClr val="B4B7BD"/>
+                </a:solidFill>
+                <a:latin typeface="Calibri" pitchFamily="34" charset="0"/>
+                <a:ea typeface="Calibri" pitchFamily="34" charset="-122"/>
+                <a:cs typeface="Calibri" pitchFamily="34" charset="-120"/>
+              </a:rPr>
+              <a:t>Open the CLI on any incident.</a:t>
+            </a:r>
+            <a:endParaRPr lang="en-US" sz="1150" dirty="0"/>
+          </a:p>
+        </p:txBody>
+      </p:sp>
+      <p:sp>
+        <p:nvSpPr>
+          <p:cNvPr id="17" name="Text 15"/>
+          <p:cNvSpPr/>
+          <p:nvPr/>
+        </p:nvSpPr>
+        <p:spPr>
+          <a:xfrm>
+            <a:off x="859536" y="3268980"/>
+            <a:ext cx="219456" cy="256032"/>
+          </a:xfrm>
+          <a:prstGeom prst="rect">
+            <a:avLst/>
+          </a:prstGeom>
+          <a:noFill/>
+          <a:ln/>
+        </p:spPr>
+        <p:txBody>
+          <a:bodyPr wrap="square" lIns="0" tIns="0" rIns="0" bIns="0" rtlCol="0" anchor="t"/>
+          <a:lstStyle/>
+          <a:p>
+            <a:pPr indent="0" marL="0">
+              <a:buNone/>
+            </a:pPr>
+            <a:r>
+              <a:rPr lang="en-US" sz="1150" b="1" dirty="0">
+                <a:solidFill>
+                  <a:srgbClr val="E8551F"/>
+                </a:solidFill>
+                <a:latin typeface="Calibri" pitchFamily="34" charset="0"/>
+                <a:ea typeface="Calibri" pitchFamily="34" charset="-122"/>
+                <a:cs typeface="Calibri" pitchFamily="34" charset="-120"/>
+              </a:rPr>
+              <a:t>2</a:t>
+            </a:r>
+            <a:endParaRPr lang="en-US" sz="1150" dirty="0"/>
+          </a:p>
+        </p:txBody>
+      </p:sp>
+      <p:sp>
+        <p:nvSpPr>
+          <p:cNvPr id="18" name="Text 16"/>
+          <p:cNvSpPr/>
+          <p:nvPr/>
+        </p:nvSpPr>
+        <p:spPr>
+          <a:xfrm>
+            <a:off x="1152144" y="3268980"/>
+            <a:ext cx="5486400" cy="246888"/>
+          </a:xfrm>
+          <a:prstGeom prst="rect">
+            <a:avLst/>
+          </a:prstGeom>
+          <a:noFill/>
+          <a:ln/>
+        </p:spPr>
+        <p:txBody>
+          <a:bodyPr wrap="square" lIns="0" tIns="0" rIns="0" bIns="0" rtlCol="0" anchor="t"/>
+          <a:lstStyle/>
+          <a:p>
+            <a:pPr indent="0" marL="0">
+              <a:lnSpc>
+                <a:spcPts val="1500"/>
+              </a:lnSpc>
+              <a:buNone/>
+            </a:pPr>
+            <a:r>
+              <a:rPr lang="en-US" sz="1150" dirty="0">
+                <a:solidFill>
+                  <a:srgbClr val="B4B7BD"/>
+                </a:solidFill>
+                <a:latin typeface="Calibri" pitchFamily="34" charset="0"/>
+                <a:ea typeface="Calibri" pitchFamily="34" charset="-122"/>
+                <a:cs typeface="Calibri" pitchFamily="34" charset="-120"/>
+              </a:rPr>
+              <a:t>Run:</a:t>
+            </a:r>
+            <a:endParaRPr lang="en-US" sz="1150" dirty="0"/>
+          </a:p>
+        </p:txBody>
+      </p:sp>
+      <p:sp>
+        <p:nvSpPr>
+          <p:cNvPr id="19" name="Text 17"/>
+          <p:cNvSpPr/>
+          <p:nvPr/>
+        </p:nvSpPr>
+        <p:spPr>
+          <a:xfrm>
+            <a:off x="859536" y="3598164"/>
+            <a:ext cx="219456" cy="256032"/>
+          </a:xfrm>
+          <a:prstGeom prst="rect">
+            <a:avLst/>
+          </a:prstGeom>
+          <a:noFill/>
+          <a:ln/>
+        </p:spPr>
+        <p:txBody>
+          <a:bodyPr wrap="square" lIns="0" tIns="0" rIns="0" bIns="0" rtlCol="0" anchor="t"/>
+          <a:lstStyle/>
+          <a:p>
+            <a:pPr indent="0" marL="0">
+              <a:buNone/>
+            </a:pPr>
+            <a:r>
+              <a:rPr lang="en-US" sz="1150" b="1" dirty="0">
+                <a:solidFill>
+                  <a:srgbClr val="E8551F"/>
+                </a:solidFill>
+                <a:latin typeface="Calibri" pitchFamily="34" charset="0"/>
+                <a:ea typeface="Calibri" pitchFamily="34" charset="-122"/>
+                <a:cs typeface="Calibri" pitchFamily="34" charset="-120"/>
+              </a:rPr>
+              <a:t>3</a:t>
+            </a:r>
+            <a:endParaRPr lang="en-US" sz="1150" dirty="0"/>
+          </a:p>
+        </p:txBody>
+      </p:sp>
+      <p:sp>
+        <p:nvSpPr>
+          <p:cNvPr id="20" name="Text 18"/>
+          <p:cNvSpPr/>
+          <p:nvPr/>
+        </p:nvSpPr>
+        <p:spPr>
+          <a:xfrm>
+            <a:off x="1152144" y="3598164"/>
+            <a:ext cx="5486400" cy="246888"/>
+          </a:xfrm>
+          <a:prstGeom prst="rect">
+            <a:avLst/>
+          </a:prstGeom>
+          <a:noFill/>
+          <a:ln/>
+        </p:spPr>
+        <p:txBody>
+          <a:bodyPr wrap="square" lIns="0" tIns="0" rIns="0" bIns="0" rtlCol="0" anchor="t"/>
+          <a:lstStyle/>
+          <a:p>
+            <a:pPr indent="0" marL="0">
+              <a:lnSpc>
+                <a:spcPts val="1500"/>
+              </a:lnSpc>
+              <a:buNone/>
+            </a:pPr>
+            <a:r>
+              <a:rPr lang="en-US" sz="1050" dirty="0">
+                <a:solidFill>
+                  <a:srgbClr val="22D3EE"/>
+                </a:solidFill>
+                <a:latin typeface="Courier New" pitchFamily="34" charset="0"/>
+                <a:ea typeface="Courier New" pitchFamily="34" charset="-122"/>
+                <a:cs typeface="Courier New" pitchFamily="34" charset="-120"/>
+              </a:rPr>
+              <a:t>!KoiSimulateEvents alerts=40 duplicate_factor=8 audit=60</a:t>
+            </a:r>
+            <a:endParaRPr lang="en-US" sz="1050" dirty="0"/>
+          </a:p>
+        </p:txBody>
+      </p:sp>
+      <p:sp>
+        <p:nvSpPr>
+          <p:cNvPr id="21" name="Text 19"/>
+          <p:cNvSpPr/>
+          <p:nvPr/>
+        </p:nvSpPr>
+        <p:spPr>
+          <a:xfrm>
+            <a:off x="859536" y="3927348"/>
+            <a:ext cx="219456" cy="256032"/>
+          </a:xfrm>
+          <a:prstGeom prst="rect">
+            <a:avLst/>
+          </a:prstGeom>
+          <a:noFill/>
+          <a:ln/>
+        </p:spPr>
+        <p:txBody>
+          <a:bodyPr wrap="square" lIns="0" tIns="0" rIns="0" bIns="0" rtlCol="0" anchor="t"/>
+          <a:lstStyle/>
+          <a:p>
+            <a:pPr indent="0" marL="0">
+              <a:buNone/>
+            </a:pPr>
+            <a:r>
+              <a:rPr lang="en-US" sz="1150" b="1" dirty="0">
+                <a:solidFill>
+                  <a:srgbClr val="E8551F"/>
+                </a:solidFill>
+                <a:latin typeface="Calibri" pitchFamily="34" charset="0"/>
+                <a:ea typeface="Calibri" pitchFamily="34" charset="-122"/>
+                <a:cs typeface="Calibri" pitchFamily="34" charset="-120"/>
+              </a:rPr>
+              <a:t>4</a:t>
+            </a:r>
+            <a:endParaRPr lang="en-US" sz="1150" dirty="0"/>
+          </a:p>
+        </p:txBody>
+      </p:sp>
+      <p:sp>
+        <p:nvSpPr>
+          <p:cNvPr id="22" name="Text 20"/>
+          <p:cNvSpPr/>
+          <p:nvPr/>
+        </p:nvSpPr>
+        <p:spPr>
+          <a:xfrm>
+            <a:off x="1152144" y="3927348"/>
+            <a:ext cx="5486400" cy="246888"/>
+          </a:xfrm>
+          <a:prstGeom prst="rect">
+            <a:avLst/>
+          </a:prstGeom>
+          <a:noFill/>
+          <a:ln/>
+        </p:spPr>
+        <p:txBody>
+          <a:bodyPr wrap="square" lIns="0" tIns="0" rIns="0" bIns="0" rtlCol="0" anchor="t"/>
+          <a:lstStyle/>
+          <a:p>
+            <a:pPr indent="0" marL="0">
+              <a:lnSpc>
+                <a:spcPts val="1500"/>
+              </a:lnSpc>
+              <a:buNone/>
+            </a:pPr>
+            <a:r>
+              <a:rPr lang="en-US" sz="1150" dirty="0">
+                <a:solidFill>
+                  <a:srgbClr val="B4B7BD"/>
+                </a:solidFill>
+                <a:latin typeface="Calibri" pitchFamily="34" charset="0"/>
+                <a:ea typeface="Calibri" pitchFamily="34" charset="-122"/>
+                <a:cs typeface="Calibri" pitchFamily="34" charset="-120"/>
+              </a:rPr>
+              <a:t>Read the summary it prints — it tells you the answers in advance.</a:t>
+            </a:r>
+            <a:endParaRPr lang="en-US" sz="1150" dirty="0"/>
+          </a:p>
+        </p:txBody>
+      </p:sp>
+      <p:sp>
+        <p:nvSpPr>
+          <p:cNvPr id="23" name="Text 21"/>
+          <p:cNvSpPr/>
+          <p:nvPr/>
+        </p:nvSpPr>
+        <p:spPr>
+          <a:xfrm>
+            <a:off x="859536" y="4256532"/>
+            <a:ext cx="219456" cy="256032"/>
+          </a:xfrm>
+          <a:prstGeom prst="rect">
+            <a:avLst/>
+          </a:prstGeom>
+          <a:noFill/>
+          <a:ln/>
+        </p:spPr>
+        <p:txBody>
+          <a:bodyPr wrap="square" lIns="0" tIns="0" rIns="0" bIns="0" rtlCol="0" anchor="t"/>
+          <a:lstStyle/>
+          <a:p>
+            <a:pPr indent="0" marL="0">
+              <a:buNone/>
+            </a:pPr>
+            <a:r>
+              <a:rPr lang="en-US" sz="1150" b="1" dirty="0">
+                <a:solidFill>
+                  <a:srgbClr val="E8551F"/>
+                </a:solidFill>
+                <a:latin typeface="Calibri" pitchFamily="34" charset="0"/>
+                <a:ea typeface="Calibri" pitchFamily="34" charset="-122"/>
+                <a:cs typeface="Calibri" pitchFamily="34" charset="-120"/>
+              </a:rPr>
+              <a:t>5</a:t>
+            </a:r>
+            <a:endParaRPr lang="en-US" sz="1150" dirty="0"/>
+          </a:p>
+        </p:txBody>
+      </p:sp>
+      <p:sp>
+        <p:nvSpPr>
+          <p:cNvPr id="24" name="Text 22"/>
+          <p:cNvSpPr/>
+          <p:nvPr/>
+        </p:nvSpPr>
+        <p:spPr>
+          <a:xfrm>
+            <a:off x="1152144" y="4256532"/>
+            <a:ext cx="5486400" cy="246888"/>
+          </a:xfrm>
+          <a:prstGeom prst="rect">
+            <a:avLst/>
+          </a:prstGeom>
+          <a:noFill/>
+          <a:ln/>
+        </p:spPr>
+        <p:txBody>
+          <a:bodyPr wrap="square" lIns="0" tIns="0" rIns="0" bIns="0" rtlCol="0" anchor="t"/>
+          <a:lstStyle/>
+          <a:p>
+            <a:pPr indent="0" marL="0">
+              <a:lnSpc>
+                <a:spcPts val="1500"/>
+              </a:lnSpc>
+              <a:buNone/>
+            </a:pPr>
+            <a:r>
+              <a:rPr lang="en-US" sz="1150" dirty="0">
+                <a:solidFill>
+                  <a:srgbClr val="B4B7BD"/>
+                </a:solidFill>
+                <a:latin typeface="Calibri" pitchFamily="34" charset="0"/>
+                <a:ea typeface="Calibri" pitchFamily="34" charset="-122"/>
+                <a:cs typeface="Calibri" pitchFamily="34" charset="-120"/>
+              </a:rPr>
+              <a:t>Query koisim_koisim_raw to check them.</a:t>
+            </a:r>
+            <a:endParaRPr lang="en-US" sz="1150" dirty="0"/>
+          </a:p>
+        </p:txBody>
+      </p:sp>
+      <p:sp>
+        <p:nvSpPr>
+          <p:cNvPr id="25" name="Shape 23"/>
+          <p:cNvSpPr/>
+          <p:nvPr/>
+        </p:nvSpPr>
+        <p:spPr>
+          <a:xfrm>
+            <a:off x="7315200" y="2409444"/>
+            <a:ext cx="4297680" cy="2432304"/>
           </a:xfrm>
           <a:prstGeom prst="roundRect">
             <a:avLst>
-              <a:gd name="adj" fmla="val 26471"/>
-            </a:avLst>
-          </a:prstGeom>
-          <a:solidFill>
-            <a:srgbClr val="3FB950"/>
-          </a:solidFill>
-          <a:ln w="12700">
-            <a:solidFill>
-              <a:srgbClr val="3FB950"/>
-            </a:solidFill>
-            <a:prstDash val="solid"/>
-          </a:ln>
-        </p:spPr>
-      </p:sp>
-      <p:sp>
-        <p:nvSpPr>
-          <p:cNvPr id="7" name="Text 5"/>
-          <p:cNvSpPr/>
-          <p:nvPr/>
-        </p:nvSpPr>
-        <p:spPr>
-          <a:xfrm>
-            <a:off x="749808" y="1536192"/>
-            <a:ext cx="310896" cy="310896"/>
-          </a:xfrm>
-          <a:prstGeom prst="rect">
-            <a:avLst/>
-          </a:prstGeom>
-          <a:noFill/>
-          <a:ln/>
-        </p:spPr>
-        <p:txBody>
-          <a:bodyPr wrap="square" lIns="0" tIns="0" rIns="0" bIns="0" rtlCol="0" anchor="ctr"/>
-          <a:lstStyle/>
-          <a:p>
-            <a:pPr algn="ctr" indent="0" marL="0">
-              <a:buNone/>
-            </a:pPr>
-            <a:r>
-              <a:rPr lang="en-US" sz="1300" b="1" dirty="0">
-                <a:solidFill>
-                  <a:srgbClr val="FFFFFF"/>
-                </a:solidFill>
-                <a:latin typeface="Calibri" pitchFamily="34" charset="0"/>
-                <a:ea typeface="Calibri" pitchFamily="34" charset="-122"/>
-                <a:cs typeface="Calibri" pitchFamily="34" charset="-120"/>
-              </a:rPr>
-              <a:t>1</a:t>
-            </a:r>
-            <a:endParaRPr lang="en-US" sz="1300" dirty="0"/>
-          </a:p>
-        </p:txBody>
-      </p:sp>
-      <p:sp>
-        <p:nvSpPr>
-          <p:cNvPr id="8" name="Text 6"/>
-          <p:cNvSpPr/>
-          <p:nvPr/>
-        </p:nvSpPr>
-        <p:spPr>
-          <a:xfrm>
-            <a:off x="1225296" y="1554480"/>
-            <a:ext cx="4453128" cy="329184"/>
-          </a:xfrm>
-          <a:prstGeom prst="rect">
-            <a:avLst/>
-          </a:prstGeom>
-          <a:noFill/>
-          <a:ln/>
-        </p:spPr>
-        <p:txBody>
-          <a:bodyPr wrap="square" lIns="0" tIns="0" rIns="0" bIns="0" rtlCol="0" anchor="t"/>
-          <a:lstStyle/>
-          <a:p>
-            <a:pPr indent="0" marL="0">
-              <a:lnSpc>
-                <a:spcPts val="1200"/>
-              </a:lnSpc>
-              <a:buNone/>
-            </a:pPr>
-            <a:r>
-              <a:rPr lang="en-US" sz="1050" dirty="0">
-                <a:solidFill>
-                  <a:srgbClr val="B4B7BD"/>
-                </a:solidFill>
-                <a:latin typeface="Calibri" pitchFamily="34" charset="0"/>
-                <a:ea typeface="Calibri" pitchFamily="34" charset="-122"/>
-                <a:cs typeface="Calibri" pitchFamily="34" charset="-120"/>
-              </a:rPr>
-              <a:t>Test returns Success; devices list returns rows</a:t>
-            </a:r>
-            <a:endParaRPr lang="en-US" sz="1050" dirty="0"/>
-          </a:p>
-        </p:txBody>
-      </p:sp>
-      <p:sp>
-        <p:nvSpPr>
-          <p:cNvPr id="9" name="Shape 7"/>
-          <p:cNvSpPr/>
-          <p:nvPr/>
-        </p:nvSpPr>
-        <p:spPr>
-          <a:xfrm>
-            <a:off x="548640" y="2075688"/>
-            <a:ext cx="5349240" cy="548640"/>
-          </a:xfrm>
-          <a:prstGeom prst="roundRect">
-            <a:avLst>
-              <a:gd name="adj" fmla="val 8333"/>
-            </a:avLst>
-          </a:prstGeom>
-          <a:solidFill>
-            <a:srgbClr val="15171B"/>
-          </a:solidFill>
-          <a:ln w="12700">
-            <a:solidFill>
-              <a:srgbClr val="15171B"/>
-            </a:solidFill>
-            <a:prstDash val="solid"/>
-          </a:ln>
-        </p:spPr>
-      </p:sp>
-      <p:sp>
-        <p:nvSpPr>
-          <p:cNvPr id="10" name="Shape 8"/>
-          <p:cNvSpPr/>
-          <p:nvPr/>
-        </p:nvSpPr>
-        <p:spPr>
-          <a:xfrm>
-            <a:off x="749808" y="2194560"/>
-            <a:ext cx="310896" cy="310896"/>
-          </a:xfrm>
-          <a:prstGeom prst="roundRect">
-            <a:avLst>
-              <a:gd name="adj" fmla="val 26471"/>
-            </a:avLst>
-          </a:prstGeom>
-          <a:solidFill>
-            <a:srgbClr val="3FB950"/>
-          </a:solidFill>
-          <a:ln w="12700">
-            <a:solidFill>
-              <a:srgbClr val="3FB950"/>
-            </a:solidFill>
-            <a:prstDash val="solid"/>
-          </a:ln>
-        </p:spPr>
-      </p:sp>
-      <p:sp>
-        <p:nvSpPr>
-          <p:cNvPr id="11" name="Text 9"/>
-          <p:cNvSpPr/>
-          <p:nvPr/>
-        </p:nvSpPr>
-        <p:spPr>
-          <a:xfrm>
-            <a:off x="749808" y="2194560"/>
-            <a:ext cx="310896" cy="310896"/>
-          </a:xfrm>
-          <a:prstGeom prst="rect">
-            <a:avLst/>
-          </a:prstGeom>
-          <a:noFill/>
-          <a:ln/>
-        </p:spPr>
-        <p:txBody>
-          <a:bodyPr wrap="square" lIns="0" tIns="0" rIns="0" bIns="0" rtlCol="0" anchor="ctr"/>
-          <a:lstStyle/>
-          <a:p>
-            <a:pPr algn="ctr" indent="0" marL="0">
-              <a:buNone/>
-            </a:pPr>
-            <a:r>
-              <a:rPr lang="en-US" sz="1300" b="1" dirty="0">
-                <a:solidFill>
-                  <a:srgbClr val="FFFFFF"/>
-                </a:solidFill>
-                <a:latin typeface="Calibri" pitchFamily="34" charset="0"/>
-                <a:ea typeface="Calibri" pitchFamily="34" charset="-122"/>
-                <a:cs typeface="Calibri" pitchFamily="34" charset="-120"/>
-              </a:rPr>
-              <a:t>2</a:t>
-            </a:r>
-            <a:endParaRPr lang="en-US" sz="1300" dirty="0"/>
-          </a:p>
-        </p:txBody>
-      </p:sp>
-      <p:sp>
-        <p:nvSpPr>
-          <p:cNvPr id="12" name="Text 10"/>
-          <p:cNvSpPr/>
-          <p:nvPr/>
-        </p:nvSpPr>
-        <p:spPr>
-          <a:xfrm>
-            <a:off x="1225296" y="2212848"/>
-            <a:ext cx="4453128" cy="329184"/>
-          </a:xfrm>
-          <a:prstGeom prst="rect">
-            <a:avLst/>
-          </a:prstGeom>
-          <a:noFill/>
-          <a:ln/>
-        </p:spPr>
-        <p:txBody>
-          <a:bodyPr wrap="square" lIns="0" tIns="0" rIns="0" bIns="0" rtlCol="0" anchor="t"/>
-          <a:lstStyle/>
-          <a:p>
-            <a:pPr indent="0" marL="0">
-              <a:lnSpc>
-                <a:spcPts val="1200"/>
-              </a:lnSpc>
-              <a:buNone/>
-            </a:pPr>
-            <a:r>
-              <a:rPr lang="en-US" sz="1050" dirty="0">
-                <a:solidFill>
-                  <a:srgbClr val="B4B7BD"/>
-                </a:solidFill>
-                <a:latin typeface="Calibri" pitchFamily="34" charset="0"/>
-                <a:ea typeface="Calibri" pitchFamily="34" charset="-122"/>
-                <a:cs typeface="Calibri" pitchFamily="34" charset="-120"/>
-              </a:rPr>
-              <a:t>koi_koi_raw grows between collection cycles</a:t>
-            </a:r>
-            <a:endParaRPr lang="en-US" sz="1050" dirty="0"/>
-          </a:p>
-        </p:txBody>
-      </p:sp>
-      <p:sp>
-        <p:nvSpPr>
-          <p:cNvPr id="13" name="Shape 11"/>
-          <p:cNvSpPr/>
-          <p:nvPr/>
-        </p:nvSpPr>
-        <p:spPr>
-          <a:xfrm>
-            <a:off x="548640" y="2734056"/>
-            <a:ext cx="5349240" cy="548640"/>
-          </a:xfrm>
-          <a:prstGeom prst="roundRect">
-            <a:avLst>
-              <a:gd name="adj" fmla="val 8333"/>
-            </a:avLst>
-          </a:prstGeom>
-          <a:solidFill>
-            <a:srgbClr val="15171B"/>
-          </a:solidFill>
-          <a:ln w="12700">
-            <a:solidFill>
-              <a:srgbClr val="15171B"/>
-            </a:solidFill>
-            <a:prstDash val="solid"/>
-          </a:ln>
-        </p:spPr>
-      </p:sp>
-      <p:sp>
-        <p:nvSpPr>
-          <p:cNvPr id="14" name="Shape 12"/>
-          <p:cNvSpPr/>
-          <p:nvPr/>
-        </p:nvSpPr>
-        <p:spPr>
-          <a:xfrm>
-            <a:off x="749808" y="2852928"/>
-            <a:ext cx="310896" cy="310896"/>
-          </a:xfrm>
-          <a:prstGeom prst="roundRect">
-            <a:avLst>
-              <a:gd name="adj" fmla="val 26471"/>
-            </a:avLst>
-          </a:prstGeom>
-          <a:solidFill>
-            <a:srgbClr val="3FB950"/>
-          </a:solidFill>
-          <a:ln w="12700">
-            <a:solidFill>
-              <a:srgbClr val="3FB950"/>
-            </a:solidFill>
-            <a:prstDash val="solid"/>
-          </a:ln>
-        </p:spPr>
-      </p:sp>
-      <p:sp>
-        <p:nvSpPr>
-          <p:cNvPr id="15" name="Text 13"/>
-          <p:cNvSpPr/>
-          <p:nvPr/>
-        </p:nvSpPr>
-        <p:spPr>
-          <a:xfrm>
-            <a:off x="749808" y="2852928"/>
-            <a:ext cx="310896" cy="310896"/>
-          </a:xfrm>
-          <a:prstGeom prst="rect">
-            <a:avLst/>
-          </a:prstGeom>
-          <a:noFill/>
-          <a:ln/>
-        </p:spPr>
-        <p:txBody>
-          <a:bodyPr wrap="square" lIns="0" tIns="0" rIns="0" bIns="0" rtlCol="0" anchor="ctr"/>
-          <a:lstStyle/>
-          <a:p>
-            <a:pPr algn="ctr" indent="0" marL="0">
-              <a:buNone/>
-            </a:pPr>
-            <a:r>
-              <a:rPr lang="en-US" sz="1300" b="1" dirty="0">
-                <a:solidFill>
-                  <a:srgbClr val="FFFFFF"/>
-                </a:solidFill>
-                <a:latin typeface="Calibri" pitchFamily="34" charset="0"/>
-                <a:ea typeface="Calibri" pitchFamily="34" charset="-122"/>
-                <a:cs typeface="Calibri" pitchFamily="34" charset="-120"/>
-              </a:rPr>
-              <a:t>3</a:t>
-            </a:r>
-            <a:endParaRPr lang="en-US" sz="1300" dirty="0"/>
-          </a:p>
-        </p:txBody>
-      </p:sp>
-      <p:sp>
-        <p:nvSpPr>
-          <p:cNvPr id="16" name="Text 14"/>
-          <p:cNvSpPr/>
-          <p:nvPr/>
-        </p:nvSpPr>
-        <p:spPr>
-          <a:xfrm>
-            <a:off x="1225296" y="2871216"/>
-            <a:ext cx="4453128" cy="329184"/>
-          </a:xfrm>
-          <a:prstGeom prst="rect">
-            <a:avLst/>
-          </a:prstGeom>
-          <a:noFill/>
-          <a:ln/>
-        </p:spPr>
-        <p:txBody>
-          <a:bodyPr wrap="square" lIns="0" tIns="0" rIns="0" bIns="0" rtlCol="0" anchor="t"/>
-          <a:lstStyle/>
-          <a:p>
-            <a:pPr indent="0" marL="0">
-              <a:lnSpc>
-                <a:spcPts val="1200"/>
-              </a:lnSpc>
-              <a:buNone/>
-            </a:pPr>
-            <a:r>
-              <a:rPr lang="en-US" sz="1050" dirty="0">
-                <a:solidFill>
-                  <a:srgbClr val="B4B7BD"/>
-                </a:solidFill>
-                <a:latin typeface="Calibri" pitchFamily="34" charset="0"/>
-                <a:ea typeface="Calibri" pitchFamily="34" charset="-122"/>
-                <a:cs typeface="Calibri" pitchFamily="34" charset="-120"/>
-              </a:rPr>
-              <a:t>Distinct alerts far below raw rows — and that is correct</a:t>
-            </a:r>
-            <a:endParaRPr lang="en-US" sz="1050" dirty="0"/>
-          </a:p>
-        </p:txBody>
-      </p:sp>
-      <p:sp>
-        <p:nvSpPr>
-          <p:cNvPr id="17" name="Shape 15"/>
-          <p:cNvSpPr/>
-          <p:nvPr/>
-        </p:nvSpPr>
-        <p:spPr>
-          <a:xfrm>
-            <a:off x="548640" y="3392424"/>
-            <a:ext cx="5349240" cy="548640"/>
-          </a:xfrm>
-          <a:prstGeom prst="roundRect">
-            <a:avLst>
-              <a:gd name="adj" fmla="val 8333"/>
-            </a:avLst>
-          </a:prstGeom>
-          <a:solidFill>
-            <a:srgbClr val="15171B"/>
-          </a:solidFill>
-          <a:ln w="12700">
-            <a:solidFill>
-              <a:srgbClr val="15171B"/>
-            </a:solidFill>
-            <a:prstDash val="solid"/>
-          </a:ln>
-        </p:spPr>
-      </p:sp>
-      <p:sp>
-        <p:nvSpPr>
-          <p:cNvPr id="18" name="Shape 16"/>
-          <p:cNvSpPr/>
-          <p:nvPr/>
-        </p:nvSpPr>
-        <p:spPr>
-          <a:xfrm>
-            <a:off x="749808" y="3511296"/>
-            <a:ext cx="310896" cy="310896"/>
-          </a:xfrm>
-          <a:prstGeom prst="roundRect">
-            <a:avLst>
-              <a:gd name="adj" fmla="val 26471"/>
-            </a:avLst>
-          </a:prstGeom>
-          <a:solidFill>
-            <a:srgbClr val="3FB950"/>
-          </a:solidFill>
-          <a:ln w="12700">
-            <a:solidFill>
-              <a:srgbClr val="3FB950"/>
-            </a:solidFill>
-            <a:prstDash val="solid"/>
-          </a:ln>
-        </p:spPr>
-      </p:sp>
-      <p:sp>
-        <p:nvSpPr>
-          <p:cNvPr id="19" name="Text 17"/>
-          <p:cNvSpPr/>
-          <p:nvPr/>
-        </p:nvSpPr>
-        <p:spPr>
-          <a:xfrm>
-            <a:off x="749808" y="3511296"/>
-            <a:ext cx="310896" cy="310896"/>
-          </a:xfrm>
-          <a:prstGeom prst="rect">
-            <a:avLst/>
-          </a:prstGeom>
-          <a:noFill/>
-          <a:ln/>
-        </p:spPr>
-        <p:txBody>
-          <a:bodyPr wrap="square" lIns="0" tIns="0" rIns="0" bIns="0" rtlCol="0" anchor="ctr"/>
-          <a:lstStyle/>
-          <a:p>
-            <a:pPr algn="ctr" indent="0" marL="0">
-              <a:buNone/>
-            </a:pPr>
-            <a:r>
-              <a:rPr lang="en-US" sz="1300" b="1" dirty="0">
-                <a:solidFill>
-                  <a:srgbClr val="FFFFFF"/>
-                </a:solidFill>
-                <a:latin typeface="Calibri" pitchFamily="34" charset="0"/>
-                <a:ea typeface="Calibri" pitchFamily="34" charset="-122"/>
-                <a:cs typeface="Calibri" pitchFamily="34" charset="-120"/>
-              </a:rPr>
-              <a:t>4</a:t>
-            </a:r>
-            <a:endParaRPr lang="en-US" sz="1300" dirty="0"/>
-          </a:p>
-        </p:txBody>
-      </p:sp>
-      <p:sp>
-        <p:nvSpPr>
-          <p:cNvPr id="20" name="Text 18"/>
-          <p:cNvSpPr/>
-          <p:nvPr/>
-        </p:nvSpPr>
-        <p:spPr>
-          <a:xfrm>
-            <a:off x="1225296" y="3529584"/>
-            <a:ext cx="4453128" cy="329184"/>
-          </a:xfrm>
-          <a:prstGeom prst="rect">
-            <a:avLst/>
-          </a:prstGeom>
-          <a:noFill/>
-          <a:ln/>
-        </p:spPr>
-        <p:txBody>
-          <a:bodyPr wrap="square" lIns="0" tIns="0" rIns="0" bIns="0" rtlCol="0" anchor="t"/>
-          <a:lstStyle/>
-          <a:p>
-            <a:pPr indent="0" marL="0">
-              <a:lnSpc>
-                <a:spcPts val="1200"/>
-              </a:lnSpc>
-              <a:buNone/>
-            </a:pPr>
-            <a:r>
-              <a:rPr lang="en-US" sz="1050" dirty="0">
-                <a:solidFill>
-                  <a:srgbClr val="B4B7BD"/>
-                </a:solidFill>
-                <a:latin typeface="Calibri" pitchFamily="34" charset="0"/>
-                <a:ea typeface="Calibri" pitchFamily="34" charset="-122"/>
-                <a:cs typeface="Calibri" pitchFamily="34" charset="-120"/>
-              </a:rPr>
-              <a:t>Dashboard renders; counts stay stable across fetches</a:t>
-            </a:r>
-            <a:endParaRPr lang="en-US" sz="1050" dirty="0"/>
-          </a:p>
-        </p:txBody>
-      </p:sp>
-      <p:sp>
-        <p:nvSpPr>
-          <p:cNvPr id="21" name="Shape 19"/>
-          <p:cNvSpPr/>
-          <p:nvPr/>
-        </p:nvSpPr>
-        <p:spPr>
-          <a:xfrm>
-            <a:off x="548640" y="4050792"/>
-            <a:ext cx="5349240" cy="548640"/>
-          </a:xfrm>
-          <a:prstGeom prst="roundRect">
-            <a:avLst>
-              <a:gd name="adj" fmla="val 8333"/>
-            </a:avLst>
-          </a:prstGeom>
-          <a:solidFill>
-            <a:srgbClr val="15171B"/>
-          </a:solidFill>
-          <a:ln w="12700">
-            <a:solidFill>
-              <a:srgbClr val="15171B"/>
-            </a:solidFill>
-            <a:prstDash val="solid"/>
-          </a:ln>
-        </p:spPr>
-      </p:sp>
-      <p:sp>
-        <p:nvSpPr>
-          <p:cNvPr id="22" name="Shape 20"/>
-          <p:cNvSpPr/>
-          <p:nvPr/>
-        </p:nvSpPr>
-        <p:spPr>
-          <a:xfrm>
-            <a:off x="749808" y="4169664"/>
-            <a:ext cx="310896" cy="310896"/>
-          </a:xfrm>
-          <a:prstGeom prst="roundRect">
-            <a:avLst>
-              <a:gd name="adj" fmla="val 26471"/>
-            </a:avLst>
-          </a:prstGeom>
-          <a:solidFill>
-            <a:srgbClr val="3FB950"/>
-          </a:solidFill>
-          <a:ln w="12700">
-            <a:solidFill>
-              <a:srgbClr val="3FB950"/>
-            </a:solidFill>
-            <a:prstDash val="solid"/>
-          </a:ln>
-        </p:spPr>
-      </p:sp>
-      <p:sp>
-        <p:nvSpPr>
-          <p:cNvPr id="23" name="Text 21"/>
-          <p:cNvSpPr/>
-          <p:nvPr/>
-        </p:nvSpPr>
-        <p:spPr>
-          <a:xfrm>
-            <a:off x="749808" y="4169664"/>
-            <a:ext cx="310896" cy="310896"/>
-          </a:xfrm>
-          <a:prstGeom prst="rect">
-            <a:avLst/>
-          </a:prstGeom>
-          <a:noFill/>
-          <a:ln/>
-        </p:spPr>
-        <p:txBody>
-          <a:bodyPr wrap="square" lIns="0" tIns="0" rIns="0" bIns="0" rtlCol="0" anchor="ctr"/>
-          <a:lstStyle/>
-          <a:p>
-            <a:pPr algn="ctr" indent="0" marL="0">
-              <a:buNone/>
-            </a:pPr>
-            <a:r>
-              <a:rPr lang="en-US" sz="1300" b="1" dirty="0">
-                <a:solidFill>
-                  <a:srgbClr val="FFFFFF"/>
-                </a:solidFill>
-                <a:latin typeface="Calibri" pitchFamily="34" charset="0"/>
-                <a:ea typeface="Calibri" pitchFamily="34" charset="-122"/>
-                <a:cs typeface="Calibri" pitchFamily="34" charset="-120"/>
-              </a:rPr>
-              <a:t>5</a:t>
-            </a:r>
-            <a:endParaRPr lang="en-US" sz="1300" dirty="0"/>
-          </a:p>
-        </p:txBody>
-      </p:sp>
-      <p:sp>
-        <p:nvSpPr>
-          <p:cNvPr id="24" name="Text 22"/>
-          <p:cNvSpPr/>
-          <p:nvPr/>
-        </p:nvSpPr>
-        <p:spPr>
-          <a:xfrm>
-            <a:off x="1225296" y="4187952"/>
-            <a:ext cx="4453128" cy="329184"/>
-          </a:xfrm>
-          <a:prstGeom prst="rect">
-            <a:avLst/>
-          </a:prstGeom>
-          <a:noFill/>
-          <a:ln/>
-        </p:spPr>
-        <p:txBody>
-          <a:bodyPr wrap="square" lIns="0" tIns="0" rIns="0" bIns="0" rtlCol="0" anchor="t"/>
-          <a:lstStyle/>
-          <a:p>
-            <a:pPr indent="0" marL="0">
-              <a:lnSpc>
-                <a:spcPts val="1200"/>
-              </a:lnSpc>
-              <a:buNone/>
-            </a:pPr>
-            <a:r>
-              <a:rPr lang="en-US" sz="1050" dirty="0">
-                <a:solidFill>
-                  <a:srgbClr val="B4B7BD"/>
-                </a:solidFill>
-                <a:latin typeface="Calibri" pitchFamily="34" charset="0"/>
-                <a:ea typeface="Calibri" pitchFamily="34" charset="-122"/>
-                <a:cs typeface="Calibri" pitchFamily="34" charset="-120"/>
-              </a:rPr>
-              <a:t>A verdict is reached; low risk auto-closes</a:t>
-            </a:r>
-            <a:endParaRPr lang="en-US" sz="1050" dirty="0"/>
-          </a:p>
-        </p:txBody>
-      </p:sp>
-      <p:sp>
-        <p:nvSpPr>
-          <p:cNvPr id="25" name="Shape 23"/>
-          <p:cNvSpPr/>
-          <p:nvPr/>
-        </p:nvSpPr>
-        <p:spPr>
-          <a:xfrm>
-            <a:off x="548640" y="4709160"/>
-            <a:ext cx="5349240" cy="548640"/>
-          </a:xfrm>
-          <a:prstGeom prst="roundRect">
-            <a:avLst>
-              <a:gd name="adj" fmla="val 8333"/>
-            </a:avLst>
-          </a:prstGeom>
-          <a:solidFill>
-            <a:srgbClr val="15171B"/>
-          </a:solidFill>
-          <a:ln w="12700">
-            <a:solidFill>
-              <a:srgbClr val="15171B"/>
-            </a:solidFill>
-            <a:prstDash val="solid"/>
-          </a:ln>
-        </p:spPr>
-      </p:sp>
-      <p:sp>
-        <p:nvSpPr>
-          <p:cNvPr id="26" name="Shape 24"/>
-          <p:cNvSpPr/>
-          <p:nvPr/>
-        </p:nvSpPr>
-        <p:spPr>
-          <a:xfrm>
-            <a:off x="749808" y="4828032"/>
-            <a:ext cx="310896" cy="310896"/>
-          </a:xfrm>
-          <a:prstGeom prst="roundRect">
-            <a:avLst>
-              <a:gd name="adj" fmla="val 26471"/>
-            </a:avLst>
-          </a:prstGeom>
-          <a:solidFill>
-            <a:srgbClr val="3FB950"/>
-          </a:solidFill>
-          <a:ln w="12700">
-            <a:solidFill>
-              <a:srgbClr val="3FB950"/>
-            </a:solidFill>
-            <a:prstDash val="solid"/>
-          </a:ln>
-        </p:spPr>
-      </p:sp>
-      <p:sp>
-        <p:nvSpPr>
-          <p:cNvPr id="27" name="Text 25"/>
-          <p:cNvSpPr/>
-          <p:nvPr/>
-        </p:nvSpPr>
-        <p:spPr>
-          <a:xfrm>
-            <a:off x="749808" y="4828032"/>
-            <a:ext cx="310896" cy="310896"/>
-          </a:xfrm>
-          <a:prstGeom prst="rect">
-            <a:avLst/>
-          </a:prstGeom>
-          <a:noFill/>
-          <a:ln/>
-        </p:spPr>
-        <p:txBody>
-          <a:bodyPr wrap="square" lIns="0" tIns="0" rIns="0" bIns="0" rtlCol="0" anchor="ctr"/>
-          <a:lstStyle/>
-          <a:p>
-            <a:pPr algn="ctr" indent="0" marL="0">
-              <a:buNone/>
-            </a:pPr>
-            <a:r>
-              <a:rPr lang="en-US" sz="1300" b="1" dirty="0">
-                <a:solidFill>
-                  <a:srgbClr val="FFFFFF"/>
-                </a:solidFill>
-                <a:latin typeface="Calibri" pitchFamily="34" charset="0"/>
-                <a:ea typeface="Calibri" pitchFamily="34" charset="-122"/>
-                <a:cs typeface="Calibri" pitchFamily="34" charset="-120"/>
-              </a:rPr>
-              <a:t>6</a:t>
-            </a:r>
-            <a:endParaRPr lang="en-US" sz="1300" dirty="0"/>
-          </a:p>
-        </p:txBody>
-      </p:sp>
-      <p:sp>
-        <p:nvSpPr>
-          <p:cNvPr id="28" name="Text 26"/>
-          <p:cNvSpPr/>
-          <p:nvPr/>
-        </p:nvSpPr>
-        <p:spPr>
-          <a:xfrm>
-            <a:off x="1225296" y="4846320"/>
-            <a:ext cx="4453128" cy="329184"/>
-          </a:xfrm>
-          <a:prstGeom prst="rect">
-            <a:avLst/>
-          </a:prstGeom>
-          <a:noFill/>
-          <a:ln/>
-        </p:spPr>
-        <p:txBody>
-          <a:bodyPr wrap="square" lIns="0" tIns="0" rIns="0" bIns="0" rtlCol="0" anchor="t"/>
-          <a:lstStyle/>
-          <a:p>
-            <a:pPr indent="0" marL="0">
-              <a:lnSpc>
-                <a:spcPts val="1200"/>
-              </a:lnSpc>
-              <a:buNone/>
-            </a:pPr>
-            <a:r>
-              <a:rPr lang="en-US" sz="1050" dirty="0">
-                <a:solidFill>
-                  <a:srgbClr val="B4B7BD"/>
-                </a:solidFill>
-                <a:latin typeface="Calibri" pitchFamily="34" charset="0"/>
-                <a:ea typeface="Calibri" pitchFamily="34" charset="-122"/>
-                <a:cs typeface="Calibri" pitchFamily="34" charset="-120"/>
-              </a:rPr>
-              <a:t>Investigation shows catalog risk and both governance counts</a:t>
-            </a:r>
-            <a:endParaRPr lang="en-US" sz="1050" dirty="0"/>
-          </a:p>
-        </p:txBody>
-      </p:sp>
-      <p:sp>
-        <p:nvSpPr>
-          <p:cNvPr id="29" name="Shape 27"/>
-          <p:cNvSpPr/>
-          <p:nvPr/>
-        </p:nvSpPr>
-        <p:spPr>
-          <a:xfrm>
-            <a:off x="6263640" y="1417320"/>
-            <a:ext cx="5349240" cy="548640"/>
-          </a:xfrm>
-          <a:prstGeom prst="roundRect">
-            <a:avLst>
-              <a:gd name="adj" fmla="val 8333"/>
-            </a:avLst>
-          </a:prstGeom>
-          <a:solidFill>
-            <a:srgbClr val="15171B"/>
-          </a:solidFill>
-          <a:ln w="12700">
-            <a:solidFill>
-              <a:srgbClr val="15171B"/>
-            </a:solidFill>
-            <a:prstDash val="solid"/>
-          </a:ln>
-        </p:spPr>
-      </p:sp>
-      <p:sp>
-        <p:nvSpPr>
-          <p:cNvPr id="30" name="Shape 28"/>
-          <p:cNvSpPr/>
-          <p:nvPr/>
-        </p:nvSpPr>
-        <p:spPr>
-          <a:xfrm>
-            <a:off x="6464808" y="1536192"/>
-            <a:ext cx="310896" cy="310896"/>
-          </a:xfrm>
-          <a:prstGeom prst="roundRect">
-            <a:avLst>
-              <a:gd name="adj" fmla="val 26471"/>
-            </a:avLst>
-          </a:prstGeom>
-          <a:solidFill>
-            <a:srgbClr val="3FB950"/>
-          </a:solidFill>
-          <a:ln w="12700">
-            <a:solidFill>
-              <a:srgbClr val="3FB950"/>
-            </a:solidFill>
-            <a:prstDash val="solid"/>
-          </a:ln>
-        </p:spPr>
-      </p:sp>
-      <p:sp>
-        <p:nvSpPr>
-          <p:cNvPr id="31" name="Text 29"/>
-          <p:cNvSpPr/>
-          <p:nvPr/>
-        </p:nvSpPr>
-        <p:spPr>
-          <a:xfrm>
-            <a:off x="6464808" y="1536192"/>
-            <a:ext cx="310896" cy="310896"/>
-          </a:xfrm>
-          <a:prstGeom prst="rect">
-            <a:avLst/>
-          </a:prstGeom>
-          <a:noFill/>
-          <a:ln/>
-        </p:spPr>
-        <p:txBody>
-          <a:bodyPr wrap="square" lIns="0" tIns="0" rIns="0" bIns="0" rtlCol="0" anchor="ctr"/>
-          <a:lstStyle/>
-          <a:p>
-            <a:pPr algn="ctr" indent="0" marL="0">
-              <a:buNone/>
-            </a:pPr>
-            <a:r>
-              <a:rPr lang="en-US" sz="1300" b="1" dirty="0">
-                <a:solidFill>
-                  <a:srgbClr val="FFFFFF"/>
-                </a:solidFill>
-                <a:latin typeface="Calibri" pitchFamily="34" charset="0"/>
-                <a:ea typeface="Calibri" pitchFamily="34" charset="-122"/>
-                <a:cs typeface="Calibri" pitchFamily="34" charset="-120"/>
-              </a:rPr>
-              <a:t>7</a:t>
-            </a:r>
-            <a:endParaRPr lang="en-US" sz="1300" dirty="0"/>
-          </a:p>
-        </p:txBody>
-      </p:sp>
-      <p:sp>
-        <p:nvSpPr>
-          <p:cNvPr id="32" name="Text 30"/>
-          <p:cNvSpPr/>
-          <p:nvPr/>
-        </p:nvSpPr>
-        <p:spPr>
-          <a:xfrm>
-            <a:off x="6940296" y="1554480"/>
-            <a:ext cx="4453128" cy="329184"/>
-          </a:xfrm>
-          <a:prstGeom prst="rect">
-            <a:avLst/>
-          </a:prstGeom>
-          <a:noFill/>
-          <a:ln/>
-        </p:spPr>
-        <p:txBody>
-          <a:bodyPr wrap="square" lIns="0" tIns="0" rIns="0" bIns="0" rtlCol="0" anchor="t"/>
-          <a:lstStyle/>
-          <a:p>
-            <a:pPr indent="0" marL="0">
-              <a:lnSpc>
-                <a:spcPts val="1200"/>
-              </a:lnSpc>
-              <a:buNone/>
-            </a:pPr>
-            <a:r>
-              <a:rPr lang="en-US" sz="1050" dirty="0">
-                <a:solidFill>
-                  <a:srgbClr val="B4B7BD"/>
-                </a:solidFill>
-                <a:latin typeface="Calibri" pitchFamily="34" charset="0"/>
-                <a:ea typeface="Calibri" pitchFamily="34" charset="-122"/>
-                <a:cs typeface="Calibri" pitchFamily="34" charset="-120"/>
-              </a:rPr>
-              <a:t>Response parks on approval; blocklist untouched until approved</a:t>
-            </a:r>
-            <a:endParaRPr lang="en-US" sz="1050" dirty="0"/>
-          </a:p>
-        </p:txBody>
-      </p:sp>
-      <p:sp>
-        <p:nvSpPr>
-          <p:cNvPr id="33" name="Shape 31"/>
-          <p:cNvSpPr/>
-          <p:nvPr/>
-        </p:nvSpPr>
-        <p:spPr>
-          <a:xfrm>
-            <a:off x="6263640" y="2075688"/>
-            <a:ext cx="5349240" cy="548640"/>
-          </a:xfrm>
-          <a:prstGeom prst="roundRect">
-            <a:avLst>
-              <a:gd name="adj" fmla="val 8333"/>
-            </a:avLst>
-          </a:prstGeom>
-          <a:solidFill>
-            <a:srgbClr val="15171B"/>
-          </a:solidFill>
-          <a:ln w="12700">
-            <a:solidFill>
-              <a:srgbClr val="15171B"/>
-            </a:solidFill>
-            <a:prstDash val="solid"/>
-          </a:ln>
-        </p:spPr>
-      </p:sp>
-      <p:sp>
-        <p:nvSpPr>
-          <p:cNvPr id="34" name="Shape 32"/>
-          <p:cNvSpPr/>
-          <p:nvPr/>
-        </p:nvSpPr>
-        <p:spPr>
-          <a:xfrm>
-            <a:off x="6464808" y="2194560"/>
-            <a:ext cx="310896" cy="310896"/>
-          </a:xfrm>
-          <a:prstGeom prst="roundRect">
-            <a:avLst>
-              <a:gd name="adj" fmla="val 26471"/>
-            </a:avLst>
-          </a:prstGeom>
-          <a:solidFill>
-            <a:srgbClr val="3FB950"/>
-          </a:solidFill>
-          <a:ln w="12700">
-            <a:solidFill>
-              <a:srgbClr val="3FB950"/>
-            </a:solidFill>
-            <a:prstDash val="solid"/>
-          </a:ln>
-        </p:spPr>
-      </p:sp>
-      <p:sp>
-        <p:nvSpPr>
-          <p:cNvPr id="35" name="Text 33"/>
-          <p:cNvSpPr/>
-          <p:nvPr/>
-        </p:nvSpPr>
-        <p:spPr>
-          <a:xfrm>
-            <a:off x="6464808" y="2194560"/>
-            <a:ext cx="310896" cy="310896"/>
-          </a:xfrm>
-          <a:prstGeom prst="rect">
-            <a:avLst/>
-          </a:prstGeom>
-          <a:noFill/>
-          <a:ln/>
-        </p:spPr>
-        <p:txBody>
-          <a:bodyPr wrap="square" lIns="0" tIns="0" rIns="0" bIns="0" rtlCol="0" anchor="ctr"/>
-          <a:lstStyle/>
-          <a:p>
-            <a:pPr algn="ctr" indent="0" marL="0">
-              <a:buNone/>
-            </a:pPr>
-            <a:r>
-              <a:rPr lang="en-US" sz="1300" b="1" dirty="0">
-                <a:solidFill>
-                  <a:srgbClr val="FFFFFF"/>
-                </a:solidFill>
-                <a:latin typeface="Calibri" pitchFamily="34" charset="0"/>
-                <a:ea typeface="Calibri" pitchFamily="34" charset="-122"/>
-                <a:cs typeface="Calibri" pitchFamily="34" charset="-120"/>
-              </a:rPr>
-              <a:t>8</a:t>
-            </a:r>
-            <a:endParaRPr lang="en-US" sz="1300" dirty="0"/>
-          </a:p>
-        </p:txBody>
-      </p:sp>
-      <p:sp>
-        <p:nvSpPr>
-          <p:cNvPr id="36" name="Text 34"/>
-          <p:cNvSpPr/>
-          <p:nvPr/>
-        </p:nvSpPr>
-        <p:spPr>
-          <a:xfrm>
-            <a:off x="6940296" y="2212848"/>
-            <a:ext cx="4453128" cy="329184"/>
-          </a:xfrm>
-          <a:prstGeom prst="rect">
-            <a:avLst/>
-          </a:prstGeom>
-          <a:noFill/>
-          <a:ln/>
-        </p:spPr>
-        <p:txBody>
-          <a:bodyPr wrap="square" lIns="0" tIns="0" rIns="0" bIns="0" rtlCol="0" anchor="t"/>
-          <a:lstStyle/>
-          <a:p>
-            <a:pPr indent="0" marL="0">
-              <a:lnSpc>
-                <a:spcPts val="1200"/>
-              </a:lnSpc>
-              <a:buNone/>
-            </a:pPr>
-            <a:r>
-              <a:rPr lang="en-US" sz="1050" dirty="0">
-                <a:solidFill>
-                  <a:srgbClr val="B4B7BD"/>
-                </a:solidFill>
-                <a:latin typeface="Calibri" pitchFamily="34" charset="0"/>
-                <a:ea typeface="Calibri" pitchFamily="34" charset="-122"/>
-                <a:cs typeface="Calibri" pitchFamily="34" charset="-120"/>
-              </a:rPr>
-              <a:t>MCP audit returns servers at or above the threshold</a:t>
-            </a:r>
-            <a:endParaRPr lang="en-US" sz="1050" dirty="0"/>
-          </a:p>
-        </p:txBody>
-      </p:sp>
-      <p:sp>
-        <p:nvSpPr>
-          <p:cNvPr id="37" name="Shape 35"/>
-          <p:cNvSpPr/>
-          <p:nvPr/>
-        </p:nvSpPr>
-        <p:spPr>
-          <a:xfrm>
-            <a:off x="6263640" y="2734056"/>
-            <a:ext cx="5349240" cy="548640"/>
-          </a:xfrm>
-          <a:prstGeom prst="roundRect">
-            <a:avLst>
-              <a:gd name="adj" fmla="val 8333"/>
-            </a:avLst>
-          </a:prstGeom>
-          <a:solidFill>
-            <a:srgbClr val="15171B"/>
-          </a:solidFill>
-          <a:ln w="12700">
-            <a:solidFill>
-              <a:srgbClr val="15171B"/>
-            </a:solidFill>
-            <a:prstDash val="solid"/>
-          </a:ln>
-        </p:spPr>
-      </p:sp>
-      <p:sp>
-        <p:nvSpPr>
-          <p:cNvPr id="38" name="Shape 36"/>
-          <p:cNvSpPr/>
-          <p:nvPr/>
-        </p:nvSpPr>
-        <p:spPr>
-          <a:xfrm>
-            <a:off x="6464808" y="2852928"/>
-            <a:ext cx="310896" cy="310896"/>
-          </a:xfrm>
-          <a:prstGeom prst="roundRect">
-            <a:avLst>
-              <a:gd name="adj" fmla="val 26471"/>
-            </a:avLst>
-          </a:prstGeom>
-          <a:solidFill>
-            <a:srgbClr val="3FB950"/>
-          </a:solidFill>
-          <a:ln w="12700">
-            <a:solidFill>
-              <a:srgbClr val="3FB950"/>
-            </a:solidFill>
-            <a:prstDash val="solid"/>
-          </a:ln>
-        </p:spPr>
-      </p:sp>
-      <p:sp>
-        <p:nvSpPr>
-          <p:cNvPr id="39" name="Text 37"/>
-          <p:cNvSpPr/>
-          <p:nvPr/>
-        </p:nvSpPr>
-        <p:spPr>
-          <a:xfrm>
-            <a:off x="6464808" y="2852928"/>
-            <a:ext cx="310896" cy="310896"/>
-          </a:xfrm>
-          <a:prstGeom prst="rect">
-            <a:avLst/>
-          </a:prstGeom>
-          <a:noFill/>
-          <a:ln/>
-        </p:spPr>
-        <p:txBody>
-          <a:bodyPr wrap="square" lIns="0" tIns="0" rIns="0" bIns="0" rtlCol="0" anchor="ctr"/>
-          <a:lstStyle/>
-          <a:p>
-            <a:pPr algn="ctr" indent="0" marL="0">
-              <a:buNone/>
-            </a:pPr>
-            <a:r>
-              <a:rPr lang="en-US" sz="1300" b="1" dirty="0">
-                <a:solidFill>
-                  <a:srgbClr val="FFFFFF"/>
-                </a:solidFill>
-                <a:latin typeface="Calibri" pitchFamily="34" charset="0"/>
-                <a:ea typeface="Calibri" pitchFamily="34" charset="-122"/>
-                <a:cs typeface="Calibri" pitchFamily="34" charset="-120"/>
-              </a:rPr>
-              <a:t>9</a:t>
-            </a:r>
-            <a:endParaRPr lang="en-US" sz="1300" dirty="0"/>
-          </a:p>
-        </p:txBody>
-      </p:sp>
-      <p:sp>
-        <p:nvSpPr>
-          <p:cNvPr id="40" name="Text 38"/>
-          <p:cNvSpPr/>
-          <p:nvPr/>
-        </p:nvSpPr>
-        <p:spPr>
-          <a:xfrm>
-            <a:off x="6940296" y="2871216"/>
-            <a:ext cx="4453128" cy="329184"/>
-          </a:xfrm>
-          <a:prstGeom prst="rect">
-            <a:avLst/>
-          </a:prstGeom>
-          <a:noFill/>
-          <a:ln/>
-        </p:spPr>
-        <p:txBody>
-          <a:bodyPr wrap="square" lIns="0" tIns="0" rIns="0" bIns="0" rtlCol="0" anchor="t"/>
-          <a:lstStyle/>
-          <a:p>
-            <a:pPr indent="0" marL="0">
-              <a:lnSpc>
-                <a:spcPts val="1200"/>
-              </a:lnSpc>
-              <a:buNone/>
-            </a:pPr>
-            <a:r>
-              <a:rPr lang="en-US" sz="1050" dirty="0">
-                <a:solidFill>
-                  <a:srgbClr val="B4B7BD"/>
-                </a:solidFill>
-                <a:latin typeface="Calibri" pitchFamily="34" charset="0"/>
-                <a:ea typeface="Calibri" pitchFamily="34" charset="-122"/>
-                <a:cs typeface="Calibri" pitchFamily="34" charset="-120"/>
-              </a:rPr>
-              <a:t>Tracker List is created and fills with endpoints</a:t>
-            </a:r>
-            <a:endParaRPr lang="en-US" sz="1050" dirty="0"/>
-          </a:p>
-        </p:txBody>
-      </p:sp>
-      <p:sp>
-        <p:nvSpPr>
-          <p:cNvPr id="41" name="Shape 39"/>
-          <p:cNvSpPr/>
-          <p:nvPr/>
-        </p:nvSpPr>
-        <p:spPr>
-          <a:xfrm>
-            <a:off x="6263640" y="3392424"/>
-            <a:ext cx="5349240" cy="548640"/>
-          </a:xfrm>
-          <a:prstGeom prst="roundRect">
-            <a:avLst>
-              <a:gd name="adj" fmla="val 8333"/>
-            </a:avLst>
-          </a:prstGeom>
-          <a:solidFill>
-            <a:srgbClr val="15171B"/>
-          </a:solidFill>
-          <a:ln w="12700">
-            <a:solidFill>
-              <a:srgbClr val="15171B"/>
-            </a:solidFill>
-            <a:prstDash val="solid"/>
-          </a:ln>
-        </p:spPr>
-      </p:sp>
-      <p:sp>
-        <p:nvSpPr>
-          <p:cNvPr id="42" name="Shape 40"/>
-          <p:cNvSpPr/>
-          <p:nvPr/>
-        </p:nvSpPr>
-        <p:spPr>
-          <a:xfrm>
-            <a:off x="6464808" y="3511296"/>
-            <a:ext cx="310896" cy="310896"/>
-          </a:xfrm>
-          <a:prstGeom prst="roundRect">
-            <a:avLst>
-              <a:gd name="adj" fmla="val 26471"/>
-            </a:avLst>
-          </a:prstGeom>
-          <a:solidFill>
-            <a:srgbClr val="3FB950"/>
-          </a:solidFill>
-          <a:ln w="12700">
-            <a:solidFill>
-              <a:srgbClr val="3FB950"/>
-            </a:solidFill>
-            <a:prstDash val="solid"/>
-          </a:ln>
-        </p:spPr>
-      </p:sp>
-      <p:sp>
-        <p:nvSpPr>
-          <p:cNvPr id="43" name="Text 41"/>
-          <p:cNvSpPr/>
-          <p:nvPr/>
-        </p:nvSpPr>
-        <p:spPr>
-          <a:xfrm>
-            <a:off x="6464808" y="3511296"/>
-            <a:ext cx="310896" cy="310896"/>
-          </a:xfrm>
-          <a:prstGeom prst="rect">
-            <a:avLst/>
-          </a:prstGeom>
-          <a:noFill/>
-          <a:ln/>
-        </p:spPr>
-        <p:txBody>
-          <a:bodyPr wrap="square" lIns="0" tIns="0" rIns="0" bIns="0" rtlCol="0" anchor="ctr"/>
-          <a:lstStyle/>
-          <a:p>
-            <a:pPr algn="ctr" indent="0" marL="0">
-              <a:buNone/>
-            </a:pPr>
-            <a:r>
-              <a:rPr lang="en-US" sz="1300" b="1" dirty="0">
-                <a:solidFill>
-                  <a:srgbClr val="FFFFFF"/>
-                </a:solidFill>
-                <a:latin typeface="Calibri" pitchFamily="34" charset="0"/>
-                <a:ea typeface="Calibri" pitchFamily="34" charset="-122"/>
-                <a:cs typeface="Calibri" pitchFamily="34" charset="-120"/>
-              </a:rPr>
-              <a:t>10</a:t>
-            </a:r>
-            <a:endParaRPr lang="en-US" sz="1300" dirty="0"/>
-          </a:p>
-        </p:txBody>
-      </p:sp>
-      <p:sp>
-        <p:nvSpPr>
-          <p:cNvPr id="44" name="Text 42"/>
-          <p:cNvSpPr/>
-          <p:nvPr/>
-        </p:nvSpPr>
-        <p:spPr>
-          <a:xfrm>
-            <a:off x="6940296" y="3529584"/>
-            <a:ext cx="4453128" cy="329184"/>
-          </a:xfrm>
-          <a:prstGeom prst="rect">
-            <a:avLst/>
-          </a:prstGeom>
-          <a:noFill/>
-          <a:ln/>
-        </p:spPr>
-        <p:txBody>
-          <a:bodyPr wrap="square" lIns="0" tIns="0" rIns="0" bIns="0" rtlCol="0" anchor="t"/>
-          <a:lstStyle/>
-          <a:p>
-            <a:pPr indent="0" marL="0">
-              <a:lnSpc>
-                <a:spcPts val="1200"/>
-              </a:lnSpc>
-              <a:buNone/>
-            </a:pPr>
-            <a:r>
-              <a:rPr lang="en-US" sz="1050" dirty="0">
-                <a:solidFill>
-                  <a:srgbClr val="B4B7BD"/>
-                </a:solidFill>
-                <a:latin typeface="Calibri" pitchFamily="34" charset="0"/>
-                <a:ea typeface="Calibri" pitchFamily="34" charset="-122"/>
-                <a:cs typeface="Calibri" pitchFamily="34" charset="-120"/>
-              </a:rPr>
-              <a:t>Scan marks only due, connected endpoints; re-run is a no-op</a:t>
-            </a:r>
-            <a:endParaRPr lang="en-US" sz="1050" dirty="0"/>
-          </a:p>
-        </p:txBody>
-      </p:sp>
-      <p:sp>
-        <p:nvSpPr>
-          <p:cNvPr id="45" name="Shape 43"/>
-          <p:cNvSpPr/>
-          <p:nvPr/>
-        </p:nvSpPr>
-        <p:spPr>
-          <a:xfrm>
-            <a:off x="6263640" y="4050792"/>
-            <a:ext cx="5349240" cy="548640"/>
-          </a:xfrm>
-          <a:prstGeom prst="roundRect">
-            <a:avLst>
-              <a:gd name="adj" fmla="val 8333"/>
-            </a:avLst>
-          </a:prstGeom>
-          <a:solidFill>
-            <a:srgbClr val="15171B"/>
-          </a:solidFill>
-          <a:ln w="12700">
-            <a:solidFill>
-              <a:srgbClr val="15171B"/>
-            </a:solidFill>
-            <a:prstDash val="solid"/>
-          </a:ln>
-        </p:spPr>
-      </p:sp>
-      <p:sp>
-        <p:nvSpPr>
-          <p:cNvPr id="46" name="Shape 44"/>
-          <p:cNvSpPr/>
-          <p:nvPr/>
-        </p:nvSpPr>
-        <p:spPr>
-          <a:xfrm>
-            <a:off x="6464808" y="4169664"/>
-            <a:ext cx="310896" cy="310896"/>
-          </a:xfrm>
-          <a:prstGeom prst="roundRect">
-            <a:avLst>
-              <a:gd name="adj" fmla="val 26471"/>
-            </a:avLst>
-          </a:prstGeom>
-          <a:solidFill>
-            <a:srgbClr val="3FB950"/>
-          </a:solidFill>
-          <a:ln w="12700">
-            <a:solidFill>
-              <a:srgbClr val="3FB950"/>
-            </a:solidFill>
-            <a:prstDash val="solid"/>
-          </a:ln>
-        </p:spPr>
-      </p:sp>
-      <p:sp>
-        <p:nvSpPr>
-          <p:cNvPr id="47" name="Text 45"/>
-          <p:cNvSpPr/>
-          <p:nvPr/>
-        </p:nvSpPr>
-        <p:spPr>
-          <a:xfrm>
-            <a:off x="6464808" y="4169664"/>
-            <a:ext cx="310896" cy="310896"/>
-          </a:xfrm>
-          <a:prstGeom prst="rect">
-            <a:avLst/>
-          </a:prstGeom>
-          <a:noFill/>
-          <a:ln/>
-        </p:spPr>
-        <p:txBody>
-          <a:bodyPr wrap="square" lIns="0" tIns="0" rIns="0" bIns="0" rtlCol="0" anchor="ctr"/>
-          <a:lstStyle/>
-          <a:p>
-            <a:pPr algn="ctr" indent="0" marL="0">
-              <a:buNone/>
-            </a:pPr>
-            <a:r>
-              <a:rPr lang="en-US" sz="1300" b="1" dirty="0">
-                <a:solidFill>
-                  <a:srgbClr val="FFFFFF"/>
-                </a:solidFill>
-                <a:latin typeface="Calibri" pitchFamily="34" charset="0"/>
-                <a:ea typeface="Calibri" pitchFamily="34" charset="-122"/>
-                <a:cs typeface="Calibri" pitchFamily="34" charset="-120"/>
-              </a:rPr>
-              <a:t>11</a:t>
-            </a:r>
-            <a:endParaRPr lang="en-US" sz="1300" dirty="0"/>
-          </a:p>
-        </p:txBody>
-      </p:sp>
-      <p:sp>
-        <p:nvSpPr>
-          <p:cNvPr id="48" name="Text 46"/>
-          <p:cNvSpPr/>
-          <p:nvPr/>
-        </p:nvSpPr>
-        <p:spPr>
-          <a:xfrm>
-            <a:off x="6940296" y="4187952"/>
-            <a:ext cx="4453128" cy="329184"/>
-          </a:xfrm>
-          <a:prstGeom prst="rect">
-            <a:avLst/>
-          </a:prstGeom>
-          <a:noFill/>
-          <a:ln/>
-        </p:spPr>
-        <p:txBody>
-          <a:bodyPr wrap="square" lIns="0" tIns="0" rIns="0" bIns="0" rtlCol="0" anchor="t"/>
-          <a:lstStyle/>
-          <a:p>
-            <a:pPr indent="0" marL="0">
-              <a:lnSpc>
-                <a:spcPts val="1200"/>
-              </a:lnSpc>
-              <a:buNone/>
-            </a:pPr>
-            <a:r>
-              <a:rPr lang="en-US" sz="1050" dirty="0">
-                <a:solidFill>
-                  <a:srgbClr val="B4B7BD"/>
-                </a:solidFill>
-                <a:latin typeface="Calibri" pitchFamily="34" charset="0"/>
-                <a:ea typeface="Calibri" pitchFamily="34" charset="-122"/>
-                <a:cs typeface="Calibri" pitchFamily="34" charset="-120"/>
-              </a:rPr>
-              <a:t>Library queries run and return results</a:t>
-            </a:r>
-            <a:endParaRPr lang="en-US" sz="1050" dirty="0"/>
-          </a:p>
-        </p:txBody>
-      </p:sp>
-      <p:sp>
-        <p:nvSpPr>
-          <p:cNvPr id="49" name="Shape 47"/>
-          <p:cNvSpPr/>
-          <p:nvPr/>
-        </p:nvSpPr>
-        <p:spPr>
-          <a:xfrm>
-            <a:off x="6263640" y="4709160"/>
-            <a:ext cx="5349240" cy="548640"/>
-          </a:xfrm>
-          <a:prstGeom prst="roundRect">
-            <a:avLst>
-              <a:gd name="adj" fmla="val 8333"/>
-            </a:avLst>
-          </a:prstGeom>
-          <a:solidFill>
-            <a:srgbClr val="15171B"/>
-          </a:solidFill>
-          <a:ln w="12700">
-            <a:solidFill>
-              <a:srgbClr val="15171B"/>
-            </a:solidFill>
-            <a:prstDash val="solid"/>
-          </a:ln>
-        </p:spPr>
-      </p:sp>
-      <p:sp>
-        <p:nvSpPr>
-          <p:cNvPr id="50" name="Shape 48"/>
-          <p:cNvSpPr/>
-          <p:nvPr/>
-        </p:nvSpPr>
-        <p:spPr>
-          <a:xfrm>
-            <a:off x="6464808" y="4828032"/>
-            <a:ext cx="310896" cy="310896"/>
-          </a:xfrm>
-          <a:prstGeom prst="roundRect">
-            <a:avLst>
-              <a:gd name="adj" fmla="val 26471"/>
-            </a:avLst>
-          </a:prstGeom>
-          <a:solidFill>
-            <a:srgbClr val="3FB950"/>
-          </a:solidFill>
-          <a:ln w="12700">
-            <a:solidFill>
-              <a:srgbClr val="3FB950"/>
-            </a:solidFill>
-            <a:prstDash val="solid"/>
-          </a:ln>
-        </p:spPr>
-      </p:sp>
-      <p:sp>
-        <p:nvSpPr>
-          <p:cNvPr id="51" name="Text 49"/>
-          <p:cNvSpPr/>
-          <p:nvPr/>
-        </p:nvSpPr>
-        <p:spPr>
-          <a:xfrm>
-            <a:off x="6464808" y="4828032"/>
-            <a:ext cx="310896" cy="310896"/>
-          </a:xfrm>
-          <a:prstGeom prst="rect">
-            <a:avLst/>
-          </a:prstGeom>
-          <a:noFill/>
-          <a:ln/>
-        </p:spPr>
-        <p:txBody>
-          <a:bodyPr wrap="square" lIns="0" tIns="0" rIns="0" bIns="0" rtlCol="0" anchor="ctr"/>
-          <a:lstStyle/>
-          <a:p>
-            <a:pPr algn="ctr" indent="0" marL="0">
-              <a:buNone/>
-            </a:pPr>
-            <a:r>
-              <a:rPr lang="en-US" sz="1300" b="1" dirty="0">
-                <a:solidFill>
-                  <a:srgbClr val="FFFFFF"/>
-                </a:solidFill>
-                <a:latin typeface="Calibri" pitchFamily="34" charset="0"/>
-                <a:ea typeface="Calibri" pitchFamily="34" charset="-122"/>
-                <a:cs typeface="Calibri" pitchFamily="34" charset="-120"/>
-              </a:rPr>
-              <a:t>12</a:t>
-            </a:r>
-            <a:endParaRPr lang="en-US" sz="1300" dirty="0"/>
-          </a:p>
-        </p:txBody>
-      </p:sp>
-      <p:sp>
-        <p:nvSpPr>
-          <p:cNvPr id="52" name="Text 50"/>
-          <p:cNvSpPr/>
-          <p:nvPr/>
-        </p:nvSpPr>
-        <p:spPr>
-          <a:xfrm>
-            <a:off x="6940296" y="4846320"/>
-            <a:ext cx="4453128" cy="329184"/>
-          </a:xfrm>
-          <a:prstGeom prst="rect">
-            <a:avLst/>
-          </a:prstGeom>
-          <a:noFill/>
-          <a:ln/>
-        </p:spPr>
-        <p:txBody>
-          <a:bodyPr wrap="square" lIns="0" tIns="0" rIns="0" bIns="0" rtlCol="0" anchor="t"/>
-          <a:lstStyle/>
-          <a:p>
-            <a:pPr indent="0" marL="0">
-              <a:lnSpc>
-                <a:spcPts val="1200"/>
-              </a:lnSpc>
-              <a:buNone/>
-            </a:pPr>
-            <a:r>
-              <a:rPr lang="en-US" sz="1050" dirty="0">
-                <a:solidFill>
-                  <a:srgbClr val="B4B7BD"/>
-                </a:solidFill>
-                <a:latin typeface="Calibri" pitchFamily="34" charset="0"/>
-                <a:ea typeface="Calibri" pitchFamily="34" charset="-122"/>
-                <a:cs typeface="Calibri" pitchFamily="34" charset="-120"/>
-              </a:rPr>
-              <a:t>Simulated counts match the summary exactly</a:t>
-            </a:r>
-            <a:endParaRPr lang="en-US" sz="1050" dirty="0"/>
-          </a:p>
-        </p:txBody>
-      </p:sp>
-      <p:sp>
-        <p:nvSpPr>
-          <p:cNvPr id="53" name="Shape 51"/>
-          <p:cNvSpPr/>
-          <p:nvPr/>
-        </p:nvSpPr>
-        <p:spPr>
-          <a:xfrm>
-            <a:off x="548640" y="5440680"/>
-            <a:ext cx="11064240" cy="685800"/>
-          </a:xfrm>
-          <a:prstGeom prst="roundRect">
-            <a:avLst>
-              <a:gd name="adj" fmla="val 6667"/>
+              <a:gd name="adj" fmla="val 1880"/>
             </a:avLst>
           </a:prstGeom>
           <a:solidFill>
@@ -16437,30 +15164,30 @@
       </p:sp>
       <p:sp>
         <p:nvSpPr>
-          <p:cNvPr id="54" name="Text 52"/>
-          <p:cNvSpPr/>
-          <p:nvPr/>
-        </p:nvSpPr>
-        <p:spPr>
-          <a:xfrm>
-            <a:off x="859536" y="5623560"/>
-            <a:ext cx="7315200" cy="292608"/>
-          </a:xfrm>
-          <a:prstGeom prst="rect">
-            <a:avLst/>
-          </a:prstGeom>
-          <a:noFill/>
-          <a:ln/>
-        </p:spPr>
-        <p:txBody>
-          <a:bodyPr wrap="square" lIns="0" tIns="0" rIns="0" bIns="0" rtlCol="0" anchor="t"/>
-          <a:lstStyle/>
-          <a:p>
-            <a:pPr indent="0" marL="0">
-              <a:buNone/>
-            </a:pPr>
-            <a:r>
-              <a:rPr lang="en-US" sz="1300" b="1" i="1" dirty="0">
+          <p:cNvPr id="26" name="Text 24"/>
+          <p:cNvSpPr/>
+          <p:nvPr/>
+        </p:nvSpPr>
+        <p:spPr>
+          <a:xfrm>
+            <a:off x="7626096" y="2592324"/>
+            <a:ext cx="3108960" cy="256032"/>
+          </a:xfrm>
+          <a:prstGeom prst="rect">
+            <a:avLst/>
+          </a:prstGeom>
+          <a:noFill/>
+          <a:ln/>
+        </p:spPr>
+        <p:txBody>
+          <a:bodyPr wrap="square" lIns="0" tIns="0" rIns="0" bIns="0" rtlCol="0" anchor="t"/>
+          <a:lstStyle/>
+          <a:p>
+            <a:pPr indent="0" marL="0">
+              <a:buNone/>
+            </a:pPr>
+            <a:r>
+              <a:rPr lang="en-US" sz="1200" b="1" spc="100" kern="0" dirty="0">
                 <a:solidFill>
                   <a:srgbClr val="3FB950"/>
                 </a:solidFill>
@@ -16468,48 +15195,252 @@
                 <a:ea typeface="Calibri" pitchFamily="34" charset="-122"/>
                 <a:cs typeface="Calibri" pitchFamily="34" charset="-120"/>
               </a:rPr>
-              <a:t>All twelve green — the pack is ready for production use.</a:t>
-            </a:r>
-            <a:endParaRPr lang="en-US" sz="1300" dirty="0"/>
-          </a:p>
-        </p:txBody>
-      </p:sp>
-      <p:sp>
-        <p:nvSpPr>
-          <p:cNvPr id="55" name="Text 53"/>
-          <p:cNvSpPr/>
-          <p:nvPr/>
-        </p:nvSpPr>
-        <p:spPr>
-          <a:xfrm>
-            <a:off x="548640" y="6263640"/>
-            <a:ext cx="11064240" cy="274320"/>
-          </a:xfrm>
-          <a:prstGeom prst="rect">
-            <a:avLst/>
-          </a:prstGeom>
-          <a:noFill/>
-          <a:ln/>
-        </p:spPr>
-        <p:txBody>
-          <a:bodyPr wrap="square" lIns="0" tIns="0" rIns="0" bIns="0" rtlCol="0" anchor="t"/>
-          <a:lstStyle/>
-          <a:p>
-            <a:pPr indent="0" marL="0">
-              <a:buNone/>
-            </a:pPr>
-            <a:r>
-              <a:rPr lang="en-US" sz="1050" dirty="0">
-                <a:solidFill>
-                  <a:srgbClr val="6E747E"/>
-                </a:solidFill>
-                <a:latin typeface="Calibri" pitchFamily="34" charset="0"/>
-                <a:ea typeface="Calibri" pitchFamily="34" charset="-122"/>
-                <a:cs typeface="Calibri" pitchFamily="34" charset="-120"/>
-              </a:rPr>
-              <a:t>Full detail in KOI_Integration_Customer_Guide_v1.4.0. Diagnostics in the troubleshooting guide.</a:t>
-            </a:r>
-            <a:endParaRPr lang="en-US" sz="1050" dirty="0"/>
+              <a:t>What to expect</a:t>
+            </a:r>
+            <a:endParaRPr lang="en-US" sz="1200" dirty="0"/>
+          </a:p>
+        </p:txBody>
+      </p:sp>
+      <p:sp>
+        <p:nvSpPr>
+          <p:cNvPr id="27" name="Text 25"/>
+          <p:cNvSpPr/>
+          <p:nvPr/>
+        </p:nvSpPr>
+        <p:spPr>
+          <a:xfrm>
+            <a:off x="7626096" y="2939796"/>
+            <a:ext cx="219456" cy="256032"/>
+          </a:xfrm>
+          <a:prstGeom prst="rect">
+            <a:avLst/>
+          </a:prstGeom>
+          <a:noFill/>
+          <a:ln/>
+        </p:spPr>
+        <p:txBody>
+          <a:bodyPr wrap="square" lIns="0" tIns="0" rIns="0" bIns="0" rtlCol="0" anchor="t"/>
+          <a:lstStyle/>
+          <a:p>
+            <a:pPr indent="0" marL="0">
+              <a:buNone/>
+            </a:pPr>
+            <a:r>
+              <a:rPr lang="en-US" sz="1150" b="1" dirty="0">
+                <a:solidFill>
+                  <a:srgbClr val="3FB950"/>
+                </a:solidFill>
+                <a:latin typeface="Calibri" pitchFamily="34" charset="0"/>
+                <a:ea typeface="Calibri" pitchFamily="34" charset="-122"/>
+                <a:cs typeface="Calibri" pitchFamily="34" charset="-120"/>
+              </a:rPr>
+              <a:t>✓</a:t>
+            </a:r>
+            <a:endParaRPr lang="en-US" sz="1150" dirty="0"/>
+          </a:p>
+        </p:txBody>
+      </p:sp>
+      <p:sp>
+        <p:nvSpPr>
+          <p:cNvPr id="28" name="Text 26"/>
+          <p:cNvSpPr/>
+          <p:nvPr/>
+        </p:nvSpPr>
+        <p:spPr>
+          <a:xfrm>
+            <a:off x="7918704" y="2939796"/>
+            <a:ext cx="3383280" cy="246888"/>
+          </a:xfrm>
+          <a:prstGeom prst="rect">
+            <a:avLst/>
+          </a:prstGeom>
+          <a:noFill/>
+          <a:ln/>
+        </p:spPr>
+        <p:txBody>
+          <a:bodyPr wrap="square" lIns="0" tIns="0" rIns="0" bIns="0" rtlCol="0" anchor="t"/>
+          <a:lstStyle/>
+          <a:p>
+            <a:pPr indent="0" marL="0">
+              <a:lnSpc>
+                <a:spcPts val="1500"/>
+              </a:lnSpc>
+              <a:buNone/>
+            </a:pPr>
+            <a:r>
+              <a:rPr lang="en-US" sz="1150" dirty="0">
+                <a:solidFill>
+                  <a:srgbClr val="B4B7BD"/>
+                </a:solidFill>
+                <a:latin typeface="Calibri" pitchFamily="34" charset="0"/>
+                <a:ea typeface="Calibri" pitchFamily="34" charset="-122"/>
+                <a:cs typeface="Calibri" pitchFamily="34" charset="-120"/>
+              </a:rPr>
+              <a:t>380 events land in koisim_koisim_raw.</a:t>
+            </a:r>
+            <a:endParaRPr lang="en-US" sz="1150" dirty="0"/>
+          </a:p>
+        </p:txBody>
+      </p:sp>
+      <p:sp>
+        <p:nvSpPr>
+          <p:cNvPr id="29" name="Text 27"/>
+          <p:cNvSpPr/>
+          <p:nvPr/>
+        </p:nvSpPr>
+        <p:spPr>
+          <a:xfrm>
+            <a:off x="7626096" y="3268980"/>
+            <a:ext cx="219456" cy="256032"/>
+          </a:xfrm>
+          <a:prstGeom prst="rect">
+            <a:avLst/>
+          </a:prstGeom>
+          <a:noFill/>
+          <a:ln/>
+        </p:spPr>
+        <p:txBody>
+          <a:bodyPr wrap="square" lIns="0" tIns="0" rIns="0" bIns="0" rtlCol="0" anchor="t"/>
+          <a:lstStyle/>
+          <a:p>
+            <a:pPr indent="0" marL="0">
+              <a:buNone/>
+            </a:pPr>
+            <a:r>
+              <a:rPr lang="en-US" sz="1150" b="1" dirty="0">
+                <a:solidFill>
+                  <a:srgbClr val="3FB950"/>
+                </a:solidFill>
+                <a:latin typeface="Calibri" pitchFamily="34" charset="0"/>
+                <a:ea typeface="Calibri" pitchFamily="34" charset="-122"/>
+                <a:cs typeface="Calibri" pitchFamily="34" charset="-120"/>
+              </a:rPr>
+              <a:t>✓</a:t>
+            </a:r>
+            <a:endParaRPr lang="en-US" sz="1150" dirty="0"/>
+          </a:p>
+        </p:txBody>
+      </p:sp>
+      <p:sp>
+        <p:nvSpPr>
+          <p:cNvPr id="30" name="Text 28"/>
+          <p:cNvSpPr/>
+          <p:nvPr/>
+        </p:nvSpPr>
+        <p:spPr>
+          <a:xfrm>
+            <a:off x="7918704" y="3268980"/>
+            <a:ext cx="3383280" cy="438912"/>
+          </a:xfrm>
+          <a:prstGeom prst="rect">
+            <a:avLst/>
+          </a:prstGeom>
+          <a:noFill/>
+          <a:ln/>
+        </p:spPr>
+        <p:txBody>
+          <a:bodyPr wrap="square" lIns="0" tIns="0" rIns="0" bIns="0" rtlCol="0" anchor="t"/>
+          <a:lstStyle/>
+          <a:p>
+            <a:pPr indent="0" marL="0">
+              <a:lnSpc>
+                <a:spcPts val="1500"/>
+              </a:lnSpc>
+              <a:buNone/>
+            </a:pPr>
+            <a:r>
+              <a:rPr lang="en-US" sz="1150" dirty="0">
+                <a:solidFill>
+                  <a:srgbClr val="B4B7BD"/>
+                </a:solidFill>
+                <a:latin typeface="Calibri" pitchFamily="34" charset="0"/>
+                <a:ea typeface="Calibri" pitchFamily="34" charset="-122"/>
+                <a:cs typeface="Calibri" pitchFamily="34" charset="-120"/>
+              </a:rPr>
+              <a:t>40 distinct alerts delivered 8 times each, as real KOI does.</a:t>
+            </a:r>
+            <a:endParaRPr lang="en-US" sz="1150" dirty="0"/>
+          </a:p>
+        </p:txBody>
+      </p:sp>
+      <p:sp>
+        <p:nvSpPr>
+          <p:cNvPr id="31" name="Text 29"/>
+          <p:cNvSpPr/>
+          <p:nvPr/>
+        </p:nvSpPr>
+        <p:spPr>
+          <a:xfrm>
+            <a:off x="7626096" y="3785616"/>
+            <a:ext cx="219456" cy="256032"/>
+          </a:xfrm>
+          <a:prstGeom prst="rect">
+            <a:avLst/>
+          </a:prstGeom>
+          <a:noFill/>
+          <a:ln/>
+        </p:spPr>
+        <p:txBody>
+          <a:bodyPr wrap="square" lIns="0" tIns="0" rIns="0" bIns="0" rtlCol="0" anchor="t"/>
+          <a:lstStyle/>
+          <a:p>
+            <a:pPr indent="0" marL="0">
+              <a:buNone/>
+            </a:pPr>
+            <a:r>
+              <a:rPr lang="en-US" sz="1150" b="1" dirty="0">
+                <a:solidFill>
+                  <a:srgbClr val="3FB950"/>
+                </a:solidFill>
+                <a:latin typeface="Calibri" pitchFamily="34" charset="0"/>
+                <a:ea typeface="Calibri" pitchFamily="34" charset="-122"/>
+                <a:cs typeface="Calibri" pitchFamily="34" charset="-120"/>
+              </a:rPr>
+              <a:t>✓</a:t>
+            </a:r>
+            <a:endParaRPr lang="en-US" sz="1150" dirty="0"/>
+          </a:p>
+        </p:txBody>
+      </p:sp>
+      <p:sp>
+        <p:nvSpPr>
+          <p:cNvPr id="32" name="Text 30"/>
+          <p:cNvSpPr/>
+          <p:nvPr/>
+        </p:nvSpPr>
+        <p:spPr>
+          <a:xfrm>
+            <a:off x="7918704" y="3785616"/>
+            <a:ext cx="3383280" cy="438912"/>
+          </a:xfrm>
+          <a:prstGeom prst="rect">
+            <a:avLst/>
+          </a:prstGeom>
+          <a:noFill/>
+          <a:ln/>
+        </p:spPr>
+        <p:txBody>
+          <a:bodyPr wrap="square" lIns="0" tIns="0" rIns="0" bIns="0" rtlCol="0" anchor="t"/>
+          <a:lstStyle/>
+          <a:p>
+            <a:pPr indent="0" marL="0">
+              <a:lnSpc>
+                <a:spcPts val="1500"/>
+              </a:lnSpc>
+              <a:buNone/>
+            </a:pPr>
+            <a:r>
+              <a:rPr lang="en-US" sz="1150" dirty="0">
+                <a:solidFill>
+                  <a:srgbClr val="B4B7BD"/>
+                </a:solidFill>
+                <a:latin typeface="Calibri" pitchFamily="34" charset="0"/>
+                <a:ea typeface="Calibri" pitchFamily="34" charset="-122"/>
+                <a:cs typeface="Calibri" pitchFamily="34" charset="-120"/>
+              </a:rPr>
+              <a:t>The counts you measure match the summary exactly.</a:t>
+            </a:r>
+            <a:endParaRPr lang="en-US" sz="1150" dirty="0"/>
           </a:p>
         </p:txBody>
       </p:sp>
@@ -17888,6 +16819,1868 @@
 </p:sld>
 </file>
 
+<file path=ppt/slides/slide20.xml><?xml version="1.0" encoding="utf-8"?>
+<p:sld xmlns:a="http://schemas.openxmlformats.org/drawingml/2006/main" xmlns:r="http://schemas.openxmlformats.org/officeDocument/2006/relationships" xmlns:p="http://schemas.openxmlformats.org/presentationml/2006/main">
+  <p:cSld name="Slide 20">
+    <p:bg>
+      <p:bgPr>
+        <a:solidFill>
+          <a:srgbClr val="000000"/>
+        </a:solidFill>
+      </p:bgPr>
+    </p:bg>
+    <p:spTree>
+      <p:nvGrpSpPr>
+        <p:cNvPr id="1" name=""/>
+        <p:cNvGrpSpPr/>
+        <p:nvPr/>
+      </p:nvGrpSpPr>
+      <p:grpSpPr>
+        <a:xfrm>
+          <a:off x="0" y="0"/>
+          <a:ext cx="0" cy="0"/>
+          <a:chOff x="0" y="0"/>
+          <a:chExt cx="0" cy="0"/>
+        </a:xfrm>
+      </p:grpSpPr>
+      <p:sp>
+        <p:nvSpPr>
+          <p:cNvPr id="2" name="Shape 0"/>
+          <p:cNvSpPr/>
+          <p:nvPr/>
+        </p:nvSpPr>
+        <p:spPr>
+          <a:xfrm>
+            <a:off x="10424160" y="-3108960"/>
+            <a:ext cx="4389120" cy="4389120"/>
+          </a:xfrm>
+          <a:prstGeom prst="ellipse">
+            <a:avLst/>
+          </a:prstGeom>
+          <a:solidFill>
+            <a:srgbClr val="3FB950">
+              <a:alpha val="7000"/>
+            </a:srgbClr>
+          </a:solidFill>
+          <a:ln w="12700">
+            <a:solidFill>
+              <a:srgbClr val="3FB950"/>
+            </a:solidFill>
+            <a:prstDash val="solid"/>
+          </a:ln>
+        </p:spPr>
+      </p:sp>
+      <p:sp>
+        <p:nvSpPr>
+          <p:cNvPr id="3" name="Text 1"/>
+          <p:cNvSpPr/>
+          <p:nvPr/>
+        </p:nvSpPr>
+        <p:spPr>
+          <a:xfrm>
+            <a:off x="548640" y="384048"/>
+            <a:ext cx="11064240" cy="237744"/>
+          </a:xfrm>
+          <a:prstGeom prst="rect">
+            <a:avLst/>
+          </a:prstGeom>
+          <a:noFill/>
+          <a:ln/>
+        </p:spPr>
+        <p:txBody>
+          <a:bodyPr wrap="square" lIns="0" tIns="0" rIns="0" bIns="0" rtlCol="0" anchor="t"/>
+          <a:lstStyle/>
+          <a:p>
+            <a:pPr indent="0" marL="0">
+              <a:buNone/>
+            </a:pPr>
+            <a:r>
+              <a:rPr lang="en-US" sz="1100" b="1" spc="200" kern="0" dirty="0">
+                <a:solidFill>
+                  <a:srgbClr val="E8551F"/>
+                </a:solidFill>
+                <a:latin typeface="Calibri" pitchFamily="34" charset="0"/>
+                <a:ea typeface="Calibri" pitchFamily="34" charset="-122"/>
+                <a:cs typeface="Calibri" pitchFamily="34" charset="-120"/>
+              </a:rPr>
+              <a:t>SIGN-OFF</a:t>
+            </a:r>
+            <a:endParaRPr lang="en-US" sz="1100" dirty="0"/>
+          </a:p>
+        </p:txBody>
+      </p:sp>
+      <p:sp>
+        <p:nvSpPr>
+          <p:cNvPr id="4" name="Text 2"/>
+          <p:cNvSpPr/>
+          <p:nvPr/>
+        </p:nvSpPr>
+        <p:spPr>
+          <a:xfrm>
+            <a:off x="548640" y="640080"/>
+            <a:ext cx="11064240" cy="640080"/>
+          </a:xfrm>
+          <a:prstGeom prst="rect">
+            <a:avLst/>
+          </a:prstGeom>
+          <a:noFill/>
+          <a:ln/>
+        </p:spPr>
+        <p:txBody>
+          <a:bodyPr wrap="square" lIns="0" tIns="0" rIns="0" bIns="0" rtlCol="0" anchor="t"/>
+          <a:lstStyle/>
+          <a:p>
+            <a:pPr indent="0" marL="0">
+              <a:buNone/>
+            </a:pPr>
+            <a:r>
+              <a:rPr lang="en-US" sz="3100" b="1" dirty="0">
+                <a:solidFill>
+                  <a:srgbClr val="FFFFFF"/>
+                </a:solidFill>
+                <a:latin typeface="Calibri" pitchFamily="34" charset="0"/>
+                <a:ea typeface="Calibri" pitchFamily="34" charset="-122"/>
+                <a:cs typeface="Calibri" pitchFamily="34" charset="-120"/>
+              </a:rPr>
+              <a:t>One line of evidence per test</a:t>
+            </a:r>
+            <a:endParaRPr lang="en-US" sz="3100" dirty="0"/>
+          </a:p>
+        </p:txBody>
+      </p:sp>
+      <p:sp>
+        <p:nvSpPr>
+          <p:cNvPr id="5" name="Shape 3"/>
+          <p:cNvSpPr/>
+          <p:nvPr/>
+        </p:nvSpPr>
+        <p:spPr>
+          <a:xfrm>
+            <a:off x="548640" y="1417320"/>
+            <a:ext cx="5349240" cy="548640"/>
+          </a:xfrm>
+          <a:prstGeom prst="roundRect">
+            <a:avLst>
+              <a:gd name="adj" fmla="val 8333"/>
+            </a:avLst>
+          </a:prstGeom>
+          <a:solidFill>
+            <a:srgbClr val="15171B"/>
+          </a:solidFill>
+          <a:ln w="12700">
+            <a:solidFill>
+              <a:srgbClr val="15171B"/>
+            </a:solidFill>
+            <a:prstDash val="solid"/>
+          </a:ln>
+        </p:spPr>
+      </p:sp>
+      <p:sp>
+        <p:nvSpPr>
+          <p:cNvPr id="6" name="Shape 4"/>
+          <p:cNvSpPr/>
+          <p:nvPr/>
+        </p:nvSpPr>
+        <p:spPr>
+          <a:xfrm>
+            <a:off x="749808" y="1536192"/>
+            <a:ext cx="310896" cy="310896"/>
+          </a:xfrm>
+          <a:prstGeom prst="roundRect">
+            <a:avLst>
+              <a:gd name="adj" fmla="val 26471"/>
+            </a:avLst>
+          </a:prstGeom>
+          <a:solidFill>
+            <a:srgbClr val="3FB950"/>
+          </a:solidFill>
+          <a:ln w="12700">
+            <a:solidFill>
+              <a:srgbClr val="3FB950"/>
+            </a:solidFill>
+            <a:prstDash val="solid"/>
+          </a:ln>
+        </p:spPr>
+      </p:sp>
+      <p:sp>
+        <p:nvSpPr>
+          <p:cNvPr id="7" name="Text 5"/>
+          <p:cNvSpPr/>
+          <p:nvPr/>
+        </p:nvSpPr>
+        <p:spPr>
+          <a:xfrm>
+            <a:off x="749808" y="1536192"/>
+            <a:ext cx="310896" cy="310896"/>
+          </a:xfrm>
+          <a:prstGeom prst="rect">
+            <a:avLst/>
+          </a:prstGeom>
+          <a:noFill/>
+          <a:ln/>
+        </p:spPr>
+        <p:txBody>
+          <a:bodyPr wrap="square" lIns="0" tIns="0" rIns="0" bIns="0" rtlCol="0" anchor="ctr"/>
+          <a:lstStyle/>
+          <a:p>
+            <a:pPr algn="ctr" indent="0" marL="0">
+              <a:buNone/>
+            </a:pPr>
+            <a:r>
+              <a:rPr lang="en-US" sz="1300" b="1" dirty="0">
+                <a:solidFill>
+                  <a:srgbClr val="FFFFFF"/>
+                </a:solidFill>
+                <a:latin typeface="Calibri" pitchFamily="34" charset="0"/>
+                <a:ea typeface="Calibri" pitchFamily="34" charset="-122"/>
+                <a:cs typeface="Calibri" pitchFamily="34" charset="-120"/>
+              </a:rPr>
+              <a:t>1</a:t>
+            </a:r>
+            <a:endParaRPr lang="en-US" sz="1300" dirty="0"/>
+          </a:p>
+        </p:txBody>
+      </p:sp>
+      <p:sp>
+        <p:nvSpPr>
+          <p:cNvPr id="8" name="Text 6"/>
+          <p:cNvSpPr/>
+          <p:nvPr/>
+        </p:nvSpPr>
+        <p:spPr>
+          <a:xfrm>
+            <a:off x="1225296" y="1554480"/>
+            <a:ext cx="4453128" cy="329184"/>
+          </a:xfrm>
+          <a:prstGeom prst="rect">
+            <a:avLst/>
+          </a:prstGeom>
+          <a:noFill/>
+          <a:ln/>
+        </p:spPr>
+        <p:txBody>
+          <a:bodyPr wrap="square" lIns="0" tIns="0" rIns="0" bIns="0" rtlCol="0" anchor="t"/>
+          <a:lstStyle/>
+          <a:p>
+            <a:pPr indent="0" marL="0">
+              <a:lnSpc>
+                <a:spcPts val="1200"/>
+              </a:lnSpc>
+              <a:buNone/>
+            </a:pPr>
+            <a:r>
+              <a:rPr lang="en-US" sz="1050" dirty="0">
+                <a:solidFill>
+                  <a:srgbClr val="B4B7BD"/>
+                </a:solidFill>
+                <a:latin typeface="Calibri" pitchFamily="34" charset="0"/>
+                <a:ea typeface="Calibri" pitchFamily="34" charset="-122"/>
+                <a:cs typeface="Calibri" pitchFamily="34" charset="-120"/>
+              </a:rPr>
+              <a:t>Test returns Success; devices list returns rows</a:t>
+            </a:r>
+            <a:endParaRPr lang="en-US" sz="1050" dirty="0"/>
+          </a:p>
+        </p:txBody>
+      </p:sp>
+      <p:sp>
+        <p:nvSpPr>
+          <p:cNvPr id="9" name="Shape 7"/>
+          <p:cNvSpPr/>
+          <p:nvPr/>
+        </p:nvSpPr>
+        <p:spPr>
+          <a:xfrm>
+            <a:off x="548640" y="2075688"/>
+            <a:ext cx="5349240" cy="548640"/>
+          </a:xfrm>
+          <a:prstGeom prst="roundRect">
+            <a:avLst>
+              <a:gd name="adj" fmla="val 8333"/>
+            </a:avLst>
+          </a:prstGeom>
+          <a:solidFill>
+            <a:srgbClr val="15171B"/>
+          </a:solidFill>
+          <a:ln w="12700">
+            <a:solidFill>
+              <a:srgbClr val="15171B"/>
+            </a:solidFill>
+            <a:prstDash val="solid"/>
+          </a:ln>
+        </p:spPr>
+      </p:sp>
+      <p:sp>
+        <p:nvSpPr>
+          <p:cNvPr id="10" name="Shape 8"/>
+          <p:cNvSpPr/>
+          <p:nvPr/>
+        </p:nvSpPr>
+        <p:spPr>
+          <a:xfrm>
+            <a:off x="749808" y="2194560"/>
+            <a:ext cx="310896" cy="310896"/>
+          </a:xfrm>
+          <a:prstGeom prst="roundRect">
+            <a:avLst>
+              <a:gd name="adj" fmla="val 26471"/>
+            </a:avLst>
+          </a:prstGeom>
+          <a:solidFill>
+            <a:srgbClr val="3FB950"/>
+          </a:solidFill>
+          <a:ln w="12700">
+            <a:solidFill>
+              <a:srgbClr val="3FB950"/>
+            </a:solidFill>
+            <a:prstDash val="solid"/>
+          </a:ln>
+        </p:spPr>
+      </p:sp>
+      <p:sp>
+        <p:nvSpPr>
+          <p:cNvPr id="11" name="Text 9"/>
+          <p:cNvSpPr/>
+          <p:nvPr/>
+        </p:nvSpPr>
+        <p:spPr>
+          <a:xfrm>
+            <a:off x="749808" y="2194560"/>
+            <a:ext cx="310896" cy="310896"/>
+          </a:xfrm>
+          <a:prstGeom prst="rect">
+            <a:avLst/>
+          </a:prstGeom>
+          <a:noFill/>
+          <a:ln/>
+        </p:spPr>
+        <p:txBody>
+          <a:bodyPr wrap="square" lIns="0" tIns="0" rIns="0" bIns="0" rtlCol="0" anchor="ctr"/>
+          <a:lstStyle/>
+          <a:p>
+            <a:pPr algn="ctr" indent="0" marL="0">
+              <a:buNone/>
+            </a:pPr>
+            <a:r>
+              <a:rPr lang="en-US" sz="1300" b="1" dirty="0">
+                <a:solidFill>
+                  <a:srgbClr val="FFFFFF"/>
+                </a:solidFill>
+                <a:latin typeface="Calibri" pitchFamily="34" charset="0"/>
+                <a:ea typeface="Calibri" pitchFamily="34" charset="-122"/>
+                <a:cs typeface="Calibri" pitchFamily="34" charset="-120"/>
+              </a:rPr>
+              <a:t>2</a:t>
+            </a:r>
+            <a:endParaRPr lang="en-US" sz="1300" dirty="0"/>
+          </a:p>
+        </p:txBody>
+      </p:sp>
+      <p:sp>
+        <p:nvSpPr>
+          <p:cNvPr id="12" name="Text 10"/>
+          <p:cNvSpPr/>
+          <p:nvPr/>
+        </p:nvSpPr>
+        <p:spPr>
+          <a:xfrm>
+            <a:off x="1225296" y="2212848"/>
+            <a:ext cx="4453128" cy="329184"/>
+          </a:xfrm>
+          <a:prstGeom prst="rect">
+            <a:avLst/>
+          </a:prstGeom>
+          <a:noFill/>
+          <a:ln/>
+        </p:spPr>
+        <p:txBody>
+          <a:bodyPr wrap="square" lIns="0" tIns="0" rIns="0" bIns="0" rtlCol="0" anchor="t"/>
+          <a:lstStyle/>
+          <a:p>
+            <a:pPr indent="0" marL="0">
+              <a:lnSpc>
+                <a:spcPts val="1200"/>
+              </a:lnSpc>
+              <a:buNone/>
+            </a:pPr>
+            <a:r>
+              <a:rPr lang="en-US" sz="1050" dirty="0">
+                <a:solidFill>
+                  <a:srgbClr val="B4B7BD"/>
+                </a:solidFill>
+                <a:latin typeface="Calibri" pitchFamily="34" charset="0"/>
+                <a:ea typeface="Calibri" pitchFamily="34" charset="-122"/>
+                <a:cs typeface="Calibri" pitchFamily="34" charset="-120"/>
+              </a:rPr>
+              <a:t>koi_koi_raw grows between collection cycles</a:t>
+            </a:r>
+            <a:endParaRPr lang="en-US" sz="1050" dirty="0"/>
+          </a:p>
+        </p:txBody>
+      </p:sp>
+      <p:sp>
+        <p:nvSpPr>
+          <p:cNvPr id="13" name="Shape 11"/>
+          <p:cNvSpPr/>
+          <p:nvPr/>
+        </p:nvSpPr>
+        <p:spPr>
+          <a:xfrm>
+            <a:off x="548640" y="2734056"/>
+            <a:ext cx="5349240" cy="548640"/>
+          </a:xfrm>
+          <a:prstGeom prst="roundRect">
+            <a:avLst>
+              <a:gd name="adj" fmla="val 8333"/>
+            </a:avLst>
+          </a:prstGeom>
+          <a:solidFill>
+            <a:srgbClr val="15171B"/>
+          </a:solidFill>
+          <a:ln w="12700">
+            <a:solidFill>
+              <a:srgbClr val="15171B"/>
+            </a:solidFill>
+            <a:prstDash val="solid"/>
+          </a:ln>
+        </p:spPr>
+      </p:sp>
+      <p:sp>
+        <p:nvSpPr>
+          <p:cNvPr id="14" name="Shape 12"/>
+          <p:cNvSpPr/>
+          <p:nvPr/>
+        </p:nvSpPr>
+        <p:spPr>
+          <a:xfrm>
+            <a:off x="749808" y="2852928"/>
+            <a:ext cx="310896" cy="310896"/>
+          </a:xfrm>
+          <a:prstGeom prst="roundRect">
+            <a:avLst>
+              <a:gd name="adj" fmla="val 26471"/>
+            </a:avLst>
+          </a:prstGeom>
+          <a:solidFill>
+            <a:srgbClr val="3FB950"/>
+          </a:solidFill>
+          <a:ln w="12700">
+            <a:solidFill>
+              <a:srgbClr val="3FB950"/>
+            </a:solidFill>
+            <a:prstDash val="solid"/>
+          </a:ln>
+        </p:spPr>
+      </p:sp>
+      <p:sp>
+        <p:nvSpPr>
+          <p:cNvPr id="15" name="Text 13"/>
+          <p:cNvSpPr/>
+          <p:nvPr/>
+        </p:nvSpPr>
+        <p:spPr>
+          <a:xfrm>
+            <a:off x="749808" y="2852928"/>
+            <a:ext cx="310896" cy="310896"/>
+          </a:xfrm>
+          <a:prstGeom prst="rect">
+            <a:avLst/>
+          </a:prstGeom>
+          <a:noFill/>
+          <a:ln/>
+        </p:spPr>
+        <p:txBody>
+          <a:bodyPr wrap="square" lIns="0" tIns="0" rIns="0" bIns="0" rtlCol="0" anchor="ctr"/>
+          <a:lstStyle/>
+          <a:p>
+            <a:pPr algn="ctr" indent="0" marL="0">
+              <a:buNone/>
+            </a:pPr>
+            <a:r>
+              <a:rPr lang="en-US" sz="1300" b="1" dirty="0">
+                <a:solidFill>
+                  <a:srgbClr val="FFFFFF"/>
+                </a:solidFill>
+                <a:latin typeface="Calibri" pitchFamily="34" charset="0"/>
+                <a:ea typeface="Calibri" pitchFamily="34" charset="-122"/>
+                <a:cs typeface="Calibri" pitchFamily="34" charset="-120"/>
+              </a:rPr>
+              <a:t>3</a:t>
+            </a:r>
+            <a:endParaRPr lang="en-US" sz="1300" dirty="0"/>
+          </a:p>
+        </p:txBody>
+      </p:sp>
+      <p:sp>
+        <p:nvSpPr>
+          <p:cNvPr id="16" name="Text 14"/>
+          <p:cNvSpPr/>
+          <p:nvPr/>
+        </p:nvSpPr>
+        <p:spPr>
+          <a:xfrm>
+            <a:off x="1225296" y="2871216"/>
+            <a:ext cx="4453128" cy="329184"/>
+          </a:xfrm>
+          <a:prstGeom prst="rect">
+            <a:avLst/>
+          </a:prstGeom>
+          <a:noFill/>
+          <a:ln/>
+        </p:spPr>
+        <p:txBody>
+          <a:bodyPr wrap="square" lIns="0" tIns="0" rIns="0" bIns="0" rtlCol="0" anchor="t"/>
+          <a:lstStyle/>
+          <a:p>
+            <a:pPr indent="0" marL="0">
+              <a:lnSpc>
+                <a:spcPts val="1200"/>
+              </a:lnSpc>
+              <a:buNone/>
+            </a:pPr>
+            <a:r>
+              <a:rPr lang="en-US" sz="1050" dirty="0">
+                <a:solidFill>
+                  <a:srgbClr val="B4B7BD"/>
+                </a:solidFill>
+                <a:latin typeface="Calibri" pitchFamily="34" charset="0"/>
+                <a:ea typeface="Calibri" pitchFamily="34" charset="-122"/>
+                <a:cs typeface="Calibri" pitchFamily="34" charset="-120"/>
+              </a:rPr>
+              <a:t>Distinct alerts far below raw rows — and that is correct</a:t>
+            </a:r>
+            <a:endParaRPr lang="en-US" sz="1050" dirty="0"/>
+          </a:p>
+        </p:txBody>
+      </p:sp>
+      <p:sp>
+        <p:nvSpPr>
+          <p:cNvPr id="17" name="Shape 15"/>
+          <p:cNvSpPr/>
+          <p:nvPr/>
+        </p:nvSpPr>
+        <p:spPr>
+          <a:xfrm>
+            <a:off x="548640" y="3392424"/>
+            <a:ext cx="5349240" cy="548640"/>
+          </a:xfrm>
+          <a:prstGeom prst="roundRect">
+            <a:avLst>
+              <a:gd name="adj" fmla="val 8333"/>
+            </a:avLst>
+          </a:prstGeom>
+          <a:solidFill>
+            <a:srgbClr val="15171B"/>
+          </a:solidFill>
+          <a:ln w="12700">
+            <a:solidFill>
+              <a:srgbClr val="15171B"/>
+            </a:solidFill>
+            <a:prstDash val="solid"/>
+          </a:ln>
+        </p:spPr>
+      </p:sp>
+      <p:sp>
+        <p:nvSpPr>
+          <p:cNvPr id="18" name="Shape 16"/>
+          <p:cNvSpPr/>
+          <p:nvPr/>
+        </p:nvSpPr>
+        <p:spPr>
+          <a:xfrm>
+            <a:off x="749808" y="3511296"/>
+            <a:ext cx="310896" cy="310896"/>
+          </a:xfrm>
+          <a:prstGeom prst="roundRect">
+            <a:avLst>
+              <a:gd name="adj" fmla="val 26471"/>
+            </a:avLst>
+          </a:prstGeom>
+          <a:solidFill>
+            <a:srgbClr val="3FB950"/>
+          </a:solidFill>
+          <a:ln w="12700">
+            <a:solidFill>
+              <a:srgbClr val="3FB950"/>
+            </a:solidFill>
+            <a:prstDash val="solid"/>
+          </a:ln>
+        </p:spPr>
+      </p:sp>
+      <p:sp>
+        <p:nvSpPr>
+          <p:cNvPr id="19" name="Text 17"/>
+          <p:cNvSpPr/>
+          <p:nvPr/>
+        </p:nvSpPr>
+        <p:spPr>
+          <a:xfrm>
+            <a:off x="749808" y="3511296"/>
+            <a:ext cx="310896" cy="310896"/>
+          </a:xfrm>
+          <a:prstGeom prst="rect">
+            <a:avLst/>
+          </a:prstGeom>
+          <a:noFill/>
+          <a:ln/>
+        </p:spPr>
+        <p:txBody>
+          <a:bodyPr wrap="square" lIns="0" tIns="0" rIns="0" bIns="0" rtlCol="0" anchor="ctr"/>
+          <a:lstStyle/>
+          <a:p>
+            <a:pPr algn="ctr" indent="0" marL="0">
+              <a:buNone/>
+            </a:pPr>
+            <a:r>
+              <a:rPr lang="en-US" sz="1300" b="1" dirty="0">
+                <a:solidFill>
+                  <a:srgbClr val="FFFFFF"/>
+                </a:solidFill>
+                <a:latin typeface="Calibri" pitchFamily="34" charset="0"/>
+                <a:ea typeface="Calibri" pitchFamily="34" charset="-122"/>
+                <a:cs typeface="Calibri" pitchFamily="34" charset="-120"/>
+              </a:rPr>
+              <a:t>4</a:t>
+            </a:r>
+            <a:endParaRPr lang="en-US" sz="1300" dirty="0"/>
+          </a:p>
+        </p:txBody>
+      </p:sp>
+      <p:sp>
+        <p:nvSpPr>
+          <p:cNvPr id="20" name="Text 18"/>
+          <p:cNvSpPr/>
+          <p:nvPr/>
+        </p:nvSpPr>
+        <p:spPr>
+          <a:xfrm>
+            <a:off x="1225296" y="3529584"/>
+            <a:ext cx="4453128" cy="329184"/>
+          </a:xfrm>
+          <a:prstGeom prst="rect">
+            <a:avLst/>
+          </a:prstGeom>
+          <a:noFill/>
+          <a:ln/>
+        </p:spPr>
+        <p:txBody>
+          <a:bodyPr wrap="square" lIns="0" tIns="0" rIns="0" bIns="0" rtlCol="0" anchor="t"/>
+          <a:lstStyle/>
+          <a:p>
+            <a:pPr indent="0" marL="0">
+              <a:lnSpc>
+                <a:spcPts val="1200"/>
+              </a:lnSpc>
+              <a:buNone/>
+            </a:pPr>
+            <a:r>
+              <a:rPr lang="en-US" sz="1050" dirty="0">
+                <a:solidFill>
+                  <a:srgbClr val="B4B7BD"/>
+                </a:solidFill>
+                <a:latin typeface="Calibri" pitchFamily="34" charset="0"/>
+                <a:ea typeface="Calibri" pitchFamily="34" charset="-122"/>
+                <a:cs typeface="Calibri" pitchFamily="34" charset="-120"/>
+              </a:rPr>
+              <a:t>Dashboard renders; counts stay stable across fetches</a:t>
+            </a:r>
+            <a:endParaRPr lang="en-US" sz="1050" dirty="0"/>
+          </a:p>
+        </p:txBody>
+      </p:sp>
+      <p:sp>
+        <p:nvSpPr>
+          <p:cNvPr id="21" name="Shape 19"/>
+          <p:cNvSpPr/>
+          <p:nvPr/>
+        </p:nvSpPr>
+        <p:spPr>
+          <a:xfrm>
+            <a:off x="548640" y="4050792"/>
+            <a:ext cx="5349240" cy="548640"/>
+          </a:xfrm>
+          <a:prstGeom prst="roundRect">
+            <a:avLst>
+              <a:gd name="adj" fmla="val 8333"/>
+            </a:avLst>
+          </a:prstGeom>
+          <a:solidFill>
+            <a:srgbClr val="15171B"/>
+          </a:solidFill>
+          <a:ln w="12700">
+            <a:solidFill>
+              <a:srgbClr val="15171B"/>
+            </a:solidFill>
+            <a:prstDash val="solid"/>
+          </a:ln>
+        </p:spPr>
+      </p:sp>
+      <p:sp>
+        <p:nvSpPr>
+          <p:cNvPr id="22" name="Shape 20"/>
+          <p:cNvSpPr/>
+          <p:nvPr/>
+        </p:nvSpPr>
+        <p:spPr>
+          <a:xfrm>
+            <a:off x="749808" y="4169664"/>
+            <a:ext cx="310896" cy="310896"/>
+          </a:xfrm>
+          <a:prstGeom prst="roundRect">
+            <a:avLst>
+              <a:gd name="adj" fmla="val 26471"/>
+            </a:avLst>
+          </a:prstGeom>
+          <a:solidFill>
+            <a:srgbClr val="3FB950"/>
+          </a:solidFill>
+          <a:ln w="12700">
+            <a:solidFill>
+              <a:srgbClr val="3FB950"/>
+            </a:solidFill>
+            <a:prstDash val="solid"/>
+          </a:ln>
+        </p:spPr>
+      </p:sp>
+      <p:sp>
+        <p:nvSpPr>
+          <p:cNvPr id="23" name="Text 21"/>
+          <p:cNvSpPr/>
+          <p:nvPr/>
+        </p:nvSpPr>
+        <p:spPr>
+          <a:xfrm>
+            <a:off x="749808" y="4169664"/>
+            <a:ext cx="310896" cy="310896"/>
+          </a:xfrm>
+          <a:prstGeom prst="rect">
+            <a:avLst/>
+          </a:prstGeom>
+          <a:noFill/>
+          <a:ln/>
+        </p:spPr>
+        <p:txBody>
+          <a:bodyPr wrap="square" lIns="0" tIns="0" rIns="0" bIns="0" rtlCol="0" anchor="ctr"/>
+          <a:lstStyle/>
+          <a:p>
+            <a:pPr algn="ctr" indent="0" marL="0">
+              <a:buNone/>
+            </a:pPr>
+            <a:r>
+              <a:rPr lang="en-US" sz="1300" b="1" dirty="0">
+                <a:solidFill>
+                  <a:srgbClr val="FFFFFF"/>
+                </a:solidFill>
+                <a:latin typeface="Calibri" pitchFamily="34" charset="0"/>
+                <a:ea typeface="Calibri" pitchFamily="34" charset="-122"/>
+                <a:cs typeface="Calibri" pitchFamily="34" charset="-120"/>
+              </a:rPr>
+              <a:t>5</a:t>
+            </a:r>
+            <a:endParaRPr lang="en-US" sz="1300" dirty="0"/>
+          </a:p>
+        </p:txBody>
+      </p:sp>
+      <p:sp>
+        <p:nvSpPr>
+          <p:cNvPr id="24" name="Text 22"/>
+          <p:cNvSpPr/>
+          <p:nvPr/>
+        </p:nvSpPr>
+        <p:spPr>
+          <a:xfrm>
+            <a:off x="1225296" y="4187952"/>
+            <a:ext cx="4453128" cy="329184"/>
+          </a:xfrm>
+          <a:prstGeom prst="rect">
+            <a:avLst/>
+          </a:prstGeom>
+          <a:noFill/>
+          <a:ln/>
+        </p:spPr>
+        <p:txBody>
+          <a:bodyPr wrap="square" lIns="0" tIns="0" rIns="0" bIns="0" rtlCol="0" anchor="t"/>
+          <a:lstStyle/>
+          <a:p>
+            <a:pPr indent="0" marL="0">
+              <a:lnSpc>
+                <a:spcPts val="1200"/>
+              </a:lnSpc>
+              <a:buNone/>
+            </a:pPr>
+            <a:r>
+              <a:rPr lang="en-US" sz="1050" dirty="0">
+                <a:solidFill>
+                  <a:srgbClr val="B4B7BD"/>
+                </a:solidFill>
+                <a:latin typeface="Calibri" pitchFamily="34" charset="0"/>
+                <a:ea typeface="Calibri" pitchFamily="34" charset="-122"/>
+                <a:cs typeface="Calibri" pitchFamily="34" charset="-120"/>
+              </a:rPr>
+              <a:t>A verdict is reached; low risk auto-closes</a:t>
+            </a:r>
+            <a:endParaRPr lang="en-US" sz="1050" dirty="0"/>
+          </a:p>
+        </p:txBody>
+      </p:sp>
+      <p:sp>
+        <p:nvSpPr>
+          <p:cNvPr id="25" name="Shape 23"/>
+          <p:cNvSpPr/>
+          <p:nvPr/>
+        </p:nvSpPr>
+        <p:spPr>
+          <a:xfrm>
+            <a:off x="548640" y="4709160"/>
+            <a:ext cx="5349240" cy="548640"/>
+          </a:xfrm>
+          <a:prstGeom prst="roundRect">
+            <a:avLst>
+              <a:gd name="adj" fmla="val 8333"/>
+            </a:avLst>
+          </a:prstGeom>
+          <a:solidFill>
+            <a:srgbClr val="15171B"/>
+          </a:solidFill>
+          <a:ln w="12700">
+            <a:solidFill>
+              <a:srgbClr val="15171B"/>
+            </a:solidFill>
+            <a:prstDash val="solid"/>
+          </a:ln>
+        </p:spPr>
+      </p:sp>
+      <p:sp>
+        <p:nvSpPr>
+          <p:cNvPr id="26" name="Shape 24"/>
+          <p:cNvSpPr/>
+          <p:nvPr/>
+        </p:nvSpPr>
+        <p:spPr>
+          <a:xfrm>
+            <a:off x="749808" y="4828032"/>
+            <a:ext cx="310896" cy="310896"/>
+          </a:xfrm>
+          <a:prstGeom prst="roundRect">
+            <a:avLst>
+              <a:gd name="adj" fmla="val 26471"/>
+            </a:avLst>
+          </a:prstGeom>
+          <a:solidFill>
+            <a:srgbClr val="3FB950"/>
+          </a:solidFill>
+          <a:ln w="12700">
+            <a:solidFill>
+              <a:srgbClr val="3FB950"/>
+            </a:solidFill>
+            <a:prstDash val="solid"/>
+          </a:ln>
+        </p:spPr>
+      </p:sp>
+      <p:sp>
+        <p:nvSpPr>
+          <p:cNvPr id="27" name="Text 25"/>
+          <p:cNvSpPr/>
+          <p:nvPr/>
+        </p:nvSpPr>
+        <p:spPr>
+          <a:xfrm>
+            <a:off x="749808" y="4828032"/>
+            <a:ext cx="310896" cy="310896"/>
+          </a:xfrm>
+          <a:prstGeom prst="rect">
+            <a:avLst/>
+          </a:prstGeom>
+          <a:noFill/>
+          <a:ln/>
+        </p:spPr>
+        <p:txBody>
+          <a:bodyPr wrap="square" lIns="0" tIns="0" rIns="0" bIns="0" rtlCol="0" anchor="ctr"/>
+          <a:lstStyle/>
+          <a:p>
+            <a:pPr algn="ctr" indent="0" marL="0">
+              <a:buNone/>
+            </a:pPr>
+            <a:r>
+              <a:rPr lang="en-US" sz="1300" b="1" dirty="0">
+                <a:solidFill>
+                  <a:srgbClr val="FFFFFF"/>
+                </a:solidFill>
+                <a:latin typeface="Calibri" pitchFamily="34" charset="0"/>
+                <a:ea typeface="Calibri" pitchFamily="34" charset="-122"/>
+                <a:cs typeface="Calibri" pitchFamily="34" charset="-120"/>
+              </a:rPr>
+              <a:t>6</a:t>
+            </a:r>
+            <a:endParaRPr lang="en-US" sz="1300" dirty="0"/>
+          </a:p>
+        </p:txBody>
+      </p:sp>
+      <p:sp>
+        <p:nvSpPr>
+          <p:cNvPr id="28" name="Text 26"/>
+          <p:cNvSpPr/>
+          <p:nvPr/>
+        </p:nvSpPr>
+        <p:spPr>
+          <a:xfrm>
+            <a:off x="1225296" y="4846320"/>
+            <a:ext cx="4453128" cy="329184"/>
+          </a:xfrm>
+          <a:prstGeom prst="rect">
+            <a:avLst/>
+          </a:prstGeom>
+          <a:noFill/>
+          <a:ln/>
+        </p:spPr>
+        <p:txBody>
+          <a:bodyPr wrap="square" lIns="0" tIns="0" rIns="0" bIns="0" rtlCol="0" anchor="t"/>
+          <a:lstStyle/>
+          <a:p>
+            <a:pPr indent="0" marL="0">
+              <a:lnSpc>
+                <a:spcPts val="1200"/>
+              </a:lnSpc>
+              <a:buNone/>
+            </a:pPr>
+            <a:r>
+              <a:rPr lang="en-US" sz="1050" dirty="0">
+                <a:solidFill>
+                  <a:srgbClr val="B4B7BD"/>
+                </a:solidFill>
+                <a:latin typeface="Calibri" pitchFamily="34" charset="0"/>
+                <a:ea typeface="Calibri" pitchFamily="34" charset="-122"/>
+                <a:cs typeface="Calibri" pitchFamily="34" charset="-120"/>
+              </a:rPr>
+              <a:t>Investigation shows catalog risk and both governance counts</a:t>
+            </a:r>
+            <a:endParaRPr lang="en-US" sz="1050" dirty="0"/>
+          </a:p>
+        </p:txBody>
+      </p:sp>
+      <p:sp>
+        <p:nvSpPr>
+          <p:cNvPr id="29" name="Shape 27"/>
+          <p:cNvSpPr/>
+          <p:nvPr/>
+        </p:nvSpPr>
+        <p:spPr>
+          <a:xfrm>
+            <a:off x="6263640" y="1417320"/>
+            <a:ext cx="5349240" cy="548640"/>
+          </a:xfrm>
+          <a:prstGeom prst="roundRect">
+            <a:avLst>
+              <a:gd name="adj" fmla="val 8333"/>
+            </a:avLst>
+          </a:prstGeom>
+          <a:solidFill>
+            <a:srgbClr val="15171B"/>
+          </a:solidFill>
+          <a:ln w="12700">
+            <a:solidFill>
+              <a:srgbClr val="15171B"/>
+            </a:solidFill>
+            <a:prstDash val="solid"/>
+          </a:ln>
+        </p:spPr>
+      </p:sp>
+      <p:sp>
+        <p:nvSpPr>
+          <p:cNvPr id="30" name="Shape 28"/>
+          <p:cNvSpPr/>
+          <p:nvPr/>
+        </p:nvSpPr>
+        <p:spPr>
+          <a:xfrm>
+            <a:off x="6464808" y="1536192"/>
+            <a:ext cx="310896" cy="310896"/>
+          </a:xfrm>
+          <a:prstGeom prst="roundRect">
+            <a:avLst>
+              <a:gd name="adj" fmla="val 26471"/>
+            </a:avLst>
+          </a:prstGeom>
+          <a:solidFill>
+            <a:srgbClr val="3FB950"/>
+          </a:solidFill>
+          <a:ln w="12700">
+            <a:solidFill>
+              <a:srgbClr val="3FB950"/>
+            </a:solidFill>
+            <a:prstDash val="solid"/>
+          </a:ln>
+        </p:spPr>
+      </p:sp>
+      <p:sp>
+        <p:nvSpPr>
+          <p:cNvPr id="31" name="Text 29"/>
+          <p:cNvSpPr/>
+          <p:nvPr/>
+        </p:nvSpPr>
+        <p:spPr>
+          <a:xfrm>
+            <a:off x="6464808" y="1536192"/>
+            <a:ext cx="310896" cy="310896"/>
+          </a:xfrm>
+          <a:prstGeom prst="rect">
+            <a:avLst/>
+          </a:prstGeom>
+          <a:noFill/>
+          <a:ln/>
+        </p:spPr>
+        <p:txBody>
+          <a:bodyPr wrap="square" lIns="0" tIns="0" rIns="0" bIns="0" rtlCol="0" anchor="ctr"/>
+          <a:lstStyle/>
+          <a:p>
+            <a:pPr algn="ctr" indent="0" marL="0">
+              <a:buNone/>
+            </a:pPr>
+            <a:r>
+              <a:rPr lang="en-US" sz="1300" b="1" dirty="0">
+                <a:solidFill>
+                  <a:srgbClr val="FFFFFF"/>
+                </a:solidFill>
+                <a:latin typeface="Calibri" pitchFamily="34" charset="0"/>
+                <a:ea typeface="Calibri" pitchFamily="34" charset="-122"/>
+                <a:cs typeface="Calibri" pitchFamily="34" charset="-120"/>
+              </a:rPr>
+              <a:t>7</a:t>
+            </a:r>
+            <a:endParaRPr lang="en-US" sz="1300" dirty="0"/>
+          </a:p>
+        </p:txBody>
+      </p:sp>
+      <p:sp>
+        <p:nvSpPr>
+          <p:cNvPr id="32" name="Text 30"/>
+          <p:cNvSpPr/>
+          <p:nvPr/>
+        </p:nvSpPr>
+        <p:spPr>
+          <a:xfrm>
+            <a:off x="6940296" y="1554480"/>
+            <a:ext cx="4453128" cy="329184"/>
+          </a:xfrm>
+          <a:prstGeom prst="rect">
+            <a:avLst/>
+          </a:prstGeom>
+          <a:noFill/>
+          <a:ln/>
+        </p:spPr>
+        <p:txBody>
+          <a:bodyPr wrap="square" lIns="0" tIns="0" rIns="0" bIns="0" rtlCol="0" anchor="t"/>
+          <a:lstStyle/>
+          <a:p>
+            <a:pPr indent="0" marL="0">
+              <a:lnSpc>
+                <a:spcPts val="1200"/>
+              </a:lnSpc>
+              <a:buNone/>
+            </a:pPr>
+            <a:r>
+              <a:rPr lang="en-US" sz="1050" dirty="0">
+                <a:solidFill>
+                  <a:srgbClr val="B4B7BD"/>
+                </a:solidFill>
+                <a:latin typeface="Calibri" pitchFamily="34" charset="0"/>
+                <a:ea typeface="Calibri" pitchFamily="34" charset="-122"/>
+                <a:cs typeface="Calibri" pitchFamily="34" charset="-120"/>
+              </a:rPr>
+              <a:t>Response parks on approval; blocklist untouched until approved</a:t>
+            </a:r>
+            <a:endParaRPr lang="en-US" sz="1050" dirty="0"/>
+          </a:p>
+        </p:txBody>
+      </p:sp>
+      <p:sp>
+        <p:nvSpPr>
+          <p:cNvPr id="33" name="Shape 31"/>
+          <p:cNvSpPr/>
+          <p:nvPr/>
+        </p:nvSpPr>
+        <p:spPr>
+          <a:xfrm>
+            <a:off x="6263640" y="2075688"/>
+            <a:ext cx="5349240" cy="548640"/>
+          </a:xfrm>
+          <a:prstGeom prst="roundRect">
+            <a:avLst>
+              <a:gd name="adj" fmla="val 8333"/>
+            </a:avLst>
+          </a:prstGeom>
+          <a:solidFill>
+            <a:srgbClr val="15171B"/>
+          </a:solidFill>
+          <a:ln w="12700">
+            <a:solidFill>
+              <a:srgbClr val="15171B"/>
+            </a:solidFill>
+            <a:prstDash val="solid"/>
+          </a:ln>
+        </p:spPr>
+      </p:sp>
+      <p:sp>
+        <p:nvSpPr>
+          <p:cNvPr id="34" name="Shape 32"/>
+          <p:cNvSpPr/>
+          <p:nvPr/>
+        </p:nvSpPr>
+        <p:spPr>
+          <a:xfrm>
+            <a:off x="6464808" y="2194560"/>
+            <a:ext cx="310896" cy="310896"/>
+          </a:xfrm>
+          <a:prstGeom prst="roundRect">
+            <a:avLst>
+              <a:gd name="adj" fmla="val 26471"/>
+            </a:avLst>
+          </a:prstGeom>
+          <a:solidFill>
+            <a:srgbClr val="3FB950"/>
+          </a:solidFill>
+          <a:ln w="12700">
+            <a:solidFill>
+              <a:srgbClr val="3FB950"/>
+            </a:solidFill>
+            <a:prstDash val="solid"/>
+          </a:ln>
+        </p:spPr>
+      </p:sp>
+      <p:sp>
+        <p:nvSpPr>
+          <p:cNvPr id="35" name="Text 33"/>
+          <p:cNvSpPr/>
+          <p:nvPr/>
+        </p:nvSpPr>
+        <p:spPr>
+          <a:xfrm>
+            <a:off x="6464808" y="2194560"/>
+            <a:ext cx="310896" cy="310896"/>
+          </a:xfrm>
+          <a:prstGeom prst="rect">
+            <a:avLst/>
+          </a:prstGeom>
+          <a:noFill/>
+          <a:ln/>
+        </p:spPr>
+        <p:txBody>
+          <a:bodyPr wrap="square" lIns="0" tIns="0" rIns="0" bIns="0" rtlCol="0" anchor="ctr"/>
+          <a:lstStyle/>
+          <a:p>
+            <a:pPr algn="ctr" indent="0" marL="0">
+              <a:buNone/>
+            </a:pPr>
+            <a:r>
+              <a:rPr lang="en-US" sz="1300" b="1" dirty="0">
+                <a:solidFill>
+                  <a:srgbClr val="FFFFFF"/>
+                </a:solidFill>
+                <a:latin typeface="Calibri" pitchFamily="34" charset="0"/>
+                <a:ea typeface="Calibri" pitchFamily="34" charset="-122"/>
+                <a:cs typeface="Calibri" pitchFamily="34" charset="-120"/>
+              </a:rPr>
+              <a:t>8</a:t>
+            </a:r>
+            <a:endParaRPr lang="en-US" sz="1300" dirty="0"/>
+          </a:p>
+        </p:txBody>
+      </p:sp>
+      <p:sp>
+        <p:nvSpPr>
+          <p:cNvPr id="36" name="Text 34"/>
+          <p:cNvSpPr/>
+          <p:nvPr/>
+        </p:nvSpPr>
+        <p:spPr>
+          <a:xfrm>
+            <a:off x="6940296" y="2212848"/>
+            <a:ext cx="4453128" cy="329184"/>
+          </a:xfrm>
+          <a:prstGeom prst="rect">
+            <a:avLst/>
+          </a:prstGeom>
+          <a:noFill/>
+          <a:ln/>
+        </p:spPr>
+        <p:txBody>
+          <a:bodyPr wrap="square" lIns="0" tIns="0" rIns="0" bIns="0" rtlCol="0" anchor="t"/>
+          <a:lstStyle/>
+          <a:p>
+            <a:pPr indent="0" marL="0">
+              <a:lnSpc>
+                <a:spcPts val="1200"/>
+              </a:lnSpc>
+              <a:buNone/>
+            </a:pPr>
+            <a:r>
+              <a:rPr lang="en-US" sz="1050" dirty="0">
+                <a:solidFill>
+                  <a:srgbClr val="B4B7BD"/>
+                </a:solidFill>
+                <a:latin typeface="Calibri" pitchFamily="34" charset="0"/>
+                <a:ea typeface="Calibri" pitchFamily="34" charset="-122"/>
+                <a:cs typeface="Calibri" pitchFamily="34" charset="-120"/>
+              </a:rPr>
+              <a:t>MCP audit returns servers at or above the threshold</a:t>
+            </a:r>
+            <a:endParaRPr lang="en-US" sz="1050" dirty="0"/>
+          </a:p>
+        </p:txBody>
+      </p:sp>
+      <p:sp>
+        <p:nvSpPr>
+          <p:cNvPr id="37" name="Shape 35"/>
+          <p:cNvSpPr/>
+          <p:nvPr/>
+        </p:nvSpPr>
+        <p:spPr>
+          <a:xfrm>
+            <a:off x="6263640" y="2734056"/>
+            <a:ext cx="5349240" cy="548640"/>
+          </a:xfrm>
+          <a:prstGeom prst="roundRect">
+            <a:avLst>
+              <a:gd name="adj" fmla="val 8333"/>
+            </a:avLst>
+          </a:prstGeom>
+          <a:solidFill>
+            <a:srgbClr val="15171B"/>
+          </a:solidFill>
+          <a:ln w="12700">
+            <a:solidFill>
+              <a:srgbClr val="15171B"/>
+            </a:solidFill>
+            <a:prstDash val="solid"/>
+          </a:ln>
+        </p:spPr>
+      </p:sp>
+      <p:sp>
+        <p:nvSpPr>
+          <p:cNvPr id="38" name="Shape 36"/>
+          <p:cNvSpPr/>
+          <p:nvPr/>
+        </p:nvSpPr>
+        <p:spPr>
+          <a:xfrm>
+            <a:off x="6464808" y="2852928"/>
+            <a:ext cx="310896" cy="310896"/>
+          </a:xfrm>
+          <a:prstGeom prst="roundRect">
+            <a:avLst>
+              <a:gd name="adj" fmla="val 26471"/>
+            </a:avLst>
+          </a:prstGeom>
+          <a:solidFill>
+            <a:srgbClr val="3FB950"/>
+          </a:solidFill>
+          <a:ln w="12700">
+            <a:solidFill>
+              <a:srgbClr val="3FB950"/>
+            </a:solidFill>
+            <a:prstDash val="solid"/>
+          </a:ln>
+        </p:spPr>
+      </p:sp>
+      <p:sp>
+        <p:nvSpPr>
+          <p:cNvPr id="39" name="Text 37"/>
+          <p:cNvSpPr/>
+          <p:nvPr/>
+        </p:nvSpPr>
+        <p:spPr>
+          <a:xfrm>
+            <a:off x="6464808" y="2852928"/>
+            <a:ext cx="310896" cy="310896"/>
+          </a:xfrm>
+          <a:prstGeom prst="rect">
+            <a:avLst/>
+          </a:prstGeom>
+          <a:noFill/>
+          <a:ln/>
+        </p:spPr>
+        <p:txBody>
+          <a:bodyPr wrap="square" lIns="0" tIns="0" rIns="0" bIns="0" rtlCol="0" anchor="ctr"/>
+          <a:lstStyle/>
+          <a:p>
+            <a:pPr algn="ctr" indent="0" marL="0">
+              <a:buNone/>
+            </a:pPr>
+            <a:r>
+              <a:rPr lang="en-US" sz="1300" b="1" dirty="0">
+                <a:solidFill>
+                  <a:srgbClr val="FFFFFF"/>
+                </a:solidFill>
+                <a:latin typeface="Calibri" pitchFamily="34" charset="0"/>
+                <a:ea typeface="Calibri" pitchFamily="34" charset="-122"/>
+                <a:cs typeface="Calibri" pitchFamily="34" charset="-120"/>
+              </a:rPr>
+              <a:t>9</a:t>
+            </a:r>
+            <a:endParaRPr lang="en-US" sz="1300" dirty="0"/>
+          </a:p>
+        </p:txBody>
+      </p:sp>
+      <p:sp>
+        <p:nvSpPr>
+          <p:cNvPr id="40" name="Text 38"/>
+          <p:cNvSpPr/>
+          <p:nvPr/>
+        </p:nvSpPr>
+        <p:spPr>
+          <a:xfrm>
+            <a:off x="6940296" y="2871216"/>
+            <a:ext cx="4453128" cy="329184"/>
+          </a:xfrm>
+          <a:prstGeom prst="rect">
+            <a:avLst/>
+          </a:prstGeom>
+          <a:noFill/>
+          <a:ln/>
+        </p:spPr>
+        <p:txBody>
+          <a:bodyPr wrap="square" lIns="0" tIns="0" rIns="0" bIns="0" rtlCol="0" anchor="t"/>
+          <a:lstStyle/>
+          <a:p>
+            <a:pPr indent="0" marL="0">
+              <a:lnSpc>
+                <a:spcPts val="1200"/>
+              </a:lnSpc>
+              <a:buNone/>
+            </a:pPr>
+            <a:r>
+              <a:rPr lang="en-US" sz="1050" dirty="0">
+                <a:solidFill>
+                  <a:srgbClr val="B4B7BD"/>
+                </a:solidFill>
+                <a:latin typeface="Calibri" pitchFamily="34" charset="0"/>
+                <a:ea typeface="Calibri" pitchFamily="34" charset="-122"/>
+                <a:cs typeface="Calibri" pitchFamily="34" charset="-120"/>
+              </a:rPr>
+              <a:t>Tracker List is created and fills with endpoints</a:t>
+            </a:r>
+            <a:endParaRPr lang="en-US" sz="1050" dirty="0"/>
+          </a:p>
+        </p:txBody>
+      </p:sp>
+      <p:sp>
+        <p:nvSpPr>
+          <p:cNvPr id="41" name="Shape 39"/>
+          <p:cNvSpPr/>
+          <p:nvPr/>
+        </p:nvSpPr>
+        <p:spPr>
+          <a:xfrm>
+            <a:off x="6263640" y="3392424"/>
+            <a:ext cx="5349240" cy="548640"/>
+          </a:xfrm>
+          <a:prstGeom prst="roundRect">
+            <a:avLst>
+              <a:gd name="adj" fmla="val 8333"/>
+            </a:avLst>
+          </a:prstGeom>
+          <a:solidFill>
+            <a:srgbClr val="15171B"/>
+          </a:solidFill>
+          <a:ln w="12700">
+            <a:solidFill>
+              <a:srgbClr val="15171B"/>
+            </a:solidFill>
+            <a:prstDash val="solid"/>
+          </a:ln>
+        </p:spPr>
+      </p:sp>
+      <p:sp>
+        <p:nvSpPr>
+          <p:cNvPr id="42" name="Shape 40"/>
+          <p:cNvSpPr/>
+          <p:nvPr/>
+        </p:nvSpPr>
+        <p:spPr>
+          <a:xfrm>
+            <a:off x="6464808" y="3511296"/>
+            <a:ext cx="310896" cy="310896"/>
+          </a:xfrm>
+          <a:prstGeom prst="roundRect">
+            <a:avLst>
+              <a:gd name="adj" fmla="val 26471"/>
+            </a:avLst>
+          </a:prstGeom>
+          <a:solidFill>
+            <a:srgbClr val="3FB950"/>
+          </a:solidFill>
+          <a:ln w="12700">
+            <a:solidFill>
+              <a:srgbClr val="3FB950"/>
+            </a:solidFill>
+            <a:prstDash val="solid"/>
+          </a:ln>
+        </p:spPr>
+      </p:sp>
+      <p:sp>
+        <p:nvSpPr>
+          <p:cNvPr id="43" name="Text 41"/>
+          <p:cNvSpPr/>
+          <p:nvPr/>
+        </p:nvSpPr>
+        <p:spPr>
+          <a:xfrm>
+            <a:off x="6464808" y="3511296"/>
+            <a:ext cx="310896" cy="310896"/>
+          </a:xfrm>
+          <a:prstGeom prst="rect">
+            <a:avLst/>
+          </a:prstGeom>
+          <a:noFill/>
+          <a:ln/>
+        </p:spPr>
+        <p:txBody>
+          <a:bodyPr wrap="square" lIns="0" tIns="0" rIns="0" bIns="0" rtlCol="0" anchor="ctr"/>
+          <a:lstStyle/>
+          <a:p>
+            <a:pPr algn="ctr" indent="0" marL="0">
+              <a:buNone/>
+            </a:pPr>
+            <a:r>
+              <a:rPr lang="en-US" sz="1300" b="1" dirty="0">
+                <a:solidFill>
+                  <a:srgbClr val="FFFFFF"/>
+                </a:solidFill>
+                <a:latin typeface="Calibri" pitchFamily="34" charset="0"/>
+                <a:ea typeface="Calibri" pitchFamily="34" charset="-122"/>
+                <a:cs typeface="Calibri" pitchFamily="34" charset="-120"/>
+              </a:rPr>
+              <a:t>10</a:t>
+            </a:r>
+            <a:endParaRPr lang="en-US" sz="1300" dirty="0"/>
+          </a:p>
+        </p:txBody>
+      </p:sp>
+      <p:sp>
+        <p:nvSpPr>
+          <p:cNvPr id="44" name="Text 42"/>
+          <p:cNvSpPr/>
+          <p:nvPr/>
+        </p:nvSpPr>
+        <p:spPr>
+          <a:xfrm>
+            <a:off x="6940296" y="3529584"/>
+            <a:ext cx="4453128" cy="329184"/>
+          </a:xfrm>
+          <a:prstGeom prst="rect">
+            <a:avLst/>
+          </a:prstGeom>
+          <a:noFill/>
+          <a:ln/>
+        </p:spPr>
+        <p:txBody>
+          <a:bodyPr wrap="square" lIns="0" tIns="0" rIns="0" bIns="0" rtlCol="0" anchor="t"/>
+          <a:lstStyle/>
+          <a:p>
+            <a:pPr indent="0" marL="0">
+              <a:lnSpc>
+                <a:spcPts val="1200"/>
+              </a:lnSpc>
+              <a:buNone/>
+            </a:pPr>
+            <a:r>
+              <a:rPr lang="en-US" sz="1050" dirty="0">
+                <a:solidFill>
+                  <a:srgbClr val="B4B7BD"/>
+                </a:solidFill>
+                <a:latin typeface="Calibri" pitchFamily="34" charset="0"/>
+                <a:ea typeface="Calibri" pitchFamily="34" charset="-122"/>
+                <a:cs typeface="Calibri" pitchFamily="34" charset="-120"/>
+              </a:rPr>
+              <a:t>Scan marks only due, connected endpoints; re-run is a no-op</a:t>
+            </a:r>
+            <a:endParaRPr lang="en-US" sz="1050" dirty="0"/>
+          </a:p>
+        </p:txBody>
+      </p:sp>
+      <p:sp>
+        <p:nvSpPr>
+          <p:cNvPr id="45" name="Shape 43"/>
+          <p:cNvSpPr/>
+          <p:nvPr/>
+        </p:nvSpPr>
+        <p:spPr>
+          <a:xfrm>
+            <a:off x="6263640" y="4050792"/>
+            <a:ext cx="5349240" cy="548640"/>
+          </a:xfrm>
+          <a:prstGeom prst="roundRect">
+            <a:avLst>
+              <a:gd name="adj" fmla="val 8333"/>
+            </a:avLst>
+          </a:prstGeom>
+          <a:solidFill>
+            <a:srgbClr val="15171B"/>
+          </a:solidFill>
+          <a:ln w="12700">
+            <a:solidFill>
+              <a:srgbClr val="15171B"/>
+            </a:solidFill>
+            <a:prstDash val="solid"/>
+          </a:ln>
+        </p:spPr>
+      </p:sp>
+      <p:sp>
+        <p:nvSpPr>
+          <p:cNvPr id="46" name="Shape 44"/>
+          <p:cNvSpPr/>
+          <p:nvPr/>
+        </p:nvSpPr>
+        <p:spPr>
+          <a:xfrm>
+            <a:off x="6464808" y="4169664"/>
+            <a:ext cx="310896" cy="310896"/>
+          </a:xfrm>
+          <a:prstGeom prst="roundRect">
+            <a:avLst>
+              <a:gd name="adj" fmla="val 26471"/>
+            </a:avLst>
+          </a:prstGeom>
+          <a:solidFill>
+            <a:srgbClr val="3FB950"/>
+          </a:solidFill>
+          <a:ln w="12700">
+            <a:solidFill>
+              <a:srgbClr val="3FB950"/>
+            </a:solidFill>
+            <a:prstDash val="solid"/>
+          </a:ln>
+        </p:spPr>
+      </p:sp>
+      <p:sp>
+        <p:nvSpPr>
+          <p:cNvPr id="47" name="Text 45"/>
+          <p:cNvSpPr/>
+          <p:nvPr/>
+        </p:nvSpPr>
+        <p:spPr>
+          <a:xfrm>
+            <a:off x="6464808" y="4169664"/>
+            <a:ext cx="310896" cy="310896"/>
+          </a:xfrm>
+          <a:prstGeom prst="rect">
+            <a:avLst/>
+          </a:prstGeom>
+          <a:noFill/>
+          <a:ln/>
+        </p:spPr>
+        <p:txBody>
+          <a:bodyPr wrap="square" lIns="0" tIns="0" rIns="0" bIns="0" rtlCol="0" anchor="ctr"/>
+          <a:lstStyle/>
+          <a:p>
+            <a:pPr algn="ctr" indent="0" marL="0">
+              <a:buNone/>
+            </a:pPr>
+            <a:r>
+              <a:rPr lang="en-US" sz="1300" b="1" dirty="0">
+                <a:solidFill>
+                  <a:srgbClr val="FFFFFF"/>
+                </a:solidFill>
+                <a:latin typeface="Calibri" pitchFamily="34" charset="0"/>
+                <a:ea typeface="Calibri" pitchFamily="34" charset="-122"/>
+                <a:cs typeface="Calibri" pitchFamily="34" charset="-120"/>
+              </a:rPr>
+              <a:t>11</a:t>
+            </a:r>
+            <a:endParaRPr lang="en-US" sz="1300" dirty="0"/>
+          </a:p>
+        </p:txBody>
+      </p:sp>
+      <p:sp>
+        <p:nvSpPr>
+          <p:cNvPr id="48" name="Text 46"/>
+          <p:cNvSpPr/>
+          <p:nvPr/>
+        </p:nvSpPr>
+        <p:spPr>
+          <a:xfrm>
+            <a:off x="6940296" y="4187952"/>
+            <a:ext cx="4453128" cy="329184"/>
+          </a:xfrm>
+          <a:prstGeom prst="rect">
+            <a:avLst/>
+          </a:prstGeom>
+          <a:noFill/>
+          <a:ln/>
+        </p:spPr>
+        <p:txBody>
+          <a:bodyPr wrap="square" lIns="0" tIns="0" rIns="0" bIns="0" rtlCol="0" anchor="t"/>
+          <a:lstStyle/>
+          <a:p>
+            <a:pPr indent="0" marL="0">
+              <a:lnSpc>
+                <a:spcPts val="1200"/>
+              </a:lnSpc>
+              <a:buNone/>
+            </a:pPr>
+            <a:r>
+              <a:rPr lang="en-US" sz="1050" dirty="0">
+                <a:solidFill>
+                  <a:srgbClr val="B4B7BD"/>
+                </a:solidFill>
+                <a:latin typeface="Calibri" pitchFamily="34" charset="0"/>
+                <a:ea typeface="Calibri" pitchFamily="34" charset="-122"/>
+                <a:cs typeface="Calibri" pitchFamily="34" charset="-120"/>
+              </a:rPr>
+              <a:t>Library queries run and return results</a:t>
+            </a:r>
+            <a:endParaRPr lang="en-US" sz="1050" dirty="0"/>
+          </a:p>
+        </p:txBody>
+      </p:sp>
+      <p:sp>
+        <p:nvSpPr>
+          <p:cNvPr id="49" name="Shape 47"/>
+          <p:cNvSpPr/>
+          <p:nvPr/>
+        </p:nvSpPr>
+        <p:spPr>
+          <a:xfrm>
+            <a:off x="6263640" y="4709160"/>
+            <a:ext cx="5349240" cy="548640"/>
+          </a:xfrm>
+          <a:prstGeom prst="roundRect">
+            <a:avLst>
+              <a:gd name="adj" fmla="val 8333"/>
+            </a:avLst>
+          </a:prstGeom>
+          <a:solidFill>
+            <a:srgbClr val="15171B"/>
+          </a:solidFill>
+          <a:ln w="12700">
+            <a:solidFill>
+              <a:srgbClr val="15171B"/>
+            </a:solidFill>
+            <a:prstDash val="solid"/>
+          </a:ln>
+        </p:spPr>
+      </p:sp>
+      <p:sp>
+        <p:nvSpPr>
+          <p:cNvPr id="50" name="Shape 48"/>
+          <p:cNvSpPr/>
+          <p:nvPr/>
+        </p:nvSpPr>
+        <p:spPr>
+          <a:xfrm>
+            <a:off x="6464808" y="4828032"/>
+            <a:ext cx="310896" cy="310896"/>
+          </a:xfrm>
+          <a:prstGeom prst="roundRect">
+            <a:avLst>
+              <a:gd name="adj" fmla="val 26471"/>
+            </a:avLst>
+          </a:prstGeom>
+          <a:solidFill>
+            <a:srgbClr val="3FB950"/>
+          </a:solidFill>
+          <a:ln w="12700">
+            <a:solidFill>
+              <a:srgbClr val="3FB950"/>
+            </a:solidFill>
+            <a:prstDash val="solid"/>
+          </a:ln>
+        </p:spPr>
+      </p:sp>
+      <p:sp>
+        <p:nvSpPr>
+          <p:cNvPr id="51" name="Text 49"/>
+          <p:cNvSpPr/>
+          <p:nvPr/>
+        </p:nvSpPr>
+        <p:spPr>
+          <a:xfrm>
+            <a:off x="6464808" y="4828032"/>
+            <a:ext cx="310896" cy="310896"/>
+          </a:xfrm>
+          <a:prstGeom prst="rect">
+            <a:avLst/>
+          </a:prstGeom>
+          <a:noFill/>
+          <a:ln/>
+        </p:spPr>
+        <p:txBody>
+          <a:bodyPr wrap="square" lIns="0" tIns="0" rIns="0" bIns="0" rtlCol="0" anchor="ctr"/>
+          <a:lstStyle/>
+          <a:p>
+            <a:pPr algn="ctr" indent="0" marL="0">
+              <a:buNone/>
+            </a:pPr>
+            <a:r>
+              <a:rPr lang="en-US" sz="1300" b="1" dirty="0">
+                <a:solidFill>
+                  <a:srgbClr val="FFFFFF"/>
+                </a:solidFill>
+                <a:latin typeface="Calibri" pitchFamily="34" charset="0"/>
+                <a:ea typeface="Calibri" pitchFamily="34" charset="-122"/>
+                <a:cs typeface="Calibri" pitchFamily="34" charset="-120"/>
+              </a:rPr>
+              <a:t>12</a:t>
+            </a:r>
+            <a:endParaRPr lang="en-US" sz="1300" dirty="0"/>
+          </a:p>
+        </p:txBody>
+      </p:sp>
+      <p:sp>
+        <p:nvSpPr>
+          <p:cNvPr id="52" name="Text 50"/>
+          <p:cNvSpPr/>
+          <p:nvPr/>
+        </p:nvSpPr>
+        <p:spPr>
+          <a:xfrm>
+            <a:off x="6940296" y="4846320"/>
+            <a:ext cx="4453128" cy="329184"/>
+          </a:xfrm>
+          <a:prstGeom prst="rect">
+            <a:avLst/>
+          </a:prstGeom>
+          <a:noFill/>
+          <a:ln/>
+        </p:spPr>
+        <p:txBody>
+          <a:bodyPr wrap="square" lIns="0" tIns="0" rIns="0" bIns="0" rtlCol="0" anchor="t"/>
+          <a:lstStyle/>
+          <a:p>
+            <a:pPr indent="0" marL="0">
+              <a:lnSpc>
+                <a:spcPts val="1200"/>
+              </a:lnSpc>
+              <a:buNone/>
+            </a:pPr>
+            <a:r>
+              <a:rPr lang="en-US" sz="1050" dirty="0">
+                <a:solidFill>
+                  <a:srgbClr val="B4B7BD"/>
+                </a:solidFill>
+                <a:latin typeface="Calibri" pitchFamily="34" charset="0"/>
+                <a:ea typeface="Calibri" pitchFamily="34" charset="-122"/>
+                <a:cs typeface="Calibri" pitchFamily="34" charset="-120"/>
+              </a:rPr>
+              <a:t>Simulated counts match the summary exactly</a:t>
+            </a:r>
+            <a:endParaRPr lang="en-US" sz="1050" dirty="0"/>
+          </a:p>
+        </p:txBody>
+      </p:sp>
+      <p:sp>
+        <p:nvSpPr>
+          <p:cNvPr id="53" name="Shape 51"/>
+          <p:cNvSpPr/>
+          <p:nvPr/>
+        </p:nvSpPr>
+        <p:spPr>
+          <a:xfrm>
+            <a:off x="548640" y="5440680"/>
+            <a:ext cx="11064240" cy="685800"/>
+          </a:xfrm>
+          <a:prstGeom prst="roundRect">
+            <a:avLst>
+              <a:gd name="adj" fmla="val 6667"/>
+            </a:avLst>
+          </a:prstGeom>
+          <a:solidFill>
+            <a:srgbClr val="1C2026"/>
+          </a:solidFill>
+          <a:ln w="12700">
+            <a:solidFill>
+              <a:srgbClr val="1C2026"/>
+            </a:solidFill>
+            <a:prstDash val="solid"/>
+          </a:ln>
+        </p:spPr>
+      </p:sp>
+      <p:sp>
+        <p:nvSpPr>
+          <p:cNvPr id="54" name="Text 52"/>
+          <p:cNvSpPr/>
+          <p:nvPr/>
+        </p:nvSpPr>
+        <p:spPr>
+          <a:xfrm>
+            <a:off x="859536" y="5623560"/>
+            <a:ext cx="7315200" cy="292608"/>
+          </a:xfrm>
+          <a:prstGeom prst="rect">
+            <a:avLst/>
+          </a:prstGeom>
+          <a:noFill/>
+          <a:ln/>
+        </p:spPr>
+        <p:txBody>
+          <a:bodyPr wrap="square" lIns="0" tIns="0" rIns="0" bIns="0" rtlCol="0" anchor="t"/>
+          <a:lstStyle/>
+          <a:p>
+            <a:pPr indent="0" marL="0">
+              <a:buNone/>
+            </a:pPr>
+            <a:r>
+              <a:rPr lang="en-US" sz="1300" b="1" i="1" dirty="0">
+                <a:solidFill>
+                  <a:srgbClr val="3FB950"/>
+                </a:solidFill>
+                <a:latin typeface="Calibri" pitchFamily="34" charset="0"/>
+                <a:ea typeface="Calibri" pitchFamily="34" charset="-122"/>
+                <a:cs typeface="Calibri" pitchFamily="34" charset="-120"/>
+              </a:rPr>
+              <a:t>All twelve green — the pack is ready for production use.</a:t>
+            </a:r>
+            <a:endParaRPr lang="en-US" sz="1300" dirty="0"/>
+          </a:p>
+        </p:txBody>
+      </p:sp>
+      <p:sp>
+        <p:nvSpPr>
+          <p:cNvPr id="55" name="Text 53"/>
+          <p:cNvSpPr/>
+          <p:nvPr/>
+        </p:nvSpPr>
+        <p:spPr>
+          <a:xfrm>
+            <a:off x="548640" y="6263640"/>
+            <a:ext cx="11064240" cy="274320"/>
+          </a:xfrm>
+          <a:prstGeom prst="rect">
+            <a:avLst/>
+          </a:prstGeom>
+          <a:noFill/>
+          <a:ln/>
+        </p:spPr>
+        <p:txBody>
+          <a:bodyPr wrap="square" lIns="0" tIns="0" rIns="0" bIns="0" rtlCol="0" anchor="t"/>
+          <a:lstStyle/>
+          <a:p>
+            <a:pPr indent="0" marL="0">
+              <a:buNone/>
+            </a:pPr>
+            <a:r>
+              <a:rPr lang="en-US" sz="1050" dirty="0">
+                <a:solidFill>
+                  <a:srgbClr val="6E747E"/>
+                </a:solidFill>
+                <a:latin typeface="Calibri" pitchFamily="34" charset="0"/>
+                <a:ea typeface="Calibri" pitchFamily="34" charset="-122"/>
+                <a:cs typeface="Calibri" pitchFamily="34" charset="-120"/>
+              </a:rPr>
+              <a:t>Full detail in KOI_Integration_Customer_Guide_v1.4.0. Diagnostics in the troubleshooting guide.</a:t>
+            </a:r>
+            <a:endParaRPr lang="en-US" sz="1050" dirty="0"/>
+          </a:p>
+        </p:txBody>
+      </p:sp>
+    </p:spTree>
+  </p:cSld>
+  <p:clrMapOvr>
+    <a:masterClrMapping/>
+  </p:clrMapOvr>
+</p:sld>
+</file>
+
 <file path=ppt/slides/slide3.xml><?xml version="1.0" encoding="utf-8"?>
 <p:sld xmlns:a="http://schemas.openxmlformats.org/drawingml/2006/main" xmlns:r="http://schemas.openxmlformats.org/officeDocument/2006/relationships" xmlns:p="http://schemas.openxmlformats.org/presentationml/2006/main">
   <p:cSld name="Slide 3">
@@ -21479,7 +22272,7 @@
                 <a:ea typeface="Calibri" pitchFamily="34" charset="-122"/>
                 <a:cs typeface="Calibri" pitchFamily="34" charset="-120"/>
               </a:rPr>
-              <a:t>9  Refresh the tracker</a:t>
+              <a:t>prep  What to put in place</a:t>
             </a:r>
             <a:endParaRPr lang="en-US" sz="1100" dirty="0"/>
           </a:p>
@@ -21518,6 +22311,45 @@
                 <a:ea typeface="Calibri" pitchFamily="34" charset="-122"/>
                 <a:cs typeface="Calibri" pitchFamily="34" charset="-120"/>
               </a:rPr>
+              <a:t>9  Refresh the tracker</a:t>
+            </a:r>
+            <a:endParaRPr lang="en-US" sz="1100" dirty="0"/>
+          </a:p>
+        </p:txBody>
+      </p:sp>
+      <p:sp>
+        <p:nvSpPr>
+          <p:cNvPr id="20" name="Text 18"/>
+          <p:cNvSpPr/>
+          <p:nvPr/>
+        </p:nvSpPr>
+        <p:spPr>
+          <a:xfrm>
+            <a:off x="6236208" y="3895344"/>
+            <a:ext cx="2606040" cy="256032"/>
+          </a:xfrm>
+          <a:prstGeom prst="rect">
+            <a:avLst/>
+          </a:prstGeom>
+          <a:noFill/>
+          <a:ln/>
+        </p:spPr>
+        <p:txBody>
+          <a:bodyPr wrap="square" lIns="0" tIns="0" rIns="0" bIns="0" rtlCol="0" anchor="t"/>
+          <a:lstStyle/>
+          <a:p>
+            <a:pPr indent="0" marL="0">
+              <a:buNone/>
+            </a:pPr>
+            <a:r>
+              <a:rPr lang="en-US" sz="1100" dirty="0">
+                <a:solidFill>
+                  <a:srgbClr val="B4B7BD"/>
+                </a:solidFill>
+                <a:latin typeface="Calibri" pitchFamily="34" charset="0"/>
+                <a:ea typeface="Calibri" pitchFamily="34" charset="-122"/>
+                <a:cs typeface="Calibri" pitchFamily="34" charset="-120"/>
+              </a:rPr>
               <a:t>10  Scan due endpoints</a:t>
             </a:r>
             <a:endParaRPr lang="en-US" sz="1100" dirty="0"/>
@@ -21526,7 +22358,7 @@
       </p:sp>
       <p:sp>
         <p:nvSpPr>
-          <p:cNvPr id="20" name="Shape 18"/>
+          <p:cNvPr id="21" name="Shape 19"/>
           <p:cNvSpPr/>
           <p:nvPr/>
         </p:nvSpPr>
@@ -21553,7 +22385,7 @@
       </p:sp>
       <p:sp>
         <p:nvSpPr>
-          <p:cNvPr id="21" name="Text 19"/>
+          <p:cNvPr id="22" name="Text 20"/>
           <p:cNvSpPr/>
           <p:nvPr/>
         </p:nvSpPr>
@@ -21592,7 +22424,7 @@
       </p:sp>
       <p:sp>
         <p:nvSpPr>
-          <p:cNvPr id="22" name="Text 20"/>
+          <p:cNvPr id="23" name="Text 21"/>
           <p:cNvSpPr/>
           <p:nvPr/>
         </p:nvSpPr>
@@ -21631,7 +22463,7 @@
       </p:sp>
       <p:sp>
         <p:nvSpPr>
-          <p:cNvPr id="23" name="Text 21"/>
+          <p:cNvPr id="24" name="Text 22"/>
           <p:cNvSpPr/>
           <p:nvPr/>
         </p:nvSpPr>
@@ -21670,7 +22502,7 @@
       </p:sp>
       <p:sp>
         <p:nvSpPr>
-          <p:cNvPr id="24" name="Shape 22"/>
+          <p:cNvPr id="25" name="Shape 23"/>
           <p:cNvSpPr/>
           <p:nvPr/>
         </p:nvSpPr>
@@ -21697,7 +22529,7 @@
       </p:sp>
       <p:sp>
         <p:nvSpPr>
-          <p:cNvPr id="25" name="Shape 23"/>
+          <p:cNvPr id="26" name="Shape 24"/>
           <p:cNvSpPr/>
           <p:nvPr/>
         </p:nvSpPr>
@@ -21724,7 +22556,7 @@
       </p:sp>
       <p:sp>
         <p:nvSpPr>
-          <p:cNvPr id="26" name="Text 24"/>
+          <p:cNvPr id="27" name="Text 25"/>
           <p:cNvSpPr/>
           <p:nvPr/>
         </p:nvSpPr>
@@ -21763,7 +22595,7 @@
       </p:sp>
       <p:sp>
         <p:nvSpPr>
-          <p:cNvPr id="27" name="Text 25"/>
+          <p:cNvPr id="28" name="Text 26"/>
           <p:cNvSpPr/>
           <p:nvPr/>
         </p:nvSpPr>

--- a/docs/KOI_Content_Pack_Test_Guide.pptx
+++ b/docs/KOI_Content_Pack_Test_Guide.pptx
@@ -9544,7 +9544,7 @@
                 <a:ea typeface="Calibri" pitchFamily="34" charset="-122"/>
                 <a:cs typeface="Calibri" pitchFamily="34" charset="-120"/>
               </a:rPr>
-              <a:t>KoiScanTracker — an automation, not a playbook. Ours, and different from the KOI deployment script opposite. For manual upload use dist/automation-KoiScanTracker.yml (one file).</a:t>
+              <a:t>KoiScanTracker — an automation, not a playbook. Ours, and different from the KOI deployment script opposite. Manual upload takes exactly one file: dist/automation-KoiScanTracker.yml</a:t>
             </a:r>
             <a:endParaRPr lang="en-US" sz="1050" dirty="0"/>
           </a:p>
@@ -10135,7 +10135,7 @@
         <p:spPr>
           <a:xfrm>
             <a:off x="1152144" y="5394960"/>
-            <a:ext cx="10149840" cy="438912"/>
+            <a:ext cx="10149840" cy="246888"/>
           </a:xfrm>
           <a:prstGeom prst="rect">
             <a:avLst/>
@@ -10162,7 +10162,7 @@
                 <a:ea typeface="Calibri" pitchFamily="34" charset="-122"/>
                 <a:cs typeface="Calibri" pitchFamily="34" charset="-120"/>
               </a:rPr>
-              <a:t>Automation → Scripts → Import for KoiScanTracker — upload dist/automation-KoiScanTracker.yml. One file, code already inside; do not upload the two files under Scripts/.</a:t>
+              <a:t>Automation → Scripts → Import → dist/automation-KoiScanTracker.yml. Open it first and you will see the Python inside it.</a:t>
             </a:r>
             <a:endParaRPr lang="en-US" sz="1150" dirty="0"/>
           </a:p>
@@ -10176,7 +10176,7 @@
         </p:nvSpPr>
         <p:spPr>
           <a:xfrm>
-            <a:off x="859536" y="5911596"/>
+            <a:off x="859536" y="5724144"/>
             <a:ext cx="219456" cy="256032"/>
           </a:xfrm>
           <a:prstGeom prst="rect">
@@ -10215,7 +10215,7 @@
         </p:nvSpPr>
         <p:spPr>
           <a:xfrm>
-            <a:off x="1152144" y="5911596"/>
+            <a:off x="1152144" y="5724144"/>
             <a:ext cx="10149840" cy="246888"/>
           </a:xfrm>
           <a:prstGeom prst="rect">
@@ -10243,6 +10243,87 @@
                 <a:ea typeface="Calibri" pitchFamily="34" charset="-122"/>
                 <a:cs typeface="Calibri" pitchFamily="34" charset="-120"/>
               </a:rPr>
+              <a:t>Not Scripts/KoiScanTracker/KoiScanTracker.yml — that file reads script: '-' on purpose and would import an empty automation.</a:t>
+            </a:r>
+            <a:endParaRPr lang="en-US" sz="1150" dirty="0"/>
+          </a:p>
+        </p:txBody>
+      </p:sp>
+      <p:sp>
+        <p:nvSpPr>
+          <p:cNvPr id="32" name="Text 30"/>
+          <p:cNvSpPr/>
+          <p:nvPr/>
+        </p:nvSpPr>
+        <p:spPr>
+          <a:xfrm>
+            <a:off x="859536" y="6053328"/>
+            <a:ext cx="219456" cy="256032"/>
+          </a:xfrm>
+          <a:prstGeom prst="rect">
+            <a:avLst/>
+          </a:prstGeom>
+          <a:noFill/>
+          <a:ln/>
+        </p:spPr>
+        <p:txBody>
+          <a:bodyPr wrap="square" lIns="0" tIns="0" rIns="0" bIns="0" rtlCol="0" anchor="t"/>
+          <a:lstStyle/>
+          <a:p>
+            <a:pPr indent="0" marL="0">
+              <a:buNone/>
+            </a:pPr>
+            <a:r>
+              <a:rPr lang="en-US" sz="1150" b="1" dirty="0">
+                <a:solidFill>
+                  <a:srgbClr val="E8551F"/>
+                </a:solidFill>
+                <a:latin typeface="Calibri" pitchFamily="34" charset="0"/>
+                <a:ea typeface="Calibri" pitchFamily="34" charset="-122"/>
+                <a:cs typeface="Calibri" pitchFamily="34" charset="-120"/>
+              </a:rPr>
+              <a:t>5</a:t>
+            </a:r>
+            <a:endParaRPr lang="en-US" sz="1150" dirty="0"/>
+          </a:p>
+        </p:txBody>
+      </p:sp>
+      <p:sp>
+        <p:nvSpPr>
+          <p:cNvPr id="33" name="Text 31"/>
+          <p:cNvSpPr/>
+          <p:nvPr/>
+        </p:nvSpPr>
+        <p:spPr>
+          <a:xfrm>
+            <a:off x="1152144" y="6053328"/>
+            <a:ext cx="10149840" cy="246888"/>
+          </a:xfrm>
+          <a:prstGeom prst="rect">
+            <a:avLst/>
+          </a:prstGeom>
+          <a:noFill/>
+          <a:ln/>
+        </p:spPr>
+        <p:txBody>
+          <a:bodyPr wrap="square" lIns="0" tIns="0" rIns="0" bIns="0" rtlCol="0" anchor="t"/>
+          <a:lstStyle/>
+          <a:p>
+            <a:pPr indent="0" marL="0">
+              <a:lnSpc>
+                <a:spcPts val="1500"/>
+              </a:lnSpc>
+              <a:buNone/>
+            </a:pPr>
+            <a:r>
+              <a:rPr lang="en-US" sz="1150" dirty="0">
+                <a:solidFill>
+                  <a:srgbClr val="B4B7BD"/>
+                </a:solidFill>
+                <a:latin typeface="Calibri" pitchFamily="34" charset="0"/>
+                <a:ea typeface="Calibri" pitchFamily="34" charset="-122"/>
+                <a:cs typeface="Calibri" pitchFamily="34" charset="-120"/>
+              </a:rPr>
               <a:t>Settings → Object Setup → Lists → New List, type JSON, named exactly Koi Script Runner. Paste the block from Lists/README.md.</a:t>
             </a:r>
             <a:endParaRPr lang="en-US" sz="1150" dirty="0"/>
@@ -10251,13 +10332,13 @@
       </p:sp>
       <p:sp>
         <p:nvSpPr>
-          <p:cNvPr id="32" name="Text 30"/>
-          <p:cNvSpPr/>
-          <p:nvPr/>
-        </p:nvSpPr>
-        <p:spPr>
-          <a:xfrm>
-            <a:off x="859536" y="6240780"/>
+          <p:cNvPr id="34" name="Text 32"/>
+          <p:cNvSpPr/>
+          <p:nvPr/>
+        </p:nvSpPr>
+        <p:spPr>
+          <a:xfrm>
+            <a:off x="859536" y="6382512"/>
             <a:ext cx="219456" cy="256032"/>
           </a:xfrm>
           <a:prstGeom prst="rect">
@@ -10282,7 +10363,7 @@
                 <a:ea typeface="Calibri" pitchFamily="34" charset="-122"/>
                 <a:cs typeface="Calibri" pitchFamily="34" charset="-120"/>
               </a:rPr>
-              <a:t>5</a:t>
+              <a:t>6</a:t>
             </a:r>
             <a:endParaRPr lang="en-US" sz="1150" dirty="0"/>
           </a:p>
@@ -10290,13 +10371,13 @@
       </p:sp>
       <p:sp>
         <p:nvSpPr>
-          <p:cNvPr id="33" name="Text 31"/>
-          <p:cNvSpPr/>
-          <p:nvPr/>
-        </p:nvSpPr>
-        <p:spPr>
-          <a:xfrm>
-            <a:off x="1152144" y="6240780"/>
+          <p:cNvPr id="35" name="Text 33"/>
+          <p:cNvSpPr/>
+          <p:nvPr/>
+        </p:nvSpPr>
+        <p:spPr>
+          <a:xfrm>
+            <a:off x="1152144" y="6382512"/>
             <a:ext cx="10149840" cy="246888"/>
           </a:xfrm>
           <a:prstGeom prst="rect">
@@ -14577,7 +14658,7 @@
                 <a:ea typeface="Calibri" pitchFamily="34" charset="-122"/>
                 <a:cs typeface="Calibri" pitchFamily="34" charset="-120"/>
               </a:rPr>
-              <a:t>The KoiSimulateEvents automation imported (ships in TestTools)</a:t>
+              <a:t>Automation → Scripts → Import → TestTools/KoiSimulateEvents/automation-KoiSimulateEvents.yml (one file, code inside)</a:t>
             </a:r>
             <a:endParaRPr lang="en-US" sz="1000" dirty="0"/>
           </a:p>

--- a/docs/KOI_Content_Pack_Test_Guide.pptx
+++ b/docs/KOI_Content_Pack_Test_Guide.pptx
@@ -9544,7 +9544,7 @@
                 <a:ea typeface="Calibri" pitchFamily="34" charset="-122"/>
                 <a:cs typeface="Calibri" pitchFamily="34" charset="-120"/>
               </a:rPr>
-              <a:t>KoiScanTracker — an automation, not a playbook. Ours, and different from the KOI deployment script opposite. Manual upload takes exactly one file: dist/automation-KoiScanTracker.yml</a:t>
+              <a:t>KoiScanTracker — an automation, not a playbook, and separate from the KOI deployment script opposite. Manual import takes one file: dist/automation-KoiScanTracker.yml</a:t>
             </a:r>
             <a:endParaRPr lang="en-US" sz="1050" dirty="0"/>
           </a:p>
@@ -10162,7 +10162,7 @@
                 <a:ea typeface="Calibri" pitchFamily="34" charset="-122"/>
                 <a:cs typeface="Calibri" pitchFamily="34" charset="-120"/>
               </a:rPr>
-              <a:t>Automation → Scripts → Import → dist/automation-KoiScanTracker.yml. Open it first and you will see the Python inside it.</a:t>
+              <a:t>Automation → Scripts → Import → dist/automation-KoiScanTracker.yml</a:t>
             </a:r>
             <a:endParaRPr lang="en-US" sz="1150" dirty="0"/>
           </a:p>
@@ -10243,7 +10243,7 @@
                 <a:ea typeface="Calibri" pitchFamily="34" charset="-122"/>
                 <a:cs typeface="Calibri" pitchFamily="34" charset="-120"/>
               </a:rPr>
-              <a:t>Not Scripts/KoiScanTracker/KoiScanTracker.yml — that file reads script: '-' on purpose and would import an empty automation.</a:t>
+              <a:t>Settings → Object Setup → Lists → New List, type JSON, named exactly Koi Script Runner. Paste the block from Lists/README.md.</a:t>
             </a:r>
             <a:endParaRPr lang="en-US" sz="1150" dirty="0"/>
           </a:p>
@@ -10297,87 +10297,6 @@
         <p:spPr>
           <a:xfrm>
             <a:off x="1152144" y="6053328"/>
-            <a:ext cx="10149840" cy="246888"/>
-          </a:xfrm>
-          <a:prstGeom prst="rect">
-            <a:avLst/>
-          </a:prstGeom>
-          <a:noFill/>
-          <a:ln/>
-        </p:spPr>
-        <p:txBody>
-          <a:bodyPr wrap="square" lIns="0" tIns="0" rIns="0" bIns="0" rtlCol="0" anchor="t"/>
-          <a:lstStyle/>
-          <a:p>
-            <a:pPr indent="0" marL="0">
-              <a:lnSpc>
-                <a:spcPts val="1500"/>
-              </a:lnSpc>
-              <a:buNone/>
-            </a:pPr>
-            <a:r>
-              <a:rPr lang="en-US" sz="1150" dirty="0">
-                <a:solidFill>
-                  <a:srgbClr val="B4B7BD"/>
-                </a:solidFill>
-                <a:latin typeface="Calibri" pitchFamily="34" charset="0"/>
-                <a:ea typeface="Calibri" pitchFamily="34" charset="-122"/>
-                <a:cs typeface="Calibri" pitchFamily="34" charset="-120"/>
-              </a:rPr>
-              <a:t>Settings → Object Setup → Lists → New List, type JSON, named exactly Koi Script Runner. Paste the block from Lists/README.md.</a:t>
-            </a:r>
-            <a:endParaRPr lang="en-US" sz="1150" dirty="0"/>
-          </a:p>
-        </p:txBody>
-      </p:sp>
-      <p:sp>
-        <p:nvSpPr>
-          <p:cNvPr id="34" name="Text 32"/>
-          <p:cNvSpPr/>
-          <p:nvPr/>
-        </p:nvSpPr>
-        <p:spPr>
-          <a:xfrm>
-            <a:off x="859536" y="6382512"/>
-            <a:ext cx="219456" cy="256032"/>
-          </a:xfrm>
-          <a:prstGeom prst="rect">
-            <a:avLst/>
-          </a:prstGeom>
-          <a:noFill/>
-          <a:ln/>
-        </p:spPr>
-        <p:txBody>
-          <a:bodyPr wrap="square" lIns="0" tIns="0" rIns="0" bIns="0" rtlCol="0" anchor="t"/>
-          <a:lstStyle/>
-          <a:p>
-            <a:pPr indent="0" marL="0">
-              <a:buNone/>
-            </a:pPr>
-            <a:r>
-              <a:rPr lang="en-US" sz="1150" b="1" dirty="0">
-                <a:solidFill>
-                  <a:srgbClr val="E8551F"/>
-                </a:solidFill>
-                <a:latin typeface="Calibri" pitchFamily="34" charset="0"/>
-                <a:ea typeface="Calibri" pitchFamily="34" charset="-122"/>
-                <a:cs typeface="Calibri" pitchFamily="34" charset="-120"/>
-              </a:rPr>
-              <a:t>6</a:t>
-            </a:r>
-            <a:endParaRPr lang="en-US" sz="1150" dirty="0"/>
-          </a:p>
-        </p:txBody>
-      </p:sp>
-      <p:sp>
-        <p:nvSpPr>
-          <p:cNvPr id="35" name="Text 33"/>
-          <p:cNvSpPr/>
-          <p:nvPr/>
-        </p:nvSpPr>
-        <p:spPr>
-          <a:xfrm>
-            <a:off x="1152144" y="6382512"/>
             <a:ext cx="10149840" cy="246888"/>
           </a:xfrm>
           <a:prstGeom prst="rect">
